--- a/ground-vehicle/docs/courses/beginner-ps3/l5_maneuvers_with_lights.pptx
+++ b/ground-vehicle/docs/courses/beginner-ps3/l5_maneuvers_with_lights.pptx
@@ -27,6 +27,7 @@
     <p:sldId id="275" r:id="rId26"/>
     <p:sldId id="276" r:id="rId27"/>
     <p:sldId id="277" r:id="rId28"/>
+    <p:sldId id="278" r:id="rId29"/>
   </p:sldIdLst>
   <p:sldSz cx="12191695" cy="6858000" type="screen4x3"/>
   <p:notesSz cx="6858000" cy="9144000"/>
@@ -3153,267 +3154,9 @@
           </a:p>
         </p:txBody>
       </p:sp>
-      <p:sp>
-        <p:nvSpPr>
-          <p:cNvPr id="3" name="TextBox 2"/>
-          <p:cNvSpPr txBox="1"/>
-          <p:nvPr/>
-        </p:nvSpPr>
-        <p:spPr>
-          <a:xfrm>
-            <a:off x="502920" y="1051560"/>
-            <a:ext cx="6492240" cy="365760"/>
-          </a:xfrm>
-          <a:prstGeom prst="rect">
-            <a:avLst/>
-          </a:prstGeom>
-          <a:noFill/>
-        </p:spPr>
-        <p:txBody>
-          <a:bodyPr wrap="square" lIns="0" tIns="0" rIns="0" bIns="0">
-            <a:spAutoFit/>
-          </a:bodyPr>
-          <a:lstStyle/>
-          <a:p>
-            <a:pPr algn="l">
-              <a:lnSpc>
-                <a:spcPct val="100000"/>
-              </a:lnSpc>
-              <a:spcAft>
-                <a:spcPts val="0"/>
-              </a:spcAft>
-              <a:defRPr sz="1600" b="1">
-                <a:solidFill>
-                  <a:srgbClr val="0E7C86"/>
-                </a:solidFill>
-                <a:latin typeface="Calibri"/>
-              </a:defRPr>
-            </a:pPr>
-            <a:r>
-              <a:rPr sz="1600" b="1">
-                <a:solidFill>
-                  <a:srgbClr val="0E7C86"/>
-                </a:solidFill>
-                <a:latin typeface="Calibri"/>
-              </a:rPr>
-              <a:t>LESSON 5</a:t>
-            </a:r>
-          </a:p>
-        </p:txBody>
-      </p:sp>
-      <p:sp>
-        <p:nvSpPr>
-          <p:cNvPr id="4" name="TextBox 3"/>
-          <p:cNvSpPr txBox="1"/>
-          <p:nvPr/>
-        </p:nvSpPr>
-        <p:spPr>
-          <a:xfrm>
-            <a:off x="502920" y="1481328"/>
-            <a:ext cx="6492240" cy="1554480"/>
-          </a:xfrm>
-          <a:prstGeom prst="rect">
-            <a:avLst/>
-          </a:prstGeom>
-          <a:noFill/>
-        </p:spPr>
-        <p:txBody>
-          <a:bodyPr wrap="square" lIns="0" tIns="0" rIns="0" bIns="0">
-            <a:spAutoFit/>
-          </a:bodyPr>
-          <a:lstStyle/>
-          <a:p>
-            <a:pPr algn="l">
-              <a:lnSpc>
-                <a:spcPct val="95000"/>
-              </a:lnSpc>
-              <a:spcAft>
-                <a:spcPts val="0"/>
-              </a:spcAft>
-              <a:defRPr sz="4000" b="1">
-                <a:solidFill>
-                  <a:srgbClr val="1F3A5F"/>
-                </a:solidFill>
-                <a:latin typeface="Calibri"/>
-              </a:defRPr>
-            </a:pPr>
-            <a:r>
-              <a:rPr sz="4000" b="1">
-                <a:solidFill>
-                  <a:srgbClr val="1F3A5F"/>
-                </a:solidFill>
-                <a:latin typeface="Calibri"/>
-              </a:rPr>
-              <a:t>Maneuvers with Lights</a:t>
-            </a:r>
-          </a:p>
-        </p:txBody>
-      </p:sp>
-      <p:sp>
-        <p:nvSpPr>
-          <p:cNvPr id="5" name="TextBox 4"/>
-          <p:cNvSpPr txBox="1"/>
-          <p:nvPr/>
-        </p:nvSpPr>
-        <p:spPr>
-          <a:xfrm>
-            <a:off x="502920" y="3154680"/>
-            <a:ext cx="6492240" cy="960120"/>
-          </a:xfrm>
-          <a:prstGeom prst="rect">
-            <a:avLst/>
-          </a:prstGeom>
-          <a:noFill/>
-        </p:spPr>
-        <p:txBody>
-          <a:bodyPr wrap="square" lIns="0" tIns="0" rIns="0" bIns="0">
-            <a:spAutoFit/>
-          </a:bodyPr>
-          <a:lstStyle/>
-          <a:p>
-            <a:pPr algn="l">
-              <a:lnSpc>
-                <a:spcPct val="100000"/>
-              </a:lnSpc>
-              <a:spcAft>
-                <a:spcPts val="0"/>
-              </a:spcAft>
-              <a:defRPr sz="1700" b="0">
-                <a:solidFill>
-                  <a:srgbClr val="222222"/>
-                </a:solidFill>
-                <a:latin typeface="Calibri"/>
-              </a:defRPr>
-            </a:pPr>
-            <a:r>
-              <a:rPr sz="1700" b="0">
-                <a:solidFill>
-                  <a:srgbClr val="222222"/>
-                </a:solidFill>
-                <a:latin typeface="Calibri"/>
-              </a:rPr>
-              <a:t>Non-blocking timing, edge detection, and the full pathfinder_ps3 program.</a:t>
-            </a:r>
-          </a:p>
-        </p:txBody>
-      </p:sp>
-      <p:sp>
-        <p:nvSpPr>
-          <p:cNvPr id="6" name="TextBox 5"/>
-          <p:cNvSpPr txBox="1"/>
-          <p:nvPr/>
-        </p:nvSpPr>
-        <p:spPr>
-          <a:xfrm>
-            <a:off x="502920" y="4224528"/>
-            <a:ext cx="6492240" cy="1371600"/>
-          </a:xfrm>
-          <a:prstGeom prst="rect">
-            <a:avLst/>
-          </a:prstGeom>
-          <a:noFill/>
-        </p:spPr>
-        <p:txBody>
-          <a:bodyPr wrap="square" lIns="0" tIns="0" rIns="0" bIns="0">
-            <a:spAutoFit/>
-          </a:bodyPr>
-          <a:lstStyle/>
-          <a:p>
-            <a:pPr algn="l">
-              <a:lnSpc>
-                <a:spcPct val="100000"/>
-              </a:lnSpc>
-              <a:spcAft>
-                <a:spcPts val="200"/>
-              </a:spcAft>
-              <a:defRPr sz="1300" b="0">
-                <a:solidFill>
-                  <a:srgbClr val="666666"/>
-                </a:solidFill>
-                <a:latin typeface="Calibri"/>
-              </a:defRPr>
-            </a:pPr>
-            <a:r>
-              <a:rPr sz="1300" b="0">
-                <a:solidFill>
-                  <a:srgbClr val="666666"/>
-                </a:solidFill>
-                <a:latin typeface="Calibri"/>
-              </a:rPr>
-              <a:t>Porpoise Robotics  -  porpoiserobotics.org</a:t>
-            </a:r>
-          </a:p>
-          <a:p>
-            <a:pPr algn="l">
-              <a:lnSpc>
-                <a:spcPct val="100000"/>
-              </a:lnSpc>
-              <a:spcAft>
-                <a:spcPts val="200"/>
-              </a:spcAft>
-              <a:defRPr sz="1300" b="0">
-                <a:solidFill>
-                  <a:srgbClr val="666666"/>
-                </a:solidFill>
-                <a:latin typeface="Calibri"/>
-              </a:defRPr>
-            </a:pPr>
-            <a:r>
-              <a:rPr sz="1300" b="0">
-                <a:solidFill>
-                  <a:srgbClr val="666666"/>
-                </a:solidFill>
-                <a:latin typeface="Calibri"/>
-              </a:rPr>
-              <a:t>Kevin P. Bowen, President  -  kbowen6@icloud.com</a:t>
-            </a:r>
-          </a:p>
-          <a:p>
-            <a:pPr algn="l">
-              <a:lnSpc>
-                <a:spcPct val="100000"/>
-              </a:lnSpc>
-              <a:spcAft>
-                <a:spcPts val="200"/>
-              </a:spcAft>
-              <a:defRPr sz="1300" b="0">
-                <a:solidFill>
-                  <a:srgbClr val="666666"/>
-                </a:solidFill>
-                <a:latin typeface="Calibri"/>
-              </a:defRPr>
-            </a:pPr>
-          </a:p>
-          <a:p>
-            <a:pPr algn="l">
-              <a:lnSpc>
-                <a:spcPct val="100000"/>
-              </a:lnSpc>
-              <a:spcAft>
-                <a:spcPts val="200"/>
-              </a:spcAft>
-              <a:defRPr sz="1300" b="0">
-                <a:solidFill>
-                  <a:srgbClr val="666666"/>
-                </a:solidFill>
-                <a:latin typeface="Calibri"/>
-              </a:defRPr>
-            </a:pPr>
-            <a:r>
-              <a:rPr sz="1300" b="0">
-                <a:solidFill>
-                  <a:srgbClr val="666666"/>
-                </a:solidFill>
-                <a:latin typeface="Calibri"/>
-              </a:rPr>
-              <a:t>Three hours.  Bring a charged battery.</a:t>
-            </a:r>
-          </a:p>
-        </p:txBody>
-      </p:sp>
       <p:pic>
         <p:nvPicPr>
-          <p:cNvPr id="7" name="Picture 6" descr="vehicle-side-blue-leds.jpg"/>
+          <p:cNvPr id="3" name="Picture 2" descr="porpoise-logo.png"/>
           <p:cNvPicPr>
             <a:picLocks noChangeAspect="1"/>
           </p:cNvPicPr>
@@ -3427,6 +3170,288 @@
         </p:blipFill>
         <p:spPr>
           <a:xfrm>
+            <a:off x="10922762" y="457200"/>
+            <a:ext cx="766013" cy="777240"/>
+          </a:xfrm>
+          <a:prstGeom prst="rect">
+            <a:avLst/>
+          </a:prstGeom>
+        </p:spPr>
+      </p:pic>
+      <p:sp>
+        <p:nvSpPr>
+          <p:cNvPr id="4" name="TextBox 3"/>
+          <p:cNvSpPr txBox="1"/>
+          <p:nvPr/>
+        </p:nvSpPr>
+        <p:spPr>
+          <a:xfrm>
+            <a:off x="502920" y="1051560"/>
+            <a:ext cx="6492240" cy="365760"/>
+          </a:xfrm>
+          <a:prstGeom prst="rect">
+            <a:avLst/>
+          </a:prstGeom>
+          <a:noFill/>
+        </p:spPr>
+        <p:txBody>
+          <a:bodyPr wrap="square" lIns="0" tIns="0" rIns="0" bIns="0">
+            <a:spAutoFit/>
+          </a:bodyPr>
+          <a:lstStyle/>
+          <a:p>
+            <a:pPr algn="l">
+              <a:lnSpc>
+                <a:spcPct val="100000"/>
+              </a:lnSpc>
+              <a:spcAft>
+                <a:spcPts val="0"/>
+              </a:spcAft>
+              <a:defRPr sz="1600" b="1">
+                <a:solidFill>
+                  <a:srgbClr val="0E7C86"/>
+                </a:solidFill>
+                <a:latin typeface="Calibri"/>
+              </a:defRPr>
+            </a:pPr>
+            <a:r>
+              <a:rPr sz="1600" b="1">
+                <a:solidFill>
+                  <a:srgbClr val="0E7C86"/>
+                </a:solidFill>
+                <a:latin typeface="Calibri"/>
+              </a:rPr>
+              <a:t>LESSON 5</a:t>
+            </a:r>
+          </a:p>
+        </p:txBody>
+      </p:sp>
+      <p:sp>
+        <p:nvSpPr>
+          <p:cNvPr id="5" name="TextBox 4"/>
+          <p:cNvSpPr txBox="1"/>
+          <p:nvPr/>
+        </p:nvSpPr>
+        <p:spPr>
+          <a:xfrm>
+            <a:off x="502920" y="1481328"/>
+            <a:ext cx="6492240" cy="1554480"/>
+          </a:xfrm>
+          <a:prstGeom prst="rect">
+            <a:avLst/>
+          </a:prstGeom>
+          <a:noFill/>
+        </p:spPr>
+        <p:txBody>
+          <a:bodyPr wrap="square" lIns="0" tIns="0" rIns="0" bIns="0">
+            <a:spAutoFit/>
+          </a:bodyPr>
+          <a:lstStyle/>
+          <a:p>
+            <a:pPr algn="l">
+              <a:lnSpc>
+                <a:spcPct val="95000"/>
+              </a:lnSpc>
+              <a:spcAft>
+                <a:spcPts val="0"/>
+              </a:spcAft>
+              <a:defRPr sz="4000" b="1">
+                <a:solidFill>
+                  <a:srgbClr val="1F3A5F"/>
+                </a:solidFill>
+                <a:latin typeface="Calibri"/>
+              </a:defRPr>
+            </a:pPr>
+            <a:r>
+              <a:rPr sz="4000" b="1">
+                <a:solidFill>
+                  <a:srgbClr val="1F3A5F"/>
+                </a:solidFill>
+                <a:latin typeface="Calibri"/>
+              </a:rPr>
+              <a:t>Maneuvers with Lights</a:t>
+            </a:r>
+          </a:p>
+        </p:txBody>
+      </p:sp>
+      <p:sp>
+        <p:nvSpPr>
+          <p:cNvPr id="6" name="TextBox 5"/>
+          <p:cNvSpPr txBox="1"/>
+          <p:nvPr/>
+        </p:nvSpPr>
+        <p:spPr>
+          <a:xfrm>
+            <a:off x="502920" y="3154680"/>
+            <a:ext cx="6492240" cy="960120"/>
+          </a:xfrm>
+          <a:prstGeom prst="rect">
+            <a:avLst/>
+          </a:prstGeom>
+          <a:noFill/>
+        </p:spPr>
+        <p:txBody>
+          <a:bodyPr wrap="square" lIns="0" tIns="0" rIns="0" bIns="0">
+            <a:spAutoFit/>
+          </a:bodyPr>
+          <a:lstStyle/>
+          <a:p>
+            <a:pPr algn="l">
+              <a:lnSpc>
+                <a:spcPct val="100000"/>
+              </a:lnSpc>
+              <a:spcAft>
+                <a:spcPts val="0"/>
+              </a:spcAft>
+              <a:defRPr sz="1700" b="0">
+                <a:solidFill>
+                  <a:srgbClr val="222222"/>
+                </a:solidFill>
+                <a:latin typeface="Calibri"/>
+              </a:defRPr>
+            </a:pPr>
+            <a:r>
+              <a:rPr sz="1700" b="0">
+                <a:solidFill>
+                  <a:srgbClr val="222222"/>
+                </a:solidFill>
+                <a:latin typeface="Calibri"/>
+              </a:rPr>
+              <a:t>Non-blocking timing, edge detection, and the full pathfinder_ps3 program.</a:t>
+            </a:r>
+          </a:p>
+        </p:txBody>
+      </p:sp>
+      <p:sp>
+        <p:nvSpPr>
+          <p:cNvPr id="7" name="TextBox 6"/>
+          <p:cNvSpPr txBox="1"/>
+          <p:nvPr/>
+        </p:nvSpPr>
+        <p:spPr>
+          <a:xfrm>
+            <a:off x="502920" y="4224528"/>
+            <a:ext cx="6492240" cy="1371600"/>
+          </a:xfrm>
+          <a:prstGeom prst="rect">
+            <a:avLst/>
+          </a:prstGeom>
+          <a:noFill/>
+        </p:spPr>
+        <p:txBody>
+          <a:bodyPr wrap="square" lIns="0" tIns="0" rIns="0" bIns="0">
+            <a:spAutoFit/>
+          </a:bodyPr>
+          <a:lstStyle/>
+          <a:p>
+            <a:pPr algn="l">
+              <a:lnSpc>
+                <a:spcPct val="100000"/>
+              </a:lnSpc>
+              <a:spcAft>
+                <a:spcPts val="200"/>
+              </a:spcAft>
+              <a:defRPr sz="1300" b="0">
+                <a:solidFill>
+                  <a:srgbClr val="666666"/>
+                </a:solidFill>
+                <a:latin typeface="Calibri"/>
+              </a:defRPr>
+            </a:pPr>
+            <a:r>
+              <a:rPr sz="1300" b="0">
+                <a:solidFill>
+                  <a:srgbClr val="666666"/>
+                </a:solidFill>
+                <a:latin typeface="Calibri"/>
+              </a:rPr>
+              <a:t>Porpoise Robotics  -  porpoiserobotics.org</a:t>
+            </a:r>
+          </a:p>
+          <a:p>
+            <a:pPr algn="l">
+              <a:lnSpc>
+                <a:spcPct val="100000"/>
+              </a:lnSpc>
+              <a:spcAft>
+                <a:spcPts val="200"/>
+              </a:spcAft>
+              <a:defRPr sz="1300" b="0">
+                <a:solidFill>
+                  <a:srgbClr val="666666"/>
+                </a:solidFill>
+                <a:latin typeface="Calibri"/>
+              </a:defRPr>
+            </a:pPr>
+            <a:r>
+              <a:rPr sz="1300" b="0">
+                <a:solidFill>
+                  <a:srgbClr val="666666"/>
+                </a:solidFill>
+                <a:latin typeface="Calibri"/>
+              </a:rPr>
+              <a:t>Kevin P. Bowen, President  -  kbowen6@icloud.com</a:t>
+            </a:r>
+          </a:p>
+          <a:p>
+            <a:pPr algn="l">
+              <a:lnSpc>
+                <a:spcPct val="100000"/>
+              </a:lnSpc>
+              <a:spcAft>
+                <a:spcPts val="200"/>
+              </a:spcAft>
+              <a:defRPr sz="1300" b="0">
+                <a:solidFill>
+                  <a:srgbClr val="666666"/>
+                </a:solidFill>
+                <a:latin typeface="Calibri"/>
+              </a:defRPr>
+            </a:pPr>
+          </a:p>
+          <a:p>
+            <a:pPr algn="l">
+              <a:lnSpc>
+                <a:spcPct val="100000"/>
+              </a:lnSpc>
+              <a:spcAft>
+                <a:spcPts val="200"/>
+              </a:spcAft>
+              <a:defRPr sz="1300" b="0">
+                <a:solidFill>
+                  <a:srgbClr val="666666"/>
+                </a:solidFill>
+                <a:latin typeface="Calibri"/>
+              </a:defRPr>
+            </a:pPr>
+            <a:r>
+              <a:rPr sz="1300" b="0">
+                <a:solidFill>
+                  <a:srgbClr val="666666"/>
+                </a:solidFill>
+                <a:latin typeface="Calibri"/>
+              </a:rPr>
+              <a:t>Three hours.  Bring a charged battery.</a:t>
+            </a:r>
+          </a:p>
+        </p:txBody>
+      </p:sp>
+      <p:pic>
+        <p:nvPicPr>
+          <p:cNvPr id="8" name="Picture 7" descr="vehicle-side-blue-leds.jpg"/>
+          <p:cNvPicPr>
+            <a:picLocks noChangeAspect="1"/>
+          </p:cNvPicPr>
+          <p:nvPr/>
+        </p:nvPicPr>
+        <p:blipFill>
+          <a:blip r:embed="rId3"/>
+          <a:stretch>
+            <a:fillRect/>
+          </a:stretch>
+        </p:blipFill>
+        <p:spPr>
+          <a:xfrm>
             <a:off x="7223760" y="1371600"/>
             <a:ext cx="4480560" cy="3360420"/>
           </a:xfrm>
@@ -3437,7 +3462,7 @@
       </p:pic>
       <p:sp>
         <p:nvSpPr>
-          <p:cNvPr id="8" name="TextBox 7"/>
+          <p:cNvPr id="9" name="TextBox 8"/>
           <p:cNvSpPr txBox="1"/>
           <p:nvPr/>
         </p:nvSpPr>
@@ -6088,31 +6113,6 @@
             <a:spAutoFit/>
           </a:bodyPr>
           <a:lstStyle/>
-          <a:p>
-            <a:pPr algn="l">
-              <a:lnSpc>
-                <a:spcPct val="100000"/>
-              </a:lnSpc>
-              <a:spcAft>
-                <a:spcPts val="400"/>
-              </a:spcAft>
-              <a:defRPr sz="1600" b="0">
-                <a:solidFill>
-                  <a:srgbClr val="666666"/>
-                </a:solidFill>
-                <a:latin typeface="Calibri"/>
-              </a:defRPr>
-            </a:pPr>
-            <a:r>
-              <a:rPr sz="1600" b="0">
-                <a:solidFill>
-                  <a:srgbClr val="666666"/>
-                </a:solidFill>
-                <a:latin typeface="Calibri"/>
-              </a:rPr>
-              <a:t>About 45 minutes</a:t>
-            </a:r>
-          </a:p>
           <a:p>
             <a:pPr algn="l">
               <a:lnSpc>
@@ -10310,7 +10310,7 @@
                 </a:solidFill>
                 <a:latin typeface="Calibri"/>
               </a:rPr>
-              <a:t>Where this goes next</a:t>
+              <a:t>Take it further  -  projects that fit on this vehicle</a:t>
             </a:r>
           </a:p>
         </p:txBody>
@@ -10464,7 +10464,7 @@
         <p:spPr>
           <a:xfrm>
             <a:off x="502920" y="1188720"/>
-            <a:ext cx="5364327" cy="402336"/>
+            <a:ext cx="11185855" cy="4023360"/>
           </a:xfrm>
           <a:prstGeom prst="rect">
             <a:avLst/>
@@ -10484,201 +10484,23 @@
               <a:spcAft>
                 <a:spcPts val="600"/>
               </a:spcAft>
-              <a:defRPr sz="1600" b="1">
-                <a:solidFill>
-                  <a:srgbClr val="0E7C86"/>
-                </a:solidFill>
-                <a:latin typeface="Calibri"/>
-              </a:defRPr>
-            </a:pPr>
-            <a:r>
-              <a:rPr sz="1600" b="1">
-                <a:solidFill>
-                  <a:srgbClr val="0E7C86"/>
-                </a:solidFill>
-                <a:latin typeface="Calibri"/>
-              </a:rPr>
-              <a:t>Straight on from here</a:t>
-            </a:r>
-          </a:p>
-        </p:txBody>
-      </p:sp>
-      <p:sp>
-        <p:nvSpPr>
-          <p:cNvPr id="7" name="TextBox 6"/>
-          <p:cNvSpPr txBox="1"/>
-          <p:nvPr/>
-        </p:nvSpPr>
-        <p:spPr>
-          <a:xfrm>
-            <a:off x="502920" y="1645920"/>
-            <a:ext cx="5364327" cy="3474720"/>
-          </a:xfrm>
-          <a:prstGeom prst="rect">
-            <a:avLst/>
-          </a:prstGeom>
-          <a:noFill/>
-        </p:spPr>
-        <p:txBody>
-          <a:bodyPr wrap="square" lIns="0" tIns="0" rIns="0" bIns="0">
-            <a:spAutoFit/>
-          </a:bodyPr>
-          <a:lstStyle/>
-          <a:p>
-            <a:pPr algn="l">
-              <a:lnSpc>
-                <a:spcPct val="100000"/>
-              </a:lnSpc>
-              <a:spcAft>
-                <a:spcPts val="800"/>
-              </a:spcAft>
-              <a:defRPr sz="1600" b="0">
-                <a:solidFill>
-                  <a:srgbClr val="222222"/>
-                </a:solidFill>
-                <a:latin typeface="Calibri"/>
-              </a:defRPr>
-            </a:pPr>
-            <a:r>
-              <a:rPr sz="1600" b="0">
-                <a:solidFill>
-                  <a:srgbClr val="222222"/>
-                </a:solidFill>
-                <a:latin typeface="Calibri"/>
-              </a:rPr>
-              <a:t>SENSORS - a range finder that stops the vehicle before it hits something, line followers, light and temperature.</a:t>
-            </a:r>
-          </a:p>
-          <a:p>
-            <a:pPr algn="l">
-              <a:lnSpc>
-                <a:spcPct val="100000"/>
-              </a:lnSpc>
-              <a:spcAft>
-                <a:spcPts val="800"/>
-              </a:spcAft>
-              <a:defRPr sz="1600" b="0">
-                <a:solidFill>
-                  <a:srgbClr val="222222"/>
-                </a:solidFill>
-                <a:latin typeface="Calibri"/>
-              </a:defRPr>
-            </a:pPr>
-            <a:r>
-              <a:rPr sz="1600" b="0">
-                <a:solidFill>
-                  <a:srgbClr val="222222"/>
-                </a:solidFill>
-                <a:latin typeface="Calibri"/>
-              </a:rPr>
-              <a:t>Once the vehicle can sense the world, dead reckoning stops being the only way it knows where it is.</a:t>
-            </a:r>
-          </a:p>
-          <a:p>
-            <a:pPr algn="l">
-              <a:lnSpc>
-                <a:spcPct val="100000"/>
-              </a:lnSpc>
-              <a:spcAft>
-                <a:spcPts val="800"/>
-              </a:spcAft>
-              <a:defRPr sz="1600" b="0">
-                <a:solidFill>
-                  <a:srgbClr val="222222"/>
-                </a:solidFill>
-                <a:latin typeface="Calibri"/>
-              </a:defRPr>
-            </a:pPr>
-          </a:p>
-          <a:p>
-            <a:pPr algn="l">
-              <a:lnSpc>
-                <a:spcPct val="100000"/>
-              </a:lnSpc>
-              <a:spcAft>
-                <a:spcPts val="800"/>
-              </a:spcAft>
-              <a:defRPr sz="1600" b="0">
-                <a:solidFill>
-                  <a:srgbClr val="222222"/>
-                </a:solidFill>
-                <a:latin typeface="Calibri"/>
-              </a:defRPr>
-            </a:pPr>
-            <a:r>
-              <a:rPr sz="1600" b="0">
-                <a:solidFill>
-                  <a:srgbClr val="222222"/>
-                </a:solidFill>
-                <a:latin typeface="Calibri"/>
-              </a:rPr>
-              <a:t>VEHICLE TO VEHICLE - ESP-NOW lets ESP32s talk directly to each other with no router in between.</a:t>
-            </a:r>
-          </a:p>
-          <a:p>
-            <a:pPr algn="l">
-              <a:lnSpc>
-                <a:spcPct val="100000"/>
-              </a:lnSpc>
-              <a:spcAft>
-                <a:spcPts val="800"/>
-              </a:spcAft>
-              <a:defRPr sz="1600" b="0">
-                <a:solidFill>
-                  <a:srgbClr val="222222"/>
-                </a:solidFill>
-                <a:latin typeface="Calibri"/>
-              </a:defRPr>
-            </a:pPr>
-          </a:p>
-          <a:p>
-            <a:pPr algn="l">
-              <a:lnSpc>
-                <a:spcPct val="100000"/>
-              </a:lnSpc>
-              <a:spcAft>
-                <a:spcPts val="800"/>
-              </a:spcAft>
-              <a:defRPr sz="1600" b="0">
-                <a:solidFill>
-                  <a:srgbClr val="222222"/>
-                </a:solidFill>
-                <a:latin typeface="Calibri"/>
-              </a:defRPr>
-            </a:pPr>
-            <a:r>
-              <a:rPr sz="1600" b="0">
-                <a:solidFill>
-                  <a:srgbClr val="222222"/>
-                </a:solidFill>
-                <a:latin typeface="Calibri"/>
-              </a:rPr>
-              <a:t>CAMERAS AND AI - object recognition, and a 6-DOF arm that picks things up.</a:t>
-            </a:r>
-          </a:p>
-        </p:txBody>
-      </p:sp>
-      <p:sp>
-        <p:nvSpPr>
-          <p:cNvPr id="8" name="TextBox 7"/>
-          <p:cNvSpPr txBox="1"/>
-          <p:nvPr/>
-        </p:nvSpPr>
-        <p:spPr>
-          <a:xfrm>
-            <a:off x="6324447" y="1188720"/>
-            <a:ext cx="5364327" cy="402336"/>
-          </a:xfrm>
-          <a:prstGeom prst="rect">
-            <a:avLst/>
-          </a:prstGeom>
-          <a:noFill/>
-        </p:spPr>
-        <p:txBody>
-          <a:bodyPr wrap="square" lIns="0" tIns="0" rIns="0" bIns="0">
-            <a:spAutoFit/>
-          </a:bodyPr>
-          <a:lstStyle/>
+              <a:defRPr sz="1300" b="0">
+                <a:solidFill>
+                  <a:srgbClr val="222222"/>
+                </a:solidFill>
+                <a:latin typeface="Calibri"/>
+              </a:defRPr>
+            </a:pPr>
+            <a:r>
+              <a:rPr sz="1300" b="0">
+                <a:solidFill>
+                  <a:srgbClr val="222222"/>
+                </a:solidFill>
+                <a:latin typeface="Calibri"/>
+              </a:rPr>
+              <a:t>Each of these is a real addition to the program you now understand. Pick one and build it.</a:t>
+            </a:r>
+          </a:p>
           <a:p>
             <a:pPr algn="l">
               <a:lnSpc>
@@ -10687,267 +10509,208 @@
               <a:spcAft>
                 <a:spcPts val="600"/>
               </a:spcAft>
-              <a:defRPr sz="1600" b="1">
-                <a:solidFill>
-                  <a:srgbClr val="0E7C86"/>
-                </a:solidFill>
-                <a:latin typeface="Calibri"/>
-              </a:defRPr>
-            </a:pPr>
-            <a:r>
-              <a:rPr sz="1600" b="1">
-                <a:solidFill>
-                  <a:srgbClr val="0E7C86"/>
-                </a:solidFill>
-                <a:latin typeface="Calibri"/>
-              </a:rPr>
-              <a:t>The advanced program</a:t>
-            </a:r>
-          </a:p>
-        </p:txBody>
-      </p:sp>
-      <p:sp>
-        <p:nvSpPr>
-          <p:cNvPr id="9" name="TextBox 8"/>
-          <p:cNvSpPr txBox="1"/>
-          <p:nvPr/>
-        </p:nvSpPr>
-        <p:spPr>
-          <a:xfrm>
-            <a:off x="6324447" y="1645920"/>
-            <a:ext cx="5364327" cy="3474720"/>
-          </a:xfrm>
-          <a:prstGeom prst="rect">
-            <a:avLst/>
-          </a:prstGeom>
-          <a:noFill/>
-        </p:spPr>
-        <p:txBody>
-          <a:bodyPr wrap="square" lIns="0" tIns="0" rIns="0" bIns="0">
-            <a:spAutoFit/>
-          </a:bodyPr>
-          <a:lstStyle/>
-          <a:p>
-            <a:pPr algn="l">
-              <a:lnSpc>
-                <a:spcPct val="100000"/>
-              </a:lnSpc>
-              <a:spcAft>
-                <a:spcPts val="800"/>
-              </a:spcAft>
-              <a:defRPr sz="1600" b="0">
-                <a:solidFill>
-                  <a:srgbClr val="222222"/>
-                </a:solidFill>
-                <a:latin typeface="Calibri"/>
-              </a:defRPr>
-            </a:pPr>
-            <a:r>
-              <a:rPr sz="1600" b="0">
-                <a:solidFill>
-                  <a:srgbClr val="222222"/>
-                </a:solidFill>
-                <a:latin typeface="Calibri"/>
-              </a:rPr>
-              <a:t>Pathfinder_Op_Program12 is the same vehicle with:</a:t>
-            </a:r>
-          </a:p>
-          <a:p>
-            <a:pPr lvl="1" algn="l">
-              <a:lnSpc>
-                <a:spcPct val="100000"/>
-              </a:lnSpc>
-              <a:spcAft>
-                <a:spcPts val="800"/>
-              </a:spcAft>
-              <a:defRPr sz="1600" b="0">
-                <a:solidFill>
-                  <a:srgbClr val="222222"/>
-                </a:solidFill>
-                <a:latin typeface="Calibri"/>
-              </a:defRPr>
-            </a:pPr>
-            <a:r>
-              <a:rPr sz="1600" b="0">
-                <a:solidFill>
-                  <a:srgbClr val="222222"/>
-                </a:solidFill>
-                <a:latin typeface="Calibri"/>
-              </a:rPr>
-              <a:t>the program split across eight files by subsystem</a:t>
-            </a:r>
-          </a:p>
-          <a:p>
-            <a:pPr lvl="1" algn="l">
-              <a:lnSpc>
-                <a:spcPct val="100000"/>
-              </a:lnSpc>
-              <a:spcAft>
-                <a:spcPts val="800"/>
-              </a:spcAft>
-              <a:defRPr sz="1600" b="0">
-                <a:solidFill>
-                  <a:srgbClr val="222222"/>
-                </a:solidFill>
-                <a:latin typeface="Calibri"/>
-              </a:defRPr>
-            </a:pPr>
-            <a:r>
-              <a:rPr sz="1600" b="0">
-                <a:solidFill>
-                  <a:srgbClr val="222222"/>
-                </a:solidFill>
-                <a:latin typeface="Calibri"/>
-              </a:rPr>
-              <a:t>10-bit PWM and hybrid drive for finer low-speed control</a:t>
-            </a:r>
-          </a:p>
-          <a:p>
-            <a:pPr lvl="1" algn="l">
-              <a:lnSpc>
-                <a:spcPct val="100000"/>
-              </a:lnSpc>
-              <a:spcAft>
-                <a:spcPts val="800"/>
-              </a:spcAft>
-              <a:defRPr sz="1600" b="0">
-                <a:solidFill>
-                  <a:srgbClr val="222222"/>
-                </a:solidFill>
-                <a:latin typeface="Calibri"/>
-              </a:defRPr>
-            </a:pPr>
-            <a:r>
-              <a:rPr sz="1600" b="0">
-                <a:solidFill>
-                  <a:srgbClr val="222222"/>
-                </a:solidFill>
-                <a:latin typeface="Calibri"/>
-              </a:rPr>
-              <a:t>speed ramping, so it does not lurch</a:t>
-            </a:r>
-          </a:p>
-          <a:p>
-            <a:pPr lvl="1" algn="l">
-              <a:lnSpc>
-                <a:spcPct val="100000"/>
-              </a:lnSpc>
-              <a:spcAft>
-                <a:spcPts val="800"/>
-              </a:spcAft>
-              <a:defRPr sz="1600" b="0">
-                <a:solidFill>
-                  <a:srgbClr val="222222"/>
-                </a:solidFill>
-                <a:latin typeface="Calibri"/>
-              </a:defRPr>
-            </a:pPr>
-            <a:r>
-              <a:rPr sz="1600" b="0">
-                <a:solidFill>
-                  <a:srgbClr val="222222"/>
-                </a:solidFill>
-                <a:latin typeface="Calibri"/>
-              </a:rPr>
-              <a:t>a serial console for tuning without recompiling</a:t>
-            </a:r>
-          </a:p>
-          <a:p>
-            <a:pPr lvl="1" algn="l">
-              <a:lnSpc>
-                <a:spcPct val="100000"/>
-              </a:lnSpc>
-              <a:spcAft>
-                <a:spcPts val="800"/>
-              </a:spcAft>
-              <a:defRPr sz="1600" b="0">
-                <a:solidFill>
-                  <a:srgbClr val="222222"/>
-                </a:solidFill>
-                <a:latin typeface="Calibri"/>
-              </a:defRPr>
-            </a:pPr>
-            <a:r>
-              <a:rPr sz="1600" b="0">
-                <a:solidFill>
-                  <a:srgbClr val="222222"/>
-                </a:solidFill>
-                <a:latin typeface="Calibri"/>
-              </a:rPr>
-              <a:t>settings saved to EEPROM</a:t>
-            </a:r>
-          </a:p>
-          <a:p>
-            <a:pPr lvl="1" algn="l">
-              <a:lnSpc>
-                <a:spcPct val="100000"/>
-              </a:lnSpc>
-              <a:spcAft>
-                <a:spcPts val="800"/>
-              </a:spcAft>
-              <a:defRPr sz="1600" b="0">
-                <a:solidFill>
-                  <a:srgbClr val="222222"/>
-                </a:solidFill>
-                <a:latin typeface="Calibri"/>
-              </a:defRPr>
-            </a:pPr>
-            <a:r>
-              <a:rPr sz="1600" b="0">
-                <a:solidFill>
-                  <a:srgbClr val="222222"/>
-                </a:solidFill>
-                <a:latin typeface="Calibri"/>
-              </a:rPr>
-              <a:t>a current sensor and a powered self-test</a:t>
-            </a:r>
-          </a:p>
-          <a:p>
-            <a:pPr algn="l">
-              <a:lnSpc>
-                <a:spcPct val="100000"/>
-              </a:lnSpc>
-              <a:spcAft>
-                <a:spcPts val="800"/>
-              </a:spcAft>
-              <a:defRPr sz="1600" b="0">
-                <a:solidFill>
-                  <a:srgbClr val="222222"/>
-                </a:solidFill>
-                <a:latin typeface="Calibri"/>
-              </a:defRPr>
-            </a:pPr>
-          </a:p>
-          <a:p>
-            <a:pPr algn="l">
-              <a:lnSpc>
-                <a:spcPct val="100000"/>
-              </a:lnSpc>
-              <a:spcAft>
-                <a:spcPts val="800"/>
-              </a:spcAft>
-              <a:defRPr sz="1600" b="0">
-                <a:solidFill>
-                  <a:srgbClr val="222222"/>
-                </a:solidFill>
-                <a:latin typeface="Calibri"/>
-              </a:defRPr>
-            </a:pPr>
-            <a:r>
-              <a:rPr sz="1600" b="0">
-                <a:solidFill>
-                  <a:srgbClr val="222222"/>
-                </a:solidFill>
-                <a:latin typeface="Calibri"/>
-              </a:rPr>
-              <a:t>It is a five-lesson course of its own.</a:t>
-            </a:r>
-          </a:p>
-        </p:txBody>
-      </p:sp>
-      <p:sp>
-        <p:nvSpPr>
-          <p:cNvPr id="10" name="Rounded Rectangle 9"/>
+              <a:defRPr sz="1300" b="0">
+                <a:solidFill>
+                  <a:srgbClr val="222222"/>
+                </a:solidFill>
+                <a:latin typeface="Calibri"/>
+              </a:defRPr>
+            </a:pPr>
+          </a:p>
+          <a:p>
+            <a:pPr algn="l">
+              <a:lnSpc>
+                <a:spcPct val="100000"/>
+              </a:lnSpc>
+              <a:spcAft>
+                <a:spcPts val="600"/>
+              </a:spcAft>
+              <a:defRPr sz="1300" b="0">
+                <a:solidFill>
+                  <a:srgbClr val="222222"/>
+                </a:solidFill>
+                <a:latin typeface="Calibri"/>
+              </a:defRPr>
+            </a:pPr>
+            <a:r>
+              <a:rPr sz="1300" b="0">
+                <a:solidFill>
+                  <a:srgbClr val="222222"/>
+                </a:solidFill>
+                <a:latin typeface="Calibri"/>
+              </a:rPr>
+              <a:t>LOW BATTERY WARNING.  Flash the LEDs yellow below 12 volts and red below 10. A 4S pack should never be run flat, and the vehicle is in a better position to notice than you are.</a:t>
+            </a:r>
+          </a:p>
+          <a:p>
+            <a:pPr algn="l">
+              <a:lnSpc>
+                <a:spcPct val="100000"/>
+              </a:lnSpc>
+              <a:spcAft>
+                <a:spcPts val="600"/>
+              </a:spcAft>
+              <a:defRPr sz="1300" b="0">
+                <a:solidFill>
+                  <a:srgbClr val="222222"/>
+                </a:solidFill>
+                <a:latin typeface="Calibri"/>
+              </a:defRPr>
+            </a:pPr>
+          </a:p>
+          <a:p>
+            <a:pPr algn="l">
+              <a:lnSpc>
+                <a:spcPct val="100000"/>
+              </a:lnSpc>
+              <a:spcAft>
+                <a:spcPts val="600"/>
+              </a:spcAft>
+              <a:defRPr sz="1300" b="0">
+                <a:solidFill>
+                  <a:srgbClr val="222222"/>
+                </a:solidFill>
+                <a:latin typeface="Calibri"/>
+              </a:defRPr>
+            </a:pPr>
+            <a:r>
+              <a:rPr sz="1300" b="0">
+                <a:solidFill>
+                  <a:srgbClr val="222222"/>
+                </a:solidFill>
+                <a:latin typeface="Calibri"/>
+              </a:rPr>
+              <a:t>COLLISION WARNING.  An ultrasonic range finder on the top plate. Closer than 20 inches: stop the motors, flash red, wait three seconds, then carry on.</a:t>
+            </a:r>
+          </a:p>
+          <a:p>
+            <a:pPr algn="l">
+              <a:lnSpc>
+                <a:spcPct val="100000"/>
+              </a:lnSpc>
+              <a:spcAft>
+                <a:spcPts val="600"/>
+              </a:spcAft>
+              <a:defRPr sz="1300" b="0">
+                <a:solidFill>
+                  <a:srgbClr val="222222"/>
+                </a:solidFill>
+                <a:latin typeface="Calibri"/>
+              </a:defRPr>
+            </a:pPr>
+          </a:p>
+          <a:p>
+            <a:pPr algn="l">
+              <a:lnSpc>
+                <a:spcPct val="100000"/>
+              </a:lnSpc>
+              <a:spcAft>
+                <a:spcPts val="600"/>
+              </a:spcAft>
+              <a:defRPr sz="1300" b="0">
+                <a:solidFill>
+                  <a:srgbClr val="222222"/>
+                </a:solidFill>
+                <a:latin typeface="Calibri"/>
+              </a:defRPr>
+            </a:pPr>
+            <a:r>
+              <a:rPr sz="1300" b="0">
+                <a:solidFill>
+                  <a:srgbClr val="222222"/>
+                </a:solidFill>
+                <a:latin typeface="Calibri"/>
+              </a:rPr>
+              <a:t>AUTOMATIC LIGHTS.  You already switch the turn signals from the stick. Add reversing beeps, hazard lights, or headlights that come on only when the vehicle is moving.</a:t>
+            </a:r>
+          </a:p>
+          <a:p>
+            <a:pPr algn="l">
+              <a:lnSpc>
+                <a:spcPct val="100000"/>
+              </a:lnSpc>
+              <a:spcAft>
+                <a:spcPts val="600"/>
+              </a:spcAft>
+              <a:defRPr sz="1300" b="0">
+                <a:solidFill>
+                  <a:srgbClr val="222222"/>
+                </a:solidFill>
+                <a:latin typeface="Calibri"/>
+              </a:defRPr>
+            </a:pPr>
+          </a:p>
+          <a:p>
+            <a:pPr algn="l">
+              <a:lnSpc>
+                <a:spcPct val="100000"/>
+              </a:lnSpc>
+              <a:spcAft>
+                <a:spcPts val="600"/>
+              </a:spcAft>
+              <a:defRPr sz="1300" b="0">
+                <a:solidFill>
+                  <a:srgbClr val="222222"/>
+                </a:solidFill>
+                <a:latin typeface="Calibri"/>
+              </a:defRPr>
+            </a:pPr>
+            <a:r>
+              <a:rPr sz="1300" b="0">
+                <a:solidFill>
+                  <a:srgbClr val="222222"/>
+                </a:solidFill>
+                <a:latin typeface="Calibri"/>
+              </a:rPr>
+              <a:t>WAYPOINT NAVIGATION.  Lesson 2 drove one square. Give the program a LIST of moves - distance and heading - and drive a course you typed in rather than one that was hard-coded.</a:t>
+            </a:r>
+          </a:p>
+          <a:p>
+            <a:pPr algn="l">
+              <a:lnSpc>
+                <a:spcPct val="100000"/>
+              </a:lnSpc>
+              <a:spcAft>
+                <a:spcPts val="600"/>
+              </a:spcAft>
+              <a:defRPr sz="1300" b="0">
+                <a:solidFill>
+                  <a:srgbClr val="222222"/>
+                </a:solidFill>
+                <a:latin typeface="Calibri"/>
+              </a:defRPr>
+            </a:pPr>
+          </a:p>
+          <a:p>
+            <a:pPr algn="l">
+              <a:lnSpc>
+                <a:spcPct val="100000"/>
+              </a:lnSpc>
+              <a:spcAft>
+                <a:spcPts val="600"/>
+              </a:spcAft>
+              <a:defRPr sz="1300" b="0">
+                <a:solidFill>
+                  <a:srgbClr val="222222"/>
+                </a:solidFill>
+                <a:latin typeface="Calibri"/>
+              </a:defRPr>
+            </a:pPr>
+            <a:r>
+              <a:rPr sz="1300" b="0">
+                <a:solidFill>
+                  <a:srgbClr val="222222"/>
+                </a:solidFill>
+                <a:latin typeface="Calibri"/>
+              </a:rPr>
+              <a:t>SERVO PAN AND TILT.  Two servos and a bracket, aimed with the right stick. The mount points are already on the top plate.</a:t>
+            </a:r>
+          </a:p>
+        </p:txBody>
+      </p:sp>
+      <p:sp>
+        <p:nvSpPr>
+          <p:cNvPr id="7" name="Rounded Rectangle 6"/>
           <p:cNvSpPr/>
           <p:nvPr/>
         </p:nvSpPr>
@@ -11006,7 +10769,7 @@
                 </a:solidFill>
                 <a:latin typeface="Calibri"/>
               </a:rPr>
-              <a:t>Everything you learned this term transfers directly. The advanced course starts by taking this program apart.</a:t>
+              <a:t>All five are within reach of what you learned in five lessons. The range finder and the servos are the two the kit already has parts for.</a:t>
             </a:r>
           </a:p>
         </p:txBody>
@@ -11070,7 +10833,7 @@
                 </a:solidFill>
                 <a:latin typeface="Calibri"/>
               </a:rPr>
-              <a:t>Why this is worth your time</a:t>
+              <a:t>Where this goes next</a:t>
             </a:r>
           </a:p>
         </p:txBody>
@@ -11224,7 +10987,7 @@
         <p:spPr>
           <a:xfrm>
             <a:off x="502920" y="1188720"/>
-            <a:ext cx="11185855" cy="530352"/>
+            <a:ext cx="5364327" cy="402336"/>
           </a:xfrm>
           <a:prstGeom prst="rect">
             <a:avLst/>
@@ -11244,7 +11007,7 @@
               <a:spcAft>
                 <a:spcPts val="600"/>
               </a:spcAft>
-              <a:defRPr sz="1900" b="1">
+              <a:defRPr sz="1600" b="1">
                 <a:solidFill>
                   <a:srgbClr val="0E7C86"/>
                 </a:solidFill>
@@ -11252,13 +11015,13 @@
               </a:defRPr>
             </a:pPr>
             <a:r>
-              <a:rPr sz="1900" b="1">
+              <a:rPr sz="1600" b="1">
                 <a:solidFill>
                   <a:srgbClr val="0E7C86"/>
                 </a:solidFill>
                 <a:latin typeface="Calibri"/>
               </a:rPr>
-              <a:t>Robotics and STEM, and where they lead</a:t>
+              <a:t>Straight on from here</a:t>
             </a:r>
           </a:p>
         </p:txBody>
@@ -11271,8 +11034,8 @@
         </p:nvSpPr>
         <p:spPr>
           <a:xfrm>
-            <a:off x="502920" y="1755648"/>
-            <a:ext cx="11185855" cy="4507992"/>
+            <a:off x="502920" y="1645920"/>
+            <a:ext cx="5364327" cy="3474720"/>
           </a:xfrm>
           <a:prstGeom prst="rect">
             <a:avLst/>
@@ -11290,7 +11053,7 @@
                 <a:spcPct val="100000"/>
               </a:lnSpc>
               <a:spcAft>
-                <a:spcPts val="900"/>
+                <a:spcPts val="800"/>
               </a:spcAft>
               <a:defRPr sz="1600" b="0">
                 <a:solidFill>
@@ -11306,16 +11069,16 @@
                 </a:solidFill>
                 <a:latin typeface="Calibri"/>
               </a:rPr>
-              <a:t>At Oceanology International Americas in San Diego, we asked a panel what the transition opportunities are:</a:t>
-            </a:r>
-          </a:p>
-          <a:p>
-            <a:pPr algn="l">
-              <a:lnSpc>
-                <a:spcPct val="100000"/>
-              </a:lnSpc>
-              <a:spcAft>
-                <a:spcPts val="900"/>
+              <a:t>SENSORS - a range finder that stops the vehicle before it hits something, line followers, light and temperature.</a:t>
+            </a:r>
+          </a:p>
+          <a:p>
+            <a:pPr algn="l">
+              <a:lnSpc>
+                <a:spcPct val="100000"/>
+              </a:lnSpc>
+              <a:spcAft>
+                <a:spcPts val="800"/>
               </a:spcAft>
               <a:defRPr sz="1600" b="0">
                 <a:solidFill>
@@ -11324,14 +11087,23 @@
                 <a:latin typeface="Calibri"/>
               </a:defRPr>
             </a:pPr>
-          </a:p>
-          <a:p>
-            <a:pPr algn="l">
-              <a:lnSpc>
-                <a:spcPct val="100000"/>
-              </a:lnSpc>
-              <a:spcAft>
-                <a:spcPts val="900"/>
+            <a:r>
+              <a:rPr sz="1600" b="0">
+                <a:solidFill>
+                  <a:srgbClr val="222222"/>
+                </a:solidFill>
+                <a:latin typeface="Calibri"/>
+              </a:rPr>
+              <a:t>Once the vehicle can sense the world, dead reckoning stops being the only way it knows where it is.</a:t>
+            </a:r>
+          </a:p>
+          <a:p>
+            <a:pPr algn="l">
+              <a:lnSpc>
+                <a:spcPct val="100000"/>
+              </a:lnSpc>
+              <a:spcAft>
+                <a:spcPts val="800"/>
               </a:spcAft>
               <a:defRPr sz="1600" b="0">
                 <a:solidFill>
@@ -11340,6 +11112,22 @@
                 <a:latin typeface="Calibri"/>
               </a:defRPr>
             </a:pPr>
+          </a:p>
+          <a:p>
+            <a:pPr algn="l">
+              <a:lnSpc>
+                <a:spcPct val="100000"/>
+              </a:lnSpc>
+              <a:spcAft>
+                <a:spcPts val="800"/>
+              </a:spcAft>
+              <a:defRPr sz="1600" b="0">
+                <a:solidFill>
+                  <a:srgbClr val="222222"/>
+                </a:solidFill>
+                <a:latin typeface="Calibri"/>
+              </a:defRPr>
+            </a:pPr>
             <a:r>
               <a:rPr sz="1600" b="0">
                 <a:solidFill>
@@ -11347,16 +11135,16 @@
                 </a:solidFill>
                 <a:latin typeface="Calibri"/>
               </a:rPr>
-              <a:t>Dr Rick Spinrad, NOAA Administrator, said a knowledge of robotics and STEM is a competitive advantage for entry-level positions.</a:t>
-            </a:r>
-          </a:p>
-          <a:p>
-            <a:pPr algn="l">
-              <a:lnSpc>
-                <a:spcPct val="100000"/>
-              </a:lnSpc>
-              <a:spcAft>
-                <a:spcPts val="900"/>
+              <a:t>VEHICLE TO VEHICLE - ESP-NOW lets ESP32s talk directly to each other with no router in between.</a:t>
+            </a:r>
+          </a:p>
+          <a:p>
+            <a:pPr algn="l">
+              <a:lnSpc>
+                <a:spcPct val="100000"/>
+              </a:lnSpc>
+              <a:spcAft>
+                <a:spcPts val="800"/>
               </a:spcAft>
               <a:defRPr sz="1600" b="0">
                 <a:solidFill>
@@ -11365,6 +11153,22 @@
                 <a:latin typeface="Calibri"/>
               </a:defRPr>
             </a:pPr>
+          </a:p>
+          <a:p>
+            <a:pPr algn="l">
+              <a:lnSpc>
+                <a:spcPct val="100000"/>
+              </a:lnSpc>
+              <a:spcAft>
+                <a:spcPts val="800"/>
+              </a:spcAft>
+              <a:defRPr sz="1600" b="0">
+                <a:solidFill>
+                  <a:srgbClr val="222222"/>
+                </a:solidFill>
+                <a:latin typeface="Calibri"/>
+              </a:defRPr>
+            </a:pPr>
             <a:r>
               <a:rPr sz="1600" b="0">
                 <a:solidFill>
@@ -11372,16 +11176,87 @@
                 </a:solidFill>
                 <a:latin typeface="Calibri"/>
               </a:rPr>
-              <a:t>Rear Admiral Ron Piret, USN, said they are looking for students with robotics and STEM education for operational careers.</a:t>
-            </a:r>
-          </a:p>
-          <a:p>
-            <a:pPr algn="l">
-              <a:lnSpc>
-                <a:spcPct val="100000"/>
-              </a:lnSpc>
-              <a:spcAft>
-                <a:spcPts val="900"/>
+              <a:t>CAMERAS AND AI - object recognition, and a 6-DOF arm that picks things up.</a:t>
+            </a:r>
+          </a:p>
+        </p:txBody>
+      </p:sp>
+      <p:sp>
+        <p:nvSpPr>
+          <p:cNvPr id="8" name="TextBox 7"/>
+          <p:cNvSpPr txBox="1"/>
+          <p:nvPr/>
+        </p:nvSpPr>
+        <p:spPr>
+          <a:xfrm>
+            <a:off x="6324447" y="1188720"/>
+            <a:ext cx="5364327" cy="402336"/>
+          </a:xfrm>
+          <a:prstGeom prst="rect">
+            <a:avLst/>
+          </a:prstGeom>
+          <a:noFill/>
+        </p:spPr>
+        <p:txBody>
+          <a:bodyPr wrap="square" lIns="0" tIns="0" rIns="0" bIns="0">
+            <a:spAutoFit/>
+          </a:bodyPr>
+          <a:lstStyle/>
+          <a:p>
+            <a:pPr algn="l">
+              <a:lnSpc>
+                <a:spcPct val="100000"/>
+              </a:lnSpc>
+              <a:spcAft>
+                <a:spcPts val="600"/>
+              </a:spcAft>
+              <a:defRPr sz="1600" b="1">
+                <a:solidFill>
+                  <a:srgbClr val="0E7C86"/>
+                </a:solidFill>
+                <a:latin typeface="Calibri"/>
+              </a:defRPr>
+            </a:pPr>
+            <a:r>
+              <a:rPr sz="1600" b="1">
+                <a:solidFill>
+                  <a:srgbClr val="0E7C86"/>
+                </a:solidFill>
+                <a:latin typeface="Calibri"/>
+              </a:rPr>
+              <a:t>The advanced program</a:t>
+            </a:r>
+          </a:p>
+        </p:txBody>
+      </p:sp>
+      <p:sp>
+        <p:nvSpPr>
+          <p:cNvPr id="9" name="TextBox 8"/>
+          <p:cNvSpPr txBox="1"/>
+          <p:nvPr/>
+        </p:nvSpPr>
+        <p:spPr>
+          <a:xfrm>
+            <a:off x="6324447" y="1645920"/>
+            <a:ext cx="5364327" cy="3474720"/>
+          </a:xfrm>
+          <a:prstGeom prst="rect">
+            <a:avLst/>
+          </a:prstGeom>
+          <a:noFill/>
+        </p:spPr>
+        <p:txBody>
+          <a:bodyPr wrap="square" lIns="0" tIns="0" rIns="0" bIns="0">
+            <a:spAutoFit/>
+          </a:bodyPr>
+          <a:lstStyle/>
+          <a:p>
+            <a:pPr algn="l">
+              <a:lnSpc>
+                <a:spcPct val="100000"/>
+              </a:lnSpc>
+              <a:spcAft>
+                <a:spcPts val="800"/>
               </a:spcAft>
               <a:defRPr sz="1600" b="0">
                 <a:solidFill>
@@ -11397,16 +11272,16 @@
                 </a:solidFill>
                 <a:latin typeface="Calibri"/>
               </a:rPr>
-              <a:t>Kendra MacDonald, CEO of Canada's Ocean Supercluster, said that whether you become a doctor, a lawyer or a scientist, STEM will help you.</a:t>
-            </a:r>
-          </a:p>
-          <a:p>
-            <a:pPr algn="l">
-              <a:lnSpc>
-                <a:spcPct val="100000"/>
-              </a:lnSpc>
-              <a:spcAft>
-                <a:spcPts val="900"/>
+              <a:t>Pathfinder_Op_Program12 is the same vehicle with:</a:t>
+            </a:r>
+          </a:p>
+          <a:p>
+            <a:pPr lvl="1" algn="l">
+              <a:lnSpc>
+                <a:spcPct val="100000"/>
+              </a:lnSpc>
+              <a:spcAft>
+                <a:spcPts val="800"/>
               </a:spcAft>
               <a:defRPr sz="1600" b="0">
                 <a:solidFill>
@@ -11415,14 +11290,23 @@
                 <a:latin typeface="Calibri"/>
               </a:defRPr>
             </a:pPr>
-          </a:p>
-          <a:p>
-            <a:pPr algn="l">
-              <a:lnSpc>
-                <a:spcPct val="100000"/>
-              </a:lnSpc>
-              <a:spcAft>
-                <a:spcPts val="900"/>
+            <a:r>
+              <a:rPr sz="1600" b="0">
+                <a:solidFill>
+                  <a:srgbClr val="222222"/>
+                </a:solidFill>
+                <a:latin typeface="Calibri"/>
+              </a:rPr>
+              <a:t>the program split across eight files by subsystem</a:t>
+            </a:r>
+          </a:p>
+          <a:p>
+            <a:pPr lvl="1" algn="l">
+              <a:lnSpc>
+                <a:spcPct val="100000"/>
+              </a:lnSpc>
+              <a:spcAft>
+                <a:spcPts val="800"/>
               </a:spcAft>
               <a:defRPr sz="1600" b="0">
                 <a:solidFill>
@@ -11438,16 +11322,16 @@
                 </a:solidFill>
                 <a:latin typeface="Calibri"/>
               </a:rPr>
-              <a:t>What you have actually practised this term: reading somebody else's code, changing one thing at a time, measuring instead of guessing, and working out whether a fault is mechanical, electrical or software.</a:t>
-            </a:r>
-          </a:p>
-          <a:p>
-            <a:pPr algn="l">
-              <a:lnSpc>
-                <a:spcPct val="100000"/>
-              </a:lnSpc>
-              <a:spcAft>
-                <a:spcPts val="900"/>
+              <a:t>10-bit PWM and hybrid drive for finer low-speed control</a:t>
+            </a:r>
+          </a:p>
+          <a:p>
+            <a:pPr lvl="1" algn="l">
+              <a:lnSpc>
+                <a:spcPct val="100000"/>
+              </a:lnSpc>
+              <a:spcAft>
+                <a:spcPts val="800"/>
               </a:spcAft>
               <a:defRPr sz="1600" b="0">
                 <a:solidFill>
@@ -11456,14 +11340,23 @@
                 <a:latin typeface="Calibri"/>
               </a:defRPr>
             </a:pPr>
-          </a:p>
-          <a:p>
-            <a:pPr algn="l">
-              <a:lnSpc>
-                <a:spcPct val="100000"/>
-              </a:lnSpc>
-              <a:spcAft>
-                <a:spcPts val="900"/>
+            <a:r>
+              <a:rPr sz="1600" b="0">
+                <a:solidFill>
+                  <a:srgbClr val="222222"/>
+                </a:solidFill>
+                <a:latin typeface="Calibri"/>
+              </a:rPr>
+              <a:t>speed ramping, so it does not lurch</a:t>
+            </a:r>
+          </a:p>
+          <a:p>
+            <a:pPr lvl="1" algn="l">
+              <a:lnSpc>
+                <a:spcPct val="100000"/>
+              </a:lnSpc>
+              <a:spcAft>
+                <a:spcPts val="800"/>
               </a:spcAft>
               <a:defRPr sz="1600" b="0">
                 <a:solidFill>
@@ -11479,7 +11372,164 @@
                 </a:solidFill>
                 <a:latin typeface="Calibri"/>
               </a:rPr>
-              <a:t>Those four habits are the job. The vehicle was just the excuse.</a:t>
+              <a:t>a serial console for tuning without recompiling</a:t>
+            </a:r>
+          </a:p>
+          <a:p>
+            <a:pPr lvl="1" algn="l">
+              <a:lnSpc>
+                <a:spcPct val="100000"/>
+              </a:lnSpc>
+              <a:spcAft>
+                <a:spcPts val="800"/>
+              </a:spcAft>
+              <a:defRPr sz="1600" b="0">
+                <a:solidFill>
+                  <a:srgbClr val="222222"/>
+                </a:solidFill>
+                <a:latin typeface="Calibri"/>
+              </a:defRPr>
+            </a:pPr>
+            <a:r>
+              <a:rPr sz="1600" b="0">
+                <a:solidFill>
+                  <a:srgbClr val="222222"/>
+                </a:solidFill>
+                <a:latin typeface="Calibri"/>
+              </a:rPr>
+              <a:t>settings saved to EEPROM</a:t>
+            </a:r>
+          </a:p>
+          <a:p>
+            <a:pPr lvl="1" algn="l">
+              <a:lnSpc>
+                <a:spcPct val="100000"/>
+              </a:lnSpc>
+              <a:spcAft>
+                <a:spcPts val="800"/>
+              </a:spcAft>
+              <a:defRPr sz="1600" b="0">
+                <a:solidFill>
+                  <a:srgbClr val="222222"/>
+                </a:solidFill>
+                <a:latin typeface="Calibri"/>
+              </a:defRPr>
+            </a:pPr>
+            <a:r>
+              <a:rPr sz="1600" b="0">
+                <a:solidFill>
+                  <a:srgbClr val="222222"/>
+                </a:solidFill>
+                <a:latin typeface="Calibri"/>
+              </a:rPr>
+              <a:t>a current sensor and a powered self-test</a:t>
+            </a:r>
+          </a:p>
+          <a:p>
+            <a:pPr algn="l">
+              <a:lnSpc>
+                <a:spcPct val="100000"/>
+              </a:lnSpc>
+              <a:spcAft>
+                <a:spcPts val="800"/>
+              </a:spcAft>
+              <a:defRPr sz="1600" b="0">
+                <a:solidFill>
+                  <a:srgbClr val="222222"/>
+                </a:solidFill>
+                <a:latin typeface="Calibri"/>
+              </a:defRPr>
+            </a:pPr>
+          </a:p>
+          <a:p>
+            <a:pPr algn="l">
+              <a:lnSpc>
+                <a:spcPct val="100000"/>
+              </a:lnSpc>
+              <a:spcAft>
+                <a:spcPts val="800"/>
+              </a:spcAft>
+              <a:defRPr sz="1600" b="0">
+                <a:solidFill>
+                  <a:srgbClr val="222222"/>
+                </a:solidFill>
+                <a:latin typeface="Calibri"/>
+              </a:defRPr>
+            </a:pPr>
+            <a:r>
+              <a:rPr sz="1600" b="0">
+                <a:solidFill>
+                  <a:srgbClr val="222222"/>
+                </a:solidFill>
+                <a:latin typeface="Calibri"/>
+              </a:rPr>
+              <a:t>It is a five-lesson course of its own.</a:t>
+            </a:r>
+          </a:p>
+        </p:txBody>
+      </p:sp>
+      <p:sp>
+        <p:nvSpPr>
+          <p:cNvPr id="10" name="Rounded Rectangle 9"/>
+          <p:cNvSpPr/>
+          <p:nvPr/>
+        </p:nvSpPr>
+        <p:spPr>
+          <a:xfrm>
+            <a:off x="502920" y="5303520"/>
+            <a:ext cx="11185855" cy="960120"/>
+          </a:xfrm>
+          <a:prstGeom prst="roundRect">
+            <a:avLst>
+              <a:gd name="adj" fmla="val 4000"/>
+            </a:avLst>
+          </a:prstGeom>
+          <a:solidFill>
+            <a:srgbClr val="EEF3F8"/>
+          </a:solidFill>
+          <a:ln w="12700">
+            <a:solidFill>
+              <a:srgbClr val="0E7C86"/>
+            </a:solidFill>
+          </a:ln>
+          <a:effectLst/>
+        </p:spPr>
+        <p:style>
+          <a:lnRef idx="1">
+            <a:schemeClr val="accent1"/>
+          </a:lnRef>
+          <a:fillRef idx="3">
+            <a:schemeClr val="accent1"/>
+          </a:fillRef>
+          <a:effectRef idx="2">
+            <a:schemeClr val="accent1"/>
+          </a:effectRef>
+          <a:fontRef idx="minor">
+            <a:schemeClr val="lt1"/>
+          </a:fontRef>
+        </p:style>
+        <p:txBody>
+          <a:bodyPr rtlCol="0" anchor="ctr" wrap="square" lIns="164592" rIns="164592" tIns="73152" bIns="73152"/>
+          <a:lstStyle/>
+          <a:p>
+            <a:pPr algn="l"/>
+            <a:r>
+              <a:rPr sz="1300" b="1">
+                <a:solidFill>
+                  <a:srgbClr val="0E7C86"/>
+                </a:solidFill>
+                <a:latin typeface="Calibri"/>
+              </a:rPr>
+              <a:t>KEY POINT   </a:t>
+            </a:r>
+            <a:r>
+              <a:rPr sz="1500">
+                <a:solidFill>
+                  <a:srgbClr val="222222"/>
+                </a:solidFill>
+                <a:latin typeface="Calibri"/>
+              </a:rPr>
+              <a:t>Everything you learned this term transfers directly. The advanced course starts by taking this program apart.</a:t>
             </a:r>
           </a:p>
         </p:txBody>
@@ -11543,7 +11593,7 @@
                 </a:solidFill>
                 <a:latin typeface="Calibri"/>
               </a:rPr>
-              <a:t>Check yourself</a:t>
+              <a:t>Why this is worth your time</a:t>
             </a:r>
           </a:p>
         </p:txBody>
@@ -11684,6 +11734,479 @@
                 <a:latin typeface="Calibri"/>
               </a:rPr>
               <a:t>21</a:t>
+            </a:r>
+          </a:p>
+        </p:txBody>
+      </p:sp>
+      <p:sp>
+        <p:nvSpPr>
+          <p:cNvPr id="6" name="TextBox 5"/>
+          <p:cNvSpPr txBox="1"/>
+          <p:nvPr/>
+        </p:nvSpPr>
+        <p:spPr>
+          <a:xfrm>
+            <a:off x="502920" y="1188720"/>
+            <a:ext cx="11185855" cy="530352"/>
+          </a:xfrm>
+          <a:prstGeom prst="rect">
+            <a:avLst/>
+          </a:prstGeom>
+          <a:noFill/>
+        </p:spPr>
+        <p:txBody>
+          <a:bodyPr wrap="square" lIns="0" tIns="0" rIns="0" bIns="0">
+            <a:spAutoFit/>
+          </a:bodyPr>
+          <a:lstStyle/>
+          <a:p>
+            <a:pPr algn="l">
+              <a:lnSpc>
+                <a:spcPct val="100000"/>
+              </a:lnSpc>
+              <a:spcAft>
+                <a:spcPts val="600"/>
+              </a:spcAft>
+              <a:defRPr sz="1900" b="1">
+                <a:solidFill>
+                  <a:srgbClr val="0E7C86"/>
+                </a:solidFill>
+                <a:latin typeface="Calibri"/>
+              </a:defRPr>
+            </a:pPr>
+            <a:r>
+              <a:rPr sz="1900" b="1">
+                <a:solidFill>
+                  <a:srgbClr val="0E7C86"/>
+                </a:solidFill>
+                <a:latin typeface="Calibri"/>
+              </a:rPr>
+              <a:t>Robotics and STEM, and where they lead</a:t>
+            </a:r>
+          </a:p>
+        </p:txBody>
+      </p:sp>
+      <p:sp>
+        <p:nvSpPr>
+          <p:cNvPr id="7" name="TextBox 6"/>
+          <p:cNvSpPr txBox="1"/>
+          <p:nvPr/>
+        </p:nvSpPr>
+        <p:spPr>
+          <a:xfrm>
+            <a:off x="502920" y="1755648"/>
+            <a:ext cx="11185855" cy="4507992"/>
+          </a:xfrm>
+          <a:prstGeom prst="rect">
+            <a:avLst/>
+          </a:prstGeom>
+          <a:noFill/>
+        </p:spPr>
+        <p:txBody>
+          <a:bodyPr wrap="square" lIns="0" tIns="0" rIns="0" bIns="0">
+            <a:spAutoFit/>
+          </a:bodyPr>
+          <a:lstStyle/>
+          <a:p>
+            <a:pPr algn="l">
+              <a:lnSpc>
+                <a:spcPct val="100000"/>
+              </a:lnSpc>
+              <a:spcAft>
+                <a:spcPts val="900"/>
+              </a:spcAft>
+              <a:defRPr sz="1600" b="0">
+                <a:solidFill>
+                  <a:srgbClr val="222222"/>
+                </a:solidFill>
+                <a:latin typeface="Calibri"/>
+              </a:defRPr>
+            </a:pPr>
+            <a:r>
+              <a:rPr sz="1600" b="0">
+                <a:solidFill>
+                  <a:srgbClr val="222222"/>
+                </a:solidFill>
+                <a:latin typeface="Calibri"/>
+              </a:rPr>
+              <a:t>At Oceanology International Americas in San Diego, we asked a panel what the transition opportunities are:</a:t>
+            </a:r>
+          </a:p>
+          <a:p>
+            <a:pPr algn="l">
+              <a:lnSpc>
+                <a:spcPct val="100000"/>
+              </a:lnSpc>
+              <a:spcAft>
+                <a:spcPts val="900"/>
+              </a:spcAft>
+              <a:defRPr sz="1600" b="0">
+                <a:solidFill>
+                  <a:srgbClr val="222222"/>
+                </a:solidFill>
+                <a:latin typeface="Calibri"/>
+              </a:defRPr>
+            </a:pPr>
+          </a:p>
+          <a:p>
+            <a:pPr algn="l">
+              <a:lnSpc>
+                <a:spcPct val="100000"/>
+              </a:lnSpc>
+              <a:spcAft>
+                <a:spcPts val="900"/>
+              </a:spcAft>
+              <a:defRPr sz="1600" b="0">
+                <a:solidFill>
+                  <a:srgbClr val="222222"/>
+                </a:solidFill>
+                <a:latin typeface="Calibri"/>
+              </a:defRPr>
+            </a:pPr>
+            <a:r>
+              <a:rPr sz="1600" b="0">
+                <a:solidFill>
+                  <a:srgbClr val="222222"/>
+                </a:solidFill>
+                <a:latin typeface="Calibri"/>
+              </a:rPr>
+              <a:t>Dr Rick Spinrad, NOAA Administrator, said a knowledge of robotics and STEM is a competitive advantage for entry-level positions.</a:t>
+            </a:r>
+          </a:p>
+          <a:p>
+            <a:pPr algn="l">
+              <a:lnSpc>
+                <a:spcPct val="100000"/>
+              </a:lnSpc>
+              <a:spcAft>
+                <a:spcPts val="900"/>
+              </a:spcAft>
+              <a:defRPr sz="1600" b="0">
+                <a:solidFill>
+                  <a:srgbClr val="222222"/>
+                </a:solidFill>
+                <a:latin typeface="Calibri"/>
+              </a:defRPr>
+            </a:pPr>
+            <a:r>
+              <a:rPr sz="1600" b="0">
+                <a:solidFill>
+                  <a:srgbClr val="222222"/>
+                </a:solidFill>
+                <a:latin typeface="Calibri"/>
+              </a:rPr>
+              <a:t>Rear Admiral Ron Piret, USN, said they are looking for students with robotics and STEM education for operational careers.</a:t>
+            </a:r>
+          </a:p>
+          <a:p>
+            <a:pPr algn="l">
+              <a:lnSpc>
+                <a:spcPct val="100000"/>
+              </a:lnSpc>
+              <a:spcAft>
+                <a:spcPts val="900"/>
+              </a:spcAft>
+              <a:defRPr sz="1600" b="0">
+                <a:solidFill>
+                  <a:srgbClr val="222222"/>
+                </a:solidFill>
+                <a:latin typeface="Calibri"/>
+              </a:defRPr>
+            </a:pPr>
+            <a:r>
+              <a:rPr sz="1600" b="0">
+                <a:solidFill>
+                  <a:srgbClr val="222222"/>
+                </a:solidFill>
+                <a:latin typeface="Calibri"/>
+              </a:rPr>
+              <a:t>Kendra MacDonald, CEO of Canada's Ocean Supercluster, said that whether you become a doctor, a lawyer or a scientist, STEM will help you.</a:t>
+            </a:r>
+          </a:p>
+          <a:p>
+            <a:pPr algn="l">
+              <a:lnSpc>
+                <a:spcPct val="100000"/>
+              </a:lnSpc>
+              <a:spcAft>
+                <a:spcPts val="900"/>
+              </a:spcAft>
+              <a:defRPr sz="1600" b="0">
+                <a:solidFill>
+                  <a:srgbClr val="222222"/>
+                </a:solidFill>
+                <a:latin typeface="Calibri"/>
+              </a:defRPr>
+            </a:pPr>
+          </a:p>
+          <a:p>
+            <a:pPr algn="l">
+              <a:lnSpc>
+                <a:spcPct val="100000"/>
+              </a:lnSpc>
+              <a:spcAft>
+                <a:spcPts val="900"/>
+              </a:spcAft>
+              <a:defRPr sz="1600" b="0">
+                <a:solidFill>
+                  <a:srgbClr val="222222"/>
+                </a:solidFill>
+                <a:latin typeface="Calibri"/>
+              </a:defRPr>
+            </a:pPr>
+            <a:r>
+              <a:rPr sz="1600" b="0">
+                <a:solidFill>
+                  <a:srgbClr val="222222"/>
+                </a:solidFill>
+                <a:latin typeface="Calibri"/>
+              </a:rPr>
+              <a:t>What you have actually practised this term: reading somebody else's code, changing one thing at a time, measuring instead of guessing, and working out whether a fault is mechanical, electrical or software.</a:t>
+            </a:r>
+          </a:p>
+          <a:p>
+            <a:pPr algn="l">
+              <a:lnSpc>
+                <a:spcPct val="100000"/>
+              </a:lnSpc>
+              <a:spcAft>
+                <a:spcPts val="900"/>
+              </a:spcAft>
+              <a:defRPr sz="1600" b="0">
+                <a:solidFill>
+                  <a:srgbClr val="222222"/>
+                </a:solidFill>
+                <a:latin typeface="Calibri"/>
+              </a:defRPr>
+            </a:pPr>
+          </a:p>
+          <a:p>
+            <a:pPr algn="l">
+              <a:lnSpc>
+                <a:spcPct val="100000"/>
+              </a:lnSpc>
+              <a:spcAft>
+                <a:spcPts val="900"/>
+              </a:spcAft>
+              <a:defRPr sz="1600" b="0">
+                <a:solidFill>
+                  <a:srgbClr val="222222"/>
+                </a:solidFill>
+                <a:latin typeface="Calibri"/>
+              </a:defRPr>
+            </a:pPr>
+            <a:r>
+              <a:rPr sz="1600" b="0">
+                <a:solidFill>
+                  <a:srgbClr val="222222"/>
+                </a:solidFill>
+                <a:latin typeface="Calibri"/>
+              </a:rPr>
+              <a:t>Those four habits are the job. The vehicle was just the excuse.</a:t>
+            </a:r>
+          </a:p>
+        </p:txBody>
+      </p:sp>
+    </p:spTree>
+  </p:cSld>
+  <p:clrMapOvr>
+    <a:masterClrMapping/>
+  </p:clrMapOvr>
+</p:sld>
+</file>
+
+<file path=ppt/slides/slide23.xml><?xml version="1.0" encoding="utf-8"?>
+<p:sld xmlns:a="http://schemas.openxmlformats.org/drawingml/2006/main" xmlns:p="http://schemas.openxmlformats.org/presentationml/2006/main" xmlns:r="http://schemas.openxmlformats.org/officeDocument/2006/relationships">
+  <p:cSld>
+    <p:spTree>
+      <p:nvGrpSpPr>
+        <p:cNvPr id="1" name=""/>
+        <p:cNvGrpSpPr/>
+        <p:nvPr/>
+      </p:nvGrpSpPr>
+      <p:grpSpPr/>
+      <p:sp>
+        <p:nvSpPr>
+          <p:cNvPr id="2" name="Title 1"/>
+          <p:cNvSpPr>
+            <a:spLocks noGrp="1"/>
+          </p:cNvSpPr>
+          <p:nvPr>
+            <p:ph type="title"/>
+          </p:nvPr>
+        </p:nvSpPr>
+        <p:spPr>
+          <a:xfrm>
+            <a:off x="502920" y="274320"/>
+            <a:ext cx="11185855" cy="777240"/>
+          </a:xfrm>
+        </p:spPr>
+        <p:txBody>
+          <a:bodyPr wrap="square" anchor="b"/>
+          <a:lstStyle/>
+          <a:p>
+            <a:pPr algn="l">
+              <a:lnSpc>
+                <a:spcPct val="100000"/>
+              </a:lnSpc>
+              <a:spcAft>
+                <a:spcPts val="0"/>
+              </a:spcAft>
+              <a:defRPr sz="2800" b="1">
+                <a:solidFill>
+                  <a:srgbClr val="1F3A5F"/>
+                </a:solidFill>
+                <a:latin typeface="Calibri"/>
+              </a:defRPr>
+            </a:pPr>
+            <a:r>
+              <a:rPr sz="2800" b="1">
+                <a:solidFill>
+                  <a:srgbClr val="1F3A5F"/>
+                </a:solidFill>
+                <a:latin typeface="Calibri"/>
+              </a:rPr>
+              <a:t>Check yourself</a:t>
+            </a:r>
+          </a:p>
+        </p:txBody>
+      </p:sp>
+      <p:sp>
+        <p:nvSpPr>
+          <p:cNvPr id="3" name="Rectangle 2"/>
+          <p:cNvSpPr/>
+          <p:nvPr/>
+        </p:nvSpPr>
+        <p:spPr>
+          <a:xfrm>
+            <a:off x="502920" y="1097280"/>
+            <a:ext cx="11185855" cy="19050"/>
+          </a:xfrm>
+          <a:prstGeom prst="rect">
+            <a:avLst/>
+          </a:prstGeom>
+          <a:solidFill>
+            <a:srgbClr val="C8D2DE"/>
+          </a:solidFill>
+          <a:ln>
+            <a:noFill/>
+          </a:ln>
+          <a:effectLst/>
+        </p:spPr>
+        <p:style>
+          <a:lnRef idx="1">
+            <a:schemeClr val="accent1"/>
+          </a:lnRef>
+          <a:fillRef idx="3">
+            <a:schemeClr val="accent1"/>
+          </a:fillRef>
+          <a:effectRef idx="2">
+            <a:schemeClr val="accent1"/>
+          </a:effectRef>
+          <a:fontRef idx="minor">
+            <a:schemeClr val="lt1"/>
+          </a:fontRef>
+        </p:style>
+        <p:txBody>
+          <a:bodyPr rtlCol="0" anchor="ctr"/>
+          <a:lstStyle/>
+          <a:p>
+            <a:pPr algn="ctr"/>
+          </a:p>
+        </p:txBody>
+      </p:sp>
+      <p:sp>
+        <p:nvSpPr>
+          <p:cNvPr id="4" name="TextBox 3"/>
+          <p:cNvSpPr txBox="1"/>
+          <p:nvPr/>
+        </p:nvSpPr>
+        <p:spPr>
+          <a:xfrm>
+            <a:off x="502920" y="6382512"/>
+            <a:ext cx="10545775" cy="274320"/>
+          </a:xfrm>
+          <a:prstGeom prst="rect">
+            <a:avLst/>
+          </a:prstGeom>
+          <a:noFill/>
+        </p:spPr>
+        <p:txBody>
+          <a:bodyPr wrap="square" lIns="0" tIns="0">
+            <a:spAutoFit/>
+          </a:bodyPr>
+          <a:lstStyle/>
+          <a:p>
+            <a:pPr algn="l">
+              <a:lnSpc>
+                <a:spcPct val="100000"/>
+              </a:lnSpc>
+              <a:spcAft>
+                <a:spcPts val="0"/>
+              </a:spcAft>
+              <a:defRPr sz="900" b="0">
+                <a:solidFill>
+                  <a:srgbClr val="666666"/>
+                </a:solidFill>
+                <a:latin typeface="Calibri"/>
+              </a:defRPr>
+            </a:pPr>
+            <a:r>
+              <a:rPr sz="900" b="0">
+                <a:solidFill>
+                  <a:srgbClr val="666666"/>
+                </a:solidFill>
+                <a:latin typeface="Calibri"/>
+              </a:rPr>
+              <a:t>Pathfinder Beginner - PS3  |  Lesson 5</a:t>
+            </a:r>
+          </a:p>
+        </p:txBody>
+      </p:sp>
+      <p:sp>
+        <p:nvSpPr>
+          <p:cNvPr id="5" name="TextBox 4"/>
+          <p:cNvSpPr txBox="1"/>
+          <p:nvPr/>
+        </p:nvSpPr>
+        <p:spPr>
+          <a:xfrm>
+            <a:off x="11231575" y="6382512"/>
+            <a:ext cx="457200" cy="274320"/>
+          </a:xfrm>
+          <a:prstGeom prst="rect">
+            <a:avLst/>
+          </a:prstGeom>
+          <a:noFill/>
+        </p:spPr>
+        <p:txBody>
+          <a:bodyPr wrap="square" lIns="0" tIns="0">
+            <a:spAutoFit/>
+          </a:bodyPr>
+          <a:lstStyle/>
+          <a:p>
+            <a:pPr algn="r">
+              <a:lnSpc>
+                <a:spcPct val="100000"/>
+              </a:lnSpc>
+              <a:spcAft>
+                <a:spcPts val="0"/>
+              </a:spcAft>
+              <a:defRPr sz="900" b="0">
+                <a:solidFill>
+                  <a:srgbClr val="666666"/>
+                </a:solidFill>
+                <a:latin typeface="Calibri"/>
+              </a:defRPr>
+            </a:pPr>
+            <a:r>
+              <a:rPr sz="900" b="0">
+                <a:solidFill>
+                  <a:srgbClr val="666666"/>
+                </a:solidFill>
+                <a:latin typeface="Calibri"/>
+              </a:rPr>
+              <a:t>22</a:t>
             </a:r>
           </a:p>
         </p:txBody>

--- a/ground-vehicle/docs/courses/beginner-ps3/l5_maneuvers_with_lights.pptx
+++ b/ground-vehicle/docs/courses/beginner-ps3/l5_maneuvers_with_lights.pptx
@@ -4792,7 +4792,7 @@
       </p:sp>
       <p:sp>
         <p:nvSpPr>
-          <p:cNvPr id="7" name="Rounded Rectangle 6"/>
+          <p:cNvPr id="7" name="CODE_PANEL"/>
           <p:cNvSpPr/>
           <p:nvPr/>
         </p:nvSpPr>
@@ -17623,7 +17623,7 @@
       </p:sp>
       <p:sp>
         <p:nvSpPr>
-          <p:cNvPr id="7" name="Rounded Rectangle 6"/>
+          <p:cNvPr id="7" name="CODE_PANEL"/>
           <p:cNvSpPr/>
           <p:nvPr/>
         </p:nvSpPr>

--- a/ground-vehicle/docs/courses/beginner-ps3/l5_maneuvers_with_lights.pptx
+++ b/ground-vehicle/docs/courses/beginner-ps3/l5_maneuvers_with_lights.pptx
@@ -1799,7 +1799,7 @@
               <a:rPr sz="1200">
                 <a:latin typeface="Calibri"/>
               </a:rPr>
-              <a:t>1.0 ms is one end, 1.5 ms is centre, 2.0 ms is the other end. Those three numbers are the whole protocol.</a:t>
+              <a:t>1.0 ms is one end, 1.5 ms is center, 2.0 ms is the other end. Those three numbers are the whole protocol.</a:t>
             </a:r>
           </a:p>
           <a:p>
@@ -2309,7 +2309,7 @@
               <a:rPr sz="1200">
                 <a:latin typeface="Calibri"/>
               </a:rPr>
-              <a:t>The four arguments are how many pixels, which pin, the colour order these parts want, and the speed they are clocked at.</a:t>
+              <a:t>The four arguments are how many pixels, which pin, the color order these parts want, and the speed they are clocked at.</a:t>
             </a:r>
           </a:p>
           <a:p>
@@ -2317,7 +2317,7 @@
               <a:rPr sz="1200">
                 <a:latin typeface="Calibri"/>
               </a:rPr>
-              <a:t>The deadzone stops a stick that never quite centres from driving the vehicle. At 0 it creeps across the room on its own.</a:t>
+              <a:t>The deadzone stops a stick that never quite centers from driving the vehicle. At 0 it creeps across the room on its own.</a:t>
             </a:r>
           </a:p>
           <a:p>
@@ -3721,7 +3721,7 @@
               <a:rPr sz="1200">
                 <a:latin typeface="Calibri"/>
               </a:rPr>
-              <a:t>A servo centres on a 1.5 ms pulse, sent every 20 ms.</a:t>
+              <a:t>A servo centers on a 1.5 ms pulse, sent every 20 ms.</a:t>
             </a:r>
           </a:p>
           <a:p>
@@ -13091,7 +13091,7 @@
                 </a:solidFill>
                 <a:latin typeface="Calibri"/>
               </a:rPr>
-              <a:t>2.  Put it down and drive. Watch the lights follow the stick: headlights, tail lights, brake lights when you stop, white in reverse, amber on the side you are turning towards.</a:t>
+              <a:t>2.  Put it down and drive. Watch the lights follow the stick: headlights, tail lights, brake lights when you stop, white in reverse, amber on the side you are turning toward.</a:t>
             </a:r>
           </a:p>
         </p:txBody>
@@ -14140,7 +14140,7 @@
                 </a:solidFill>
                 <a:latin typeface="Calibri"/>
               </a:rPr>
-              <a:t>5.   Drive the vehicle with its full lighting behaviour running</a:t>
+              <a:t>5.   Drive the vehicle with its full lighting behavior running</a:t>
             </a:r>
           </a:p>
           <a:p>
@@ -15879,7 +15879,7 @@
                 </a:solidFill>
                 <a:latin typeface="Calibri"/>
               </a:rPr>
-              <a:t>centred</a:t>
+              <a:t>centerd</a:t>
             </a:r>
           </a:p>
         </p:txBody>
@@ -16549,7 +16549,7 @@
                 </a:solidFill>
                 <a:latin typeface="Calibri"/>
               </a:rPr>
-              <a:t>Each servo owns one direction of the stick, so one stick aims four independent things and each sits centred when the stick is not pushed its way.</a:t>
+              <a:t>Each servo owns one direction of the stick, so one stick aims four independent things and each sits centerd when the stick is not pushed its way.</a:t>
             </a:r>
           </a:p>
           <a:p>
@@ -20364,7 +20364,7 @@
                 </a:solidFill>
                 <a:latin typeface="Calibri"/>
               </a:rPr>
-              <a:t>Lesson 2  -  H-bridges, PWM and duty cycle, tank drive, dead reckoning, and the maths that predicts where the vehicle ends up.</a:t>
+              <a:t>Lesson 2  -  H-bridges, PWM and duty cycle, tank drive, dead reckoning, and the math that predicts where the vehicle ends up.</a:t>
             </a:r>
           </a:p>
           <a:p>
@@ -20414,7 +20414,7 @@
                 </a:solidFill>
                 <a:latin typeface="Calibri"/>
               </a:rPr>
-              <a:t>Lesson 4  -  addressable LEDs, colour and perception, the power budget, the LED map, and four patterns.</a:t>
+              <a:t>Lesson 4  -  addressable LEDs, color and perception, the power budget, the LED map, and four patterns.</a:t>
             </a:r>
           </a:p>
           <a:p>
@@ -24712,7 +24712,7 @@
                 </a:solidFill>
                 <a:latin typeface="Calibri"/>
               </a:rPr>
-              <a:t>What you have actually practised this term: reading somebody else's code, changing one thing at a time, measuring instead of guessing, and working out whether a fault is mechanical, electrical or software.</a:t>
+              <a:t>What you have actually practiced this term: reading somebody else's code, changing one thing at a time, measuring instead of guessing, and working out whether a fault is mechanical, electrical or software.</a:t>
             </a:r>
           </a:p>
           <a:p>
@@ -25914,7 +25914,7 @@
                 </a:solidFill>
                 <a:latin typeface="Calibri"/>
               </a:rPr>
-              <a:t>6.  A servo is centred by a pulse of what length? How often is it sent?</a:t>
+              <a:t>6.  A servo is centerd by a pulse of what length? How often is it sent?</a:t>
             </a:r>
           </a:p>
           <a:p>

--- a/ground-vehicle/docs/courses/beginner-ps3/l5_maneuvers_with_lights.pptx
+++ b/ground-vehicle/docs/courses/beginner-ps3/l5_maneuvers_with_lights.pptx
@@ -16492,17 +16492,17 @@
                 <a:spcPct val="100000"/>
               </a:lnSpc>
               <a:spcAft>
-                <a:spcPts val="500"/>
-              </a:spcAft>
-              <a:defRPr sz="1800" b="0">
-                <a:solidFill>
-                  <a:srgbClr val="222222"/>
-                </a:solidFill>
-                <a:latin typeface="Calibri"/>
-              </a:defRPr>
-            </a:pPr>
-            <a:r>
-              <a:rPr sz="1800" b="0">
+                <a:spcPts val="600"/>
+              </a:spcAft>
+              <a:defRPr sz="1900" b="0">
+                <a:solidFill>
+                  <a:srgbClr val="222222"/>
+                </a:solidFill>
+                <a:latin typeface="Calibri"/>
+              </a:defRPr>
+            </a:pPr>
+            <a:r>
+              <a:rPr sz="1900" b="0">
                 <a:solidFill>
                   <a:srgbClr val="222222"/>
                 </a:solidFill>
@@ -16517,9 +16517,9 @@
                 <a:spcPct val="100000"/>
               </a:lnSpc>
               <a:spcAft>
-                <a:spcPts val="500"/>
-              </a:spcAft>
-              <a:defRPr sz="1800" b="0">
+                <a:spcPts val="600"/>
+              </a:spcAft>
+              <a:defRPr sz="1900" b="0">
                 <a:solidFill>
                   <a:srgbClr val="222222"/>
                 </a:solidFill>
@@ -16533,17 +16533,17 @@
                 <a:spcPct val="100000"/>
               </a:lnSpc>
               <a:spcAft>
-                <a:spcPts val="500"/>
-              </a:spcAft>
-              <a:defRPr sz="1800" b="0">
-                <a:solidFill>
-                  <a:srgbClr val="222222"/>
-                </a:solidFill>
-                <a:latin typeface="Calibri"/>
-              </a:defRPr>
-            </a:pPr>
-            <a:r>
-              <a:rPr sz="1800" b="0">
+                <a:spcPts val="600"/>
+              </a:spcAft>
+              <a:defRPr sz="1900" b="0">
+                <a:solidFill>
+                  <a:srgbClr val="222222"/>
+                </a:solidFill>
+                <a:latin typeface="Calibri"/>
+              </a:defRPr>
+            </a:pPr>
+            <a:r>
+              <a:rPr sz="1900" b="0">
                 <a:solidFill>
                   <a:srgbClr val="222222"/>
                 </a:solidFill>
@@ -16558,9 +16558,9 @@
                 <a:spcPct val="100000"/>
               </a:lnSpc>
               <a:spcAft>
-                <a:spcPts val="500"/>
-              </a:spcAft>
-              <a:defRPr sz="1800" b="0">
+                <a:spcPts val="600"/>
+              </a:spcAft>
+              <a:defRPr sz="1900" b="0">
                 <a:solidFill>
                   <a:srgbClr val="222222"/>
                 </a:solidFill>
@@ -16574,17 +16574,17 @@
                 <a:spcPct val="100000"/>
               </a:lnSpc>
               <a:spcAft>
-                <a:spcPts val="500"/>
-              </a:spcAft>
-              <a:defRPr sz="1800" b="0">
-                <a:solidFill>
-                  <a:srgbClr val="222222"/>
-                </a:solidFill>
-                <a:latin typeface="Calibri"/>
-              </a:defRPr>
-            </a:pPr>
-            <a:r>
-              <a:rPr sz="1800" b="0">
+                <a:spcPts val="600"/>
+              </a:spcAft>
+              <a:defRPr sz="1900" b="0">
+                <a:solidFill>
+                  <a:srgbClr val="222222"/>
+                </a:solidFill>
+                <a:latin typeface="Calibri"/>
+              </a:defRPr>
+            </a:pPr>
+            <a:r>
+              <a:rPr sz="1900" b="0">
                 <a:solidFill>
                   <a:srgbClr val="222222"/>
                 </a:solidFill>
@@ -16599,9 +16599,9 @@
                 <a:spcPct val="100000"/>
               </a:lnSpc>
               <a:spcAft>
-                <a:spcPts val="500"/>
-              </a:spcAft>
-              <a:defRPr sz="1800" b="0">
+                <a:spcPts val="600"/>
+              </a:spcAft>
+              <a:defRPr sz="1900" b="0">
                 <a:solidFill>
                   <a:srgbClr val="222222"/>
                 </a:solidFill>
@@ -16615,17 +16615,17 @@
                 <a:spcPct val="100000"/>
               </a:lnSpc>
               <a:spcAft>
-                <a:spcPts val="500"/>
-              </a:spcAft>
-              <a:defRPr sz="1800" b="0">
-                <a:solidFill>
-                  <a:srgbClr val="222222"/>
-                </a:solidFill>
-                <a:latin typeface="Calibri"/>
-              </a:defRPr>
-            </a:pPr>
-            <a:r>
-              <a:rPr sz="1800" b="0">
+                <a:spcPts val="600"/>
+              </a:spcAft>
+              <a:defRPr sz="1900" b="0">
+                <a:solidFill>
+                  <a:srgbClr val="222222"/>
+                </a:solidFill>
+                <a:latin typeface="Calibri"/>
+              </a:defRPr>
+            </a:pPr>
+            <a:r>
+              <a:rPr sz="1900" b="0">
                 <a:solidFill>
                   <a:srgbClr val="222222"/>
                 </a:solidFill>

--- a/ground-vehicle/docs/courses/beginner-ps3/l5_maneuvers_with_lights.pptx
+++ b/ground-vehicle/docs/courses/beginner-ps3/l5_maneuvers_with_lights.pptx
@@ -20308,7 +20308,7 @@
         <p:spPr>
           <a:xfrm>
             <a:off x="502920" y="1188720"/>
-            <a:ext cx="5364327" cy="457200"/>
+            <a:ext cx="5092963" cy="457200"/>
           </a:xfrm>
           <a:prstGeom prst="rect">
             <a:avLst/>
@@ -20356,7 +20356,7 @@
         <p:spPr>
           <a:xfrm>
             <a:off x="502920" y="1700784"/>
-            <a:ext cx="5364327" cy="3474720"/>
+            <a:ext cx="5092963" cy="3474720"/>
           </a:xfrm>
           <a:prstGeom prst="rect">
             <a:avLst/>
@@ -20453,8 +20453,8 @@
         </p:nvSpPr>
         <p:spPr>
           <a:xfrm>
-            <a:off x="6324447" y="1188720"/>
-            <a:ext cx="5364327" cy="457200"/>
+            <a:off x="6053083" y="1188720"/>
+            <a:ext cx="5635692" cy="457200"/>
           </a:xfrm>
           <a:prstGeom prst="rect">
             <a:avLst/>
@@ -20501,8 +20501,8 @@
         </p:nvSpPr>
         <p:spPr>
           <a:xfrm>
-            <a:off x="6324447" y="1700784"/>
-            <a:ext cx="5364327" cy="3474720"/>
+            <a:off x="6053083" y="1700784"/>
+            <a:ext cx="5635692" cy="3474720"/>
           </a:xfrm>
           <a:prstGeom prst="rect">
             <a:avLst/>
@@ -20520,7 +20520,7 @@
                 <a:spcPct val="100000"/>
               </a:lnSpc>
               <a:spcAft>
-                <a:spcPts val="400"/>
+                <a:spcPts val="800"/>
               </a:spcAft>
               <a:defRPr sz="1800" b="0">
                 <a:solidFill>
@@ -20545,7 +20545,7 @@
                 <a:spcPct val="100000"/>
               </a:lnSpc>
               <a:spcAft>
-                <a:spcPts val="400"/>
+                <a:spcPts val="800"/>
               </a:spcAft>
               <a:defRPr sz="1800" b="0">
                 <a:solidFill>
@@ -20570,7 +20570,7 @@
                 <a:spcPct val="100000"/>
               </a:lnSpc>
               <a:spcAft>
-                <a:spcPts val="400"/>
+                <a:spcPts val="800"/>
               </a:spcAft>
               <a:defRPr sz="1800" b="0">
                 <a:solidFill>
@@ -20595,7 +20595,7 @@
                 <a:spcPct val="100000"/>
               </a:lnSpc>
               <a:spcAft>
-                <a:spcPts val="400"/>
+                <a:spcPts val="800"/>
               </a:spcAft>
               <a:defRPr sz="1800" b="0">
                 <a:solidFill>
@@ -20620,7 +20620,7 @@
                 <a:spcPct val="100000"/>
               </a:lnSpc>
               <a:spcAft>
-                <a:spcPts val="400"/>
+                <a:spcPts val="800"/>
               </a:spcAft>
               <a:defRPr sz="1800" b="0">
                 <a:solidFill>
@@ -20645,7 +20645,7 @@
                 <a:spcPct val="100000"/>
               </a:lnSpc>
               <a:spcAft>
-                <a:spcPts val="400"/>
+                <a:spcPts val="800"/>
               </a:spcAft>
               <a:defRPr sz="1800" b="0">
                 <a:solidFill>
@@ -20670,7 +20670,7 @@
                 <a:spcPct val="100000"/>
               </a:lnSpc>
               <a:spcAft>
-                <a:spcPts val="400"/>
+                <a:spcPts val="800"/>
               </a:spcAft>
               <a:defRPr sz="1800" b="0">
                 <a:solidFill>
@@ -20695,7 +20695,7 @@
                 <a:spcPct val="100000"/>
               </a:lnSpc>
               <a:spcAft>
-                <a:spcPts val="400"/>
+                <a:spcPts val="800"/>
               </a:spcAft>
               <a:defRPr sz="1800" b="0">
                 <a:solidFill>

--- a/ground-vehicle/docs/courses/beginner-ps3/l5_maneuvers_with_lights.pptx
+++ b/ground-vehicle/docs/courses/beginner-ps3/l5_maneuvers_with_lights.pptx
@@ -36,7 +36,6 @@
     <p:sldId id="284" r:id="rId36"/>
     <p:sldId id="285" r:id="rId37"/>
     <p:sldId id="286" r:id="rId38"/>
-    <p:sldId id="287" r:id="rId39"/>
   </p:sldIdLst>
   <p:sldSz cx="12191695" cy="6858000" type="screen4x3"/>
   <p:notesSz cx="6858000" cy="9144000"/>
@@ -2097,7 +2096,31 @@
               <a:rPr sz="1200">
                 <a:latin typeface="Calibri"/>
               </a:rPr>
-              <a:t>Twenty seconds. Last one, and it is the real program.</a:t>
+              <a:t>Step 2 is not optional. Read it before uploading it - that is the habit the whole course has been building.</a:t>
+            </a:r>
+          </a:p>
+          <a:p>
+            <a:r>
+              <a:rPr sz="1200">
+                <a:latin typeface="Calibri"/>
+              </a:rPr>
+              <a:t>Step 6 is the assessment: three things they have not seen, and what they do. Collect the answers, they are a good measure of the term.</a:t>
+            </a:r>
+          </a:p>
+          <a:p>
+            <a:r>
+              <a:rPr sz="1200">
+                <a:latin typeface="Calibri"/>
+              </a:rPr>
+              <a:t>The green blink means it is waiting for a controller. They saw showWaitingLights() in the code.</a:t>
+            </a:r>
+          </a:p>
+          <a:p>
+            <a:r>
+              <a:rPr sz="1200">
+                <a:latin typeface="Calibri"/>
+              </a:rPr>
+              <a:t>Give this the full thirty minutes and circulate. This is the last time they get help before the race.</a:t>
             </a:r>
           </a:p>
         </p:txBody>
@@ -2170,7 +2193,7 @@
               <a:rPr sz="1200">
                 <a:latin typeface="Calibri"/>
               </a:rPr>
-              <a:t>Step 2 is not optional. Read it before uploading it - that is the habit the whole course has been building.</a:t>
+              <a:t>Calibrate before racing. If you let them race first you will never get them back to the measurement.</a:t>
             </a:r>
           </a:p>
           <a:p>
@@ -2178,7 +2201,7 @@
               <a:rPr sz="1200">
                 <a:latin typeface="Calibri"/>
               </a:rPr>
-              <a:t>Step 6 is the assessment: three things they have not seen, and what they do. Collect the answers, they are a good measure of the term.</a:t>
+              <a:t>The comparison with their Lesson 2 calculation is the whole point. Ask each group how close they were before you start the racing.</a:t>
             </a:r>
           </a:p>
           <a:p>
@@ -2186,7 +2209,7 @@
               <a:rPr sz="1200">
                 <a:latin typeface="Calibri"/>
               </a:rPr>
-              <a:t>The green blink means it is waiting for a controller. They saw showWaitingLights() in the code.</a:t>
+              <a:t>Braking by reversing is the detail that decides the drag race. Half power for a short time is usually right.</a:t>
             </a:r>
           </a:p>
           <a:p>
@@ -2194,7 +2217,15 @@
               <a:rPr sz="1200">
                 <a:latin typeface="Calibri"/>
               </a:rPr>
-              <a:t>Give this the full thirty minutes and circulate. This is the last time they get help before the race.</a:t>
+              <a:t>Keeping it straight is harder than going fast, because only one command runs at a time. Let them discover that.</a:t>
+            </a:r>
+          </a:p>
+          <a:p>
+            <a:r>
+              <a:rPr sz="1200">
+                <a:latin typeface="Calibri"/>
+              </a:rPr>
+              <a:t>For the course race, two seconds per cone touched keeps it honest.</a:t>
             </a:r>
           </a:p>
         </p:txBody>
@@ -2267,7 +2298,7 @@
               <a:rPr sz="1200">
                 <a:latin typeface="Calibri"/>
               </a:rPr>
-              <a:t>Calibrate before racing. If you let them race first you will never get them back to the measurement.</a:t>
+              <a:t>These are real projects, not filler. Each one is a genuine addition to the program they now understand.</a:t>
             </a:r>
           </a:p>
           <a:p>
@@ -2275,7 +2306,7 @@
               <a:rPr sz="1200">
                 <a:latin typeface="Calibri"/>
               </a:rPr>
-              <a:t>The comparison with their Lesson 2 calculation is the whole point. Ask each group how close they were before you start the racing.</a:t>
+              <a:t>The range finder and the servos are the two the kit already has parts for. Point that out - it is the difference between an idea and a plan.</a:t>
             </a:r>
           </a:p>
           <a:p>
@@ -2283,23 +2314,7 @@
               <a:rPr sz="1200">
                 <a:latin typeface="Calibri"/>
               </a:rPr>
-              <a:t>Braking by reversing is the detail that decides the drag race. Half power for a short time is usually right.</a:t>
-            </a:r>
-          </a:p>
-          <a:p>
-            <a:r>
-              <a:rPr sz="1200">
-                <a:latin typeface="Calibri"/>
-              </a:rPr>
-              <a:t>Keeping it straight is harder than going fast, because only one command runs at a time. Let them discover that.</a:t>
-            </a:r>
-          </a:p>
-          <a:p>
-            <a:r>
-              <a:rPr sz="1200">
-                <a:latin typeface="Calibri"/>
-              </a:rPr>
-              <a:t>For the course race, two seconds per cone touched keeps it honest.</a:t>
+              <a:t>If anybody is staying on after the course, get them to pick one today while the enthusiasm is high.</a:t>
             </a:r>
           </a:p>
         </p:txBody>
@@ -2372,7 +2387,7 @@
               <a:rPr sz="1200">
                 <a:latin typeface="Calibri"/>
               </a:rPr>
-              <a:t>These are real projects, not filler. Each one is a genuine addition to the program they now understand.</a:t>
+              <a:t>Show these AFTER the projects list, not before. The point is that the list is not hypothetical.</a:t>
             </a:r>
           </a:p>
           <a:p>
@@ -2380,7 +2395,7 @@
               <a:rPr sz="1200">
                 <a:latin typeface="Calibri"/>
               </a:rPr>
-              <a:t>The range finder and the servos are the two the kit already has parts for. Point that out - it is the difference between an idea and a plan.</a:t>
+              <a:t>The arm is servo outputs, which they met earlier today. The range finder is one new sensor and a threshold.</a:t>
             </a:r>
           </a:p>
           <a:p>
@@ -2388,7 +2403,15 @@
               <a:rPr sz="1200">
                 <a:latin typeface="Calibri"/>
               </a:rPr>
-              <a:t>If anybody is staying on after the course, get them to pick one today while the enthusiasm is high.</a:t>
+              <a:t>Neither needed a different vehicle. That is the message.</a:t>
+            </a:r>
+          </a:p>
+          <a:p>
+            <a:r>
+              <a:rPr sz="1200">
+                <a:latin typeface="Calibri"/>
+              </a:rPr>
+              <a:t>If either is in the room, get it out and let people handle it.</a:t>
             </a:r>
           </a:p>
         </p:txBody>
@@ -2461,7 +2484,7 @@
               <a:rPr sz="1200">
                 <a:latin typeface="Calibri"/>
               </a:rPr>
-              <a:t>Show these AFTER the projects list, not before. The point is that the list is not hypothetical.</a:t>
+              <a:t>Left column is where robotics goes. Right column is the advanced course, which is the same vehicle taken apart properly.</a:t>
             </a:r>
           </a:p>
           <a:p>
@@ -2469,23 +2492,7 @@
               <a:rPr sz="1200">
                 <a:latin typeface="Calibri"/>
               </a:rPr>
-              <a:t>The arm is servo outputs, which they met earlier today. The range finder is one new sensor and a threshold.</a:t>
-            </a:r>
-          </a:p>
-          <a:p>
-            <a:r>
-              <a:rPr sz="1200">
-                <a:latin typeface="Calibri"/>
-              </a:rPr>
-              <a:t>Neither needed a different vehicle. That is the message.</a:t>
-            </a:r>
-          </a:p>
-          <a:p>
-            <a:r>
-              <a:rPr sz="1200">
-                <a:latin typeface="Calibri"/>
-              </a:rPr>
-              <a:t>If either is in the room, get it out and let people handle it.</a:t>
+              <a:t>Everything they learned this term transfers directly. Say so - the advanced course opens by dismantling this program.</a:t>
             </a:r>
           </a:p>
         </p:txBody>
@@ -2639,7 +2646,7 @@
               <a:rPr sz="1200">
                 <a:latin typeface="Calibri"/>
               </a:rPr>
-              <a:t>Left column is where robotics goes. Right column is the advanced course, which is the same vehicle taken apart properly.</a:t>
+              <a:t>These are real quotes from a real panel. Say who the people are, briefly, so the names mean something.</a:t>
             </a:r>
           </a:p>
           <a:p>
@@ -2647,7 +2654,15 @@
               <a:rPr sz="1200">
                 <a:latin typeface="Calibri"/>
               </a:rPr>
-              <a:t>Everything they learned this term transfers directly. Say so - the advanced course opens by dismantling this program.</a:t>
+              <a:t>The paragraph that matters is the last one: reading someone else's code, changing one thing at a time, measuring instead of guessing, and locating a fault. Those four habits are the job.</a:t>
+            </a:r>
+          </a:p>
+          <a:p>
+            <a:r>
+              <a:rPr sz="1200">
+                <a:latin typeface="Calibri"/>
+              </a:rPr>
+              <a:t>Finish on the line about the vehicle being the excuse. It is true, and it is the right note to end on.</a:t>
             </a:r>
           </a:p>
         </p:txBody>
@@ -2673,95 +2688,6 @@
 </file>
 
 <file path=ppt/notesSlides/notesSlide31.xml><?xml version="1.0" encoding="utf-8"?>
-<p:notes xmlns:a="http://schemas.openxmlformats.org/drawingml/2006/main" xmlns:p="http://schemas.openxmlformats.org/presentationml/2006/main" xmlns:r="http://schemas.openxmlformats.org/officeDocument/2006/relationships">
-  <p:cSld>
-    <p:spTree>
-      <p:nvGrpSpPr>
-        <p:cNvPr id="1" name=""/>
-        <p:cNvGrpSpPr/>
-        <p:nvPr/>
-      </p:nvGrpSpPr>
-      <p:grpSpPr>
-        <a:xfrm>
-          <a:off x="0" y="0"/>
-          <a:ext cx="0" cy="0"/>
-          <a:chOff x="0" y="0"/>
-          <a:chExt cx="0" cy="0"/>
-        </a:xfrm>
-      </p:grpSpPr>
-      <p:sp>
-        <p:nvSpPr>
-          <p:cNvPr id="2" name="Slide Image Placeholder 1"/>
-          <p:cNvSpPr>
-            <a:spLocks noGrp="1"/>
-          </p:cNvSpPr>
-          <p:nvPr>
-            <p:ph type="sldImg" idx="2"/>
-          </p:nvPr>
-        </p:nvSpPr>
-        <p:spPr/>
-      </p:sp>
-      <p:sp>
-        <p:nvSpPr>
-          <p:cNvPr id="3" name="Notes Placeholder 2"/>
-          <p:cNvSpPr>
-            <a:spLocks noGrp="1"/>
-          </p:cNvSpPr>
-          <p:nvPr>
-            <p:ph type="body" idx="3" sz="quarter"/>
-          </p:nvPr>
-        </p:nvSpPr>
-        <p:spPr/>
-        <p:txBody>
-          <a:bodyPr/>
-          <a:lstStyle/>
-          <a:p>
-            <a:r>
-              <a:rPr sz="1200">
-                <a:latin typeface="Calibri"/>
-              </a:rPr>
-              <a:t>These are real quotes from a real panel. Say who the people are, briefly, so the names mean something.</a:t>
-            </a:r>
-          </a:p>
-          <a:p>
-            <a:r>
-              <a:rPr sz="1200">
-                <a:latin typeface="Calibri"/>
-              </a:rPr>
-              <a:t>The paragraph that matters is the last one: reading someone else's code, changing one thing at a time, measuring instead of guessing, and locating a fault. Those four habits are the job.</a:t>
-            </a:r>
-          </a:p>
-          <a:p>
-            <a:r>
-              <a:rPr sz="1200">
-                <a:latin typeface="Calibri"/>
-              </a:rPr>
-              <a:t>Finish on the line about the vehicle being the excuse. It is true, and it is the right note to end on.</a:t>
-            </a:r>
-          </a:p>
-        </p:txBody>
-      </p:sp>
-      <p:sp>
-        <p:nvSpPr>
-          <p:cNvPr id="4" name="Slide Number Placeholder 3"/>
-          <p:cNvSpPr>
-            <a:spLocks noGrp="1"/>
-          </p:cNvSpPr>
-          <p:nvPr>
-            <p:ph type="sldNum" idx="5" sz="quarter"/>
-          </p:nvPr>
-        </p:nvSpPr>
-        <p:spPr/>
-      </p:sp>
-    </p:spTree>
-  </p:cSld>
-  <p:clrMapOvr>
-    <a:masterClrMapping/>
-  </p:clrMapOvr>
-</p:notes>
-</file>
-
-<file path=ppt/notesSlides/notesSlide32.xml><?xml version="1.0" encoding="utf-8"?>
 <p:notes xmlns:a="http://schemas.openxmlformats.org/drawingml/2006/main" xmlns:p="http://schemas.openxmlformats.org/presentationml/2006/main" xmlns:r="http://schemas.openxmlformats.org/officeDocument/2006/relationships">
   <p:cSld>
     <p:spTree>
@@ -7494,22 +7420,24 @@
       <p:grpSpPr/>
       <p:sp>
         <p:nvSpPr>
-          <p:cNvPr id="2" name="Title 1"/>
-          <p:cNvSpPr>
-            <a:spLocks noGrp="1"/>
-          </p:cNvSpPr>
-          <p:nvPr>
-            <p:ph type="title"/>
-          </p:nvPr>
-        </p:nvSpPr>
-        <p:spPr>
-          <a:xfrm>
-            <a:off x="502920" y="274320"/>
-            <a:ext cx="11185855" cy="777240"/>
-          </a:xfrm>
-        </p:spPr>
-        <p:txBody>
-          <a:bodyPr wrap="square" anchor="b"/>
+          <p:cNvPr id="2" name="TextBox 1"/>
+          <p:cNvSpPr txBox="1"/>
+          <p:nvPr/>
+        </p:nvSpPr>
+        <p:spPr>
+          <a:xfrm>
+            <a:off x="502920" y="6382512"/>
+            <a:ext cx="10545775" cy="274320"/>
+          </a:xfrm>
+          <a:prstGeom prst="rect">
+            <a:avLst/>
+          </a:prstGeom>
+          <a:noFill/>
+        </p:spPr>
+        <p:txBody>
+          <a:bodyPr wrap="square" lIns="0" tIns="0">
+            <a:spAutoFit/>
+          </a:bodyPr>
           <a:lstStyle/>
           <a:p>
             <a:pPr algn="l">
@@ -7519,41 +7447,89 @@
               <a:spcAft>
                 <a:spcPts val="0"/>
               </a:spcAft>
-              <a:defRPr sz="2800" b="1">
-                <a:solidFill>
-                  <a:srgbClr val="1F3A5F"/>
-                </a:solidFill>
-                <a:latin typeface="Calibri"/>
-              </a:defRPr>
-            </a:pPr>
-            <a:r>
-              <a:rPr sz="2800" b="1">
-                <a:solidFill>
-                  <a:srgbClr val="1F3A5F"/>
-                </a:solidFill>
-                <a:latin typeface="Calibri"/>
-              </a:rPr>
-              <a:t>Where we are</a:t>
-            </a:r>
-          </a:p>
-        </p:txBody>
-      </p:sp>
-      <p:sp>
-        <p:nvSpPr>
-          <p:cNvPr id="3" name="Rectangle 2"/>
+              <a:defRPr sz="1000" b="0">
+                <a:solidFill>
+                  <a:srgbClr val="666666"/>
+                </a:solidFill>
+                <a:latin typeface="Calibri"/>
+              </a:defRPr>
+            </a:pPr>
+            <a:r>
+              <a:rPr sz="1000" b="0">
+                <a:solidFill>
+                  <a:srgbClr val="666666"/>
+                </a:solidFill>
+                <a:latin typeface="Calibri"/>
+              </a:rPr>
+              <a:t>Pathfinder Beginner - PS3  |  Lesson 5</a:t>
+            </a:r>
+          </a:p>
+        </p:txBody>
+      </p:sp>
+      <p:sp>
+        <p:nvSpPr>
+          <p:cNvPr id="3" name="TextBox 2"/>
+          <p:cNvSpPr txBox="1"/>
+          <p:nvPr/>
+        </p:nvSpPr>
+        <p:spPr>
+          <a:xfrm>
+            <a:off x="11231575" y="6382512"/>
+            <a:ext cx="457200" cy="274320"/>
+          </a:xfrm>
+          <a:prstGeom prst="rect">
+            <a:avLst/>
+          </a:prstGeom>
+          <a:noFill/>
+        </p:spPr>
+        <p:txBody>
+          <a:bodyPr wrap="square" lIns="0" tIns="0">
+            <a:spAutoFit/>
+          </a:bodyPr>
+          <a:lstStyle/>
+          <a:p>
+            <a:pPr algn="r">
+              <a:lnSpc>
+                <a:spcPct val="100000"/>
+              </a:lnSpc>
+              <a:spcAft>
+                <a:spcPts val="0"/>
+              </a:spcAft>
+              <a:defRPr sz="1000" b="0">
+                <a:solidFill>
+                  <a:srgbClr val="666666"/>
+                </a:solidFill>
+                <a:latin typeface="Calibri"/>
+              </a:defRPr>
+            </a:pPr>
+            <a:r>
+              <a:rPr sz="1000" b="0">
+                <a:solidFill>
+                  <a:srgbClr val="666666"/>
+                </a:solidFill>
+                <a:latin typeface="Calibri"/>
+              </a:rPr>
+              <a:t>10</a:t>
+            </a:r>
+          </a:p>
+        </p:txBody>
+      </p:sp>
+      <p:sp>
+        <p:nvSpPr>
+          <p:cNvPr id="4" name="Rectangle 3"/>
           <p:cNvSpPr/>
           <p:nvPr/>
         </p:nvSpPr>
         <p:spPr>
           <a:xfrm>
-            <a:off x="502920" y="1097280"/>
-            <a:ext cx="11185855" cy="19050"/>
+            <a:off x="0" y="1234440"/>
+            <a:ext cx="256032" cy="1554480"/>
           </a:xfrm>
           <a:prstGeom prst="rect">
             <a:avLst/>
           </a:prstGeom>
           <a:solidFill>
-            <a:srgbClr val="C8D2DE"/>
+            <a:srgbClr val="0E7C86"/>
           </a:solidFill>
           <a:ln>
             <a:noFill/>
@@ -7584,14 +7560,14 @@
       </p:sp>
       <p:sp>
         <p:nvSpPr>
-          <p:cNvPr id="4" name="TextBox 3"/>
+          <p:cNvPr id="5" name="TextBox 4"/>
           <p:cNvSpPr txBox="1"/>
           <p:nvPr/>
         </p:nvSpPr>
         <p:spPr>
           <a:xfrm>
-            <a:off x="502920" y="6382512"/>
-            <a:ext cx="10545775" cy="274320"/>
+            <a:off x="777240" y="1325880"/>
+            <a:ext cx="10515600" cy="1051560"/>
           </a:xfrm>
           <a:prstGeom prst="rect">
             <a:avLst/>
@@ -7599,7 +7575,7 @@
           <a:noFill/>
         </p:spPr>
         <p:txBody>
-          <a:bodyPr wrap="square" lIns="0" tIns="0">
+          <a:bodyPr wrap="square" lIns="0" tIns="0" rIns="0" bIns="0">
             <a:spAutoFit/>
           </a:bodyPr>
           <a:lstStyle/>
@@ -7611,35 +7587,35 @@
               <a:spcAft>
                 <a:spcPts val="0"/>
               </a:spcAft>
-              <a:defRPr sz="1000" b="0">
-                <a:solidFill>
-                  <a:srgbClr val="666666"/>
-                </a:solidFill>
-                <a:latin typeface="Calibri"/>
-              </a:defRPr>
-            </a:pPr>
-            <a:r>
-              <a:rPr sz="1000" b="0">
-                <a:solidFill>
-                  <a:srgbClr val="666666"/>
-                </a:solidFill>
-                <a:latin typeface="Calibri"/>
-              </a:rPr>
-              <a:t>Pathfinder Beginner - PS3  |  Lesson 5</a:t>
-            </a:r>
-          </a:p>
-        </p:txBody>
-      </p:sp>
-      <p:sp>
-        <p:nvSpPr>
-          <p:cNvPr id="5" name="TextBox 4"/>
+              <a:defRPr sz="3600" b="1">
+                <a:solidFill>
+                  <a:srgbClr val="1F3A5F"/>
+                </a:solidFill>
+                <a:latin typeface="Calibri"/>
+              </a:defRPr>
+            </a:pPr>
+            <a:r>
+              <a:rPr sz="3600" b="1">
+                <a:solidFill>
+                  <a:srgbClr val="1F3A5F"/>
+                </a:solidFill>
+                <a:latin typeface="Calibri"/>
+              </a:rPr>
+              <a:t>Edge detection</a:t>
+            </a:r>
+          </a:p>
+        </p:txBody>
+      </p:sp>
+      <p:sp>
+        <p:nvSpPr>
+          <p:cNvPr id="6" name="TextBox 5"/>
           <p:cNvSpPr txBox="1"/>
           <p:nvPr/>
         </p:nvSpPr>
         <p:spPr>
           <a:xfrm>
-            <a:off x="11231575" y="6382512"/>
-            <a:ext cx="457200" cy="274320"/>
+            <a:off x="777240" y="2423160"/>
+            <a:ext cx="10515600" cy="685800"/>
           </a:xfrm>
           <a:prstGeom prst="rect">
             <a:avLst/>
@@ -7647,19 +7623,19 @@
           <a:noFill/>
         </p:spPr>
         <p:txBody>
-          <a:bodyPr wrap="square" lIns="0" tIns="0">
+          <a:bodyPr wrap="square" lIns="0" tIns="0" rIns="0" bIns="0">
             <a:spAutoFit/>
           </a:bodyPr>
           <a:lstStyle/>
           <a:p>
-            <a:pPr algn="r">
-              <a:lnSpc>
-                <a:spcPct val="100000"/>
-              </a:lnSpc>
-              <a:spcAft>
-                <a:spcPts val="0"/>
-              </a:spcAft>
-              <a:defRPr sz="1000" b="0">
+            <a:pPr algn="l">
+              <a:lnSpc>
+                <a:spcPct val="100000"/>
+              </a:lnSpc>
+              <a:spcAft>
+                <a:spcPts val="400"/>
+              </a:spcAft>
+              <a:defRPr sz="1600" b="0">
                 <a:solidFill>
                   <a:srgbClr val="666666"/>
                 </a:solidFill>
@@ -7667,27 +7643,27 @@
               </a:defRPr>
             </a:pPr>
             <a:r>
-              <a:rPr sz="1000" b="0">
+              <a:rPr sz="1600" b="0">
                 <a:solidFill>
                   <a:srgbClr val="666666"/>
                 </a:solidFill>
                 <a:latin typeface="Calibri"/>
               </a:rPr>
-              <a:t>10</a:t>
-            </a:r>
-          </a:p>
-        </p:txBody>
-      </p:sp>
-      <p:sp>
-        <p:nvSpPr>
-          <p:cNvPr id="6" name="Rounded Rectangle 5"/>
+              <a:t>About 25 minutes</a:t>
+            </a:r>
+          </a:p>
+        </p:txBody>
+      </p:sp>
+      <p:sp>
+        <p:nvSpPr>
+          <p:cNvPr id="7" name="Rounded Rectangle 6"/>
           <p:cNvSpPr/>
           <p:nvPr/>
         </p:nvSpPr>
         <p:spPr>
           <a:xfrm>
-            <a:off x="502920" y="2240280"/>
-            <a:ext cx="2120127" cy="1737360"/>
+            <a:off x="502920" y="3886200"/>
+            <a:ext cx="2120127" cy="1325880"/>
           </a:xfrm>
           <a:prstGeom prst="roundRect">
             <a:avLst>
@@ -7750,14 +7726,14 @@
       </p:sp>
       <p:sp>
         <p:nvSpPr>
-          <p:cNvPr id="7" name="TextBox 6"/>
+          <p:cNvPr id="8" name="TextBox 7"/>
           <p:cNvSpPr txBox="1"/>
           <p:nvPr/>
         </p:nvSpPr>
         <p:spPr>
           <a:xfrm>
-            <a:off x="502920" y="1856232"/>
-            <a:ext cx="2120127" cy="347472"/>
+            <a:off x="502920" y="3520440"/>
+            <a:ext cx="2120127" cy="310896"/>
           </a:xfrm>
           <a:prstGeom prst="rect">
             <a:avLst/>
@@ -7775,9 +7751,9 @@
                 <a:spcPct val="100000"/>
               </a:lnSpc>
               <a:spcAft>
-                <a:spcPts val="600"/>
-              </a:spcAft>
-              <a:defRPr sz="1200" b="1">
+                <a:spcPts val="200"/>
+              </a:spcAft>
+              <a:defRPr sz="1100" b="1">
                 <a:solidFill>
                   <a:srgbClr val="0E7C86"/>
                 </a:solidFill>
@@ -7785,7 +7761,7 @@
               </a:defRPr>
             </a:pPr>
             <a:r>
-              <a:rPr sz="1200" b="1">
+              <a:rPr sz="1100" b="1">
                 <a:solidFill>
                   <a:srgbClr val="0E7C86"/>
                 </a:solidFill>
@@ -7798,14 +7774,14 @@
       </p:sp>
       <p:sp>
         <p:nvSpPr>
-          <p:cNvPr id="8" name="Rounded Rectangle 7"/>
+          <p:cNvPr id="9" name="Rounded Rectangle 8"/>
           <p:cNvSpPr/>
           <p:nvPr/>
         </p:nvSpPr>
         <p:spPr>
           <a:xfrm>
-            <a:off x="2769351" y="2240280"/>
-            <a:ext cx="2120127" cy="1737360"/>
+            <a:off x="2769351" y="3886200"/>
+            <a:ext cx="2120127" cy="1325880"/>
           </a:xfrm>
           <a:prstGeom prst="roundRect">
             <a:avLst>
@@ -7868,14 +7844,14 @@
       </p:sp>
       <p:sp>
         <p:nvSpPr>
-          <p:cNvPr id="9" name="TextBox 8"/>
+          <p:cNvPr id="10" name="TextBox 9"/>
           <p:cNvSpPr txBox="1"/>
           <p:nvPr/>
         </p:nvSpPr>
         <p:spPr>
           <a:xfrm>
-            <a:off x="2769351" y="1856232"/>
-            <a:ext cx="2120127" cy="347472"/>
+            <a:off x="2769351" y="3520440"/>
+            <a:ext cx="2120127" cy="310896"/>
           </a:xfrm>
           <a:prstGeom prst="rect">
             <a:avLst/>
@@ -7893,9 +7869,9 @@
                 <a:spcPct val="100000"/>
               </a:lnSpc>
               <a:spcAft>
-                <a:spcPts val="600"/>
-              </a:spcAft>
-              <a:defRPr sz="1200" b="1">
+                <a:spcPts val="200"/>
+              </a:spcAft>
+              <a:defRPr sz="1100" b="1">
                 <a:solidFill>
                   <a:srgbClr val="0E7C86"/>
                 </a:solidFill>
@@ -7903,7 +7879,7 @@
               </a:defRPr>
             </a:pPr>
             <a:r>
-              <a:rPr sz="1200" b="1">
+              <a:rPr sz="1100" b="1">
                 <a:solidFill>
                   <a:srgbClr val="0E7C86"/>
                 </a:solidFill>
@@ -7916,14 +7892,14 @@
       </p:sp>
       <p:sp>
         <p:nvSpPr>
-          <p:cNvPr id="10" name="Rounded Rectangle 9"/>
+          <p:cNvPr id="11" name="Rounded Rectangle 10"/>
           <p:cNvSpPr/>
           <p:nvPr/>
         </p:nvSpPr>
         <p:spPr>
           <a:xfrm>
-            <a:off x="5035782" y="2240280"/>
-            <a:ext cx="2120127" cy="1737360"/>
+            <a:off x="5035782" y="3886200"/>
+            <a:ext cx="2120127" cy="1325880"/>
           </a:xfrm>
           <a:prstGeom prst="roundRect">
             <a:avLst>
@@ -7986,14 +7962,14 @@
       </p:sp>
       <p:sp>
         <p:nvSpPr>
-          <p:cNvPr id="11" name="TextBox 10"/>
+          <p:cNvPr id="12" name="TextBox 11"/>
           <p:cNvSpPr txBox="1"/>
           <p:nvPr/>
         </p:nvSpPr>
         <p:spPr>
           <a:xfrm>
-            <a:off x="5035782" y="1856232"/>
-            <a:ext cx="2120127" cy="347472"/>
+            <a:off x="5035782" y="3520440"/>
+            <a:ext cx="2120127" cy="310896"/>
           </a:xfrm>
           <a:prstGeom prst="rect">
             <a:avLst/>
@@ -8011,9 +7987,9 @@
                 <a:spcPct val="100000"/>
               </a:lnSpc>
               <a:spcAft>
-                <a:spcPts val="600"/>
-              </a:spcAft>
-              <a:defRPr sz="1200" b="1">
+                <a:spcPts val="200"/>
+              </a:spcAft>
+              <a:defRPr sz="1100" b="1">
                 <a:solidFill>
                   <a:srgbClr val="0E7C86"/>
                 </a:solidFill>
@@ -8021,7 +7997,7 @@
               </a:defRPr>
             </a:pPr>
             <a:r>
-              <a:rPr sz="1200" b="1">
+              <a:rPr sz="1100" b="1">
                 <a:solidFill>
                   <a:srgbClr val="0E7C86"/>
                 </a:solidFill>
@@ -8034,14 +8010,14 @@
       </p:sp>
       <p:sp>
         <p:nvSpPr>
-          <p:cNvPr id="12" name="Rounded Rectangle 11"/>
+          <p:cNvPr id="13" name="Rounded Rectangle 12"/>
           <p:cNvSpPr/>
           <p:nvPr/>
         </p:nvSpPr>
         <p:spPr>
           <a:xfrm>
-            <a:off x="7302213" y="2240280"/>
-            <a:ext cx="2120127" cy="1737360"/>
+            <a:off x="7302213" y="3886200"/>
+            <a:ext cx="2120127" cy="1325880"/>
           </a:xfrm>
           <a:prstGeom prst="roundRect">
             <a:avLst>
@@ -8104,14 +8080,14 @@
       </p:sp>
       <p:sp>
         <p:nvSpPr>
-          <p:cNvPr id="13" name="Rounded Rectangle 12"/>
+          <p:cNvPr id="14" name="Rounded Rectangle 13"/>
           <p:cNvSpPr/>
           <p:nvPr/>
         </p:nvSpPr>
         <p:spPr>
           <a:xfrm>
-            <a:off x="9568644" y="2240280"/>
-            <a:ext cx="2120127" cy="1737360"/>
+            <a:off x="9568644" y="3886200"/>
+            <a:ext cx="2120127" cy="1325880"/>
           </a:xfrm>
           <a:prstGeom prst="roundRect">
             <a:avLst>
@@ -10529,22 +10505,24 @@
       <p:grpSpPr/>
       <p:sp>
         <p:nvSpPr>
-          <p:cNvPr id="2" name="Title 1"/>
-          <p:cNvSpPr>
-            <a:spLocks noGrp="1"/>
-          </p:cNvSpPr>
-          <p:nvPr>
-            <p:ph type="title"/>
-          </p:nvPr>
-        </p:nvSpPr>
-        <p:spPr>
-          <a:xfrm>
-            <a:off x="502920" y="274320"/>
-            <a:ext cx="11185855" cy="777240"/>
-          </a:xfrm>
-        </p:spPr>
-        <p:txBody>
-          <a:bodyPr wrap="square" anchor="b"/>
+          <p:cNvPr id="2" name="TextBox 1"/>
+          <p:cNvSpPr txBox="1"/>
+          <p:nvPr/>
+        </p:nvSpPr>
+        <p:spPr>
+          <a:xfrm>
+            <a:off x="502920" y="6382512"/>
+            <a:ext cx="10545775" cy="274320"/>
+          </a:xfrm>
+          <a:prstGeom prst="rect">
+            <a:avLst/>
+          </a:prstGeom>
+          <a:noFill/>
+        </p:spPr>
+        <p:txBody>
+          <a:bodyPr wrap="square" lIns="0" tIns="0">
+            <a:spAutoFit/>
+          </a:bodyPr>
           <a:lstStyle/>
           <a:p>
             <a:pPr algn="l">
@@ -10554,41 +10532,89 @@
               <a:spcAft>
                 <a:spcPts val="0"/>
               </a:spcAft>
-              <a:defRPr sz="2800" b="1">
-                <a:solidFill>
-                  <a:srgbClr val="1F3A5F"/>
-                </a:solidFill>
-                <a:latin typeface="Calibri"/>
-              </a:defRPr>
-            </a:pPr>
-            <a:r>
-              <a:rPr sz="2800" b="1">
-                <a:solidFill>
-                  <a:srgbClr val="1F3A5F"/>
-                </a:solidFill>
-                <a:latin typeface="Calibri"/>
-              </a:rPr>
-              <a:t>Where we are</a:t>
-            </a:r>
-          </a:p>
-        </p:txBody>
-      </p:sp>
-      <p:sp>
-        <p:nvSpPr>
-          <p:cNvPr id="3" name="Rectangle 2"/>
+              <a:defRPr sz="1000" b="0">
+                <a:solidFill>
+                  <a:srgbClr val="666666"/>
+                </a:solidFill>
+                <a:latin typeface="Calibri"/>
+              </a:defRPr>
+            </a:pPr>
+            <a:r>
+              <a:rPr sz="1000" b="0">
+                <a:solidFill>
+                  <a:srgbClr val="666666"/>
+                </a:solidFill>
+                <a:latin typeface="Calibri"/>
+              </a:rPr>
+              <a:t>Pathfinder Beginner - PS3  |  Lesson 5</a:t>
+            </a:r>
+          </a:p>
+        </p:txBody>
+      </p:sp>
+      <p:sp>
+        <p:nvSpPr>
+          <p:cNvPr id="3" name="TextBox 2"/>
+          <p:cNvSpPr txBox="1"/>
+          <p:nvPr/>
+        </p:nvSpPr>
+        <p:spPr>
+          <a:xfrm>
+            <a:off x="11231575" y="6382512"/>
+            <a:ext cx="457200" cy="274320"/>
+          </a:xfrm>
+          <a:prstGeom prst="rect">
+            <a:avLst/>
+          </a:prstGeom>
+          <a:noFill/>
+        </p:spPr>
+        <p:txBody>
+          <a:bodyPr wrap="square" lIns="0" tIns="0">
+            <a:spAutoFit/>
+          </a:bodyPr>
+          <a:lstStyle/>
+          <a:p>
+            <a:pPr algn="r">
+              <a:lnSpc>
+                <a:spcPct val="100000"/>
+              </a:lnSpc>
+              <a:spcAft>
+                <a:spcPts val="0"/>
+              </a:spcAft>
+              <a:defRPr sz="1000" b="0">
+                <a:solidFill>
+                  <a:srgbClr val="666666"/>
+                </a:solidFill>
+                <a:latin typeface="Calibri"/>
+              </a:defRPr>
+            </a:pPr>
+            <a:r>
+              <a:rPr sz="1000" b="0">
+                <a:solidFill>
+                  <a:srgbClr val="666666"/>
+                </a:solidFill>
+                <a:latin typeface="Calibri"/>
+              </a:rPr>
+              <a:t>15</a:t>
+            </a:r>
+          </a:p>
+        </p:txBody>
+      </p:sp>
+      <p:sp>
+        <p:nvSpPr>
+          <p:cNvPr id="4" name="Rectangle 3"/>
           <p:cNvSpPr/>
           <p:nvPr/>
         </p:nvSpPr>
         <p:spPr>
           <a:xfrm>
-            <a:off x="502920" y="1097280"/>
-            <a:ext cx="11185855" cy="19050"/>
+            <a:off x="0" y="1234440"/>
+            <a:ext cx="256032" cy="1554480"/>
           </a:xfrm>
           <a:prstGeom prst="rect">
             <a:avLst/>
           </a:prstGeom>
           <a:solidFill>
-            <a:srgbClr val="C8D2DE"/>
+            <a:srgbClr val="0E7C86"/>
           </a:solidFill>
           <a:ln>
             <a:noFill/>
@@ -10619,14 +10645,14 @@
       </p:sp>
       <p:sp>
         <p:nvSpPr>
-          <p:cNvPr id="4" name="TextBox 3"/>
+          <p:cNvPr id="5" name="TextBox 4"/>
           <p:cNvSpPr txBox="1"/>
           <p:nvPr/>
         </p:nvSpPr>
         <p:spPr>
           <a:xfrm>
-            <a:off x="502920" y="6382512"/>
-            <a:ext cx="10545775" cy="274320"/>
+            <a:off x="777240" y="1325880"/>
+            <a:ext cx="10515600" cy="1051560"/>
           </a:xfrm>
           <a:prstGeom prst="rect">
             <a:avLst/>
@@ -10634,7 +10660,7 @@
           <a:noFill/>
         </p:spPr>
         <p:txBody>
-          <a:bodyPr wrap="square" lIns="0" tIns="0">
+          <a:bodyPr wrap="square" lIns="0" tIns="0" rIns="0" bIns="0">
             <a:spAutoFit/>
           </a:bodyPr>
           <a:lstStyle/>
@@ -10646,35 +10672,35 @@
               <a:spcAft>
                 <a:spcPts val="0"/>
               </a:spcAft>
-              <a:defRPr sz="1000" b="0">
-                <a:solidFill>
-                  <a:srgbClr val="666666"/>
-                </a:solidFill>
-                <a:latin typeface="Calibri"/>
-              </a:defRPr>
-            </a:pPr>
-            <a:r>
-              <a:rPr sz="1000" b="0">
-                <a:solidFill>
-                  <a:srgbClr val="666666"/>
-                </a:solidFill>
-                <a:latin typeface="Calibri"/>
-              </a:rPr>
-              <a:t>Pathfinder Beginner - PS3  |  Lesson 5</a:t>
-            </a:r>
-          </a:p>
-        </p:txBody>
-      </p:sp>
-      <p:sp>
-        <p:nvSpPr>
-          <p:cNvPr id="5" name="TextBox 4"/>
+              <a:defRPr sz="3600" b="1">
+                <a:solidFill>
+                  <a:srgbClr val="1F3A5F"/>
+                </a:solidFill>
+                <a:latin typeface="Calibri"/>
+              </a:defRPr>
+            </a:pPr>
+            <a:r>
+              <a:rPr sz="3600" b="1">
+                <a:solidFill>
+                  <a:srgbClr val="1F3A5F"/>
+                </a:solidFill>
+                <a:latin typeface="Calibri"/>
+              </a:rPr>
+              <a:t>Lights from state</a:t>
+            </a:r>
+          </a:p>
+        </p:txBody>
+      </p:sp>
+      <p:sp>
+        <p:nvSpPr>
+          <p:cNvPr id="6" name="TextBox 5"/>
           <p:cNvSpPr txBox="1"/>
           <p:nvPr/>
         </p:nvSpPr>
         <p:spPr>
           <a:xfrm>
-            <a:off x="11231575" y="6382512"/>
-            <a:ext cx="457200" cy="274320"/>
+            <a:off x="777240" y="2423160"/>
+            <a:ext cx="10515600" cy="685800"/>
           </a:xfrm>
           <a:prstGeom prst="rect">
             <a:avLst/>
@@ -10682,19 +10708,19 @@
           <a:noFill/>
         </p:spPr>
         <p:txBody>
-          <a:bodyPr wrap="square" lIns="0" tIns="0">
+          <a:bodyPr wrap="square" lIns="0" tIns="0" rIns="0" bIns="0">
             <a:spAutoFit/>
           </a:bodyPr>
           <a:lstStyle/>
           <a:p>
-            <a:pPr algn="r">
-              <a:lnSpc>
-                <a:spcPct val="100000"/>
-              </a:lnSpc>
-              <a:spcAft>
-                <a:spcPts val="0"/>
-              </a:spcAft>
-              <a:defRPr sz="1000" b="0">
+            <a:pPr algn="l">
+              <a:lnSpc>
+                <a:spcPct val="100000"/>
+              </a:lnSpc>
+              <a:spcAft>
+                <a:spcPts val="400"/>
+              </a:spcAft>
+              <a:defRPr sz="1600" b="0">
                 <a:solidFill>
                   <a:srgbClr val="666666"/>
                 </a:solidFill>
@@ -10702,27 +10728,27 @@
               </a:defRPr>
             </a:pPr>
             <a:r>
-              <a:rPr sz="1000" b="0">
+              <a:rPr sz="1600" b="0">
                 <a:solidFill>
                   <a:srgbClr val="666666"/>
                 </a:solidFill>
                 <a:latin typeface="Calibri"/>
               </a:rPr>
-              <a:t>15</a:t>
-            </a:r>
-          </a:p>
-        </p:txBody>
-      </p:sp>
-      <p:sp>
-        <p:nvSpPr>
-          <p:cNvPr id="6" name="Rounded Rectangle 5"/>
+              <a:t>About 30 minutes</a:t>
+            </a:r>
+          </a:p>
+        </p:txBody>
+      </p:sp>
+      <p:sp>
+        <p:nvSpPr>
+          <p:cNvPr id="7" name="Rounded Rectangle 6"/>
           <p:cNvSpPr/>
           <p:nvPr/>
         </p:nvSpPr>
         <p:spPr>
           <a:xfrm>
-            <a:off x="502920" y="2240280"/>
-            <a:ext cx="2120127" cy="1737360"/>
+            <a:off x="502920" y="3886200"/>
+            <a:ext cx="2120127" cy="1325880"/>
           </a:xfrm>
           <a:prstGeom prst="roundRect">
             <a:avLst>
@@ -10785,14 +10811,14 @@
       </p:sp>
       <p:sp>
         <p:nvSpPr>
-          <p:cNvPr id="7" name="TextBox 6"/>
+          <p:cNvPr id="8" name="TextBox 7"/>
           <p:cNvSpPr txBox="1"/>
           <p:nvPr/>
         </p:nvSpPr>
         <p:spPr>
           <a:xfrm>
-            <a:off x="502920" y="1856232"/>
-            <a:ext cx="2120127" cy="347472"/>
+            <a:off x="502920" y="3520440"/>
+            <a:ext cx="2120127" cy="310896"/>
           </a:xfrm>
           <a:prstGeom prst="rect">
             <a:avLst/>
@@ -10810,9 +10836,9 @@
                 <a:spcPct val="100000"/>
               </a:lnSpc>
               <a:spcAft>
-                <a:spcPts val="600"/>
-              </a:spcAft>
-              <a:defRPr sz="1200" b="1">
+                <a:spcPts val="200"/>
+              </a:spcAft>
+              <a:defRPr sz="1100" b="1">
                 <a:solidFill>
                   <a:srgbClr val="0E7C86"/>
                 </a:solidFill>
@@ -10820,7 +10846,7 @@
               </a:defRPr>
             </a:pPr>
             <a:r>
-              <a:rPr sz="1200" b="1">
+              <a:rPr sz="1100" b="1">
                 <a:solidFill>
                   <a:srgbClr val="0E7C86"/>
                 </a:solidFill>
@@ -10833,14 +10859,14 @@
       </p:sp>
       <p:sp>
         <p:nvSpPr>
-          <p:cNvPr id="8" name="Rounded Rectangle 7"/>
+          <p:cNvPr id="9" name="Rounded Rectangle 8"/>
           <p:cNvSpPr/>
           <p:nvPr/>
         </p:nvSpPr>
         <p:spPr>
           <a:xfrm>
-            <a:off x="2769351" y="2240280"/>
-            <a:ext cx="2120127" cy="1737360"/>
+            <a:off x="2769351" y="3886200"/>
+            <a:ext cx="2120127" cy="1325880"/>
           </a:xfrm>
           <a:prstGeom prst="roundRect">
             <a:avLst>
@@ -10903,14 +10929,14 @@
       </p:sp>
       <p:sp>
         <p:nvSpPr>
-          <p:cNvPr id="9" name="TextBox 8"/>
+          <p:cNvPr id="10" name="TextBox 9"/>
           <p:cNvSpPr txBox="1"/>
           <p:nvPr/>
         </p:nvSpPr>
         <p:spPr>
           <a:xfrm>
-            <a:off x="2769351" y="1856232"/>
-            <a:ext cx="2120127" cy="347472"/>
+            <a:off x="2769351" y="3520440"/>
+            <a:ext cx="2120127" cy="310896"/>
           </a:xfrm>
           <a:prstGeom prst="rect">
             <a:avLst/>
@@ -10928,9 +10954,9 @@
                 <a:spcPct val="100000"/>
               </a:lnSpc>
               <a:spcAft>
-                <a:spcPts val="600"/>
-              </a:spcAft>
-              <a:defRPr sz="1200" b="1">
+                <a:spcPts val="200"/>
+              </a:spcAft>
+              <a:defRPr sz="1100" b="1">
                 <a:solidFill>
                   <a:srgbClr val="0E7C86"/>
                 </a:solidFill>
@@ -10938,7 +10964,7 @@
               </a:defRPr>
             </a:pPr>
             <a:r>
-              <a:rPr sz="1200" b="1">
+              <a:rPr sz="1100" b="1">
                 <a:solidFill>
                   <a:srgbClr val="0E7C86"/>
                 </a:solidFill>
@@ -10951,14 +10977,14 @@
       </p:sp>
       <p:sp>
         <p:nvSpPr>
-          <p:cNvPr id="10" name="Rounded Rectangle 9"/>
+          <p:cNvPr id="11" name="Rounded Rectangle 10"/>
           <p:cNvSpPr/>
           <p:nvPr/>
         </p:nvSpPr>
         <p:spPr>
           <a:xfrm>
-            <a:off x="5035782" y="2240280"/>
-            <a:ext cx="2120127" cy="1737360"/>
+            <a:off x="5035782" y="3886200"/>
+            <a:ext cx="2120127" cy="1325880"/>
           </a:xfrm>
           <a:prstGeom prst="roundRect">
             <a:avLst>
@@ -11021,14 +11047,14 @@
       </p:sp>
       <p:sp>
         <p:nvSpPr>
-          <p:cNvPr id="11" name="TextBox 10"/>
+          <p:cNvPr id="12" name="TextBox 11"/>
           <p:cNvSpPr txBox="1"/>
           <p:nvPr/>
         </p:nvSpPr>
         <p:spPr>
           <a:xfrm>
-            <a:off x="5035782" y="1856232"/>
-            <a:ext cx="2120127" cy="347472"/>
+            <a:off x="5035782" y="3520440"/>
+            <a:ext cx="2120127" cy="310896"/>
           </a:xfrm>
           <a:prstGeom prst="rect">
             <a:avLst/>
@@ -11046,9 +11072,9 @@
                 <a:spcPct val="100000"/>
               </a:lnSpc>
               <a:spcAft>
-                <a:spcPts val="600"/>
-              </a:spcAft>
-              <a:defRPr sz="1200" b="1">
+                <a:spcPts val="200"/>
+              </a:spcAft>
+              <a:defRPr sz="1100" b="1">
                 <a:solidFill>
                   <a:srgbClr val="0E7C86"/>
                 </a:solidFill>
@@ -11056,7 +11082,7 @@
               </a:defRPr>
             </a:pPr>
             <a:r>
-              <a:rPr sz="1200" b="1">
+              <a:rPr sz="1100" b="1">
                 <a:solidFill>
                   <a:srgbClr val="0E7C86"/>
                 </a:solidFill>
@@ -11069,14 +11095,14 @@
       </p:sp>
       <p:sp>
         <p:nvSpPr>
-          <p:cNvPr id="12" name="Rounded Rectangle 11"/>
+          <p:cNvPr id="13" name="Rounded Rectangle 12"/>
           <p:cNvSpPr/>
           <p:nvPr/>
         </p:nvSpPr>
         <p:spPr>
           <a:xfrm>
-            <a:off x="7302213" y="2240280"/>
-            <a:ext cx="2120127" cy="1737360"/>
+            <a:off x="7302213" y="3886200"/>
+            <a:ext cx="2120127" cy="1325880"/>
           </a:xfrm>
           <a:prstGeom prst="roundRect">
             <a:avLst>
@@ -11139,14 +11165,14 @@
       </p:sp>
       <p:sp>
         <p:nvSpPr>
-          <p:cNvPr id="13" name="TextBox 12"/>
+          <p:cNvPr id="14" name="TextBox 13"/>
           <p:cNvSpPr txBox="1"/>
           <p:nvPr/>
         </p:nvSpPr>
         <p:spPr>
           <a:xfrm>
-            <a:off x="7302213" y="1856232"/>
-            <a:ext cx="2120127" cy="347472"/>
+            <a:off x="7302213" y="3520440"/>
+            <a:ext cx="2120127" cy="310896"/>
           </a:xfrm>
           <a:prstGeom prst="rect">
             <a:avLst/>
@@ -11164,9 +11190,9 @@
                 <a:spcPct val="100000"/>
               </a:lnSpc>
               <a:spcAft>
-                <a:spcPts val="600"/>
-              </a:spcAft>
-              <a:defRPr sz="1200" b="1">
+                <a:spcPts val="200"/>
+              </a:spcAft>
+              <a:defRPr sz="1100" b="1">
                 <a:solidFill>
                   <a:srgbClr val="0E7C86"/>
                 </a:solidFill>
@@ -11174,7 +11200,7 @@
               </a:defRPr>
             </a:pPr>
             <a:r>
-              <a:rPr sz="1200" b="1">
+              <a:rPr sz="1100" b="1">
                 <a:solidFill>
                   <a:srgbClr val="0E7C86"/>
                 </a:solidFill>
@@ -11187,14 +11213,14 @@
       </p:sp>
       <p:sp>
         <p:nvSpPr>
-          <p:cNvPr id="14" name="Rounded Rectangle 13"/>
+          <p:cNvPr id="15" name="Rounded Rectangle 14"/>
           <p:cNvSpPr/>
           <p:nvPr/>
         </p:nvSpPr>
         <p:spPr>
           <a:xfrm>
-            <a:off x="9568644" y="2240280"/>
-            <a:ext cx="2120127" cy="1737360"/>
+            <a:off x="9568644" y="3886200"/>
+            <a:ext cx="2120127" cy="1325880"/>
           </a:xfrm>
           <a:prstGeom prst="roundRect">
             <a:avLst>
@@ -12085,8 +12111,8 @@
         </p:nvSpPr>
         <p:spPr>
           <a:xfrm>
-            <a:off x="0" y="2194560"/>
-            <a:ext cx="256032" cy="1828800"/>
+            <a:off x="0" y="1234440"/>
+            <a:ext cx="256032" cy="1554480"/>
           </a:xfrm>
           <a:prstGeom prst="rect">
             <a:avLst/>
@@ -12129,8 +12155,8 @@
         </p:nvSpPr>
         <p:spPr>
           <a:xfrm>
-            <a:off x="777240" y="2286000"/>
-            <a:ext cx="10515600" cy="1188720"/>
+            <a:off x="777240" y="1325880"/>
+            <a:ext cx="10515600" cy="1051560"/>
           </a:xfrm>
           <a:prstGeom prst="rect">
             <a:avLst/>
@@ -12177,8 +12203,8 @@
         </p:nvSpPr>
         <p:spPr>
           <a:xfrm>
-            <a:off x="777240" y="3520440"/>
-            <a:ext cx="10515600" cy="914400"/>
+            <a:off x="777240" y="2423160"/>
+            <a:ext cx="10515600" cy="685800"/>
           </a:xfrm>
           <a:prstGeom prst="rect">
             <a:avLst/>
@@ -12213,6 +12239,596 @@
                 <a:latin typeface="Calibri"/>
               </a:rPr>
               <a:t>About 45 minutes</a:t>
+            </a:r>
+          </a:p>
+        </p:txBody>
+      </p:sp>
+      <p:sp>
+        <p:nvSpPr>
+          <p:cNvPr id="7" name="Rounded Rectangle 6"/>
+          <p:cNvSpPr/>
+          <p:nvPr/>
+        </p:nvSpPr>
+        <p:spPr>
+          <a:xfrm>
+            <a:off x="502920" y="3886200"/>
+            <a:ext cx="2120127" cy="1325880"/>
+          </a:xfrm>
+          <a:prstGeom prst="roundRect">
+            <a:avLst>
+              <a:gd name="adj" fmla="val 8000"/>
+            </a:avLst>
+          </a:prstGeom>
+          <a:solidFill>
+            <a:srgbClr val="EEF3F8"/>
+          </a:solidFill>
+          <a:ln w="12700">
+            <a:solidFill>
+              <a:srgbClr val="0E7C86"/>
+            </a:solidFill>
+          </a:ln>
+          <a:effectLst/>
+        </p:spPr>
+        <p:style>
+          <a:lnRef idx="1">
+            <a:schemeClr val="accent1"/>
+          </a:lnRef>
+          <a:fillRef idx="3">
+            <a:schemeClr val="accent1"/>
+          </a:fillRef>
+          <a:effectRef idx="2">
+            <a:schemeClr val="accent1"/>
+          </a:effectRef>
+          <a:fontRef idx="minor">
+            <a:schemeClr val="lt1"/>
+          </a:fontRef>
+        </p:style>
+        <p:txBody>
+          <a:bodyPr rtlCol="0" anchor="ctr" wrap="square" lIns="73152" rIns="73152"/>
+          <a:lstStyle/>
+          <a:p>
+            <a:pPr algn="ctr">
+              <a:lnSpc>
+                <a:spcPct val="100000"/>
+              </a:lnSpc>
+              <a:spcAft>
+                <a:spcPts val="0"/>
+              </a:spcAft>
+              <a:defRPr sz="1700" b="0">
+                <a:solidFill>
+                  <a:srgbClr val="1F3A5F"/>
+                </a:solidFill>
+                <a:latin typeface="Calibri"/>
+              </a:defRPr>
+            </a:pPr>
+            <a:r>
+              <a:rPr sz="1700" b="0">
+                <a:solidFill>
+                  <a:srgbClr val="1F3A5F"/>
+                </a:solidFill>
+                <a:latin typeface="Calibri"/>
+              </a:rPr>
+              <a:t>Why delay() has to go</a:t>
+            </a:r>
+          </a:p>
+        </p:txBody>
+      </p:sp>
+      <p:sp>
+        <p:nvSpPr>
+          <p:cNvPr id="8" name="TextBox 7"/>
+          <p:cNvSpPr txBox="1"/>
+          <p:nvPr/>
+        </p:nvSpPr>
+        <p:spPr>
+          <a:xfrm>
+            <a:off x="502920" y="3520440"/>
+            <a:ext cx="2120127" cy="310896"/>
+          </a:xfrm>
+          <a:prstGeom prst="rect">
+            <a:avLst/>
+          </a:prstGeom>
+          <a:noFill/>
+        </p:spPr>
+        <p:txBody>
+          <a:bodyPr wrap="square" lIns="0" tIns="0" rIns="0" bIns="0">
+            <a:spAutoFit/>
+          </a:bodyPr>
+          <a:lstStyle/>
+          <a:p>
+            <a:pPr algn="ctr">
+              <a:lnSpc>
+                <a:spcPct val="100000"/>
+              </a:lnSpc>
+              <a:spcAft>
+                <a:spcPts val="200"/>
+              </a:spcAft>
+              <a:defRPr sz="1100" b="1">
+                <a:solidFill>
+                  <a:srgbClr val="0E7C86"/>
+                </a:solidFill>
+                <a:latin typeface="Calibri"/>
+              </a:defRPr>
+            </a:pPr>
+            <a:r>
+              <a:rPr sz="1100" b="1">
+                <a:solidFill>
+                  <a:srgbClr val="0E7C86"/>
+                </a:solidFill>
+                <a:latin typeface="Calibri"/>
+              </a:rPr>
+              <a:t>done</a:t>
+            </a:r>
+          </a:p>
+        </p:txBody>
+      </p:sp>
+      <p:sp>
+        <p:nvSpPr>
+          <p:cNvPr id="9" name="Rounded Rectangle 8"/>
+          <p:cNvSpPr/>
+          <p:nvPr/>
+        </p:nvSpPr>
+        <p:spPr>
+          <a:xfrm>
+            <a:off x="2769351" y="3886200"/>
+            <a:ext cx="2120127" cy="1325880"/>
+          </a:xfrm>
+          <a:prstGeom prst="roundRect">
+            <a:avLst>
+              <a:gd name="adj" fmla="val 8000"/>
+            </a:avLst>
+          </a:prstGeom>
+          <a:solidFill>
+            <a:srgbClr val="EEF3F8"/>
+          </a:solidFill>
+          <a:ln w="12700">
+            <a:solidFill>
+              <a:srgbClr val="0E7C86"/>
+            </a:solidFill>
+          </a:ln>
+          <a:effectLst/>
+        </p:spPr>
+        <p:style>
+          <a:lnRef idx="1">
+            <a:schemeClr val="accent1"/>
+          </a:lnRef>
+          <a:fillRef idx="3">
+            <a:schemeClr val="accent1"/>
+          </a:fillRef>
+          <a:effectRef idx="2">
+            <a:schemeClr val="accent1"/>
+          </a:effectRef>
+          <a:fontRef idx="minor">
+            <a:schemeClr val="lt1"/>
+          </a:fontRef>
+        </p:style>
+        <p:txBody>
+          <a:bodyPr rtlCol="0" anchor="ctr" wrap="square" lIns="73152" rIns="73152"/>
+          <a:lstStyle/>
+          <a:p>
+            <a:pPr algn="ctr">
+              <a:lnSpc>
+                <a:spcPct val="100000"/>
+              </a:lnSpc>
+              <a:spcAft>
+                <a:spcPts val="0"/>
+              </a:spcAft>
+              <a:defRPr sz="1700" b="0">
+                <a:solidFill>
+                  <a:srgbClr val="1F3A5F"/>
+                </a:solidFill>
+                <a:latin typeface="Calibri"/>
+              </a:defRPr>
+            </a:pPr>
+            <a:r>
+              <a:rPr sz="1700" b="0">
+                <a:solidFill>
+                  <a:srgbClr val="1F3A5F"/>
+                </a:solidFill>
+                <a:latin typeface="Calibri"/>
+              </a:rPr>
+              <a:t>Two speeds at once</a:t>
+            </a:r>
+          </a:p>
+        </p:txBody>
+      </p:sp>
+      <p:sp>
+        <p:nvSpPr>
+          <p:cNvPr id="10" name="TextBox 9"/>
+          <p:cNvSpPr txBox="1"/>
+          <p:nvPr/>
+        </p:nvSpPr>
+        <p:spPr>
+          <a:xfrm>
+            <a:off x="2769351" y="3520440"/>
+            <a:ext cx="2120127" cy="310896"/>
+          </a:xfrm>
+          <a:prstGeom prst="rect">
+            <a:avLst/>
+          </a:prstGeom>
+          <a:noFill/>
+        </p:spPr>
+        <p:txBody>
+          <a:bodyPr wrap="square" lIns="0" tIns="0" rIns="0" bIns="0">
+            <a:spAutoFit/>
+          </a:bodyPr>
+          <a:lstStyle/>
+          <a:p>
+            <a:pPr algn="ctr">
+              <a:lnSpc>
+                <a:spcPct val="100000"/>
+              </a:lnSpc>
+              <a:spcAft>
+                <a:spcPts val="200"/>
+              </a:spcAft>
+              <a:defRPr sz="1100" b="1">
+                <a:solidFill>
+                  <a:srgbClr val="0E7C86"/>
+                </a:solidFill>
+                <a:latin typeface="Calibri"/>
+              </a:defRPr>
+            </a:pPr>
+            <a:r>
+              <a:rPr sz="1100" b="1">
+                <a:solidFill>
+                  <a:srgbClr val="0E7C86"/>
+                </a:solidFill>
+                <a:latin typeface="Calibri"/>
+              </a:rPr>
+              <a:t>done</a:t>
+            </a:r>
+          </a:p>
+        </p:txBody>
+      </p:sp>
+      <p:sp>
+        <p:nvSpPr>
+          <p:cNvPr id="11" name="Rounded Rectangle 10"/>
+          <p:cNvSpPr/>
+          <p:nvPr/>
+        </p:nvSpPr>
+        <p:spPr>
+          <a:xfrm>
+            <a:off x="5035782" y="3886200"/>
+            <a:ext cx="2120127" cy="1325880"/>
+          </a:xfrm>
+          <a:prstGeom prst="roundRect">
+            <a:avLst>
+              <a:gd name="adj" fmla="val 8000"/>
+            </a:avLst>
+          </a:prstGeom>
+          <a:solidFill>
+            <a:srgbClr val="EEF3F8"/>
+          </a:solidFill>
+          <a:ln w="12700">
+            <a:solidFill>
+              <a:srgbClr val="0E7C86"/>
+            </a:solidFill>
+          </a:ln>
+          <a:effectLst/>
+        </p:spPr>
+        <p:style>
+          <a:lnRef idx="1">
+            <a:schemeClr val="accent1"/>
+          </a:lnRef>
+          <a:fillRef idx="3">
+            <a:schemeClr val="accent1"/>
+          </a:fillRef>
+          <a:effectRef idx="2">
+            <a:schemeClr val="accent1"/>
+          </a:effectRef>
+          <a:fontRef idx="minor">
+            <a:schemeClr val="lt1"/>
+          </a:fontRef>
+        </p:style>
+        <p:txBody>
+          <a:bodyPr rtlCol="0" anchor="ctr" wrap="square" lIns="73152" rIns="73152"/>
+          <a:lstStyle/>
+          <a:p>
+            <a:pPr algn="ctr">
+              <a:lnSpc>
+                <a:spcPct val="100000"/>
+              </a:lnSpc>
+              <a:spcAft>
+                <a:spcPts val="0"/>
+              </a:spcAft>
+              <a:defRPr sz="1700" b="0">
+                <a:solidFill>
+                  <a:srgbClr val="1F3A5F"/>
+                </a:solidFill>
+                <a:latin typeface="Calibri"/>
+              </a:defRPr>
+            </a:pPr>
+            <a:r>
+              <a:rPr sz="1700" b="0">
+                <a:solidFill>
+                  <a:srgbClr val="1F3A5F"/>
+                </a:solidFill>
+                <a:latin typeface="Calibri"/>
+              </a:rPr>
+              <a:t>Edge detection</a:t>
+            </a:r>
+          </a:p>
+        </p:txBody>
+      </p:sp>
+      <p:sp>
+        <p:nvSpPr>
+          <p:cNvPr id="12" name="TextBox 11"/>
+          <p:cNvSpPr txBox="1"/>
+          <p:nvPr/>
+        </p:nvSpPr>
+        <p:spPr>
+          <a:xfrm>
+            <a:off x="5035782" y="3520440"/>
+            <a:ext cx="2120127" cy="310896"/>
+          </a:xfrm>
+          <a:prstGeom prst="rect">
+            <a:avLst/>
+          </a:prstGeom>
+          <a:noFill/>
+        </p:spPr>
+        <p:txBody>
+          <a:bodyPr wrap="square" lIns="0" tIns="0" rIns="0" bIns="0">
+            <a:spAutoFit/>
+          </a:bodyPr>
+          <a:lstStyle/>
+          <a:p>
+            <a:pPr algn="ctr">
+              <a:lnSpc>
+                <a:spcPct val="100000"/>
+              </a:lnSpc>
+              <a:spcAft>
+                <a:spcPts val="200"/>
+              </a:spcAft>
+              <a:defRPr sz="1100" b="1">
+                <a:solidFill>
+                  <a:srgbClr val="0E7C86"/>
+                </a:solidFill>
+                <a:latin typeface="Calibri"/>
+              </a:defRPr>
+            </a:pPr>
+            <a:r>
+              <a:rPr sz="1100" b="1">
+                <a:solidFill>
+                  <a:srgbClr val="0E7C86"/>
+                </a:solidFill>
+                <a:latin typeface="Calibri"/>
+              </a:rPr>
+              <a:t>done</a:t>
+            </a:r>
+          </a:p>
+        </p:txBody>
+      </p:sp>
+      <p:sp>
+        <p:nvSpPr>
+          <p:cNvPr id="13" name="Rounded Rectangle 12"/>
+          <p:cNvSpPr/>
+          <p:nvPr/>
+        </p:nvSpPr>
+        <p:spPr>
+          <a:xfrm>
+            <a:off x="7302213" y="3886200"/>
+            <a:ext cx="2120127" cy="1325880"/>
+          </a:xfrm>
+          <a:prstGeom prst="roundRect">
+            <a:avLst>
+              <a:gd name="adj" fmla="val 8000"/>
+            </a:avLst>
+          </a:prstGeom>
+          <a:solidFill>
+            <a:srgbClr val="EEF3F8"/>
+          </a:solidFill>
+          <a:ln w="12700">
+            <a:solidFill>
+              <a:srgbClr val="0E7C86"/>
+            </a:solidFill>
+          </a:ln>
+          <a:effectLst/>
+        </p:spPr>
+        <p:style>
+          <a:lnRef idx="1">
+            <a:schemeClr val="accent1"/>
+          </a:lnRef>
+          <a:fillRef idx="3">
+            <a:schemeClr val="accent1"/>
+          </a:fillRef>
+          <a:effectRef idx="2">
+            <a:schemeClr val="accent1"/>
+          </a:effectRef>
+          <a:fontRef idx="minor">
+            <a:schemeClr val="lt1"/>
+          </a:fontRef>
+        </p:style>
+        <p:txBody>
+          <a:bodyPr rtlCol="0" anchor="ctr" wrap="square" lIns="73152" rIns="73152"/>
+          <a:lstStyle/>
+          <a:p>
+            <a:pPr algn="ctr">
+              <a:lnSpc>
+                <a:spcPct val="100000"/>
+              </a:lnSpc>
+              <a:spcAft>
+                <a:spcPts val="0"/>
+              </a:spcAft>
+              <a:defRPr sz="1700" b="0">
+                <a:solidFill>
+                  <a:srgbClr val="1F3A5F"/>
+                </a:solidFill>
+                <a:latin typeface="Calibri"/>
+              </a:defRPr>
+            </a:pPr>
+            <a:r>
+              <a:rPr sz="1700" b="0">
+                <a:solidFill>
+                  <a:srgbClr val="1F3A5F"/>
+                </a:solidFill>
+                <a:latin typeface="Calibri"/>
+              </a:rPr>
+              <a:t>Lights from state</a:t>
+            </a:r>
+          </a:p>
+        </p:txBody>
+      </p:sp>
+      <p:sp>
+        <p:nvSpPr>
+          <p:cNvPr id="14" name="TextBox 13"/>
+          <p:cNvSpPr txBox="1"/>
+          <p:nvPr/>
+        </p:nvSpPr>
+        <p:spPr>
+          <a:xfrm>
+            <a:off x="7302213" y="3520440"/>
+            <a:ext cx="2120127" cy="310896"/>
+          </a:xfrm>
+          <a:prstGeom prst="rect">
+            <a:avLst/>
+          </a:prstGeom>
+          <a:noFill/>
+        </p:spPr>
+        <p:txBody>
+          <a:bodyPr wrap="square" lIns="0" tIns="0" rIns="0" bIns="0">
+            <a:spAutoFit/>
+          </a:bodyPr>
+          <a:lstStyle/>
+          <a:p>
+            <a:pPr algn="ctr">
+              <a:lnSpc>
+                <a:spcPct val="100000"/>
+              </a:lnSpc>
+              <a:spcAft>
+                <a:spcPts val="200"/>
+              </a:spcAft>
+              <a:defRPr sz="1100" b="1">
+                <a:solidFill>
+                  <a:srgbClr val="0E7C86"/>
+                </a:solidFill>
+                <a:latin typeface="Calibri"/>
+              </a:defRPr>
+            </a:pPr>
+            <a:r>
+              <a:rPr sz="1100" b="1">
+                <a:solidFill>
+                  <a:srgbClr val="0E7C86"/>
+                </a:solidFill>
+                <a:latin typeface="Calibri"/>
+              </a:rPr>
+              <a:t>done</a:t>
+            </a:r>
+          </a:p>
+        </p:txBody>
+      </p:sp>
+      <p:sp>
+        <p:nvSpPr>
+          <p:cNvPr id="15" name="Rounded Rectangle 14"/>
+          <p:cNvSpPr/>
+          <p:nvPr/>
+        </p:nvSpPr>
+        <p:spPr>
+          <a:xfrm>
+            <a:off x="9568644" y="3886200"/>
+            <a:ext cx="2120127" cy="1325880"/>
+          </a:xfrm>
+          <a:prstGeom prst="roundRect">
+            <a:avLst>
+              <a:gd name="adj" fmla="val 8000"/>
+            </a:avLst>
+          </a:prstGeom>
+          <a:solidFill>
+            <a:srgbClr val="D6ECEE"/>
+          </a:solidFill>
+          <a:ln w="25400">
+            <a:solidFill>
+              <a:srgbClr val="0E7C86"/>
+            </a:solidFill>
+          </a:ln>
+          <a:effectLst/>
+        </p:spPr>
+        <p:style>
+          <a:lnRef idx="1">
+            <a:schemeClr val="accent1"/>
+          </a:lnRef>
+          <a:fillRef idx="3">
+            <a:schemeClr val="accent1"/>
+          </a:fillRef>
+          <a:effectRef idx="2">
+            <a:schemeClr val="accent1"/>
+          </a:effectRef>
+          <a:fontRef idx="minor">
+            <a:schemeClr val="lt1"/>
+          </a:fontRef>
+        </p:style>
+        <p:txBody>
+          <a:bodyPr rtlCol="0" anchor="ctr" wrap="square" lIns="73152" rIns="73152"/>
+          <a:lstStyle/>
+          <a:p>
+            <a:pPr algn="ctr">
+              <a:lnSpc>
+                <a:spcPct val="100000"/>
+              </a:lnSpc>
+              <a:spcAft>
+                <a:spcPts val="0"/>
+              </a:spcAft>
+              <a:defRPr sz="1700" b="1">
+                <a:solidFill>
+                  <a:srgbClr val="1F3A5F"/>
+                </a:solidFill>
+                <a:latin typeface="Calibri"/>
+              </a:defRPr>
+            </a:pPr>
+            <a:r>
+              <a:rPr sz="1700" b="1">
+                <a:solidFill>
+                  <a:srgbClr val="1F3A5F"/>
+                </a:solidFill>
+                <a:latin typeface="Calibri"/>
+              </a:rPr>
+              <a:t>The full program</a:t>
+            </a:r>
+          </a:p>
+        </p:txBody>
+      </p:sp>
+      <p:sp>
+        <p:nvSpPr>
+          <p:cNvPr id="16" name="TextBox 15"/>
+          <p:cNvSpPr txBox="1"/>
+          <p:nvPr/>
+        </p:nvSpPr>
+        <p:spPr>
+          <a:xfrm>
+            <a:off x="9568644" y="3520440"/>
+            <a:ext cx="2120127" cy="310896"/>
+          </a:xfrm>
+          <a:prstGeom prst="rect">
+            <a:avLst/>
+          </a:prstGeom>
+          <a:noFill/>
+        </p:spPr>
+        <p:txBody>
+          <a:bodyPr wrap="square" lIns="0" tIns="0" rIns="0" bIns="0">
+            <a:spAutoFit/>
+          </a:bodyPr>
+          <a:lstStyle/>
+          <a:p>
+            <a:pPr algn="ctr">
+              <a:lnSpc>
+                <a:spcPct val="100000"/>
+              </a:lnSpc>
+              <a:spcAft>
+                <a:spcPts val="200"/>
+              </a:spcAft>
+              <a:defRPr sz="1100" b="1">
+                <a:solidFill>
+                  <a:srgbClr val="0E7C86"/>
+                </a:solidFill>
+                <a:latin typeface="Calibri"/>
+              </a:defRPr>
+            </a:pPr>
+            <a:r>
+              <a:rPr sz="1100" b="1">
+                <a:solidFill>
+                  <a:srgbClr val="0E7C86"/>
+                </a:solidFill>
+                <a:latin typeface="Calibri"/>
+              </a:rPr>
+              <a:t>NOW</a:t>
             </a:r>
           </a:p>
         </p:txBody>
@@ -16724,7 +17340,7 @@
                 </a:solidFill>
                 <a:latin typeface="Calibri"/>
               </a:rPr>
-              <a:t>Where we are</a:t>
+              <a:t>Do it now  -  the real thing</a:t>
             </a:r>
           </a:p>
         </p:txBody>
@@ -16877,21 +17493,19 @@
         </p:nvSpPr>
         <p:spPr>
           <a:xfrm>
-            <a:off x="502920" y="2240280"/>
-            <a:ext cx="2120127" cy="1737360"/>
+            <a:off x="502920" y="1188720"/>
+            <a:ext cx="11185855" cy="530352"/>
           </a:xfrm>
           <a:prstGeom prst="roundRect">
             <a:avLst>
-              <a:gd name="adj" fmla="val 8000"/>
+              <a:gd name="adj" fmla="val 4000"/>
             </a:avLst>
           </a:prstGeom>
           <a:solidFill>
-            <a:srgbClr val="EEF3F8"/>
+            <a:srgbClr val="0E7C86"/>
           </a:solidFill>
-          <a:ln w="12700">
-            <a:solidFill>
-              <a:srgbClr val="0E7C86"/>
-            </a:solidFill>
+          <a:ln>
+            <a:noFill/>
           </a:ln>
           <a:effectLst/>
         </p:spPr>
@@ -16910,31 +17524,36 @@
           </a:fontRef>
         </p:style>
         <p:txBody>
-          <a:bodyPr rtlCol="0" anchor="ctr" wrap="square" lIns="73152" rIns="73152"/>
-          <a:lstStyle/>
-          <a:p>
-            <a:pPr algn="ctr">
-              <a:lnSpc>
-                <a:spcPct val="100000"/>
-              </a:lnSpc>
-              <a:spcAft>
-                <a:spcPts val="0"/>
-              </a:spcAft>
-              <a:defRPr sz="1700" b="0">
-                <a:solidFill>
-                  <a:srgbClr val="1F3A5F"/>
-                </a:solidFill>
-                <a:latin typeface="Calibri"/>
-              </a:defRPr>
-            </a:pPr>
-            <a:r>
-              <a:rPr sz="1700" b="0">
-                <a:solidFill>
-                  <a:srgbClr val="1F3A5F"/>
-                </a:solidFill>
-                <a:latin typeface="Calibri"/>
-              </a:rPr>
-              <a:t>Why delay() has to go</a:t>
+          <a:bodyPr rtlCol="0" anchor="ctr" wrap="square" lIns="182880"/>
+          <a:lstStyle/>
+          <a:p>
+            <a:pPr algn="l"/>
+            <a:r>
+              <a:rPr sz="1300" b="1">
+                <a:solidFill>
+                  <a:srgbClr val="FFFFFF"/>
+                </a:solidFill>
+                <a:latin typeface="Calibri"/>
+              </a:rPr>
+              <a:t>UPLOAD AND RUN:   </a:t>
+            </a:r>
+            <a:r>
+              <a:rPr sz="1500" b="1">
+                <a:solidFill>
+                  <a:srgbClr val="FFFFFF"/>
+                </a:solidFill>
+                <a:latin typeface="Consolas"/>
+              </a:rPr>
+              <a:t>pathfinder_ps3</a:t>
+            </a:r>
+            <a:r>
+              <a:rPr sz="1200">
+                <a:solidFill>
+                  <a:srgbClr val="FFFFFF"/>
+                </a:solidFill>
+                <a:latin typeface="Calibri"/>
+              </a:rPr>
+              <a:t>     (30 minutes)</a:t>
             </a:r>
           </a:p>
         </p:txBody>
@@ -16947,8 +17566,8 @@
         </p:nvSpPr>
         <p:spPr>
           <a:xfrm>
-            <a:off x="502920" y="1856232"/>
-            <a:ext cx="2120127" cy="347472"/>
+            <a:off x="502920" y="1901952"/>
+            <a:ext cx="6249137" cy="3273552"/>
           </a:xfrm>
           <a:prstGeom prst="rect">
             <a:avLst/>
@@ -16961,14 +17580,187 @@
           </a:bodyPr>
           <a:lstStyle/>
           <a:p>
-            <a:pPr algn="ctr">
-              <a:lnSpc>
-                <a:spcPct val="100000"/>
-              </a:lnSpc>
-              <a:spcAft>
-                <a:spcPts val="600"/>
-              </a:spcAft>
-              <a:defRPr sz="1200" b="1">
+            <a:pPr algn="l">
+              <a:lnSpc>
+                <a:spcPct val="100000"/>
+              </a:lnSpc>
+              <a:spcAft>
+                <a:spcPts val="800"/>
+              </a:spcAft>
+              <a:defRPr sz="1800" b="0">
+                <a:solidFill>
+                  <a:srgbClr val="222222"/>
+                </a:solidFill>
+                <a:latin typeface="Calibri"/>
+              </a:defRPr>
+            </a:pPr>
+            <a:r>
+              <a:rPr sz="1800" b="0">
+                <a:solidFill>
+                  <a:srgbClr val="222222"/>
+                </a:solidFill>
+                <a:latin typeface="Calibri"/>
+              </a:rPr>
+              <a:t>1.  Open pathfinder_ps3.ino.</a:t>
+            </a:r>
+          </a:p>
+          <a:p>
+            <a:pPr algn="l">
+              <a:lnSpc>
+                <a:spcPct val="100000"/>
+              </a:lnSpc>
+              <a:spcAft>
+                <a:spcPts val="800"/>
+              </a:spcAft>
+              <a:defRPr sz="1800" b="0">
+                <a:solidFill>
+                  <a:srgbClr val="222222"/>
+                </a:solidFill>
+                <a:latin typeface="Calibri"/>
+              </a:defRPr>
+            </a:pPr>
+            <a:r>
+              <a:rPr sz="1800" b="0">
+                <a:solidFill>
+                  <a:srgbClr val="222222"/>
+                </a:solidFill>
+                <a:latin typeface="Calibri"/>
+              </a:rPr>
+              <a:t>2.  READ IT FIRST. You will recognise almost all of it.</a:t>
+            </a:r>
+          </a:p>
+          <a:p>
+            <a:pPr algn="l">
+              <a:lnSpc>
+                <a:spcPct val="100000"/>
+              </a:lnSpc>
+              <a:spcAft>
+                <a:spcPts val="800"/>
+              </a:spcAft>
+              <a:defRPr sz="1800" b="0">
+                <a:solidFill>
+                  <a:srgbClr val="222222"/>
+                </a:solidFill>
+                <a:latin typeface="Calibri"/>
+              </a:defRPr>
+            </a:pPr>
+            <a:r>
+              <a:rPr sz="1800" b="0">
+                <a:solidFill>
+                  <a:srgbClr val="222222"/>
+                </a:solidFill>
+                <a:latin typeface="Calibri"/>
+              </a:rPr>
+              <a:t>3.  Set PS3_MAC_ADDRESS to your vehicle's address.</a:t>
+            </a:r>
+          </a:p>
+          <a:p>
+            <a:pPr algn="l">
+              <a:lnSpc>
+                <a:spcPct val="100000"/>
+              </a:lnSpc>
+              <a:spcAft>
+                <a:spcPts val="800"/>
+              </a:spcAft>
+              <a:defRPr sz="1800" b="0">
+                <a:solidFill>
+                  <a:srgbClr val="222222"/>
+                </a:solidFill>
+                <a:latin typeface="Calibri"/>
+              </a:defRPr>
+            </a:pPr>
+            <a:r>
+              <a:rPr sz="1800" b="0">
+                <a:solidFill>
+                  <a:srgbClr val="222222"/>
+                </a:solidFill>
+                <a:latin typeface="Calibri"/>
+              </a:rPr>
+              <a:t>4.  Wheels off the ground. Upload. Check every control.</a:t>
+            </a:r>
+          </a:p>
+          <a:p>
+            <a:pPr algn="l">
+              <a:lnSpc>
+                <a:spcPct val="100000"/>
+              </a:lnSpc>
+              <a:spcAft>
+                <a:spcPts val="800"/>
+              </a:spcAft>
+              <a:defRPr sz="1800" b="0">
+                <a:solidFill>
+                  <a:srgbClr val="222222"/>
+                </a:solidFill>
+                <a:latin typeface="Calibri"/>
+              </a:defRPr>
+            </a:pPr>
+            <a:r>
+              <a:rPr sz="1800" b="0">
+                <a:solidFill>
+                  <a:srgbClr val="222222"/>
+                </a:solidFill>
+                <a:latin typeface="Calibri"/>
+              </a:rPr>
+              <a:t>5.  Put it down and drive properly.</a:t>
+            </a:r>
+          </a:p>
+          <a:p>
+            <a:pPr algn="l">
+              <a:lnSpc>
+                <a:spcPct val="100000"/>
+              </a:lnSpc>
+              <a:spcAft>
+                <a:spcPts val="800"/>
+              </a:spcAft>
+              <a:defRPr sz="1800" b="0">
+                <a:solidFill>
+                  <a:srgbClr val="222222"/>
+                </a:solidFill>
+                <a:latin typeface="Calibri"/>
+              </a:defRPr>
+            </a:pPr>
+            <a:r>
+              <a:rPr sz="1800" b="0">
+                <a:solidFill>
+                  <a:srgbClr val="222222"/>
+                </a:solidFill>
+                <a:latin typeface="Calibri"/>
+              </a:rPr>
+              <a:t>6.  Find three things in the file you have NOT seen before, and work out what they do.</a:t>
+            </a:r>
+          </a:p>
+        </p:txBody>
+      </p:sp>
+      <p:sp>
+        <p:nvSpPr>
+          <p:cNvPr id="8" name="TextBox 7"/>
+          <p:cNvSpPr txBox="1"/>
+          <p:nvPr/>
+        </p:nvSpPr>
+        <p:spPr>
+          <a:xfrm>
+            <a:off x="7163537" y="1901952"/>
+            <a:ext cx="4525238" cy="365760"/>
+          </a:xfrm>
+          <a:prstGeom prst="rect">
+            <a:avLst/>
+          </a:prstGeom>
+          <a:noFill/>
+        </p:spPr>
+        <p:txBody>
+          <a:bodyPr wrap="square" lIns="0" tIns="0" rIns="0" bIns="0">
+            <a:spAutoFit/>
+          </a:bodyPr>
+          <a:lstStyle/>
+          <a:p>
+            <a:pPr algn="l">
+              <a:lnSpc>
+                <a:spcPct val="100000"/>
+              </a:lnSpc>
+              <a:spcAft>
+                <a:spcPts val="200"/>
+              </a:spcAft>
+              <a:defRPr sz="1800" b="1">
                 <a:solidFill>
                   <a:srgbClr val="0E7C86"/>
                 </a:solidFill>
@@ -16976,39 +17768,208 @@
               </a:defRPr>
             </a:pPr>
             <a:r>
-              <a:rPr sz="1200" b="1">
+              <a:rPr sz="1800" b="1">
                 <a:solidFill>
                   <a:srgbClr val="0E7C86"/>
                 </a:solidFill>
                 <a:latin typeface="Calibri"/>
               </a:rPr>
-              <a:t>done</a:t>
-            </a:r>
-          </a:p>
-        </p:txBody>
-      </p:sp>
-      <p:sp>
-        <p:nvSpPr>
-          <p:cNvPr id="8" name="Rounded Rectangle 7"/>
+              <a:t>What you should see</a:t>
+            </a:r>
+          </a:p>
+        </p:txBody>
+      </p:sp>
+      <p:sp>
+        <p:nvSpPr>
+          <p:cNvPr id="9" name="TextBox 8"/>
+          <p:cNvSpPr txBox="1"/>
+          <p:nvPr/>
+        </p:nvSpPr>
+        <p:spPr>
+          <a:xfrm>
+            <a:off x="7163537" y="2304288"/>
+            <a:ext cx="4525238" cy="1347456"/>
+          </a:xfrm>
+          <a:prstGeom prst="rect">
+            <a:avLst/>
+          </a:prstGeom>
+          <a:noFill/>
+        </p:spPr>
+        <p:txBody>
+          <a:bodyPr wrap="square" lIns="0" tIns="0" rIns="0" bIns="0">
+            <a:spAutoFit/>
+          </a:bodyPr>
+          <a:lstStyle/>
+          <a:p>
+            <a:pPr algn="l">
+              <a:lnSpc>
+                <a:spcPct val="100000"/>
+              </a:lnSpc>
+              <a:spcAft>
+                <a:spcPts val="300"/>
+              </a:spcAft>
+              <a:defRPr sz="1900" b="0">
+                <a:solidFill>
+                  <a:srgbClr val="222222"/>
+                </a:solidFill>
+                <a:latin typeface="Calibri"/>
+              </a:defRPr>
+            </a:pPr>
+            <a:r>
+              <a:rPr sz="1900" b="0">
+                <a:solidFill>
+                  <a:srgbClr val="222222"/>
+                </a:solidFill>
+                <a:latin typeface="Calibri"/>
+              </a:rPr>
+              <a:t>A startup sweep, then a green blink while it waits, then full driving with lights, servos and the scanner.</a:t>
+            </a:r>
+          </a:p>
+        </p:txBody>
+      </p:sp>
+      <p:sp>
+        <p:nvSpPr>
+          <p:cNvPr id="10" name="TextBox 9"/>
+          <p:cNvSpPr txBox="1"/>
+          <p:nvPr/>
+        </p:nvSpPr>
+        <p:spPr>
+          <a:xfrm>
+            <a:off x="7163537" y="3724896"/>
+            <a:ext cx="4525238" cy="365760"/>
+          </a:xfrm>
+          <a:prstGeom prst="rect">
+            <a:avLst/>
+          </a:prstGeom>
+          <a:noFill/>
+        </p:spPr>
+        <p:txBody>
+          <a:bodyPr wrap="square" lIns="0" tIns="0" rIns="0" bIns="0">
+            <a:spAutoFit/>
+          </a:bodyPr>
+          <a:lstStyle/>
+          <a:p>
+            <a:pPr algn="l">
+              <a:lnSpc>
+                <a:spcPct val="100000"/>
+              </a:lnSpc>
+              <a:spcAft>
+                <a:spcPts val="200"/>
+              </a:spcAft>
+              <a:defRPr sz="1800" b="1">
+                <a:solidFill>
+                  <a:srgbClr val="0E7C86"/>
+                </a:solidFill>
+                <a:latin typeface="Calibri"/>
+              </a:defRPr>
+            </a:pPr>
+            <a:r>
+              <a:rPr sz="1800" b="1">
+                <a:solidFill>
+                  <a:srgbClr val="0E7C86"/>
+                </a:solidFill>
+                <a:latin typeface="Calibri"/>
+              </a:rPr>
+              <a:t>Answer these</a:t>
+            </a:r>
+          </a:p>
+        </p:txBody>
+      </p:sp>
+      <p:sp>
+        <p:nvSpPr>
+          <p:cNvPr id="11" name="TextBox 10"/>
+          <p:cNvSpPr txBox="1"/>
+          <p:nvPr/>
+        </p:nvSpPr>
+        <p:spPr>
+          <a:xfrm>
+            <a:off x="7163537" y="4127232"/>
+            <a:ext cx="4525238" cy="1048271"/>
+          </a:xfrm>
+          <a:prstGeom prst="rect">
+            <a:avLst/>
+          </a:prstGeom>
+          <a:noFill/>
+        </p:spPr>
+        <p:txBody>
+          <a:bodyPr wrap="square" lIns="0" tIns="0" rIns="0" bIns="0">
+            <a:spAutoFit/>
+          </a:bodyPr>
+          <a:lstStyle/>
+          <a:p>
+            <a:pPr algn="l">
+              <a:lnSpc>
+                <a:spcPct val="100000"/>
+              </a:lnSpc>
+              <a:spcAft>
+                <a:spcPts val="300"/>
+              </a:spcAft>
+              <a:defRPr sz="1900" b="0">
+                <a:solidFill>
+                  <a:srgbClr val="222222"/>
+                </a:solidFill>
+                <a:latin typeface="Calibri"/>
+              </a:defRPr>
+            </a:pPr>
+            <a:r>
+              <a:rPr sz="1900" b="0">
+                <a:solidFill>
+                  <a:srgbClr val="222222"/>
+                </a:solidFill>
+                <a:latin typeface="Calibri"/>
+              </a:rPr>
+              <a:t>What does the green blink mean?</a:t>
+            </a:r>
+          </a:p>
+          <a:p>
+            <a:pPr algn="l">
+              <a:lnSpc>
+                <a:spcPct val="100000"/>
+              </a:lnSpc>
+              <a:spcAft>
+                <a:spcPts val="300"/>
+              </a:spcAft>
+              <a:defRPr sz="1900" b="0">
+                <a:solidFill>
+                  <a:srgbClr val="222222"/>
+                </a:solidFill>
+                <a:latin typeface="Calibri"/>
+              </a:defRPr>
+            </a:pPr>
+            <a:r>
+              <a:rPr sz="1900" b="0">
+                <a:solidFill>
+                  <a:srgbClr val="222222"/>
+                </a:solidFill>
+                <a:latin typeface="Calibri"/>
+              </a:rPr>
+              <a:t>What are the three things you found?</a:t>
+            </a:r>
+          </a:p>
+        </p:txBody>
+      </p:sp>
+      <p:sp>
+        <p:nvSpPr>
+          <p:cNvPr id="12" name="Rounded Rectangle 11"/>
           <p:cNvSpPr/>
           <p:nvPr/>
         </p:nvSpPr>
         <p:spPr>
           <a:xfrm>
-            <a:off x="2769351" y="2240280"/>
-            <a:ext cx="2120127" cy="1737360"/>
+            <a:off x="502920" y="5303520"/>
+            <a:ext cx="11185855" cy="960120"/>
           </a:xfrm>
           <a:prstGeom prst="roundRect">
             <a:avLst>
-              <a:gd name="adj" fmla="val 8000"/>
+              <a:gd name="adj" fmla="val 4000"/>
             </a:avLst>
           </a:prstGeom>
           <a:solidFill>
-            <a:srgbClr val="EEF3F8"/>
+            <a:srgbClr val="FBECEC"/>
           </a:solidFill>
           <a:ln w="12700">
             <a:solidFill>
-              <a:srgbClr val="0E7C86"/>
+              <a:srgbClr val="A32A2A"/>
             </a:solidFill>
           </a:ln>
           <a:effectLst/>
@@ -17028,433 +17989,27 @@
           </a:fontRef>
         </p:style>
         <p:txBody>
-          <a:bodyPr rtlCol="0" anchor="ctr" wrap="square" lIns="73152" rIns="73152"/>
-          <a:lstStyle/>
-          <a:p>
-            <a:pPr algn="ctr">
-              <a:lnSpc>
-                <a:spcPct val="100000"/>
-              </a:lnSpc>
-              <a:spcAft>
-                <a:spcPts val="0"/>
-              </a:spcAft>
-              <a:defRPr sz="1700" b="0">
-                <a:solidFill>
-                  <a:srgbClr val="1F3A5F"/>
-                </a:solidFill>
-                <a:latin typeface="Calibri"/>
-              </a:defRPr>
-            </a:pPr>
-            <a:r>
-              <a:rPr sz="1700" b="0">
-                <a:solidFill>
-                  <a:srgbClr val="1F3A5F"/>
-                </a:solidFill>
-                <a:latin typeface="Calibri"/>
-              </a:rPr>
-              <a:t>Two speeds at once</a:t>
-            </a:r>
-          </a:p>
-        </p:txBody>
-      </p:sp>
-      <p:sp>
-        <p:nvSpPr>
-          <p:cNvPr id="9" name="TextBox 8"/>
-          <p:cNvSpPr txBox="1"/>
-          <p:nvPr/>
-        </p:nvSpPr>
-        <p:spPr>
-          <a:xfrm>
-            <a:off x="2769351" y="1856232"/>
-            <a:ext cx="2120127" cy="347472"/>
-          </a:xfrm>
-          <a:prstGeom prst="rect">
-            <a:avLst/>
-          </a:prstGeom>
-          <a:noFill/>
-        </p:spPr>
-        <p:txBody>
-          <a:bodyPr wrap="square" lIns="0" tIns="0" rIns="0" bIns="0">
-            <a:spAutoFit/>
-          </a:bodyPr>
-          <a:lstStyle/>
-          <a:p>
-            <a:pPr algn="ctr">
-              <a:lnSpc>
-                <a:spcPct val="100000"/>
-              </a:lnSpc>
-              <a:spcAft>
-                <a:spcPts val="600"/>
-              </a:spcAft>
-              <a:defRPr sz="1200" b="1">
-                <a:solidFill>
-                  <a:srgbClr val="0E7C86"/>
-                </a:solidFill>
-                <a:latin typeface="Calibri"/>
-              </a:defRPr>
-            </a:pPr>
-            <a:r>
-              <a:rPr sz="1200" b="1">
-                <a:solidFill>
-                  <a:srgbClr val="0E7C86"/>
-                </a:solidFill>
-                <a:latin typeface="Calibri"/>
-              </a:rPr>
-              <a:t>done</a:t>
-            </a:r>
-          </a:p>
-        </p:txBody>
-      </p:sp>
-      <p:sp>
-        <p:nvSpPr>
-          <p:cNvPr id="10" name="Rounded Rectangle 9"/>
-          <p:cNvSpPr/>
-          <p:nvPr/>
-        </p:nvSpPr>
-        <p:spPr>
-          <a:xfrm>
-            <a:off x="5035782" y="2240280"/>
-            <a:ext cx="2120127" cy="1737360"/>
-          </a:xfrm>
-          <a:prstGeom prst="roundRect">
-            <a:avLst>
-              <a:gd name="adj" fmla="val 8000"/>
-            </a:avLst>
-          </a:prstGeom>
-          <a:solidFill>
-            <a:srgbClr val="EEF3F8"/>
-          </a:solidFill>
-          <a:ln w="12700">
-            <a:solidFill>
-              <a:srgbClr val="0E7C86"/>
-            </a:solidFill>
-          </a:ln>
-          <a:effectLst/>
-        </p:spPr>
-        <p:style>
-          <a:lnRef idx="1">
-            <a:schemeClr val="accent1"/>
-          </a:lnRef>
-          <a:fillRef idx="3">
-            <a:schemeClr val="accent1"/>
-          </a:fillRef>
-          <a:effectRef idx="2">
-            <a:schemeClr val="accent1"/>
-          </a:effectRef>
-          <a:fontRef idx="minor">
-            <a:schemeClr val="lt1"/>
-          </a:fontRef>
-        </p:style>
-        <p:txBody>
-          <a:bodyPr rtlCol="0" anchor="ctr" wrap="square" lIns="73152" rIns="73152"/>
-          <a:lstStyle/>
-          <a:p>
-            <a:pPr algn="ctr">
-              <a:lnSpc>
-                <a:spcPct val="100000"/>
-              </a:lnSpc>
-              <a:spcAft>
-                <a:spcPts val="0"/>
-              </a:spcAft>
-              <a:defRPr sz="1700" b="0">
-                <a:solidFill>
-                  <a:srgbClr val="1F3A5F"/>
-                </a:solidFill>
-                <a:latin typeface="Calibri"/>
-              </a:defRPr>
-            </a:pPr>
-            <a:r>
-              <a:rPr sz="1700" b="0">
-                <a:solidFill>
-                  <a:srgbClr val="1F3A5F"/>
-                </a:solidFill>
-                <a:latin typeface="Calibri"/>
-              </a:rPr>
-              <a:t>Edge detection</a:t>
-            </a:r>
-          </a:p>
-        </p:txBody>
-      </p:sp>
-      <p:sp>
-        <p:nvSpPr>
-          <p:cNvPr id="11" name="TextBox 10"/>
-          <p:cNvSpPr txBox="1"/>
-          <p:nvPr/>
-        </p:nvSpPr>
-        <p:spPr>
-          <a:xfrm>
-            <a:off x="5035782" y="1856232"/>
-            <a:ext cx="2120127" cy="347472"/>
-          </a:xfrm>
-          <a:prstGeom prst="rect">
-            <a:avLst/>
-          </a:prstGeom>
-          <a:noFill/>
-        </p:spPr>
-        <p:txBody>
-          <a:bodyPr wrap="square" lIns="0" tIns="0" rIns="0" bIns="0">
-            <a:spAutoFit/>
-          </a:bodyPr>
-          <a:lstStyle/>
-          <a:p>
-            <a:pPr algn="ctr">
-              <a:lnSpc>
-                <a:spcPct val="100000"/>
-              </a:lnSpc>
-              <a:spcAft>
-                <a:spcPts val="600"/>
-              </a:spcAft>
-              <a:defRPr sz="1200" b="1">
-                <a:solidFill>
-                  <a:srgbClr val="0E7C86"/>
-                </a:solidFill>
-                <a:latin typeface="Calibri"/>
-              </a:defRPr>
-            </a:pPr>
-            <a:r>
-              <a:rPr sz="1200" b="1">
-                <a:solidFill>
-                  <a:srgbClr val="0E7C86"/>
-                </a:solidFill>
-                <a:latin typeface="Calibri"/>
-              </a:rPr>
-              <a:t>done</a:t>
-            </a:r>
-          </a:p>
-        </p:txBody>
-      </p:sp>
-      <p:sp>
-        <p:nvSpPr>
-          <p:cNvPr id="12" name="Rounded Rectangle 11"/>
-          <p:cNvSpPr/>
-          <p:nvPr/>
-        </p:nvSpPr>
-        <p:spPr>
-          <a:xfrm>
-            <a:off x="7302213" y="2240280"/>
-            <a:ext cx="2120127" cy="1737360"/>
-          </a:xfrm>
-          <a:prstGeom prst="roundRect">
-            <a:avLst>
-              <a:gd name="adj" fmla="val 8000"/>
-            </a:avLst>
-          </a:prstGeom>
-          <a:solidFill>
-            <a:srgbClr val="EEF3F8"/>
-          </a:solidFill>
-          <a:ln w="12700">
-            <a:solidFill>
-              <a:srgbClr val="0E7C86"/>
-            </a:solidFill>
-          </a:ln>
-          <a:effectLst/>
-        </p:spPr>
-        <p:style>
-          <a:lnRef idx="1">
-            <a:schemeClr val="accent1"/>
-          </a:lnRef>
-          <a:fillRef idx="3">
-            <a:schemeClr val="accent1"/>
-          </a:fillRef>
-          <a:effectRef idx="2">
-            <a:schemeClr val="accent1"/>
-          </a:effectRef>
-          <a:fontRef idx="minor">
-            <a:schemeClr val="lt1"/>
-          </a:fontRef>
-        </p:style>
-        <p:txBody>
-          <a:bodyPr rtlCol="0" anchor="ctr" wrap="square" lIns="73152" rIns="73152"/>
-          <a:lstStyle/>
-          <a:p>
-            <a:pPr algn="ctr">
-              <a:lnSpc>
-                <a:spcPct val="100000"/>
-              </a:lnSpc>
-              <a:spcAft>
-                <a:spcPts val="0"/>
-              </a:spcAft>
-              <a:defRPr sz="1700" b="0">
-                <a:solidFill>
-                  <a:srgbClr val="1F3A5F"/>
-                </a:solidFill>
-                <a:latin typeface="Calibri"/>
-              </a:defRPr>
-            </a:pPr>
-            <a:r>
-              <a:rPr sz="1700" b="0">
-                <a:solidFill>
-                  <a:srgbClr val="1F3A5F"/>
-                </a:solidFill>
-                <a:latin typeface="Calibri"/>
-              </a:rPr>
-              <a:t>Lights from state</a:t>
-            </a:r>
-          </a:p>
-        </p:txBody>
-      </p:sp>
-      <p:sp>
-        <p:nvSpPr>
-          <p:cNvPr id="13" name="TextBox 12"/>
-          <p:cNvSpPr txBox="1"/>
-          <p:nvPr/>
-        </p:nvSpPr>
-        <p:spPr>
-          <a:xfrm>
-            <a:off x="7302213" y="1856232"/>
-            <a:ext cx="2120127" cy="347472"/>
-          </a:xfrm>
-          <a:prstGeom prst="rect">
-            <a:avLst/>
-          </a:prstGeom>
-          <a:noFill/>
-        </p:spPr>
-        <p:txBody>
-          <a:bodyPr wrap="square" lIns="0" tIns="0" rIns="0" bIns="0">
-            <a:spAutoFit/>
-          </a:bodyPr>
-          <a:lstStyle/>
-          <a:p>
-            <a:pPr algn="ctr">
-              <a:lnSpc>
-                <a:spcPct val="100000"/>
-              </a:lnSpc>
-              <a:spcAft>
-                <a:spcPts val="600"/>
-              </a:spcAft>
-              <a:defRPr sz="1200" b="1">
-                <a:solidFill>
-                  <a:srgbClr val="0E7C86"/>
-                </a:solidFill>
-                <a:latin typeface="Calibri"/>
-              </a:defRPr>
-            </a:pPr>
-            <a:r>
-              <a:rPr sz="1200" b="1">
-                <a:solidFill>
-                  <a:srgbClr val="0E7C86"/>
-                </a:solidFill>
-                <a:latin typeface="Calibri"/>
-              </a:rPr>
-              <a:t>done</a:t>
-            </a:r>
-          </a:p>
-        </p:txBody>
-      </p:sp>
-      <p:sp>
-        <p:nvSpPr>
-          <p:cNvPr id="14" name="Rounded Rectangle 13"/>
-          <p:cNvSpPr/>
-          <p:nvPr/>
-        </p:nvSpPr>
-        <p:spPr>
-          <a:xfrm>
-            <a:off x="9568644" y="2240280"/>
-            <a:ext cx="2120127" cy="1737360"/>
-          </a:xfrm>
-          <a:prstGeom prst="roundRect">
-            <a:avLst>
-              <a:gd name="adj" fmla="val 8000"/>
-            </a:avLst>
-          </a:prstGeom>
-          <a:solidFill>
-            <a:srgbClr val="D6ECEE"/>
-          </a:solidFill>
-          <a:ln w="25400">
-            <a:solidFill>
-              <a:srgbClr val="0E7C86"/>
-            </a:solidFill>
-          </a:ln>
-          <a:effectLst/>
-        </p:spPr>
-        <p:style>
-          <a:lnRef idx="1">
-            <a:schemeClr val="accent1"/>
-          </a:lnRef>
-          <a:fillRef idx="3">
-            <a:schemeClr val="accent1"/>
-          </a:fillRef>
-          <a:effectRef idx="2">
-            <a:schemeClr val="accent1"/>
-          </a:effectRef>
-          <a:fontRef idx="minor">
-            <a:schemeClr val="lt1"/>
-          </a:fontRef>
-        </p:style>
-        <p:txBody>
-          <a:bodyPr rtlCol="0" anchor="ctr" wrap="square" lIns="73152" rIns="73152"/>
-          <a:lstStyle/>
-          <a:p>
-            <a:pPr algn="ctr">
-              <a:lnSpc>
-                <a:spcPct val="100000"/>
-              </a:lnSpc>
-              <a:spcAft>
-                <a:spcPts val="0"/>
-              </a:spcAft>
-              <a:defRPr sz="1700" b="1">
-                <a:solidFill>
-                  <a:srgbClr val="1F3A5F"/>
-                </a:solidFill>
-                <a:latin typeface="Calibri"/>
-              </a:defRPr>
-            </a:pPr>
-            <a:r>
-              <a:rPr sz="1700" b="1">
-                <a:solidFill>
-                  <a:srgbClr val="1F3A5F"/>
-                </a:solidFill>
-                <a:latin typeface="Calibri"/>
-              </a:rPr>
-              <a:t>The full program</a:t>
-            </a:r>
-          </a:p>
-        </p:txBody>
-      </p:sp>
-      <p:sp>
-        <p:nvSpPr>
-          <p:cNvPr id="15" name="TextBox 14"/>
-          <p:cNvSpPr txBox="1"/>
-          <p:nvPr/>
-        </p:nvSpPr>
-        <p:spPr>
-          <a:xfrm>
-            <a:off x="9568644" y="1856232"/>
-            <a:ext cx="2120127" cy="347472"/>
-          </a:xfrm>
-          <a:prstGeom prst="rect">
-            <a:avLst/>
-          </a:prstGeom>
-          <a:noFill/>
-        </p:spPr>
-        <p:txBody>
-          <a:bodyPr wrap="square" lIns="0" tIns="0" rIns="0" bIns="0">
-            <a:spAutoFit/>
-          </a:bodyPr>
-          <a:lstStyle/>
-          <a:p>
-            <a:pPr algn="ctr">
-              <a:lnSpc>
-                <a:spcPct val="100000"/>
-              </a:lnSpc>
-              <a:spcAft>
-                <a:spcPts val="600"/>
-              </a:spcAft>
-              <a:defRPr sz="1200" b="1">
-                <a:solidFill>
-                  <a:srgbClr val="0E7C86"/>
-                </a:solidFill>
-                <a:latin typeface="Calibri"/>
-              </a:defRPr>
-            </a:pPr>
-            <a:r>
-              <a:rPr sz="1200" b="1">
-                <a:solidFill>
-                  <a:srgbClr val="0E7C86"/>
-                </a:solidFill>
-                <a:latin typeface="Calibri"/>
-              </a:rPr>
-              <a:t>NOW</a:t>
+          <a:bodyPr rtlCol="0" anchor="ctr" wrap="square" lIns="164592" rIns="164592" tIns="73152" bIns="73152"/>
+          <a:lstStyle/>
+          <a:p>
+            <a:pPr algn="l"/>
+            <a:r>
+              <a:rPr sz="1300" b="1">
+                <a:solidFill>
+                  <a:srgbClr val="A32A2A"/>
+                </a:solidFill>
+                <a:latin typeface="Calibri"/>
+              </a:rPr>
+              <a:t>SAFETY   </a:t>
+            </a:r>
+            <a:r>
+              <a:rPr sz="1500">
+                <a:solidFill>
+                  <a:srgbClr val="222222"/>
+                </a:solidFill>
+                <a:latin typeface="Calibri"/>
+              </a:rPr>
+              <a:t>Wheels off the ground until every control is checked.</a:t>
             </a:r>
           </a:p>
         </p:txBody>
@@ -17518,7 +18073,7 @@
                 </a:solidFill>
                 <a:latin typeface="Calibri"/>
               </a:rPr>
-              <a:t>Do it now  -  the real thing</a:t>
+              <a:t>Calibrate, then race</a:t>
             </a:r>
           </a:p>
         </p:txBody>
@@ -17665,87 +18220,14 @@
       </p:sp>
       <p:sp>
         <p:nvSpPr>
-          <p:cNvPr id="6" name="Rounded Rectangle 5"/>
-          <p:cNvSpPr/>
+          <p:cNvPr id="6" name="TextBox 5"/>
+          <p:cNvSpPr txBox="1"/>
           <p:nvPr/>
         </p:nvSpPr>
         <p:spPr>
           <a:xfrm>
             <a:off x="502920" y="1188720"/>
             <a:ext cx="11185855" cy="530352"/>
-          </a:xfrm>
-          <a:prstGeom prst="roundRect">
-            <a:avLst>
-              <a:gd name="adj" fmla="val 4000"/>
-            </a:avLst>
-          </a:prstGeom>
-          <a:solidFill>
-            <a:srgbClr val="0E7C86"/>
-          </a:solidFill>
-          <a:ln>
-            <a:noFill/>
-          </a:ln>
-          <a:effectLst/>
-        </p:spPr>
-        <p:style>
-          <a:lnRef idx="1">
-            <a:schemeClr val="accent1"/>
-          </a:lnRef>
-          <a:fillRef idx="3">
-            <a:schemeClr val="accent1"/>
-          </a:fillRef>
-          <a:effectRef idx="2">
-            <a:schemeClr val="accent1"/>
-          </a:effectRef>
-          <a:fontRef idx="minor">
-            <a:schemeClr val="lt1"/>
-          </a:fontRef>
-        </p:style>
-        <p:txBody>
-          <a:bodyPr rtlCol="0" anchor="ctr" wrap="square" lIns="182880"/>
-          <a:lstStyle/>
-          <a:p>
-            <a:pPr algn="l"/>
-            <a:r>
-              <a:rPr sz="1300" b="1">
-                <a:solidFill>
-                  <a:srgbClr val="FFFFFF"/>
-                </a:solidFill>
-                <a:latin typeface="Calibri"/>
-              </a:rPr>
-              <a:t>UPLOAD AND RUN:   </a:t>
-            </a:r>
-            <a:r>
-              <a:rPr sz="1500" b="1">
-                <a:solidFill>
-                  <a:srgbClr val="FFFFFF"/>
-                </a:solidFill>
-                <a:latin typeface="Consolas"/>
-              </a:rPr>
-              <a:t>pathfinder_ps3</a:t>
-            </a:r>
-            <a:r>
-              <a:rPr sz="1200">
-                <a:solidFill>
-                  <a:srgbClr val="FFFFFF"/>
-                </a:solidFill>
-                <a:latin typeface="Calibri"/>
-              </a:rPr>
-              <a:t>     (30 minutes)</a:t>
-            </a:r>
-          </a:p>
-        </p:txBody>
-      </p:sp>
-      <p:sp>
-        <p:nvSpPr>
-          <p:cNvPr id="7" name="TextBox 6"/>
-          <p:cNvSpPr txBox="1"/>
-          <p:nvPr/>
-        </p:nvSpPr>
-        <p:spPr>
-          <a:xfrm>
-            <a:off x="502920" y="1901952"/>
-            <a:ext cx="6249137" cy="3273552"/>
           </a:xfrm>
           <a:prstGeom prst="rect">
             <a:avLst/>
@@ -17763,162 +18245,37 @@
                 <a:spcPct val="100000"/>
               </a:lnSpc>
               <a:spcAft>
-                <a:spcPts val="800"/>
-              </a:spcAft>
-              <a:defRPr sz="1800" b="0">
-                <a:solidFill>
-                  <a:srgbClr val="222222"/>
-                </a:solidFill>
-                <a:latin typeface="Calibri"/>
-              </a:defRPr>
-            </a:pPr>
-            <a:r>
-              <a:rPr sz="1800" b="0">
-                <a:solidFill>
-                  <a:srgbClr val="222222"/>
-                </a:solidFill>
-                <a:latin typeface="Calibri"/>
-              </a:rPr>
-              <a:t>1.  Open pathfinder_ps3.ino.</a:t>
-            </a:r>
-          </a:p>
-          <a:p>
-            <a:pPr algn="l">
-              <a:lnSpc>
-                <a:spcPct val="100000"/>
-              </a:lnSpc>
-              <a:spcAft>
-                <a:spcPts val="800"/>
-              </a:spcAft>
-              <a:defRPr sz="1800" b="0">
-                <a:solidFill>
-                  <a:srgbClr val="222222"/>
-                </a:solidFill>
-                <a:latin typeface="Calibri"/>
-              </a:defRPr>
-            </a:pPr>
-            <a:r>
-              <a:rPr sz="1800" b="0">
-                <a:solidFill>
-                  <a:srgbClr val="222222"/>
-                </a:solidFill>
-                <a:latin typeface="Calibri"/>
-              </a:rPr>
-              <a:t>2.  READ IT FIRST. You will recognise almost all of it.</a:t>
-            </a:r>
-          </a:p>
-          <a:p>
-            <a:pPr algn="l">
-              <a:lnSpc>
-                <a:spcPct val="100000"/>
-              </a:lnSpc>
-              <a:spcAft>
-                <a:spcPts val="800"/>
-              </a:spcAft>
-              <a:defRPr sz="1800" b="0">
-                <a:solidFill>
-                  <a:srgbClr val="222222"/>
-                </a:solidFill>
-                <a:latin typeface="Calibri"/>
-              </a:defRPr>
-            </a:pPr>
-            <a:r>
-              <a:rPr sz="1800" b="0">
-                <a:solidFill>
-                  <a:srgbClr val="222222"/>
-                </a:solidFill>
-                <a:latin typeface="Calibri"/>
-              </a:rPr>
-              <a:t>3.  Set PS3_MAC_ADDRESS to your vehicle's address.</a:t>
-            </a:r>
-          </a:p>
-          <a:p>
-            <a:pPr algn="l">
-              <a:lnSpc>
-                <a:spcPct val="100000"/>
-              </a:lnSpc>
-              <a:spcAft>
-                <a:spcPts val="800"/>
-              </a:spcAft>
-              <a:defRPr sz="1800" b="0">
-                <a:solidFill>
-                  <a:srgbClr val="222222"/>
-                </a:solidFill>
-                <a:latin typeface="Calibri"/>
-              </a:defRPr>
-            </a:pPr>
-            <a:r>
-              <a:rPr sz="1800" b="0">
-                <a:solidFill>
-                  <a:srgbClr val="222222"/>
-                </a:solidFill>
-                <a:latin typeface="Calibri"/>
-              </a:rPr>
-              <a:t>4.  Wheels off the ground. Upload. Check every control.</a:t>
-            </a:r>
-          </a:p>
-          <a:p>
-            <a:pPr algn="l">
-              <a:lnSpc>
-                <a:spcPct val="100000"/>
-              </a:lnSpc>
-              <a:spcAft>
-                <a:spcPts val="800"/>
-              </a:spcAft>
-              <a:defRPr sz="1800" b="0">
-                <a:solidFill>
-                  <a:srgbClr val="222222"/>
-                </a:solidFill>
-                <a:latin typeface="Calibri"/>
-              </a:defRPr>
-            </a:pPr>
-            <a:r>
-              <a:rPr sz="1800" b="0">
-                <a:solidFill>
-                  <a:srgbClr val="222222"/>
-                </a:solidFill>
-                <a:latin typeface="Calibri"/>
-              </a:rPr>
-              <a:t>5.  Put it down and drive properly.</a:t>
-            </a:r>
-          </a:p>
-          <a:p>
-            <a:pPr algn="l">
-              <a:lnSpc>
-                <a:spcPct val="100000"/>
-              </a:lnSpc>
-              <a:spcAft>
-                <a:spcPts val="800"/>
-              </a:spcAft>
-              <a:defRPr sz="1800" b="0">
-                <a:solidFill>
-                  <a:srgbClr val="222222"/>
-                </a:solidFill>
-                <a:latin typeface="Calibri"/>
-              </a:defRPr>
-            </a:pPr>
-            <a:r>
-              <a:rPr sz="1800" b="0">
-                <a:solidFill>
-                  <a:srgbClr val="222222"/>
-                </a:solidFill>
-                <a:latin typeface="Calibri"/>
-              </a:rPr>
-              <a:t>6.  Find three things in the file you have NOT seen before, and work out what they do.</a:t>
-            </a:r>
-          </a:p>
-        </p:txBody>
-      </p:sp>
-      <p:sp>
-        <p:nvSpPr>
-          <p:cNvPr id="8" name="TextBox 7"/>
+                <a:spcPts val="600"/>
+              </a:spcAft>
+              <a:defRPr sz="1900" b="1">
+                <a:solidFill>
+                  <a:srgbClr val="0E7C86"/>
+                </a:solidFill>
+                <a:latin typeface="Calibri"/>
+              </a:defRPr>
+            </a:pPr>
+            <a:r>
+              <a:rPr sz="1900" b="1">
+                <a:solidFill>
+                  <a:srgbClr val="0E7C86"/>
+                </a:solidFill>
+                <a:latin typeface="Calibri"/>
+              </a:rPr>
+              <a:t>Measure first. Then argue about who is fastest.</a:t>
+            </a:r>
+          </a:p>
+        </p:txBody>
+      </p:sp>
+      <p:sp>
+        <p:nvSpPr>
+          <p:cNvPr id="7" name="TextBox 6"/>
           <p:cNvSpPr txBox="1"/>
           <p:nvPr/>
         </p:nvSpPr>
         <p:spPr>
           <a:xfrm>
-            <a:off x="7163537" y="1901952"/>
-            <a:ext cx="4525238" cy="365760"/>
+            <a:off x="502920" y="1755648"/>
+            <a:ext cx="5364327" cy="4507992"/>
           </a:xfrm>
           <a:prstGeom prst="rect">
             <a:avLst/>
@@ -17936,37 +18293,178 @@
                 <a:spcPct val="100000"/>
               </a:lnSpc>
               <a:spcAft>
-                <a:spcPts val="200"/>
-              </a:spcAft>
-              <a:defRPr sz="1800" b="1">
-                <a:solidFill>
-                  <a:srgbClr val="0E7C86"/>
-                </a:solidFill>
-                <a:latin typeface="Calibri"/>
-              </a:defRPr>
-            </a:pPr>
-            <a:r>
-              <a:rPr sz="1800" b="1">
-                <a:solidFill>
-                  <a:srgbClr val="0E7C86"/>
-                </a:solidFill>
-                <a:latin typeface="Calibri"/>
-              </a:rPr>
-              <a:t>What you should see</a:t>
-            </a:r>
-          </a:p>
-        </p:txBody>
-      </p:sp>
-      <p:sp>
-        <p:nvSpPr>
-          <p:cNvPr id="9" name="TextBox 8"/>
+                <a:spcPts val="900"/>
+              </a:spcAft>
+              <a:defRPr sz="2000" b="0">
+                <a:solidFill>
+                  <a:srgbClr val="222222"/>
+                </a:solidFill>
+                <a:latin typeface="Calibri"/>
+              </a:defRPr>
+            </a:pPr>
+            <a:r>
+              <a:rPr sz="2000" b="0">
+                <a:solidFill>
+                  <a:srgbClr val="222222"/>
+                </a:solidFill>
+                <a:latin typeface="Calibri"/>
+              </a:rPr>
+              <a:t>CALIBRATE FIRST.</a:t>
+            </a:r>
+          </a:p>
+          <a:p>
+            <a:pPr lvl="1" algn="l">
+              <a:lnSpc>
+                <a:spcPct val="100000"/>
+              </a:lnSpc>
+              <a:spcAft>
+                <a:spcPts val="900"/>
+              </a:spcAft>
+              <a:defRPr sz="2000" b="0">
+                <a:solidFill>
+                  <a:srgbClr val="222222"/>
+                </a:solidFill>
+                <a:latin typeface="Calibri"/>
+              </a:defRPr>
+            </a:pPr>
+            <a:r>
+              <a:rPr sz="2000" b="0">
+                <a:solidFill>
+                  <a:srgbClr val="222222"/>
+                </a:solidFill>
+                <a:latin typeface="Calibri"/>
+              </a:rPr>
+              <a:t>Mark a start and a finish line with tape. Measure the distance.</a:t>
+            </a:r>
+          </a:p>
+          <a:p>
+            <a:pPr lvl="1" algn="l">
+              <a:lnSpc>
+                <a:spcPct val="100000"/>
+              </a:lnSpc>
+              <a:spcAft>
+                <a:spcPts val="900"/>
+              </a:spcAft>
+              <a:defRPr sz="2000" b="0">
+                <a:solidFill>
+                  <a:srgbClr val="222222"/>
+                </a:solidFill>
+                <a:latin typeface="Calibri"/>
+              </a:defRPr>
+            </a:pPr>
+            <a:r>
+              <a:rPr sz="2000" b="0">
+                <a:solidFill>
+                  <a:srgbClr val="222222"/>
+                </a:solidFill>
+                <a:latin typeface="Calibri"/>
+              </a:rPr>
+              <a:t>Drive it flat out and time it. Speed = distance / time.</a:t>
+            </a:r>
+          </a:p>
+          <a:p>
+            <a:pPr lvl="1" algn="l">
+              <a:lnSpc>
+                <a:spcPct val="100000"/>
+              </a:lnSpc>
+              <a:spcAft>
+                <a:spcPts val="900"/>
+              </a:spcAft>
+              <a:defRPr sz="2000" b="0">
+                <a:solidFill>
+                  <a:srgbClr val="222222"/>
+                </a:solidFill>
+                <a:latin typeface="Calibri"/>
+              </a:defRPr>
+            </a:pPr>
+            <a:r>
+              <a:rPr sz="2000" b="0">
+                <a:solidFill>
+                  <a:srgbClr val="222222"/>
+                </a:solidFill>
+                <a:latin typeface="Calibri"/>
+              </a:rPr>
+              <a:t>Compare with the number you calculated in Lesson 2. Were you right?</a:t>
+            </a:r>
+          </a:p>
+          <a:p>
+            <a:pPr algn="l">
+              <a:lnSpc>
+                <a:spcPct val="100000"/>
+              </a:lnSpc>
+              <a:spcAft>
+                <a:spcPts val="900"/>
+              </a:spcAft>
+              <a:defRPr sz="1000" b="0">
+                <a:solidFill>
+                  <a:srgbClr val="222222"/>
+                </a:solidFill>
+                <a:latin typeface="Calibri"/>
+              </a:defRPr>
+            </a:pPr>
+          </a:p>
+          <a:p>
+            <a:pPr algn="l">
+              <a:lnSpc>
+                <a:spcPct val="100000"/>
+              </a:lnSpc>
+              <a:spcAft>
+                <a:spcPts val="900"/>
+              </a:spcAft>
+              <a:defRPr sz="2000" b="0">
+                <a:solidFill>
+                  <a:srgbClr val="222222"/>
+                </a:solidFill>
+                <a:latin typeface="Calibri"/>
+              </a:defRPr>
+            </a:pPr>
+            <a:r>
+              <a:rPr sz="2000" b="0">
+                <a:solidFill>
+                  <a:srgbClr val="222222"/>
+                </a:solidFill>
+                <a:latin typeface="Calibri"/>
+              </a:rPr>
+              <a:t>DRAG RACE.</a:t>
+            </a:r>
+          </a:p>
+          <a:p>
+            <a:pPr lvl="1" algn="l">
+              <a:lnSpc>
+                <a:spcPct val="100000"/>
+              </a:lnSpc>
+              <a:spcAft>
+                <a:spcPts val="900"/>
+              </a:spcAft>
+              <a:defRPr sz="2000" b="0">
+                <a:solidFill>
+                  <a:srgbClr val="222222"/>
+                </a:solidFill>
+                <a:latin typeface="Calibri"/>
+              </a:defRPr>
+            </a:pPr>
+            <a:r>
+              <a:rPr sz="2000" b="0">
+                <a:solidFill>
+                  <a:srgbClr val="222222"/>
+                </a:solidFill>
+                <a:latin typeface="Calibri"/>
+              </a:rPr>
+              <a:t>Two or three vehicles side by side. First across the line INSIDE the lane wins - leaving the lane does not count.</a:t>
+            </a:r>
+          </a:p>
+        </p:txBody>
+      </p:sp>
+      <p:sp>
+        <p:nvSpPr>
+          <p:cNvPr id="8" name="TextBox 7"/>
           <p:cNvSpPr txBox="1"/>
           <p:nvPr/>
         </p:nvSpPr>
         <p:spPr>
           <a:xfrm>
-            <a:off x="7163537" y="2304288"/>
-            <a:ext cx="4525238" cy="1347456"/>
+            <a:off x="6324447" y="1755648"/>
+            <a:ext cx="5364327" cy="4507992"/>
           </a:xfrm>
           <a:prstGeom prst="rect">
             <a:avLst/>
@@ -17984,210 +18482,164 @@
                 <a:spcPct val="100000"/>
               </a:lnSpc>
               <a:spcAft>
-                <a:spcPts val="300"/>
-              </a:spcAft>
-              <a:defRPr sz="1900" b="0">
-                <a:solidFill>
-                  <a:srgbClr val="222222"/>
-                </a:solidFill>
-                <a:latin typeface="Calibri"/>
-              </a:defRPr>
-            </a:pPr>
-            <a:r>
-              <a:rPr sz="1900" b="0">
-                <a:solidFill>
-                  <a:srgbClr val="222222"/>
-                </a:solidFill>
-                <a:latin typeface="Calibri"/>
-              </a:rPr>
-              <a:t>A startup sweep, then a green blink while it waits, then full driving with lights, servos and the scanner.</a:t>
-            </a:r>
-          </a:p>
-        </p:txBody>
-      </p:sp>
-      <p:sp>
-        <p:nvSpPr>
-          <p:cNvPr id="10" name="TextBox 9"/>
-          <p:cNvSpPr txBox="1"/>
-          <p:nvPr/>
-        </p:nvSpPr>
-        <p:spPr>
-          <a:xfrm>
-            <a:off x="7163537" y="3724896"/>
-            <a:ext cx="4525238" cy="365760"/>
-          </a:xfrm>
-          <a:prstGeom prst="rect">
-            <a:avLst/>
-          </a:prstGeom>
-          <a:noFill/>
-        </p:spPr>
-        <p:txBody>
-          <a:bodyPr wrap="square" lIns="0" tIns="0" rIns="0" bIns="0">
-            <a:spAutoFit/>
-          </a:bodyPr>
-          <a:lstStyle/>
+                <a:spcPts val="900"/>
+              </a:spcAft>
+              <a:defRPr sz="2000" b="0">
+                <a:solidFill>
+                  <a:srgbClr val="222222"/>
+                </a:solidFill>
+                <a:latin typeface="Calibri"/>
+              </a:defRPr>
+            </a:pPr>
+            <a:r>
+              <a:rPr sz="2000" b="0">
+                <a:solidFill>
+                  <a:srgbClr val="222222"/>
+                </a:solidFill>
+                <a:latin typeface="Calibri"/>
+              </a:rPr>
+              <a:t>DRAG RACE  (cont.)</a:t>
+            </a:r>
+          </a:p>
+          <a:p>
+            <a:pPr lvl="1" algn="l">
+              <a:lnSpc>
+                <a:spcPct val="100000"/>
+              </a:lnSpc>
+              <a:spcAft>
+                <a:spcPts val="900"/>
+              </a:spcAft>
+              <a:defRPr sz="2000" b="0">
+                <a:solidFill>
+                  <a:srgbClr val="222222"/>
+                </a:solidFill>
+                <a:latin typeface="Calibri"/>
+              </a:defRPr>
+            </a:pPr>
+            <a:r>
+              <a:rPr sz="2000" b="0">
+                <a:solidFill>
+                  <a:srgbClr val="222222"/>
+                </a:solidFill>
+                <a:latin typeface="Calibri"/>
+              </a:rPr>
+              <a:t>Straight-line speed is not the whole problem. Keeping it straight is, because only one command runs at a time.</a:t>
+            </a:r>
+          </a:p>
+          <a:p>
+            <a:pPr lvl="1" algn="l">
+              <a:lnSpc>
+                <a:spcPct val="100000"/>
+              </a:lnSpc>
+              <a:spcAft>
+                <a:spcPts val="900"/>
+              </a:spcAft>
+              <a:defRPr sz="2000" b="0">
+                <a:solidFill>
+                  <a:srgbClr val="222222"/>
+                </a:solidFill>
+                <a:latin typeface="Calibri"/>
+              </a:defRPr>
+            </a:pPr>
+            <a:r>
+              <a:rPr sz="2000" b="0">
+                <a:solidFill>
+                  <a:srgbClr val="222222"/>
+                </a:solidFill>
+                <a:latin typeface="Calibri"/>
+              </a:rPr>
+              <a:t>You can only brake by reversing. Half power for a short time is usually right.</a:t>
+            </a:r>
+          </a:p>
           <a:p>
             <a:pPr algn="l">
               <a:lnSpc>
                 <a:spcPct val="100000"/>
               </a:lnSpc>
               <a:spcAft>
-                <a:spcPts val="200"/>
-              </a:spcAft>
-              <a:defRPr sz="1800" b="1">
-                <a:solidFill>
-                  <a:srgbClr val="0E7C86"/>
-                </a:solidFill>
-                <a:latin typeface="Calibri"/>
-              </a:defRPr>
-            </a:pPr>
-            <a:r>
-              <a:rPr sz="1800" b="1">
-                <a:solidFill>
-                  <a:srgbClr val="0E7C86"/>
-                </a:solidFill>
-                <a:latin typeface="Calibri"/>
-              </a:rPr>
-              <a:t>Answer these</a:t>
-            </a:r>
-          </a:p>
-        </p:txBody>
-      </p:sp>
-      <p:sp>
-        <p:nvSpPr>
-          <p:cNvPr id="11" name="TextBox 10"/>
-          <p:cNvSpPr txBox="1"/>
-          <p:nvPr/>
-        </p:nvSpPr>
-        <p:spPr>
-          <a:xfrm>
-            <a:off x="7163537" y="4127232"/>
-            <a:ext cx="4525238" cy="1048271"/>
-          </a:xfrm>
-          <a:prstGeom prst="rect">
-            <a:avLst/>
-          </a:prstGeom>
-          <a:noFill/>
-        </p:spPr>
-        <p:txBody>
-          <a:bodyPr wrap="square" lIns="0" tIns="0" rIns="0" bIns="0">
-            <a:spAutoFit/>
-          </a:bodyPr>
-          <a:lstStyle/>
+                <a:spcPts val="900"/>
+              </a:spcAft>
+              <a:defRPr sz="1000" b="0">
+                <a:solidFill>
+                  <a:srgbClr val="222222"/>
+                </a:solidFill>
+                <a:latin typeface="Calibri"/>
+              </a:defRPr>
+            </a:pPr>
+          </a:p>
           <a:p>
             <a:pPr algn="l">
               <a:lnSpc>
                 <a:spcPct val="100000"/>
               </a:lnSpc>
               <a:spcAft>
-                <a:spcPts val="300"/>
-              </a:spcAft>
-              <a:defRPr sz="1900" b="0">
-                <a:solidFill>
-                  <a:srgbClr val="222222"/>
-                </a:solidFill>
-                <a:latin typeface="Calibri"/>
-              </a:defRPr>
-            </a:pPr>
-            <a:r>
-              <a:rPr sz="1900" b="0">
-                <a:solidFill>
-                  <a:srgbClr val="222222"/>
-                </a:solidFill>
-                <a:latin typeface="Calibri"/>
-              </a:rPr>
-              <a:t>What does the green blink mean?</a:t>
-            </a:r>
-          </a:p>
-          <a:p>
-            <a:pPr algn="l">
-              <a:lnSpc>
-                <a:spcPct val="100000"/>
-              </a:lnSpc>
-              <a:spcAft>
-                <a:spcPts val="300"/>
-              </a:spcAft>
-              <a:defRPr sz="1900" b="0">
-                <a:solidFill>
-                  <a:srgbClr val="222222"/>
-                </a:solidFill>
-                <a:latin typeface="Calibri"/>
-              </a:defRPr>
-            </a:pPr>
-            <a:r>
-              <a:rPr sz="1900" b="0">
-                <a:solidFill>
-                  <a:srgbClr val="222222"/>
-                </a:solidFill>
-                <a:latin typeface="Calibri"/>
-              </a:rPr>
-              <a:t>What are the three things you found?</a:t>
-            </a:r>
-          </a:p>
-        </p:txBody>
-      </p:sp>
-      <p:sp>
-        <p:nvSpPr>
-          <p:cNvPr id="12" name="Rounded Rectangle 11"/>
-          <p:cNvSpPr/>
-          <p:nvPr/>
-        </p:nvSpPr>
-        <p:spPr>
-          <a:xfrm>
-            <a:off x="502920" y="5303520"/>
-            <a:ext cx="11185855" cy="960120"/>
-          </a:xfrm>
-          <a:prstGeom prst="roundRect">
-            <a:avLst>
-              <a:gd name="adj" fmla="val 4000"/>
-            </a:avLst>
-          </a:prstGeom>
-          <a:solidFill>
-            <a:srgbClr val="FBECEC"/>
-          </a:solidFill>
-          <a:ln w="12700">
-            <a:solidFill>
-              <a:srgbClr val="A32A2A"/>
-            </a:solidFill>
-          </a:ln>
-          <a:effectLst/>
-        </p:spPr>
-        <p:style>
-          <a:lnRef idx="1">
-            <a:schemeClr val="accent1"/>
-          </a:lnRef>
-          <a:fillRef idx="3">
-            <a:schemeClr val="accent1"/>
-          </a:fillRef>
-          <a:effectRef idx="2">
-            <a:schemeClr val="accent1"/>
-          </a:effectRef>
-          <a:fontRef idx="minor">
-            <a:schemeClr val="lt1"/>
-          </a:fontRef>
-        </p:style>
-        <p:txBody>
-          <a:bodyPr rtlCol="0" anchor="ctr" wrap="square" lIns="164592" rIns="164592" tIns="73152" bIns="73152"/>
-          <a:lstStyle/>
-          <a:p>
-            <a:pPr algn="l"/>
-            <a:r>
-              <a:rPr sz="1300" b="1">
-                <a:solidFill>
-                  <a:srgbClr val="A32A2A"/>
-                </a:solidFill>
-                <a:latin typeface="Calibri"/>
-              </a:rPr>
-              <a:t>SAFETY   </a:t>
-            </a:r>
-            <a:r>
-              <a:rPr sz="1500">
-                <a:solidFill>
-                  <a:srgbClr val="222222"/>
-                </a:solidFill>
-                <a:latin typeface="Calibri"/>
-              </a:rPr>
-              <a:t>Wheels off the ground until every control is checked.</a:t>
+                <a:spcPts val="900"/>
+              </a:spcAft>
+              <a:defRPr sz="2000" b="0">
+                <a:solidFill>
+                  <a:srgbClr val="222222"/>
+                </a:solidFill>
+                <a:latin typeface="Calibri"/>
+              </a:defRPr>
+            </a:pPr>
+            <a:r>
+              <a:rPr sz="2000" b="0">
+                <a:solidFill>
+                  <a:srgbClr val="222222"/>
+                </a:solidFill>
+                <a:latin typeface="Calibri"/>
+              </a:rPr>
+              <a:t>COURSE RACE.</a:t>
+            </a:r>
+          </a:p>
+          <a:p>
+            <a:pPr lvl="1" algn="l">
+              <a:lnSpc>
+                <a:spcPct val="100000"/>
+              </a:lnSpc>
+              <a:spcAft>
+                <a:spcPts val="900"/>
+              </a:spcAft>
+              <a:defRPr sz="2000" b="0">
+                <a:solidFill>
+                  <a:srgbClr val="222222"/>
+                </a:solidFill>
+                <a:latin typeface="Calibri"/>
+              </a:defRPr>
+            </a:pPr>
+            <a:r>
+              <a:rPr sz="2000" b="0">
+                <a:solidFill>
+                  <a:srgbClr val="222222"/>
+                </a:solidFill>
+                <a:latin typeface="Calibri"/>
+              </a:rPr>
+              <a:t>Tape out a course with corners. Now sharp steering earns its keep.</a:t>
+            </a:r>
+          </a:p>
+          <a:p>
+            <a:pPr lvl="1" algn="l">
+              <a:lnSpc>
+                <a:spcPct val="100000"/>
+              </a:lnSpc>
+              <a:spcAft>
+                <a:spcPts val="900"/>
+              </a:spcAft>
+              <a:defRPr sz="2000" b="0">
+                <a:solidFill>
+                  <a:srgbClr val="222222"/>
+                </a:solidFill>
+                <a:latin typeface="Calibri"/>
+              </a:defRPr>
+            </a:pPr>
+            <a:r>
+              <a:rPr sz="2000" b="0">
+                <a:solidFill>
+                  <a:srgbClr val="222222"/>
+                </a:solidFill>
+                <a:latin typeface="Calibri"/>
+              </a:rPr>
+              <a:t>Fastest clean lap. Touching a cone costs you two seconds.</a:t>
             </a:r>
           </a:p>
         </p:txBody>
@@ -18251,7 +18703,7 @@
                 </a:solidFill>
                 <a:latin typeface="Calibri"/>
               </a:rPr>
-              <a:t>Calibrate, then race</a:t>
+              <a:t>Take it further  -  projects that fit on this vehicle</a:t>
             </a:r>
           </a:p>
         </p:txBody>
@@ -18405,7 +18857,7 @@
         <p:spPr>
           <a:xfrm>
             <a:off x="502920" y="1188720"/>
-            <a:ext cx="11185855" cy="530352"/>
+            <a:ext cx="11185855" cy="3986784"/>
           </a:xfrm>
           <a:prstGeom prst="rect">
             <a:avLst/>
@@ -18425,399 +18877,212 @@
               <a:spcAft>
                 <a:spcPts val="600"/>
               </a:spcAft>
-              <a:defRPr sz="1900" b="1">
+              <a:defRPr sz="2000" b="0">
+                <a:solidFill>
+                  <a:srgbClr val="222222"/>
+                </a:solidFill>
+                <a:latin typeface="Calibri"/>
+              </a:defRPr>
+            </a:pPr>
+            <a:r>
+              <a:rPr sz="2000" b="0">
+                <a:solidFill>
+                  <a:srgbClr val="222222"/>
+                </a:solidFill>
+                <a:latin typeface="Calibri"/>
+              </a:rPr>
+              <a:t>Each is a real addition to the program you now understand. Pick one and build it.</a:t>
+            </a:r>
+          </a:p>
+          <a:p>
+            <a:pPr algn="l">
+              <a:lnSpc>
+                <a:spcPct val="100000"/>
+              </a:lnSpc>
+              <a:spcAft>
+                <a:spcPts val="600"/>
+              </a:spcAft>
+              <a:defRPr sz="2000" b="0">
+                <a:solidFill>
+                  <a:srgbClr val="222222"/>
+                </a:solidFill>
+                <a:latin typeface="Calibri"/>
+              </a:defRPr>
+            </a:pPr>
+            <a:r>
+              <a:rPr sz="2000" b="0">
+                <a:solidFill>
+                  <a:srgbClr val="222222"/>
+                </a:solidFill>
+                <a:latin typeface="Calibri"/>
+              </a:rPr>
+              <a:t>LOW BATTERY WARNING.  Flash yellow below 12 volts and red below 10. A 4S pack should never be run flat, and the vehicle notices sooner than you do.</a:t>
+            </a:r>
+          </a:p>
+          <a:p>
+            <a:pPr algn="l">
+              <a:lnSpc>
+                <a:spcPct val="100000"/>
+              </a:lnSpc>
+              <a:spcAft>
+                <a:spcPts val="600"/>
+              </a:spcAft>
+              <a:defRPr sz="2000" b="0">
+                <a:solidFill>
+                  <a:srgbClr val="222222"/>
+                </a:solidFill>
+                <a:latin typeface="Calibri"/>
+              </a:defRPr>
+            </a:pPr>
+            <a:r>
+              <a:rPr sz="2000" b="0">
+                <a:solidFill>
+                  <a:srgbClr val="222222"/>
+                </a:solidFill>
+                <a:latin typeface="Calibri"/>
+              </a:rPr>
+              <a:t>COLLISION WARNING.  An ultrasonic range finder on the top plate. Closer than 20 inches: stop, flash red, wait three seconds, carry on.</a:t>
+            </a:r>
+          </a:p>
+          <a:p>
+            <a:pPr algn="l">
+              <a:lnSpc>
+                <a:spcPct val="100000"/>
+              </a:lnSpc>
+              <a:spcAft>
+                <a:spcPts val="600"/>
+              </a:spcAft>
+              <a:defRPr sz="2000" b="0">
+                <a:solidFill>
+                  <a:srgbClr val="222222"/>
+                </a:solidFill>
+                <a:latin typeface="Calibri"/>
+              </a:defRPr>
+            </a:pPr>
+            <a:r>
+              <a:rPr sz="2000" b="0">
+                <a:solidFill>
+                  <a:srgbClr val="222222"/>
+                </a:solidFill>
+                <a:latin typeface="Calibri"/>
+              </a:rPr>
+              <a:t>AUTOMATIC LIGHTS.  Reversing beeps, hazard lights, or headlights that come on only when the vehicle is moving.</a:t>
+            </a:r>
+          </a:p>
+          <a:p>
+            <a:pPr algn="l">
+              <a:lnSpc>
+                <a:spcPct val="100000"/>
+              </a:lnSpc>
+              <a:spcAft>
+                <a:spcPts val="600"/>
+              </a:spcAft>
+              <a:defRPr sz="2000" b="0">
+                <a:solidFill>
+                  <a:srgbClr val="222222"/>
+                </a:solidFill>
+                <a:latin typeface="Calibri"/>
+              </a:defRPr>
+            </a:pPr>
+            <a:r>
+              <a:rPr sz="2000" b="0">
+                <a:solidFill>
+                  <a:srgbClr val="222222"/>
+                </a:solidFill>
+                <a:latin typeface="Calibri"/>
+              </a:rPr>
+              <a:t>WAYPOINT NAVIGATION.  Give the program a LIST of moves - distance and heading - instead of one hard-coded square.</a:t>
+            </a:r>
+          </a:p>
+          <a:p>
+            <a:pPr algn="l">
+              <a:lnSpc>
+                <a:spcPct val="100000"/>
+              </a:lnSpc>
+              <a:spcAft>
+                <a:spcPts val="600"/>
+              </a:spcAft>
+              <a:defRPr sz="2000" b="0">
+                <a:solidFill>
+                  <a:srgbClr val="222222"/>
+                </a:solidFill>
+                <a:latin typeface="Calibri"/>
+              </a:defRPr>
+            </a:pPr>
+            <a:r>
+              <a:rPr sz="2000" b="0">
+                <a:solidFill>
+                  <a:srgbClr val="222222"/>
+                </a:solidFill>
+                <a:latin typeface="Calibri"/>
+              </a:rPr>
+              <a:t>SERVO PAN AND TILT.  Two servos and a bracket, aimed with the right stick. The mount points are already there.</a:t>
+            </a:r>
+          </a:p>
+        </p:txBody>
+      </p:sp>
+      <p:sp>
+        <p:nvSpPr>
+          <p:cNvPr id="7" name="Rounded Rectangle 6"/>
+          <p:cNvSpPr/>
+          <p:nvPr/>
+        </p:nvSpPr>
+        <p:spPr>
+          <a:xfrm>
+            <a:off x="502920" y="5303520"/>
+            <a:ext cx="11185855" cy="960120"/>
+          </a:xfrm>
+          <a:prstGeom prst="roundRect">
+            <a:avLst>
+              <a:gd name="adj" fmla="val 4000"/>
+            </a:avLst>
+          </a:prstGeom>
+          <a:solidFill>
+            <a:srgbClr val="EEF3F8"/>
+          </a:solidFill>
+          <a:ln w="12700">
+            <a:solidFill>
+              <a:srgbClr val="0E7C86"/>
+            </a:solidFill>
+          </a:ln>
+          <a:effectLst/>
+        </p:spPr>
+        <p:style>
+          <a:lnRef idx="1">
+            <a:schemeClr val="accent1"/>
+          </a:lnRef>
+          <a:fillRef idx="3">
+            <a:schemeClr val="accent1"/>
+          </a:fillRef>
+          <a:effectRef idx="2">
+            <a:schemeClr val="accent1"/>
+          </a:effectRef>
+          <a:fontRef idx="minor">
+            <a:schemeClr val="lt1"/>
+          </a:fontRef>
+        </p:style>
+        <p:txBody>
+          <a:bodyPr rtlCol="0" anchor="ctr" wrap="square" lIns="164592" rIns="164592" tIns="73152" bIns="73152"/>
+          <a:lstStyle/>
+          <a:p>
+            <a:pPr algn="l"/>
+            <a:r>
+              <a:rPr sz="1300" b="1">
                 <a:solidFill>
                   <a:srgbClr val="0E7C86"/>
                 </a:solidFill>
                 <a:latin typeface="Calibri"/>
-              </a:defRPr>
-            </a:pPr>
-            <a:r>
-              <a:rPr sz="1900" b="1">
-                <a:solidFill>
-                  <a:srgbClr val="0E7C86"/>
-                </a:solidFill>
-                <a:latin typeface="Calibri"/>
-              </a:rPr>
-              <a:t>Measure first. Then argue about who is fastest.</a:t>
-            </a:r>
-          </a:p>
-        </p:txBody>
-      </p:sp>
-      <p:sp>
-        <p:nvSpPr>
-          <p:cNvPr id="7" name="TextBox 6"/>
-          <p:cNvSpPr txBox="1"/>
-          <p:nvPr/>
-        </p:nvSpPr>
-        <p:spPr>
-          <a:xfrm>
-            <a:off x="502920" y="1755648"/>
-            <a:ext cx="5364327" cy="4507992"/>
-          </a:xfrm>
-          <a:prstGeom prst="rect">
-            <a:avLst/>
-          </a:prstGeom>
-          <a:noFill/>
-        </p:spPr>
-        <p:txBody>
-          <a:bodyPr wrap="square" lIns="0" tIns="0" rIns="0" bIns="0">
-            <a:spAutoFit/>
-          </a:bodyPr>
-          <a:lstStyle/>
-          <a:p>
-            <a:pPr algn="l">
-              <a:lnSpc>
-                <a:spcPct val="100000"/>
-              </a:lnSpc>
-              <a:spcAft>
-                <a:spcPts val="900"/>
-              </a:spcAft>
-              <a:defRPr sz="2000" b="0">
-                <a:solidFill>
-                  <a:srgbClr val="222222"/>
-                </a:solidFill>
-                <a:latin typeface="Calibri"/>
-              </a:defRPr>
-            </a:pPr>
-            <a:r>
-              <a:rPr sz="2000" b="0">
-                <a:solidFill>
-                  <a:srgbClr val="222222"/>
-                </a:solidFill>
-                <a:latin typeface="Calibri"/>
-              </a:rPr>
-              <a:t>CALIBRATE FIRST.</a:t>
-            </a:r>
-          </a:p>
-          <a:p>
-            <a:pPr lvl="1" algn="l">
-              <a:lnSpc>
-                <a:spcPct val="100000"/>
-              </a:lnSpc>
-              <a:spcAft>
-                <a:spcPts val="900"/>
-              </a:spcAft>
-              <a:defRPr sz="2000" b="0">
-                <a:solidFill>
-                  <a:srgbClr val="222222"/>
-                </a:solidFill>
-                <a:latin typeface="Calibri"/>
-              </a:defRPr>
-            </a:pPr>
-            <a:r>
-              <a:rPr sz="2000" b="0">
-                <a:solidFill>
-                  <a:srgbClr val="222222"/>
-                </a:solidFill>
-                <a:latin typeface="Calibri"/>
-              </a:rPr>
-              <a:t>Mark a start and a finish line with tape. Measure the distance.</a:t>
-            </a:r>
-          </a:p>
-          <a:p>
-            <a:pPr lvl="1" algn="l">
-              <a:lnSpc>
-                <a:spcPct val="100000"/>
-              </a:lnSpc>
-              <a:spcAft>
-                <a:spcPts val="900"/>
-              </a:spcAft>
-              <a:defRPr sz="2000" b="0">
-                <a:solidFill>
-                  <a:srgbClr val="222222"/>
-                </a:solidFill>
-                <a:latin typeface="Calibri"/>
-              </a:defRPr>
-            </a:pPr>
-            <a:r>
-              <a:rPr sz="2000" b="0">
-                <a:solidFill>
-                  <a:srgbClr val="222222"/>
-                </a:solidFill>
-                <a:latin typeface="Calibri"/>
-              </a:rPr>
-              <a:t>Drive it flat out and time it. Speed = distance / time.</a:t>
-            </a:r>
-          </a:p>
-          <a:p>
-            <a:pPr lvl="1" algn="l">
-              <a:lnSpc>
-                <a:spcPct val="100000"/>
-              </a:lnSpc>
-              <a:spcAft>
-                <a:spcPts val="900"/>
-              </a:spcAft>
-              <a:defRPr sz="2000" b="0">
-                <a:solidFill>
-                  <a:srgbClr val="222222"/>
-                </a:solidFill>
-                <a:latin typeface="Calibri"/>
-              </a:defRPr>
-            </a:pPr>
-            <a:r>
-              <a:rPr sz="2000" b="0">
-                <a:solidFill>
-                  <a:srgbClr val="222222"/>
-                </a:solidFill>
-                <a:latin typeface="Calibri"/>
-              </a:rPr>
-              <a:t>Compare with the number you calculated in Lesson 2. Were you right?</a:t>
-            </a:r>
-          </a:p>
-          <a:p>
-            <a:pPr algn="l">
-              <a:lnSpc>
-                <a:spcPct val="100000"/>
-              </a:lnSpc>
-              <a:spcAft>
-                <a:spcPts val="900"/>
-              </a:spcAft>
-              <a:defRPr sz="1000" b="0">
-                <a:solidFill>
-                  <a:srgbClr val="222222"/>
-                </a:solidFill>
-                <a:latin typeface="Calibri"/>
-              </a:defRPr>
-            </a:pPr>
-          </a:p>
-          <a:p>
-            <a:pPr algn="l">
-              <a:lnSpc>
-                <a:spcPct val="100000"/>
-              </a:lnSpc>
-              <a:spcAft>
-                <a:spcPts val="900"/>
-              </a:spcAft>
-              <a:defRPr sz="2000" b="0">
-                <a:solidFill>
-                  <a:srgbClr val="222222"/>
-                </a:solidFill>
-                <a:latin typeface="Calibri"/>
-              </a:defRPr>
-            </a:pPr>
-            <a:r>
-              <a:rPr sz="2000" b="0">
-                <a:solidFill>
-                  <a:srgbClr val="222222"/>
-                </a:solidFill>
-                <a:latin typeface="Calibri"/>
-              </a:rPr>
-              <a:t>DRAG RACE.</a:t>
-            </a:r>
-          </a:p>
-          <a:p>
-            <a:pPr lvl="1" algn="l">
-              <a:lnSpc>
-                <a:spcPct val="100000"/>
-              </a:lnSpc>
-              <a:spcAft>
-                <a:spcPts val="900"/>
-              </a:spcAft>
-              <a:defRPr sz="2000" b="0">
-                <a:solidFill>
-                  <a:srgbClr val="222222"/>
-                </a:solidFill>
-                <a:latin typeface="Calibri"/>
-              </a:defRPr>
-            </a:pPr>
-            <a:r>
-              <a:rPr sz="2000" b="0">
-                <a:solidFill>
-                  <a:srgbClr val="222222"/>
-                </a:solidFill>
-                <a:latin typeface="Calibri"/>
-              </a:rPr>
-              <a:t>Two or three vehicles side by side. First across the line INSIDE the lane wins - leaving the lane does not count.</a:t>
-            </a:r>
-          </a:p>
-        </p:txBody>
-      </p:sp>
-      <p:sp>
-        <p:nvSpPr>
-          <p:cNvPr id="8" name="TextBox 7"/>
-          <p:cNvSpPr txBox="1"/>
-          <p:nvPr/>
-        </p:nvSpPr>
-        <p:spPr>
-          <a:xfrm>
-            <a:off x="6324447" y="1755648"/>
-            <a:ext cx="5364327" cy="4507992"/>
-          </a:xfrm>
-          <a:prstGeom prst="rect">
-            <a:avLst/>
-          </a:prstGeom>
-          <a:noFill/>
-        </p:spPr>
-        <p:txBody>
-          <a:bodyPr wrap="square" lIns="0" tIns="0" rIns="0" bIns="0">
-            <a:spAutoFit/>
-          </a:bodyPr>
-          <a:lstStyle/>
-          <a:p>
-            <a:pPr algn="l">
-              <a:lnSpc>
-                <a:spcPct val="100000"/>
-              </a:lnSpc>
-              <a:spcAft>
-                <a:spcPts val="900"/>
-              </a:spcAft>
-              <a:defRPr sz="2000" b="0">
-                <a:solidFill>
-                  <a:srgbClr val="222222"/>
-                </a:solidFill>
-                <a:latin typeface="Calibri"/>
-              </a:defRPr>
-            </a:pPr>
-            <a:r>
-              <a:rPr sz="2000" b="0">
-                <a:solidFill>
-                  <a:srgbClr val="222222"/>
-                </a:solidFill>
-                <a:latin typeface="Calibri"/>
-              </a:rPr>
-              <a:t>DRAG RACE  (cont.)</a:t>
-            </a:r>
-          </a:p>
-          <a:p>
-            <a:pPr lvl="1" algn="l">
-              <a:lnSpc>
-                <a:spcPct val="100000"/>
-              </a:lnSpc>
-              <a:spcAft>
-                <a:spcPts val="900"/>
-              </a:spcAft>
-              <a:defRPr sz="2000" b="0">
-                <a:solidFill>
-                  <a:srgbClr val="222222"/>
-                </a:solidFill>
-                <a:latin typeface="Calibri"/>
-              </a:defRPr>
-            </a:pPr>
-            <a:r>
-              <a:rPr sz="2000" b="0">
-                <a:solidFill>
-                  <a:srgbClr val="222222"/>
-                </a:solidFill>
-                <a:latin typeface="Calibri"/>
-              </a:rPr>
-              <a:t>Straight-line speed is not the whole problem. Keeping it straight is, because only one command runs at a time.</a:t>
-            </a:r>
-          </a:p>
-          <a:p>
-            <a:pPr lvl="1" algn="l">
-              <a:lnSpc>
-                <a:spcPct val="100000"/>
-              </a:lnSpc>
-              <a:spcAft>
-                <a:spcPts val="900"/>
-              </a:spcAft>
-              <a:defRPr sz="2000" b="0">
-                <a:solidFill>
-                  <a:srgbClr val="222222"/>
-                </a:solidFill>
-                <a:latin typeface="Calibri"/>
-              </a:defRPr>
-            </a:pPr>
-            <a:r>
-              <a:rPr sz="2000" b="0">
-                <a:solidFill>
-                  <a:srgbClr val="222222"/>
-                </a:solidFill>
-                <a:latin typeface="Calibri"/>
-              </a:rPr>
-              <a:t>You can only brake by reversing. Half power for a short time is usually right.</a:t>
-            </a:r>
-          </a:p>
-          <a:p>
-            <a:pPr algn="l">
-              <a:lnSpc>
-                <a:spcPct val="100000"/>
-              </a:lnSpc>
-              <a:spcAft>
-                <a:spcPts val="900"/>
-              </a:spcAft>
-              <a:defRPr sz="1000" b="0">
-                <a:solidFill>
-                  <a:srgbClr val="222222"/>
-                </a:solidFill>
-                <a:latin typeface="Calibri"/>
-              </a:defRPr>
-            </a:pPr>
-          </a:p>
-          <a:p>
-            <a:pPr algn="l">
-              <a:lnSpc>
-                <a:spcPct val="100000"/>
-              </a:lnSpc>
-              <a:spcAft>
-                <a:spcPts val="900"/>
-              </a:spcAft>
-              <a:defRPr sz="2000" b="0">
-                <a:solidFill>
-                  <a:srgbClr val="222222"/>
-                </a:solidFill>
-                <a:latin typeface="Calibri"/>
-              </a:defRPr>
-            </a:pPr>
-            <a:r>
-              <a:rPr sz="2000" b="0">
-                <a:solidFill>
-                  <a:srgbClr val="222222"/>
-                </a:solidFill>
-                <a:latin typeface="Calibri"/>
-              </a:rPr>
-              <a:t>COURSE RACE.</a:t>
-            </a:r>
-          </a:p>
-          <a:p>
-            <a:pPr lvl="1" algn="l">
-              <a:lnSpc>
-                <a:spcPct val="100000"/>
-              </a:lnSpc>
-              <a:spcAft>
-                <a:spcPts val="900"/>
-              </a:spcAft>
-              <a:defRPr sz="2000" b="0">
-                <a:solidFill>
-                  <a:srgbClr val="222222"/>
-                </a:solidFill>
-                <a:latin typeface="Calibri"/>
-              </a:defRPr>
-            </a:pPr>
-            <a:r>
-              <a:rPr sz="2000" b="0">
-                <a:solidFill>
-                  <a:srgbClr val="222222"/>
-                </a:solidFill>
-                <a:latin typeface="Calibri"/>
-              </a:rPr>
-              <a:t>Tape out a course with corners. Now sharp steering earns its keep.</a:t>
-            </a:r>
-          </a:p>
-          <a:p>
-            <a:pPr lvl="1" algn="l">
-              <a:lnSpc>
-                <a:spcPct val="100000"/>
-              </a:lnSpc>
-              <a:spcAft>
-                <a:spcPts val="900"/>
-              </a:spcAft>
-              <a:defRPr sz="2000" b="0">
-                <a:solidFill>
-                  <a:srgbClr val="222222"/>
-                </a:solidFill>
-                <a:latin typeface="Calibri"/>
-              </a:defRPr>
-            </a:pPr>
-            <a:r>
-              <a:rPr sz="2000" b="0">
-                <a:solidFill>
-                  <a:srgbClr val="222222"/>
-                </a:solidFill>
-                <a:latin typeface="Calibri"/>
-              </a:rPr>
-              <a:t>Fastest clean lap. Touching a cone costs you two seconds.</a:t>
+              </a:rPr>
+              <a:t>KEY POINT   </a:t>
+            </a:r>
+            <a:r>
+              <a:rPr sz="1500">
+                <a:solidFill>
+                  <a:srgbClr val="222222"/>
+                </a:solidFill>
+                <a:latin typeface="Calibri"/>
+              </a:rPr>
+              <a:t>All five are within reach of what you learned in five lessons. The range finder and the servos are the two the kit already has parts for.</a:t>
             </a:r>
           </a:p>
         </p:txBody>
@@ -18881,7 +19146,7 @@
                 </a:solidFill>
                 <a:latin typeface="Calibri"/>
               </a:rPr>
-              <a:t>Take it further  -  projects that fit on this vehicle</a:t>
+              <a:t>Two of those, already built</a:t>
             </a:r>
           </a:p>
         </p:txBody>
@@ -19035,7 +19300,7 @@
         <p:spPr>
           <a:xfrm>
             <a:off x="502920" y="1188720"/>
-            <a:ext cx="11185855" cy="3986784"/>
+            <a:ext cx="11185855" cy="548640"/>
           </a:xfrm>
           <a:prstGeom prst="rect">
             <a:avLst/>
@@ -19053,214 +19318,167 @@
                 <a:spcPct val="100000"/>
               </a:lnSpc>
               <a:spcAft>
-                <a:spcPts val="600"/>
-              </a:spcAft>
-              <a:defRPr sz="2000" b="0">
-                <a:solidFill>
-                  <a:srgbClr val="222222"/>
-                </a:solidFill>
-                <a:latin typeface="Calibri"/>
-              </a:defRPr>
-            </a:pPr>
-            <a:r>
-              <a:rPr sz="2000" b="0">
-                <a:solidFill>
-                  <a:srgbClr val="222222"/>
-                </a:solidFill>
-                <a:latin typeface="Calibri"/>
-              </a:rPr>
-              <a:t>Each is a real addition to the program you now understand. Pick one and build it.</a:t>
-            </a:r>
-          </a:p>
-          <a:p>
-            <a:pPr algn="l">
-              <a:lnSpc>
-                <a:spcPct val="100000"/>
-              </a:lnSpc>
-              <a:spcAft>
-                <a:spcPts val="600"/>
-              </a:spcAft>
-              <a:defRPr sz="2000" b="0">
-                <a:solidFill>
-                  <a:srgbClr val="222222"/>
-                </a:solidFill>
-                <a:latin typeface="Calibri"/>
-              </a:defRPr>
-            </a:pPr>
-            <a:r>
-              <a:rPr sz="2000" b="0">
-                <a:solidFill>
-                  <a:srgbClr val="222222"/>
-                </a:solidFill>
-                <a:latin typeface="Calibri"/>
-              </a:rPr>
-              <a:t>LOW BATTERY WARNING.  Flash yellow below 12 volts and red below 10. A 4S pack should never be run flat, and the vehicle notices sooner than you do.</a:t>
-            </a:r>
-          </a:p>
-          <a:p>
-            <a:pPr algn="l">
-              <a:lnSpc>
-                <a:spcPct val="100000"/>
-              </a:lnSpc>
-              <a:spcAft>
-                <a:spcPts val="600"/>
-              </a:spcAft>
-              <a:defRPr sz="2000" b="0">
-                <a:solidFill>
-                  <a:srgbClr val="222222"/>
-                </a:solidFill>
-                <a:latin typeface="Calibri"/>
-              </a:defRPr>
-            </a:pPr>
-            <a:r>
-              <a:rPr sz="2000" b="0">
-                <a:solidFill>
-                  <a:srgbClr val="222222"/>
-                </a:solidFill>
-                <a:latin typeface="Calibri"/>
-              </a:rPr>
-              <a:t>COLLISION WARNING.  An ultrasonic range finder on the top plate. Closer than 20 inches: stop, flash red, wait three seconds, carry on.</a:t>
-            </a:r>
-          </a:p>
-          <a:p>
-            <a:pPr algn="l">
-              <a:lnSpc>
-                <a:spcPct val="100000"/>
-              </a:lnSpc>
-              <a:spcAft>
-                <a:spcPts val="600"/>
-              </a:spcAft>
-              <a:defRPr sz="2000" b="0">
-                <a:solidFill>
-                  <a:srgbClr val="222222"/>
-                </a:solidFill>
-                <a:latin typeface="Calibri"/>
-              </a:defRPr>
-            </a:pPr>
-            <a:r>
-              <a:rPr sz="2000" b="0">
-                <a:solidFill>
-                  <a:srgbClr val="222222"/>
-                </a:solidFill>
-                <a:latin typeface="Calibri"/>
-              </a:rPr>
-              <a:t>AUTOMATIC LIGHTS.  Reversing beeps, hazard lights, or headlights that come on only when the vehicle is moving.</a:t>
-            </a:r>
-          </a:p>
-          <a:p>
-            <a:pPr algn="l">
-              <a:lnSpc>
-                <a:spcPct val="100000"/>
-              </a:lnSpc>
-              <a:spcAft>
-                <a:spcPts val="600"/>
-              </a:spcAft>
-              <a:defRPr sz="2000" b="0">
-                <a:solidFill>
-                  <a:srgbClr val="222222"/>
-                </a:solidFill>
-                <a:latin typeface="Calibri"/>
-              </a:defRPr>
-            </a:pPr>
-            <a:r>
-              <a:rPr sz="2000" b="0">
-                <a:solidFill>
-                  <a:srgbClr val="222222"/>
-                </a:solidFill>
-                <a:latin typeface="Calibri"/>
-              </a:rPr>
-              <a:t>WAYPOINT NAVIGATION.  Give the program a LIST of moves - distance and heading - instead of one hard-coded square.</a:t>
-            </a:r>
-          </a:p>
-          <a:p>
-            <a:pPr algn="l">
-              <a:lnSpc>
-                <a:spcPct val="100000"/>
-              </a:lnSpc>
-              <a:spcAft>
-                <a:spcPts val="600"/>
-              </a:spcAft>
-              <a:defRPr sz="2000" b="0">
-                <a:solidFill>
-                  <a:srgbClr val="222222"/>
-                </a:solidFill>
-                <a:latin typeface="Calibri"/>
-              </a:defRPr>
-            </a:pPr>
-            <a:r>
-              <a:rPr sz="2000" b="0">
-                <a:solidFill>
-                  <a:srgbClr val="222222"/>
-                </a:solidFill>
-                <a:latin typeface="Calibri"/>
-              </a:rPr>
-              <a:t>SERVO PAN AND TILT.  Two servos and a bracket, aimed with the right stick. The mount points are already there.</a:t>
-            </a:r>
-          </a:p>
-        </p:txBody>
-      </p:sp>
-      <p:sp>
-        <p:nvSpPr>
-          <p:cNvPr id="7" name="Rounded Rectangle 6"/>
-          <p:cNvSpPr/>
-          <p:nvPr/>
-        </p:nvSpPr>
-        <p:spPr>
-          <a:xfrm>
-            <a:off x="502920" y="5303520"/>
-            <a:ext cx="11185855" cy="960120"/>
-          </a:xfrm>
-          <a:prstGeom prst="roundRect">
-            <a:avLst>
-              <a:gd name="adj" fmla="val 4000"/>
-            </a:avLst>
-          </a:prstGeom>
-          <a:solidFill>
-            <a:srgbClr val="EEF3F8"/>
-          </a:solidFill>
-          <a:ln w="12700">
-            <a:solidFill>
-              <a:srgbClr val="0E7C86"/>
-            </a:solidFill>
-          </a:ln>
-          <a:effectLst/>
-        </p:spPr>
-        <p:style>
-          <a:lnRef idx="1">
-            <a:schemeClr val="accent1"/>
-          </a:lnRef>
-          <a:fillRef idx="3">
-            <a:schemeClr val="accent1"/>
-          </a:fillRef>
-          <a:effectRef idx="2">
-            <a:schemeClr val="accent1"/>
-          </a:effectRef>
-          <a:fontRef idx="minor">
-            <a:schemeClr val="lt1"/>
-          </a:fontRef>
-        </p:style>
-        <p:txBody>
-          <a:bodyPr rtlCol="0" anchor="ctr" wrap="square" lIns="164592" rIns="164592" tIns="73152" bIns="73152"/>
-          <a:lstStyle/>
-          <a:p>
-            <a:pPr algn="l"/>
-            <a:r>
-              <a:rPr sz="1300" b="1">
-                <a:solidFill>
-                  <a:srgbClr val="0E7C86"/>
-                </a:solidFill>
-                <a:latin typeface="Calibri"/>
-              </a:rPr>
-              <a:t>KEY POINT   </a:t>
-            </a:r>
-            <a:r>
-              <a:rPr sz="1500">
-                <a:solidFill>
-                  <a:srgbClr val="222222"/>
-                </a:solidFill>
-                <a:latin typeface="Calibri"/>
-              </a:rPr>
-              <a:t>All five are within reach of what you learned in five lessons. The range finder and the servos are the two the kit already has parts for.</a:t>
+                <a:spcPts val="200"/>
+              </a:spcAft>
+              <a:defRPr sz="1800" b="0">
+                <a:solidFill>
+                  <a:srgbClr val="222222"/>
+                </a:solidFill>
+                <a:latin typeface="Calibri"/>
+              </a:defRPr>
+            </a:pPr>
+            <a:r>
+              <a:rPr sz="1800" b="0">
+                <a:solidFill>
+                  <a:srgbClr val="222222"/>
+                </a:solidFill>
+                <a:latin typeface="Calibri"/>
+              </a:rPr>
+              <a:t>Both of these are the same vehicle you have been driving, with something bolted to the top plate and a few hundred lines added to the program.</a:t>
+            </a:r>
+          </a:p>
+        </p:txBody>
+      </p:sp>
+      <p:pic>
+        <p:nvPicPr>
+          <p:cNvPr id="7" name="Picture 6" descr="vehicle-with-arm.jpg"/>
+          <p:cNvPicPr>
+            <a:picLocks noChangeAspect="1"/>
+          </p:cNvPicPr>
+          <p:nvPr/>
+        </p:nvPicPr>
+        <p:blipFill>
+          <a:blip r:embed="rId2"/>
+          <a:stretch>
+            <a:fillRect/>
+          </a:stretch>
+        </p:blipFill>
+        <p:spPr>
+          <a:xfrm>
+            <a:off x="757351" y="1810512"/>
+            <a:ext cx="4901184" cy="3675888"/>
+          </a:xfrm>
+          <a:prstGeom prst="rect">
+            <a:avLst/>
+          </a:prstGeom>
+        </p:spPr>
+      </p:pic>
+      <p:pic>
+        <p:nvPicPr>
+          <p:cNvPr id="8" name="Picture 7" descr="robot-arm-6dof.jpg"/>
+          <p:cNvPicPr>
+            <a:picLocks noChangeAspect="1"/>
+          </p:cNvPicPr>
+          <p:nvPr/>
+        </p:nvPicPr>
+        <p:blipFill>
+          <a:blip r:embed="rId3"/>
+          <a:stretch>
+            <a:fillRect/>
+          </a:stretch>
+        </p:blipFill>
+        <p:spPr>
+          <a:xfrm>
+            <a:off x="7156650" y="1810512"/>
+            <a:ext cx="3654201" cy="3675887"/>
+          </a:xfrm>
+          <a:prstGeom prst="rect">
+            <a:avLst/>
+          </a:prstGeom>
+        </p:spPr>
+      </p:pic>
+      <p:sp>
+        <p:nvSpPr>
+          <p:cNvPr id="9" name="TextBox 8"/>
+          <p:cNvSpPr txBox="1"/>
+          <p:nvPr/>
+        </p:nvSpPr>
+        <p:spPr>
+          <a:xfrm>
+            <a:off x="502920" y="5559552"/>
+            <a:ext cx="5410047" cy="658368"/>
+          </a:xfrm>
+          <a:prstGeom prst="rect">
+            <a:avLst/>
+          </a:prstGeom>
+          <a:noFill/>
+        </p:spPr>
+        <p:txBody>
+          <a:bodyPr wrap="square" lIns="0" tIns="0" rIns="0" bIns="0">
+            <a:spAutoFit/>
+          </a:bodyPr>
+          <a:lstStyle/>
+          <a:p>
+            <a:pPr algn="ctr">
+              <a:lnSpc>
+                <a:spcPct val="100000"/>
+              </a:lnSpc>
+              <a:spcAft>
+                <a:spcPts val="200"/>
+              </a:spcAft>
+              <a:defRPr sz="1800" b="0">
+                <a:solidFill>
+                  <a:srgbClr val="666666"/>
+                </a:solidFill>
+                <a:latin typeface="Calibri"/>
+              </a:defRPr>
+            </a:pPr>
+            <a:r>
+              <a:rPr sz="1800" b="0">
+                <a:solidFill>
+                  <a:srgbClr val="666666"/>
+                </a:solidFill>
+                <a:latin typeface="Calibri"/>
+              </a:rPr>
+              <a:t>A gripper arm on the top plate, driven from the servo headers</a:t>
+            </a:r>
+          </a:p>
+        </p:txBody>
+      </p:sp>
+      <p:sp>
+        <p:nvSpPr>
+          <p:cNvPr id="10" name="TextBox 9"/>
+          <p:cNvSpPr txBox="1"/>
+          <p:nvPr/>
+        </p:nvSpPr>
+        <p:spPr>
+          <a:xfrm>
+            <a:off x="6278727" y="5559552"/>
+            <a:ext cx="5410047" cy="658368"/>
+          </a:xfrm>
+          <a:prstGeom prst="rect">
+            <a:avLst/>
+          </a:prstGeom>
+          <a:noFill/>
+        </p:spPr>
+        <p:txBody>
+          <a:bodyPr wrap="square" lIns="0" tIns="0" rIns="0" bIns="0">
+            <a:spAutoFit/>
+          </a:bodyPr>
+          <a:lstStyle/>
+          <a:p>
+            <a:pPr algn="ctr">
+              <a:lnSpc>
+                <a:spcPct val="100000"/>
+              </a:lnSpc>
+              <a:spcAft>
+                <a:spcPts val="200"/>
+              </a:spcAft>
+              <a:defRPr sz="1800" b="0">
+                <a:solidFill>
+                  <a:srgbClr val="666666"/>
+                </a:solidFill>
+                <a:latin typeface="Calibri"/>
+              </a:defRPr>
+            </a:pPr>
+            <a:r>
+              <a:rPr sz="1800" b="0">
+                <a:solidFill>
+                  <a:srgbClr val="666666"/>
+                </a:solidFill>
+                <a:latin typeface="Calibri"/>
+              </a:rPr>
+              <a:t>The same idea taken further: six joints, six servos, one program</a:t>
             </a:r>
           </a:p>
         </p:txBody>
@@ -19324,7 +19542,7 @@
                 </a:solidFill>
                 <a:latin typeface="Calibri"/>
               </a:rPr>
-              <a:t>Two of those, already built</a:t>
+              <a:t>Where this goes next</a:t>
             </a:r>
           </a:p>
         </p:txBody>
@@ -19478,7 +19696,7 @@
         <p:spPr>
           <a:xfrm>
             <a:off x="502920" y="1188720"/>
-            <a:ext cx="11185855" cy="548640"/>
+            <a:ext cx="5092963" cy="457200"/>
           </a:xfrm>
           <a:prstGeom prst="rect">
             <a:avLst/>
@@ -19496,85 +19714,37 @@
                 <a:spcPct val="100000"/>
               </a:lnSpc>
               <a:spcAft>
-                <a:spcPts val="200"/>
-              </a:spcAft>
-              <a:defRPr sz="1800" b="0">
-                <a:solidFill>
-                  <a:srgbClr val="222222"/>
-                </a:solidFill>
-                <a:latin typeface="Calibri"/>
-              </a:defRPr>
-            </a:pPr>
-            <a:r>
-              <a:rPr sz="1800" b="0">
-                <a:solidFill>
-                  <a:srgbClr val="222222"/>
-                </a:solidFill>
-                <a:latin typeface="Calibri"/>
-              </a:rPr>
-              <a:t>Both of these are the same vehicle you have been driving, with something bolted to the top plate and a few hundred lines added to the program.</a:t>
-            </a:r>
-          </a:p>
-        </p:txBody>
-      </p:sp>
-      <p:pic>
-        <p:nvPicPr>
-          <p:cNvPr id="7" name="Picture 6" descr="vehicle-with-arm.jpg"/>
-          <p:cNvPicPr>
-            <a:picLocks noChangeAspect="1"/>
-          </p:cNvPicPr>
-          <p:nvPr/>
-        </p:nvPicPr>
-        <p:blipFill>
-          <a:blip r:embed="rId2"/>
-          <a:stretch>
-            <a:fillRect/>
-          </a:stretch>
-        </p:blipFill>
-        <p:spPr>
-          <a:xfrm>
-            <a:off x="757351" y="1810512"/>
-            <a:ext cx="4901184" cy="3675888"/>
-          </a:xfrm>
-          <a:prstGeom prst="rect">
-            <a:avLst/>
-          </a:prstGeom>
-        </p:spPr>
-      </p:pic>
-      <p:pic>
-        <p:nvPicPr>
-          <p:cNvPr id="8" name="Picture 7" descr="robot-arm-6dof.jpg"/>
-          <p:cNvPicPr>
-            <a:picLocks noChangeAspect="1"/>
-          </p:cNvPicPr>
-          <p:nvPr/>
-        </p:nvPicPr>
-        <p:blipFill>
-          <a:blip r:embed="rId3"/>
-          <a:stretch>
-            <a:fillRect/>
-          </a:stretch>
-        </p:blipFill>
-        <p:spPr>
-          <a:xfrm>
-            <a:off x="7156650" y="1810512"/>
-            <a:ext cx="3654201" cy="3675887"/>
-          </a:xfrm>
-          <a:prstGeom prst="rect">
-            <a:avLst/>
-          </a:prstGeom>
-        </p:spPr>
-      </p:pic>
-      <p:sp>
-        <p:nvSpPr>
-          <p:cNvPr id="9" name="TextBox 8"/>
+                <a:spcPts val="600"/>
+              </a:spcAft>
+              <a:defRPr sz="1900" b="1">
+                <a:solidFill>
+                  <a:srgbClr val="0E7C86"/>
+                </a:solidFill>
+                <a:latin typeface="Calibri"/>
+              </a:defRPr>
+            </a:pPr>
+            <a:r>
+              <a:rPr sz="1900" b="1">
+                <a:solidFill>
+                  <a:srgbClr val="0E7C86"/>
+                </a:solidFill>
+                <a:latin typeface="Calibri"/>
+              </a:rPr>
+              <a:t>Straight on from here</a:t>
+            </a:r>
+          </a:p>
+        </p:txBody>
+      </p:sp>
+      <p:sp>
+        <p:nvSpPr>
+          <p:cNvPr id="7" name="TextBox 6"/>
           <p:cNvSpPr txBox="1"/>
           <p:nvPr/>
         </p:nvSpPr>
         <p:spPr>
           <a:xfrm>
-            <a:off x="502920" y="5559552"/>
-            <a:ext cx="5410047" cy="658368"/>
+            <a:off x="502920" y="1700784"/>
+            <a:ext cx="5092963" cy="3474720"/>
           </a:xfrm>
           <a:prstGeom prst="rect">
             <a:avLst/>
@@ -19587,16 +19757,16 @@
           </a:bodyPr>
           <a:lstStyle/>
           <a:p>
-            <a:pPr algn="ctr">
-              <a:lnSpc>
-                <a:spcPct val="100000"/>
-              </a:lnSpc>
-              <a:spcAft>
-                <a:spcPts val="200"/>
+            <a:pPr algn="l">
+              <a:lnSpc>
+                <a:spcPct val="100000"/>
+              </a:lnSpc>
+              <a:spcAft>
+                <a:spcPts val="800"/>
               </a:spcAft>
               <a:defRPr sz="1800" b="0">
                 <a:solidFill>
-                  <a:srgbClr val="666666"/>
+                  <a:srgbClr val="222222"/>
                 </a:solidFill>
                 <a:latin typeface="Calibri"/>
               </a:defRPr>
@@ -19604,25 +19774,75 @@
             <a:r>
               <a:rPr sz="1800" b="0">
                 <a:solidFill>
-                  <a:srgbClr val="666666"/>
-                </a:solidFill>
-                <a:latin typeface="Calibri"/>
-              </a:rPr>
-              <a:t>A gripper arm on the top plate, driven from the servo headers</a:t>
-            </a:r>
-          </a:p>
-        </p:txBody>
-      </p:sp>
-      <p:sp>
-        <p:nvSpPr>
-          <p:cNvPr id="10" name="TextBox 9"/>
+                  <a:srgbClr val="222222"/>
+                </a:solidFill>
+                <a:latin typeface="Calibri"/>
+              </a:rPr>
+              <a:t>SENSORS - a range finder that stops the vehicle before it hits something, line followers, light and temperature. Once it can sense the world, dead reckoning stops being the only way it knows where it is.</a:t>
+            </a:r>
+          </a:p>
+          <a:p>
+            <a:pPr algn="l">
+              <a:lnSpc>
+                <a:spcPct val="100000"/>
+              </a:lnSpc>
+              <a:spcAft>
+                <a:spcPts val="800"/>
+              </a:spcAft>
+              <a:defRPr sz="1800" b="0">
+                <a:solidFill>
+                  <a:srgbClr val="222222"/>
+                </a:solidFill>
+                <a:latin typeface="Calibri"/>
+              </a:defRPr>
+            </a:pPr>
+            <a:r>
+              <a:rPr sz="1800" b="0">
+                <a:solidFill>
+                  <a:srgbClr val="222222"/>
+                </a:solidFill>
+                <a:latin typeface="Calibri"/>
+              </a:rPr>
+              <a:t>VEHICLE TO VEHICLE - ESP-NOW lets ESP32s talk directly to each other, with no router in between.</a:t>
+            </a:r>
+          </a:p>
+          <a:p>
+            <a:pPr algn="l">
+              <a:lnSpc>
+                <a:spcPct val="100000"/>
+              </a:lnSpc>
+              <a:spcAft>
+                <a:spcPts val="800"/>
+              </a:spcAft>
+              <a:defRPr sz="1800" b="0">
+                <a:solidFill>
+                  <a:srgbClr val="222222"/>
+                </a:solidFill>
+                <a:latin typeface="Calibri"/>
+              </a:defRPr>
+            </a:pPr>
+            <a:r>
+              <a:rPr sz="1800" b="0">
+                <a:solidFill>
+                  <a:srgbClr val="222222"/>
+                </a:solidFill>
+                <a:latin typeface="Calibri"/>
+              </a:rPr>
+              <a:t>CAMERAS AND AI - object recognition, and a 6-DOF arm that picks things up.</a:t>
+            </a:r>
+          </a:p>
+        </p:txBody>
+      </p:sp>
+      <p:sp>
+        <p:nvSpPr>
+          <p:cNvPr id="8" name="TextBox 7"/>
           <p:cNvSpPr txBox="1"/>
           <p:nvPr/>
         </p:nvSpPr>
         <p:spPr>
           <a:xfrm>
-            <a:off x="6278727" y="5559552"/>
-            <a:ext cx="5410047" cy="658368"/>
+            <a:off x="6053083" y="1188720"/>
+            <a:ext cx="5635692" cy="457200"/>
           </a:xfrm>
           <a:prstGeom prst="rect">
             <a:avLst/>
@@ -19635,16 +19855,64 @@
           </a:bodyPr>
           <a:lstStyle/>
           <a:p>
-            <a:pPr algn="ctr">
-              <a:lnSpc>
-                <a:spcPct val="100000"/>
-              </a:lnSpc>
-              <a:spcAft>
-                <a:spcPts val="200"/>
+            <a:pPr algn="l">
+              <a:lnSpc>
+                <a:spcPct val="100000"/>
+              </a:lnSpc>
+              <a:spcAft>
+                <a:spcPts val="600"/>
+              </a:spcAft>
+              <a:defRPr sz="1900" b="1">
+                <a:solidFill>
+                  <a:srgbClr val="0E7C86"/>
+                </a:solidFill>
+                <a:latin typeface="Calibri"/>
+              </a:defRPr>
+            </a:pPr>
+            <a:r>
+              <a:rPr sz="1900" b="1">
+                <a:solidFill>
+                  <a:srgbClr val="0E7C86"/>
+                </a:solidFill>
+                <a:latin typeface="Calibri"/>
+              </a:rPr>
+              <a:t>The advanced program</a:t>
+            </a:r>
+          </a:p>
+        </p:txBody>
+      </p:sp>
+      <p:sp>
+        <p:nvSpPr>
+          <p:cNvPr id="9" name="TextBox 8"/>
+          <p:cNvSpPr txBox="1"/>
+          <p:nvPr/>
+        </p:nvSpPr>
+        <p:spPr>
+          <a:xfrm>
+            <a:off x="6053083" y="1700784"/>
+            <a:ext cx="5635692" cy="3474720"/>
+          </a:xfrm>
+          <a:prstGeom prst="rect">
+            <a:avLst/>
+          </a:prstGeom>
+          <a:noFill/>
+        </p:spPr>
+        <p:txBody>
+          <a:bodyPr wrap="square" lIns="0" tIns="0" rIns="0" bIns="0">
+            <a:spAutoFit/>
+          </a:bodyPr>
+          <a:lstStyle/>
+          <a:p>
+            <a:pPr algn="l">
+              <a:lnSpc>
+                <a:spcPct val="100000"/>
+              </a:lnSpc>
+              <a:spcAft>
+                <a:spcPts val="800"/>
               </a:spcAft>
               <a:defRPr sz="1800" b="0">
                 <a:solidFill>
-                  <a:srgbClr val="666666"/>
+                  <a:srgbClr val="222222"/>
                 </a:solidFill>
                 <a:latin typeface="Calibri"/>
               </a:defRPr>
@@ -19652,11 +19920,252 @@
             <a:r>
               <a:rPr sz="1800" b="0">
                 <a:solidFill>
-                  <a:srgbClr val="666666"/>
-                </a:solidFill>
-                <a:latin typeface="Calibri"/>
-              </a:rPr>
-              <a:t>The same idea taken further: six joints, six servos, one program</a:t>
+                  <a:srgbClr val="222222"/>
+                </a:solidFill>
+                <a:latin typeface="Calibri"/>
+              </a:rPr>
+              <a:t>Pathfinder_Op_Program12 is the same vehicle with:</a:t>
+            </a:r>
+          </a:p>
+          <a:p>
+            <a:pPr lvl="1" algn="l">
+              <a:lnSpc>
+                <a:spcPct val="100000"/>
+              </a:lnSpc>
+              <a:spcAft>
+                <a:spcPts val="800"/>
+              </a:spcAft>
+              <a:defRPr sz="1800" b="0">
+                <a:solidFill>
+                  <a:srgbClr val="222222"/>
+                </a:solidFill>
+                <a:latin typeface="Calibri"/>
+              </a:defRPr>
+            </a:pPr>
+            <a:r>
+              <a:rPr sz="1800" b="0">
+                <a:solidFill>
+                  <a:srgbClr val="222222"/>
+                </a:solidFill>
+                <a:latin typeface="Calibri"/>
+              </a:rPr>
+              <a:t>eight files, split by subsystem</a:t>
+            </a:r>
+          </a:p>
+          <a:p>
+            <a:pPr lvl="1" algn="l">
+              <a:lnSpc>
+                <a:spcPct val="100000"/>
+              </a:lnSpc>
+              <a:spcAft>
+                <a:spcPts val="800"/>
+              </a:spcAft>
+              <a:defRPr sz="1800" b="0">
+                <a:solidFill>
+                  <a:srgbClr val="222222"/>
+                </a:solidFill>
+                <a:latin typeface="Calibri"/>
+              </a:defRPr>
+            </a:pPr>
+            <a:r>
+              <a:rPr sz="1800" b="0">
+                <a:solidFill>
+                  <a:srgbClr val="222222"/>
+                </a:solidFill>
+                <a:latin typeface="Calibri"/>
+              </a:rPr>
+              <a:t>10-bit PWM and hybrid drive at low speed</a:t>
+            </a:r>
+          </a:p>
+          <a:p>
+            <a:pPr lvl="1" algn="l">
+              <a:lnSpc>
+                <a:spcPct val="100000"/>
+              </a:lnSpc>
+              <a:spcAft>
+                <a:spcPts val="800"/>
+              </a:spcAft>
+              <a:defRPr sz="1800" b="0">
+                <a:solidFill>
+                  <a:srgbClr val="222222"/>
+                </a:solidFill>
+                <a:latin typeface="Calibri"/>
+              </a:defRPr>
+            </a:pPr>
+            <a:r>
+              <a:rPr sz="1800" b="0">
+                <a:solidFill>
+                  <a:srgbClr val="222222"/>
+                </a:solidFill>
+                <a:latin typeface="Calibri"/>
+              </a:rPr>
+              <a:t>speed ramping, so it does not lurch</a:t>
+            </a:r>
+          </a:p>
+          <a:p>
+            <a:pPr lvl="1" algn="l">
+              <a:lnSpc>
+                <a:spcPct val="100000"/>
+              </a:lnSpc>
+              <a:spcAft>
+                <a:spcPts val="800"/>
+              </a:spcAft>
+              <a:defRPr sz="1800" b="0">
+                <a:solidFill>
+                  <a:srgbClr val="222222"/>
+                </a:solidFill>
+                <a:latin typeface="Calibri"/>
+              </a:defRPr>
+            </a:pPr>
+            <a:r>
+              <a:rPr sz="1800" b="0">
+                <a:solidFill>
+                  <a:srgbClr val="222222"/>
+                </a:solidFill>
+                <a:latin typeface="Calibri"/>
+              </a:rPr>
+              <a:t>a serial console for tuning without recompiling</a:t>
+            </a:r>
+          </a:p>
+          <a:p>
+            <a:pPr lvl="1" algn="l">
+              <a:lnSpc>
+                <a:spcPct val="100000"/>
+              </a:lnSpc>
+              <a:spcAft>
+                <a:spcPts val="800"/>
+              </a:spcAft>
+              <a:defRPr sz="1800" b="0">
+                <a:solidFill>
+                  <a:srgbClr val="222222"/>
+                </a:solidFill>
+                <a:latin typeface="Calibri"/>
+              </a:defRPr>
+            </a:pPr>
+            <a:r>
+              <a:rPr sz="1800" b="0">
+                <a:solidFill>
+                  <a:srgbClr val="222222"/>
+                </a:solidFill>
+                <a:latin typeface="Calibri"/>
+              </a:rPr>
+              <a:t>settings saved to EEPROM</a:t>
+            </a:r>
+          </a:p>
+          <a:p>
+            <a:pPr lvl="1" algn="l">
+              <a:lnSpc>
+                <a:spcPct val="100000"/>
+              </a:lnSpc>
+              <a:spcAft>
+                <a:spcPts val="800"/>
+              </a:spcAft>
+              <a:defRPr sz="1800" b="0">
+                <a:solidFill>
+                  <a:srgbClr val="222222"/>
+                </a:solidFill>
+                <a:latin typeface="Calibri"/>
+              </a:defRPr>
+            </a:pPr>
+            <a:r>
+              <a:rPr sz="1800" b="0">
+                <a:solidFill>
+                  <a:srgbClr val="222222"/>
+                </a:solidFill>
+                <a:latin typeface="Calibri"/>
+              </a:rPr>
+              <a:t>a current sensor and a powered self-test</a:t>
+            </a:r>
+          </a:p>
+          <a:p>
+            <a:pPr algn="l">
+              <a:lnSpc>
+                <a:spcPct val="100000"/>
+              </a:lnSpc>
+              <a:spcAft>
+                <a:spcPts val="800"/>
+              </a:spcAft>
+              <a:defRPr sz="1800" b="0">
+                <a:solidFill>
+                  <a:srgbClr val="222222"/>
+                </a:solidFill>
+                <a:latin typeface="Calibri"/>
+              </a:defRPr>
+            </a:pPr>
+            <a:r>
+              <a:rPr sz="1800" b="0">
+                <a:solidFill>
+                  <a:srgbClr val="222222"/>
+                </a:solidFill>
+                <a:latin typeface="Calibri"/>
+              </a:rPr>
+              <a:t>A five-lesson course of its own.</a:t>
+            </a:r>
+          </a:p>
+        </p:txBody>
+      </p:sp>
+      <p:sp>
+        <p:nvSpPr>
+          <p:cNvPr id="10" name="Rounded Rectangle 9"/>
+          <p:cNvSpPr/>
+          <p:nvPr/>
+        </p:nvSpPr>
+        <p:spPr>
+          <a:xfrm>
+            <a:off x="502920" y="5303520"/>
+            <a:ext cx="11185855" cy="960120"/>
+          </a:xfrm>
+          <a:prstGeom prst="roundRect">
+            <a:avLst>
+              <a:gd name="adj" fmla="val 4000"/>
+            </a:avLst>
+          </a:prstGeom>
+          <a:solidFill>
+            <a:srgbClr val="EEF3F8"/>
+          </a:solidFill>
+          <a:ln w="12700">
+            <a:solidFill>
+              <a:srgbClr val="0E7C86"/>
+            </a:solidFill>
+          </a:ln>
+          <a:effectLst/>
+        </p:spPr>
+        <p:style>
+          <a:lnRef idx="1">
+            <a:schemeClr val="accent1"/>
+          </a:lnRef>
+          <a:fillRef idx="3">
+            <a:schemeClr val="accent1"/>
+          </a:fillRef>
+          <a:effectRef idx="2">
+            <a:schemeClr val="accent1"/>
+          </a:effectRef>
+          <a:fontRef idx="minor">
+            <a:schemeClr val="lt1"/>
+          </a:fontRef>
+        </p:style>
+        <p:txBody>
+          <a:bodyPr rtlCol="0" anchor="ctr" wrap="square" lIns="164592" rIns="164592" tIns="73152" bIns="73152"/>
+          <a:lstStyle/>
+          <a:p>
+            <a:pPr algn="l"/>
+            <a:r>
+              <a:rPr sz="1300" b="1">
+                <a:solidFill>
+                  <a:srgbClr val="0E7C86"/>
+                </a:solidFill>
+                <a:latin typeface="Calibri"/>
+              </a:rPr>
+              <a:t>KEY POINT   </a:t>
+            </a:r>
+            <a:r>
+              <a:rPr sz="1500">
+                <a:solidFill>
+                  <a:srgbClr val="222222"/>
+                </a:solidFill>
+                <a:latin typeface="Calibri"/>
+              </a:rPr>
+              <a:t>Everything you learned this term transfers directly. The advanced course starts by taking this program apart.</a:t>
             </a:r>
           </a:p>
         </p:txBody>
@@ -20154,7 +20663,7 @@
                 </a:solidFill>
                 <a:latin typeface="Calibri"/>
               </a:rPr>
-              <a:t>Where this goes next</a:t>
+              <a:t>Why this is worth your time</a:t>
             </a:r>
           </a:p>
         </p:txBody>
@@ -20308,7 +20817,7 @@
         <p:spPr>
           <a:xfrm>
             <a:off x="502920" y="1188720"/>
-            <a:ext cx="5092963" cy="457200"/>
+            <a:ext cx="11185855" cy="530352"/>
           </a:xfrm>
           <a:prstGeom prst="rect">
             <a:avLst/>
@@ -20342,7 +20851,7 @@
                 </a:solidFill>
                 <a:latin typeface="Calibri"/>
               </a:rPr>
-              <a:t>Straight on from here</a:t>
+              <a:t>Robotics and STEM, and where they lead</a:t>
             </a:r>
           </a:p>
         </p:txBody>
@@ -20355,8 +20864,8 @@
         </p:nvSpPr>
         <p:spPr>
           <a:xfrm>
-            <a:off x="502920" y="1700784"/>
-            <a:ext cx="5092963" cy="3474720"/>
+            <a:off x="502920" y="1755648"/>
+            <a:ext cx="5364327" cy="4507992"/>
           </a:xfrm>
           <a:prstGeom prst="rect">
             <a:avLst/>
@@ -20374,23 +20883,23 @@
                 <a:spcPct val="100000"/>
               </a:lnSpc>
               <a:spcAft>
-                <a:spcPts val="800"/>
-              </a:spcAft>
-              <a:defRPr sz="1800" b="0">
-                <a:solidFill>
-                  <a:srgbClr val="222222"/>
-                </a:solidFill>
-                <a:latin typeface="Calibri"/>
-              </a:defRPr>
-            </a:pPr>
-            <a:r>
-              <a:rPr sz="1800" b="0">
-                <a:solidFill>
-                  <a:srgbClr val="222222"/>
-                </a:solidFill>
-                <a:latin typeface="Calibri"/>
-              </a:rPr>
-              <a:t>SENSORS - a range finder that stops the vehicle before it hits something, line followers, light and temperature. Once it can sense the world, dead reckoning stops being the only way it knows where it is.</a:t>
+                <a:spcPts val="900"/>
+              </a:spcAft>
+              <a:defRPr sz="2000" b="0">
+                <a:solidFill>
+                  <a:srgbClr val="222222"/>
+                </a:solidFill>
+                <a:latin typeface="Calibri"/>
+              </a:defRPr>
+            </a:pPr>
+            <a:r>
+              <a:rPr sz="2000" b="0">
+                <a:solidFill>
+                  <a:srgbClr val="222222"/>
+                </a:solidFill>
+                <a:latin typeface="Calibri"/>
+              </a:rPr>
+              <a:t>At Oceanology International Americas in San Diego, we asked a panel what the transition opportunities are:</a:t>
             </a:r>
           </a:p>
           <a:p>
@@ -20399,24 +20908,15 @@
                 <a:spcPct val="100000"/>
               </a:lnSpc>
               <a:spcAft>
-                <a:spcPts val="800"/>
-              </a:spcAft>
-              <a:defRPr sz="1800" b="0">
-                <a:solidFill>
-                  <a:srgbClr val="222222"/>
-                </a:solidFill>
-                <a:latin typeface="Calibri"/>
-              </a:defRPr>
-            </a:pPr>
-            <a:r>
-              <a:rPr sz="1800" b="0">
-                <a:solidFill>
-                  <a:srgbClr val="222222"/>
-                </a:solidFill>
-                <a:latin typeface="Calibri"/>
-              </a:rPr>
-              <a:t>VEHICLE TO VEHICLE - ESP-NOW lets ESP32s talk directly to each other, with no router in between.</a:t>
-            </a:r>
+                <a:spcPts val="900"/>
+              </a:spcAft>
+              <a:defRPr sz="1000" b="0">
+                <a:solidFill>
+                  <a:srgbClr val="222222"/>
+                </a:solidFill>
+                <a:latin typeface="Calibri"/>
+              </a:defRPr>
+            </a:pPr>
           </a:p>
           <a:p>
             <a:pPr algn="l">
@@ -20424,23 +20924,48 @@
                 <a:spcPct val="100000"/>
               </a:lnSpc>
               <a:spcAft>
-                <a:spcPts val="800"/>
-              </a:spcAft>
-              <a:defRPr sz="1800" b="0">
-                <a:solidFill>
-                  <a:srgbClr val="222222"/>
-                </a:solidFill>
-                <a:latin typeface="Calibri"/>
-              </a:defRPr>
-            </a:pPr>
-            <a:r>
-              <a:rPr sz="1800" b="0">
-                <a:solidFill>
-                  <a:srgbClr val="222222"/>
-                </a:solidFill>
-                <a:latin typeface="Calibri"/>
-              </a:rPr>
-              <a:t>CAMERAS AND AI - object recognition, and a 6-DOF arm that picks things up.</a:t>
+                <a:spcPts val="900"/>
+              </a:spcAft>
+              <a:defRPr sz="2000" b="0">
+                <a:solidFill>
+                  <a:srgbClr val="222222"/>
+                </a:solidFill>
+                <a:latin typeface="Calibri"/>
+              </a:defRPr>
+            </a:pPr>
+            <a:r>
+              <a:rPr sz="2000" b="0">
+                <a:solidFill>
+                  <a:srgbClr val="222222"/>
+                </a:solidFill>
+                <a:latin typeface="Calibri"/>
+              </a:rPr>
+              <a:t>Dr Rick Spinrad, NOAA Administrator, said a knowledge of robotics and STEM is a competitive advantage for entry-level positions.</a:t>
+            </a:r>
+          </a:p>
+          <a:p>
+            <a:pPr algn="l">
+              <a:lnSpc>
+                <a:spcPct val="100000"/>
+              </a:lnSpc>
+              <a:spcAft>
+                <a:spcPts val="900"/>
+              </a:spcAft>
+              <a:defRPr sz="2000" b="0">
+                <a:solidFill>
+                  <a:srgbClr val="222222"/>
+                </a:solidFill>
+                <a:latin typeface="Calibri"/>
+              </a:defRPr>
+            </a:pPr>
+            <a:r>
+              <a:rPr sz="2000" b="0">
+                <a:solidFill>
+                  <a:srgbClr val="222222"/>
+                </a:solidFill>
+                <a:latin typeface="Calibri"/>
+              </a:rPr>
+              <a:t>Rear Admiral Ron Piret, USN, said they are looking for students with robotics and STEM education for operational careers.</a:t>
             </a:r>
           </a:p>
         </p:txBody>
@@ -20453,8 +20978,8 @@
         </p:nvSpPr>
         <p:spPr>
           <a:xfrm>
-            <a:off x="6053083" y="1188720"/>
-            <a:ext cx="5635692" cy="457200"/>
+            <a:off x="6324447" y="1755648"/>
+            <a:ext cx="5364327" cy="4507992"/>
           </a:xfrm>
           <a:prstGeom prst="rect">
             <a:avLst/>
@@ -20472,222 +20997,40 @@
                 <a:spcPct val="100000"/>
               </a:lnSpc>
               <a:spcAft>
-                <a:spcPts val="600"/>
-              </a:spcAft>
-              <a:defRPr sz="1900" b="1">
-                <a:solidFill>
-                  <a:srgbClr val="0E7C86"/>
-                </a:solidFill>
-                <a:latin typeface="Calibri"/>
-              </a:defRPr>
-            </a:pPr>
-            <a:r>
-              <a:rPr sz="1900" b="1">
-                <a:solidFill>
-                  <a:srgbClr val="0E7C86"/>
-                </a:solidFill>
-                <a:latin typeface="Calibri"/>
-              </a:rPr>
-              <a:t>The advanced program</a:t>
-            </a:r>
-          </a:p>
-        </p:txBody>
-      </p:sp>
-      <p:sp>
-        <p:nvSpPr>
-          <p:cNvPr id="9" name="TextBox 8"/>
-          <p:cNvSpPr txBox="1"/>
-          <p:nvPr/>
-        </p:nvSpPr>
-        <p:spPr>
-          <a:xfrm>
-            <a:off x="6053083" y="1700784"/>
-            <a:ext cx="5635692" cy="3474720"/>
-          </a:xfrm>
-          <a:prstGeom prst="rect">
-            <a:avLst/>
-          </a:prstGeom>
-          <a:noFill/>
-        </p:spPr>
-        <p:txBody>
-          <a:bodyPr wrap="square" lIns="0" tIns="0" rIns="0" bIns="0">
-            <a:spAutoFit/>
-          </a:bodyPr>
-          <a:lstStyle/>
+                <a:spcPts val="900"/>
+              </a:spcAft>
+              <a:defRPr sz="2000" b="0">
+                <a:solidFill>
+                  <a:srgbClr val="222222"/>
+                </a:solidFill>
+                <a:latin typeface="Calibri"/>
+              </a:defRPr>
+            </a:pPr>
+            <a:r>
+              <a:rPr sz="2000" b="0">
+                <a:solidFill>
+                  <a:srgbClr val="222222"/>
+                </a:solidFill>
+                <a:latin typeface="Calibri"/>
+              </a:rPr>
+              <a:t>Kendra MacDonald, CEO of Canada's Ocean Supercluster, said that whether you become a doctor, a lawyer or a scientist, STEM will help you.</a:t>
+            </a:r>
+          </a:p>
           <a:p>
             <a:pPr algn="l">
               <a:lnSpc>
                 <a:spcPct val="100000"/>
               </a:lnSpc>
               <a:spcAft>
-                <a:spcPts val="800"/>
-              </a:spcAft>
-              <a:defRPr sz="1800" b="0">
-                <a:solidFill>
-                  <a:srgbClr val="222222"/>
-                </a:solidFill>
-                <a:latin typeface="Calibri"/>
-              </a:defRPr>
-            </a:pPr>
-            <a:r>
-              <a:rPr sz="1800" b="0">
-                <a:solidFill>
-                  <a:srgbClr val="222222"/>
-                </a:solidFill>
-                <a:latin typeface="Calibri"/>
-              </a:rPr>
-              <a:t>Pathfinder_Op_Program12 is the same vehicle with:</a:t>
-            </a:r>
-          </a:p>
-          <a:p>
-            <a:pPr lvl="1" algn="l">
-              <a:lnSpc>
-                <a:spcPct val="100000"/>
-              </a:lnSpc>
-              <a:spcAft>
-                <a:spcPts val="800"/>
-              </a:spcAft>
-              <a:defRPr sz="1800" b="0">
-                <a:solidFill>
-                  <a:srgbClr val="222222"/>
-                </a:solidFill>
-                <a:latin typeface="Calibri"/>
-              </a:defRPr>
-            </a:pPr>
-            <a:r>
-              <a:rPr sz="1800" b="0">
-                <a:solidFill>
-                  <a:srgbClr val="222222"/>
-                </a:solidFill>
-                <a:latin typeface="Calibri"/>
-              </a:rPr>
-              <a:t>eight files, split by subsystem</a:t>
-            </a:r>
-          </a:p>
-          <a:p>
-            <a:pPr lvl="1" algn="l">
-              <a:lnSpc>
-                <a:spcPct val="100000"/>
-              </a:lnSpc>
-              <a:spcAft>
-                <a:spcPts val="800"/>
-              </a:spcAft>
-              <a:defRPr sz="1800" b="0">
-                <a:solidFill>
-                  <a:srgbClr val="222222"/>
-                </a:solidFill>
-                <a:latin typeface="Calibri"/>
-              </a:defRPr>
-            </a:pPr>
-            <a:r>
-              <a:rPr sz="1800" b="0">
-                <a:solidFill>
-                  <a:srgbClr val="222222"/>
-                </a:solidFill>
-                <a:latin typeface="Calibri"/>
-              </a:rPr>
-              <a:t>10-bit PWM and hybrid drive at low speed</a:t>
-            </a:r>
-          </a:p>
-          <a:p>
-            <a:pPr lvl="1" algn="l">
-              <a:lnSpc>
-                <a:spcPct val="100000"/>
-              </a:lnSpc>
-              <a:spcAft>
-                <a:spcPts val="800"/>
-              </a:spcAft>
-              <a:defRPr sz="1800" b="0">
-                <a:solidFill>
-                  <a:srgbClr val="222222"/>
-                </a:solidFill>
-                <a:latin typeface="Calibri"/>
-              </a:defRPr>
-            </a:pPr>
-            <a:r>
-              <a:rPr sz="1800" b="0">
-                <a:solidFill>
-                  <a:srgbClr val="222222"/>
-                </a:solidFill>
-                <a:latin typeface="Calibri"/>
-              </a:rPr>
-              <a:t>speed ramping, so it does not lurch</a:t>
-            </a:r>
-          </a:p>
-          <a:p>
-            <a:pPr lvl="1" algn="l">
-              <a:lnSpc>
-                <a:spcPct val="100000"/>
-              </a:lnSpc>
-              <a:spcAft>
-                <a:spcPts val="800"/>
-              </a:spcAft>
-              <a:defRPr sz="1800" b="0">
-                <a:solidFill>
-                  <a:srgbClr val="222222"/>
-                </a:solidFill>
-                <a:latin typeface="Calibri"/>
-              </a:defRPr>
-            </a:pPr>
-            <a:r>
-              <a:rPr sz="1800" b="0">
-                <a:solidFill>
-                  <a:srgbClr val="222222"/>
-                </a:solidFill>
-                <a:latin typeface="Calibri"/>
-              </a:rPr>
-              <a:t>a serial console for tuning without recompiling</a:t>
-            </a:r>
-          </a:p>
-          <a:p>
-            <a:pPr lvl="1" algn="l">
-              <a:lnSpc>
-                <a:spcPct val="100000"/>
-              </a:lnSpc>
-              <a:spcAft>
-                <a:spcPts val="800"/>
-              </a:spcAft>
-              <a:defRPr sz="1800" b="0">
-                <a:solidFill>
-                  <a:srgbClr val="222222"/>
-                </a:solidFill>
-                <a:latin typeface="Calibri"/>
-              </a:defRPr>
-            </a:pPr>
-            <a:r>
-              <a:rPr sz="1800" b="0">
-                <a:solidFill>
-                  <a:srgbClr val="222222"/>
-                </a:solidFill>
-                <a:latin typeface="Calibri"/>
-              </a:rPr>
-              <a:t>settings saved to EEPROM</a:t>
-            </a:r>
-          </a:p>
-          <a:p>
-            <a:pPr lvl="1" algn="l">
-              <a:lnSpc>
-                <a:spcPct val="100000"/>
-              </a:lnSpc>
-              <a:spcAft>
-                <a:spcPts val="800"/>
-              </a:spcAft>
-              <a:defRPr sz="1800" b="0">
-                <a:solidFill>
-                  <a:srgbClr val="222222"/>
-                </a:solidFill>
-                <a:latin typeface="Calibri"/>
-              </a:defRPr>
-            </a:pPr>
-            <a:r>
-              <a:rPr sz="1800" b="0">
-                <a:solidFill>
-                  <a:srgbClr val="222222"/>
-                </a:solidFill>
-                <a:latin typeface="Calibri"/>
-              </a:rPr>
-              <a:t>a current sensor and a powered self-test</a:t>
-            </a:r>
+                <a:spcPts val="900"/>
+              </a:spcAft>
+              <a:defRPr sz="1000" b="0">
+                <a:solidFill>
+                  <a:srgbClr val="222222"/>
+                </a:solidFill>
+                <a:latin typeface="Calibri"/>
+              </a:defRPr>
+            </a:pPr>
           </a:p>
           <a:p>
             <a:pPr algn="l">
@@ -20695,89 +21038,64 @@
                 <a:spcPct val="100000"/>
               </a:lnSpc>
               <a:spcAft>
-                <a:spcPts val="800"/>
-              </a:spcAft>
-              <a:defRPr sz="1800" b="0">
-                <a:solidFill>
-                  <a:srgbClr val="222222"/>
-                </a:solidFill>
-                <a:latin typeface="Calibri"/>
-              </a:defRPr>
-            </a:pPr>
-            <a:r>
-              <a:rPr sz="1800" b="0">
-                <a:solidFill>
-                  <a:srgbClr val="222222"/>
-                </a:solidFill>
-                <a:latin typeface="Calibri"/>
-              </a:rPr>
-              <a:t>A five-lesson course of its own.</a:t>
-            </a:r>
-          </a:p>
-        </p:txBody>
-      </p:sp>
-      <p:sp>
-        <p:nvSpPr>
-          <p:cNvPr id="10" name="Rounded Rectangle 9"/>
-          <p:cNvSpPr/>
-          <p:nvPr/>
-        </p:nvSpPr>
-        <p:spPr>
-          <a:xfrm>
-            <a:off x="502920" y="5303520"/>
-            <a:ext cx="11185855" cy="960120"/>
-          </a:xfrm>
-          <a:prstGeom prst="roundRect">
-            <a:avLst>
-              <a:gd name="adj" fmla="val 4000"/>
-            </a:avLst>
-          </a:prstGeom>
-          <a:solidFill>
-            <a:srgbClr val="EEF3F8"/>
-          </a:solidFill>
-          <a:ln w="12700">
-            <a:solidFill>
-              <a:srgbClr val="0E7C86"/>
-            </a:solidFill>
-          </a:ln>
-          <a:effectLst/>
-        </p:spPr>
-        <p:style>
-          <a:lnRef idx="1">
-            <a:schemeClr val="accent1"/>
-          </a:lnRef>
-          <a:fillRef idx="3">
-            <a:schemeClr val="accent1"/>
-          </a:fillRef>
-          <a:effectRef idx="2">
-            <a:schemeClr val="accent1"/>
-          </a:effectRef>
-          <a:fontRef idx="minor">
-            <a:schemeClr val="lt1"/>
-          </a:fontRef>
-        </p:style>
-        <p:txBody>
-          <a:bodyPr rtlCol="0" anchor="ctr" wrap="square" lIns="164592" rIns="164592" tIns="73152" bIns="73152"/>
-          <a:lstStyle/>
-          <a:p>
-            <a:pPr algn="l"/>
-            <a:r>
-              <a:rPr sz="1300" b="1">
-                <a:solidFill>
-                  <a:srgbClr val="0E7C86"/>
-                </a:solidFill>
-                <a:latin typeface="Calibri"/>
-              </a:rPr>
-              <a:t>KEY POINT   </a:t>
-            </a:r>
-            <a:r>
-              <a:rPr sz="1500">
-                <a:solidFill>
-                  <a:srgbClr val="222222"/>
-                </a:solidFill>
-                <a:latin typeface="Calibri"/>
-              </a:rPr>
-              <a:t>Everything you learned this term transfers directly. The advanced course starts by taking this program apart.</a:t>
+                <a:spcPts val="900"/>
+              </a:spcAft>
+              <a:defRPr sz="2000" b="0">
+                <a:solidFill>
+                  <a:srgbClr val="222222"/>
+                </a:solidFill>
+                <a:latin typeface="Calibri"/>
+              </a:defRPr>
+            </a:pPr>
+            <a:r>
+              <a:rPr sz="2000" b="0">
+                <a:solidFill>
+                  <a:srgbClr val="222222"/>
+                </a:solidFill>
+                <a:latin typeface="Calibri"/>
+              </a:rPr>
+              <a:t>What you have actually practiced this term: reading somebody else's code, changing one thing at a time, measuring instead of guessing, and working out whether a fault is mechanical, electrical or software.</a:t>
+            </a:r>
+          </a:p>
+          <a:p>
+            <a:pPr algn="l">
+              <a:lnSpc>
+                <a:spcPct val="100000"/>
+              </a:lnSpc>
+              <a:spcAft>
+                <a:spcPts val="900"/>
+              </a:spcAft>
+              <a:defRPr sz="1000" b="0">
+                <a:solidFill>
+                  <a:srgbClr val="222222"/>
+                </a:solidFill>
+                <a:latin typeface="Calibri"/>
+              </a:defRPr>
+            </a:pPr>
+          </a:p>
+          <a:p>
+            <a:pPr algn="l">
+              <a:lnSpc>
+                <a:spcPct val="100000"/>
+              </a:lnSpc>
+              <a:spcAft>
+                <a:spcPts val="900"/>
+              </a:spcAft>
+              <a:defRPr sz="2000" b="0">
+                <a:solidFill>
+                  <a:srgbClr val="222222"/>
+                </a:solidFill>
+                <a:latin typeface="Calibri"/>
+              </a:defRPr>
+            </a:pPr>
+            <a:r>
+              <a:rPr sz="2000" b="0">
+                <a:solidFill>
+                  <a:srgbClr val="222222"/>
+                </a:solidFill>
+                <a:latin typeface="Calibri"/>
+              </a:rPr>
+              <a:t>Those four habits are the job. The vehicle was just the excuse.</a:t>
             </a:r>
           </a:p>
         </p:txBody>
@@ -20841,7 +21159,7 @@
                 </a:solidFill>
                 <a:latin typeface="Calibri"/>
               </a:rPr>
-              <a:t>Why this is worth your time</a:t>
+              <a:t>Check yourself</a:t>
             </a:r>
           </a:p>
         </p:txBody>
@@ -20982,502 +21300,6 @@
                 <a:latin typeface="Calibri"/>
               </a:rPr>
               <a:t>30</a:t>
-            </a:r>
-          </a:p>
-        </p:txBody>
-      </p:sp>
-      <p:sp>
-        <p:nvSpPr>
-          <p:cNvPr id="6" name="TextBox 5"/>
-          <p:cNvSpPr txBox="1"/>
-          <p:nvPr/>
-        </p:nvSpPr>
-        <p:spPr>
-          <a:xfrm>
-            <a:off x="502920" y="1188720"/>
-            <a:ext cx="11185855" cy="530352"/>
-          </a:xfrm>
-          <a:prstGeom prst="rect">
-            <a:avLst/>
-          </a:prstGeom>
-          <a:noFill/>
-        </p:spPr>
-        <p:txBody>
-          <a:bodyPr wrap="square" lIns="0" tIns="0" rIns="0" bIns="0">
-            <a:spAutoFit/>
-          </a:bodyPr>
-          <a:lstStyle/>
-          <a:p>
-            <a:pPr algn="l">
-              <a:lnSpc>
-                <a:spcPct val="100000"/>
-              </a:lnSpc>
-              <a:spcAft>
-                <a:spcPts val="600"/>
-              </a:spcAft>
-              <a:defRPr sz="1900" b="1">
-                <a:solidFill>
-                  <a:srgbClr val="0E7C86"/>
-                </a:solidFill>
-                <a:latin typeface="Calibri"/>
-              </a:defRPr>
-            </a:pPr>
-            <a:r>
-              <a:rPr sz="1900" b="1">
-                <a:solidFill>
-                  <a:srgbClr val="0E7C86"/>
-                </a:solidFill>
-                <a:latin typeface="Calibri"/>
-              </a:rPr>
-              <a:t>Robotics and STEM, and where they lead</a:t>
-            </a:r>
-          </a:p>
-        </p:txBody>
-      </p:sp>
-      <p:sp>
-        <p:nvSpPr>
-          <p:cNvPr id="7" name="TextBox 6"/>
-          <p:cNvSpPr txBox="1"/>
-          <p:nvPr/>
-        </p:nvSpPr>
-        <p:spPr>
-          <a:xfrm>
-            <a:off x="502920" y="1755648"/>
-            <a:ext cx="5364327" cy="4507992"/>
-          </a:xfrm>
-          <a:prstGeom prst="rect">
-            <a:avLst/>
-          </a:prstGeom>
-          <a:noFill/>
-        </p:spPr>
-        <p:txBody>
-          <a:bodyPr wrap="square" lIns="0" tIns="0" rIns="0" bIns="0">
-            <a:spAutoFit/>
-          </a:bodyPr>
-          <a:lstStyle/>
-          <a:p>
-            <a:pPr algn="l">
-              <a:lnSpc>
-                <a:spcPct val="100000"/>
-              </a:lnSpc>
-              <a:spcAft>
-                <a:spcPts val="900"/>
-              </a:spcAft>
-              <a:defRPr sz="2000" b="0">
-                <a:solidFill>
-                  <a:srgbClr val="222222"/>
-                </a:solidFill>
-                <a:latin typeface="Calibri"/>
-              </a:defRPr>
-            </a:pPr>
-            <a:r>
-              <a:rPr sz="2000" b="0">
-                <a:solidFill>
-                  <a:srgbClr val="222222"/>
-                </a:solidFill>
-                <a:latin typeface="Calibri"/>
-              </a:rPr>
-              <a:t>At Oceanology International Americas in San Diego, we asked a panel what the transition opportunities are:</a:t>
-            </a:r>
-          </a:p>
-          <a:p>
-            <a:pPr algn="l">
-              <a:lnSpc>
-                <a:spcPct val="100000"/>
-              </a:lnSpc>
-              <a:spcAft>
-                <a:spcPts val="900"/>
-              </a:spcAft>
-              <a:defRPr sz="1000" b="0">
-                <a:solidFill>
-                  <a:srgbClr val="222222"/>
-                </a:solidFill>
-                <a:latin typeface="Calibri"/>
-              </a:defRPr>
-            </a:pPr>
-          </a:p>
-          <a:p>
-            <a:pPr algn="l">
-              <a:lnSpc>
-                <a:spcPct val="100000"/>
-              </a:lnSpc>
-              <a:spcAft>
-                <a:spcPts val="900"/>
-              </a:spcAft>
-              <a:defRPr sz="2000" b="0">
-                <a:solidFill>
-                  <a:srgbClr val="222222"/>
-                </a:solidFill>
-                <a:latin typeface="Calibri"/>
-              </a:defRPr>
-            </a:pPr>
-            <a:r>
-              <a:rPr sz="2000" b="0">
-                <a:solidFill>
-                  <a:srgbClr val="222222"/>
-                </a:solidFill>
-                <a:latin typeface="Calibri"/>
-              </a:rPr>
-              <a:t>Dr Rick Spinrad, NOAA Administrator, said a knowledge of robotics and STEM is a competitive advantage for entry-level positions.</a:t>
-            </a:r>
-          </a:p>
-          <a:p>
-            <a:pPr algn="l">
-              <a:lnSpc>
-                <a:spcPct val="100000"/>
-              </a:lnSpc>
-              <a:spcAft>
-                <a:spcPts val="900"/>
-              </a:spcAft>
-              <a:defRPr sz="2000" b="0">
-                <a:solidFill>
-                  <a:srgbClr val="222222"/>
-                </a:solidFill>
-                <a:latin typeface="Calibri"/>
-              </a:defRPr>
-            </a:pPr>
-            <a:r>
-              <a:rPr sz="2000" b="0">
-                <a:solidFill>
-                  <a:srgbClr val="222222"/>
-                </a:solidFill>
-                <a:latin typeface="Calibri"/>
-              </a:rPr>
-              <a:t>Rear Admiral Ron Piret, USN, said they are looking for students with robotics and STEM education for operational careers.</a:t>
-            </a:r>
-          </a:p>
-        </p:txBody>
-      </p:sp>
-      <p:sp>
-        <p:nvSpPr>
-          <p:cNvPr id="8" name="TextBox 7"/>
-          <p:cNvSpPr txBox="1"/>
-          <p:nvPr/>
-        </p:nvSpPr>
-        <p:spPr>
-          <a:xfrm>
-            <a:off x="6324447" y="1755648"/>
-            <a:ext cx="5364327" cy="4507992"/>
-          </a:xfrm>
-          <a:prstGeom prst="rect">
-            <a:avLst/>
-          </a:prstGeom>
-          <a:noFill/>
-        </p:spPr>
-        <p:txBody>
-          <a:bodyPr wrap="square" lIns="0" tIns="0" rIns="0" bIns="0">
-            <a:spAutoFit/>
-          </a:bodyPr>
-          <a:lstStyle/>
-          <a:p>
-            <a:pPr algn="l">
-              <a:lnSpc>
-                <a:spcPct val="100000"/>
-              </a:lnSpc>
-              <a:spcAft>
-                <a:spcPts val="900"/>
-              </a:spcAft>
-              <a:defRPr sz="2000" b="0">
-                <a:solidFill>
-                  <a:srgbClr val="222222"/>
-                </a:solidFill>
-                <a:latin typeface="Calibri"/>
-              </a:defRPr>
-            </a:pPr>
-            <a:r>
-              <a:rPr sz="2000" b="0">
-                <a:solidFill>
-                  <a:srgbClr val="222222"/>
-                </a:solidFill>
-                <a:latin typeface="Calibri"/>
-              </a:rPr>
-              <a:t>Kendra MacDonald, CEO of Canada's Ocean Supercluster, said that whether you become a doctor, a lawyer or a scientist, STEM will help you.</a:t>
-            </a:r>
-          </a:p>
-          <a:p>
-            <a:pPr algn="l">
-              <a:lnSpc>
-                <a:spcPct val="100000"/>
-              </a:lnSpc>
-              <a:spcAft>
-                <a:spcPts val="900"/>
-              </a:spcAft>
-              <a:defRPr sz="1000" b="0">
-                <a:solidFill>
-                  <a:srgbClr val="222222"/>
-                </a:solidFill>
-                <a:latin typeface="Calibri"/>
-              </a:defRPr>
-            </a:pPr>
-          </a:p>
-          <a:p>
-            <a:pPr algn="l">
-              <a:lnSpc>
-                <a:spcPct val="100000"/>
-              </a:lnSpc>
-              <a:spcAft>
-                <a:spcPts val="900"/>
-              </a:spcAft>
-              <a:defRPr sz="2000" b="0">
-                <a:solidFill>
-                  <a:srgbClr val="222222"/>
-                </a:solidFill>
-                <a:latin typeface="Calibri"/>
-              </a:defRPr>
-            </a:pPr>
-            <a:r>
-              <a:rPr sz="2000" b="0">
-                <a:solidFill>
-                  <a:srgbClr val="222222"/>
-                </a:solidFill>
-                <a:latin typeface="Calibri"/>
-              </a:rPr>
-              <a:t>What you have actually practiced this term: reading somebody else's code, changing one thing at a time, measuring instead of guessing, and working out whether a fault is mechanical, electrical or software.</a:t>
-            </a:r>
-          </a:p>
-          <a:p>
-            <a:pPr algn="l">
-              <a:lnSpc>
-                <a:spcPct val="100000"/>
-              </a:lnSpc>
-              <a:spcAft>
-                <a:spcPts val="900"/>
-              </a:spcAft>
-              <a:defRPr sz="1000" b="0">
-                <a:solidFill>
-                  <a:srgbClr val="222222"/>
-                </a:solidFill>
-                <a:latin typeface="Calibri"/>
-              </a:defRPr>
-            </a:pPr>
-          </a:p>
-          <a:p>
-            <a:pPr algn="l">
-              <a:lnSpc>
-                <a:spcPct val="100000"/>
-              </a:lnSpc>
-              <a:spcAft>
-                <a:spcPts val="900"/>
-              </a:spcAft>
-              <a:defRPr sz="2000" b="0">
-                <a:solidFill>
-                  <a:srgbClr val="222222"/>
-                </a:solidFill>
-                <a:latin typeface="Calibri"/>
-              </a:defRPr>
-            </a:pPr>
-            <a:r>
-              <a:rPr sz="2000" b="0">
-                <a:solidFill>
-                  <a:srgbClr val="222222"/>
-                </a:solidFill>
-                <a:latin typeface="Calibri"/>
-              </a:rPr>
-              <a:t>Those four habits are the job. The vehicle was just the excuse.</a:t>
-            </a:r>
-          </a:p>
-        </p:txBody>
-      </p:sp>
-    </p:spTree>
-  </p:cSld>
-  <p:clrMapOvr>
-    <a:masterClrMapping/>
-  </p:clrMapOvr>
-</p:sld>
-</file>
-
-<file path=ppt/slides/slide32.xml><?xml version="1.0" encoding="utf-8"?>
-<p:sld xmlns:a="http://schemas.openxmlformats.org/drawingml/2006/main" xmlns:p="http://schemas.openxmlformats.org/presentationml/2006/main" xmlns:r="http://schemas.openxmlformats.org/officeDocument/2006/relationships">
-  <p:cSld>
-    <p:spTree>
-      <p:nvGrpSpPr>
-        <p:cNvPr id="1" name=""/>
-        <p:cNvGrpSpPr/>
-        <p:nvPr/>
-      </p:nvGrpSpPr>
-      <p:grpSpPr/>
-      <p:sp>
-        <p:nvSpPr>
-          <p:cNvPr id="2" name="Title 1"/>
-          <p:cNvSpPr>
-            <a:spLocks noGrp="1"/>
-          </p:cNvSpPr>
-          <p:nvPr>
-            <p:ph type="title"/>
-          </p:nvPr>
-        </p:nvSpPr>
-        <p:spPr>
-          <a:xfrm>
-            <a:off x="502920" y="274320"/>
-            <a:ext cx="11185855" cy="777240"/>
-          </a:xfrm>
-        </p:spPr>
-        <p:txBody>
-          <a:bodyPr wrap="square" anchor="b"/>
-          <a:lstStyle/>
-          <a:p>
-            <a:pPr algn="l">
-              <a:lnSpc>
-                <a:spcPct val="100000"/>
-              </a:lnSpc>
-              <a:spcAft>
-                <a:spcPts val="0"/>
-              </a:spcAft>
-              <a:defRPr sz="2800" b="1">
-                <a:solidFill>
-                  <a:srgbClr val="1F3A5F"/>
-                </a:solidFill>
-                <a:latin typeface="Calibri"/>
-              </a:defRPr>
-            </a:pPr>
-            <a:r>
-              <a:rPr sz="2800" b="1">
-                <a:solidFill>
-                  <a:srgbClr val="1F3A5F"/>
-                </a:solidFill>
-                <a:latin typeface="Calibri"/>
-              </a:rPr>
-              <a:t>Check yourself</a:t>
-            </a:r>
-          </a:p>
-        </p:txBody>
-      </p:sp>
-      <p:sp>
-        <p:nvSpPr>
-          <p:cNvPr id="3" name="Rectangle 2"/>
-          <p:cNvSpPr/>
-          <p:nvPr/>
-        </p:nvSpPr>
-        <p:spPr>
-          <a:xfrm>
-            <a:off x="502920" y="1097280"/>
-            <a:ext cx="11185855" cy="19050"/>
-          </a:xfrm>
-          <a:prstGeom prst="rect">
-            <a:avLst/>
-          </a:prstGeom>
-          <a:solidFill>
-            <a:srgbClr val="C8D2DE"/>
-          </a:solidFill>
-          <a:ln>
-            <a:noFill/>
-          </a:ln>
-          <a:effectLst/>
-        </p:spPr>
-        <p:style>
-          <a:lnRef idx="1">
-            <a:schemeClr val="accent1"/>
-          </a:lnRef>
-          <a:fillRef idx="3">
-            <a:schemeClr val="accent1"/>
-          </a:fillRef>
-          <a:effectRef idx="2">
-            <a:schemeClr val="accent1"/>
-          </a:effectRef>
-          <a:fontRef idx="minor">
-            <a:schemeClr val="lt1"/>
-          </a:fontRef>
-        </p:style>
-        <p:txBody>
-          <a:bodyPr rtlCol="0" anchor="ctr"/>
-          <a:lstStyle/>
-          <a:p>
-            <a:pPr algn="ctr"/>
-          </a:p>
-        </p:txBody>
-      </p:sp>
-      <p:sp>
-        <p:nvSpPr>
-          <p:cNvPr id="4" name="TextBox 3"/>
-          <p:cNvSpPr txBox="1"/>
-          <p:nvPr/>
-        </p:nvSpPr>
-        <p:spPr>
-          <a:xfrm>
-            <a:off x="502920" y="6382512"/>
-            <a:ext cx="10545775" cy="274320"/>
-          </a:xfrm>
-          <a:prstGeom prst="rect">
-            <a:avLst/>
-          </a:prstGeom>
-          <a:noFill/>
-        </p:spPr>
-        <p:txBody>
-          <a:bodyPr wrap="square" lIns="0" tIns="0">
-            <a:spAutoFit/>
-          </a:bodyPr>
-          <a:lstStyle/>
-          <a:p>
-            <a:pPr algn="l">
-              <a:lnSpc>
-                <a:spcPct val="100000"/>
-              </a:lnSpc>
-              <a:spcAft>
-                <a:spcPts val="0"/>
-              </a:spcAft>
-              <a:defRPr sz="1000" b="0">
-                <a:solidFill>
-                  <a:srgbClr val="666666"/>
-                </a:solidFill>
-                <a:latin typeface="Calibri"/>
-              </a:defRPr>
-            </a:pPr>
-            <a:r>
-              <a:rPr sz="1000" b="0">
-                <a:solidFill>
-                  <a:srgbClr val="666666"/>
-                </a:solidFill>
-                <a:latin typeface="Calibri"/>
-              </a:rPr>
-              <a:t>Pathfinder Beginner - PS3  |  Lesson 5</a:t>
-            </a:r>
-          </a:p>
-        </p:txBody>
-      </p:sp>
-      <p:sp>
-        <p:nvSpPr>
-          <p:cNvPr id="5" name="TextBox 4"/>
-          <p:cNvSpPr txBox="1"/>
-          <p:nvPr/>
-        </p:nvSpPr>
-        <p:spPr>
-          <a:xfrm>
-            <a:off x="11231575" y="6382512"/>
-            <a:ext cx="457200" cy="274320"/>
-          </a:xfrm>
-          <a:prstGeom prst="rect">
-            <a:avLst/>
-          </a:prstGeom>
-          <a:noFill/>
-        </p:spPr>
-        <p:txBody>
-          <a:bodyPr wrap="square" lIns="0" tIns="0">
-            <a:spAutoFit/>
-          </a:bodyPr>
-          <a:lstStyle/>
-          <a:p>
-            <a:pPr algn="r">
-              <a:lnSpc>
-                <a:spcPct val="100000"/>
-              </a:lnSpc>
-              <a:spcAft>
-                <a:spcPts val="0"/>
-              </a:spcAft>
-              <a:defRPr sz="1000" b="0">
-                <a:solidFill>
-                  <a:srgbClr val="666666"/>
-                </a:solidFill>
-                <a:latin typeface="Calibri"/>
-              </a:defRPr>
-            </a:pPr>
-            <a:r>
-              <a:rPr sz="1000" b="0">
-                <a:solidFill>
-                  <a:srgbClr val="666666"/>
-                </a:solidFill>
-                <a:latin typeface="Calibri"/>
-              </a:rPr>
-              <a:t>31</a:t>
             </a:r>
           </a:p>
         </p:txBody>
@@ -27273,22 +27095,24 @@
       <p:grpSpPr/>
       <p:sp>
         <p:nvSpPr>
-          <p:cNvPr id="2" name="Title 1"/>
-          <p:cNvSpPr>
-            <a:spLocks noGrp="1"/>
-          </p:cNvSpPr>
-          <p:nvPr>
-            <p:ph type="title"/>
-          </p:nvPr>
-        </p:nvSpPr>
-        <p:spPr>
-          <a:xfrm>
-            <a:off x="502920" y="274320"/>
-            <a:ext cx="11185855" cy="777240"/>
-          </a:xfrm>
-        </p:spPr>
-        <p:txBody>
-          <a:bodyPr wrap="square" anchor="b"/>
+          <p:cNvPr id="2" name="TextBox 1"/>
+          <p:cNvSpPr txBox="1"/>
+          <p:nvPr/>
+        </p:nvSpPr>
+        <p:spPr>
+          <a:xfrm>
+            <a:off x="502920" y="6382512"/>
+            <a:ext cx="10545775" cy="274320"/>
+          </a:xfrm>
+          <a:prstGeom prst="rect">
+            <a:avLst/>
+          </a:prstGeom>
+          <a:noFill/>
+        </p:spPr>
+        <p:txBody>
+          <a:bodyPr wrap="square" lIns="0" tIns="0">
+            <a:spAutoFit/>
+          </a:bodyPr>
           <a:lstStyle/>
           <a:p>
             <a:pPr algn="l">
@@ -27298,41 +27122,89 @@
               <a:spcAft>
                 <a:spcPts val="0"/>
               </a:spcAft>
-              <a:defRPr sz="2800" b="1">
-                <a:solidFill>
-                  <a:srgbClr val="1F3A5F"/>
-                </a:solidFill>
-                <a:latin typeface="Calibri"/>
-              </a:defRPr>
-            </a:pPr>
-            <a:r>
-              <a:rPr sz="2800" b="1">
-                <a:solidFill>
-                  <a:srgbClr val="1F3A5F"/>
-                </a:solidFill>
-                <a:latin typeface="Calibri"/>
-              </a:rPr>
-              <a:t>Where we are</a:t>
-            </a:r>
-          </a:p>
-        </p:txBody>
-      </p:sp>
-      <p:sp>
-        <p:nvSpPr>
-          <p:cNvPr id="3" name="Rectangle 2"/>
+              <a:defRPr sz="1000" b="0">
+                <a:solidFill>
+                  <a:srgbClr val="666666"/>
+                </a:solidFill>
+                <a:latin typeface="Calibri"/>
+              </a:defRPr>
+            </a:pPr>
+            <a:r>
+              <a:rPr sz="1000" b="0">
+                <a:solidFill>
+                  <a:srgbClr val="666666"/>
+                </a:solidFill>
+                <a:latin typeface="Calibri"/>
+              </a:rPr>
+              <a:t>Pathfinder Beginner - PS3  |  Lesson 5</a:t>
+            </a:r>
+          </a:p>
+        </p:txBody>
+      </p:sp>
+      <p:sp>
+        <p:nvSpPr>
+          <p:cNvPr id="3" name="TextBox 2"/>
+          <p:cNvSpPr txBox="1"/>
+          <p:nvPr/>
+        </p:nvSpPr>
+        <p:spPr>
+          <a:xfrm>
+            <a:off x="11231575" y="6382512"/>
+            <a:ext cx="457200" cy="274320"/>
+          </a:xfrm>
+          <a:prstGeom prst="rect">
+            <a:avLst/>
+          </a:prstGeom>
+          <a:noFill/>
+        </p:spPr>
+        <p:txBody>
+          <a:bodyPr wrap="square" lIns="0" tIns="0">
+            <a:spAutoFit/>
+          </a:bodyPr>
+          <a:lstStyle/>
+          <a:p>
+            <a:pPr algn="r">
+              <a:lnSpc>
+                <a:spcPct val="100000"/>
+              </a:lnSpc>
+              <a:spcAft>
+                <a:spcPts val="0"/>
+              </a:spcAft>
+              <a:defRPr sz="1000" b="0">
+                <a:solidFill>
+                  <a:srgbClr val="666666"/>
+                </a:solidFill>
+                <a:latin typeface="Calibri"/>
+              </a:defRPr>
+            </a:pPr>
+            <a:r>
+              <a:rPr sz="1000" b="0">
+                <a:solidFill>
+                  <a:srgbClr val="666666"/>
+                </a:solidFill>
+                <a:latin typeface="Calibri"/>
+              </a:rPr>
+              <a:t>7</a:t>
+            </a:r>
+          </a:p>
+        </p:txBody>
+      </p:sp>
+      <p:sp>
+        <p:nvSpPr>
+          <p:cNvPr id="4" name="Rectangle 3"/>
           <p:cNvSpPr/>
           <p:nvPr/>
         </p:nvSpPr>
         <p:spPr>
           <a:xfrm>
-            <a:off x="502920" y="1097280"/>
-            <a:ext cx="11185855" cy="19050"/>
+            <a:off x="0" y="1234440"/>
+            <a:ext cx="256032" cy="1554480"/>
           </a:xfrm>
           <a:prstGeom prst="rect">
             <a:avLst/>
           </a:prstGeom>
           <a:solidFill>
-            <a:srgbClr val="C8D2DE"/>
+            <a:srgbClr val="0E7C86"/>
           </a:solidFill>
           <a:ln>
             <a:noFill/>
@@ -27363,14 +27235,14 @@
       </p:sp>
       <p:sp>
         <p:nvSpPr>
-          <p:cNvPr id="4" name="TextBox 3"/>
+          <p:cNvPr id="5" name="TextBox 4"/>
           <p:cNvSpPr txBox="1"/>
           <p:nvPr/>
         </p:nvSpPr>
         <p:spPr>
           <a:xfrm>
-            <a:off x="502920" y="6382512"/>
-            <a:ext cx="10545775" cy="274320"/>
+            <a:off x="777240" y="1325880"/>
+            <a:ext cx="10515600" cy="1051560"/>
           </a:xfrm>
           <a:prstGeom prst="rect">
             <a:avLst/>
@@ -27378,7 +27250,7 @@
           <a:noFill/>
         </p:spPr>
         <p:txBody>
-          <a:bodyPr wrap="square" lIns="0" tIns="0">
+          <a:bodyPr wrap="square" lIns="0" tIns="0" rIns="0" bIns="0">
             <a:spAutoFit/>
           </a:bodyPr>
           <a:lstStyle/>
@@ -27390,35 +27262,35 @@
               <a:spcAft>
                 <a:spcPts val="0"/>
               </a:spcAft>
-              <a:defRPr sz="1000" b="0">
-                <a:solidFill>
-                  <a:srgbClr val="666666"/>
-                </a:solidFill>
-                <a:latin typeface="Calibri"/>
-              </a:defRPr>
-            </a:pPr>
-            <a:r>
-              <a:rPr sz="1000" b="0">
-                <a:solidFill>
-                  <a:srgbClr val="666666"/>
-                </a:solidFill>
-                <a:latin typeface="Calibri"/>
-              </a:rPr>
-              <a:t>Pathfinder Beginner - PS3  |  Lesson 5</a:t>
-            </a:r>
-          </a:p>
-        </p:txBody>
-      </p:sp>
-      <p:sp>
-        <p:nvSpPr>
-          <p:cNvPr id="5" name="TextBox 4"/>
+              <a:defRPr sz="3600" b="1">
+                <a:solidFill>
+                  <a:srgbClr val="1F3A5F"/>
+                </a:solidFill>
+                <a:latin typeface="Calibri"/>
+              </a:defRPr>
+            </a:pPr>
+            <a:r>
+              <a:rPr sz="3600" b="1">
+                <a:solidFill>
+                  <a:srgbClr val="1F3A5F"/>
+                </a:solidFill>
+                <a:latin typeface="Calibri"/>
+              </a:rPr>
+              <a:t>Two speeds at once</a:t>
+            </a:r>
+          </a:p>
+        </p:txBody>
+      </p:sp>
+      <p:sp>
+        <p:nvSpPr>
+          <p:cNvPr id="6" name="TextBox 5"/>
           <p:cNvSpPr txBox="1"/>
           <p:nvPr/>
         </p:nvSpPr>
         <p:spPr>
           <a:xfrm>
-            <a:off x="11231575" y="6382512"/>
-            <a:ext cx="457200" cy="274320"/>
+            <a:off x="777240" y="2423160"/>
+            <a:ext cx="10515600" cy="685800"/>
           </a:xfrm>
           <a:prstGeom prst="rect">
             <a:avLst/>
@@ -27426,19 +27298,19 @@
           <a:noFill/>
         </p:spPr>
         <p:txBody>
-          <a:bodyPr wrap="square" lIns="0" tIns="0">
+          <a:bodyPr wrap="square" lIns="0" tIns="0" rIns="0" bIns="0">
             <a:spAutoFit/>
           </a:bodyPr>
           <a:lstStyle/>
           <a:p>
-            <a:pPr algn="r">
-              <a:lnSpc>
-                <a:spcPct val="100000"/>
-              </a:lnSpc>
-              <a:spcAft>
-                <a:spcPts val="0"/>
-              </a:spcAft>
-              <a:defRPr sz="1000" b="0">
+            <a:pPr algn="l">
+              <a:lnSpc>
+                <a:spcPct val="100000"/>
+              </a:lnSpc>
+              <a:spcAft>
+                <a:spcPts val="400"/>
+              </a:spcAft>
+              <a:defRPr sz="1600" b="0">
                 <a:solidFill>
                   <a:srgbClr val="666666"/>
                 </a:solidFill>
@@ -27446,27 +27318,27 @@
               </a:defRPr>
             </a:pPr>
             <a:r>
-              <a:rPr sz="1000" b="0">
+              <a:rPr sz="1600" b="0">
                 <a:solidFill>
                   <a:srgbClr val="666666"/>
                 </a:solidFill>
                 <a:latin typeface="Calibri"/>
               </a:rPr>
-              <a:t>7</a:t>
-            </a:r>
-          </a:p>
-        </p:txBody>
-      </p:sp>
-      <p:sp>
-        <p:nvSpPr>
-          <p:cNvPr id="6" name="Rounded Rectangle 5"/>
+              <a:t>About 25 minutes</a:t>
+            </a:r>
+          </a:p>
+        </p:txBody>
+      </p:sp>
+      <p:sp>
+        <p:nvSpPr>
+          <p:cNvPr id="7" name="Rounded Rectangle 6"/>
           <p:cNvSpPr/>
           <p:nvPr/>
         </p:nvSpPr>
         <p:spPr>
           <a:xfrm>
-            <a:off x="502920" y="2240280"/>
-            <a:ext cx="2120127" cy="1737360"/>
+            <a:off x="502920" y="3886200"/>
+            <a:ext cx="2120127" cy="1325880"/>
           </a:xfrm>
           <a:prstGeom prst="roundRect">
             <a:avLst>
@@ -27529,14 +27401,14 @@
       </p:sp>
       <p:sp>
         <p:nvSpPr>
-          <p:cNvPr id="7" name="TextBox 6"/>
+          <p:cNvPr id="8" name="TextBox 7"/>
           <p:cNvSpPr txBox="1"/>
           <p:nvPr/>
         </p:nvSpPr>
         <p:spPr>
           <a:xfrm>
-            <a:off x="502920" y="1856232"/>
-            <a:ext cx="2120127" cy="347472"/>
+            <a:off x="502920" y="3520440"/>
+            <a:ext cx="2120127" cy="310896"/>
           </a:xfrm>
           <a:prstGeom prst="rect">
             <a:avLst/>
@@ -27554,9 +27426,9 @@
                 <a:spcPct val="100000"/>
               </a:lnSpc>
               <a:spcAft>
-                <a:spcPts val="600"/>
-              </a:spcAft>
-              <a:defRPr sz="1200" b="1">
+                <a:spcPts val="200"/>
+              </a:spcAft>
+              <a:defRPr sz="1100" b="1">
                 <a:solidFill>
                   <a:srgbClr val="0E7C86"/>
                 </a:solidFill>
@@ -27564,7 +27436,7 @@
               </a:defRPr>
             </a:pPr>
             <a:r>
-              <a:rPr sz="1200" b="1">
+              <a:rPr sz="1100" b="1">
                 <a:solidFill>
                   <a:srgbClr val="0E7C86"/>
                 </a:solidFill>
@@ -27577,14 +27449,14 @@
       </p:sp>
       <p:sp>
         <p:nvSpPr>
-          <p:cNvPr id="8" name="Rounded Rectangle 7"/>
+          <p:cNvPr id="9" name="Rounded Rectangle 8"/>
           <p:cNvSpPr/>
           <p:nvPr/>
         </p:nvSpPr>
         <p:spPr>
           <a:xfrm>
-            <a:off x="2769351" y="2240280"/>
-            <a:ext cx="2120127" cy="1737360"/>
+            <a:off x="2769351" y="3886200"/>
+            <a:ext cx="2120127" cy="1325880"/>
           </a:xfrm>
           <a:prstGeom prst="roundRect">
             <a:avLst>
@@ -27647,14 +27519,14 @@
       </p:sp>
       <p:sp>
         <p:nvSpPr>
-          <p:cNvPr id="9" name="TextBox 8"/>
+          <p:cNvPr id="10" name="TextBox 9"/>
           <p:cNvSpPr txBox="1"/>
           <p:nvPr/>
         </p:nvSpPr>
         <p:spPr>
           <a:xfrm>
-            <a:off x="2769351" y="1856232"/>
-            <a:ext cx="2120127" cy="347472"/>
+            <a:off x="2769351" y="3520440"/>
+            <a:ext cx="2120127" cy="310896"/>
           </a:xfrm>
           <a:prstGeom prst="rect">
             <a:avLst/>
@@ -27672,9 +27544,9 @@
                 <a:spcPct val="100000"/>
               </a:lnSpc>
               <a:spcAft>
-                <a:spcPts val="600"/>
-              </a:spcAft>
-              <a:defRPr sz="1200" b="1">
+                <a:spcPts val="200"/>
+              </a:spcAft>
+              <a:defRPr sz="1100" b="1">
                 <a:solidFill>
                   <a:srgbClr val="0E7C86"/>
                 </a:solidFill>
@@ -27682,7 +27554,7 @@
               </a:defRPr>
             </a:pPr>
             <a:r>
-              <a:rPr sz="1200" b="1">
+              <a:rPr sz="1100" b="1">
                 <a:solidFill>
                   <a:srgbClr val="0E7C86"/>
                 </a:solidFill>
@@ -27695,14 +27567,14 @@
       </p:sp>
       <p:sp>
         <p:nvSpPr>
-          <p:cNvPr id="10" name="Rounded Rectangle 9"/>
+          <p:cNvPr id="11" name="Rounded Rectangle 10"/>
           <p:cNvSpPr/>
           <p:nvPr/>
         </p:nvSpPr>
         <p:spPr>
           <a:xfrm>
-            <a:off x="5035782" y="2240280"/>
-            <a:ext cx="2120127" cy="1737360"/>
+            <a:off x="5035782" y="3886200"/>
+            <a:ext cx="2120127" cy="1325880"/>
           </a:xfrm>
           <a:prstGeom prst="roundRect">
             <a:avLst>
@@ -27765,14 +27637,14 @@
       </p:sp>
       <p:sp>
         <p:nvSpPr>
-          <p:cNvPr id="11" name="Rounded Rectangle 10"/>
+          <p:cNvPr id="12" name="Rounded Rectangle 11"/>
           <p:cNvSpPr/>
           <p:nvPr/>
         </p:nvSpPr>
         <p:spPr>
           <a:xfrm>
-            <a:off x="7302213" y="2240280"/>
-            <a:ext cx="2120127" cy="1737360"/>
+            <a:off x="7302213" y="3886200"/>
+            <a:ext cx="2120127" cy="1325880"/>
           </a:xfrm>
           <a:prstGeom prst="roundRect">
             <a:avLst>
@@ -27835,14 +27707,14 @@
       </p:sp>
       <p:sp>
         <p:nvSpPr>
-          <p:cNvPr id="12" name="Rounded Rectangle 11"/>
+          <p:cNvPr id="13" name="Rounded Rectangle 12"/>
           <p:cNvSpPr/>
           <p:nvPr/>
         </p:nvSpPr>
         <p:spPr>
           <a:xfrm>
-            <a:off x="9568644" y="2240280"/>
-            <a:ext cx="2120127" cy="1737360"/>
+            <a:off x="9568644" y="3886200"/>
+            <a:ext cx="2120127" cy="1325880"/>
           </a:xfrm>
           <a:prstGeom prst="roundRect">
             <a:avLst>

--- a/ground-vehicle/docs/courses/beginner-ps3/l5_maneuvers_with_lights.pptx
+++ b/ground-vehicle/docs/courses/beginner-ps3/l5_maneuvers_with_lights.pptx
@@ -12238,7 +12238,7 @@
                 </a:solidFill>
                 <a:latin typeface="Calibri"/>
               </a:rPr>
-              <a:t>About 45 minutes</a:t>
+              <a:t>About 55 minutes</a:t>
             </a:r>
           </a:p>
         </p:txBody>
@@ -27324,7 +27324,7 @@
                 </a:solidFill>
                 <a:latin typeface="Calibri"/>
               </a:rPr>
-              <a:t>About 25 minutes</a:t>
+              <a:t>About 20 minutes</a:t>
             </a:r>
           </a:p>
         </p:txBody>

--- a/ground-vehicle/docs/courses/beginner-ps3/l5_maneuvers_with_lights.pptx
+++ b/ground-vehicle/docs/courses/beginner-ps3/l5_maneuvers_with_lights.pptx
@@ -7053,7 +7053,7 @@
                 </a:solidFill>
                 <a:latin typeface="Calibri"/>
               </a:rPr>
-              <a:t>9</a:t>
+              <a:t>10</a:t>
             </a:r>
           </a:p>
         </p:txBody>
@@ -7509,7 +7509,7 @@
                 </a:solidFill>
                 <a:latin typeface="Calibri"/>
               </a:rPr>
-              <a:t>10</a:t>
+              <a:t>11</a:t>
             </a:r>
           </a:p>
         </p:txBody>
@@ -8347,7 +8347,7 @@
                 </a:solidFill>
                 <a:latin typeface="Calibri"/>
               </a:rPr>
-              <a:t>11</a:t>
+              <a:t>12</a:t>
             </a:r>
           </a:p>
         </p:txBody>
@@ -9014,7 +9014,7 @@
                 </a:solidFill>
                 <a:latin typeface="Calibri"/>
               </a:rPr>
-              <a:t>12</a:t>
+              <a:t>13</a:t>
             </a:r>
           </a:p>
         </p:txBody>
@@ -9546,7 +9546,7 @@
                 </a:solidFill>
                 <a:latin typeface="Calibri"/>
               </a:rPr>
-              <a:t>13</a:t>
+              <a:t>14</a:t>
             </a:r>
           </a:p>
         </p:txBody>
@@ -10044,7 +10044,7 @@
                 </a:solidFill>
                 <a:latin typeface="Calibri"/>
               </a:rPr>
-              <a:t>14</a:t>
+              <a:t>15</a:t>
             </a:r>
           </a:p>
         </p:txBody>
@@ -10594,7 +10594,7 @@
                 </a:solidFill>
                 <a:latin typeface="Calibri"/>
               </a:rPr>
-              <a:t>15</a:t>
+              <a:t>16</a:t>
             </a:r>
           </a:p>
         </p:txBody>
@@ -11480,7 +11480,7 @@
                 </a:solidFill>
                 <a:latin typeface="Calibri"/>
               </a:rPr>
-              <a:t>16</a:t>
+              <a:t>17</a:t>
             </a:r>
           </a:p>
         </p:txBody>
@@ -12098,7 +12098,7 @@
                 </a:solidFill>
                 <a:latin typeface="Calibri"/>
               </a:rPr>
-              <a:t>17</a:t>
+              <a:t>18</a:t>
             </a:r>
           </a:p>
         </p:txBody>
@@ -13032,7 +13032,7 @@
                 </a:solidFill>
                 <a:latin typeface="Calibri"/>
               </a:rPr>
-              <a:t>18</a:t>
+              <a:t>19</a:t>
             </a:r>
           </a:p>
         </p:txBody>
@@ -13816,7 +13816,7 @@
                 </a:solidFill>
                 <a:latin typeface="Calibri"/>
               </a:rPr>
-              <a:t>1</a:t>
+              <a:t>2</a:t>
             </a:r>
           </a:p>
         </p:txBody>
@@ -14241,7 +14241,7 @@
                 </a:solidFill>
                 <a:latin typeface="Calibri"/>
               </a:rPr>
-              <a:t>19</a:t>
+              <a:t>20</a:t>
             </a:r>
           </a:p>
         </p:txBody>
@@ -15294,7 +15294,7 @@
                 </a:solidFill>
                 <a:latin typeface="Calibri"/>
               </a:rPr>
-              <a:t>20</a:t>
+              <a:t>21</a:t>
             </a:r>
           </a:p>
         </p:txBody>
@@ -15741,7 +15741,7 @@
                 </a:solidFill>
                 <a:latin typeface="Calibri"/>
               </a:rPr>
-              <a:t>21</a:t>
+              <a:t>22</a:t>
             </a:r>
           </a:p>
         </p:txBody>
@@ -16234,7 +16234,7 @@
                 </a:solidFill>
                 <a:latin typeface="Calibri"/>
               </a:rPr>
-              <a:t>22</a:t>
+              <a:t>23</a:t>
             </a:r>
           </a:p>
         </p:txBody>
@@ -17055,7 +17055,7 @@
                 </a:solidFill>
                 <a:latin typeface="Calibri"/>
               </a:rPr>
-              <a:t>23</a:t>
+              <a:t>24</a:t>
             </a:r>
           </a:p>
         </p:txBody>
@@ -17480,7 +17480,7 @@
                 </a:solidFill>
                 <a:latin typeface="Calibri"/>
               </a:rPr>
-              <a:t>24</a:t>
+              <a:t>25</a:t>
             </a:r>
           </a:p>
         </p:txBody>
@@ -18213,7 +18213,7 @@
                 </a:solidFill>
                 <a:latin typeface="Calibri"/>
               </a:rPr>
-              <a:t>25</a:t>
+              <a:t>26</a:t>
             </a:r>
           </a:p>
         </p:txBody>
@@ -18843,7 +18843,7 @@
                 </a:solidFill>
                 <a:latin typeface="Calibri"/>
               </a:rPr>
-              <a:t>26</a:t>
+              <a:t>27</a:t>
             </a:r>
           </a:p>
         </p:txBody>
@@ -19286,7 +19286,7 @@
                 </a:solidFill>
                 <a:latin typeface="Calibri"/>
               </a:rPr>
-              <a:t>27</a:t>
+              <a:t>28</a:t>
             </a:r>
           </a:p>
         </p:txBody>
@@ -19682,7 +19682,7 @@
                 </a:solidFill>
                 <a:latin typeface="Calibri"/>
               </a:rPr>
-              <a:t>28</a:t>
+              <a:t>29</a:t>
             </a:r>
           </a:p>
         </p:txBody>
@@ -20369,7 +20369,7 @@
                 </a:solidFill>
                 <a:latin typeface="Calibri"/>
               </a:rPr>
-              <a:t>2</a:t>
+              <a:t>3</a:t>
             </a:r>
           </a:p>
         </p:txBody>
@@ -20803,7 +20803,7 @@
                 </a:solidFill>
                 <a:latin typeface="Calibri"/>
               </a:rPr>
-              <a:t>29</a:t>
+              <a:t>30</a:t>
             </a:r>
           </a:p>
         </p:txBody>
@@ -21299,7 +21299,7 @@
                 </a:solidFill>
                 <a:latin typeface="Calibri"/>
               </a:rPr>
-              <a:t>30</a:t>
+              <a:t>31</a:t>
             </a:r>
           </a:p>
         </p:txBody>
@@ -21774,7 +21774,7 @@
                 </a:solidFill>
                 <a:latin typeface="Calibri"/>
               </a:rPr>
-              <a:t>3</a:t>
+              <a:t>4</a:t>
             </a:r>
           </a:p>
         </p:txBody>
@@ -22510,7 +22510,7 @@
                 </a:solidFill>
                 <a:latin typeface="Calibri"/>
               </a:rPr>
-              <a:t>4</a:t>
+              <a:t>5</a:t>
             </a:r>
           </a:p>
         </p:txBody>
@@ -22951,7 +22951,7 @@
                 </a:solidFill>
                 <a:latin typeface="Calibri"/>
               </a:rPr>
-              <a:t>5</a:t>
+              <a:t>6</a:t>
             </a:r>
           </a:p>
         </p:txBody>
@@ -26609,7 +26609,7 @@
                 </a:solidFill>
                 <a:latin typeface="Calibri"/>
               </a:rPr>
-              <a:t>6</a:t>
+              <a:t>7</a:t>
             </a:r>
           </a:p>
         </p:txBody>
@@ -27184,7 +27184,7 @@
                 </a:solidFill>
                 <a:latin typeface="Calibri"/>
               </a:rPr>
-              <a:t>7</a:t>
+              <a:t>8</a:t>
             </a:r>
           </a:p>
         </p:txBody>
@@ -27974,7 +27974,7 @@
                 </a:solidFill>
                 <a:latin typeface="Calibri"/>
               </a:rPr>
-              <a:t>8</a:t>
+              <a:t>9</a:t>
             </a:r>
           </a:p>
         </p:txBody>

--- a/ground-vehicle/docs/courses/beginner-ps3/l5_maneuvers_with_lights.pptx
+++ b/ground-vehicle/docs/courses/beginner-ps3/l5_maneuvers_with_lights.pptx
@@ -11978,7 +11978,7 @@
               <a:t>SAFETY   </a:t>
             </a:r>
             <a:r>
-              <a:rPr sz="1500">
+              <a:rPr sz="1800">
                 <a:solidFill>
                   <a:srgbClr val="222222"/>
                 </a:solidFill>
@@ -14713,7 +14713,7 @@
                 </a:solidFill>
                 <a:latin typeface="Calibri"/>
               </a:rPr>
-              <a:t>centerd</a:t>
+              <a:t>centered</a:t>
             </a:r>
           </a:p>
         </p:txBody>
@@ -15383,7 +15383,7 @@
                 </a:solidFill>
                 <a:latin typeface="Calibri"/>
               </a:rPr>
-              <a:t>Each servo owns one direction of the stick, so one stick aims four independent things and each sits centerd when the stick is not pushed its way.</a:t>
+              <a:t>Each servo owns one direction of the stick, so one stick aims four independent things and each sits centered when the stick is not pushed its way.</a:t>
             </a:r>
           </a:p>
           <a:p>
@@ -16024,7 +16024,7 @@
               <a:t>KEY POINT   </a:t>
             </a:r>
             <a:r>
-              <a:rPr sz="1500">
+              <a:rPr sz="1800">
                 <a:solidFill>
                   <a:srgbClr val="222222"/>
                 </a:solidFill>
@@ -16845,7 +16845,7 @@
               <a:t>KEY POINT   </a:t>
             </a:r>
             <a:r>
-              <a:rPr sz="1500">
+              <a:rPr sz="1800">
                 <a:solidFill>
                   <a:srgbClr val="222222"/>
                 </a:solidFill>
@@ -18003,7 +18003,7 @@
               <a:t>SAFETY   </a:t>
             </a:r>
             <a:r>
-              <a:rPr sz="1500">
+              <a:rPr sz="1800">
                 <a:solidFill>
                   <a:srgbClr val="222222"/>
                 </a:solidFill>
@@ -19076,7 +19076,7 @@
               <a:t>KEY POINT   </a:t>
             </a:r>
             <a:r>
-              <a:rPr sz="1500">
+              <a:rPr sz="1800">
                 <a:solidFill>
                   <a:srgbClr val="222222"/>
                 </a:solidFill>
@@ -20159,7 +20159,7 @@
               <a:t>KEY POINT   </a:t>
             </a:r>
             <a:r>
-              <a:rPr sz="1500">
+              <a:rPr sz="1800">
                 <a:solidFill>
                   <a:srgbClr val="222222"/>
                 </a:solidFill>
@@ -20593,7 +20593,7 @@
               <a:t>KEY POINT   </a:t>
             </a:r>
             <a:r>
-              <a:rPr sz="1500">
+              <a:rPr sz="1800">
                 <a:solidFill>
                   <a:srgbClr val="222222"/>
                 </a:solidFill>
@@ -21520,7 +21520,7 @@
                 </a:solidFill>
                 <a:latin typeface="Calibri"/>
               </a:rPr>
-              <a:t>6.  A servo is centerd by a pulse of what length? How often is it sent?</a:t>
+              <a:t>6.  A servo is centered by a pulse of what length? How often is it sent?</a:t>
             </a:r>
           </a:p>
           <a:p>
@@ -22741,7 +22741,7 @@
               <a:t>WATCH OUT   </a:t>
             </a:r>
             <a:r>
-              <a:rPr sz="1500">
+              <a:rPr sz="1800">
                 <a:solidFill>
                   <a:srgbClr val="222222"/>
                 </a:solidFill>

--- a/ground-vehicle/docs/courses/beginner-ps3/l5_maneuvers_with_lights.pptx
+++ b/ground-vehicle/docs/courses/beginner-ps3/l5_maneuvers_with_lights.pptx
@@ -6784,7 +6784,7 @@
       </p:sp>
       <p:pic>
         <p:nvPicPr>
-          <p:cNvPr id="8" name="Picture 7" descr="vehicle-side-blue-leds.jpg"/>
+          <p:cNvPr id="8" name="Picture 7" descr="vehicle-turn-signal-right.jpg"/>
           <p:cNvPicPr>
             <a:picLocks noChangeAspect="1"/>
           </p:cNvPicPr>

--- a/ground-vehicle/docs/courses/beginner-ps3/l5_maneuvers_with_lights.pptx
+++ b/ground-vehicle/docs/courses/beginner-ps3/l5_maneuvers_with_lights.pptx
@@ -4,40 +4,43 @@
   <p:sldMasterIdLst>
     <p:sldMasterId id="2147483648" r:id="rId1"/>
   </p:sldMasterIdLst>
+  <p:notesMasterIdLst>
+    <p:notesMasterId r:id="rId33"/>
+  </p:notesMasterIdLst>
   <p:sldIdLst>
-    <p:sldId id="256" r:id="rId7"/>
-    <p:sldId id="257" r:id="rId9"/>
-    <p:sldId id="258" r:id="rId10"/>
-    <p:sldId id="259" r:id="rId11"/>
-    <p:sldId id="260" r:id="rId12"/>
-    <p:sldId id="261" r:id="rId13"/>
-    <p:sldId id="262" r:id="rId14"/>
-    <p:sldId id="263" r:id="rId15"/>
-    <p:sldId id="264" r:id="rId16"/>
-    <p:sldId id="265" r:id="rId17"/>
-    <p:sldId id="266" r:id="rId18"/>
-    <p:sldId id="267" r:id="rId19"/>
-    <p:sldId id="268" r:id="rId20"/>
-    <p:sldId id="269" r:id="rId21"/>
-    <p:sldId id="270" r:id="rId22"/>
-    <p:sldId id="271" r:id="rId23"/>
-    <p:sldId id="272" r:id="rId24"/>
-    <p:sldId id="273" r:id="rId25"/>
-    <p:sldId id="274" r:id="rId26"/>
-    <p:sldId id="275" r:id="rId27"/>
-    <p:sldId id="276" r:id="rId28"/>
-    <p:sldId id="277" r:id="rId29"/>
-    <p:sldId id="278" r:id="rId30"/>
-    <p:sldId id="279" r:id="rId31"/>
-    <p:sldId id="280" r:id="rId32"/>
-    <p:sldId id="281" r:id="rId33"/>
-    <p:sldId id="282" r:id="rId34"/>
-    <p:sldId id="283" r:id="rId35"/>
-    <p:sldId id="284" r:id="rId36"/>
-    <p:sldId id="285" r:id="rId37"/>
-    <p:sldId id="286" r:id="rId38"/>
+    <p:sldId id="256" r:id="rId2"/>
+    <p:sldId id="257" r:id="rId3"/>
+    <p:sldId id="258" r:id="rId4"/>
+    <p:sldId id="259" r:id="rId5"/>
+    <p:sldId id="260" r:id="rId6"/>
+    <p:sldId id="261" r:id="rId7"/>
+    <p:sldId id="262" r:id="rId8"/>
+    <p:sldId id="263" r:id="rId9"/>
+    <p:sldId id="264" r:id="rId10"/>
+    <p:sldId id="265" r:id="rId11"/>
+    <p:sldId id="266" r:id="rId12"/>
+    <p:sldId id="267" r:id="rId13"/>
+    <p:sldId id="268" r:id="rId14"/>
+    <p:sldId id="269" r:id="rId15"/>
+    <p:sldId id="270" r:id="rId16"/>
+    <p:sldId id="271" r:id="rId17"/>
+    <p:sldId id="272" r:id="rId18"/>
+    <p:sldId id="273" r:id="rId19"/>
+    <p:sldId id="274" r:id="rId20"/>
+    <p:sldId id="275" r:id="rId21"/>
+    <p:sldId id="276" r:id="rId22"/>
+    <p:sldId id="277" r:id="rId23"/>
+    <p:sldId id="278" r:id="rId24"/>
+    <p:sldId id="279" r:id="rId25"/>
+    <p:sldId id="280" r:id="rId26"/>
+    <p:sldId id="281" r:id="rId27"/>
+    <p:sldId id="282" r:id="rId28"/>
+    <p:sldId id="283" r:id="rId29"/>
+    <p:sldId id="284" r:id="rId30"/>
+    <p:sldId id="285" r:id="rId31"/>
+    <p:sldId id="286" r:id="rId32"/>
   </p:sldIdLst>
-  <p:sldSz cx="12191695" cy="6858000" type="screen4x3"/>
+  <p:sldSz cx="12192000" cy="6858000"/>
   <p:notesSz cx="6858000" cy="9144000"/>
   <p:defaultTextStyle>
     <a:defPPr>
@@ -134,11 +137,71 @@
       </a:defRPr>
     </a:lvl9pPr>
   </p:defaultTextStyle>
+  <p:extLst>
+    <p:ext uri="{EFAFB233-063F-42B5-8137-9DF3F51BA10A}">
+      <p15:sldGuideLst xmlns:p15="http://schemas.microsoft.com/office/powerpoint/2012/main">
+        <p15:guide id="1" orient="horz" pos="2160">
+          <p15:clr>
+            <a:srgbClr val="A4A3A4"/>
+          </p15:clr>
+        </p15:guide>
+        <p15:guide id="2" pos="2880">
+          <p15:clr>
+            <a:srgbClr val="A4A3A4"/>
+          </p15:clr>
+        </p15:guide>
+      </p15:sldGuideLst>
+    </p:ext>
+  </p:extLst>
 </p:presentation>
 </file>
 
+<file path=ppt/changesInfos/changesInfo1.xml><?xml version="1.0" encoding="utf-8"?>
+<pc:chgInfo xmlns:a="http://schemas.openxmlformats.org/drawingml/2006/main" xmlns:r="http://schemas.openxmlformats.org/officeDocument/2006/relationships" xmlns:ac="http://schemas.microsoft.com/office/drawing/2013/main/command" xmlns:pc="http://schemas.microsoft.com/office/powerpoint/2013/main/command">
+  <pc:docChgLst>
+    <pc:chgData name="Kevin Bowen" userId="ee6702fae12807e4" providerId="LiveId" clId="{5CB6C98B-5151-4E5D-BF39-3ED613ABF9A3}"/>
+    <pc:docChg chg="modSld">
+      <pc:chgData name="Kevin Bowen" userId="ee6702fae12807e4" providerId="LiveId" clId="{5CB6C98B-5151-4E5D-BF39-3ED613ABF9A3}" dt="2026-09-07T18:29:54.778" v="33" actId="1036"/>
+      <pc:docMkLst>
+        <pc:docMk/>
+      </pc:docMkLst>
+      <pc:sldChg chg="modSp mod">
+        <pc:chgData name="Kevin Bowen" userId="ee6702fae12807e4" providerId="LiveId" clId="{5CB6C98B-5151-4E5D-BF39-3ED613ABF9A3}" dt="2026-09-07T17:32:29.105" v="32" actId="20577"/>
+        <pc:sldMkLst>
+          <pc:docMk/>
+          <pc:sldMk cId="0" sldId="262"/>
+        </pc:sldMkLst>
+        <pc:spChg chg="mod">
+          <ac:chgData name="Kevin Bowen" userId="ee6702fae12807e4" providerId="LiveId" clId="{5CB6C98B-5151-4E5D-BF39-3ED613ABF9A3}" dt="2026-09-07T17:32:29.105" v="32" actId="20577"/>
+          <ac:spMkLst>
+            <pc:docMk/>
+            <pc:sldMk cId="0" sldId="262"/>
+            <ac:spMk id="7" creationId="{00000000-0000-0000-0000-000000000000}"/>
+          </ac:spMkLst>
+        </pc:spChg>
+      </pc:sldChg>
+      <pc:sldChg chg="modSp mod">
+        <pc:chgData name="Kevin Bowen" userId="ee6702fae12807e4" providerId="LiveId" clId="{5CB6C98B-5151-4E5D-BF39-3ED613ABF9A3}" dt="2026-09-07T18:29:54.778" v="33" actId="1036"/>
+        <pc:sldMkLst>
+          <pc:docMk/>
+          <pc:sldMk cId="0" sldId="276"/>
+        </pc:sldMkLst>
+        <pc:spChg chg="mod">
+          <ac:chgData name="Kevin Bowen" userId="ee6702fae12807e4" providerId="LiveId" clId="{5CB6C98B-5151-4E5D-BF39-3ED613ABF9A3}" dt="2026-09-07T18:29:54.778" v="33" actId="1036"/>
+          <ac:spMkLst>
+            <pc:docMk/>
+            <pc:sldMk cId="0" sldId="276"/>
+            <ac:spMk id="4" creationId="{00000000-0000-0000-0000-000000000000}"/>
+          </ac:spMkLst>
+        </pc:spChg>
+      </pc:sldChg>
+    </pc:docChg>
+  </pc:docChgLst>
+</pc:chgInfo>
+</file>
+
 <file path=ppt/notesMasters/notesMaster1.xml><?xml version="1.0" encoding="utf-8"?>
-<p:notesMaster xmlns:a="http://schemas.openxmlformats.org/drawingml/2006/main" xmlns:p="http://schemas.openxmlformats.org/presentationml/2006/main" xmlns:r="http://schemas.openxmlformats.org/officeDocument/2006/relationships">
+<p:notesMaster xmlns:a="http://schemas.openxmlformats.org/drawingml/2006/main" xmlns:r="http://schemas.openxmlformats.org/officeDocument/2006/relationships" xmlns:p="http://schemas.openxmlformats.org/presentationml/2006/main">
   <p:cSld>
     <p:bg>
       <p:bgRef idx="1001">
@@ -159,241 +222,16 @@
           <a:chExt cx="0" cy="0"/>
         </a:xfrm>
       </p:grpSpPr>
-      <p:sp>
-        <p:nvSpPr>
-          <p:cNvPr id="2" name="Header Placeholder 1"/>
-          <p:cNvSpPr>
-            <a:spLocks noGrp="1"/>
-          </p:cNvSpPr>
-          <p:nvPr>
-            <p:ph type="hdr" sz="quarter"/>
-          </p:nvPr>
-        </p:nvSpPr>
-        <p:spPr>
-          <a:xfrm>
-            <a:off x="0" y="0"/>
-            <a:ext cx="2971800" cy="457200"/>
-          </a:xfrm>
-          <a:prstGeom prst="rect">
-            <a:avLst/>
-          </a:prstGeom>
-        </p:spPr>
-        <p:txBody>
-          <a:bodyPr vert="horz" lIns="91440" tIns="45720" rIns="91440" bIns="45720" rtlCol="0"/>
-          <a:lstStyle>
-            <a:lvl1pPr algn="l">
-              <a:defRPr sz="1200"/>
-            </a:lvl1pPr>
-          </a:lstStyle>
-          <a:p>
-            <a:endParaRPr lang="en-US"/>
-          </a:p>
-        </p:txBody>
-      </p:sp>
-      <p:sp>
-        <p:nvSpPr>
-          <p:cNvPr id="3" name="Date Placeholder 2"/>
-          <p:cNvSpPr>
-            <a:spLocks noGrp="1"/>
-          </p:cNvSpPr>
-          <p:nvPr>
-            <p:ph type="dt" idx="1"/>
-          </p:nvPr>
-        </p:nvSpPr>
-        <p:spPr>
-          <a:xfrm>
-            <a:off x="3884613" y="0"/>
-            <a:ext cx="2971800" cy="457200"/>
-          </a:xfrm>
-          <a:prstGeom prst="rect">
-            <a:avLst/>
-          </a:prstGeom>
-        </p:spPr>
-        <p:txBody>
-          <a:bodyPr vert="horz" lIns="91440" tIns="45720" rIns="91440" bIns="45720" rtlCol="0"/>
-          <a:lstStyle>
-            <a:lvl1pPr algn="r">
-              <a:defRPr sz="1200"/>
-            </a:lvl1pPr>
-          </a:lstStyle>
-          <a:p>
-            <a:fld id="{0F89C1C7-3DCD-1040-A9CF-14679D8B5DDD}" type="datetimeFigureOut">
-              <a:rPr lang="en-US" smtClean="0"/>
-              <a:t>10/17/16</a:t>
-            </a:fld>
-            <a:endParaRPr lang="en-US"/>
-          </a:p>
-        </p:txBody>
-      </p:sp>
-      <p:sp>
-        <p:nvSpPr>
-          <p:cNvPr id="4" name="Slide Image Placeholder 3"/>
-          <p:cNvSpPr>
-            <a:spLocks noGrp="1" noRot="1" noChangeAspect="1"/>
-          </p:cNvSpPr>
-          <p:nvPr>
-            <p:ph type="sldImg" idx="2"/>
-          </p:nvPr>
-        </p:nvSpPr>
-        <p:spPr>
-          <a:xfrm>
-            <a:off x="1143000" y="685800"/>
-            <a:ext cx="4572000" cy="3429000"/>
-          </a:xfrm>
-          <a:prstGeom prst="rect">
-            <a:avLst/>
-          </a:prstGeom>
-          <a:noFill/>
-          <a:ln w="12700">
-            <a:solidFill>
-              <a:prstClr val="black"/>
-            </a:solidFill>
-          </a:ln>
-        </p:spPr>
-        <p:txBody>
-          <a:bodyPr vert="horz" lIns="91440" tIns="45720" rIns="91440" bIns="45720" rtlCol="0" anchor="ctr"/>
-          <a:lstStyle/>
-          <a:p>
-            <a:endParaRPr lang="en-US"/>
-          </a:p>
-        </p:txBody>
-      </p:sp>
-      <p:sp>
-        <p:nvSpPr>
-          <p:cNvPr id="5" name="Notes Placeholder 4"/>
-          <p:cNvSpPr>
-            <a:spLocks noGrp="1"/>
-          </p:cNvSpPr>
-          <p:nvPr>
-            <p:ph type="body" sz="quarter" idx="3"/>
-          </p:nvPr>
-        </p:nvSpPr>
-        <p:spPr>
-          <a:xfrm>
-            <a:off x="685800" y="4343400"/>
-            <a:ext cx="5486400" cy="4114800"/>
-          </a:xfrm>
-          <a:prstGeom prst="rect">
-            <a:avLst/>
-          </a:prstGeom>
-        </p:spPr>
-        <p:txBody>
-          <a:bodyPr vert="horz" lIns="91440" tIns="45720" rIns="91440" bIns="45720" rtlCol="0"/>
-          <a:lstStyle/>
-          <a:p>
-            <a:pPr lvl="0"/>
-            <a:r>
-              <a:rPr lang="en-US" smtClean="0"/>
-              <a:t>Click to edit Master text styles</a:t>
-            </a:r>
-          </a:p>
-          <a:p>
-            <a:pPr lvl="1"/>
-            <a:r>
-              <a:rPr lang="en-US" smtClean="0"/>
-              <a:t>Second level</a:t>
-            </a:r>
-          </a:p>
-          <a:p>
-            <a:pPr lvl="2"/>
-            <a:r>
-              <a:rPr lang="en-US" smtClean="0"/>
-              <a:t>Third level</a:t>
-            </a:r>
-          </a:p>
-          <a:p>
-            <a:pPr lvl="3"/>
-            <a:r>
-              <a:rPr lang="en-US" smtClean="0"/>
-              <a:t>Fourth level</a:t>
-            </a:r>
-          </a:p>
-          <a:p>
-            <a:pPr lvl="4"/>
-            <a:r>
-              <a:rPr lang="en-US" smtClean="0"/>
-              <a:t>Fifth level</a:t>
-            </a:r>
-            <a:endParaRPr lang="en-US"/>
-          </a:p>
-        </p:txBody>
-      </p:sp>
-      <p:sp>
-        <p:nvSpPr>
-          <p:cNvPr id="6" name="Footer Placeholder 5"/>
-          <p:cNvSpPr>
-            <a:spLocks noGrp="1"/>
-          </p:cNvSpPr>
-          <p:nvPr>
-            <p:ph type="ftr" sz="quarter" idx="4"/>
-          </p:nvPr>
-        </p:nvSpPr>
-        <p:spPr>
-          <a:xfrm>
-            <a:off x="0" y="8685213"/>
-            <a:ext cx="2971800" cy="457200"/>
-          </a:xfrm>
-          <a:prstGeom prst="rect">
-            <a:avLst/>
-          </a:prstGeom>
-        </p:spPr>
-        <p:txBody>
-          <a:bodyPr vert="horz" lIns="91440" tIns="45720" rIns="91440" bIns="45720" rtlCol="0" anchor="b"/>
-          <a:lstStyle>
-            <a:lvl1pPr algn="l">
-              <a:defRPr sz="1200"/>
-            </a:lvl1pPr>
-          </a:lstStyle>
-          <a:p>
-            <a:endParaRPr lang="en-US"/>
-          </a:p>
-        </p:txBody>
-      </p:sp>
-      <p:sp>
-        <p:nvSpPr>
-          <p:cNvPr id="7" name="Slide Number Placeholder 6"/>
-          <p:cNvSpPr>
-            <a:spLocks noGrp="1"/>
-          </p:cNvSpPr>
-          <p:nvPr>
-            <p:ph type="sldNum" sz="quarter" idx="5"/>
-          </p:nvPr>
-        </p:nvSpPr>
-        <p:spPr>
-          <a:xfrm>
-            <a:off x="3884613" y="8685213"/>
-            <a:ext cx="2971800" cy="457200"/>
-          </a:xfrm>
-          <a:prstGeom prst="rect">
-            <a:avLst/>
-          </a:prstGeom>
-        </p:spPr>
-        <p:txBody>
-          <a:bodyPr vert="horz" lIns="91440" tIns="45720" rIns="91440" bIns="45720" rtlCol="0" anchor="b"/>
-          <a:lstStyle>
-            <a:lvl1pPr algn="r">
-              <a:defRPr sz="1200"/>
-            </a:lvl1pPr>
-          </a:lstStyle>
-          <a:p>
-            <a:fld id="{BB5E49A5-4136-284D-997B-48E1D791AD67}" type="slidenum">
-              <a:rPr lang="en-US" smtClean="0"/>
-              <a:t>‹#›</a:t>
-            </a:fld>
-            <a:endParaRPr lang="en-US"/>
-          </a:p>
-        </p:txBody>
-      </p:sp>
     </p:spTree>
     <p:extLst>
       <p:ext uri="{BB962C8B-B14F-4D97-AF65-F5344CB8AC3E}">
-        <p14:creationId xmlns:p14="http://schemas.microsoft.com/office/powerpoint/2010/main" val="2623252185"/>
+        <p14:creationId xmlns:p14="http://schemas.microsoft.com/office/powerpoint/2010/main" val="258277299"/>
       </p:ext>
     </p:extLst>
   </p:cSld>
   <p:clrMap bg1="lt1" tx1="dk1" bg2="lt2" tx2="dk2" accent1="accent1" accent2="accent2" accent3="accent3" accent4="accent4" accent5="accent5" accent6="accent6" hlink="hlink" folHlink="folHlink"/>
   <p:notesStyle>
-    <a:lvl1pPr marL="0" algn="l" defTabSz="457200" rtl="0" eaLnBrk="1" latinLnBrk="0" hangingPunct="1">
+    <a:lvl1pPr marL="0" algn="l" defTabSz="914400" rtl="0" eaLnBrk="1" latinLnBrk="0" hangingPunct="1">
       <a:defRPr sz="1200" kern="1200">
         <a:solidFill>
           <a:schemeClr val="tx1"/>
@@ -403,7 +241,7 @@
         <a:cs typeface="+mn-cs"/>
       </a:defRPr>
     </a:lvl1pPr>
-    <a:lvl2pPr marL="457200" algn="l" defTabSz="457200" rtl="0" eaLnBrk="1" latinLnBrk="0" hangingPunct="1">
+    <a:lvl2pPr marL="457200" algn="l" defTabSz="914400" rtl="0" eaLnBrk="1" latinLnBrk="0" hangingPunct="1">
       <a:defRPr sz="1200" kern="1200">
         <a:solidFill>
           <a:schemeClr val="tx1"/>
@@ -413,7 +251,7 @@
         <a:cs typeface="+mn-cs"/>
       </a:defRPr>
     </a:lvl2pPr>
-    <a:lvl3pPr marL="914400" algn="l" defTabSz="457200" rtl="0" eaLnBrk="1" latinLnBrk="0" hangingPunct="1">
+    <a:lvl3pPr marL="914400" algn="l" defTabSz="914400" rtl="0" eaLnBrk="1" latinLnBrk="0" hangingPunct="1">
       <a:defRPr sz="1200" kern="1200">
         <a:solidFill>
           <a:schemeClr val="tx1"/>
@@ -423,7 +261,7 @@
         <a:cs typeface="+mn-cs"/>
       </a:defRPr>
     </a:lvl3pPr>
-    <a:lvl4pPr marL="1371600" algn="l" defTabSz="457200" rtl="0" eaLnBrk="1" latinLnBrk="0" hangingPunct="1">
+    <a:lvl4pPr marL="1371600" algn="l" defTabSz="914400" rtl="0" eaLnBrk="1" latinLnBrk="0" hangingPunct="1">
       <a:defRPr sz="1200" kern="1200">
         <a:solidFill>
           <a:schemeClr val="tx1"/>
@@ -433,7 +271,7 @@
         <a:cs typeface="+mn-cs"/>
       </a:defRPr>
     </a:lvl4pPr>
-    <a:lvl5pPr marL="1828800" algn="l" defTabSz="457200" rtl="0" eaLnBrk="1" latinLnBrk="0" hangingPunct="1">
+    <a:lvl5pPr marL="1828800" algn="l" defTabSz="914400" rtl="0" eaLnBrk="1" latinLnBrk="0" hangingPunct="1">
       <a:defRPr sz="1200" kern="1200">
         <a:solidFill>
           <a:schemeClr val="tx1"/>
@@ -443,7 +281,7 @@
         <a:cs typeface="+mn-cs"/>
       </a:defRPr>
     </a:lvl5pPr>
-    <a:lvl6pPr marL="2286000" algn="l" defTabSz="457200" rtl="0" eaLnBrk="1" latinLnBrk="0" hangingPunct="1">
+    <a:lvl6pPr marL="2286000" algn="l" defTabSz="914400" rtl="0" eaLnBrk="1" latinLnBrk="0" hangingPunct="1">
       <a:defRPr sz="1200" kern="1200">
         <a:solidFill>
           <a:schemeClr val="tx1"/>
@@ -453,7 +291,7 @@
         <a:cs typeface="+mn-cs"/>
       </a:defRPr>
     </a:lvl6pPr>
-    <a:lvl7pPr marL="2743200" algn="l" defTabSz="457200" rtl="0" eaLnBrk="1" latinLnBrk="0" hangingPunct="1">
+    <a:lvl7pPr marL="2743200" algn="l" defTabSz="914400" rtl="0" eaLnBrk="1" latinLnBrk="0" hangingPunct="1">
       <a:defRPr sz="1200" kern="1200">
         <a:solidFill>
           <a:schemeClr val="tx1"/>
@@ -463,7 +301,7 @@
         <a:cs typeface="+mn-cs"/>
       </a:defRPr>
     </a:lvl7pPr>
-    <a:lvl8pPr marL="3200400" algn="l" defTabSz="457200" rtl="0" eaLnBrk="1" latinLnBrk="0" hangingPunct="1">
+    <a:lvl8pPr marL="3200400" algn="l" defTabSz="914400" rtl="0" eaLnBrk="1" latinLnBrk="0" hangingPunct="1">
       <a:defRPr sz="1200" kern="1200">
         <a:solidFill>
           <a:schemeClr val="tx1"/>
@@ -473,7 +311,7 @@
         <a:cs typeface="+mn-cs"/>
       </a:defRPr>
     </a:lvl8pPr>
-    <a:lvl9pPr marL="3657600" algn="l" defTabSz="457200" rtl="0" eaLnBrk="1" latinLnBrk="0" hangingPunct="1">
+    <a:lvl9pPr marL="3657600" algn="l" defTabSz="914400" rtl="0" eaLnBrk="1" latinLnBrk="0" hangingPunct="1">
       <a:defRPr sz="1200" kern="1200">
         <a:solidFill>
           <a:schemeClr val="tx1"/>
@@ -488,7 +326,7 @@
 </file>
 
 <file path=ppt/notesSlides/notesSlide1.xml><?xml version="1.0" encoding="utf-8"?>
-<p:notes xmlns:a="http://schemas.openxmlformats.org/drawingml/2006/main" xmlns:p="http://schemas.openxmlformats.org/presentationml/2006/main" xmlns:r="http://schemas.openxmlformats.org/officeDocument/2006/relationships">
+<p:notes xmlns:a="http://schemas.openxmlformats.org/drawingml/2006/main" xmlns:r="http://schemas.openxmlformats.org/officeDocument/2006/relationships" xmlns:p="http://schemas.openxmlformats.org/presentationml/2006/main">
   <p:cSld>
     <p:spTree>
       <p:nvGrpSpPr>
@@ -508,7 +346,7 @@
         <p:nvSpPr>
           <p:cNvPr id="2" name="Slide Image Placeholder 1"/>
           <p:cNvSpPr>
-            <a:spLocks noGrp="1"/>
+            <a:spLocks noGrp="1" noRot="1" noChangeAspect="1"/>
           </p:cNvSpPr>
           <p:nvPr>
             <p:ph type="sldImg" idx="2"/>
@@ -523,7 +361,7 @@
             <a:spLocks noGrp="1"/>
           </p:cNvSpPr>
           <p:nvPr>
-            <p:ph type="body" idx="3" sz="quarter"/>
+            <p:ph type="body" sz="quarter" idx="3"/>
           </p:nvPr>
         </p:nvSpPr>
         <p:spPr/>
@@ -563,7 +401,7 @@
             <a:spLocks noGrp="1"/>
           </p:cNvSpPr>
           <p:nvPr>
-            <p:ph type="sldNum" idx="5" sz="quarter"/>
+            <p:ph type="sldNum" sz="quarter" idx="5"/>
           </p:nvPr>
         </p:nvSpPr>
         <p:spPr/>
@@ -577,7 +415,7 @@
 </file>
 
 <file path=ppt/notesSlides/notesSlide10.xml><?xml version="1.0" encoding="utf-8"?>
-<p:notes xmlns:a="http://schemas.openxmlformats.org/drawingml/2006/main" xmlns:p="http://schemas.openxmlformats.org/presentationml/2006/main" xmlns:r="http://schemas.openxmlformats.org/officeDocument/2006/relationships">
+<p:notes xmlns:a="http://schemas.openxmlformats.org/drawingml/2006/main" xmlns:r="http://schemas.openxmlformats.org/officeDocument/2006/relationships" xmlns:p="http://schemas.openxmlformats.org/presentationml/2006/main">
   <p:cSld>
     <p:spTree>
       <p:nvGrpSpPr>
@@ -597,7 +435,7 @@
         <p:nvSpPr>
           <p:cNvPr id="2" name="Slide Image Placeholder 1"/>
           <p:cNvSpPr>
-            <a:spLocks noGrp="1"/>
+            <a:spLocks noGrp="1" noRot="1" noChangeAspect="1"/>
           </p:cNvSpPr>
           <p:nvPr>
             <p:ph type="sldImg" idx="2"/>
@@ -612,7 +450,7 @@
             <a:spLocks noGrp="1"/>
           </p:cNvSpPr>
           <p:nvPr>
-            <p:ph type="body" idx="3" sz="quarter"/>
+            <p:ph type="body" sz="quarter" idx="3"/>
           </p:nvPr>
         </p:nvSpPr>
         <p:spPr/>
@@ -660,7 +498,7 @@
             <a:spLocks noGrp="1"/>
           </p:cNvSpPr>
           <p:nvPr>
-            <p:ph type="sldNum" idx="5" sz="quarter"/>
+            <p:ph type="sldNum" sz="quarter" idx="5"/>
           </p:nvPr>
         </p:nvSpPr>
         <p:spPr/>
@@ -674,7 +512,7 @@
 </file>
 
 <file path=ppt/notesSlides/notesSlide11.xml><?xml version="1.0" encoding="utf-8"?>
-<p:notes xmlns:a="http://schemas.openxmlformats.org/drawingml/2006/main" xmlns:p="http://schemas.openxmlformats.org/presentationml/2006/main" xmlns:r="http://schemas.openxmlformats.org/officeDocument/2006/relationships">
+<p:notes xmlns:a="http://schemas.openxmlformats.org/drawingml/2006/main" xmlns:r="http://schemas.openxmlformats.org/officeDocument/2006/relationships" xmlns:p="http://schemas.openxmlformats.org/presentationml/2006/main">
   <p:cSld>
     <p:spTree>
       <p:nvGrpSpPr>
@@ -694,7 +532,7 @@
         <p:nvSpPr>
           <p:cNvPr id="2" name="Slide Image Placeholder 1"/>
           <p:cNvSpPr>
-            <a:spLocks noGrp="1"/>
+            <a:spLocks noGrp="1" noRot="1" noChangeAspect="1"/>
           </p:cNvSpPr>
           <p:nvPr>
             <p:ph type="sldImg" idx="2"/>
@@ -709,7 +547,7 @@
             <a:spLocks noGrp="1"/>
           </p:cNvSpPr>
           <p:nvPr>
-            <p:ph type="body" idx="3" sz="quarter"/>
+            <p:ph type="body" sz="quarter" idx="3"/>
           </p:nvPr>
         </p:nvSpPr>
         <p:spPr/>
@@ -733,7 +571,7 @@
             <a:spLocks noGrp="1"/>
           </p:cNvSpPr>
           <p:nvPr>
-            <p:ph type="sldNum" idx="5" sz="quarter"/>
+            <p:ph type="sldNum" sz="quarter" idx="5"/>
           </p:nvPr>
         </p:nvSpPr>
         <p:spPr/>
@@ -747,7 +585,7 @@
 </file>
 
 <file path=ppt/notesSlides/notesSlide12.xml><?xml version="1.0" encoding="utf-8"?>
-<p:notes xmlns:a="http://schemas.openxmlformats.org/drawingml/2006/main" xmlns:p="http://schemas.openxmlformats.org/presentationml/2006/main" xmlns:r="http://schemas.openxmlformats.org/officeDocument/2006/relationships">
+<p:notes xmlns:a="http://schemas.openxmlformats.org/drawingml/2006/main" xmlns:r="http://schemas.openxmlformats.org/officeDocument/2006/relationships" xmlns:p="http://schemas.openxmlformats.org/presentationml/2006/main">
   <p:cSld>
     <p:spTree>
       <p:nvGrpSpPr>
@@ -767,7 +605,7 @@
         <p:nvSpPr>
           <p:cNvPr id="2" name="Slide Image Placeholder 1"/>
           <p:cNvSpPr>
-            <a:spLocks noGrp="1"/>
+            <a:spLocks noGrp="1" noRot="1" noChangeAspect="1"/>
           </p:cNvSpPr>
           <p:nvPr>
             <p:ph type="sldImg" idx="2"/>
@@ -782,7 +620,7 @@
             <a:spLocks noGrp="1"/>
           </p:cNvSpPr>
           <p:nvPr>
-            <p:ph type="body" idx="3" sz="quarter"/>
+            <p:ph type="body" sz="quarter" idx="3"/>
           </p:nvPr>
         </p:nvSpPr>
         <p:spPr/>
@@ -830,7 +668,7 @@
             <a:spLocks noGrp="1"/>
           </p:cNvSpPr>
           <p:nvPr>
-            <p:ph type="sldNum" idx="5" sz="quarter"/>
+            <p:ph type="sldNum" sz="quarter" idx="5"/>
           </p:nvPr>
         </p:nvSpPr>
         <p:spPr/>
@@ -844,7 +682,7 @@
 </file>
 
 <file path=ppt/notesSlides/notesSlide13.xml><?xml version="1.0" encoding="utf-8"?>
-<p:notes xmlns:a="http://schemas.openxmlformats.org/drawingml/2006/main" xmlns:p="http://schemas.openxmlformats.org/presentationml/2006/main" xmlns:r="http://schemas.openxmlformats.org/officeDocument/2006/relationships">
+<p:notes xmlns:a="http://schemas.openxmlformats.org/drawingml/2006/main" xmlns:r="http://schemas.openxmlformats.org/officeDocument/2006/relationships" xmlns:p="http://schemas.openxmlformats.org/presentationml/2006/main">
   <p:cSld>
     <p:spTree>
       <p:nvGrpSpPr>
@@ -864,7 +702,7 @@
         <p:nvSpPr>
           <p:cNvPr id="2" name="Slide Image Placeholder 1"/>
           <p:cNvSpPr>
-            <a:spLocks noGrp="1"/>
+            <a:spLocks noGrp="1" noRot="1" noChangeAspect="1"/>
           </p:cNvSpPr>
           <p:nvPr>
             <p:ph type="sldImg" idx="2"/>
@@ -879,7 +717,7 @@
             <a:spLocks noGrp="1"/>
           </p:cNvSpPr>
           <p:nvPr>
-            <p:ph type="body" idx="3" sz="quarter"/>
+            <p:ph type="body" sz="quarter" idx="3"/>
           </p:nvPr>
         </p:nvSpPr>
         <p:spPr/>
@@ -919,7 +757,7 @@
             <a:spLocks noGrp="1"/>
           </p:cNvSpPr>
           <p:nvPr>
-            <p:ph type="sldNum" idx="5" sz="quarter"/>
+            <p:ph type="sldNum" sz="quarter" idx="5"/>
           </p:nvPr>
         </p:nvSpPr>
         <p:spPr/>
@@ -933,7 +771,7 @@
 </file>
 
 <file path=ppt/notesSlides/notesSlide14.xml><?xml version="1.0" encoding="utf-8"?>
-<p:notes xmlns:a="http://schemas.openxmlformats.org/drawingml/2006/main" xmlns:p="http://schemas.openxmlformats.org/presentationml/2006/main" xmlns:r="http://schemas.openxmlformats.org/officeDocument/2006/relationships">
+<p:notes xmlns:a="http://schemas.openxmlformats.org/drawingml/2006/main" xmlns:r="http://schemas.openxmlformats.org/officeDocument/2006/relationships" xmlns:p="http://schemas.openxmlformats.org/presentationml/2006/main">
   <p:cSld>
     <p:spTree>
       <p:nvGrpSpPr>
@@ -953,7 +791,7 @@
         <p:nvSpPr>
           <p:cNvPr id="2" name="Slide Image Placeholder 1"/>
           <p:cNvSpPr>
-            <a:spLocks noGrp="1"/>
+            <a:spLocks noGrp="1" noRot="1" noChangeAspect="1"/>
           </p:cNvSpPr>
           <p:nvPr>
             <p:ph type="sldImg" idx="2"/>
@@ -968,7 +806,7 @@
             <a:spLocks noGrp="1"/>
           </p:cNvSpPr>
           <p:nvPr>
-            <p:ph type="body" idx="3" sz="quarter"/>
+            <p:ph type="body" sz="quarter" idx="3"/>
           </p:nvPr>
         </p:nvSpPr>
         <p:spPr/>
@@ -1008,7 +846,7 @@
             <a:spLocks noGrp="1"/>
           </p:cNvSpPr>
           <p:nvPr>
-            <p:ph type="sldNum" idx="5" sz="quarter"/>
+            <p:ph type="sldNum" sz="quarter" idx="5"/>
           </p:nvPr>
         </p:nvSpPr>
         <p:spPr/>
@@ -1022,7 +860,7 @@
 </file>
 
 <file path=ppt/notesSlides/notesSlide15.xml><?xml version="1.0" encoding="utf-8"?>
-<p:notes xmlns:a="http://schemas.openxmlformats.org/drawingml/2006/main" xmlns:p="http://schemas.openxmlformats.org/presentationml/2006/main" xmlns:r="http://schemas.openxmlformats.org/officeDocument/2006/relationships">
+<p:notes xmlns:a="http://schemas.openxmlformats.org/drawingml/2006/main" xmlns:r="http://schemas.openxmlformats.org/officeDocument/2006/relationships" xmlns:p="http://schemas.openxmlformats.org/presentationml/2006/main">
   <p:cSld>
     <p:spTree>
       <p:nvGrpSpPr>
@@ -1042,7 +880,7 @@
         <p:nvSpPr>
           <p:cNvPr id="2" name="Slide Image Placeholder 1"/>
           <p:cNvSpPr>
-            <a:spLocks noGrp="1"/>
+            <a:spLocks noGrp="1" noRot="1" noChangeAspect="1"/>
           </p:cNvSpPr>
           <p:nvPr>
             <p:ph type="sldImg" idx="2"/>
@@ -1057,7 +895,7 @@
             <a:spLocks noGrp="1"/>
           </p:cNvSpPr>
           <p:nvPr>
-            <p:ph type="body" idx="3" sz="quarter"/>
+            <p:ph type="body" sz="quarter" idx="3"/>
           </p:nvPr>
         </p:nvSpPr>
         <p:spPr/>
@@ -1105,7 +943,7 @@
             <a:spLocks noGrp="1"/>
           </p:cNvSpPr>
           <p:nvPr>
-            <p:ph type="sldNum" idx="5" sz="quarter"/>
+            <p:ph type="sldNum" sz="quarter" idx="5"/>
           </p:nvPr>
         </p:nvSpPr>
         <p:spPr/>
@@ -1119,7 +957,7 @@
 </file>
 
 <file path=ppt/notesSlides/notesSlide16.xml><?xml version="1.0" encoding="utf-8"?>
-<p:notes xmlns:a="http://schemas.openxmlformats.org/drawingml/2006/main" xmlns:p="http://schemas.openxmlformats.org/presentationml/2006/main" xmlns:r="http://schemas.openxmlformats.org/officeDocument/2006/relationships">
+<p:notes xmlns:a="http://schemas.openxmlformats.org/drawingml/2006/main" xmlns:r="http://schemas.openxmlformats.org/officeDocument/2006/relationships" xmlns:p="http://schemas.openxmlformats.org/presentationml/2006/main">
   <p:cSld>
     <p:spTree>
       <p:nvGrpSpPr>
@@ -1139,7 +977,7 @@
         <p:nvSpPr>
           <p:cNvPr id="2" name="Slide Image Placeholder 1"/>
           <p:cNvSpPr>
-            <a:spLocks noGrp="1"/>
+            <a:spLocks noGrp="1" noRot="1" noChangeAspect="1"/>
           </p:cNvSpPr>
           <p:nvPr>
             <p:ph type="sldImg" idx="2"/>
@@ -1154,7 +992,7 @@
             <a:spLocks noGrp="1"/>
           </p:cNvSpPr>
           <p:nvPr>
-            <p:ph type="body" idx="3" sz="quarter"/>
+            <p:ph type="body" sz="quarter" idx="3"/>
           </p:nvPr>
         </p:nvSpPr>
         <p:spPr/>
@@ -1178,7 +1016,7 @@
             <a:spLocks noGrp="1"/>
           </p:cNvSpPr>
           <p:nvPr>
-            <p:ph type="sldNum" idx="5" sz="quarter"/>
+            <p:ph type="sldNum" sz="quarter" idx="5"/>
           </p:nvPr>
         </p:nvSpPr>
         <p:spPr/>
@@ -1192,7 +1030,7 @@
 </file>
 
 <file path=ppt/notesSlides/notesSlide17.xml><?xml version="1.0" encoding="utf-8"?>
-<p:notes xmlns:a="http://schemas.openxmlformats.org/drawingml/2006/main" xmlns:p="http://schemas.openxmlformats.org/presentationml/2006/main" xmlns:r="http://schemas.openxmlformats.org/officeDocument/2006/relationships">
+<p:notes xmlns:a="http://schemas.openxmlformats.org/drawingml/2006/main" xmlns:r="http://schemas.openxmlformats.org/officeDocument/2006/relationships" xmlns:p="http://schemas.openxmlformats.org/presentationml/2006/main">
   <p:cSld>
     <p:spTree>
       <p:nvGrpSpPr>
@@ -1212,7 +1050,7 @@
         <p:nvSpPr>
           <p:cNvPr id="2" name="Slide Image Placeholder 1"/>
           <p:cNvSpPr>
-            <a:spLocks noGrp="1"/>
+            <a:spLocks noGrp="1" noRot="1" noChangeAspect="1"/>
           </p:cNvSpPr>
           <p:nvPr>
             <p:ph type="sldImg" idx="2"/>
@@ -1227,7 +1065,7 @@
             <a:spLocks noGrp="1"/>
           </p:cNvSpPr>
           <p:nvPr>
-            <p:ph type="body" idx="3" sz="quarter"/>
+            <p:ph type="body" sz="quarter" idx="3"/>
           </p:nvPr>
         </p:nvSpPr>
         <p:spPr/>
@@ -1275,7 +1113,7 @@
             <a:spLocks noGrp="1"/>
           </p:cNvSpPr>
           <p:nvPr>
-            <p:ph type="sldNum" idx="5" sz="quarter"/>
+            <p:ph type="sldNum" sz="quarter" idx="5"/>
           </p:nvPr>
         </p:nvSpPr>
         <p:spPr/>
@@ -1289,7 +1127,7 @@
 </file>
 
 <file path=ppt/notesSlides/notesSlide18.xml><?xml version="1.0" encoding="utf-8"?>
-<p:notes xmlns:a="http://schemas.openxmlformats.org/drawingml/2006/main" xmlns:p="http://schemas.openxmlformats.org/presentationml/2006/main" xmlns:r="http://schemas.openxmlformats.org/officeDocument/2006/relationships">
+<p:notes xmlns:a="http://schemas.openxmlformats.org/drawingml/2006/main" xmlns:r="http://schemas.openxmlformats.org/officeDocument/2006/relationships" xmlns:p="http://schemas.openxmlformats.org/presentationml/2006/main">
   <p:cSld>
     <p:spTree>
       <p:nvGrpSpPr>
@@ -1309,7 +1147,7 @@
         <p:nvSpPr>
           <p:cNvPr id="2" name="Slide Image Placeholder 1"/>
           <p:cNvSpPr>
-            <a:spLocks noGrp="1"/>
+            <a:spLocks noGrp="1" noRot="1" noChangeAspect="1"/>
           </p:cNvSpPr>
           <p:nvPr>
             <p:ph type="sldImg" idx="2"/>
@@ -1324,7 +1162,7 @@
             <a:spLocks noGrp="1"/>
           </p:cNvSpPr>
           <p:nvPr>
-            <p:ph type="body" idx="3" sz="quarter"/>
+            <p:ph type="body" sz="quarter" idx="3"/>
           </p:nvPr>
         </p:nvSpPr>
         <p:spPr/>
@@ -1356,7 +1194,7 @@
             <a:spLocks noGrp="1"/>
           </p:cNvSpPr>
           <p:nvPr>
-            <p:ph type="sldNum" idx="5" sz="quarter"/>
+            <p:ph type="sldNum" sz="quarter" idx="5"/>
           </p:nvPr>
         </p:nvSpPr>
         <p:spPr/>
@@ -1370,7 +1208,7 @@
 </file>
 
 <file path=ppt/notesSlides/notesSlide19.xml><?xml version="1.0" encoding="utf-8"?>
-<p:notes xmlns:a="http://schemas.openxmlformats.org/drawingml/2006/main" xmlns:p="http://schemas.openxmlformats.org/presentationml/2006/main" xmlns:r="http://schemas.openxmlformats.org/officeDocument/2006/relationships">
+<p:notes xmlns:a="http://schemas.openxmlformats.org/drawingml/2006/main" xmlns:r="http://schemas.openxmlformats.org/officeDocument/2006/relationships" xmlns:p="http://schemas.openxmlformats.org/presentationml/2006/main">
   <p:cSld>
     <p:spTree>
       <p:nvGrpSpPr>
@@ -1390,7 +1228,7 @@
         <p:nvSpPr>
           <p:cNvPr id="2" name="Slide Image Placeholder 1"/>
           <p:cNvSpPr>
-            <a:spLocks noGrp="1"/>
+            <a:spLocks noGrp="1" noRot="1" noChangeAspect="1"/>
           </p:cNvSpPr>
           <p:nvPr>
             <p:ph type="sldImg" idx="2"/>
@@ -1405,7 +1243,7 @@
             <a:spLocks noGrp="1"/>
           </p:cNvSpPr>
           <p:nvPr>
-            <p:ph type="body" idx="3" sz="quarter"/>
+            <p:ph type="body" sz="quarter" idx="3"/>
           </p:nvPr>
         </p:nvSpPr>
         <p:spPr/>
@@ -1437,7 +1275,7 @@
             <a:spLocks noGrp="1"/>
           </p:cNvSpPr>
           <p:nvPr>
-            <p:ph type="sldNum" idx="5" sz="quarter"/>
+            <p:ph type="sldNum" sz="quarter" idx="5"/>
           </p:nvPr>
         </p:nvSpPr>
         <p:spPr/>
@@ -1451,7 +1289,7 @@
 </file>
 
 <file path=ppt/notesSlides/notesSlide2.xml><?xml version="1.0" encoding="utf-8"?>
-<p:notes xmlns:a="http://schemas.openxmlformats.org/drawingml/2006/main" xmlns:p="http://schemas.openxmlformats.org/presentationml/2006/main" xmlns:r="http://schemas.openxmlformats.org/officeDocument/2006/relationships">
+<p:notes xmlns:a="http://schemas.openxmlformats.org/drawingml/2006/main" xmlns:r="http://schemas.openxmlformats.org/officeDocument/2006/relationships" xmlns:p="http://schemas.openxmlformats.org/presentationml/2006/main">
   <p:cSld>
     <p:spTree>
       <p:nvGrpSpPr>
@@ -1471,7 +1309,7 @@
         <p:nvSpPr>
           <p:cNvPr id="2" name="Slide Image Placeholder 1"/>
           <p:cNvSpPr>
-            <a:spLocks noGrp="1"/>
+            <a:spLocks noGrp="1" noRot="1" noChangeAspect="1"/>
           </p:cNvSpPr>
           <p:nvPr>
             <p:ph type="sldImg" idx="2"/>
@@ -1486,7 +1324,7 @@
             <a:spLocks noGrp="1"/>
           </p:cNvSpPr>
           <p:nvPr>
-            <p:ph type="body" idx="3" sz="quarter"/>
+            <p:ph type="body" sz="quarter" idx="3"/>
           </p:nvPr>
         </p:nvSpPr>
         <p:spPr/>
@@ -1518,7 +1356,7 @@
             <a:spLocks noGrp="1"/>
           </p:cNvSpPr>
           <p:nvPr>
-            <p:ph type="sldNum" idx="5" sz="quarter"/>
+            <p:ph type="sldNum" sz="quarter" idx="5"/>
           </p:nvPr>
         </p:nvSpPr>
         <p:spPr/>
@@ -1532,7 +1370,7 @@
 </file>
 
 <file path=ppt/notesSlides/notesSlide20.xml><?xml version="1.0" encoding="utf-8"?>
-<p:notes xmlns:a="http://schemas.openxmlformats.org/drawingml/2006/main" xmlns:p="http://schemas.openxmlformats.org/presentationml/2006/main" xmlns:r="http://schemas.openxmlformats.org/officeDocument/2006/relationships">
+<p:notes xmlns:a="http://schemas.openxmlformats.org/drawingml/2006/main" xmlns:r="http://schemas.openxmlformats.org/officeDocument/2006/relationships" xmlns:p="http://schemas.openxmlformats.org/presentationml/2006/main">
   <p:cSld>
     <p:spTree>
       <p:nvGrpSpPr>
@@ -1552,7 +1390,7 @@
         <p:nvSpPr>
           <p:cNvPr id="2" name="Slide Image Placeholder 1"/>
           <p:cNvSpPr>
-            <a:spLocks noGrp="1"/>
+            <a:spLocks noGrp="1" noRot="1" noChangeAspect="1"/>
           </p:cNvSpPr>
           <p:nvPr>
             <p:ph type="sldImg" idx="2"/>
@@ -1567,7 +1405,7 @@
             <a:spLocks noGrp="1"/>
           </p:cNvSpPr>
           <p:nvPr>
-            <p:ph type="body" idx="3" sz="quarter"/>
+            <p:ph type="body" sz="quarter" idx="3"/>
           </p:nvPr>
         </p:nvSpPr>
         <p:spPr/>
@@ -1615,7 +1453,7 @@
             <a:spLocks noGrp="1"/>
           </p:cNvSpPr>
           <p:nvPr>
-            <p:ph type="sldNum" idx="5" sz="quarter"/>
+            <p:ph type="sldNum" sz="quarter" idx="5"/>
           </p:nvPr>
         </p:nvSpPr>
         <p:spPr/>
@@ -1629,7 +1467,7 @@
 </file>
 
 <file path=ppt/notesSlides/notesSlide21.xml><?xml version="1.0" encoding="utf-8"?>
-<p:notes xmlns:a="http://schemas.openxmlformats.org/drawingml/2006/main" xmlns:p="http://schemas.openxmlformats.org/presentationml/2006/main" xmlns:r="http://schemas.openxmlformats.org/officeDocument/2006/relationships">
+<p:notes xmlns:a="http://schemas.openxmlformats.org/drawingml/2006/main" xmlns:r="http://schemas.openxmlformats.org/officeDocument/2006/relationships" xmlns:p="http://schemas.openxmlformats.org/presentationml/2006/main">
   <p:cSld>
     <p:spTree>
       <p:nvGrpSpPr>
@@ -1649,7 +1487,7 @@
         <p:nvSpPr>
           <p:cNvPr id="2" name="Slide Image Placeholder 1"/>
           <p:cNvSpPr>
-            <a:spLocks noGrp="1"/>
+            <a:spLocks noGrp="1" noRot="1" noChangeAspect="1"/>
           </p:cNvSpPr>
           <p:nvPr>
             <p:ph type="sldImg" idx="2"/>
@@ -1664,7 +1502,7 @@
             <a:spLocks noGrp="1"/>
           </p:cNvSpPr>
           <p:nvPr>
-            <p:ph type="body" idx="3" sz="quarter"/>
+            <p:ph type="body" sz="quarter" idx="3"/>
           </p:nvPr>
         </p:nvSpPr>
         <p:spPr/>
@@ -1712,7 +1550,7 @@
             <a:spLocks noGrp="1"/>
           </p:cNvSpPr>
           <p:nvPr>
-            <p:ph type="sldNum" idx="5" sz="quarter"/>
+            <p:ph type="sldNum" sz="quarter" idx="5"/>
           </p:nvPr>
         </p:nvSpPr>
         <p:spPr/>
@@ -1726,7 +1564,7 @@
 </file>
 
 <file path=ppt/notesSlides/notesSlide22.xml><?xml version="1.0" encoding="utf-8"?>
-<p:notes xmlns:a="http://schemas.openxmlformats.org/drawingml/2006/main" xmlns:p="http://schemas.openxmlformats.org/presentationml/2006/main" xmlns:r="http://schemas.openxmlformats.org/officeDocument/2006/relationships">
+<p:notes xmlns:a="http://schemas.openxmlformats.org/drawingml/2006/main" xmlns:r="http://schemas.openxmlformats.org/officeDocument/2006/relationships" xmlns:p="http://schemas.openxmlformats.org/presentationml/2006/main">
   <p:cSld>
     <p:spTree>
       <p:nvGrpSpPr>
@@ -1746,7 +1584,7 @@
         <p:nvSpPr>
           <p:cNvPr id="2" name="Slide Image Placeholder 1"/>
           <p:cNvSpPr>
-            <a:spLocks noGrp="1"/>
+            <a:spLocks noGrp="1" noRot="1" noChangeAspect="1"/>
           </p:cNvSpPr>
           <p:nvPr>
             <p:ph type="sldImg" idx="2"/>
@@ -1761,7 +1599,7 @@
             <a:spLocks noGrp="1"/>
           </p:cNvSpPr>
           <p:nvPr>
-            <p:ph type="body" idx="3" sz="quarter"/>
+            <p:ph type="body" sz="quarter" idx="3"/>
           </p:nvPr>
         </p:nvSpPr>
         <p:spPr/>
@@ -1809,7 +1647,7 @@
             <a:spLocks noGrp="1"/>
           </p:cNvSpPr>
           <p:nvPr>
-            <p:ph type="sldNum" idx="5" sz="quarter"/>
+            <p:ph type="sldNum" sz="quarter" idx="5"/>
           </p:nvPr>
         </p:nvSpPr>
         <p:spPr/>
@@ -1823,7 +1661,7 @@
 </file>
 
 <file path=ppt/notesSlides/notesSlide23.xml><?xml version="1.0" encoding="utf-8"?>
-<p:notes xmlns:a="http://schemas.openxmlformats.org/drawingml/2006/main" xmlns:p="http://schemas.openxmlformats.org/presentationml/2006/main" xmlns:r="http://schemas.openxmlformats.org/officeDocument/2006/relationships">
+<p:notes xmlns:a="http://schemas.openxmlformats.org/drawingml/2006/main" xmlns:r="http://schemas.openxmlformats.org/officeDocument/2006/relationships" xmlns:p="http://schemas.openxmlformats.org/presentationml/2006/main">
   <p:cSld>
     <p:spTree>
       <p:nvGrpSpPr>
@@ -1843,7 +1681,7 @@
         <p:nvSpPr>
           <p:cNvPr id="2" name="Slide Image Placeholder 1"/>
           <p:cNvSpPr>
-            <a:spLocks noGrp="1"/>
+            <a:spLocks noGrp="1" noRot="1" noChangeAspect="1"/>
           </p:cNvSpPr>
           <p:nvPr>
             <p:ph type="sldImg" idx="2"/>
@@ -1858,7 +1696,7 @@
             <a:spLocks noGrp="1"/>
           </p:cNvSpPr>
           <p:nvPr>
-            <p:ph type="body" idx="3" sz="quarter"/>
+            <p:ph type="body" sz="quarter" idx="3"/>
           </p:nvPr>
         </p:nvSpPr>
         <p:spPr/>
@@ -1914,7 +1752,7 @@
             <a:spLocks noGrp="1"/>
           </p:cNvSpPr>
           <p:nvPr>
-            <p:ph type="sldNum" idx="5" sz="quarter"/>
+            <p:ph type="sldNum" sz="quarter" idx="5"/>
           </p:nvPr>
         </p:nvSpPr>
         <p:spPr/>
@@ -1928,7 +1766,7 @@
 </file>
 
 <file path=ppt/notesSlides/notesSlide24.xml><?xml version="1.0" encoding="utf-8"?>
-<p:notes xmlns:a="http://schemas.openxmlformats.org/drawingml/2006/main" xmlns:p="http://schemas.openxmlformats.org/presentationml/2006/main" xmlns:r="http://schemas.openxmlformats.org/officeDocument/2006/relationships">
+<p:notes xmlns:a="http://schemas.openxmlformats.org/drawingml/2006/main" xmlns:r="http://schemas.openxmlformats.org/officeDocument/2006/relationships" xmlns:p="http://schemas.openxmlformats.org/presentationml/2006/main">
   <p:cSld>
     <p:spTree>
       <p:nvGrpSpPr>
@@ -1948,7 +1786,7 @@
         <p:nvSpPr>
           <p:cNvPr id="2" name="Slide Image Placeholder 1"/>
           <p:cNvSpPr>
-            <a:spLocks noGrp="1"/>
+            <a:spLocks noGrp="1" noRot="1" noChangeAspect="1"/>
           </p:cNvSpPr>
           <p:nvPr>
             <p:ph type="sldImg" idx="2"/>
@@ -1963,7 +1801,7 @@
             <a:spLocks noGrp="1"/>
           </p:cNvSpPr>
           <p:nvPr>
-            <p:ph type="body" idx="3" sz="quarter"/>
+            <p:ph type="body" sz="quarter" idx="3"/>
           </p:nvPr>
         </p:nvSpPr>
         <p:spPr/>
@@ -2035,7 +1873,7 @@
             <a:spLocks noGrp="1"/>
           </p:cNvSpPr>
           <p:nvPr>
-            <p:ph type="sldNum" idx="5" sz="quarter"/>
+            <p:ph type="sldNum" sz="quarter" idx="5"/>
           </p:nvPr>
         </p:nvSpPr>
         <p:spPr/>
@@ -2049,7 +1887,7 @@
 </file>
 
 <file path=ppt/notesSlides/notesSlide25.xml><?xml version="1.0" encoding="utf-8"?>
-<p:notes xmlns:a="http://schemas.openxmlformats.org/drawingml/2006/main" xmlns:p="http://schemas.openxmlformats.org/presentationml/2006/main" xmlns:r="http://schemas.openxmlformats.org/officeDocument/2006/relationships">
+<p:notes xmlns:a="http://schemas.openxmlformats.org/drawingml/2006/main" xmlns:r="http://schemas.openxmlformats.org/officeDocument/2006/relationships" xmlns:p="http://schemas.openxmlformats.org/presentationml/2006/main">
   <p:cSld>
     <p:spTree>
       <p:nvGrpSpPr>
@@ -2069,7 +1907,7 @@
         <p:nvSpPr>
           <p:cNvPr id="2" name="Slide Image Placeholder 1"/>
           <p:cNvSpPr>
-            <a:spLocks noGrp="1"/>
+            <a:spLocks noGrp="1" noRot="1" noChangeAspect="1"/>
           </p:cNvSpPr>
           <p:nvPr>
             <p:ph type="sldImg" idx="2"/>
@@ -2084,7 +1922,7 @@
             <a:spLocks noGrp="1"/>
           </p:cNvSpPr>
           <p:nvPr>
-            <p:ph type="body" idx="3" sz="quarter"/>
+            <p:ph type="body" sz="quarter" idx="3"/>
           </p:nvPr>
         </p:nvSpPr>
         <p:spPr/>
@@ -2132,7 +1970,7 @@
             <a:spLocks noGrp="1"/>
           </p:cNvSpPr>
           <p:nvPr>
-            <p:ph type="sldNum" idx="5" sz="quarter"/>
+            <p:ph type="sldNum" sz="quarter" idx="5"/>
           </p:nvPr>
         </p:nvSpPr>
         <p:spPr/>
@@ -2146,7 +1984,7 @@
 </file>
 
 <file path=ppt/notesSlides/notesSlide26.xml><?xml version="1.0" encoding="utf-8"?>
-<p:notes xmlns:a="http://schemas.openxmlformats.org/drawingml/2006/main" xmlns:p="http://schemas.openxmlformats.org/presentationml/2006/main" xmlns:r="http://schemas.openxmlformats.org/officeDocument/2006/relationships">
+<p:notes xmlns:a="http://schemas.openxmlformats.org/drawingml/2006/main" xmlns:r="http://schemas.openxmlformats.org/officeDocument/2006/relationships" xmlns:p="http://schemas.openxmlformats.org/presentationml/2006/main">
   <p:cSld>
     <p:spTree>
       <p:nvGrpSpPr>
@@ -2166,7 +2004,7 @@
         <p:nvSpPr>
           <p:cNvPr id="2" name="Slide Image Placeholder 1"/>
           <p:cNvSpPr>
-            <a:spLocks noGrp="1"/>
+            <a:spLocks noGrp="1" noRot="1" noChangeAspect="1"/>
           </p:cNvSpPr>
           <p:nvPr>
             <p:ph type="sldImg" idx="2"/>
@@ -2181,7 +2019,7 @@
             <a:spLocks noGrp="1"/>
           </p:cNvSpPr>
           <p:nvPr>
-            <p:ph type="body" idx="3" sz="quarter"/>
+            <p:ph type="body" sz="quarter" idx="3"/>
           </p:nvPr>
         </p:nvSpPr>
         <p:spPr/>
@@ -2237,7 +2075,7 @@
             <a:spLocks noGrp="1"/>
           </p:cNvSpPr>
           <p:nvPr>
-            <p:ph type="sldNum" idx="5" sz="quarter"/>
+            <p:ph type="sldNum" sz="quarter" idx="5"/>
           </p:nvPr>
         </p:nvSpPr>
         <p:spPr/>
@@ -2251,7 +2089,7 @@
 </file>
 
 <file path=ppt/notesSlides/notesSlide27.xml><?xml version="1.0" encoding="utf-8"?>
-<p:notes xmlns:a="http://schemas.openxmlformats.org/drawingml/2006/main" xmlns:p="http://schemas.openxmlformats.org/presentationml/2006/main" xmlns:r="http://schemas.openxmlformats.org/officeDocument/2006/relationships">
+<p:notes xmlns:a="http://schemas.openxmlformats.org/drawingml/2006/main" xmlns:r="http://schemas.openxmlformats.org/officeDocument/2006/relationships" xmlns:p="http://schemas.openxmlformats.org/presentationml/2006/main">
   <p:cSld>
     <p:spTree>
       <p:nvGrpSpPr>
@@ -2271,7 +2109,7 @@
         <p:nvSpPr>
           <p:cNvPr id="2" name="Slide Image Placeholder 1"/>
           <p:cNvSpPr>
-            <a:spLocks noGrp="1"/>
+            <a:spLocks noGrp="1" noRot="1" noChangeAspect="1"/>
           </p:cNvSpPr>
           <p:nvPr>
             <p:ph type="sldImg" idx="2"/>
@@ -2286,7 +2124,7 @@
             <a:spLocks noGrp="1"/>
           </p:cNvSpPr>
           <p:nvPr>
-            <p:ph type="body" idx="3" sz="quarter"/>
+            <p:ph type="body" sz="quarter" idx="3"/>
           </p:nvPr>
         </p:nvSpPr>
         <p:spPr/>
@@ -2326,7 +2164,7 @@
             <a:spLocks noGrp="1"/>
           </p:cNvSpPr>
           <p:nvPr>
-            <p:ph type="sldNum" idx="5" sz="quarter"/>
+            <p:ph type="sldNum" sz="quarter" idx="5"/>
           </p:nvPr>
         </p:nvSpPr>
         <p:spPr/>
@@ -2340,7 +2178,7 @@
 </file>
 
 <file path=ppt/notesSlides/notesSlide28.xml><?xml version="1.0" encoding="utf-8"?>
-<p:notes xmlns:a="http://schemas.openxmlformats.org/drawingml/2006/main" xmlns:p="http://schemas.openxmlformats.org/presentationml/2006/main" xmlns:r="http://schemas.openxmlformats.org/officeDocument/2006/relationships">
+<p:notes xmlns:a="http://schemas.openxmlformats.org/drawingml/2006/main" xmlns:r="http://schemas.openxmlformats.org/officeDocument/2006/relationships" xmlns:p="http://schemas.openxmlformats.org/presentationml/2006/main">
   <p:cSld>
     <p:spTree>
       <p:nvGrpSpPr>
@@ -2360,7 +2198,7 @@
         <p:nvSpPr>
           <p:cNvPr id="2" name="Slide Image Placeholder 1"/>
           <p:cNvSpPr>
-            <a:spLocks noGrp="1"/>
+            <a:spLocks noGrp="1" noRot="1" noChangeAspect="1"/>
           </p:cNvSpPr>
           <p:nvPr>
             <p:ph type="sldImg" idx="2"/>
@@ -2375,7 +2213,7 @@
             <a:spLocks noGrp="1"/>
           </p:cNvSpPr>
           <p:nvPr>
-            <p:ph type="body" idx="3" sz="quarter"/>
+            <p:ph type="body" sz="quarter" idx="3"/>
           </p:nvPr>
         </p:nvSpPr>
         <p:spPr/>
@@ -2423,7 +2261,7 @@
             <a:spLocks noGrp="1"/>
           </p:cNvSpPr>
           <p:nvPr>
-            <p:ph type="sldNum" idx="5" sz="quarter"/>
+            <p:ph type="sldNum" sz="quarter" idx="5"/>
           </p:nvPr>
         </p:nvSpPr>
         <p:spPr/>
@@ -2437,7 +2275,7 @@
 </file>
 
 <file path=ppt/notesSlides/notesSlide29.xml><?xml version="1.0" encoding="utf-8"?>
-<p:notes xmlns:a="http://schemas.openxmlformats.org/drawingml/2006/main" xmlns:p="http://schemas.openxmlformats.org/presentationml/2006/main" xmlns:r="http://schemas.openxmlformats.org/officeDocument/2006/relationships">
+<p:notes xmlns:a="http://schemas.openxmlformats.org/drawingml/2006/main" xmlns:r="http://schemas.openxmlformats.org/officeDocument/2006/relationships" xmlns:p="http://schemas.openxmlformats.org/presentationml/2006/main">
   <p:cSld>
     <p:spTree>
       <p:nvGrpSpPr>
@@ -2457,7 +2295,7 @@
         <p:nvSpPr>
           <p:cNvPr id="2" name="Slide Image Placeholder 1"/>
           <p:cNvSpPr>
-            <a:spLocks noGrp="1"/>
+            <a:spLocks noGrp="1" noRot="1" noChangeAspect="1"/>
           </p:cNvSpPr>
           <p:nvPr>
             <p:ph type="sldImg" idx="2"/>
@@ -2472,7 +2310,7 @@
             <a:spLocks noGrp="1"/>
           </p:cNvSpPr>
           <p:nvPr>
-            <p:ph type="body" idx="3" sz="quarter"/>
+            <p:ph type="body" sz="quarter" idx="3"/>
           </p:nvPr>
         </p:nvSpPr>
         <p:spPr/>
@@ -2504,7 +2342,7 @@
             <a:spLocks noGrp="1"/>
           </p:cNvSpPr>
           <p:nvPr>
-            <p:ph type="sldNum" idx="5" sz="quarter"/>
+            <p:ph type="sldNum" sz="quarter" idx="5"/>
           </p:nvPr>
         </p:nvSpPr>
         <p:spPr/>
@@ -2518,7 +2356,7 @@
 </file>
 
 <file path=ppt/notesSlides/notesSlide3.xml><?xml version="1.0" encoding="utf-8"?>
-<p:notes xmlns:a="http://schemas.openxmlformats.org/drawingml/2006/main" xmlns:p="http://schemas.openxmlformats.org/presentationml/2006/main" xmlns:r="http://schemas.openxmlformats.org/officeDocument/2006/relationships">
+<p:notes xmlns:a="http://schemas.openxmlformats.org/drawingml/2006/main" xmlns:r="http://schemas.openxmlformats.org/officeDocument/2006/relationships" xmlns:p="http://schemas.openxmlformats.org/presentationml/2006/main">
   <p:cSld>
     <p:spTree>
       <p:nvGrpSpPr>
@@ -2538,7 +2376,7 @@
         <p:nvSpPr>
           <p:cNvPr id="2" name="Slide Image Placeholder 1"/>
           <p:cNvSpPr>
-            <a:spLocks noGrp="1"/>
+            <a:spLocks noGrp="1" noRot="1" noChangeAspect="1"/>
           </p:cNvSpPr>
           <p:nvPr>
             <p:ph type="sldImg" idx="2"/>
@@ -2553,7 +2391,7 @@
             <a:spLocks noGrp="1"/>
           </p:cNvSpPr>
           <p:nvPr>
-            <p:ph type="body" idx="3" sz="quarter"/>
+            <p:ph type="body" sz="quarter" idx="3"/>
           </p:nvPr>
         </p:nvSpPr>
         <p:spPr/>
@@ -2585,7 +2423,7 @@
             <a:spLocks noGrp="1"/>
           </p:cNvSpPr>
           <p:nvPr>
-            <p:ph type="sldNum" idx="5" sz="quarter"/>
+            <p:ph type="sldNum" sz="quarter" idx="5"/>
           </p:nvPr>
         </p:nvSpPr>
         <p:spPr/>
@@ -2599,7 +2437,7 @@
 </file>
 
 <file path=ppt/notesSlides/notesSlide30.xml><?xml version="1.0" encoding="utf-8"?>
-<p:notes xmlns:a="http://schemas.openxmlformats.org/drawingml/2006/main" xmlns:p="http://schemas.openxmlformats.org/presentationml/2006/main" xmlns:r="http://schemas.openxmlformats.org/officeDocument/2006/relationships">
+<p:notes xmlns:a="http://schemas.openxmlformats.org/drawingml/2006/main" xmlns:r="http://schemas.openxmlformats.org/officeDocument/2006/relationships" xmlns:p="http://schemas.openxmlformats.org/presentationml/2006/main">
   <p:cSld>
     <p:spTree>
       <p:nvGrpSpPr>
@@ -2619,7 +2457,7 @@
         <p:nvSpPr>
           <p:cNvPr id="2" name="Slide Image Placeholder 1"/>
           <p:cNvSpPr>
-            <a:spLocks noGrp="1"/>
+            <a:spLocks noGrp="1" noRot="1" noChangeAspect="1"/>
           </p:cNvSpPr>
           <p:nvPr>
             <p:ph type="sldImg" idx="2"/>
@@ -2634,7 +2472,7 @@
             <a:spLocks noGrp="1"/>
           </p:cNvSpPr>
           <p:nvPr>
-            <p:ph type="body" idx="3" sz="quarter"/>
+            <p:ph type="body" sz="quarter" idx="3"/>
           </p:nvPr>
         </p:nvSpPr>
         <p:spPr/>
@@ -2674,7 +2512,7 @@
             <a:spLocks noGrp="1"/>
           </p:cNvSpPr>
           <p:nvPr>
-            <p:ph type="sldNum" idx="5" sz="quarter"/>
+            <p:ph type="sldNum" sz="quarter" idx="5"/>
           </p:nvPr>
         </p:nvSpPr>
         <p:spPr/>
@@ -2688,7 +2526,7 @@
 </file>
 
 <file path=ppt/notesSlides/notesSlide31.xml><?xml version="1.0" encoding="utf-8"?>
-<p:notes xmlns:a="http://schemas.openxmlformats.org/drawingml/2006/main" xmlns:p="http://schemas.openxmlformats.org/presentationml/2006/main" xmlns:r="http://schemas.openxmlformats.org/officeDocument/2006/relationships">
+<p:notes xmlns:a="http://schemas.openxmlformats.org/drawingml/2006/main" xmlns:r="http://schemas.openxmlformats.org/officeDocument/2006/relationships" xmlns:p="http://schemas.openxmlformats.org/presentationml/2006/main">
   <p:cSld>
     <p:spTree>
       <p:nvGrpSpPr>
@@ -2708,7 +2546,7 @@
         <p:nvSpPr>
           <p:cNvPr id="2" name="Slide Image Placeholder 1"/>
           <p:cNvSpPr>
-            <a:spLocks noGrp="1"/>
+            <a:spLocks noGrp="1" noRot="1" noChangeAspect="1"/>
           </p:cNvSpPr>
           <p:nvPr>
             <p:ph type="sldImg" idx="2"/>
@@ -2723,7 +2561,7 @@
             <a:spLocks noGrp="1"/>
           </p:cNvSpPr>
           <p:nvPr>
-            <p:ph type="body" idx="3" sz="quarter"/>
+            <p:ph type="body" sz="quarter" idx="3"/>
           </p:nvPr>
         </p:nvSpPr>
         <p:spPr/>
@@ -2787,7 +2625,7 @@
             <a:spLocks noGrp="1"/>
           </p:cNvSpPr>
           <p:nvPr>
-            <p:ph type="sldNum" idx="5" sz="quarter"/>
+            <p:ph type="sldNum" sz="quarter" idx="5"/>
           </p:nvPr>
         </p:nvSpPr>
         <p:spPr/>
@@ -2801,7 +2639,7 @@
 </file>
 
 <file path=ppt/notesSlides/notesSlide4.xml><?xml version="1.0" encoding="utf-8"?>
-<p:notes xmlns:a="http://schemas.openxmlformats.org/drawingml/2006/main" xmlns:p="http://schemas.openxmlformats.org/presentationml/2006/main" xmlns:r="http://schemas.openxmlformats.org/officeDocument/2006/relationships">
+<p:notes xmlns:a="http://schemas.openxmlformats.org/drawingml/2006/main" xmlns:r="http://schemas.openxmlformats.org/officeDocument/2006/relationships" xmlns:p="http://schemas.openxmlformats.org/presentationml/2006/main">
   <p:cSld>
     <p:spTree>
       <p:nvGrpSpPr>
@@ -2821,7 +2659,7 @@
         <p:nvSpPr>
           <p:cNvPr id="2" name="Slide Image Placeholder 1"/>
           <p:cNvSpPr>
-            <a:spLocks noGrp="1"/>
+            <a:spLocks noGrp="1" noRot="1" noChangeAspect="1"/>
           </p:cNvSpPr>
           <p:nvPr>
             <p:ph type="sldImg" idx="2"/>
@@ -2836,7 +2674,7 @@
             <a:spLocks noGrp="1"/>
           </p:cNvSpPr>
           <p:nvPr>
-            <p:ph type="body" idx="3" sz="quarter"/>
+            <p:ph type="body" sz="quarter" idx="3"/>
           </p:nvPr>
         </p:nvSpPr>
         <p:spPr/>
@@ -2860,7 +2698,7 @@
             <a:spLocks noGrp="1"/>
           </p:cNvSpPr>
           <p:nvPr>
-            <p:ph type="sldNum" idx="5" sz="quarter"/>
+            <p:ph type="sldNum" sz="quarter" idx="5"/>
           </p:nvPr>
         </p:nvSpPr>
         <p:spPr/>
@@ -2874,7 +2712,7 @@
 </file>
 
 <file path=ppt/notesSlides/notesSlide5.xml><?xml version="1.0" encoding="utf-8"?>
-<p:notes xmlns:a="http://schemas.openxmlformats.org/drawingml/2006/main" xmlns:p="http://schemas.openxmlformats.org/presentationml/2006/main" xmlns:r="http://schemas.openxmlformats.org/officeDocument/2006/relationships">
+<p:notes xmlns:a="http://schemas.openxmlformats.org/drawingml/2006/main" xmlns:r="http://schemas.openxmlformats.org/officeDocument/2006/relationships" xmlns:p="http://schemas.openxmlformats.org/presentationml/2006/main">
   <p:cSld>
     <p:spTree>
       <p:nvGrpSpPr>
@@ -2894,7 +2732,7 @@
         <p:nvSpPr>
           <p:cNvPr id="2" name="Slide Image Placeholder 1"/>
           <p:cNvSpPr>
-            <a:spLocks noGrp="1"/>
+            <a:spLocks noGrp="1" noRot="1" noChangeAspect="1"/>
           </p:cNvSpPr>
           <p:nvPr>
             <p:ph type="sldImg" idx="2"/>
@@ -2909,7 +2747,7 @@
             <a:spLocks noGrp="1"/>
           </p:cNvSpPr>
           <p:nvPr>
-            <p:ph type="body" idx="3" sz="quarter"/>
+            <p:ph type="body" sz="quarter" idx="3"/>
           </p:nvPr>
         </p:nvSpPr>
         <p:spPr/>
@@ -2957,7 +2795,7 @@
             <a:spLocks noGrp="1"/>
           </p:cNvSpPr>
           <p:nvPr>
-            <p:ph type="sldNum" idx="5" sz="quarter"/>
+            <p:ph type="sldNum" sz="quarter" idx="5"/>
           </p:nvPr>
         </p:nvSpPr>
         <p:spPr/>
@@ -2971,7 +2809,7 @@
 </file>
 
 <file path=ppt/notesSlides/notesSlide6.xml><?xml version="1.0" encoding="utf-8"?>
-<p:notes xmlns:a="http://schemas.openxmlformats.org/drawingml/2006/main" xmlns:p="http://schemas.openxmlformats.org/presentationml/2006/main" xmlns:r="http://schemas.openxmlformats.org/officeDocument/2006/relationships">
+<p:notes xmlns:a="http://schemas.openxmlformats.org/drawingml/2006/main" xmlns:r="http://schemas.openxmlformats.org/officeDocument/2006/relationships" xmlns:p="http://schemas.openxmlformats.org/presentationml/2006/main">
   <p:cSld>
     <p:spTree>
       <p:nvGrpSpPr>
@@ -2991,7 +2829,7 @@
         <p:nvSpPr>
           <p:cNvPr id="2" name="Slide Image Placeholder 1"/>
           <p:cNvSpPr>
-            <a:spLocks noGrp="1"/>
+            <a:spLocks noGrp="1" noRot="1" noChangeAspect="1"/>
           </p:cNvSpPr>
           <p:nvPr>
             <p:ph type="sldImg" idx="2"/>
@@ -3006,7 +2844,7 @@
             <a:spLocks noGrp="1"/>
           </p:cNvSpPr>
           <p:nvPr>
-            <p:ph type="body" idx="3" sz="quarter"/>
+            <p:ph type="body" sz="quarter" idx="3"/>
           </p:nvPr>
         </p:nvSpPr>
         <p:spPr/>
@@ -3054,7 +2892,7 @@
             <a:spLocks noGrp="1"/>
           </p:cNvSpPr>
           <p:nvPr>
-            <p:ph type="sldNum" idx="5" sz="quarter"/>
+            <p:ph type="sldNum" sz="quarter" idx="5"/>
           </p:nvPr>
         </p:nvSpPr>
         <p:spPr/>
@@ -3068,7 +2906,7 @@
 </file>
 
 <file path=ppt/notesSlides/notesSlide7.xml><?xml version="1.0" encoding="utf-8"?>
-<p:notes xmlns:a="http://schemas.openxmlformats.org/drawingml/2006/main" xmlns:p="http://schemas.openxmlformats.org/presentationml/2006/main" xmlns:r="http://schemas.openxmlformats.org/officeDocument/2006/relationships">
+<p:notes xmlns:a="http://schemas.openxmlformats.org/drawingml/2006/main" xmlns:r="http://schemas.openxmlformats.org/officeDocument/2006/relationships" xmlns:p="http://schemas.openxmlformats.org/presentationml/2006/main">
   <p:cSld>
     <p:spTree>
       <p:nvGrpSpPr>
@@ -3088,7 +2926,7 @@
         <p:nvSpPr>
           <p:cNvPr id="2" name="Slide Image Placeholder 1"/>
           <p:cNvSpPr>
-            <a:spLocks noGrp="1"/>
+            <a:spLocks noGrp="1" noRot="1" noChangeAspect="1"/>
           </p:cNvSpPr>
           <p:nvPr>
             <p:ph type="sldImg" idx="2"/>
@@ -3103,7 +2941,7 @@
             <a:spLocks noGrp="1"/>
           </p:cNvSpPr>
           <p:nvPr>
-            <p:ph type="body" idx="3" sz="quarter"/>
+            <p:ph type="body" sz="quarter" idx="3"/>
           </p:nvPr>
         </p:nvSpPr>
         <p:spPr/>
@@ -3151,7 +2989,7 @@
             <a:spLocks noGrp="1"/>
           </p:cNvSpPr>
           <p:nvPr>
-            <p:ph type="sldNum" idx="5" sz="quarter"/>
+            <p:ph type="sldNum" sz="quarter" idx="5"/>
           </p:nvPr>
         </p:nvSpPr>
         <p:spPr/>
@@ -3165,7 +3003,7 @@
 </file>
 
 <file path=ppt/notesSlides/notesSlide8.xml><?xml version="1.0" encoding="utf-8"?>
-<p:notes xmlns:a="http://schemas.openxmlformats.org/drawingml/2006/main" xmlns:p="http://schemas.openxmlformats.org/presentationml/2006/main" xmlns:r="http://schemas.openxmlformats.org/officeDocument/2006/relationships">
+<p:notes xmlns:a="http://schemas.openxmlformats.org/drawingml/2006/main" xmlns:r="http://schemas.openxmlformats.org/officeDocument/2006/relationships" xmlns:p="http://schemas.openxmlformats.org/presentationml/2006/main">
   <p:cSld>
     <p:spTree>
       <p:nvGrpSpPr>
@@ -3185,7 +3023,7 @@
         <p:nvSpPr>
           <p:cNvPr id="2" name="Slide Image Placeholder 1"/>
           <p:cNvSpPr>
-            <a:spLocks noGrp="1"/>
+            <a:spLocks noGrp="1" noRot="1" noChangeAspect="1"/>
           </p:cNvSpPr>
           <p:nvPr>
             <p:ph type="sldImg" idx="2"/>
@@ -3200,7 +3038,7 @@
             <a:spLocks noGrp="1"/>
           </p:cNvSpPr>
           <p:nvPr>
-            <p:ph type="body" idx="3" sz="quarter"/>
+            <p:ph type="body" sz="quarter" idx="3"/>
           </p:nvPr>
         </p:nvSpPr>
         <p:spPr/>
@@ -3224,7 +3062,7 @@
             <a:spLocks noGrp="1"/>
           </p:cNvSpPr>
           <p:nvPr>
-            <p:ph type="sldNum" idx="5" sz="quarter"/>
+            <p:ph type="sldNum" sz="quarter" idx="5"/>
           </p:nvPr>
         </p:nvSpPr>
         <p:spPr/>
@@ -3238,7 +3076,7 @@
 </file>
 
 <file path=ppt/notesSlides/notesSlide9.xml><?xml version="1.0" encoding="utf-8"?>
-<p:notes xmlns:a="http://schemas.openxmlformats.org/drawingml/2006/main" xmlns:p="http://schemas.openxmlformats.org/presentationml/2006/main" xmlns:r="http://schemas.openxmlformats.org/officeDocument/2006/relationships">
+<p:notes xmlns:a="http://schemas.openxmlformats.org/drawingml/2006/main" xmlns:r="http://schemas.openxmlformats.org/officeDocument/2006/relationships" xmlns:p="http://schemas.openxmlformats.org/presentationml/2006/main">
   <p:cSld>
     <p:spTree>
       <p:nvGrpSpPr>
@@ -3258,7 +3096,7 @@
         <p:nvSpPr>
           <p:cNvPr id="2" name="Slide Image Placeholder 1"/>
           <p:cNvSpPr>
-            <a:spLocks noGrp="1"/>
+            <a:spLocks noGrp="1" noRot="1" noChangeAspect="1"/>
           </p:cNvSpPr>
           <p:nvPr>
             <p:ph type="sldImg" idx="2"/>
@@ -3273,7 +3111,7 @@
             <a:spLocks noGrp="1"/>
           </p:cNvSpPr>
           <p:nvPr>
-            <p:ph type="body" idx="3" sz="quarter"/>
+            <p:ph type="body" sz="quarter" idx="3"/>
           </p:nvPr>
         </p:nvSpPr>
         <p:spPr/>
@@ -3321,7 +3159,7 @@
             <a:spLocks noGrp="1"/>
           </p:cNvSpPr>
           <p:nvPr>
-            <p:ph type="sldNum" idx="5" sz="quarter"/>
+            <p:ph type="sldNum" sz="quarter" idx="5"/>
           </p:nvPr>
         </p:nvSpPr>
         <p:spPr/>
@@ -3372,10 +3210,9 @@
           <a:lstStyle/>
           <a:p>
             <a:r>
-              <a:rPr lang="en-US" smtClean="0"/>
+              <a:rPr lang="en-US"/>
               <a:t>Click to edit Master title style</a:t>
             </a:r>
-            <a:endParaRPr lang="en-US"/>
           </a:p>
         </p:txBody>
       </p:sp>
@@ -3491,10 +3328,9 @@
           </a:lstStyle>
           <a:p>
             <a:r>
-              <a:rPr lang="en-US" smtClean="0"/>
+              <a:rPr lang="en-US"/>
               <a:t>Click to edit Master subtitle style</a:t>
             </a:r>
-            <a:endParaRPr lang="en-US"/>
           </a:p>
         </p:txBody>
       </p:sp>
@@ -3515,7 +3351,7 @@
           <a:p>
             <a:fld id="{5BCAD085-E8A6-8845-BD4E-CB4CCA059FC4}" type="datetimeFigureOut">
               <a:rPr lang="en-US" smtClean="0"/>
-              <a:t>1/27/13</a:t>
+              <a:t>9/7/2026</a:t>
             </a:fld>
             <a:endParaRPr lang="en-US"/>
           </a:p>
@@ -3609,10 +3445,9 @@
           <a:lstStyle/>
           <a:p>
             <a:r>
-              <a:rPr lang="en-US" smtClean="0"/>
+              <a:rPr lang="en-US"/>
               <a:t>Click to edit Master title style</a:t>
             </a:r>
-            <a:endParaRPr lang="en-US"/>
           </a:p>
         </p:txBody>
       </p:sp>
@@ -3633,38 +3468,37 @@
           <a:p>
             <a:pPr lvl="0"/>
             <a:r>
-              <a:rPr lang="en-US" smtClean="0"/>
+              <a:rPr lang="en-US"/>
               <a:t>Click to edit Master text styles</a:t>
             </a:r>
           </a:p>
           <a:p>
             <a:pPr lvl="1"/>
             <a:r>
-              <a:rPr lang="en-US" smtClean="0"/>
+              <a:rPr lang="en-US"/>
               <a:t>Second level</a:t>
             </a:r>
           </a:p>
           <a:p>
             <a:pPr lvl="2"/>
             <a:r>
-              <a:rPr lang="en-US" smtClean="0"/>
+              <a:rPr lang="en-US"/>
               <a:t>Third level</a:t>
             </a:r>
           </a:p>
           <a:p>
             <a:pPr lvl="3"/>
             <a:r>
-              <a:rPr lang="en-US" smtClean="0"/>
+              <a:rPr lang="en-US"/>
               <a:t>Fourth level</a:t>
             </a:r>
           </a:p>
           <a:p>
             <a:pPr lvl="4"/>
             <a:r>
-              <a:rPr lang="en-US" smtClean="0"/>
+              <a:rPr lang="en-US"/>
               <a:t>Fifth level</a:t>
             </a:r>
-            <a:endParaRPr lang="en-US"/>
           </a:p>
         </p:txBody>
       </p:sp>
@@ -3685,7 +3519,7 @@
           <a:p>
             <a:fld id="{5BCAD085-E8A6-8845-BD4E-CB4CCA059FC4}" type="datetimeFigureOut">
               <a:rPr lang="en-US" smtClean="0"/>
-              <a:t>1/27/13</a:t>
+              <a:t>9/7/2026</a:t>
             </a:fld>
             <a:endParaRPr lang="en-US"/>
           </a:p>
@@ -3784,10 +3618,9 @@
           <a:lstStyle/>
           <a:p>
             <a:r>
-              <a:rPr lang="en-US" smtClean="0"/>
+              <a:rPr lang="en-US"/>
               <a:t>Click to edit Master title style</a:t>
             </a:r>
-            <a:endParaRPr lang="en-US"/>
           </a:p>
         </p:txBody>
       </p:sp>
@@ -3813,38 +3646,37 @@
           <a:p>
             <a:pPr lvl="0"/>
             <a:r>
-              <a:rPr lang="en-US" smtClean="0"/>
+              <a:rPr lang="en-US"/>
               <a:t>Click to edit Master text styles</a:t>
             </a:r>
           </a:p>
           <a:p>
             <a:pPr lvl="1"/>
             <a:r>
-              <a:rPr lang="en-US" smtClean="0"/>
+              <a:rPr lang="en-US"/>
               <a:t>Second level</a:t>
             </a:r>
           </a:p>
           <a:p>
             <a:pPr lvl="2"/>
             <a:r>
-              <a:rPr lang="en-US" smtClean="0"/>
+              <a:rPr lang="en-US"/>
               <a:t>Third level</a:t>
             </a:r>
           </a:p>
           <a:p>
             <a:pPr lvl="3"/>
             <a:r>
-              <a:rPr lang="en-US" smtClean="0"/>
+              <a:rPr lang="en-US"/>
               <a:t>Fourth level</a:t>
             </a:r>
           </a:p>
           <a:p>
             <a:pPr lvl="4"/>
             <a:r>
-              <a:rPr lang="en-US" smtClean="0"/>
+              <a:rPr lang="en-US"/>
               <a:t>Fifth level</a:t>
             </a:r>
-            <a:endParaRPr lang="en-US"/>
           </a:p>
         </p:txBody>
       </p:sp>
@@ -3865,7 +3697,7 @@
           <a:p>
             <a:fld id="{5BCAD085-E8A6-8845-BD4E-CB4CCA059FC4}" type="datetimeFigureOut">
               <a:rPr lang="en-US" smtClean="0"/>
-              <a:t>1/27/13</a:t>
+              <a:t>9/7/2026</a:t>
             </a:fld>
             <a:endParaRPr lang="en-US"/>
           </a:p>
@@ -3959,10 +3791,9 @@
           <a:lstStyle/>
           <a:p>
             <a:r>
-              <a:rPr lang="en-US" smtClean="0"/>
+              <a:rPr lang="en-US"/>
               <a:t>Click to edit Master title style</a:t>
             </a:r>
-            <a:endParaRPr lang="en-US"/>
           </a:p>
         </p:txBody>
       </p:sp>
@@ -3983,38 +3814,37 @@
           <a:p>
             <a:pPr lvl="0"/>
             <a:r>
-              <a:rPr lang="en-US" smtClean="0"/>
+              <a:rPr lang="en-US"/>
               <a:t>Click to edit Master text styles</a:t>
             </a:r>
           </a:p>
           <a:p>
             <a:pPr lvl="1"/>
             <a:r>
-              <a:rPr lang="en-US" smtClean="0"/>
+              <a:rPr lang="en-US"/>
               <a:t>Second level</a:t>
             </a:r>
           </a:p>
           <a:p>
             <a:pPr lvl="2"/>
             <a:r>
-              <a:rPr lang="en-US" smtClean="0"/>
+              <a:rPr lang="en-US"/>
               <a:t>Third level</a:t>
             </a:r>
           </a:p>
           <a:p>
             <a:pPr lvl="3"/>
             <a:r>
-              <a:rPr lang="en-US" smtClean="0"/>
+              <a:rPr lang="en-US"/>
               <a:t>Fourth level</a:t>
             </a:r>
           </a:p>
           <a:p>
             <a:pPr lvl="4"/>
             <a:r>
-              <a:rPr lang="en-US" smtClean="0"/>
+              <a:rPr lang="en-US"/>
               <a:t>Fifth level</a:t>
             </a:r>
-            <a:endParaRPr lang="en-US"/>
           </a:p>
         </p:txBody>
       </p:sp>
@@ -4035,7 +3865,7 @@
           <a:p>
             <a:fld id="{5BCAD085-E8A6-8845-BD4E-CB4CCA059FC4}" type="datetimeFigureOut">
               <a:rPr lang="en-US" smtClean="0"/>
-              <a:t>1/27/13</a:t>
+              <a:t>9/7/2026</a:t>
             </a:fld>
             <a:endParaRPr lang="en-US"/>
           </a:p>
@@ -4138,10 +3968,9 @@
           </a:lstStyle>
           <a:p>
             <a:r>
-              <a:rPr lang="en-US" smtClean="0"/>
+              <a:rPr lang="en-US"/>
               <a:t>Click to edit Master title style</a:t>
             </a:r>
-            <a:endParaRPr lang="en-US"/>
           </a:p>
         </p:txBody>
       </p:sp>
@@ -4258,7 +4087,7 @@
           <a:p>
             <a:pPr lvl="0"/>
             <a:r>
-              <a:rPr lang="en-US" smtClean="0"/>
+              <a:rPr lang="en-US"/>
               <a:t>Click to edit Master text styles</a:t>
             </a:r>
           </a:p>
@@ -4281,7 +4110,7 @@
           <a:p>
             <a:fld id="{5BCAD085-E8A6-8845-BD4E-CB4CCA059FC4}" type="datetimeFigureOut">
               <a:rPr lang="en-US" smtClean="0"/>
-              <a:t>1/27/13</a:t>
+              <a:t>9/7/2026</a:t>
             </a:fld>
             <a:endParaRPr lang="en-US"/>
           </a:p>
@@ -4375,10 +4204,9 @@
           <a:lstStyle/>
           <a:p>
             <a:r>
-              <a:rPr lang="en-US" smtClean="0"/>
+              <a:rPr lang="en-US"/>
               <a:t>Click to edit Master title style</a:t>
             </a:r>
-            <a:endParaRPr lang="en-US"/>
           </a:p>
         </p:txBody>
       </p:sp>
@@ -4432,38 +4260,37 @@
           <a:p>
             <a:pPr lvl="0"/>
             <a:r>
-              <a:rPr lang="en-US" smtClean="0"/>
+              <a:rPr lang="en-US"/>
               <a:t>Click to edit Master text styles</a:t>
             </a:r>
           </a:p>
           <a:p>
             <a:pPr lvl="1"/>
             <a:r>
-              <a:rPr lang="en-US" smtClean="0"/>
+              <a:rPr lang="en-US"/>
               <a:t>Second level</a:t>
             </a:r>
           </a:p>
           <a:p>
             <a:pPr lvl="2"/>
             <a:r>
-              <a:rPr lang="en-US" smtClean="0"/>
+              <a:rPr lang="en-US"/>
               <a:t>Third level</a:t>
             </a:r>
           </a:p>
           <a:p>
             <a:pPr lvl="3"/>
             <a:r>
-              <a:rPr lang="en-US" smtClean="0"/>
+              <a:rPr lang="en-US"/>
               <a:t>Fourth level</a:t>
             </a:r>
           </a:p>
           <a:p>
             <a:pPr lvl="4"/>
             <a:r>
-              <a:rPr lang="en-US" smtClean="0"/>
+              <a:rPr lang="en-US"/>
               <a:t>Fifth level</a:t>
             </a:r>
-            <a:endParaRPr lang="en-US"/>
           </a:p>
         </p:txBody>
       </p:sp>
@@ -4517,38 +4344,37 @@
           <a:p>
             <a:pPr lvl="0"/>
             <a:r>
-              <a:rPr lang="en-US" smtClean="0"/>
+              <a:rPr lang="en-US"/>
               <a:t>Click to edit Master text styles</a:t>
             </a:r>
           </a:p>
           <a:p>
             <a:pPr lvl="1"/>
             <a:r>
-              <a:rPr lang="en-US" smtClean="0"/>
+              <a:rPr lang="en-US"/>
               <a:t>Second level</a:t>
             </a:r>
           </a:p>
           <a:p>
             <a:pPr lvl="2"/>
             <a:r>
-              <a:rPr lang="en-US" smtClean="0"/>
+              <a:rPr lang="en-US"/>
               <a:t>Third level</a:t>
             </a:r>
           </a:p>
           <a:p>
             <a:pPr lvl="3"/>
             <a:r>
-              <a:rPr lang="en-US" smtClean="0"/>
+              <a:rPr lang="en-US"/>
               <a:t>Fourth level</a:t>
             </a:r>
           </a:p>
           <a:p>
             <a:pPr lvl="4"/>
             <a:r>
-              <a:rPr lang="en-US" smtClean="0"/>
+              <a:rPr lang="en-US"/>
               <a:t>Fifth level</a:t>
             </a:r>
-            <a:endParaRPr lang="en-US"/>
           </a:p>
         </p:txBody>
       </p:sp>
@@ -4569,7 +4395,7 @@
           <a:p>
             <a:fld id="{5BCAD085-E8A6-8845-BD4E-CB4CCA059FC4}" type="datetimeFigureOut">
               <a:rPr lang="en-US" smtClean="0"/>
-              <a:t>1/27/13</a:t>
+              <a:t>9/7/2026</a:t>
             </a:fld>
             <a:endParaRPr lang="en-US"/>
           </a:p>
@@ -4667,10 +4493,9 @@
           </a:lstStyle>
           <a:p>
             <a:r>
-              <a:rPr lang="en-US" smtClean="0"/>
+              <a:rPr lang="en-US"/>
               <a:t>Click to edit Master title style</a:t>
             </a:r>
-            <a:endParaRPr lang="en-US"/>
           </a:p>
         </p:txBody>
       </p:sp>
@@ -4733,7 +4558,7 @@
           <a:p>
             <a:pPr lvl="0"/>
             <a:r>
-              <a:rPr lang="en-US" smtClean="0"/>
+              <a:rPr lang="en-US"/>
               <a:t>Click to edit Master text styles</a:t>
             </a:r>
           </a:p>
@@ -4789,38 +4614,37 @@
           <a:p>
             <a:pPr lvl="0"/>
             <a:r>
-              <a:rPr lang="en-US" smtClean="0"/>
+              <a:rPr lang="en-US"/>
               <a:t>Click to edit Master text styles</a:t>
             </a:r>
           </a:p>
           <a:p>
             <a:pPr lvl="1"/>
             <a:r>
-              <a:rPr lang="en-US" smtClean="0"/>
+              <a:rPr lang="en-US"/>
               <a:t>Second level</a:t>
             </a:r>
           </a:p>
           <a:p>
             <a:pPr lvl="2"/>
             <a:r>
-              <a:rPr lang="en-US" smtClean="0"/>
+              <a:rPr lang="en-US"/>
               <a:t>Third level</a:t>
             </a:r>
           </a:p>
           <a:p>
             <a:pPr lvl="3"/>
             <a:r>
-              <a:rPr lang="en-US" smtClean="0"/>
+              <a:rPr lang="en-US"/>
               <a:t>Fourth level</a:t>
             </a:r>
           </a:p>
           <a:p>
             <a:pPr lvl="4"/>
             <a:r>
-              <a:rPr lang="en-US" smtClean="0"/>
+              <a:rPr lang="en-US"/>
               <a:t>Fifth level</a:t>
             </a:r>
-            <a:endParaRPr lang="en-US"/>
           </a:p>
         </p:txBody>
       </p:sp>
@@ -4883,7 +4707,7 @@
           <a:p>
             <a:pPr lvl="0"/>
             <a:r>
-              <a:rPr lang="en-US" smtClean="0"/>
+              <a:rPr lang="en-US"/>
               <a:t>Click to edit Master text styles</a:t>
             </a:r>
           </a:p>
@@ -4939,38 +4763,37 @@
           <a:p>
             <a:pPr lvl="0"/>
             <a:r>
-              <a:rPr lang="en-US" smtClean="0"/>
+              <a:rPr lang="en-US"/>
               <a:t>Click to edit Master text styles</a:t>
             </a:r>
           </a:p>
           <a:p>
             <a:pPr lvl="1"/>
             <a:r>
-              <a:rPr lang="en-US" smtClean="0"/>
+              <a:rPr lang="en-US"/>
               <a:t>Second level</a:t>
             </a:r>
           </a:p>
           <a:p>
             <a:pPr lvl="2"/>
             <a:r>
-              <a:rPr lang="en-US" smtClean="0"/>
+              <a:rPr lang="en-US"/>
               <a:t>Third level</a:t>
             </a:r>
           </a:p>
           <a:p>
             <a:pPr lvl="3"/>
             <a:r>
-              <a:rPr lang="en-US" smtClean="0"/>
+              <a:rPr lang="en-US"/>
               <a:t>Fourth level</a:t>
             </a:r>
           </a:p>
           <a:p>
             <a:pPr lvl="4"/>
             <a:r>
-              <a:rPr lang="en-US" smtClean="0"/>
+              <a:rPr lang="en-US"/>
               <a:t>Fifth level</a:t>
             </a:r>
-            <a:endParaRPr lang="en-US"/>
           </a:p>
         </p:txBody>
       </p:sp>
@@ -4991,7 +4814,7 @@
           <a:p>
             <a:fld id="{5BCAD085-E8A6-8845-BD4E-CB4CCA059FC4}" type="datetimeFigureOut">
               <a:rPr lang="en-US" smtClean="0"/>
-              <a:t>1/27/13</a:t>
+              <a:t>9/7/2026</a:t>
             </a:fld>
             <a:endParaRPr lang="en-US"/>
           </a:p>
@@ -5085,10 +4908,9 @@
           <a:lstStyle/>
           <a:p>
             <a:r>
-              <a:rPr lang="en-US" smtClean="0"/>
+              <a:rPr lang="en-US"/>
               <a:t>Click to edit Master title style</a:t>
             </a:r>
-            <a:endParaRPr lang="en-US"/>
           </a:p>
         </p:txBody>
       </p:sp>
@@ -5109,7 +4931,7 @@
           <a:p>
             <a:fld id="{5BCAD085-E8A6-8845-BD4E-CB4CCA059FC4}" type="datetimeFigureOut">
               <a:rPr lang="en-US" smtClean="0"/>
-              <a:t>1/27/13</a:t>
+              <a:t>9/7/2026</a:t>
             </a:fld>
             <a:endParaRPr lang="en-US"/>
           </a:p>
@@ -5204,7 +5026,7 @@
           <a:p>
             <a:fld id="{5BCAD085-E8A6-8845-BD4E-CB4CCA059FC4}" type="datetimeFigureOut">
               <a:rPr lang="en-US" smtClean="0"/>
-              <a:t>1/27/13</a:t>
+              <a:t>9/7/2026</a:t>
             </a:fld>
             <a:endParaRPr lang="en-US"/>
           </a:p>
@@ -5307,10 +5129,9 @@
           </a:lstStyle>
           <a:p>
             <a:r>
-              <a:rPr lang="en-US" smtClean="0"/>
+              <a:rPr lang="en-US"/>
               <a:t>Click to edit Master title style</a:t>
             </a:r>
-            <a:endParaRPr lang="en-US"/>
           </a:p>
         </p:txBody>
       </p:sp>
@@ -5364,38 +5185,37 @@
           <a:p>
             <a:pPr lvl="0"/>
             <a:r>
-              <a:rPr lang="en-US" smtClean="0"/>
+              <a:rPr lang="en-US"/>
               <a:t>Click to edit Master text styles</a:t>
             </a:r>
           </a:p>
           <a:p>
             <a:pPr lvl="1"/>
             <a:r>
-              <a:rPr lang="en-US" smtClean="0"/>
+              <a:rPr lang="en-US"/>
               <a:t>Second level</a:t>
             </a:r>
           </a:p>
           <a:p>
             <a:pPr lvl="2"/>
             <a:r>
-              <a:rPr lang="en-US" smtClean="0"/>
+              <a:rPr lang="en-US"/>
               <a:t>Third level</a:t>
             </a:r>
           </a:p>
           <a:p>
             <a:pPr lvl="3"/>
             <a:r>
-              <a:rPr lang="en-US" smtClean="0"/>
+              <a:rPr lang="en-US"/>
               <a:t>Fourth level</a:t>
             </a:r>
           </a:p>
           <a:p>
             <a:pPr lvl="4"/>
             <a:r>
-              <a:rPr lang="en-US" smtClean="0"/>
+              <a:rPr lang="en-US"/>
               <a:t>Fifth level</a:t>
             </a:r>
-            <a:endParaRPr lang="en-US"/>
           </a:p>
         </p:txBody>
       </p:sp>
@@ -5458,7 +5278,7 @@
           <a:p>
             <a:pPr lvl="0"/>
             <a:r>
-              <a:rPr lang="en-US" smtClean="0"/>
+              <a:rPr lang="en-US"/>
               <a:t>Click to edit Master text styles</a:t>
             </a:r>
           </a:p>
@@ -5481,7 +5301,7 @@
           <a:p>
             <a:fld id="{5BCAD085-E8A6-8845-BD4E-CB4CCA059FC4}" type="datetimeFigureOut">
               <a:rPr lang="en-US" smtClean="0"/>
-              <a:t>1/27/13</a:t>
+              <a:t>9/7/2026</a:t>
             </a:fld>
             <a:endParaRPr lang="en-US"/>
           </a:p>
@@ -5584,10 +5404,9 @@
           </a:lstStyle>
           <a:p>
             <a:r>
-              <a:rPr lang="en-US" smtClean="0"/>
+              <a:rPr lang="en-US"/>
               <a:t>Click to edit Master title style</a:t>
             </a:r>
-            <a:endParaRPr lang="en-US"/>
           </a:p>
         </p:txBody>
       </p:sp>
@@ -5711,7 +5530,7 @@
           <a:p>
             <a:pPr lvl="0"/>
             <a:r>
-              <a:rPr lang="en-US" smtClean="0"/>
+              <a:rPr lang="en-US"/>
               <a:t>Click to edit Master text styles</a:t>
             </a:r>
           </a:p>
@@ -5734,7 +5553,7 @@
           <a:p>
             <a:fld id="{5BCAD085-E8A6-8845-BD4E-CB4CCA059FC4}" type="datetimeFigureOut">
               <a:rPr lang="en-US" smtClean="0"/>
-              <a:t>1/27/13</a:t>
+              <a:t>9/7/2026</a:t>
             </a:fld>
             <a:endParaRPr lang="en-US"/>
           </a:p>
@@ -5843,10 +5662,9 @@
           <a:lstStyle/>
           <a:p>
             <a:r>
-              <a:rPr lang="en-US" smtClean="0"/>
+              <a:rPr lang="en-US"/>
               <a:t>Click to edit Master title style</a:t>
             </a:r>
-            <a:endParaRPr lang="en-US"/>
           </a:p>
         </p:txBody>
       </p:sp>
@@ -5877,38 +5695,37 @@
           <a:p>
             <a:pPr lvl="0"/>
             <a:r>
-              <a:rPr lang="en-US" smtClean="0"/>
+              <a:rPr lang="en-US"/>
               <a:t>Click to edit Master text styles</a:t>
             </a:r>
           </a:p>
           <a:p>
             <a:pPr lvl="1"/>
             <a:r>
-              <a:rPr lang="en-US" smtClean="0"/>
+              <a:rPr lang="en-US"/>
               <a:t>Second level</a:t>
             </a:r>
           </a:p>
           <a:p>
             <a:pPr lvl="2"/>
             <a:r>
-              <a:rPr lang="en-US" smtClean="0"/>
+              <a:rPr lang="en-US"/>
               <a:t>Third level</a:t>
             </a:r>
           </a:p>
           <a:p>
             <a:pPr lvl="3"/>
             <a:r>
-              <a:rPr lang="en-US" smtClean="0"/>
+              <a:rPr lang="en-US"/>
               <a:t>Fourth level</a:t>
             </a:r>
           </a:p>
           <a:p>
             <a:pPr lvl="4"/>
             <a:r>
-              <a:rPr lang="en-US" smtClean="0"/>
+              <a:rPr lang="en-US"/>
               <a:t>Fifth level</a:t>
             </a:r>
-            <a:endParaRPr lang="en-US"/>
           </a:p>
         </p:txBody>
       </p:sp>
@@ -5947,7 +5764,7 @@
           <a:p>
             <a:fld id="{5BCAD085-E8A6-8845-BD4E-CB4CCA059FC4}" type="datetimeFigureOut">
               <a:rPr lang="en-US" smtClean="0"/>
-              <a:t>1/27/13</a:t>
+              <a:t>9/7/2026</a:t>
             </a:fld>
             <a:endParaRPr lang="en-US"/>
           </a:p>
@@ -6306,7 +6123,7 @@
 </file>
 
 <file path=ppt/slides/slide1.xml><?xml version="1.0" encoding="utf-8"?>
-<p:sld xmlns:a="http://schemas.openxmlformats.org/drawingml/2006/main" xmlns:p="http://schemas.openxmlformats.org/presentationml/2006/main" xmlns:r="http://schemas.openxmlformats.org/officeDocument/2006/relationships">
+<p:sld xmlns:a="http://schemas.openxmlformats.org/drawingml/2006/main" xmlns:r="http://schemas.openxmlformats.org/officeDocument/2006/relationships" xmlns:p="http://schemas.openxmlformats.org/presentationml/2006/main">
   <p:cSld>
     <p:spTree>
       <p:nvGrpSpPr>
@@ -6314,7 +6131,14 @@
         <p:cNvGrpSpPr/>
         <p:nvPr/>
       </p:nvGrpSpPr>
-      <p:grpSpPr/>
+      <p:grpSpPr>
+        <a:xfrm>
+          <a:off x="0" y="0"/>
+          <a:ext cx="0" cy="0"/>
+          <a:chOff x="0" y="0"/>
+          <a:chExt cx="0" cy="0"/>
+        </a:xfrm>
+      </p:grpSpPr>
       <p:sp>
         <p:nvSpPr>
           <p:cNvPr id="2" name="Rectangle 1"/>
@@ -6356,6 +6180,7 @@
           <a:lstStyle/>
           <a:p>
             <a:pPr algn="ctr"/>
+            <a:endParaRPr/>
           </a:p>
         </p:txBody>
       </p:sp>
@@ -6368,7 +6193,7 @@
           <p:nvPr/>
         </p:nvPicPr>
         <p:blipFill>
-          <a:blip r:embed="rId2"/>
+          <a:blip r:embed="rId3"/>
           <a:stretch>
             <a:fillRect/>
           </a:stretch>
@@ -6613,6 +6438,12 @@
                 <a:latin typeface="Calibri"/>
               </a:defRPr>
             </a:pPr>
+            <a:endParaRPr sz="1200" b="0">
+              <a:solidFill>
+                <a:srgbClr val="666666"/>
+              </a:solidFill>
+              <a:latin typeface="Calibri"/>
+            </a:endParaRPr>
           </a:p>
           <a:p>
             <a:pPr algn="l">
@@ -6754,6 +6585,12 @@
                 <a:latin typeface="Calibri"/>
               </a:defRPr>
             </a:pPr>
+            <a:endParaRPr sz="1200" b="0">
+              <a:solidFill>
+                <a:srgbClr val="666666"/>
+              </a:solidFill>
+              <a:latin typeface="Calibri"/>
+            </a:endParaRPr>
           </a:p>
           <a:p>
             <a:pPr algn="l">
@@ -6791,7 +6628,7 @@
           <p:nvPr/>
         </p:nvPicPr>
         <p:blipFill>
-          <a:blip r:embed="rId3"/>
+          <a:blip r:embed="rId4"/>
           <a:stretch>
             <a:fillRect/>
           </a:stretch>
@@ -6863,7 +6700,7 @@
 </file>
 
 <file path=ppt/slides/slide10.xml><?xml version="1.0" encoding="utf-8"?>
-<p:sld xmlns:a="http://schemas.openxmlformats.org/drawingml/2006/main" xmlns:p="http://schemas.openxmlformats.org/presentationml/2006/main" xmlns:r="http://schemas.openxmlformats.org/officeDocument/2006/relationships">
+<p:sld xmlns:a="http://schemas.openxmlformats.org/drawingml/2006/main" xmlns:r="http://schemas.openxmlformats.org/officeDocument/2006/relationships" xmlns:p="http://schemas.openxmlformats.org/presentationml/2006/main">
   <p:cSld>
     <p:spTree>
       <p:nvGrpSpPr>
@@ -6871,7 +6708,14 @@
         <p:cNvGrpSpPr/>
         <p:nvPr/>
       </p:nvGrpSpPr>
-      <p:grpSpPr/>
+      <p:grpSpPr>
+        <a:xfrm>
+          <a:off x="0" y="0"/>
+          <a:ext cx="0" cy="0"/>
+          <a:chOff x="0" y="0"/>
+          <a:chExt cx="0" cy="0"/>
+        </a:xfrm>
+      </p:grpSpPr>
       <p:sp>
         <p:nvSpPr>
           <p:cNvPr id="2" name="Title 1"/>
@@ -6959,6 +6803,7 @@
           <a:lstStyle/>
           <a:p>
             <a:pPr algn="ctr"/>
+            <a:endParaRPr/>
           </a:p>
         </p:txBody>
       </p:sp>
@@ -7167,6 +7012,12 @@
                 <a:latin typeface="Calibri"/>
               </a:defRPr>
             </a:pPr>
+            <a:endParaRPr sz="2100" b="0">
+              <a:solidFill>
+                <a:srgbClr val="222222"/>
+              </a:solidFill>
+              <a:latin typeface="Calibri"/>
+            </a:endParaRPr>
           </a:p>
           <a:p>
             <a:pPr algn="l">
@@ -7233,6 +7084,12 @@
                 <a:latin typeface="Calibri"/>
               </a:defRPr>
             </a:pPr>
+            <a:endParaRPr sz="2100" b="0">
+              <a:solidFill>
+                <a:srgbClr val="222222"/>
+              </a:solidFill>
+              <a:latin typeface="Calibri"/>
+            </a:endParaRPr>
           </a:p>
           <a:p>
             <a:pPr algn="l">
@@ -7372,6 +7229,12 @@
                 <a:latin typeface="Calibri"/>
               </a:defRPr>
             </a:pPr>
+            <a:endParaRPr sz="2200" b="0">
+              <a:solidFill>
+                <a:srgbClr val="222222"/>
+              </a:solidFill>
+              <a:latin typeface="Calibri"/>
+            </a:endParaRPr>
           </a:p>
           <a:p>
             <a:pPr algn="l">
@@ -7409,7 +7272,7 @@
 </file>
 
 <file path=ppt/slides/slide11.xml><?xml version="1.0" encoding="utf-8"?>
-<p:sld xmlns:a="http://schemas.openxmlformats.org/drawingml/2006/main" xmlns:p="http://schemas.openxmlformats.org/presentationml/2006/main" xmlns:r="http://schemas.openxmlformats.org/officeDocument/2006/relationships">
+<p:sld xmlns:a="http://schemas.openxmlformats.org/drawingml/2006/main" xmlns:r="http://schemas.openxmlformats.org/officeDocument/2006/relationships" xmlns:p="http://schemas.openxmlformats.org/presentationml/2006/main">
   <p:cSld>
     <p:spTree>
       <p:nvGrpSpPr>
@@ -7417,7 +7280,14 @@
         <p:cNvGrpSpPr/>
         <p:nvPr/>
       </p:nvGrpSpPr>
-      <p:grpSpPr/>
+      <p:grpSpPr>
+        <a:xfrm>
+          <a:off x="0" y="0"/>
+          <a:ext cx="0" cy="0"/>
+          <a:chOff x="0" y="0"/>
+          <a:chExt cx="0" cy="0"/>
+        </a:xfrm>
+      </p:grpSpPr>
       <p:sp>
         <p:nvSpPr>
           <p:cNvPr id="2" name="TextBox 1"/>
@@ -7555,6 +7425,7 @@
           <a:lstStyle/>
           <a:p>
             <a:pPr algn="ctr"/>
+            <a:endParaRPr/>
           </a:p>
         </p:txBody>
       </p:sp>
@@ -7695,7 +7566,7 @@
           </a:fontRef>
         </p:style>
         <p:txBody>
-          <a:bodyPr rtlCol="0" anchor="ctr" wrap="square" lIns="73152" rIns="73152"/>
+          <a:bodyPr wrap="square" lIns="73152" rIns="73152" rtlCol="0" anchor="ctr"/>
           <a:lstStyle/>
           <a:p>
             <a:pPr algn="ctr">
@@ -7813,7 +7684,7 @@
           </a:fontRef>
         </p:style>
         <p:txBody>
-          <a:bodyPr rtlCol="0" anchor="ctr" wrap="square" lIns="73152" rIns="73152"/>
+          <a:bodyPr wrap="square" lIns="73152" rIns="73152" rtlCol="0" anchor="ctr"/>
           <a:lstStyle/>
           <a:p>
             <a:pPr algn="ctr">
@@ -7931,7 +7802,7 @@
           </a:fontRef>
         </p:style>
         <p:txBody>
-          <a:bodyPr rtlCol="0" anchor="ctr" wrap="square" lIns="73152" rIns="73152"/>
+          <a:bodyPr wrap="square" lIns="73152" rIns="73152" rtlCol="0" anchor="ctr"/>
           <a:lstStyle/>
           <a:p>
             <a:pPr algn="ctr">
@@ -8049,7 +7920,7 @@
           </a:fontRef>
         </p:style>
         <p:txBody>
-          <a:bodyPr rtlCol="0" anchor="ctr" wrap="square" lIns="73152" rIns="73152"/>
+          <a:bodyPr wrap="square" lIns="73152" rIns="73152" rtlCol="0" anchor="ctr"/>
           <a:lstStyle/>
           <a:p>
             <a:pPr algn="ctr">
@@ -8119,7 +7990,7 @@
           </a:fontRef>
         </p:style>
         <p:txBody>
-          <a:bodyPr rtlCol="0" anchor="ctr" wrap="square" lIns="73152" rIns="73152"/>
+          <a:bodyPr wrap="square" lIns="73152" rIns="73152" rtlCol="0" anchor="ctr"/>
           <a:lstStyle/>
           <a:p>
             <a:pPr algn="ctr">
@@ -8157,7 +8028,7 @@
 </file>
 
 <file path=ppt/slides/slide12.xml><?xml version="1.0" encoding="utf-8"?>
-<p:sld xmlns:a="http://schemas.openxmlformats.org/drawingml/2006/main" xmlns:p="http://schemas.openxmlformats.org/presentationml/2006/main" xmlns:r="http://schemas.openxmlformats.org/officeDocument/2006/relationships">
+<p:sld xmlns:a="http://schemas.openxmlformats.org/drawingml/2006/main" xmlns:r="http://schemas.openxmlformats.org/officeDocument/2006/relationships" xmlns:p="http://schemas.openxmlformats.org/presentationml/2006/main">
   <p:cSld>
     <p:spTree>
       <p:nvGrpSpPr>
@@ -8165,7 +8036,14 @@
         <p:cNvGrpSpPr/>
         <p:nvPr/>
       </p:nvGrpSpPr>
-      <p:grpSpPr/>
+      <p:grpSpPr>
+        <a:xfrm>
+          <a:off x="0" y="0"/>
+          <a:ext cx="0" cy="0"/>
+          <a:chOff x="0" y="0"/>
+          <a:chExt cx="0" cy="0"/>
+        </a:xfrm>
+      </p:grpSpPr>
       <p:sp>
         <p:nvSpPr>
           <p:cNvPr id="2" name="Title 1"/>
@@ -8253,6 +8131,7 @@
           <a:lstStyle/>
           <a:p>
             <a:pPr algn="ctr"/>
+            <a:endParaRPr/>
           </a:p>
         </p:txBody>
       </p:sp>
@@ -8391,7 +8270,7 @@
           </a:fontRef>
         </p:style>
         <p:txBody>
-          <a:bodyPr rtlCol="0" anchor="ctr" wrap="square" lIns="182880"/>
+          <a:bodyPr wrap="square" lIns="182880" rtlCol="0" anchor="ctr"/>
           <a:lstStyle/>
           <a:p>
             <a:pPr algn="l"/>
@@ -8824,7 +8703,7 @@
 </file>
 
 <file path=ppt/slides/slide13.xml><?xml version="1.0" encoding="utf-8"?>
-<p:sld xmlns:a="http://schemas.openxmlformats.org/drawingml/2006/main" xmlns:p="http://schemas.openxmlformats.org/presentationml/2006/main" xmlns:r="http://schemas.openxmlformats.org/officeDocument/2006/relationships">
+<p:sld xmlns:a="http://schemas.openxmlformats.org/drawingml/2006/main" xmlns:r="http://schemas.openxmlformats.org/officeDocument/2006/relationships" xmlns:p="http://schemas.openxmlformats.org/presentationml/2006/main">
   <p:cSld>
     <p:spTree>
       <p:nvGrpSpPr>
@@ -8832,7 +8711,14 @@
         <p:cNvGrpSpPr/>
         <p:nvPr/>
       </p:nvGrpSpPr>
-      <p:grpSpPr/>
+      <p:grpSpPr>
+        <a:xfrm>
+          <a:off x="0" y="0"/>
+          <a:ext cx="0" cy="0"/>
+          <a:chOff x="0" y="0"/>
+          <a:chExt cx="0" cy="0"/>
+        </a:xfrm>
+      </p:grpSpPr>
       <p:sp>
         <p:nvSpPr>
           <p:cNvPr id="2" name="Title 1"/>
@@ -8920,6 +8806,7 @@
           <a:lstStyle/>
           <a:p>
             <a:pPr algn="ctr"/>
+            <a:endParaRPr/>
           </a:p>
         </p:txBody>
       </p:sp>
@@ -9128,6 +9015,12 @@
                 <a:latin typeface="Calibri"/>
               </a:defRPr>
             </a:pPr>
+            <a:endParaRPr sz="2100" b="0">
+              <a:solidFill>
+                <a:srgbClr val="222222"/>
+              </a:solidFill>
+              <a:latin typeface="Calibri"/>
+            </a:endParaRPr>
           </a:p>
           <a:p>
             <a:pPr algn="l">
@@ -9319,6 +9212,12 @@
                 <a:latin typeface="Calibri"/>
               </a:defRPr>
             </a:pPr>
+            <a:endParaRPr sz="2100" b="0">
+              <a:solidFill>
+                <a:srgbClr val="222222"/>
+              </a:solidFill>
+              <a:latin typeface="Calibri"/>
+            </a:endParaRPr>
           </a:p>
           <a:p>
             <a:pPr algn="l">
@@ -9356,7 +9255,7 @@
 </file>
 
 <file path=ppt/slides/slide14.xml><?xml version="1.0" encoding="utf-8"?>
-<p:sld xmlns:a="http://schemas.openxmlformats.org/drawingml/2006/main" xmlns:p="http://schemas.openxmlformats.org/presentationml/2006/main" xmlns:r="http://schemas.openxmlformats.org/officeDocument/2006/relationships">
+<p:sld xmlns:a="http://schemas.openxmlformats.org/drawingml/2006/main" xmlns:r="http://schemas.openxmlformats.org/officeDocument/2006/relationships" xmlns:p="http://schemas.openxmlformats.org/presentationml/2006/main">
   <p:cSld>
     <p:spTree>
       <p:nvGrpSpPr>
@@ -9364,7 +9263,14 @@
         <p:cNvGrpSpPr/>
         <p:nvPr/>
       </p:nvGrpSpPr>
-      <p:grpSpPr/>
+      <p:grpSpPr>
+        <a:xfrm>
+          <a:off x="0" y="0"/>
+          <a:ext cx="0" cy="0"/>
+          <a:chOff x="0" y="0"/>
+          <a:chExt cx="0" cy="0"/>
+        </a:xfrm>
+      </p:grpSpPr>
       <p:sp>
         <p:nvSpPr>
           <p:cNvPr id="2" name="Title 1"/>
@@ -9452,6 +9358,7 @@
           <a:lstStyle/>
           <a:p>
             <a:pPr algn="ctr"/>
+            <a:endParaRPr/>
           </a:p>
         </p:txBody>
       </p:sp>
@@ -9685,6 +9592,12 @@
                 <a:latin typeface="Calibri"/>
               </a:defRPr>
             </a:pPr>
+            <a:endParaRPr sz="1800" b="0">
+              <a:solidFill>
+                <a:srgbClr val="222222"/>
+              </a:solidFill>
+              <a:latin typeface="Calibri"/>
+            </a:endParaRPr>
           </a:p>
           <a:p>
             <a:pPr algn="l">
@@ -9776,6 +9689,12 @@
                 <a:latin typeface="Calibri"/>
               </a:defRPr>
             </a:pPr>
+            <a:endParaRPr sz="1800" b="0">
+              <a:solidFill>
+                <a:srgbClr val="222222"/>
+              </a:solidFill>
+              <a:latin typeface="Calibri"/>
+            </a:endParaRPr>
           </a:p>
           <a:p>
             <a:pPr lvl="1" algn="l">
@@ -9817,6 +9736,12 @@
                 <a:latin typeface="Calibri"/>
               </a:defRPr>
             </a:pPr>
+            <a:endParaRPr sz="1800" b="0">
+              <a:solidFill>
+                <a:srgbClr val="222222"/>
+              </a:solidFill>
+              <a:latin typeface="Calibri"/>
+            </a:endParaRPr>
           </a:p>
           <a:p>
             <a:pPr algn="l">
@@ -9854,7 +9779,7 @@
 </file>
 
 <file path=ppt/slides/slide15.xml><?xml version="1.0" encoding="utf-8"?>
-<p:sld xmlns:a="http://schemas.openxmlformats.org/drawingml/2006/main" xmlns:p="http://schemas.openxmlformats.org/presentationml/2006/main" xmlns:r="http://schemas.openxmlformats.org/officeDocument/2006/relationships">
+<p:sld xmlns:a="http://schemas.openxmlformats.org/drawingml/2006/main" xmlns:r="http://schemas.openxmlformats.org/officeDocument/2006/relationships" xmlns:p="http://schemas.openxmlformats.org/presentationml/2006/main">
   <p:cSld>
     <p:spTree>
       <p:nvGrpSpPr>
@@ -9862,7 +9787,14 @@
         <p:cNvGrpSpPr/>
         <p:nvPr/>
       </p:nvGrpSpPr>
-      <p:grpSpPr/>
+      <p:grpSpPr>
+        <a:xfrm>
+          <a:off x="0" y="0"/>
+          <a:ext cx="0" cy="0"/>
+          <a:chOff x="0" y="0"/>
+          <a:chExt cx="0" cy="0"/>
+        </a:xfrm>
+      </p:grpSpPr>
       <p:sp>
         <p:nvSpPr>
           <p:cNvPr id="2" name="Title 1"/>
@@ -9950,6 +9882,7 @@
           <a:lstStyle/>
           <a:p>
             <a:pPr algn="ctr"/>
+            <a:endParaRPr/>
           </a:p>
         </p:txBody>
       </p:sp>
@@ -10138,7 +10071,7 @@
           </a:fontRef>
         </p:style>
         <p:txBody>
-          <a:bodyPr rtlCol="0" anchor="t" wrap="square" lIns="146304" tIns="91440" bIns="73152"/>
+          <a:bodyPr wrap="square" lIns="146304" tIns="91440" bIns="73152" rtlCol="0" anchor="t"/>
           <a:lstStyle/>
           <a:p>
             <a:pPr algn="l">
@@ -10494,7 +10427,7 @@
 </file>
 
 <file path=ppt/slides/slide16.xml><?xml version="1.0" encoding="utf-8"?>
-<p:sld xmlns:a="http://schemas.openxmlformats.org/drawingml/2006/main" xmlns:p="http://schemas.openxmlformats.org/presentationml/2006/main" xmlns:r="http://schemas.openxmlformats.org/officeDocument/2006/relationships">
+<p:sld xmlns:a="http://schemas.openxmlformats.org/drawingml/2006/main" xmlns:r="http://schemas.openxmlformats.org/officeDocument/2006/relationships" xmlns:p="http://schemas.openxmlformats.org/presentationml/2006/main">
   <p:cSld>
     <p:spTree>
       <p:nvGrpSpPr>
@@ -10502,7 +10435,14 @@
         <p:cNvGrpSpPr/>
         <p:nvPr/>
       </p:nvGrpSpPr>
-      <p:grpSpPr/>
+      <p:grpSpPr>
+        <a:xfrm>
+          <a:off x="0" y="0"/>
+          <a:ext cx="0" cy="0"/>
+          <a:chOff x="0" y="0"/>
+          <a:chExt cx="0" cy="0"/>
+        </a:xfrm>
+      </p:grpSpPr>
       <p:sp>
         <p:nvSpPr>
           <p:cNvPr id="2" name="TextBox 1"/>
@@ -10640,6 +10580,7 @@
           <a:lstStyle/>
           <a:p>
             <a:pPr algn="ctr"/>
+            <a:endParaRPr/>
           </a:p>
         </p:txBody>
       </p:sp>
@@ -10780,7 +10721,7 @@
           </a:fontRef>
         </p:style>
         <p:txBody>
-          <a:bodyPr rtlCol="0" anchor="ctr" wrap="square" lIns="73152" rIns="73152"/>
+          <a:bodyPr wrap="square" lIns="73152" rIns="73152" rtlCol="0" anchor="ctr"/>
           <a:lstStyle/>
           <a:p>
             <a:pPr algn="ctr">
@@ -10898,7 +10839,7 @@
           </a:fontRef>
         </p:style>
         <p:txBody>
-          <a:bodyPr rtlCol="0" anchor="ctr" wrap="square" lIns="73152" rIns="73152"/>
+          <a:bodyPr wrap="square" lIns="73152" rIns="73152" rtlCol="0" anchor="ctr"/>
           <a:lstStyle/>
           <a:p>
             <a:pPr algn="ctr">
@@ -11016,7 +10957,7 @@
           </a:fontRef>
         </p:style>
         <p:txBody>
-          <a:bodyPr rtlCol="0" anchor="ctr" wrap="square" lIns="73152" rIns="73152"/>
+          <a:bodyPr wrap="square" lIns="73152" rIns="73152" rtlCol="0" anchor="ctr"/>
           <a:lstStyle/>
           <a:p>
             <a:pPr algn="ctr">
@@ -11134,7 +11075,7 @@
           </a:fontRef>
         </p:style>
         <p:txBody>
-          <a:bodyPr rtlCol="0" anchor="ctr" wrap="square" lIns="73152" rIns="73152"/>
+          <a:bodyPr wrap="square" lIns="73152" rIns="73152" rtlCol="0" anchor="ctr"/>
           <a:lstStyle/>
           <a:p>
             <a:pPr algn="ctr">
@@ -11252,7 +11193,7 @@
           </a:fontRef>
         </p:style>
         <p:txBody>
-          <a:bodyPr rtlCol="0" anchor="ctr" wrap="square" lIns="73152" rIns="73152"/>
+          <a:bodyPr wrap="square" lIns="73152" rIns="73152" rtlCol="0" anchor="ctr"/>
           <a:lstStyle/>
           <a:p>
             <a:pPr algn="ctr">
@@ -11290,7 +11231,7 @@
 </file>
 
 <file path=ppt/slides/slide17.xml><?xml version="1.0" encoding="utf-8"?>
-<p:sld xmlns:a="http://schemas.openxmlformats.org/drawingml/2006/main" xmlns:p="http://schemas.openxmlformats.org/presentationml/2006/main" xmlns:r="http://schemas.openxmlformats.org/officeDocument/2006/relationships">
+<p:sld xmlns:a="http://schemas.openxmlformats.org/drawingml/2006/main" xmlns:r="http://schemas.openxmlformats.org/officeDocument/2006/relationships" xmlns:p="http://schemas.openxmlformats.org/presentationml/2006/main">
   <p:cSld>
     <p:spTree>
       <p:nvGrpSpPr>
@@ -11298,7 +11239,14 @@
         <p:cNvGrpSpPr/>
         <p:nvPr/>
       </p:nvGrpSpPr>
-      <p:grpSpPr/>
+      <p:grpSpPr>
+        <a:xfrm>
+          <a:off x="0" y="0"/>
+          <a:ext cx="0" cy="0"/>
+          <a:chOff x="0" y="0"/>
+          <a:chExt cx="0" cy="0"/>
+        </a:xfrm>
+      </p:grpSpPr>
       <p:sp>
         <p:nvSpPr>
           <p:cNvPr id="2" name="Title 1"/>
@@ -11386,6 +11334,7 @@
           <a:lstStyle/>
           <a:p>
             <a:pPr algn="ctr"/>
+            <a:endParaRPr/>
           </a:p>
         </p:txBody>
       </p:sp>
@@ -11524,7 +11473,7 @@
           </a:fontRef>
         </p:style>
         <p:txBody>
-          <a:bodyPr rtlCol="0" anchor="ctr" wrap="square" lIns="182880"/>
+          <a:bodyPr wrap="square" lIns="182880" rtlCol="0" anchor="ctr"/>
           <a:lstStyle/>
           <a:p>
             <a:pPr algn="l"/>
@@ -11595,7 +11544,7 @@
               </a:defRPr>
             </a:pPr>
             <a:r>
-              <a:rPr sz="1800" b="0">
+              <a:rPr sz="1800" b="0" dirty="0">
                 <a:solidFill>
                   <a:srgbClr val="222222"/>
                 </a:solidFill>
@@ -11620,7 +11569,7 @@
               </a:defRPr>
             </a:pPr>
             <a:r>
-              <a:rPr sz="1800" b="0">
+              <a:rPr sz="1800" b="0" dirty="0">
                 <a:solidFill>
                   <a:srgbClr val="222222"/>
                 </a:solidFill>
@@ -11645,7 +11594,7 @@
               </a:defRPr>
             </a:pPr>
             <a:r>
-              <a:rPr sz="1800" b="0">
+              <a:rPr sz="1800" b="0" dirty="0">
                 <a:solidFill>
                   <a:srgbClr val="222222"/>
                 </a:solidFill>
@@ -11670,7 +11619,7 @@
               </a:defRPr>
             </a:pPr>
             <a:r>
-              <a:rPr sz="1800" b="0">
+              <a:rPr sz="1800" b="0" dirty="0">
                 <a:solidFill>
                   <a:srgbClr val="222222"/>
                 </a:solidFill>
@@ -11695,13 +11644,31 @@
               </a:defRPr>
             </a:pPr>
             <a:r>
-              <a:rPr sz="1800" b="0">
-                <a:solidFill>
-                  <a:srgbClr val="222222"/>
-                </a:solidFill>
-                <a:latin typeface="Calibri"/>
-              </a:rPr>
-              <a:t>5.  Make the turn signals BLINK rather than stay on. Use millis(), not delay(), or the vehicle will stutter.</a:t>
+              <a:rPr sz="1800" b="0" dirty="0">
+                <a:solidFill>
+                  <a:srgbClr val="222222"/>
+                </a:solidFill>
+                <a:latin typeface="Calibri"/>
+              </a:rPr>
+              <a:t>5.  Make the turn signals BLINK rather than stay on. Use </a:t>
+            </a:r>
+            <a:r>
+              <a:rPr sz="1800" b="0" dirty="0" err="1">
+                <a:solidFill>
+                  <a:srgbClr val="222222"/>
+                </a:solidFill>
+                <a:latin typeface="Calibri"/>
+              </a:rPr>
+              <a:t>millis</a:t>
+            </a:r>
+            <a:r>
+              <a:rPr sz="1800" b="0" dirty="0">
+                <a:solidFill>
+                  <a:srgbClr val="222222"/>
+                </a:solidFill>
+                <a:latin typeface="Calibri"/>
+              </a:rPr>
+              <a:t>(), not delay(), or the vehicle will stutter.</a:t>
             </a:r>
           </a:p>
         </p:txBody>
@@ -11964,7 +11931,7 @@
           </a:fontRef>
         </p:style>
         <p:txBody>
-          <a:bodyPr rtlCol="0" anchor="ctr" wrap="square" lIns="164592" rIns="164592" tIns="73152" bIns="73152"/>
+          <a:bodyPr wrap="square" lIns="164592" tIns="73152" rIns="164592" bIns="73152" rtlCol="0" anchor="ctr"/>
           <a:lstStyle/>
           <a:p>
             <a:pPr algn="l"/>
@@ -11998,7 +11965,7 @@
 </file>
 
 <file path=ppt/slides/slide18.xml><?xml version="1.0" encoding="utf-8"?>
-<p:sld xmlns:a="http://schemas.openxmlformats.org/drawingml/2006/main" xmlns:p="http://schemas.openxmlformats.org/presentationml/2006/main" xmlns:r="http://schemas.openxmlformats.org/officeDocument/2006/relationships">
+<p:sld xmlns:a="http://schemas.openxmlformats.org/drawingml/2006/main" xmlns:r="http://schemas.openxmlformats.org/officeDocument/2006/relationships" xmlns:p="http://schemas.openxmlformats.org/presentationml/2006/main">
   <p:cSld>
     <p:spTree>
       <p:nvGrpSpPr>
@@ -12006,7 +11973,14 @@
         <p:cNvGrpSpPr/>
         <p:nvPr/>
       </p:nvGrpSpPr>
-      <p:grpSpPr/>
+      <p:grpSpPr>
+        <a:xfrm>
+          <a:off x="0" y="0"/>
+          <a:ext cx="0" cy="0"/>
+          <a:chOff x="0" y="0"/>
+          <a:chExt cx="0" cy="0"/>
+        </a:xfrm>
+      </p:grpSpPr>
       <p:sp>
         <p:nvSpPr>
           <p:cNvPr id="2" name="TextBox 1"/>
@@ -12144,6 +12118,7 @@
           <a:lstStyle/>
           <a:p>
             <a:pPr algn="ctr"/>
+            <a:endParaRPr/>
           </a:p>
         </p:txBody>
       </p:sp>
@@ -12284,7 +12259,7 @@
           </a:fontRef>
         </p:style>
         <p:txBody>
-          <a:bodyPr rtlCol="0" anchor="ctr" wrap="square" lIns="73152" rIns="73152"/>
+          <a:bodyPr wrap="square" lIns="73152" rIns="73152" rtlCol="0" anchor="ctr"/>
           <a:lstStyle/>
           <a:p>
             <a:pPr algn="ctr">
@@ -12402,7 +12377,7 @@
           </a:fontRef>
         </p:style>
         <p:txBody>
-          <a:bodyPr rtlCol="0" anchor="ctr" wrap="square" lIns="73152" rIns="73152"/>
+          <a:bodyPr wrap="square" lIns="73152" rIns="73152" rtlCol="0" anchor="ctr"/>
           <a:lstStyle/>
           <a:p>
             <a:pPr algn="ctr">
@@ -12520,7 +12495,7 @@
           </a:fontRef>
         </p:style>
         <p:txBody>
-          <a:bodyPr rtlCol="0" anchor="ctr" wrap="square" lIns="73152" rIns="73152"/>
+          <a:bodyPr wrap="square" lIns="73152" rIns="73152" rtlCol="0" anchor="ctr"/>
           <a:lstStyle/>
           <a:p>
             <a:pPr algn="ctr">
@@ -12638,7 +12613,7 @@
           </a:fontRef>
         </p:style>
         <p:txBody>
-          <a:bodyPr rtlCol="0" anchor="ctr" wrap="square" lIns="73152" rIns="73152"/>
+          <a:bodyPr wrap="square" lIns="73152" rIns="73152" rtlCol="0" anchor="ctr"/>
           <a:lstStyle/>
           <a:p>
             <a:pPr algn="ctr">
@@ -12756,7 +12731,7 @@
           </a:fontRef>
         </p:style>
         <p:txBody>
-          <a:bodyPr rtlCol="0" anchor="ctr" wrap="square" lIns="73152" rIns="73152"/>
+          <a:bodyPr wrap="square" lIns="73152" rIns="73152" rtlCol="0" anchor="ctr"/>
           <a:lstStyle/>
           <a:p>
             <a:pPr algn="ctr">
@@ -12842,7 +12817,7 @@
 </file>
 
 <file path=ppt/slides/slide19.xml><?xml version="1.0" encoding="utf-8"?>
-<p:sld xmlns:a="http://schemas.openxmlformats.org/drawingml/2006/main" xmlns:p="http://schemas.openxmlformats.org/presentationml/2006/main" xmlns:r="http://schemas.openxmlformats.org/officeDocument/2006/relationships">
+<p:sld xmlns:a="http://schemas.openxmlformats.org/drawingml/2006/main" xmlns:r="http://schemas.openxmlformats.org/officeDocument/2006/relationships" xmlns:p="http://schemas.openxmlformats.org/presentationml/2006/main">
   <p:cSld>
     <p:spTree>
       <p:nvGrpSpPr>
@@ -12850,7 +12825,14 @@
         <p:cNvGrpSpPr/>
         <p:nvPr/>
       </p:nvGrpSpPr>
-      <p:grpSpPr/>
+      <p:grpSpPr>
+        <a:xfrm>
+          <a:off x="0" y="0"/>
+          <a:ext cx="0" cy="0"/>
+          <a:chOff x="0" y="0"/>
+          <a:chExt cx="0" cy="0"/>
+        </a:xfrm>
+      </p:grpSpPr>
       <p:sp>
         <p:nvSpPr>
           <p:cNvPr id="2" name="Title 1"/>
@@ -12938,6 +12920,7 @@
           <a:lstStyle/>
           <a:p>
             <a:pPr algn="ctr"/>
+            <a:endParaRPr/>
           </a:p>
         </p:txBody>
       </p:sp>
@@ -13104,8 +13087,20 @@
                 <a:tableStyleId>{5C22544A-7EE6-4342-B048-85BDC9FD1C3A}</a:tableStyleId>
               </a:tblPr>
               <a:tblGrid>
-                <a:gridCol w="5592927"/>
-                <a:gridCol w="5592927"/>
+                <a:gridCol w="5592927">
+                  <a:extLst>
+                    <a:ext uri="{9D8B030D-6E8A-4147-A177-3AD203B41FA5}">
+                      <a16:colId xmlns:a16="http://schemas.microsoft.com/office/drawing/2014/main" val="20000"/>
+                    </a:ext>
+                  </a:extLst>
+                </a:gridCol>
+                <a:gridCol w="5592927">
+                  <a:extLst>
+                    <a:ext uri="{9D8B030D-6E8A-4147-A177-3AD203B41FA5}">
+                      <a16:colId xmlns:a16="http://schemas.microsoft.com/office/drawing/2014/main" val="20001"/>
+                    </a:ext>
+                  </a:extLst>
+                </a:gridCol>
               </a:tblGrid>
               <a:tr h="401637">
                 <a:tc>
@@ -13152,6 +13147,11 @@
                     </a:solidFill>
                   </a:tcPr>
                 </a:tc>
+                <a:extLst>
+                  <a:ext uri="{0D108BD9-81ED-4DB2-BD59-A6C34878D82A}">
+                    <a16:rowId xmlns:a16="http://schemas.microsoft.com/office/drawing/2014/main" val="10000"/>
+                  </a:ext>
+                </a:extLst>
               </a:tr>
               <a:tr h="401637">
                 <a:tc>
@@ -13198,6 +13198,11 @@
                     </a:solidFill>
                   </a:tcPr>
                 </a:tc>
+                <a:extLst>
+                  <a:ext uri="{0D108BD9-81ED-4DB2-BD59-A6C34878D82A}">
+                    <a16:rowId xmlns:a16="http://schemas.microsoft.com/office/drawing/2014/main" val="10001"/>
+                  </a:ext>
+                </a:extLst>
               </a:tr>
               <a:tr h="401637">
                 <a:tc>
@@ -13244,6 +13249,11 @@
                     </a:solidFill>
                   </a:tcPr>
                 </a:tc>
+                <a:extLst>
+                  <a:ext uri="{0D108BD9-81ED-4DB2-BD59-A6C34878D82A}">
+                    <a16:rowId xmlns:a16="http://schemas.microsoft.com/office/drawing/2014/main" val="10002"/>
+                  </a:ext>
+                </a:extLst>
               </a:tr>
               <a:tr h="401637">
                 <a:tc>
@@ -13290,6 +13300,11 @@
                     </a:solidFill>
                   </a:tcPr>
                 </a:tc>
+                <a:extLst>
+                  <a:ext uri="{0D108BD9-81ED-4DB2-BD59-A6C34878D82A}">
+                    <a16:rowId xmlns:a16="http://schemas.microsoft.com/office/drawing/2014/main" val="10003"/>
+                  </a:ext>
+                </a:extLst>
               </a:tr>
               <a:tr h="401637">
                 <a:tc>
@@ -13336,6 +13351,11 @@
                     </a:solidFill>
                   </a:tcPr>
                 </a:tc>
+                <a:extLst>
+                  <a:ext uri="{0D108BD9-81ED-4DB2-BD59-A6C34878D82A}">
+                    <a16:rowId xmlns:a16="http://schemas.microsoft.com/office/drawing/2014/main" val="10004"/>
+                  </a:ext>
+                </a:extLst>
               </a:tr>
               <a:tr h="401637">
                 <a:tc>
@@ -13382,6 +13402,11 @@
                     </a:solidFill>
                   </a:tcPr>
                 </a:tc>
+                <a:extLst>
+                  <a:ext uri="{0D108BD9-81ED-4DB2-BD59-A6C34878D82A}">
+                    <a16:rowId xmlns:a16="http://schemas.microsoft.com/office/drawing/2014/main" val="10005"/>
+                  </a:ext>
+                </a:extLst>
               </a:tr>
               <a:tr h="401637">
                 <a:tc>
@@ -13428,6 +13453,11 @@
                     </a:solidFill>
                   </a:tcPr>
                 </a:tc>
+                <a:extLst>
+                  <a:ext uri="{0D108BD9-81ED-4DB2-BD59-A6C34878D82A}">
+                    <a16:rowId xmlns:a16="http://schemas.microsoft.com/office/drawing/2014/main" val="10006"/>
+                  </a:ext>
+                </a:extLst>
               </a:tr>
               <a:tr h="401637">
                 <a:tc>
@@ -13474,6 +13504,11 @@
                     </a:solidFill>
                   </a:tcPr>
                 </a:tc>
+                <a:extLst>
+                  <a:ext uri="{0D108BD9-81ED-4DB2-BD59-A6C34878D82A}">
+                    <a16:rowId xmlns:a16="http://schemas.microsoft.com/office/drawing/2014/main" val="10007"/>
+                  </a:ext>
+                </a:extLst>
               </a:tr>
               <a:tr h="401637">
                 <a:tc>
@@ -13520,6 +13555,11 @@
                     </a:solidFill>
                   </a:tcPr>
                 </a:tc>
+                <a:extLst>
+                  <a:ext uri="{0D108BD9-81ED-4DB2-BD59-A6C34878D82A}">
+                    <a16:rowId xmlns:a16="http://schemas.microsoft.com/office/drawing/2014/main" val="10008"/>
+                  </a:ext>
+                </a:extLst>
               </a:tr>
               <a:tr h="401637">
                 <a:tc>
@@ -13566,6 +13606,11 @@
                     </a:solidFill>
                   </a:tcPr>
                 </a:tc>
+                <a:extLst>
+                  <a:ext uri="{0D108BD9-81ED-4DB2-BD59-A6C34878D82A}">
+                    <a16:rowId xmlns:a16="http://schemas.microsoft.com/office/drawing/2014/main" val="10009"/>
+                  </a:ext>
+                </a:extLst>
               </a:tr>
               <a:tr h="401642">
                 <a:tc>
@@ -13612,6 +13657,11 @@
                     </a:solidFill>
                   </a:tcPr>
                 </a:tc>
+                <a:extLst>
+                  <a:ext uri="{0D108BD9-81ED-4DB2-BD59-A6C34878D82A}">
+                    <a16:rowId xmlns:a16="http://schemas.microsoft.com/office/drawing/2014/main" val="10010"/>
+                  </a:ext>
+                </a:extLst>
               </a:tr>
             </a:tbl>
           </a:graphicData>
@@ -13626,7 +13676,7 @@
 </file>
 
 <file path=ppt/slides/slide2.xml><?xml version="1.0" encoding="utf-8"?>
-<p:sld xmlns:a="http://schemas.openxmlformats.org/drawingml/2006/main" xmlns:p="http://schemas.openxmlformats.org/presentationml/2006/main" xmlns:r="http://schemas.openxmlformats.org/officeDocument/2006/relationships">
+<p:sld xmlns:a="http://schemas.openxmlformats.org/drawingml/2006/main" xmlns:r="http://schemas.openxmlformats.org/officeDocument/2006/relationships" xmlns:p="http://schemas.openxmlformats.org/presentationml/2006/main">
   <p:cSld>
     <p:spTree>
       <p:nvGrpSpPr>
@@ -13634,7 +13684,14 @@
         <p:cNvGrpSpPr/>
         <p:nvPr/>
       </p:nvGrpSpPr>
-      <p:grpSpPr/>
+      <p:grpSpPr>
+        <a:xfrm>
+          <a:off x="0" y="0"/>
+          <a:ext cx="0" cy="0"/>
+          <a:chOff x="0" y="0"/>
+          <a:chExt cx="0" cy="0"/>
+        </a:xfrm>
+      </p:grpSpPr>
       <p:sp>
         <p:nvSpPr>
           <p:cNvPr id="2" name="Title 1"/>
@@ -13722,6 +13779,7 @@
           <a:lstStyle/>
           <a:p>
             <a:pPr algn="ctr"/>
+            <a:endParaRPr/>
           </a:p>
         </p:txBody>
       </p:sp>
@@ -14051,7 +14109,7 @@
 </file>
 
 <file path=ppt/slides/slide20.xml><?xml version="1.0" encoding="utf-8"?>
-<p:sld xmlns:a="http://schemas.openxmlformats.org/drawingml/2006/main" xmlns:p="http://schemas.openxmlformats.org/presentationml/2006/main" xmlns:r="http://schemas.openxmlformats.org/officeDocument/2006/relationships">
+<p:sld xmlns:a="http://schemas.openxmlformats.org/drawingml/2006/main" xmlns:r="http://schemas.openxmlformats.org/officeDocument/2006/relationships" xmlns:p="http://schemas.openxmlformats.org/presentationml/2006/main">
   <p:cSld>
     <p:spTree>
       <p:nvGrpSpPr>
@@ -14059,7 +14117,14 @@
         <p:cNvGrpSpPr/>
         <p:nvPr/>
       </p:nvGrpSpPr>
-      <p:grpSpPr/>
+      <p:grpSpPr>
+        <a:xfrm>
+          <a:off x="0" y="0"/>
+          <a:ext cx="0" cy="0"/>
+          <a:chOff x="0" y="0"/>
+          <a:chExt cx="0" cy="0"/>
+        </a:xfrm>
+      </p:grpSpPr>
       <p:sp>
         <p:nvSpPr>
           <p:cNvPr id="2" name="Title 1"/>
@@ -14147,6 +14212,7 @@
           <a:lstStyle/>
           <a:p>
             <a:pPr algn="ctr"/>
+            <a:endParaRPr/>
           </a:p>
         </p:txBody>
       </p:sp>
@@ -15041,7 +15107,7 @@
           </a:fontRef>
         </p:style>
         <p:txBody>
-          <a:bodyPr rtlCol="0" anchor="ctr" wrap="square" lIns="45720" rIns="45720" tIns="18288" bIns="18288"/>
+          <a:bodyPr wrap="square" lIns="45720" tIns="18288" rIns="45720" bIns="18288" rtlCol="0" anchor="ctr"/>
           <a:lstStyle/>
           <a:p>
             <a:pPr algn="l">
@@ -15104,7 +15170,7 @@
 </file>
 
 <file path=ppt/slides/slide21.xml><?xml version="1.0" encoding="utf-8"?>
-<p:sld xmlns:a="http://schemas.openxmlformats.org/drawingml/2006/main" xmlns:p="http://schemas.openxmlformats.org/presentationml/2006/main" xmlns:r="http://schemas.openxmlformats.org/officeDocument/2006/relationships">
+<p:sld xmlns:a="http://schemas.openxmlformats.org/drawingml/2006/main" xmlns:r="http://schemas.openxmlformats.org/officeDocument/2006/relationships" xmlns:p="http://schemas.openxmlformats.org/presentationml/2006/main">
   <p:cSld>
     <p:spTree>
       <p:nvGrpSpPr>
@@ -15112,7 +15178,14 @@
         <p:cNvGrpSpPr/>
         <p:nvPr/>
       </p:nvGrpSpPr>
-      <p:grpSpPr/>
+      <p:grpSpPr>
+        <a:xfrm>
+          <a:off x="0" y="0"/>
+          <a:ext cx="0" cy="0"/>
+          <a:chOff x="0" y="0"/>
+          <a:chExt cx="0" cy="0"/>
+        </a:xfrm>
+      </p:grpSpPr>
       <p:sp>
         <p:nvSpPr>
           <p:cNvPr id="2" name="Title 1"/>
@@ -15200,6 +15273,7 @@
           <a:lstStyle/>
           <a:p>
             <a:pPr algn="ctr"/>
+            <a:endParaRPr/>
           </a:p>
         </p:txBody>
       </p:sp>
@@ -15211,7 +15285,7 @@
         </p:nvSpPr>
         <p:spPr>
           <a:xfrm>
-            <a:off x="502920" y="6382512"/>
+            <a:off x="502920" y="6393801"/>
             <a:ext cx="10545775" cy="274320"/>
           </a:xfrm>
           <a:prstGeom prst="rect">
@@ -15336,7 +15410,7 @@
               </a:defRPr>
             </a:pPr>
             <a:r>
-              <a:rPr sz="1900" b="0">
+              <a:rPr sz="1900" b="0" dirty="0">
                 <a:solidFill>
                   <a:srgbClr val="222222"/>
                 </a:solidFill>
@@ -15360,6 +15434,12 @@
                 <a:latin typeface="Calibri"/>
               </a:defRPr>
             </a:pPr>
+            <a:endParaRPr sz="1900" b="0" dirty="0">
+              <a:solidFill>
+                <a:srgbClr val="222222"/>
+              </a:solidFill>
+              <a:latin typeface="Calibri"/>
+            </a:endParaRPr>
           </a:p>
           <a:p>
             <a:pPr algn="l">
@@ -15377,7 +15457,7 @@
               </a:defRPr>
             </a:pPr>
             <a:r>
-              <a:rPr sz="1900" b="0">
+              <a:rPr sz="1900" b="0" dirty="0">
                 <a:solidFill>
                   <a:srgbClr val="222222"/>
                 </a:solidFill>
@@ -15401,6 +15481,12 @@
                 <a:latin typeface="Calibri"/>
               </a:defRPr>
             </a:pPr>
+            <a:endParaRPr sz="1900" b="0" dirty="0">
+              <a:solidFill>
+                <a:srgbClr val="222222"/>
+              </a:solidFill>
+              <a:latin typeface="Calibri"/>
+            </a:endParaRPr>
           </a:p>
           <a:p>
             <a:pPr algn="l">
@@ -15418,7 +15504,7 @@
               </a:defRPr>
             </a:pPr>
             <a:r>
-              <a:rPr sz="1900" b="0">
+              <a:rPr sz="1900" b="0" dirty="0">
                 <a:solidFill>
                   <a:srgbClr val="222222"/>
                 </a:solidFill>
@@ -15442,6 +15528,12 @@
                 <a:latin typeface="Calibri"/>
               </a:defRPr>
             </a:pPr>
+            <a:endParaRPr sz="1900" b="0" dirty="0">
+              <a:solidFill>
+                <a:srgbClr val="222222"/>
+              </a:solidFill>
+              <a:latin typeface="Calibri"/>
+            </a:endParaRPr>
           </a:p>
           <a:p>
             <a:pPr algn="l">
@@ -15459,7 +15551,7 @@
               </a:defRPr>
             </a:pPr>
             <a:r>
-              <a:rPr sz="1900" b="0">
+              <a:rPr sz="1900" b="0" dirty="0">
                 <a:solidFill>
                   <a:srgbClr val="222222"/>
                 </a:solidFill>
@@ -15479,7 +15571,7 @@
           <p:nvPr/>
         </p:nvPicPr>
         <p:blipFill>
-          <a:blip r:embed="rId2"/>
+          <a:blip r:embed="rId3"/>
           <a:stretch>
             <a:fillRect/>
           </a:stretch>
@@ -15551,7 +15643,7 @@
 </file>
 
 <file path=ppt/slides/slide22.xml><?xml version="1.0" encoding="utf-8"?>
-<p:sld xmlns:a="http://schemas.openxmlformats.org/drawingml/2006/main" xmlns:p="http://schemas.openxmlformats.org/presentationml/2006/main" xmlns:r="http://schemas.openxmlformats.org/officeDocument/2006/relationships">
+<p:sld xmlns:a="http://schemas.openxmlformats.org/drawingml/2006/main" xmlns:r="http://schemas.openxmlformats.org/officeDocument/2006/relationships" xmlns:p="http://schemas.openxmlformats.org/presentationml/2006/main">
   <p:cSld>
     <p:spTree>
       <p:nvGrpSpPr>
@@ -15559,7 +15651,14 @@
         <p:cNvGrpSpPr/>
         <p:nvPr/>
       </p:nvGrpSpPr>
-      <p:grpSpPr/>
+      <p:grpSpPr>
+        <a:xfrm>
+          <a:off x="0" y="0"/>
+          <a:ext cx="0" cy="0"/>
+          <a:chOff x="0" y="0"/>
+          <a:chExt cx="0" cy="0"/>
+        </a:xfrm>
+      </p:grpSpPr>
       <p:sp>
         <p:nvSpPr>
           <p:cNvPr id="2" name="Title 1"/>
@@ -15647,6 +15746,7 @@
           <a:lstStyle/>
           <a:p>
             <a:pPr algn="ctr"/>
+            <a:endParaRPr/>
           </a:p>
         </p:txBody>
       </p:sp>
@@ -15783,7 +15883,7 @@
               </a:defRPr>
             </a:pPr>
             <a:r>
-              <a:rPr sz="1800" b="0">
+              <a:rPr sz="1800" b="0" dirty="0">
                 <a:solidFill>
                   <a:srgbClr val="222222"/>
                 </a:solidFill>
@@ -15808,13 +15908,49 @@
               </a:defRPr>
             </a:pPr>
             <a:r>
-              <a:rPr sz="1800" b="0">
-                <a:solidFill>
-                  <a:srgbClr val="222222"/>
-                </a:solidFill>
-                <a:latin typeface="Calibri"/>
-              </a:rPr>
-              <a:t>Lesson 4 used delay(), so the vehicle froze while it swept. The full program moves the dot every 40 ms off millis(), so you can drive with it running.</a:t>
+              <a:rPr sz="1800" b="0" dirty="0">
+                <a:solidFill>
+                  <a:srgbClr val="222222"/>
+                </a:solidFill>
+                <a:latin typeface="Calibri"/>
+              </a:rPr>
+              <a:t>Lesson 4 used delay(), so the vehicle froze while it swept. The full program moves the dot every 40 </a:t>
+            </a:r>
+            <a:r>
+              <a:rPr sz="1800" b="0" dirty="0" err="1">
+                <a:solidFill>
+                  <a:srgbClr val="222222"/>
+                </a:solidFill>
+                <a:latin typeface="Calibri"/>
+              </a:rPr>
+              <a:t>ms</a:t>
+            </a:r>
+            <a:r>
+              <a:rPr sz="1800" b="0" dirty="0">
+                <a:solidFill>
+                  <a:srgbClr val="222222"/>
+                </a:solidFill>
+                <a:latin typeface="Calibri"/>
+              </a:rPr>
+              <a:t> off </a:t>
+            </a:r>
+            <a:r>
+              <a:rPr sz="1800" b="0" dirty="0" err="1">
+                <a:solidFill>
+                  <a:srgbClr val="222222"/>
+                </a:solidFill>
+                <a:latin typeface="Calibri"/>
+              </a:rPr>
+              <a:t>millis</a:t>
+            </a:r>
+            <a:r>
+              <a:rPr sz="1800" b="0" dirty="0">
+                <a:solidFill>
+                  <a:srgbClr val="222222"/>
+                </a:solidFill>
+                <a:latin typeface="Calibri"/>
+              </a:rPr>
+              <a:t>(), so you can drive with it running.</a:t>
             </a:r>
           </a:p>
           <a:p>
@@ -15833,7 +15969,7 @@
               </a:defRPr>
             </a:pPr>
             <a:r>
-              <a:rPr sz="1800" b="0">
+              <a:rPr sz="1800" b="0" dirty="0">
                 <a:solidFill>
                   <a:srgbClr val="222222"/>
                 </a:solidFill>
@@ -15858,7 +15994,7 @@
               </a:defRPr>
             </a:pPr>
             <a:r>
-              <a:rPr sz="1800" b="0">
+              <a:rPr sz="1800" b="0" dirty="0">
                 <a:solidFill>
                   <a:srgbClr val="222222"/>
                 </a:solidFill>
@@ -15883,13 +16019,22 @@
               </a:defRPr>
             </a:pPr>
             <a:r>
-              <a:rPr sz="1800" b="0">
-                <a:solidFill>
-                  <a:srgbClr val="222222"/>
-                </a:solidFill>
-                <a:latin typeface="Calibri"/>
-              </a:rPr>
-              <a:t>turnMax is normally MOTOR_MAX / 2, which makes it easy to aim. L3 (click the left stick in) flips it to full power, for spinning on the spot.</a:t>
+              <a:rPr sz="1800" b="0" dirty="0" err="1">
+                <a:solidFill>
+                  <a:srgbClr val="222222"/>
+                </a:solidFill>
+                <a:latin typeface="Calibri"/>
+              </a:rPr>
+              <a:t>turnMax</a:t>
+            </a:r>
+            <a:r>
+              <a:rPr sz="1800" b="0" dirty="0">
+                <a:solidFill>
+                  <a:srgbClr val="222222"/>
+                </a:solidFill>
+                <a:latin typeface="Calibri"/>
+              </a:rPr>
+              <a:t> is normally MOTOR_MAX / 2, which makes it easy to aim. L3 (click the left stick in) flips it to full power, for spinning on the spot.</a:t>
             </a:r>
           </a:p>
           <a:p>
@@ -15908,7 +16053,7 @@
               </a:defRPr>
             </a:pPr>
             <a:r>
-              <a:rPr sz="1800" b="0">
+              <a:rPr sz="1800" b="0" dirty="0">
                 <a:solidFill>
                   <a:srgbClr val="222222"/>
                 </a:solidFill>
@@ -15933,7 +16078,7 @@
               </a:defRPr>
             </a:pPr>
             <a:r>
-              <a:rPr sz="1800" b="0">
+              <a:rPr sz="1800" b="0" dirty="0">
                 <a:solidFill>
                   <a:srgbClr val="222222"/>
                 </a:solidFill>
@@ -15958,7 +16103,7 @@
               </a:defRPr>
             </a:pPr>
             <a:r>
-              <a:rPr sz="1800" b="0">
+              <a:rPr sz="1800" b="0" dirty="0">
                 <a:solidFill>
                   <a:srgbClr val="222222"/>
                 </a:solidFill>
@@ -16010,7 +16155,7 @@
           </a:fontRef>
         </p:style>
         <p:txBody>
-          <a:bodyPr rtlCol="0" anchor="ctr" wrap="square" lIns="164592" rIns="164592" tIns="73152" bIns="73152"/>
+          <a:bodyPr wrap="square" lIns="164592" tIns="73152" rIns="164592" bIns="73152" rtlCol="0" anchor="ctr"/>
           <a:lstStyle/>
           <a:p>
             <a:pPr algn="l"/>
@@ -16044,7 +16189,7 @@
 </file>
 
 <file path=ppt/slides/slide23.xml><?xml version="1.0" encoding="utf-8"?>
-<p:sld xmlns:a="http://schemas.openxmlformats.org/drawingml/2006/main" xmlns:p="http://schemas.openxmlformats.org/presentationml/2006/main" xmlns:r="http://schemas.openxmlformats.org/officeDocument/2006/relationships">
+<p:sld xmlns:a="http://schemas.openxmlformats.org/drawingml/2006/main" xmlns:r="http://schemas.openxmlformats.org/officeDocument/2006/relationships" xmlns:p="http://schemas.openxmlformats.org/presentationml/2006/main">
   <p:cSld>
     <p:spTree>
       <p:nvGrpSpPr>
@@ -16052,7 +16197,14 @@
         <p:cNvGrpSpPr/>
         <p:nvPr/>
       </p:nvGrpSpPr>
-      <p:grpSpPr/>
+      <p:grpSpPr>
+        <a:xfrm>
+          <a:off x="0" y="0"/>
+          <a:ext cx="0" cy="0"/>
+          <a:chOff x="0" y="0"/>
+          <a:chExt cx="0" cy="0"/>
+        </a:xfrm>
+      </p:grpSpPr>
       <p:sp>
         <p:nvSpPr>
           <p:cNvPr id="2" name="Title 1"/>
@@ -16140,6 +16292,7 @@
           <a:lstStyle/>
           <a:p>
             <a:pPr algn="ctr"/>
+            <a:endParaRPr/>
           </a:p>
         </p:txBody>
       </p:sp>
@@ -16297,7 +16450,7 @@
         </p:nvGraphicFramePr>
         <p:xfrm>
           <a:off x="502920" y="1691640"/>
-          <a:ext cx="11185854" cy="2914650"/>
+          <a:ext cx="11185854" cy="3069442"/>
         </p:xfrm>
         <a:graphic>
           <a:graphicData uri="http://schemas.openxmlformats.org/drawingml/2006/table">
@@ -16306,9 +16459,27 @@
                 <a:tableStyleId>{5C22544A-7EE6-4342-B048-85BDC9FD1C3A}</a:tableStyleId>
               </a:tblPr>
               <a:tblGrid>
-                <a:gridCol w="813516"/>
-                <a:gridCol w="4677721"/>
-                <a:gridCol w="5694617"/>
+                <a:gridCol w="813516">
+                  <a:extLst>
+                    <a:ext uri="{9D8B030D-6E8A-4147-A177-3AD203B41FA5}">
+                      <a16:colId xmlns:a16="http://schemas.microsoft.com/office/drawing/2014/main" val="20000"/>
+                    </a:ext>
+                  </a:extLst>
+                </a:gridCol>
+                <a:gridCol w="4677721">
+                  <a:extLst>
+                    <a:ext uri="{9D8B030D-6E8A-4147-A177-3AD203B41FA5}">
+                      <a16:colId xmlns:a16="http://schemas.microsoft.com/office/drawing/2014/main" val="20001"/>
+                    </a:ext>
+                  </a:extLst>
+                </a:gridCol>
+                <a:gridCol w="5694617">
+                  <a:extLst>
+                    <a:ext uri="{9D8B030D-6E8A-4147-A177-3AD203B41FA5}">
+                      <a16:colId xmlns:a16="http://schemas.microsoft.com/office/drawing/2014/main" val="20002"/>
+                    </a:ext>
+                  </a:extLst>
+                </a:gridCol>
               </a:tblGrid>
               <a:tr h="416378">
                 <a:tc>
@@ -16377,6 +16548,11 @@
                     </a:solidFill>
                   </a:tcPr>
                 </a:tc>
+                <a:extLst>
+                  <a:ext uri="{0D108BD9-81ED-4DB2-BD59-A6C34878D82A}">
+                    <a16:rowId xmlns:a16="http://schemas.microsoft.com/office/drawing/2014/main" val="10000"/>
+                  </a:ext>
+                </a:extLst>
               </a:tr>
               <a:tr h="416378">
                 <a:tc>
@@ -16407,7 +16583,7 @@
                     <a:lstStyle/>
                     <a:p>
                       <a:r>
-                        <a:rPr sz="1500">
+                        <a:rPr sz="1500" dirty="0">
                           <a:solidFill>
                             <a:srgbClr val="222222"/>
                           </a:solidFill>
@@ -16445,6 +16621,11 @@
                     </a:solidFill>
                   </a:tcPr>
                 </a:tc>
+                <a:extLst>
+                  <a:ext uri="{0D108BD9-81ED-4DB2-BD59-A6C34878D82A}">
+                    <a16:rowId xmlns:a16="http://schemas.microsoft.com/office/drawing/2014/main" val="10001"/>
+                  </a:ext>
+                </a:extLst>
               </a:tr>
               <a:tr h="416378">
                 <a:tc>
@@ -16475,7 +16656,7 @@
                     <a:lstStyle/>
                     <a:p>
                       <a:r>
-                        <a:rPr sz="1500">
+                        <a:rPr sz="1500" dirty="0">
                           <a:solidFill>
                             <a:srgbClr val="222222"/>
                           </a:solidFill>
@@ -16513,6 +16694,11 @@
                     </a:solidFill>
                   </a:tcPr>
                 </a:tc>
+                <a:extLst>
+                  <a:ext uri="{0D108BD9-81ED-4DB2-BD59-A6C34878D82A}">
+                    <a16:rowId xmlns:a16="http://schemas.microsoft.com/office/drawing/2014/main" val="10002"/>
+                  </a:ext>
+                </a:extLst>
               </a:tr>
               <a:tr h="416378">
                 <a:tc>
@@ -16543,14 +16729,47 @@
                     <a:lstStyle/>
                     <a:p>
                       <a:r>
-                        <a:rPr sz="1500">
+                        <a:rPr sz="1500" dirty="0">
                           <a:solidFill>
                             <a:srgbClr val="222222"/>
                           </a:solidFill>
                           <a:latin typeface="Calibri"/>
                         </a:rPr>
-                        <a:t>The state variables and the LightPattern enum</a:t>
+                        <a:t>The state variables and the </a:t>
                       </a:r>
+                      <a:r>
+                        <a:rPr sz="1500" dirty="0" err="1">
+                          <a:solidFill>
+                            <a:srgbClr val="222222"/>
+                          </a:solidFill>
+                          <a:latin typeface="Calibri"/>
+                        </a:rPr>
+                        <a:t>LightPattern</a:t>
+                      </a:r>
+                      <a:r>
+                        <a:rPr sz="1500" dirty="0">
+                          <a:solidFill>
+                            <a:srgbClr val="222222"/>
+                          </a:solidFill>
+                          <a:latin typeface="Calibri"/>
+                        </a:rPr>
+                        <a:t> </a:t>
+                      </a:r>
+                      <a:r>
+                        <a:rPr sz="1500" dirty="0" err="1">
+                          <a:solidFill>
+                            <a:srgbClr val="222222"/>
+                          </a:solidFill>
+                          <a:latin typeface="Calibri"/>
+                        </a:rPr>
+                        <a:t>enum</a:t>
+                      </a:r>
+                      <a:endParaRPr sz="1500" dirty="0">
+                        <a:solidFill>
+                          <a:srgbClr val="222222"/>
+                        </a:solidFill>
+                        <a:latin typeface="Calibri"/>
+                      </a:endParaRPr>
                     </a:p>
                   </a:txBody>
                   <a:tcPr marL="73152" marT="18288" marB="18288">
@@ -16581,6 +16800,11 @@
                     </a:solidFill>
                   </a:tcPr>
                 </a:tc>
+                <a:extLst>
+                  <a:ext uri="{0D108BD9-81ED-4DB2-BD59-A6C34878D82A}">
+                    <a16:rowId xmlns:a16="http://schemas.microsoft.com/office/drawing/2014/main" val="10003"/>
+                  </a:ext>
+                </a:extLst>
               </a:tr>
               <a:tr h="416378">
                 <a:tc>
@@ -16611,13 +16835,40 @@
                     <a:lstStyle/>
                     <a:p>
                       <a:r>
-                        <a:rPr sz="1500">
+                        <a:rPr sz="1500" dirty="0" err="1">
                           <a:solidFill>
                             <a:srgbClr val="222222"/>
                           </a:solidFill>
                           <a:latin typeface="Calibri"/>
                         </a:rPr>
-                        <a:t>stickToSpeed(), drive() and setMotor()</a:t>
+                        <a:t>stickToSpeed</a:t>
+                      </a:r>
+                      <a:r>
+                        <a:rPr sz="1500" dirty="0">
+                          <a:solidFill>
+                            <a:srgbClr val="222222"/>
+                          </a:solidFill>
+                          <a:latin typeface="Calibri"/>
+                        </a:rPr>
+                        <a:t>(), drive() and </a:t>
+                      </a:r>
+                      <a:r>
+                        <a:rPr sz="1500" dirty="0" err="1">
+                          <a:solidFill>
+                            <a:srgbClr val="222222"/>
+                          </a:solidFill>
+                          <a:latin typeface="Calibri"/>
+                        </a:rPr>
+                        <a:t>setMotor</a:t>
+                      </a:r>
+                      <a:r>
+                        <a:rPr sz="1500" dirty="0">
+                          <a:solidFill>
+                            <a:srgbClr val="222222"/>
+                          </a:solidFill>
+                          <a:latin typeface="Calibri"/>
+                        </a:rPr>
+                        <a:t>()</a:t>
                       </a:r>
                     </a:p>
                   </a:txBody>
@@ -16649,6 +16900,11 @@
                     </a:solidFill>
                   </a:tcPr>
                 </a:tc>
+                <a:extLst>
+                  <a:ext uri="{0D108BD9-81ED-4DB2-BD59-A6C34878D82A}">
+                    <a16:rowId xmlns:a16="http://schemas.microsoft.com/office/drawing/2014/main" val="10004"/>
+                  </a:ext>
+                </a:extLst>
               </a:tr>
               <a:tr h="416378">
                 <a:tc>
@@ -16679,7 +16935,7 @@
                     <a:lstStyle/>
                     <a:p>
                       <a:r>
-                        <a:rPr sz="1500">
+                        <a:rPr sz="1500" dirty="0">
                           <a:solidFill>
                             <a:srgbClr val="222222"/>
                           </a:solidFill>
@@ -16717,6 +16973,11 @@
                     </a:solidFill>
                   </a:tcPr>
                 </a:tc>
+                <a:extLst>
+                  <a:ext uri="{0D108BD9-81ED-4DB2-BD59-A6C34878D82A}">
+                    <a16:rowId xmlns:a16="http://schemas.microsoft.com/office/drawing/2014/main" val="10005"/>
+                  </a:ext>
+                </a:extLst>
               </a:tr>
               <a:tr h="416382">
                 <a:tc>
@@ -16747,7 +17008,7 @@
                     <a:lstStyle/>
                     <a:p>
                       <a:r>
-                        <a:rPr sz="1500">
+                        <a:rPr sz="1500" dirty="0">
                           <a:solidFill>
                             <a:srgbClr val="222222"/>
                           </a:solidFill>
@@ -16769,7 +17030,7 @@
                     <a:lstStyle/>
                     <a:p>
                       <a:r>
-                        <a:rPr sz="1500">
+                        <a:rPr sz="1500" dirty="0">
                           <a:solidFill>
                             <a:srgbClr val="222222"/>
                           </a:solidFill>
@@ -16785,6 +17046,11 @@
                     </a:solidFill>
                   </a:tcPr>
                 </a:tc>
+                <a:extLst>
+                  <a:ext uri="{0D108BD9-81ED-4DB2-BD59-A6C34878D82A}">
+                    <a16:rowId xmlns:a16="http://schemas.microsoft.com/office/drawing/2014/main" val="10006"/>
+                  </a:ext>
+                </a:extLst>
               </a:tr>
             </a:tbl>
           </a:graphicData>
@@ -16831,7 +17097,7 @@
           </a:fontRef>
         </p:style>
         <p:txBody>
-          <a:bodyPr rtlCol="0" anchor="ctr" wrap="square" lIns="164592" rIns="164592" tIns="73152" bIns="73152"/>
+          <a:bodyPr wrap="square" lIns="164592" tIns="73152" rIns="164592" bIns="73152" rtlCol="0" anchor="ctr"/>
           <a:lstStyle/>
           <a:p>
             <a:pPr algn="l"/>
@@ -16865,7 +17131,7 @@
 </file>
 
 <file path=ppt/slides/slide24.xml><?xml version="1.0" encoding="utf-8"?>
-<p:sld xmlns:a="http://schemas.openxmlformats.org/drawingml/2006/main" xmlns:p="http://schemas.openxmlformats.org/presentationml/2006/main" xmlns:r="http://schemas.openxmlformats.org/officeDocument/2006/relationships">
+<p:sld xmlns:a="http://schemas.openxmlformats.org/drawingml/2006/main" xmlns:r="http://schemas.openxmlformats.org/officeDocument/2006/relationships" xmlns:p="http://schemas.openxmlformats.org/presentationml/2006/main">
   <p:cSld>
     <p:spTree>
       <p:nvGrpSpPr>
@@ -16873,7 +17139,14 @@
         <p:cNvGrpSpPr/>
         <p:nvPr/>
       </p:nvGrpSpPr>
-      <p:grpSpPr/>
+      <p:grpSpPr>
+        <a:xfrm>
+          <a:off x="0" y="0"/>
+          <a:ext cx="0" cy="0"/>
+          <a:chOff x="0" y="0"/>
+          <a:chExt cx="0" cy="0"/>
+        </a:xfrm>
+      </p:grpSpPr>
       <p:sp>
         <p:nvSpPr>
           <p:cNvPr id="2" name="Title 1"/>
@@ -16961,6 +17234,7 @@
           <a:lstStyle/>
           <a:p>
             <a:pPr algn="ctr"/>
+            <a:endParaRPr/>
           </a:p>
         </p:txBody>
       </p:sp>
@@ -17290,7 +17564,7 @@
 </file>
 
 <file path=ppt/slides/slide25.xml><?xml version="1.0" encoding="utf-8"?>
-<p:sld xmlns:a="http://schemas.openxmlformats.org/drawingml/2006/main" xmlns:p="http://schemas.openxmlformats.org/presentationml/2006/main" xmlns:r="http://schemas.openxmlformats.org/officeDocument/2006/relationships">
+<p:sld xmlns:a="http://schemas.openxmlformats.org/drawingml/2006/main" xmlns:r="http://schemas.openxmlformats.org/officeDocument/2006/relationships" xmlns:p="http://schemas.openxmlformats.org/presentationml/2006/main">
   <p:cSld>
     <p:spTree>
       <p:nvGrpSpPr>
@@ -17298,7 +17572,14 @@
         <p:cNvGrpSpPr/>
         <p:nvPr/>
       </p:nvGrpSpPr>
-      <p:grpSpPr/>
+      <p:grpSpPr>
+        <a:xfrm>
+          <a:off x="0" y="0"/>
+          <a:ext cx="0" cy="0"/>
+          <a:chOff x="0" y="0"/>
+          <a:chExt cx="0" cy="0"/>
+        </a:xfrm>
+      </p:grpSpPr>
       <p:sp>
         <p:nvSpPr>
           <p:cNvPr id="2" name="Title 1"/>
@@ -17386,6 +17667,7 @@
           <a:lstStyle/>
           <a:p>
             <a:pPr algn="ctr"/>
+            <a:endParaRPr/>
           </a:p>
         </p:txBody>
       </p:sp>
@@ -17524,7 +17806,7 @@
           </a:fontRef>
         </p:style>
         <p:txBody>
-          <a:bodyPr rtlCol="0" anchor="ctr" wrap="square" lIns="182880"/>
+          <a:bodyPr wrap="square" lIns="182880" rtlCol="0" anchor="ctr"/>
           <a:lstStyle/>
           <a:p>
             <a:pPr algn="l"/>
@@ -17989,7 +18271,7 @@
           </a:fontRef>
         </p:style>
         <p:txBody>
-          <a:bodyPr rtlCol="0" anchor="ctr" wrap="square" lIns="164592" rIns="164592" tIns="73152" bIns="73152"/>
+          <a:bodyPr wrap="square" lIns="164592" tIns="73152" rIns="164592" bIns="73152" rtlCol="0" anchor="ctr"/>
           <a:lstStyle/>
           <a:p>
             <a:pPr algn="l"/>
@@ -18023,7 +18305,7 @@
 </file>
 
 <file path=ppt/slides/slide26.xml><?xml version="1.0" encoding="utf-8"?>
-<p:sld xmlns:a="http://schemas.openxmlformats.org/drawingml/2006/main" xmlns:p="http://schemas.openxmlformats.org/presentationml/2006/main" xmlns:r="http://schemas.openxmlformats.org/officeDocument/2006/relationships">
+<p:sld xmlns:a="http://schemas.openxmlformats.org/drawingml/2006/main" xmlns:r="http://schemas.openxmlformats.org/officeDocument/2006/relationships" xmlns:p="http://schemas.openxmlformats.org/presentationml/2006/main">
   <p:cSld>
     <p:spTree>
       <p:nvGrpSpPr>
@@ -18031,7 +18313,14 @@
         <p:cNvGrpSpPr/>
         <p:nvPr/>
       </p:nvGrpSpPr>
-      <p:grpSpPr/>
+      <p:grpSpPr>
+        <a:xfrm>
+          <a:off x="0" y="0"/>
+          <a:ext cx="0" cy="0"/>
+          <a:chOff x="0" y="0"/>
+          <a:chExt cx="0" cy="0"/>
+        </a:xfrm>
+      </p:grpSpPr>
       <p:sp>
         <p:nvSpPr>
           <p:cNvPr id="2" name="Title 1"/>
@@ -18119,6 +18408,7 @@
           <a:lstStyle/>
           <a:p>
             <a:pPr algn="ctr"/>
+            <a:endParaRPr/>
           </a:p>
         </p:txBody>
       </p:sp>
@@ -18402,6 +18692,12 @@
                 <a:latin typeface="Calibri"/>
               </a:defRPr>
             </a:pPr>
+            <a:endParaRPr sz="2000" b="0">
+              <a:solidFill>
+                <a:srgbClr val="222222"/>
+              </a:solidFill>
+              <a:latin typeface="Calibri"/>
+            </a:endParaRPr>
           </a:p>
           <a:p>
             <a:pPr algn="l">
@@ -18566,6 +18862,12 @@
                 <a:latin typeface="Calibri"/>
               </a:defRPr>
             </a:pPr>
+            <a:endParaRPr sz="2000" b="0">
+              <a:solidFill>
+                <a:srgbClr val="222222"/>
+              </a:solidFill>
+              <a:latin typeface="Calibri"/>
+            </a:endParaRPr>
           </a:p>
           <a:p>
             <a:pPr algn="l">
@@ -18653,7 +18955,7 @@
 </file>
 
 <file path=ppt/slides/slide27.xml><?xml version="1.0" encoding="utf-8"?>
-<p:sld xmlns:a="http://schemas.openxmlformats.org/drawingml/2006/main" xmlns:p="http://schemas.openxmlformats.org/presentationml/2006/main" xmlns:r="http://schemas.openxmlformats.org/officeDocument/2006/relationships">
+<p:sld xmlns:a="http://schemas.openxmlformats.org/drawingml/2006/main" xmlns:r="http://schemas.openxmlformats.org/officeDocument/2006/relationships" xmlns:p="http://schemas.openxmlformats.org/presentationml/2006/main">
   <p:cSld>
     <p:spTree>
       <p:nvGrpSpPr>
@@ -18661,7 +18963,14 @@
         <p:cNvGrpSpPr/>
         <p:nvPr/>
       </p:nvGrpSpPr>
-      <p:grpSpPr/>
+      <p:grpSpPr>
+        <a:xfrm>
+          <a:off x="0" y="0"/>
+          <a:ext cx="0" cy="0"/>
+          <a:chOff x="0" y="0"/>
+          <a:chExt cx="0" cy="0"/>
+        </a:xfrm>
+      </p:grpSpPr>
       <p:sp>
         <p:nvSpPr>
           <p:cNvPr id="2" name="Title 1"/>
@@ -18749,6 +19058,7 @@
           <a:lstStyle/>
           <a:p>
             <a:pPr algn="ctr"/>
+            <a:endParaRPr/>
           </a:p>
         </p:txBody>
       </p:sp>
@@ -19062,7 +19372,7 @@
           </a:fontRef>
         </p:style>
         <p:txBody>
-          <a:bodyPr rtlCol="0" anchor="ctr" wrap="square" lIns="164592" rIns="164592" tIns="73152" bIns="73152"/>
+          <a:bodyPr wrap="square" lIns="164592" tIns="73152" rIns="164592" bIns="73152" rtlCol="0" anchor="ctr"/>
           <a:lstStyle/>
           <a:p>
             <a:pPr algn="l"/>
@@ -19096,7 +19406,7 @@
 </file>
 
 <file path=ppt/slides/slide28.xml><?xml version="1.0" encoding="utf-8"?>
-<p:sld xmlns:a="http://schemas.openxmlformats.org/drawingml/2006/main" xmlns:p="http://schemas.openxmlformats.org/presentationml/2006/main" xmlns:r="http://schemas.openxmlformats.org/officeDocument/2006/relationships">
+<p:sld xmlns:a="http://schemas.openxmlformats.org/drawingml/2006/main" xmlns:r="http://schemas.openxmlformats.org/officeDocument/2006/relationships" xmlns:p="http://schemas.openxmlformats.org/presentationml/2006/main">
   <p:cSld>
     <p:spTree>
       <p:nvGrpSpPr>
@@ -19104,7 +19414,14 @@
         <p:cNvGrpSpPr/>
         <p:nvPr/>
       </p:nvGrpSpPr>
-      <p:grpSpPr/>
+      <p:grpSpPr>
+        <a:xfrm>
+          <a:off x="0" y="0"/>
+          <a:ext cx="0" cy="0"/>
+          <a:chOff x="0" y="0"/>
+          <a:chExt cx="0" cy="0"/>
+        </a:xfrm>
+      </p:grpSpPr>
       <p:sp>
         <p:nvSpPr>
           <p:cNvPr id="2" name="Title 1"/>
@@ -19192,6 +19509,7 @@
           <a:lstStyle/>
           <a:p>
             <a:pPr algn="ctr"/>
+            <a:endParaRPr/>
           </a:p>
         </p:txBody>
       </p:sp>
@@ -19348,7 +19666,7 @@
           <p:nvPr/>
         </p:nvPicPr>
         <p:blipFill>
-          <a:blip r:embed="rId2"/>
+          <a:blip r:embed="rId3"/>
           <a:stretch>
             <a:fillRect/>
           </a:stretch>
@@ -19372,7 +19690,7 @@
           <p:nvPr/>
         </p:nvPicPr>
         <p:blipFill>
-          <a:blip r:embed="rId3"/>
+          <a:blip r:embed="rId4"/>
           <a:stretch>
             <a:fillRect/>
           </a:stretch>
@@ -19492,7 +19810,7 @@
 </file>
 
 <file path=ppt/slides/slide29.xml><?xml version="1.0" encoding="utf-8"?>
-<p:sld xmlns:a="http://schemas.openxmlformats.org/drawingml/2006/main" xmlns:p="http://schemas.openxmlformats.org/presentationml/2006/main" xmlns:r="http://schemas.openxmlformats.org/officeDocument/2006/relationships">
+<p:sld xmlns:a="http://schemas.openxmlformats.org/drawingml/2006/main" xmlns:r="http://schemas.openxmlformats.org/officeDocument/2006/relationships" xmlns:p="http://schemas.openxmlformats.org/presentationml/2006/main">
   <p:cSld>
     <p:spTree>
       <p:nvGrpSpPr>
@@ -19500,7 +19818,14 @@
         <p:cNvGrpSpPr/>
         <p:nvPr/>
       </p:nvGrpSpPr>
-      <p:grpSpPr/>
+      <p:grpSpPr>
+        <a:xfrm>
+          <a:off x="0" y="0"/>
+          <a:ext cx="0" cy="0"/>
+          <a:chOff x="0" y="0"/>
+          <a:chExt cx="0" cy="0"/>
+        </a:xfrm>
+      </p:grpSpPr>
       <p:sp>
         <p:nvSpPr>
           <p:cNvPr id="2" name="Title 1"/>
@@ -19588,6 +19913,7 @@
           <a:lstStyle/>
           <a:p>
             <a:pPr algn="ctr"/>
+            <a:endParaRPr/>
           </a:p>
         </p:txBody>
       </p:sp>
@@ -20145,7 +20471,7 @@
           </a:fontRef>
         </p:style>
         <p:txBody>
-          <a:bodyPr rtlCol="0" anchor="ctr" wrap="square" lIns="164592" rIns="164592" tIns="73152" bIns="73152"/>
+          <a:bodyPr wrap="square" lIns="164592" tIns="73152" rIns="164592" bIns="73152" rtlCol="0" anchor="ctr"/>
           <a:lstStyle/>
           <a:p>
             <a:pPr algn="l"/>
@@ -20179,7 +20505,7 @@
 </file>
 
 <file path=ppt/slides/slide3.xml><?xml version="1.0" encoding="utf-8"?>
-<p:sld xmlns:a="http://schemas.openxmlformats.org/drawingml/2006/main" xmlns:p="http://schemas.openxmlformats.org/presentationml/2006/main" xmlns:r="http://schemas.openxmlformats.org/officeDocument/2006/relationships">
+<p:sld xmlns:a="http://schemas.openxmlformats.org/drawingml/2006/main" xmlns:r="http://schemas.openxmlformats.org/officeDocument/2006/relationships" xmlns:p="http://schemas.openxmlformats.org/presentationml/2006/main">
   <p:cSld>
     <p:spTree>
       <p:nvGrpSpPr>
@@ -20187,7 +20513,14 @@
         <p:cNvGrpSpPr/>
         <p:nvPr/>
       </p:nvGrpSpPr>
-      <p:grpSpPr/>
+      <p:grpSpPr>
+        <a:xfrm>
+          <a:off x="0" y="0"/>
+          <a:ext cx="0" cy="0"/>
+          <a:chOff x="0" y="0"/>
+          <a:chExt cx="0" cy="0"/>
+        </a:xfrm>
+      </p:grpSpPr>
       <p:sp>
         <p:nvSpPr>
           <p:cNvPr id="2" name="Title 1"/>
@@ -20275,6 +20608,7 @@
           <a:lstStyle/>
           <a:p>
             <a:pPr algn="ctr"/>
+            <a:endParaRPr/>
           </a:p>
         </p:txBody>
       </p:sp>
@@ -20510,6 +20844,12 @@
                 <a:latin typeface="Calibri"/>
               </a:defRPr>
             </a:pPr>
+            <a:endParaRPr sz="2300" b="0">
+              <a:solidFill>
+                <a:srgbClr val="222222"/>
+              </a:solidFill>
+              <a:latin typeface="Calibri"/>
+            </a:endParaRPr>
           </a:p>
           <a:p>
             <a:pPr algn="l">
@@ -20579,7 +20919,7 @@
           </a:fontRef>
         </p:style>
         <p:txBody>
-          <a:bodyPr rtlCol="0" anchor="ctr" wrap="square" lIns="164592" rIns="164592" tIns="73152" bIns="73152"/>
+          <a:bodyPr wrap="square" lIns="164592" tIns="73152" rIns="164592" bIns="73152" rtlCol="0" anchor="ctr"/>
           <a:lstStyle/>
           <a:p>
             <a:pPr algn="l"/>
@@ -20613,7 +20953,7 @@
 </file>
 
 <file path=ppt/slides/slide30.xml><?xml version="1.0" encoding="utf-8"?>
-<p:sld xmlns:a="http://schemas.openxmlformats.org/drawingml/2006/main" xmlns:p="http://schemas.openxmlformats.org/presentationml/2006/main" xmlns:r="http://schemas.openxmlformats.org/officeDocument/2006/relationships">
+<p:sld xmlns:a="http://schemas.openxmlformats.org/drawingml/2006/main" xmlns:r="http://schemas.openxmlformats.org/officeDocument/2006/relationships" xmlns:p="http://schemas.openxmlformats.org/presentationml/2006/main">
   <p:cSld>
     <p:spTree>
       <p:nvGrpSpPr>
@@ -20621,7 +20961,14 @@
         <p:cNvGrpSpPr/>
         <p:nvPr/>
       </p:nvGrpSpPr>
-      <p:grpSpPr/>
+      <p:grpSpPr>
+        <a:xfrm>
+          <a:off x="0" y="0"/>
+          <a:ext cx="0" cy="0"/>
+          <a:chOff x="0" y="0"/>
+          <a:chExt cx="0" cy="0"/>
+        </a:xfrm>
+      </p:grpSpPr>
       <p:sp>
         <p:nvSpPr>
           <p:cNvPr id="2" name="Title 1"/>
@@ -20709,6 +21056,7 @@
           <a:lstStyle/>
           <a:p>
             <a:pPr algn="ctr"/>
+            <a:endParaRPr/>
           </a:p>
         </p:txBody>
       </p:sp>
@@ -20917,6 +21265,12 @@
                 <a:latin typeface="Calibri"/>
               </a:defRPr>
             </a:pPr>
+            <a:endParaRPr sz="2000" b="0">
+              <a:solidFill>
+                <a:srgbClr val="222222"/>
+              </a:solidFill>
+              <a:latin typeface="Calibri"/>
+            </a:endParaRPr>
           </a:p>
           <a:p>
             <a:pPr algn="l">
@@ -21031,6 +21385,12 @@
                 <a:latin typeface="Calibri"/>
               </a:defRPr>
             </a:pPr>
+            <a:endParaRPr sz="2000" b="0">
+              <a:solidFill>
+                <a:srgbClr val="222222"/>
+              </a:solidFill>
+              <a:latin typeface="Calibri"/>
+            </a:endParaRPr>
           </a:p>
           <a:p>
             <a:pPr algn="l">
@@ -21072,6 +21432,12 @@
                 <a:latin typeface="Calibri"/>
               </a:defRPr>
             </a:pPr>
+            <a:endParaRPr sz="2000" b="0">
+              <a:solidFill>
+                <a:srgbClr val="222222"/>
+              </a:solidFill>
+              <a:latin typeface="Calibri"/>
+            </a:endParaRPr>
           </a:p>
           <a:p>
             <a:pPr algn="l">
@@ -21109,7 +21475,7 @@
 </file>
 
 <file path=ppt/slides/slide31.xml><?xml version="1.0" encoding="utf-8"?>
-<p:sld xmlns:a="http://schemas.openxmlformats.org/drawingml/2006/main" xmlns:p="http://schemas.openxmlformats.org/presentationml/2006/main" xmlns:r="http://schemas.openxmlformats.org/officeDocument/2006/relationships">
+<p:sld xmlns:a="http://schemas.openxmlformats.org/drawingml/2006/main" xmlns:r="http://schemas.openxmlformats.org/officeDocument/2006/relationships" xmlns:p="http://schemas.openxmlformats.org/presentationml/2006/main">
   <p:cSld>
     <p:spTree>
       <p:nvGrpSpPr>
@@ -21117,7 +21483,14 @@
         <p:cNvGrpSpPr/>
         <p:nvPr/>
       </p:nvGrpSpPr>
-      <p:grpSpPr/>
+      <p:grpSpPr>
+        <a:xfrm>
+          <a:off x="0" y="0"/>
+          <a:ext cx="0" cy="0"/>
+          <a:chOff x="0" y="0"/>
+          <a:chExt cx="0" cy="0"/>
+        </a:xfrm>
+      </p:grpSpPr>
       <p:sp>
         <p:nvSpPr>
           <p:cNvPr id="2" name="Title 1"/>
@@ -21205,6 +21578,7 @@
           <a:lstStyle/>
           <a:p>
             <a:pPr algn="ctr"/>
+            <a:endParaRPr/>
           </a:p>
         </p:txBody>
       </p:sp>
@@ -21584,7 +21958,7 @@
 </file>
 
 <file path=ppt/slides/slide4.xml><?xml version="1.0" encoding="utf-8"?>
-<p:sld xmlns:a="http://schemas.openxmlformats.org/drawingml/2006/main" xmlns:p="http://schemas.openxmlformats.org/presentationml/2006/main" xmlns:r="http://schemas.openxmlformats.org/officeDocument/2006/relationships">
+<p:sld xmlns:a="http://schemas.openxmlformats.org/drawingml/2006/main" xmlns:r="http://schemas.openxmlformats.org/officeDocument/2006/relationships" xmlns:p="http://schemas.openxmlformats.org/presentationml/2006/main">
   <p:cSld>
     <p:spTree>
       <p:nvGrpSpPr>
@@ -21592,7 +21966,14 @@
         <p:cNvGrpSpPr/>
         <p:nvPr/>
       </p:nvGrpSpPr>
-      <p:grpSpPr/>
+      <p:grpSpPr>
+        <a:xfrm>
+          <a:off x="0" y="0"/>
+          <a:ext cx="0" cy="0"/>
+          <a:chOff x="0" y="0"/>
+          <a:chExt cx="0" cy="0"/>
+        </a:xfrm>
+      </p:grpSpPr>
       <p:sp>
         <p:nvSpPr>
           <p:cNvPr id="2" name="Title 1"/>
@@ -21680,6 +22061,7 @@
           <a:lstStyle/>
           <a:p>
             <a:pPr algn="ctr"/>
+            <a:endParaRPr/>
           </a:p>
         </p:txBody>
       </p:sp>
@@ -21798,8 +22180,20 @@
                 <a:tableStyleId>{5C22544A-7EE6-4342-B048-85BDC9FD1C3A}</a:tableStyleId>
               </a:tblPr>
               <a:tblGrid>
-                <a:gridCol w="1118585"/>
-                <a:gridCol w="10067269"/>
+                <a:gridCol w="1118585">
+                  <a:extLst>
+                    <a:ext uri="{9D8B030D-6E8A-4147-A177-3AD203B41FA5}">
+                      <a16:colId xmlns:a16="http://schemas.microsoft.com/office/drawing/2014/main" val="20000"/>
+                    </a:ext>
+                  </a:extLst>
+                </a:gridCol>
+                <a:gridCol w="10067269">
+                  <a:extLst>
+                    <a:ext uri="{9D8B030D-6E8A-4147-A177-3AD203B41FA5}">
+                      <a16:colId xmlns:a16="http://schemas.microsoft.com/office/drawing/2014/main" val="20001"/>
+                    </a:ext>
+                  </a:extLst>
+                </a:gridCol>
               </a:tblGrid>
               <a:tr h="457200">
                 <a:tc>
@@ -21846,6 +22240,11 @@
                     </a:solidFill>
                   </a:tcPr>
                 </a:tc>
+                <a:extLst>
+                  <a:ext uri="{0D108BD9-81ED-4DB2-BD59-A6C34878D82A}">
+                    <a16:rowId xmlns:a16="http://schemas.microsoft.com/office/drawing/2014/main" val="10000"/>
+                  </a:ext>
+                </a:extLst>
               </a:tr>
               <a:tr h="457200">
                 <a:tc>
@@ -21892,6 +22291,11 @@
                     </a:solidFill>
                   </a:tcPr>
                 </a:tc>
+                <a:extLst>
+                  <a:ext uri="{0D108BD9-81ED-4DB2-BD59-A6C34878D82A}">
+                    <a16:rowId xmlns:a16="http://schemas.microsoft.com/office/drawing/2014/main" val="10001"/>
+                  </a:ext>
+                </a:extLst>
               </a:tr>
               <a:tr h="457200">
                 <a:tc>
@@ -21938,6 +22342,11 @@
                     </a:solidFill>
                   </a:tcPr>
                 </a:tc>
+                <a:extLst>
+                  <a:ext uri="{0D108BD9-81ED-4DB2-BD59-A6C34878D82A}">
+                    <a16:rowId xmlns:a16="http://schemas.microsoft.com/office/drawing/2014/main" val="10002"/>
+                  </a:ext>
+                </a:extLst>
               </a:tr>
               <a:tr h="457200">
                 <a:tc>
@@ -21984,6 +22393,11 @@
                     </a:solidFill>
                   </a:tcPr>
                 </a:tc>
+                <a:extLst>
+                  <a:ext uri="{0D108BD9-81ED-4DB2-BD59-A6C34878D82A}">
+                    <a16:rowId xmlns:a16="http://schemas.microsoft.com/office/drawing/2014/main" val="10003"/>
+                  </a:ext>
+                </a:extLst>
               </a:tr>
               <a:tr h="457200">
                 <a:tc>
@@ -22030,6 +22444,11 @@
                     </a:solidFill>
                   </a:tcPr>
                 </a:tc>
+                <a:extLst>
+                  <a:ext uri="{0D108BD9-81ED-4DB2-BD59-A6C34878D82A}">
+                    <a16:rowId xmlns:a16="http://schemas.microsoft.com/office/drawing/2014/main" val="10004"/>
+                  </a:ext>
+                </a:extLst>
               </a:tr>
               <a:tr h="457200">
                 <a:tc>
@@ -22076,6 +22495,11 @@
                     </a:solidFill>
                   </a:tcPr>
                 </a:tc>
+                <a:extLst>
+                  <a:ext uri="{0D108BD9-81ED-4DB2-BD59-A6C34878D82A}">
+                    <a16:rowId xmlns:a16="http://schemas.microsoft.com/office/drawing/2014/main" val="10005"/>
+                  </a:ext>
+                </a:extLst>
               </a:tr>
               <a:tr h="457200">
                 <a:tc>
@@ -22122,6 +22546,11 @@
                     </a:solidFill>
                   </a:tcPr>
                 </a:tc>
+                <a:extLst>
+                  <a:ext uri="{0D108BD9-81ED-4DB2-BD59-A6C34878D82A}">
+                    <a16:rowId xmlns:a16="http://schemas.microsoft.com/office/drawing/2014/main" val="10006"/>
+                  </a:ext>
+                </a:extLst>
               </a:tr>
               <a:tr h="457200">
                 <a:tc>
@@ -22168,6 +22597,11 @@
                     </a:solidFill>
                   </a:tcPr>
                 </a:tc>
+                <a:extLst>
+                  <a:ext uri="{0D108BD9-81ED-4DB2-BD59-A6C34878D82A}">
+                    <a16:rowId xmlns:a16="http://schemas.microsoft.com/office/drawing/2014/main" val="10007"/>
+                  </a:ext>
+                </a:extLst>
               </a:tr>
               <a:tr h="457200">
                 <a:tc>
@@ -22214,6 +22648,11 @@
                     </a:solidFill>
                   </a:tcPr>
                 </a:tc>
+                <a:extLst>
+                  <a:ext uri="{0D108BD9-81ED-4DB2-BD59-A6C34878D82A}">
+                    <a16:rowId xmlns:a16="http://schemas.microsoft.com/office/drawing/2014/main" val="10008"/>
+                  </a:ext>
+                </a:extLst>
               </a:tr>
               <a:tr h="457200">
                 <a:tc>
@@ -22260,6 +22699,11 @@
                     </a:solidFill>
                   </a:tcPr>
                 </a:tc>
+                <a:extLst>
+                  <a:ext uri="{0D108BD9-81ED-4DB2-BD59-A6C34878D82A}">
+                    <a16:rowId xmlns:a16="http://schemas.microsoft.com/office/drawing/2014/main" val="10009"/>
+                  </a:ext>
+                </a:extLst>
               </a:tr>
               <a:tr h="457200">
                 <a:tc>
@@ -22306,6 +22750,11 @@
                     </a:solidFill>
                   </a:tcPr>
                 </a:tc>
+                <a:extLst>
+                  <a:ext uri="{0D108BD9-81ED-4DB2-BD59-A6C34878D82A}">
+                    <a16:rowId xmlns:a16="http://schemas.microsoft.com/office/drawing/2014/main" val="10010"/>
+                  </a:ext>
+                </a:extLst>
               </a:tr>
             </a:tbl>
           </a:graphicData>
@@ -22320,7 +22769,7 @@
 </file>
 
 <file path=ppt/slides/slide5.xml><?xml version="1.0" encoding="utf-8"?>
-<p:sld xmlns:a="http://schemas.openxmlformats.org/drawingml/2006/main" xmlns:p="http://schemas.openxmlformats.org/presentationml/2006/main" xmlns:r="http://schemas.openxmlformats.org/officeDocument/2006/relationships">
+<p:sld xmlns:a="http://schemas.openxmlformats.org/drawingml/2006/main" xmlns:r="http://schemas.openxmlformats.org/officeDocument/2006/relationships" xmlns:p="http://schemas.openxmlformats.org/presentationml/2006/main">
   <p:cSld>
     <p:spTree>
       <p:nvGrpSpPr>
@@ -22328,7 +22777,14 @@
         <p:cNvGrpSpPr/>
         <p:nvPr/>
       </p:nvGrpSpPr>
-      <p:grpSpPr/>
+      <p:grpSpPr>
+        <a:xfrm>
+          <a:off x="0" y="0"/>
+          <a:ext cx="0" cy="0"/>
+          <a:chOff x="0" y="0"/>
+          <a:chExt cx="0" cy="0"/>
+        </a:xfrm>
+      </p:grpSpPr>
       <p:sp>
         <p:nvSpPr>
           <p:cNvPr id="2" name="Title 1"/>
@@ -22416,6 +22872,7 @@
           <a:lstStyle/>
           <a:p>
             <a:pPr algn="ctr"/>
+            <a:endParaRPr/>
           </a:p>
         </p:txBody>
       </p:sp>
@@ -22727,7 +23184,7 @@
           </a:fontRef>
         </p:style>
         <p:txBody>
-          <a:bodyPr rtlCol="0" anchor="ctr" wrap="square" lIns="164592" rIns="164592" tIns="73152" bIns="73152"/>
+          <a:bodyPr wrap="square" lIns="164592" tIns="73152" rIns="164592" bIns="73152" rtlCol="0" anchor="ctr"/>
           <a:lstStyle/>
           <a:p>
             <a:pPr algn="l"/>
@@ -22761,7 +23218,7 @@
 </file>
 
 <file path=ppt/slides/slide6.xml><?xml version="1.0" encoding="utf-8"?>
-<p:sld xmlns:a="http://schemas.openxmlformats.org/drawingml/2006/main" xmlns:p="http://schemas.openxmlformats.org/presentationml/2006/main" xmlns:r="http://schemas.openxmlformats.org/officeDocument/2006/relationships">
+<p:sld xmlns:a="http://schemas.openxmlformats.org/drawingml/2006/main" xmlns:r="http://schemas.openxmlformats.org/officeDocument/2006/relationships" xmlns:p="http://schemas.openxmlformats.org/presentationml/2006/main">
   <p:cSld>
     <p:spTree>
       <p:nvGrpSpPr>
@@ -22769,7 +23226,14 @@
         <p:cNvGrpSpPr/>
         <p:nvPr/>
       </p:nvGrpSpPr>
-      <p:grpSpPr/>
+      <p:grpSpPr>
+        <a:xfrm>
+          <a:off x="0" y="0"/>
+          <a:ext cx="0" cy="0"/>
+          <a:chOff x="0" y="0"/>
+          <a:chExt cx="0" cy="0"/>
+        </a:xfrm>
+      </p:grpSpPr>
       <p:sp>
         <p:nvSpPr>
           <p:cNvPr id="2" name="Title 1"/>
@@ -22857,6 +23321,7 @@
           <a:lstStyle/>
           <a:p>
             <a:pPr algn="ctr"/>
+            <a:endParaRPr/>
           </a:p>
         </p:txBody>
       </p:sp>
@@ -23043,7 +23508,7 @@
           </a:fontRef>
         </p:style>
         <p:txBody>
-          <a:bodyPr rtlCol="0" anchor="ctr" wrap="square" lIns="45720" rIns="45720" tIns="18288" bIns="18288"/>
+          <a:bodyPr wrap="square" lIns="45720" tIns="18288" rIns="45720" bIns="18288" rtlCol="0" anchor="ctr"/>
           <a:lstStyle/>
           <a:p>
             <a:pPr algn="ctr">
@@ -23111,7 +23576,7 @@
           </a:fontRef>
         </p:style>
         <p:txBody>
-          <a:bodyPr rtlCol="0" anchor="ctr" wrap="square" lIns="45720" rIns="45720" tIns="18288" bIns="18288"/>
+          <a:bodyPr wrap="square" lIns="45720" tIns="18288" rIns="45720" bIns="18288" rtlCol="0" anchor="ctr"/>
           <a:lstStyle/>
           <a:p>
             <a:pPr algn="ctr">
@@ -23179,7 +23644,7 @@
           </a:fontRef>
         </p:style>
         <p:txBody>
-          <a:bodyPr rtlCol="0" anchor="ctr" wrap="square" lIns="45720" rIns="45720" tIns="18288" bIns="18288"/>
+          <a:bodyPr wrap="square" lIns="45720" tIns="18288" rIns="45720" bIns="18288" rtlCol="0" anchor="ctr"/>
           <a:lstStyle/>
           <a:p>
             <a:pPr algn="ctr">
@@ -23247,7 +23712,7 @@
           </a:fontRef>
         </p:style>
         <p:txBody>
-          <a:bodyPr rtlCol="0" anchor="ctr" wrap="square" lIns="45720" rIns="45720" tIns="18288" bIns="18288"/>
+          <a:bodyPr wrap="square" lIns="45720" tIns="18288" rIns="45720" bIns="18288" rtlCol="0" anchor="ctr"/>
           <a:lstStyle/>
           <a:p>
             <a:pPr algn="ctr">
@@ -26381,7 +26846,7 @@
           </a:fontRef>
         </p:style>
         <p:txBody>
-          <a:bodyPr rtlCol="0" anchor="ctr" wrap="square" lIns="45720" rIns="45720" tIns="18288" bIns="18288"/>
+          <a:bodyPr wrap="square" lIns="45720" tIns="18288" rIns="45720" bIns="18288" rtlCol="0" anchor="ctr"/>
           <a:lstStyle/>
           <a:p>
             <a:pPr algn="ctr">
@@ -26419,7 +26884,7 @@
 </file>
 
 <file path=ppt/slides/slide7.xml><?xml version="1.0" encoding="utf-8"?>
-<p:sld xmlns:a="http://schemas.openxmlformats.org/drawingml/2006/main" xmlns:p="http://schemas.openxmlformats.org/presentationml/2006/main" xmlns:r="http://schemas.openxmlformats.org/officeDocument/2006/relationships">
+<p:sld xmlns:a="http://schemas.openxmlformats.org/drawingml/2006/main" xmlns:r="http://schemas.openxmlformats.org/officeDocument/2006/relationships" xmlns:p="http://schemas.openxmlformats.org/presentationml/2006/main">
   <p:cSld>
     <p:spTree>
       <p:nvGrpSpPr>
@@ -26427,7 +26892,14 @@
         <p:cNvGrpSpPr/>
         <p:nvPr/>
       </p:nvGrpSpPr>
-      <p:grpSpPr/>
+      <p:grpSpPr>
+        <a:xfrm>
+          <a:off x="0" y="0"/>
+          <a:ext cx="0" cy="0"/>
+          <a:chOff x="0" y="0"/>
+          <a:chExt cx="0" cy="0"/>
+        </a:xfrm>
+      </p:grpSpPr>
       <p:sp>
         <p:nvSpPr>
           <p:cNvPr id="2" name="Title 1"/>
@@ -26515,6 +26987,7 @@
           <a:lstStyle/>
           <a:p>
             <a:pPr algn="ctr"/>
+            <a:endParaRPr/>
           </a:p>
         </p:txBody>
       </p:sp>
@@ -26703,7 +27176,7 @@
           </a:fontRef>
         </p:style>
         <p:txBody>
-          <a:bodyPr rtlCol="0" anchor="t" wrap="square" lIns="146304" tIns="91440" bIns="73152"/>
+          <a:bodyPr wrap="square" lIns="146304" tIns="91440" bIns="73152" rtlCol="0" anchor="t"/>
           <a:lstStyle/>
           <a:p>
             <a:pPr algn="l">
@@ -26718,13 +27191,31 @@
               </a:defRPr>
             </a:pPr>
             <a:r>
-              <a:rPr sz="2000">
+              <a:rPr sz="2000" dirty="0">
                 <a:solidFill>
                   <a:srgbClr val="222222"/>
                 </a:solidFill>
                 <a:latin typeface="Consolas"/>
               </a:rPr>
-              <a:t>unsigned long lastBlink = 0;</a:t>
+              <a:t>unsigned long </a:t>
+            </a:r>
+            <a:r>
+              <a:rPr sz="2000" dirty="0" err="1">
+                <a:solidFill>
+                  <a:srgbClr val="222222"/>
+                </a:solidFill>
+                <a:latin typeface="Consolas"/>
+              </a:rPr>
+              <a:t>lastBlink</a:t>
+            </a:r>
+            <a:r>
+              <a:rPr sz="2000" dirty="0">
+                <a:solidFill>
+                  <a:srgbClr val="222222"/>
+                </a:solidFill>
+                <a:latin typeface="Consolas"/>
+              </a:rPr>
+              <a:t> = 0;</a:t>
             </a:r>
           </a:p>
           <a:p>
@@ -26739,15 +27230,12 @@
                 <a:latin typeface="Consolas"/>
               </a:defRPr>
             </a:pPr>
-            <a:r>
-              <a:rPr sz="2000">
-                <a:solidFill>
-                  <a:srgbClr val="222222"/>
-                </a:solidFill>
-                <a:latin typeface="Consolas"/>
-              </a:rPr>
-              <a:t> </a:t>
-            </a:r>
+            <a:endParaRPr lang="en-US" sz="2000" dirty="0">
+              <a:solidFill>
+                <a:srgbClr val="222222"/>
+              </a:solidFill>
+              <a:latin typeface="Consolas"/>
+            </a:endParaRPr>
           </a:p>
           <a:p>
             <a:pPr algn="l">
@@ -26762,13 +27250,13 @@
               </a:defRPr>
             </a:pPr>
             <a:r>
-              <a:rPr sz="2000">
+              <a:rPr lang="en-US" sz="2000" dirty="0">
                 <a:solidFill>
                   <a:srgbClr val="222222"/>
                 </a:solidFill>
                 <a:latin typeface="Consolas"/>
               </a:rPr>
-              <a:t>void loop() {</a:t>
+              <a:t>INTERVAL = 1000;</a:t>
             </a:r>
           </a:p>
           <a:p>
@@ -26783,15 +27271,12 @@
                 <a:latin typeface="Consolas"/>
               </a:defRPr>
             </a:pPr>
-            <a:r>
-              <a:rPr sz="2000" b="1">
-                <a:solidFill>
-                  <a:srgbClr val="0E7C86"/>
-                </a:solidFill>
-                <a:latin typeface="Consolas"/>
-              </a:rPr>
-              <a:t>  if (millis() - lastBlink &gt;= INTERVAL) {</a:t>
-            </a:r>
+            <a:endParaRPr sz="2000" dirty="0">
+              <a:solidFill>
+                <a:srgbClr val="222222"/>
+              </a:solidFill>
+              <a:latin typeface="Consolas"/>
+            </a:endParaRPr>
           </a:p>
           <a:p>
             <a:pPr algn="l">
@@ -26806,13 +27291,13 @@
               </a:defRPr>
             </a:pPr>
             <a:r>
-              <a:rPr sz="2000" b="1">
-                <a:solidFill>
-                  <a:srgbClr val="0E7C86"/>
+              <a:rPr sz="2000" dirty="0">
+                <a:solidFill>
+                  <a:srgbClr val="222222"/>
                 </a:solidFill>
                 <a:latin typeface="Consolas"/>
               </a:rPr>
-              <a:t>    lastBlink = millis();</a:t>
+              <a:t>void loop() {</a:t>
             </a:r>
           </a:p>
           <a:p>
@@ -26828,13 +27313,49 @@
               </a:defRPr>
             </a:pPr>
             <a:r>
-              <a:rPr sz="2000">
-                <a:solidFill>
-                  <a:srgbClr val="666666"/>
+              <a:rPr sz="2000" b="1" dirty="0">
+                <a:solidFill>
+                  <a:srgbClr val="0E7C86"/>
                 </a:solidFill>
                 <a:latin typeface="Consolas"/>
               </a:rPr>
-              <a:t>    // ...do the thing...</a:t>
+              <a:t>  if (</a:t>
+            </a:r>
+            <a:r>
+              <a:rPr sz="2000" b="1" dirty="0" err="1">
+                <a:solidFill>
+                  <a:srgbClr val="0E7C86"/>
+                </a:solidFill>
+                <a:latin typeface="Consolas"/>
+              </a:rPr>
+              <a:t>millis</a:t>
+            </a:r>
+            <a:r>
+              <a:rPr sz="2000" b="1" dirty="0">
+                <a:solidFill>
+                  <a:srgbClr val="0E7C86"/>
+                </a:solidFill>
+                <a:latin typeface="Consolas"/>
+              </a:rPr>
+              <a:t>() - </a:t>
+            </a:r>
+            <a:r>
+              <a:rPr sz="2000" b="1" dirty="0" err="1">
+                <a:solidFill>
+                  <a:srgbClr val="0E7C86"/>
+                </a:solidFill>
+                <a:latin typeface="Consolas"/>
+              </a:rPr>
+              <a:t>lastBlink</a:t>
+            </a:r>
+            <a:r>
+              <a:rPr sz="2000" b="1" dirty="0">
+                <a:solidFill>
+                  <a:srgbClr val="0E7C86"/>
+                </a:solidFill>
+                <a:latin typeface="Consolas"/>
+              </a:rPr>
+              <a:t> &gt;= INTERVAL) {</a:t>
             </a:r>
           </a:p>
           <a:p>
@@ -26850,13 +27371,49 @@
               </a:defRPr>
             </a:pPr>
             <a:r>
-              <a:rPr sz="2000">
-                <a:solidFill>
-                  <a:srgbClr val="222222"/>
+              <a:rPr sz="2000" b="1" dirty="0">
+                <a:solidFill>
+                  <a:srgbClr val="0E7C86"/>
                 </a:solidFill>
                 <a:latin typeface="Consolas"/>
               </a:rPr>
-              <a:t>  }</a:t>
+              <a:t>    </a:t>
+            </a:r>
+            <a:r>
+              <a:rPr sz="2000" b="1" dirty="0" err="1">
+                <a:solidFill>
+                  <a:srgbClr val="0E7C86"/>
+                </a:solidFill>
+                <a:latin typeface="Consolas"/>
+              </a:rPr>
+              <a:t>lastBlink</a:t>
+            </a:r>
+            <a:r>
+              <a:rPr sz="2000" b="1" dirty="0">
+                <a:solidFill>
+                  <a:srgbClr val="0E7C86"/>
+                </a:solidFill>
+                <a:latin typeface="Consolas"/>
+              </a:rPr>
+              <a:t> = </a:t>
+            </a:r>
+            <a:r>
+              <a:rPr sz="2000" b="1" dirty="0" err="1">
+                <a:solidFill>
+                  <a:srgbClr val="0E7C86"/>
+                </a:solidFill>
+                <a:latin typeface="Consolas"/>
+              </a:rPr>
+              <a:t>millis</a:t>
+            </a:r>
+            <a:r>
+              <a:rPr sz="2000" b="1" dirty="0">
+                <a:solidFill>
+                  <a:srgbClr val="0E7C86"/>
+                </a:solidFill>
+                <a:latin typeface="Consolas"/>
+              </a:rPr>
+              <a:t>();</a:t>
             </a:r>
           </a:p>
           <a:p>
@@ -26872,13 +27429,13 @@
               </a:defRPr>
             </a:pPr>
             <a:r>
-              <a:rPr sz="2000">
-                <a:solidFill>
-                  <a:srgbClr val="222222"/>
+              <a:rPr sz="2000" dirty="0">
+                <a:solidFill>
+                  <a:srgbClr val="666666"/>
                 </a:solidFill>
                 <a:latin typeface="Consolas"/>
               </a:rPr>
-              <a:t> </a:t>
+              <a:t>    // ...do the thing...</a:t>
             </a:r>
           </a:p>
           <a:p>
@@ -26894,13 +27451,13 @@
               </a:defRPr>
             </a:pPr>
             <a:r>
-              <a:rPr sz="2000">
-                <a:solidFill>
-                  <a:srgbClr val="666666"/>
+              <a:rPr sz="2000" dirty="0">
+                <a:solidFill>
+                  <a:srgbClr val="222222"/>
                 </a:solidFill>
                 <a:latin typeface="Consolas"/>
               </a:rPr>
-              <a:t>  // ...and everything else keeps running...</a:t>
+              <a:t>  }</a:t>
             </a:r>
           </a:p>
           <a:p>
@@ -26916,7 +27473,51 @@
               </a:defRPr>
             </a:pPr>
             <a:r>
-              <a:rPr sz="2000">
+              <a:rPr sz="2000" dirty="0">
+                <a:solidFill>
+                  <a:srgbClr val="222222"/>
+                </a:solidFill>
+                <a:latin typeface="Consolas"/>
+              </a:rPr>
+              <a:t> </a:t>
+            </a:r>
+          </a:p>
+          <a:p>
+            <a:pPr algn="l">
+              <a:lnSpc>
+                <a:spcPct val="100000"/>
+              </a:lnSpc>
+              <a:spcAft>
+                <a:spcPts val="0"/>
+              </a:spcAft>
+              <a:defRPr sz="2000">
+                <a:latin typeface="Consolas"/>
+              </a:defRPr>
+            </a:pPr>
+            <a:r>
+              <a:rPr sz="2000" dirty="0">
+                <a:solidFill>
+                  <a:srgbClr val="666666"/>
+                </a:solidFill>
+                <a:latin typeface="Consolas"/>
+              </a:rPr>
+              <a:t>  // ...and everything else keeps running...</a:t>
+            </a:r>
+          </a:p>
+          <a:p>
+            <a:pPr algn="l">
+              <a:lnSpc>
+                <a:spcPct val="100000"/>
+              </a:lnSpc>
+              <a:spcAft>
+                <a:spcPts val="0"/>
+              </a:spcAft>
+              <a:defRPr sz="2000">
+                <a:latin typeface="Consolas"/>
+              </a:defRPr>
+            </a:pPr>
+            <a:r>
+              <a:rPr sz="2000" dirty="0">
                 <a:solidFill>
                   <a:srgbClr val="222222"/>
                 </a:solidFill>
@@ -27084,7 +27685,7 @@
 </file>
 
 <file path=ppt/slides/slide8.xml><?xml version="1.0" encoding="utf-8"?>
-<p:sld xmlns:a="http://schemas.openxmlformats.org/drawingml/2006/main" xmlns:p="http://schemas.openxmlformats.org/presentationml/2006/main" xmlns:r="http://schemas.openxmlformats.org/officeDocument/2006/relationships">
+<p:sld xmlns:a="http://schemas.openxmlformats.org/drawingml/2006/main" xmlns:r="http://schemas.openxmlformats.org/officeDocument/2006/relationships" xmlns:p="http://schemas.openxmlformats.org/presentationml/2006/main">
   <p:cSld>
     <p:spTree>
       <p:nvGrpSpPr>
@@ -27092,7 +27693,14 @@
         <p:cNvGrpSpPr/>
         <p:nvPr/>
       </p:nvGrpSpPr>
-      <p:grpSpPr/>
+      <p:grpSpPr>
+        <a:xfrm>
+          <a:off x="0" y="0"/>
+          <a:ext cx="0" cy="0"/>
+          <a:chOff x="0" y="0"/>
+          <a:chExt cx="0" cy="0"/>
+        </a:xfrm>
+      </p:grpSpPr>
       <p:sp>
         <p:nvSpPr>
           <p:cNvPr id="2" name="TextBox 1"/>
@@ -27230,6 +27838,7 @@
           <a:lstStyle/>
           <a:p>
             <a:pPr algn="ctr"/>
+            <a:endParaRPr/>
           </a:p>
         </p:txBody>
       </p:sp>
@@ -27370,7 +27979,7 @@
           </a:fontRef>
         </p:style>
         <p:txBody>
-          <a:bodyPr rtlCol="0" anchor="ctr" wrap="square" lIns="73152" rIns="73152"/>
+          <a:bodyPr wrap="square" lIns="73152" rIns="73152" rtlCol="0" anchor="ctr"/>
           <a:lstStyle/>
           <a:p>
             <a:pPr algn="ctr">
@@ -27488,7 +28097,7 @@
           </a:fontRef>
         </p:style>
         <p:txBody>
-          <a:bodyPr rtlCol="0" anchor="ctr" wrap="square" lIns="73152" rIns="73152"/>
+          <a:bodyPr wrap="square" lIns="73152" rIns="73152" rtlCol="0" anchor="ctr"/>
           <a:lstStyle/>
           <a:p>
             <a:pPr algn="ctr">
@@ -27606,7 +28215,7 @@
           </a:fontRef>
         </p:style>
         <p:txBody>
-          <a:bodyPr rtlCol="0" anchor="ctr" wrap="square" lIns="73152" rIns="73152"/>
+          <a:bodyPr wrap="square" lIns="73152" rIns="73152" rtlCol="0" anchor="ctr"/>
           <a:lstStyle/>
           <a:p>
             <a:pPr algn="ctr">
@@ -27676,7 +28285,7 @@
           </a:fontRef>
         </p:style>
         <p:txBody>
-          <a:bodyPr rtlCol="0" anchor="ctr" wrap="square" lIns="73152" rIns="73152"/>
+          <a:bodyPr wrap="square" lIns="73152" rIns="73152" rtlCol="0" anchor="ctr"/>
           <a:lstStyle/>
           <a:p>
             <a:pPr algn="ctr">
@@ -27746,7 +28355,7 @@
           </a:fontRef>
         </p:style>
         <p:txBody>
-          <a:bodyPr rtlCol="0" anchor="ctr" wrap="square" lIns="73152" rIns="73152"/>
+          <a:bodyPr wrap="square" lIns="73152" rIns="73152" rtlCol="0" anchor="ctr"/>
           <a:lstStyle/>
           <a:p>
             <a:pPr algn="ctr">
@@ -27784,7 +28393,7 @@
 </file>
 
 <file path=ppt/slides/slide9.xml><?xml version="1.0" encoding="utf-8"?>
-<p:sld xmlns:a="http://schemas.openxmlformats.org/drawingml/2006/main" xmlns:p="http://schemas.openxmlformats.org/presentationml/2006/main" xmlns:r="http://schemas.openxmlformats.org/officeDocument/2006/relationships">
+<p:sld xmlns:a="http://schemas.openxmlformats.org/drawingml/2006/main" xmlns:r="http://schemas.openxmlformats.org/officeDocument/2006/relationships" xmlns:p="http://schemas.openxmlformats.org/presentationml/2006/main">
   <p:cSld>
     <p:spTree>
       <p:nvGrpSpPr>
@@ -27792,7 +28401,14 @@
         <p:cNvGrpSpPr/>
         <p:nvPr/>
       </p:nvGrpSpPr>
-      <p:grpSpPr/>
+      <p:grpSpPr>
+        <a:xfrm>
+          <a:off x="0" y="0"/>
+          <a:ext cx="0" cy="0"/>
+          <a:chOff x="0" y="0"/>
+          <a:chExt cx="0" cy="0"/>
+        </a:xfrm>
+      </p:grpSpPr>
       <p:sp>
         <p:nvSpPr>
           <p:cNvPr id="2" name="Title 1"/>
@@ -27880,6 +28496,7 @@
           <a:lstStyle/>
           <a:p>
             <a:pPr algn="ctr"/>
+            <a:endParaRPr/>
           </a:p>
         </p:txBody>
       </p:sp>
@@ -28018,7 +28635,7 @@
           </a:fontRef>
         </p:style>
         <p:txBody>
-          <a:bodyPr rtlCol="0" anchor="ctr" wrap="square" lIns="182880"/>
+          <a:bodyPr wrap="square" lIns="182880" rtlCol="0" anchor="ctr"/>
           <a:lstStyle/>
           <a:p>
             <a:pPr algn="l"/>
@@ -28781,44 +29398,44 @@
         <a:sysClr val="window" lastClr="FFFFFF"/>
       </a:lt1>
       <a:dk2>
-        <a:srgbClr val="1F497D"/>
+        <a:srgbClr val="0E2841"/>
       </a:dk2>
       <a:lt2>
-        <a:srgbClr val="EEECE1"/>
+        <a:srgbClr val="E8E8E8"/>
       </a:lt2>
       <a:accent1>
-        <a:srgbClr val="4F81BD"/>
+        <a:srgbClr val="156082"/>
       </a:accent1>
       <a:accent2>
-        <a:srgbClr val="C0504D"/>
+        <a:srgbClr val="E97132"/>
       </a:accent2>
       <a:accent3>
-        <a:srgbClr val="9BBB59"/>
+        <a:srgbClr val="196B24"/>
       </a:accent3>
       <a:accent4>
-        <a:srgbClr val="8064A2"/>
+        <a:srgbClr val="0F9ED5"/>
       </a:accent4>
       <a:accent5>
-        <a:srgbClr val="4BACC6"/>
+        <a:srgbClr val="A02B93"/>
       </a:accent5>
       <a:accent6>
-        <a:srgbClr val="F79646"/>
+        <a:srgbClr val="4EA72E"/>
       </a:accent6>
       <a:hlink>
-        <a:srgbClr val="0000FF"/>
+        <a:srgbClr val="467886"/>
       </a:hlink>
       <a:folHlink>
-        <a:srgbClr val="800080"/>
+        <a:srgbClr val="96607D"/>
       </a:folHlink>
     </a:clrScheme>
     <a:fontScheme name="Office">
       <a:majorFont>
-        <a:latin typeface="Calibri"/>
+        <a:latin typeface="Aptos Display" panose="02110004020202020204"/>
         <a:ea typeface=""/>
         <a:cs typeface=""/>
-        <a:font script="Jpan" typeface="ＭＳ Ｐゴシック"/>
+        <a:font script="Jpan" typeface="游ゴシック Light"/>
         <a:font script="Hang" typeface="맑은 고딕"/>
-        <a:font script="Hans" typeface="宋体"/>
+        <a:font script="Hans" typeface="等线 Light"/>
         <a:font script="Hant" typeface="新細明體"/>
         <a:font script="Arab" typeface="Times New Roman"/>
         <a:font script="Hebr" typeface="Times New Roman"/>
@@ -28846,14 +29463,31 @@
         <a:font script="Viet" typeface="Times New Roman"/>
         <a:font script="Uigh" typeface="Microsoft Uighur"/>
         <a:font script="Geor" typeface="Sylfaen"/>
+        <a:font script="Armn" typeface="Arial"/>
+        <a:font script="Bugi" typeface="Leelawadee UI"/>
+        <a:font script="Bopo" typeface="Microsoft JhengHei"/>
+        <a:font script="Java" typeface="Javanese Text"/>
+        <a:font script="Lisu" typeface="Segoe UI"/>
+        <a:font script="Mymr" typeface="Myanmar Text"/>
+        <a:font script="Nkoo" typeface="Ebrima"/>
+        <a:font script="Olck" typeface="Nirmala UI"/>
+        <a:font script="Osma" typeface="Ebrima"/>
+        <a:font script="Phag" typeface="Phagspa"/>
+        <a:font script="Syrn" typeface="Estrangelo Edessa"/>
+        <a:font script="Syrj" typeface="Estrangelo Edessa"/>
+        <a:font script="Syre" typeface="Estrangelo Edessa"/>
+        <a:font script="Sora" typeface="Nirmala UI"/>
+        <a:font script="Tale" typeface="Microsoft Tai Le"/>
+        <a:font script="Talu" typeface="Microsoft New Tai Lue"/>
+        <a:font script="Tfng" typeface="Ebrima"/>
       </a:majorFont>
       <a:minorFont>
-        <a:latin typeface="Calibri"/>
+        <a:latin typeface="Aptos" panose="02110004020202020204"/>
         <a:ea typeface=""/>
         <a:cs typeface=""/>
-        <a:font script="Jpan" typeface="ＭＳ Ｐゴシック"/>
+        <a:font script="Jpan" typeface="游ゴシック"/>
         <a:font script="Hang" typeface="맑은 고딕"/>
-        <a:font script="Hans" typeface="宋体"/>
+        <a:font script="Hans" typeface="等线"/>
         <a:font script="Hant" typeface="新細明體"/>
         <a:font script="Arab" typeface="Arial"/>
         <a:font script="Hebr" typeface="Arial"/>
@@ -28881,6 +29515,23 @@
         <a:font script="Viet" typeface="Arial"/>
         <a:font script="Uigh" typeface="Microsoft Uighur"/>
         <a:font script="Geor" typeface="Sylfaen"/>
+        <a:font script="Armn" typeface="Arial"/>
+        <a:font script="Bugi" typeface="Leelawadee UI"/>
+        <a:font script="Bopo" typeface="Microsoft JhengHei"/>
+        <a:font script="Java" typeface="Javanese Text"/>
+        <a:font script="Lisu" typeface="Segoe UI"/>
+        <a:font script="Mymr" typeface="Myanmar Text"/>
+        <a:font script="Nkoo" typeface="Ebrima"/>
+        <a:font script="Olck" typeface="Nirmala UI"/>
+        <a:font script="Osma" typeface="Ebrima"/>
+        <a:font script="Phag" typeface="Phagspa"/>
+        <a:font script="Syrn" typeface="Estrangelo Edessa"/>
+        <a:font script="Syrj" typeface="Estrangelo Edessa"/>
+        <a:font script="Syre" typeface="Estrangelo Edessa"/>
+        <a:font script="Sora" typeface="Nirmala UI"/>
+        <a:font script="Tale" typeface="Microsoft Tai Le"/>
+        <a:font script="Talu" typeface="Microsoft New Tai Lue"/>
+        <a:font script="Tfng" typeface="Ebrima"/>
       </a:minorFont>
     </a:fontScheme>
     <a:fmtScheme name="Office">
@@ -28892,180 +29543,136 @@
           <a:gsLst>
             <a:gs pos="0">
               <a:schemeClr val="phClr">
-                <a:tint val="50000"/>
-                <a:satMod val="300000"/>
+                <a:lumMod val="110000"/>
+                <a:satMod val="105000"/>
+                <a:tint val="67000"/>
               </a:schemeClr>
             </a:gs>
-            <a:gs pos="35000">
+            <a:gs pos="50000">
               <a:schemeClr val="phClr">
-                <a:tint val="37000"/>
-                <a:satMod val="300000"/>
+                <a:lumMod val="105000"/>
+                <a:satMod val="103000"/>
+                <a:tint val="73000"/>
               </a:schemeClr>
             </a:gs>
             <a:gs pos="100000">
               <a:schemeClr val="phClr">
-                <a:tint val="15000"/>
-                <a:satMod val="350000"/>
+                <a:lumMod val="105000"/>
+                <a:satMod val="109000"/>
+                <a:tint val="81000"/>
               </a:schemeClr>
             </a:gs>
           </a:gsLst>
-          <a:lin ang="16200000" scaled="1"/>
+          <a:lin ang="5400000" scaled="0"/>
         </a:gradFill>
         <a:gradFill rotWithShape="1">
           <a:gsLst>
             <a:gs pos="0">
               <a:schemeClr val="phClr">
-                <a:tint val="100000"/>
+                <a:satMod val="103000"/>
+                <a:lumMod val="102000"/>
+                <a:tint val="94000"/>
+              </a:schemeClr>
+            </a:gs>
+            <a:gs pos="50000">
+              <a:schemeClr val="phClr">
+                <a:satMod val="110000"/>
+                <a:lumMod val="100000"/>
                 <a:shade val="100000"/>
-                <a:satMod val="130000"/>
               </a:schemeClr>
             </a:gs>
             <a:gs pos="100000">
               <a:schemeClr val="phClr">
-                <a:tint val="50000"/>
-                <a:shade val="100000"/>
-                <a:satMod val="350000"/>
+                <a:lumMod val="99000"/>
+                <a:satMod val="120000"/>
+                <a:shade val="78000"/>
               </a:schemeClr>
             </a:gs>
           </a:gsLst>
-          <a:lin ang="16200000" scaled="0"/>
+          <a:lin ang="5400000" scaled="0"/>
         </a:gradFill>
       </a:fillStyleLst>
       <a:lnStyleLst>
-        <a:ln w="9525" cap="flat" cmpd="sng" algn="ctr">
+        <a:ln w="12700" cap="flat" cmpd="sng" algn="ctr">
           <a:solidFill>
-            <a:schemeClr val="phClr">
-              <a:shade val="95000"/>
-              <a:satMod val="105000"/>
-            </a:schemeClr>
+            <a:schemeClr val="phClr"/>
           </a:solidFill>
           <a:prstDash val="solid"/>
+          <a:miter lim="800000"/>
+        </a:ln>
+        <a:ln w="19050" cap="flat" cmpd="sng" algn="ctr">
+          <a:solidFill>
+            <a:schemeClr val="phClr"/>
+          </a:solidFill>
+          <a:prstDash val="solid"/>
+          <a:miter lim="800000"/>
         </a:ln>
         <a:ln w="25400" cap="flat" cmpd="sng" algn="ctr">
           <a:solidFill>
             <a:schemeClr val="phClr"/>
           </a:solidFill>
           <a:prstDash val="solid"/>
-        </a:ln>
-        <a:ln w="38100" cap="flat" cmpd="sng" algn="ctr">
-          <a:solidFill>
-            <a:schemeClr val="phClr"/>
-          </a:solidFill>
-          <a:prstDash val="solid"/>
+          <a:miter lim="800000"/>
         </a:ln>
       </a:lnStyleLst>
       <a:effectStyleLst>
         <a:effectStyle>
+          <a:effectLst/>
+        </a:effectStyle>
+        <a:effectStyle>
+          <a:effectLst/>
+        </a:effectStyle>
+        <a:effectStyle>
           <a:effectLst>
-            <a:outerShdw blurRad="40000" dist="20000" dir="5400000" rotWithShape="0">
+            <a:outerShdw blurRad="57150" dist="19050" dir="5400000" algn="ctr" rotWithShape="0">
               <a:srgbClr val="000000">
-                <a:alpha val="38000"/>
+                <a:alpha val="63000"/>
               </a:srgbClr>
             </a:outerShdw>
           </a:effectLst>
-        </a:effectStyle>
-        <a:effectStyle>
-          <a:effectLst>
-            <a:outerShdw blurRad="40000" dist="23000" dir="5400000" rotWithShape="0">
-              <a:srgbClr val="000000">
-                <a:alpha val="35000"/>
-              </a:srgbClr>
-            </a:outerShdw>
-          </a:effectLst>
-        </a:effectStyle>
-        <a:effectStyle>
-          <a:effectLst>
-            <a:outerShdw blurRad="40000" dist="23000" dir="5400000" rotWithShape="0">
-              <a:srgbClr val="000000">
-                <a:alpha val="35000"/>
-              </a:srgbClr>
-            </a:outerShdw>
-          </a:effectLst>
-          <a:scene3d>
-            <a:camera prst="orthographicFront">
-              <a:rot lat="0" lon="0" rev="0"/>
-            </a:camera>
-            <a:lightRig rig="threePt" dir="t">
-              <a:rot lat="0" lon="0" rev="1200000"/>
-            </a:lightRig>
-          </a:scene3d>
-          <a:sp3d>
-            <a:bevelT w="63500" h="25400"/>
-          </a:sp3d>
         </a:effectStyle>
       </a:effectStyleLst>
       <a:bgFillStyleLst>
         <a:solidFill>
           <a:schemeClr val="phClr"/>
         </a:solidFill>
+        <a:solidFill>
+          <a:schemeClr val="phClr">
+            <a:tint val="95000"/>
+            <a:satMod val="170000"/>
+          </a:schemeClr>
+        </a:solidFill>
         <a:gradFill rotWithShape="1">
           <a:gsLst>
             <a:gs pos="0">
               <a:schemeClr val="phClr">
-                <a:tint val="40000"/>
-                <a:satMod val="350000"/>
+                <a:tint val="93000"/>
+                <a:satMod val="150000"/>
+                <a:shade val="98000"/>
+                <a:lumMod val="102000"/>
               </a:schemeClr>
             </a:gs>
-            <a:gs pos="40000">
+            <a:gs pos="50000">
               <a:schemeClr val="phClr">
-                <a:tint val="45000"/>
-                <a:shade val="99000"/>
-                <a:satMod val="350000"/>
+                <a:tint val="98000"/>
+                <a:satMod val="130000"/>
+                <a:shade val="90000"/>
+                <a:lumMod val="103000"/>
               </a:schemeClr>
             </a:gs>
             <a:gs pos="100000">
               <a:schemeClr val="phClr">
-                <a:shade val="20000"/>
-                <a:satMod val="255000"/>
+                <a:shade val="63000"/>
+                <a:satMod val="120000"/>
               </a:schemeClr>
             </a:gs>
           </a:gsLst>
-          <a:path path="circle">
-            <a:fillToRect l="50000" t="-80000" r="50000" b="180000"/>
-          </a:path>
-        </a:gradFill>
-        <a:gradFill rotWithShape="1">
-          <a:gsLst>
-            <a:gs pos="0">
-              <a:schemeClr val="phClr">
-                <a:tint val="80000"/>
-                <a:satMod val="300000"/>
-              </a:schemeClr>
-            </a:gs>
-            <a:gs pos="100000">
-              <a:schemeClr val="phClr">
-                <a:shade val="30000"/>
-                <a:satMod val="200000"/>
-              </a:schemeClr>
-            </a:gs>
-          </a:gsLst>
-          <a:path path="circle">
-            <a:fillToRect l="50000" t="50000" r="50000" b="50000"/>
-          </a:path>
+          <a:lin ang="5400000" scaled="0"/>
         </a:gradFill>
       </a:bgFillStyleLst>
     </a:fmtScheme>
   </a:themeElements>
   <a:objectDefaults>
-    <a:spDef>
-      <a:spPr/>
-      <a:bodyPr/>
-      <a:lstStyle/>
-      <a:style>
-        <a:lnRef idx="1">
-          <a:schemeClr val="accent1"/>
-        </a:lnRef>
-        <a:fillRef idx="3">
-          <a:schemeClr val="accent1"/>
-        </a:fillRef>
-        <a:effectRef idx="2">
-          <a:schemeClr val="accent1"/>
-        </a:effectRef>
-        <a:fontRef idx="minor">
-          <a:schemeClr val="lt1"/>
-        </a:fontRef>
-      </a:style>
-    </a:spDef>
     <a:lnDef>
       <a:spPr/>
       <a:bodyPr/>
@@ -29087,5 +29694,10 @@
     </a:lnDef>
   </a:objectDefaults>
   <a:extraClrSchemeLst/>
+  <a:extLst>
+    <a:ext uri="{05A4C25C-085E-4340-85A3-A5531E510DB2}">
+      <thm15:themeFamily xmlns:thm15="http://schemas.microsoft.com/office/thememl/2012/main" name="Office Theme" id="{2E142A2C-CD16-42D6-873A-C26D2A0506FA}" vid="{1BDDFF52-6CD6-40A5-AB3C-68EB2F1E4D0A}"/>
+    </a:ext>
+  </a:extLst>
 </a:theme>
 </file>
--- a/ground-vehicle/docs/courses/beginner-ps3/l5_maneuvers_with_lights.pptx
+++ b/ground-vehicle/docs/courses/beginner-ps3/l5_maneuvers_with_lights.pptx
@@ -4,43 +4,40 @@
   <p:sldMasterIdLst>
     <p:sldMasterId id="2147483648" r:id="rId1"/>
   </p:sldMasterIdLst>
-  <p:notesMasterIdLst>
-    <p:notesMasterId r:id="rId33"/>
-  </p:notesMasterIdLst>
   <p:sldIdLst>
-    <p:sldId id="256" r:id="rId2"/>
-    <p:sldId id="257" r:id="rId3"/>
-    <p:sldId id="258" r:id="rId4"/>
-    <p:sldId id="259" r:id="rId5"/>
-    <p:sldId id="260" r:id="rId6"/>
-    <p:sldId id="261" r:id="rId7"/>
-    <p:sldId id="262" r:id="rId8"/>
-    <p:sldId id="263" r:id="rId9"/>
-    <p:sldId id="264" r:id="rId10"/>
-    <p:sldId id="265" r:id="rId11"/>
-    <p:sldId id="266" r:id="rId12"/>
-    <p:sldId id="267" r:id="rId13"/>
-    <p:sldId id="268" r:id="rId14"/>
-    <p:sldId id="269" r:id="rId15"/>
-    <p:sldId id="270" r:id="rId16"/>
-    <p:sldId id="271" r:id="rId17"/>
-    <p:sldId id="272" r:id="rId18"/>
-    <p:sldId id="273" r:id="rId19"/>
-    <p:sldId id="274" r:id="rId20"/>
-    <p:sldId id="275" r:id="rId21"/>
-    <p:sldId id="276" r:id="rId22"/>
-    <p:sldId id="277" r:id="rId23"/>
-    <p:sldId id="278" r:id="rId24"/>
-    <p:sldId id="279" r:id="rId25"/>
-    <p:sldId id="280" r:id="rId26"/>
-    <p:sldId id="281" r:id="rId27"/>
-    <p:sldId id="282" r:id="rId28"/>
-    <p:sldId id="283" r:id="rId29"/>
-    <p:sldId id="284" r:id="rId30"/>
-    <p:sldId id="285" r:id="rId31"/>
-    <p:sldId id="286" r:id="rId32"/>
+    <p:sldId id="256" r:id="rId7"/>
+    <p:sldId id="257" r:id="rId9"/>
+    <p:sldId id="258" r:id="rId10"/>
+    <p:sldId id="259" r:id="rId11"/>
+    <p:sldId id="260" r:id="rId12"/>
+    <p:sldId id="261" r:id="rId13"/>
+    <p:sldId id="262" r:id="rId14"/>
+    <p:sldId id="263" r:id="rId15"/>
+    <p:sldId id="264" r:id="rId16"/>
+    <p:sldId id="265" r:id="rId17"/>
+    <p:sldId id="266" r:id="rId18"/>
+    <p:sldId id="267" r:id="rId19"/>
+    <p:sldId id="268" r:id="rId20"/>
+    <p:sldId id="269" r:id="rId21"/>
+    <p:sldId id="270" r:id="rId22"/>
+    <p:sldId id="271" r:id="rId23"/>
+    <p:sldId id="272" r:id="rId24"/>
+    <p:sldId id="273" r:id="rId25"/>
+    <p:sldId id="274" r:id="rId26"/>
+    <p:sldId id="275" r:id="rId27"/>
+    <p:sldId id="276" r:id="rId28"/>
+    <p:sldId id="277" r:id="rId29"/>
+    <p:sldId id="278" r:id="rId30"/>
+    <p:sldId id="279" r:id="rId31"/>
+    <p:sldId id="280" r:id="rId32"/>
+    <p:sldId id="281" r:id="rId33"/>
+    <p:sldId id="282" r:id="rId34"/>
+    <p:sldId id="283" r:id="rId35"/>
+    <p:sldId id="284" r:id="rId36"/>
+    <p:sldId id="285" r:id="rId37"/>
+    <p:sldId id="286" r:id="rId38"/>
   </p:sldIdLst>
-  <p:sldSz cx="12192000" cy="6858000"/>
+  <p:sldSz cx="12191695" cy="6858000" type="screen4x3"/>
   <p:notesSz cx="6858000" cy="9144000"/>
   <p:defaultTextStyle>
     <a:defPPr>
@@ -137,71 +134,11 @@
       </a:defRPr>
     </a:lvl9pPr>
   </p:defaultTextStyle>
-  <p:extLst>
-    <p:ext uri="{EFAFB233-063F-42B5-8137-9DF3F51BA10A}">
-      <p15:sldGuideLst xmlns:p15="http://schemas.microsoft.com/office/powerpoint/2012/main">
-        <p15:guide id="1" orient="horz" pos="2160">
-          <p15:clr>
-            <a:srgbClr val="A4A3A4"/>
-          </p15:clr>
-        </p15:guide>
-        <p15:guide id="2" pos="2880">
-          <p15:clr>
-            <a:srgbClr val="A4A3A4"/>
-          </p15:clr>
-        </p15:guide>
-      </p15:sldGuideLst>
-    </p:ext>
-  </p:extLst>
 </p:presentation>
 </file>
 
-<file path=ppt/changesInfos/changesInfo1.xml><?xml version="1.0" encoding="utf-8"?>
-<pc:chgInfo xmlns:a="http://schemas.openxmlformats.org/drawingml/2006/main" xmlns:r="http://schemas.openxmlformats.org/officeDocument/2006/relationships" xmlns:ac="http://schemas.microsoft.com/office/drawing/2013/main/command" xmlns:pc="http://schemas.microsoft.com/office/powerpoint/2013/main/command">
-  <pc:docChgLst>
-    <pc:chgData name="Kevin Bowen" userId="ee6702fae12807e4" providerId="LiveId" clId="{5CB6C98B-5151-4E5D-BF39-3ED613ABF9A3}"/>
-    <pc:docChg chg="modSld">
-      <pc:chgData name="Kevin Bowen" userId="ee6702fae12807e4" providerId="LiveId" clId="{5CB6C98B-5151-4E5D-BF39-3ED613ABF9A3}" dt="2026-09-07T18:29:54.778" v="33" actId="1036"/>
-      <pc:docMkLst>
-        <pc:docMk/>
-      </pc:docMkLst>
-      <pc:sldChg chg="modSp mod">
-        <pc:chgData name="Kevin Bowen" userId="ee6702fae12807e4" providerId="LiveId" clId="{5CB6C98B-5151-4E5D-BF39-3ED613ABF9A3}" dt="2026-09-07T17:32:29.105" v="32" actId="20577"/>
-        <pc:sldMkLst>
-          <pc:docMk/>
-          <pc:sldMk cId="0" sldId="262"/>
-        </pc:sldMkLst>
-        <pc:spChg chg="mod">
-          <ac:chgData name="Kevin Bowen" userId="ee6702fae12807e4" providerId="LiveId" clId="{5CB6C98B-5151-4E5D-BF39-3ED613ABF9A3}" dt="2026-09-07T17:32:29.105" v="32" actId="20577"/>
-          <ac:spMkLst>
-            <pc:docMk/>
-            <pc:sldMk cId="0" sldId="262"/>
-            <ac:spMk id="7" creationId="{00000000-0000-0000-0000-000000000000}"/>
-          </ac:spMkLst>
-        </pc:spChg>
-      </pc:sldChg>
-      <pc:sldChg chg="modSp mod">
-        <pc:chgData name="Kevin Bowen" userId="ee6702fae12807e4" providerId="LiveId" clId="{5CB6C98B-5151-4E5D-BF39-3ED613ABF9A3}" dt="2026-09-07T18:29:54.778" v="33" actId="1036"/>
-        <pc:sldMkLst>
-          <pc:docMk/>
-          <pc:sldMk cId="0" sldId="276"/>
-        </pc:sldMkLst>
-        <pc:spChg chg="mod">
-          <ac:chgData name="Kevin Bowen" userId="ee6702fae12807e4" providerId="LiveId" clId="{5CB6C98B-5151-4E5D-BF39-3ED613ABF9A3}" dt="2026-09-07T18:29:54.778" v="33" actId="1036"/>
-          <ac:spMkLst>
-            <pc:docMk/>
-            <pc:sldMk cId="0" sldId="276"/>
-            <ac:spMk id="4" creationId="{00000000-0000-0000-0000-000000000000}"/>
-          </ac:spMkLst>
-        </pc:spChg>
-      </pc:sldChg>
-    </pc:docChg>
-  </pc:docChgLst>
-</pc:chgInfo>
-</file>
-
 <file path=ppt/notesMasters/notesMaster1.xml><?xml version="1.0" encoding="utf-8"?>
-<p:notesMaster xmlns:a="http://schemas.openxmlformats.org/drawingml/2006/main" xmlns:r="http://schemas.openxmlformats.org/officeDocument/2006/relationships" xmlns:p="http://schemas.openxmlformats.org/presentationml/2006/main">
+<p:notesMaster xmlns:a="http://schemas.openxmlformats.org/drawingml/2006/main" xmlns:p="http://schemas.openxmlformats.org/presentationml/2006/main" xmlns:r="http://schemas.openxmlformats.org/officeDocument/2006/relationships">
   <p:cSld>
     <p:bg>
       <p:bgRef idx="1001">
@@ -222,16 +159,241 @@
           <a:chExt cx="0" cy="0"/>
         </a:xfrm>
       </p:grpSpPr>
+      <p:sp>
+        <p:nvSpPr>
+          <p:cNvPr id="2" name="Header Placeholder 1"/>
+          <p:cNvSpPr>
+            <a:spLocks noGrp="1"/>
+          </p:cNvSpPr>
+          <p:nvPr>
+            <p:ph type="hdr" sz="quarter"/>
+          </p:nvPr>
+        </p:nvSpPr>
+        <p:spPr>
+          <a:xfrm>
+            <a:off x="0" y="0"/>
+            <a:ext cx="2971800" cy="457200"/>
+          </a:xfrm>
+          <a:prstGeom prst="rect">
+            <a:avLst/>
+          </a:prstGeom>
+        </p:spPr>
+        <p:txBody>
+          <a:bodyPr vert="horz" lIns="91440" tIns="45720" rIns="91440" bIns="45720" rtlCol="0"/>
+          <a:lstStyle>
+            <a:lvl1pPr algn="l">
+              <a:defRPr sz="1200"/>
+            </a:lvl1pPr>
+          </a:lstStyle>
+          <a:p>
+            <a:endParaRPr lang="en-US"/>
+          </a:p>
+        </p:txBody>
+      </p:sp>
+      <p:sp>
+        <p:nvSpPr>
+          <p:cNvPr id="3" name="Date Placeholder 2"/>
+          <p:cNvSpPr>
+            <a:spLocks noGrp="1"/>
+          </p:cNvSpPr>
+          <p:nvPr>
+            <p:ph type="dt" idx="1"/>
+          </p:nvPr>
+        </p:nvSpPr>
+        <p:spPr>
+          <a:xfrm>
+            <a:off x="3884613" y="0"/>
+            <a:ext cx="2971800" cy="457200"/>
+          </a:xfrm>
+          <a:prstGeom prst="rect">
+            <a:avLst/>
+          </a:prstGeom>
+        </p:spPr>
+        <p:txBody>
+          <a:bodyPr vert="horz" lIns="91440" tIns="45720" rIns="91440" bIns="45720" rtlCol="0"/>
+          <a:lstStyle>
+            <a:lvl1pPr algn="r">
+              <a:defRPr sz="1200"/>
+            </a:lvl1pPr>
+          </a:lstStyle>
+          <a:p>
+            <a:fld id="{0F89C1C7-3DCD-1040-A9CF-14679D8B5DDD}" type="datetimeFigureOut">
+              <a:rPr lang="en-US" smtClean="0"/>
+              <a:t>10/17/16</a:t>
+            </a:fld>
+            <a:endParaRPr lang="en-US"/>
+          </a:p>
+        </p:txBody>
+      </p:sp>
+      <p:sp>
+        <p:nvSpPr>
+          <p:cNvPr id="4" name="Slide Image Placeholder 3"/>
+          <p:cNvSpPr>
+            <a:spLocks noGrp="1" noRot="1" noChangeAspect="1"/>
+          </p:cNvSpPr>
+          <p:nvPr>
+            <p:ph type="sldImg" idx="2"/>
+          </p:nvPr>
+        </p:nvSpPr>
+        <p:spPr>
+          <a:xfrm>
+            <a:off x="1143000" y="685800"/>
+            <a:ext cx="4572000" cy="3429000"/>
+          </a:xfrm>
+          <a:prstGeom prst="rect">
+            <a:avLst/>
+          </a:prstGeom>
+          <a:noFill/>
+          <a:ln w="12700">
+            <a:solidFill>
+              <a:prstClr val="black"/>
+            </a:solidFill>
+          </a:ln>
+        </p:spPr>
+        <p:txBody>
+          <a:bodyPr vert="horz" lIns="91440" tIns="45720" rIns="91440" bIns="45720" rtlCol="0" anchor="ctr"/>
+          <a:lstStyle/>
+          <a:p>
+            <a:endParaRPr lang="en-US"/>
+          </a:p>
+        </p:txBody>
+      </p:sp>
+      <p:sp>
+        <p:nvSpPr>
+          <p:cNvPr id="5" name="Notes Placeholder 4"/>
+          <p:cNvSpPr>
+            <a:spLocks noGrp="1"/>
+          </p:cNvSpPr>
+          <p:nvPr>
+            <p:ph type="body" sz="quarter" idx="3"/>
+          </p:nvPr>
+        </p:nvSpPr>
+        <p:spPr>
+          <a:xfrm>
+            <a:off x="685800" y="4343400"/>
+            <a:ext cx="5486400" cy="4114800"/>
+          </a:xfrm>
+          <a:prstGeom prst="rect">
+            <a:avLst/>
+          </a:prstGeom>
+        </p:spPr>
+        <p:txBody>
+          <a:bodyPr vert="horz" lIns="91440" tIns="45720" rIns="91440" bIns="45720" rtlCol="0"/>
+          <a:lstStyle/>
+          <a:p>
+            <a:pPr lvl="0"/>
+            <a:r>
+              <a:rPr lang="en-US" smtClean="0"/>
+              <a:t>Click to edit Master text styles</a:t>
+            </a:r>
+          </a:p>
+          <a:p>
+            <a:pPr lvl="1"/>
+            <a:r>
+              <a:rPr lang="en-US" smtClean="0"/>
+              <a:t>Second level</a:t>
+            </a:r>
+          </a:p>
+          <a:p>
+            <a:pPr lvl="2"/>
+            <a:r>
+              <a:rPr lang="en-US" smtClean="0"/>
+              <a:t>Third level</a:t>
+            </a:r>
+          </a:p>
+          <a:p>
+            <a:pPr lvl="3"/>
+            <a:r>
+              <a:rPr lang="en-US" smtClean="0"/>
+              <a:t>Fourth level</a:t>
+            </a:r>
+          </a:p>
+          <a:p>
+            <a:pPr lvl="4"/>
+            <a:r>
+              <a:rPr lang="en-US" smtClean="0"/>
+              <a:t>Fifth level</a:t>
+            </a:r>
+            <a:endParaRPr lang="en-US"/>
+          </a:p>
+        </p:txBody>
+      </p:sp>
+      <p:sp>
+        <p:nvSpPr>
+          <p:cNvPr id="6" name="Footer Placeholder 5"/>
+          <p:cNvSpPr>
+            <a:spLocks noGrp="1"/>
+          </p:cNvSpPr>
+          <p:nvPr>
+            <p:ph type="ftr" sz="quarter" idx="4"/>
+          </p:nvPr>
+        </p:nvSpPr>
+        <p:spPr>
+          <a:xfrm>
+            <a:off x="0" y="8685213"/>
+            <a:ext cx="2971800" cy="457200"/>
+          </a:xfrm>
+          <a:prstGeom prst="rect">
+            <a:avLst/>
+          </a:prstGeom>
+        </p:spPr>
+        <p:txBody>
+          <a:bodyPr vert="horz" lIns="91440" tIns="45720" rIns="91440" bIns="45720" rtlCol="0" anchor="b"/>
+          <a:lstStyle>
+            <a:lvl1pPr algn="l">
+              <a:defRPr sz="1200"/>
+            </a:lvl1pPr>
+          </a:lstStyle>
+          <a:p>
+            <a:endParaRPr lang="en-US"/>
+          </a:p>
+        </p:txBody>
+      </p:sp>
+      <p:sp>
+        <p:nvSpPr>
+          <p:cNvPr id="7" name="Slide Number Placeholder 6"/>
+          <p:cNvSpPr>
+            <a:spLocks noGrp="1"/>
+          </p:cNvSpPr>
+          <p:nvPr>
+            <p:ph type="sldNum" sz="quarter" idx="5"/>
+          </p:nvPr>
+        </p:nvSpPr>
+        <p:spPr>
+          <a:xfrm>
+            <a:off x="3884613" y="8685213"/>
+            <a:ext cx="2971800" cy="457200"/>
+          </a:xfrm>
+          <a:prstGeom prst="rect">
+            <a:avLst/>
+          </a:prstGeom>
+        </p:spPr>
+        <p:txBody>
+          <a:bodyPr vert="horz" lIns="91440" tIns="45720" rIns="91440" bIns="45720" rtlCol="0" anchor="b"/>
+          <a:lstStyle>
+            <a:lvl1pPr algn="r">
+              <a:defRPr sz="1200"/>
+            </a:lvl1pPr>
+          </a:lstStyle>
+          <a:p>
+            <a:fld id="{BB5E49A5-4136-284D-997B-48E1D791AD67}" type="slidenum">
+              <a:rPr lang="en-US" smtClean="0"/>
+              <a:t>‹#›</a:t>
+            </a:fld>
+            <a:endParaRPr lang="en-US"/>
+          </a:p>
+        </p:txBody>
+      </p:sp>
     </p:spTree>
     <p:extLst>
       <p:ext uri="{BB962C8B-B14F-4D97-AF65-F5344CB8AC3E}">
-        <p14:creationId xmlns:p14="http://schemas.microsoft.com/office/powerpoint/2010/main" val="258277299"/>
+        <p14:creationId xmlns:p14="http://schemas.microsoft.com/office/powerpoint/2010/main" val="2623252185"/>
       </p:ext>
     </p:extLst>
   </p:cSld>
   <p:clrMap bg1="lt1" tx1="dk1" bg2="lt2" tx2="dk2" accent1="accent1" accent2="accent2" accent3="accent3" accent4="accent4" accent5="accent5" accent6="accent6" hlink="hlink" folHlink="folHlink"/>
   <p:notesStyle>
-    <a:lvl1pPr marL="0" algn="l" defTabSz="914400" rtl="0" eaLnBrk="1" latinLnBrk="0" hangingPunct="1">
+    <a:lvl1pPr marL="0" algn="l" defTabSz="457200" rtl="0" eaLnBrk="1" latinLnBrk="0" hangingPunct="1">
       <a:defRPr sz="1200" kern="1200">
         <a:solidFill>
           <a:schemeClr val="tx1"/>
@@ -241,7 +403,7 @@
         <a:cs typeface="+mn-cs"/>
       </a:defRPr>
     </a:lvl1pPr>
-    <a:lvl2pPr marL="457200" algn="l" defTabSz="914400" rtl="0" eaLnBrk="1" latinLnBrk="0" hangingPunct="1">
+    <a:lvl2pPr marL="457200" algn="l" defTabSz="457200" rtl="0" eaLnBrk="1" latinLnBrk="0" hangingPunct="1">
       <a:defRPr sz="1200" kern="1200">
         <a:solidFill>
           <a:schemeClr val="tx1"/>
@@ -251,7 +413,7 @@
         <a:cs typeface="+mn-cs"/>
       </a:defRPr>
     </a:lvl2pPr>
-    <a:lvl3pPr marL="914400" algn="l" defTabSz="914400" rtl="0" eaLnBrk="1" latinLnBrk="0" hangingPunct="1">
+    <a:lvl3pPr marL="914400" algn="l" defTabSz="457200" rtl="0" eaLnBrk="1" latinLnBrk="0" hangingPunct="1">
       <a:defRPr sz="1200" kern="1200">
         <a:solidFill>
           <a:schemeClr val="tx1"/>
@@ -261,7 +423,7 @@
         <a:cs typeface="+mn-cs"/>
       </a:defRPr>
     </a:lvl3pPr>
-    <a:lvl4pPr marL="1371600" algn="l" defTabSz="914400" rtl="0" eaLnBrk="1" latinLnBrk="0" hangingPunct="1">
+    <a:lvl4pPr marL="1371600" algn="l" defTabSz="457200" rtl="0" eaLnBrk="1" latinLnBrk="0" hangingPunct="1">
       <a:defRPr sz="1200" kern="1200">
         <a:solidFill>
           <a:schemeClr val="tx1"/>
@@ -271,7 +433,7 @@
         <a:cs typeface="+mn-cs"/>
       </a:defRPr>
     </a:lvl4pPr>
-    <a:lvl5pPr marL="1828800" algn="l" defTabSz="914400" rtl="0" eaLnBrk="1" latinLnBrk="0" hangingPunct="1">
+    <a:lvl5pPr marL="1828800" algn="l" defTabSz="457200" rtl="0" eaLnBrk="1" latinLnBrk="0" hangingPunct="1">
       <a:defRPr sz="1200" kern="1200">
         <a:solidFill>
           <a:schemeClr val="tx1"/>
@@ -281,7 +443,7 @@
         <a:cs typeface="+mn-cs"/>
       </a:defRPr>
     </a:lvl5pPr>
-    <a:lvl6pPr marL="2286000" algn="l" defTabSz="914400" rtl="0" eaLnBrk="1" latinLnBrk="0" hangingPunct="1">
+    <a:lvl6pPr marL="2286000" algn="l" defTabSz="457200" rtl="0" eaLnBrk="1" latinLnBrk="0" hangingPunct="1">
       <a:defRPr sz="1200" kern="1200">
         <a:solidFill>
           <a:schemeClr val="tx1"/>
@@ -291,7 +453,7 @@
         <a:cs typeface="+mn-cs"/>
       </a:defRPr>
     </a:lvl6pPr>
-    <a:lvl7pPr marL="2743200" algn="l" defTabSz="914400" rtl="0" eaLnBrk="1" latinLnBrk="0" hangingPunct="1">
+    <a:lvl7pPr marL="2743200" algn="l" defTabSz="457200" rtl="0" eaLnBrk="1" latinLnBrk="0" hangingPunct="1">
       <a:defRPr sz="1200" kern="1200">
         <a:solidFill>
           <a:schemeClr val="tx1"/>
@@ -301,7 +463,7 @@
         <a:cs typeface="+mn-cs"/>
       </a:defRPr>
     </a:lvl7pPr>
-    <a:lvl8pPr marL="3200400" algn="l" defTabSz="914400" rtl="0" eaLnBrk="1" latinLnBrk="0" hangingPunct="1">
+    <a:lvl8pPr marL="3200400" algn="l" defTabSz="457200" rtl="0" eaLnBrk="1" latinLnBrk="0" hangingPunct="1">
       <a:defRPr sz="1200" kern="1200">
         <a:solidFill>
           <a:schemeClr val="tx1"/>
@@ -311,7 +473,7 @@
         <a:cs typeface="+mn-cs"/>
       </a:defRPr>
     </a:lvl8pPr>
-    <a:lvl9pPr marL="3657600" algn="l" defTabSz="914400" rtl="0" eaLnBrk="1" latinLnBrk="0" hangingPunct="1">
+    <a:lvl9pPr marL="3657600" algn="l" defTabSz="457200" rtl="0" eaLnBrk="1" latinLnBrk="0" hangingPunct="1">
       <a:defRPr sz="1200" kern="1200">
         <a:solidFill>
           <a:schemeClr val="tx1"/>
@@ -326,7 +488,7 @@
 </file>
 
 <file path=ppt/notesSlides/notesSlide1.xml><?xml version="1.0" encoding="utf-8"?>
-<p:notes xmlns:a="http://schemas.openxmlformats.org/drawingml/2006/main" xmlns:r="http://schemas.openxmlformats.org/officeDocument/2006/relationships" xmlns:p="http://schemas.openxmlformats.org/presentationml/2006/main">
+<p:notes xmlns:a="http://schemas.openxmlformats.org/drawingml/2006/main" xmlns:p="http://schemas.openxmlformats.org/presentationml/2006/main" xmlns:r="http://schemas.openxmlformats.org/officeDocument/2006/relationships">
   <p:cSld>
     <p:spTree>
       <p:nvGrpSpPr>
@@ -346,7 +508,7 @@
         <p:nvSpPr>
           <p:cNvPr id="2" name="Slide Image Placeholder 1"/>
           <p:cNvSpPr>
-            <a:spLocks noGrp="1" noRot="1" noChangeAspect="1"/>
+            <a:spLocks noGrp="1"/>
           </p:cNvSpPr>
           <p:nvPr>
             <p:ph type="sldImg" idx="2"/>
@@ -361,7 +523,7 @@
             <a:spLocks noGrp="1"/>
           </p:cNvSpPr>
           <p:nvPr>
-            <p:ph type="body" sz="quarter" idx="3"/>
+            <p:ph type="body" idx="3" sz="quarter"/>
           </p:nvPr>
         </p:nvSpPr>
         <p:spPr/>
@@ -401,7 +563,7 @@
             <a:spLocks noGrp="1"/>
           </p:cNvSpPr>
           <p:nvPr>
-            <p:ph type="sldNum" sz="quarter" idx="5"/>
+            <p:ph type="sldNum" idx="5" sz="quarter"/>
           </p:nvPr>
         </p:nvSpPr>
         <p:spPr/>
@@ -415,7 +577,7 @@
 </file>
 
 <file path=ppt/notesSlides/notesSlide10.xml><?xml version="1.0" encoding="utf-8"?>
-<p:notes xmlns:a="http://schemas.openxmlformats.org/drawingml/2006/main" xmlns:r="http://schemas.openxmlformats.org/officeDocument/2006/relationships" xmlns:p="http://schemas.openxmlformats.org/presentationml/2006/main">
+<p:notes xmlns:a="http://schemas.openxmlformats.org/drawingml/2006/main" xmlns:p="http://schemas.openxmlformats.org/presentationml/2006/main" xmlns:r="http://schemas.openxmlformats.org/officeDocument/2006/relationships">
   <p:cSld>
     <p:spTree>
       <p:nvGrpSpPr>
@@ -435,7 +597,7 @@
         <p:nvSpPr>
           <p:cNvPr id="2" name="Slide Image Placeholder 1"/>
           <p:cNvSpPr>
-            <a:spLocks noGrp="1" noRot="1" noChangeAspect="1"/>
+            <a:spLocks noGrp="1"/>
           </p:cNvSpPr>
           <p:nvPr>
             <p:ph type="sldImg" idx="2"/>
@@ -450,7 +612,7 @@
             <a:spLocks noGrp="1"/>
           </p:cNvSpPr>
           <p:nvPr>
-            <p:ph type="body" sz="quarter" idx="3"/>
+            <p:ph type="body" idx="3" sz="quarter"/>
           </p:nvPr>
         </p:nvSpPr>
         <p:spPr/>
@@ -498,7 +660,7 @@
             <a:spLocks noGrp="1"/>
           </p:cNvSpPr>
           <p:nvPr>
-            <p:ph type="sldNum" sz="quarter" idx="5"/>
+            <p:ph type="sldNum" idx="5" sz="quarter"/>
           </p:nvPr>
         </p:nvSpPr>
         <p:spPr/>
@@ -512,7 +674,7 @@
 </file>
 
 <file path=ppt/notesSlides/notesSlide11.xml><?xml version="1.0" encoding="utf-8"?>
-<p:notes xmlns:a="http://schemas.openxmlformats.org/drawingml/2006/main" xmlns:r="http://schemas.openxmlformats.org/officeDocument/2006/relationships" xmlns:p="http://schemas.openxmlformats.org/presentationml/2006/main">
+<p:notes xmlns:a="http://schemas.openxmlformats.org/drawingml/2006/main" xmlns:p="http://schemas.openxmlformats.org/presentationml/2006/main" xmlns:r="http://schemas.openxmlformats.org/officeDocument/2006/relationships">
   <p:cSld>
     <p:spTree>
       <p:nvGrpSpPr>
@@ -532,7 +694,7 @@
         <p:nvSpPr>
           <p:cNvPr id="2" name="Slide Image Placeholder 1"/>
           <p:cNvSpPr>
-            <a:spLocks noGrp="1" noRot="1" noChangeAspect="1"/>
+            <a:spLocks noGrp="1"/>
           </p:cNvSpPr>
           <p:nvPr>
             <p:ph type="sldImg" idx="2"/>
@@ -547,7 +709,7 @@
             <a:spLocks noGrp="1"/>
           </p:cNvSpPr>
           <p:nvPr>
-            <p:ph type="body" sz="quarter" idx="3"/>
+            <p:ph type="body" idx="3" sz="quarter"/>
           </p:nvPr>
         </p:nvSpPr>
         <p:spPr/>
@@ -571,7 +733,7 @@
             <a:spLocks noGrp="1"/>
           </p:cNvSpPr>
           <p:nvPr>
-            <p:ph type="sldNum" sz="quarter" idx="5"/>
+            <p:ph type="sldNum" idx="5" sz="quarter"/>
           </p:nvPr>
         </p:nvSpPr>
         <p:spPr/>
@@ -585,7 +747,7 @@
 </file>
 
 <file path=ppt/notesSlides/notesSlide12.xml><?xml version="1.0" encoding="utf-8"?>
-<p:notes xmlns:a="http://schemas.openxmlformats.org/drawingml/2006/main" xmlns:r="http://schemas.openxmlformats.org/officeDocument/2006/relationships" xmlns:p="http://schemas.openxmlformats.org/presentationml/2006/main">
+<p:notes xmlns:a="http://schemas.openxmlformats.org/drawingml/2006/main" xmlns:p="http://schemas.openxmlformats.org/presentationml/2006/main" xmlns:r="http://schemas.openxmlformats.org/officeDocument/2006/relationships">
   <p:cSld>
     <p:spTree>
       <p:nvGrpSpPr>
@@ -605,7 +767,7 @@
         <p:nvSpPr>
           <p:cNvPr id="2" name="Slide Image Placeholder 1"/>
           <p:cNvSpPr>
-            <a:spLocks noGrp="1" noRot="1" noChangeAspect="1"/>
+            <a:spLocks noGrp="1"/>
           </p:cNvSpPr>
           <p:nvPr>
             <p:ph type="sldImg" idx="2"/>
@@ -620,7 +782,7 @@
             <a:spLocks noGrp="1"/>
           </p:cNvSpPr>
           <p:nvPr>
-            <p:ph type="body" sz="quarter" idx="3"/>
+            <p:ph type="body" idx="3" sz="quarter"/>
           </p:nvPr>
         </p:nvSpPr>
         <p:spPr/>
@@ -668,7 +830,7 @@
             <a:spLocks noGrp="1"/>
           </p:cNvSpPr>
           <p:nvPr>
-            <p:ph type="sldNum" sz="quarter" idx="5"/>
+            <p:ph type="sldNum" idx="5" sz="quarter"/>
           </p:nvPr>
         </p:nvSpPr>
         <p:spPr/>
@@ -682,7 +844,7 @@
 </file>
 
 <file path=ppt/notesSlides/notesSlide13.xml><?xml version="1.0" encoding="utf-8"?>
-<p:notes xmlns:a="http://schemas.openxmlformats.org/drawingml/2006/main" xmlns:r="http://schemas.openxmlformats.org/officeDocument/2006/relationships" xmlns:p="http://schemas.openxmlformats.org/presentationml/2006/main">
+<p:notes xmlns:a="http://schemas.openxmlformats.org/drawingml/2006/main" xmlns:p="http://schemas.openxmlformats.org/presentationml/2006/main" xmlns:r="http://schemas.openxmlformats.org/officeDocument/2006/relationships">
   <p:cSld>
     <p:spTree>
       <p:nvGrpSpPr>
@@ -702,7 +864,7 @@
         <p:nvSpPr>
           <p:cNvPr id="2" name="Slide Image Placeholder 1"/>
           <p:cNvSpPr>
-            <a:spLocks noGrp="1" noRot="1" noChangeAspect="1"/>
+            <a:spLocks noGrp="1"/>
           </p:cNvSpPr>
           <p:nvPr>
             <p:ph type="sldImg" idx="2"/>
@@ -717,7 +879,7 @@
             <a:spLocks noGrp="1"/>
           </p:cNvSpPr>
           <p:nvPr>
-            <p:ph type="body" sz="quarter" idx="3"/>
+            <p:ph type="body" idx="3" sz="quarter"/>
           </p:nvPr>
         </p:nvSpPr>
         <p:spPr/>
@@ -757,7 +919,7 @@
             <a:spLocks noGrp="1"/>
           </p:cNvSpPr>
           <p:nvPr>
-            <p:ph type="sldNum" sz="quarter" idx="5"/>
+            <p:ph type="sldNum" idx="5" sz="quarter"/>
           </p:nvPr>
         </p:nvSpPr>
         <p:spPr/>
@@ -771,7 +933,7 @@
 </file>
 
 <file path=ppt/notesSlides/notesSlide14.xml><?xml version="1.0" encoding="utf-8"?>
-<p:notes xmlns:a="http://schemas.openxmlformats.org/drawingml/2006/main" xmlns:r="http://schemas.openxmlformats.org/officeDocument/2006/relationships" xmlns:p="http://schemas.openxmlformats.org/presentationml/2006/main">
+<p:notes xmlns:a="http://schemas.openxmlformats.org/drawingml/2006/main" xmlns:p="http://schemas.openxmlformats.org/presentationml/2006/main" xmlns:r="http://schemas.openxmlformats.org/officeDocument/2006/relationships">
   <p:cSld>
     <p:spTree>
       <p:nvGrpSpPr>
@@ -791,7 +953,7 @@
         <p:nvSpPr>
           <p:cNvPr id="2" name="Slide Image Placeholder 1"/>
           <p:cNvSpPr>
-            <a:spLocks noGrp="1" noRot="1" noChangeAspect="1"/>
+            <a:spLocks noGrp="1"/>
           </p:cNvSpPr>
           <p:nvPr>
             <p:ph type="sldImg" idx="2"/>
@@ -806,7 +968,7 @@
             <a:spLocks noGrp="1"/>
           </p:cNvSpPr>
           <p:nvPr>
-            <p:ph type="body" sz="quarter" idx="3"/>
+            <p:ph type="body" idx="3" sz="quarter"/>
           </p:nvPr>
         </p:nvSpPr>
         <p:spPr/>
@@ -846,7 +1008,7 @@
             <a:spLocks noGrp="1"/>
           </p:cNvSpPr>
           <p:nvPr>
-            <p:ph type="sldNum" sz="quarter" idx="5"/>
+            <p:ph type="sldNum" idx="5" sz="quarter"/>
           </p:nvPr>
         </p:nvSpPr>
         <p:spPr/>
@@ -860,7 +1022,7 @@
 </file>
 
 <file path=ppt/notesSlides/notesSlide15.xml><?xml version="1.0" encoding="utf-8"?>
-<p:notes xmlns:a="http://schemas.openxmlformats.org/drawingml/2006/main" xmlns:r="http://schemas.openxmlformats.org/officeDocument/2006/relationships" xmlns:p="http://schemas.openxmlformats.org/presentationml/2006/main">
+<p:notes xmlns:a="http://schemas.openxmlformats.org/drawingml/2006/main" xmlns:p="http://schemas.openxmlformats.org/presentationml/2006/main" xmlns:r="http://schemas.openxmlformats.org/officeDocument/2006/relationships">
   <p:cSld>
     <p:spTree>
       <p:nvGrpSpPr>
@@ -880,7 +1042,7 @@
         <p:nvSpPr>
           <p:cNvPr id="2" name="Slide Image Placeholder 1"/>
           <p:cNvSpPr>
-            <a:spLocks noGrp="1" noRot="1" noChangeAspect="1"/>
+            <a:spLocks noGrp="1"/>
           </p:cNvSpPr>
           <p:nvPr>
             <p:ph type="sldImg" idx="2"/>
@@ -895,7 +1057,7 @@
             <a:spLocks noGrp="1"/>
           </p:cNvSpPr>
           <p:nvPr>
-            <p:ph type="body" sz="quarter" idx="3"/>
+            <p:ph type="body" idx="3" sz="quarter"/>
           </p:nvPr>
         </p:nvSpPr>
         <p:spPr/>
@@ -943,7 +1105,7 @@
             <a:spLocks noGrp="1"/>
           </p:cNvSpPr>
           <p:nvPr>
-            <p:ph type="sldNum" sz="quarter" idx="5"/>
+            <p:ph type="sldNum" idx="5" sz="quarter"/>
           </p:nvPr>
         </p:nvSpPr>
         <p:spPr/>
@@ -957,7 +1119,7 @@
 </file>
 
 <file path=ppt/notesSlides/notesSlide16.xml><?xml version="1.0" encoding="utf-8"?>
-<p:notes xmlns:a="http://schemas.openxmlformats.org/drawingml/2006/main" xmlns:r="http://schemas.openxmlformats.org/officeDocument/2006/relationships" xmlns:p="http://schemas.openxmlformats.org/presentationml/2006/main">
+<p:notes xmlns:a="http://schemas.openxmlformats.org/drawingml/2006/main" xmlns:p="http://schemas.openxmlformats.org/presentationml/2006/main" xmlns:r="http://schemas.openxmlformats.org/officeDocument/2006/relationships">
   <p:cSld>
     <p:spTree>
       <p:nvGrpSpPr>
@@ -977,7 +1139,7 @@
         <p:nvSpPr>
           <p:cNvPr id="2" name="Slide Image Placeholder 1"/>
           <p:cNvSpPr>
-            <a:spLocks noGrp="1" noRot="1" noChangeAspect="1"/>
+            <a:spLocks noGrp="1"/>
           </p:cNvSpPr>
           <p:nvPr>
             <p:ph type="sldImg" idx="2"/>
@@ -992,7 +1154,7 @@
             <a:spLocks noGrp="1"/>
           </p:cNvSpPr>
           <p:nvPr>
-            <p:ph type="body" sz="quarter" idx="3"/>
+            <p:ph type="body" idx="3" sz="quarter"/>
           </p:nvPr>
         </p:nvSpPr>
         <p:spPr/>
@@ -1016,7 +1178,7 @@
             <a:spLocks noGrp="1"/>
           </p:cNvSpPr>
           <p:nvPr>
-            <p:ph type="sldNum" sz="quarter" idx="5"/>
+            <p:ph type="sldNum" idx="5" sz="quarter"/>
           </p:nvPr>
         </p:nvSpPr>
         <p:spPr/>
@@ -1030,7 +1192,7 @@
 </file>
 
 <file path=ppt/notesSlides/notesSlide17.xml><?xml version="1.0" encoding="utf-8"?>
-<p:notes xmlns:a="http://schemas.openxmlformats.org/drawingml/2006/main" xmlns:r="http://schemas.openxmlformats.org/officeDocument/2006/relationships" xmlns:p="http://schemas.openxmlformats.org/presentationml/2006/main">
+<p:notes xmlns:a="http://schemas.openxmlformats.org/drawingml/2006/main" xmlns:p="http://schemas.openxmlformats.org/presentationml/2006/main" xmlns:r="http://schemas.openxmlformats.org/officeDocument/2006/relationships">
   <p:cSld>
     <p:spTree>
       <p:nvGrpSpPr>
@@ -1050,7 +1212,7 @@
         <p:nvSpPr>
           <p:cNvPr id="2" name="Slide Image Placeholder 1"/>
           <p:cNvSpPr>
-            <a:spLocks noGrp="1" noRot="1" noChangeAspect="1"/>
+            <a:spLocks noGrp="1"/>
           </p:cNvSpPr>
           <p:nvPr>
             <p:ph type="sldImg" idx="2"/>
@@ -1065,7 +1227,7 @@
             <a:spLocks noGrp="1"/>
           </p:cNvSpPr>
           <p:nvPr>
-            <p:ph type="body" sz="quarter" idx="3"/>
+            <p:ph type="body" idx="3" sz="quarter"/>
           </p:nvPr>
         </p:nvSpPr>
         <p:spPr/>
@@ -1113,7 +1275,7 @@
             <a:spLocks noGrp="1"/>
           </p:cNvSpPr>
           <p:nvPr>
-            <p:ph type="sldNum" sz="quarter" idx="5"/>
+            <p:ph type="sldNum" idx="5" sz="quarter"/>
           </p:nvPr>
         </p:nvSpPr>
         <p:spPr/>
@@ -1127,7 +1289,7 @@
 </file>
 
 <file path=ppt/notesSlides/notesSlide18.xml><?xml version="1.0" encoding="utf-8"?>
-<p:notes xmlns:a="http://schemas.openxmlformats.org/drawingml/2006/main" xmlns:r="http://schemas.openxmlformats.org/officeDocument/2006/relationships" xmlns:p="http://schemas.openxmlformats.org/presentationml/2006/main">
+<p:notes xmlns:a="http://schemas.openxmlformats.org/drawingml/2006/main" xmlns:p="http://schemas.openxmlformats.org/presentationml/2006/main" xmlns:r="http://schemas.openxmlformats.org/officeDocument/2006/relationships">
   <p:cSld>
     <p:spTree>
       <p:nvGrpSpPr>
@@ -1147,7 +1309,7 @@
         <p:nvSpPr>
           <p:cNvPr id="2" name="Slide Image Placeholder 1"/>
           <p:cNvSpPr>
-            <a:spLocks noGrp="1" noRot="1" noChangeAspect="1"/>
+            <a:spLocks noGrp="1"/>
           </p:cNvSpPr>
           <p:nvPr>
             <p:ph type="sldImg" idx="2"/>
@@ -1162,7 +1324,7 @@
             <a:spLocks noGrp="1"/>
           </p:cNvSpPr>
           <p:nvPr>
-            <p:ph type="body" sz="quarter" idx="3"/>
+            <p:ph type="body" idx="3" sz="quarter"/>
           </p:nvPr>
         </p:nvSpPr>
         <p:spPr/>
@@ -1194,7 +1356,7 @@
             <a:spLocks noGrp="1"/>
           </p:cNvSpPr>
           <p:nvPr>
-            <p:ph type="sldNum" sz="quarter" idx="5"/>
+            <p:ph type="sldNum" idx="5" sz="quarter"/>
           </p:nvPr>
         </p:nvSpPr>
         <p:spPr/>
@@ -1208,7 +1370,7 @@
 </file>
 
 <file path=ppt/notesSlides/notesSlide19.xml><?xml version="1.0" encoding="utf-8"?>
-<p:notes xmlns:a="http://schemas.openxmlformats.org/drawingml/2006/main" xmlns:r="http://schemas.openxmlformats.org/officeDocument/2006/relationships" xmlns:p="http://schemas.openxmlformats.org/presentationml/2006/main">
+<p:notes xmlns:a="http://schemas.openxmlformats.org/drawingml/2006/main" xmlns:p="http://schemas.openxmlformats.org/presentationml/2006/main" xmlns:r="http://schemas.openxmlformats.org/officeDocument/2006/relationships">
   <p:cSld>
     <p:spTree>
       <p:nvGrpSpPr>
@@ -1228,7 +1390,7 @@
         <p:nvSpPr>
           <p:cNvPr id="2" name="Slide Image Placeholder 1"/>
           <p:cNvSpPr>
-            <a:spLocks noGrp="1" noRot="1" noChangeAspect="1"/>
+            <a:spLocks noGrp="1"/>
           </p:cNvSpPr>
           <p:nvPr>
             <p:ph type="sldImg" idx="2"/>
@@ -1243,7 +1405,7 @@
             <a:spLocks noGrp="1"/>
           </p:cNvSpPr>
           <p:nvPr>
-            <p:ph type="body" sz="quarter" idx="3"/>
+            <p:ph type="body" idx="3" sz="quarter"/>
           </p:nvPr>
         </p:nvSpPr>
         <p:spPr/>
@@ -1275,7 +1437,7 @@
             <a:spLocks noGrp="1"/>
           </p:cNvSpPr>
           <p:nvPr>
-            <p:ph type="sldNum" sz="quarter" idx="5"/>
+            <p:ph type="sldNum" idx="5" sz="quarter"/>
           </p:nvPr>
         </p:nvSpPr>
         <p:spPr/>
@@ -1289,7 +1451,7 @@
 </file>
 
 <file path=ppt/notesSlides/notesSlide2.xml><?xml version="1.0" encoding="utf-8"?>
-<p:notes xmlns:a="http://schemas.openxmlformats.org/drawingml/2006/main" xmlns:r="http://schemas.openxmlformats.org/officeDocument/2006/relationships" xmlns:p="http://schemas.openxmlformats.org/presentationml/2006/main">
+<p:notes xmlns:a="http://schemas.openxmlformats.org/drawingml/2006/main" xmlns:p="http://schemas.openxmlformats.org/presentationml/2006/main" xmlns:r="http://schemas.openxmlformats.org/officeDocument/2006/relationships">
   <p:cSld>
     <p:spTree>
       <p:nvGrpSpPr>
@@ -1309,7 +1471,7 @@
         <p:nvSpPr>
           <p:cNvPr id="2" name="Slide Image Placeholder 1"/>
           <p:cNvSpPr>
-            <a:spLocks noGrp="1" noRot="1" noChangeAspect="1"/>
+            <a:spLocks noGrp="1"/>
           </p:cNvSpPr>
           <p:nvPr>
             <p:ph type="sldImg" idx="2"/>
@@ -1324,7 +1486,7 @@
             <a:spLocks noGrp="1"/>
           </p:cNvSpPr>
           <p:nvPr>
-            <p:ph type="body" sz="quarter" idx="3"/>
+            <p:ph type="body" idx="3" sz="quarter"/>
           </p:nvPr>
         </p:nvSpPr>
         <p:spPr/>
@@ -1356,7 +1518,7 @@
             <a:spLocks noGrp="1"/>
           </p:cNvSpPr>
           <p:nvPr>
-            <p:ph type="sldNum" sz="quarter" idx="5"/>
+            <p:ph type="sldNum" idx="5" sz="quarter"/>
           </p:nvPr>
         </p:nvSpPr>
         <p:spPr/>
@@ -1370,7 +1532,7 @@
 </file>
 
 <file path=ppt/notesSlides/notesSlide20.xml><?xml version="1.0" encoding="utf-8"?>
-<p:notes xmlns:a="http://schemas.openxmlformats.org/drawingml/2006/main" xmlns:r="http://schemas.openxmlformats.org/officeDocument/2006/relationships" xmlns:p="http://schemas.openxmlformats.org/presentationml/2006/main">
+<p:notes xmlns:a="http://schemas.openxmlformats.org/drawingml/2006/main" xmlns:p="http://schemas.openxmlformats.org/presentationml/2006/main" xmlns:r="http://schemas.openxmlformats.org/officeDocument/2006/relationships">
   <p:cSld>
     <p:spTree>
       <p:nvGrpSpPr>
@@ -1390,7 +1552,7 @@
         <p:nvSpPr>
           <p:cNvPr id="2" name="Slide Image Placeholder 1"/>
           <p:cNvSpPr>
-            <a:spLocks noGrp="1" noRot="1" noChangeAspect="1"/>
+            <a:spLocks noGrp="1"/>
           </p:cNvSpPr>
           <p:nvPr>
             <p:ph type="sldImg" idx="2"/>
@@ -1405,7 +1567,7 @@
             <a:spLocks noGrp="1"/>
           </p:cNvSpPr>
           <p:nvPr>
-            <p:ph type="body" sz="quarter" idx="3"/>
+            <p:ph type="body" idx="3" sz="quarter"/>
           </p:nvPr>
         </p:nvSpPr>
         <p:spPr/>
@@ -1453,7 +1615,7 @@
             <a:spLocks noGrp="1"/>
           </p:cNvSpPr>
           <p:nvPr>
-            <p:ph type="sldNum" sz="quarter" idx="5"/>
+            <p:ph type="sldNum" idx="5" sz="quarter"/>
           </p:nvPr>
         </p:nvSpPr>
         <p:spPr/>
@@ -1467,7 +1629,7 @@
 </file>
 
 <file path=ppt/notesSlides/notesSlide21.xml><?xml version="1.0" encoding="utf-8"?>
-<p:notes xmlns:a="http://schemas.openxmlformats.org/drawingml/2006/main" xmlns:r="http://schemas.openxmlformats.org/officeDocument/2006/relationships" xmlns:p="http://schemas.openxmlformats.org/presentationml/2006/main">
+<p:notes xmlns:a="http://schemas.openxmlformats.org/drawingml/2006/main" xmlns:p="http://schemas.openxmlformats.org/presentationml/2006/main" xmlns:r="http://schemas.openxmlformats.org/officeDocument/2006/relationships">
   <p:cSld>
     <p:spTree>
       <p:nvGrpSpPr>
@@ -1487,7 +1649,7 @@
         <p:nvSpPr>
           <p:cNvPr id="2" name="Slide Image Placeholder 1"/>
           <p:cNvSpPr>
-            <a:spLocks noGrp="1" noRot="1" noChangeAspect="1"/>
+            <a:spLocks noGrp="1"/>
           </p:cNvSpPr>
           <p:nvPr>
             <p:ph type="sldImg" idx="2"/>
@@ -1502,7 +1664,7 @@
             <a:spLocks noGrp="1"/>
           </p:cNvSpPr>
           <p:nvPr>
-            <p:ph type="body" sz="quarter" idx="3"/>
+            <p:ph type="body" idx="3" sz="quarter"/>
           </p:nvPr>
         </p:nvSpPr>
         <p:spPr/>
@@ -1515,6 +1677,14 @@
                 <a:latin typeface="Calibri"/>
               </a:rPr>
               <a:t>Have the pan and tilt unit on the desk if you have one. It is much more convincing in the hand.</a:t>
+            </a:r>
+          </a:p>
+          <a:p>
+            <a:r>
+              <a:rPr sz="1200">
+                <a:latin typeface="Calibri"/>
+              </a:rPr>
+              <a:t>Point at the headers on a real board before you say anything else. Kevin caught this in the 2026-09-08 review: the slide used to put them on the top plate, and a student hunting for them up there will not find them.</a:t>
             </a:r>
           </a:p>
           <a:p>
@@ -1550,7 +1720,7 @@
             <a:spLocks noGrp="1"/>
           </p:cNvSpPr>
           <p:nvPr>
-            <p:ph type="sldNum" sz="quarter" idx="5"/>
+            <p:ph type="sldNum" idx="5" sz="quarter"/>
           </p:nvPr>
         </p:nvSpPr>
         <p:spPr/>
@@ -1564,7 +1734,7 @@
 </file>
 
 <file path=ppt/notesSlides/notesSlide22.xml><?xml version="1.0" encoding="utf-8"?>
-<p:notes xmlns:a="http://schemas.openxmlformats.org/drawingml/2006/main" xmlns:r="http://schemas.openxmlformats.org/officeDocument/2006/relationships" xmlns:p="http://schemas.openxmlformats.org/presentationml/2006/main">
+<p:notes xmlns:a="http://schemas.openxmlformats.org/drawingml/2006/main" xmlns:p="http://schemas.openxmlformats.org/presentationml/2006/main" xmlns:r="http://schemas.openxmlformats.org/officeDocument/2006/relationships">
   <p:cSld>
     <p:spTree>
       <p:nvGrpSpPr>
@@ -1584,7 +1754,7 @@
         <p:nvSpPr>
           <p:cNvPr id="2" name="Slide Image Placeholder 1"/>
           <p:cNvSpPr>
-            <a:spLocks noGrp="1" noRot="1" noChangeAspect="1"/>
+            <a:spLocks noGrp="1"/>
           </p:cNvSpPr>
           <p:nvPr>
             <p:ph type="sldImg" idx="2"/>
@@ -1599,7 +1769,7 @@
             <a:spLocks noGrp="1"/>
           </p:cNvSpPr>
           <p:nvPr>
-            <p:ph type="body" sz="quarter" idx="3"/>
+            <p:ph type="body" idx="3" sz="quarter"/>
           </p:nvPr>
         </p:nvSpPr>
         <p:spPr/>
@@ -1647,7 +1817,7 @@
             <a:spLocks noGrp="1"/>
           </p:cNvSpPr>
           <p:nvPr>
-            <p:ph type="sldNum" sz="quarter" idx="5"/>
+            <p:ph type="sldNum" idx="5" sz="quarter"/>
           </p:nvPr>
         </p:nvSpPr>
         <p:spPr/>
@@ -1661,7 +1831,7 @@
 </file>
 
 <file path=ppt/notesSlides/notesSlide23.xml><?xml version="1.0" encoding="utf-8"?>
-<p:notes xmlns:a="http://schemas.openxmlformats.org/drawingml/2006/main" xmlns:r="http://schemas.openxmlformats.org/officeDocument/2006/relationships" xmlns:p="http://schemas.openxmlformats.org/presentationml/2006/main">
+<p:notes xmlns:a="http://schemas.openxmlformats.org/drawingml/2006/main" xmlns:p="http://schemas.openxmlformats.org/presentationml/2006/main" xmlns:r="http://schemas.openxmlformats.org/officeDocument/2006/relationships">
   <p:cSld>
     <p:spTree>
       <p:nvGrpSpPr>
@@ -1681,7 +1851,7 @@
         <p:nvSpPr>
           <p:cNvPr id="2" name="Slide Image Placeholder 1"/>
           <p:cNvSpPr>
-            <a:spLocks noGrp="1" noRot="1" noChangeAspect="1"/>
+            <a:spLocks noGrp="1"/>
           </p:cNvSpPr>
           <p:nvPr>
             <p:ph type="sldImg" idx="2"/>
@@ -1696,7 +1866,7 @@
             <a:spLocks noGrp="1"/>
           </p:cNvSpPr>
           <p:nvPr>
-            <p:ph type="body" sz="quarter" idx="3"/>
+            <p:ph type="body" idx="3" sz="quarter"/>
           </p:nvPr>
         </p:nvSpPr>
         <p:spPr/>
@@ -1724,7 +1894,7 @@
               <a:rPr sz="1200">
                 <a:latin typeface="Calibri"/>
               </a:rPr>
-              <a:t>Pass 2 is the confidence builder. They will recognise STICK_DEADZONE, MOTOR_MAX and the LED count as numbers they have already changed with their own hands.</a:t>
+              <a:t>Section 2 is the confidence builder. They will recognise STICK_DEADZONE, MOTOR_MAX and the LED count as numbers they have already changed with their own hands.</a:t>
             </a:r>
           </a:p>
           <a:p>
@@ -1732,7 +1902,7 @@
               <a:rPr sz="1200">
                 <a:latin typeface="Calibri"/>
               </a:rPr>
-              <a:t>Pass 6 is the assessment. Walk round and ask groups to point at the failsafe. Anybody who can find it has understood Lesson 3.</a:t>
+              <a:t>Section 6 is the assessment. Walk round and ask groups to point at the failsafe. Anybody who can find it has understood Lesson 3.</a:t>
             </a:r>
           </a:p>
           <a:p>
@@ -1740,7 +1910,7 @@
               <a:rPr sz="1200">
                 <a:latin typeface="Calibri"/>
               </a:rPr>
-              <a:t>Collect answers out loud before moving on, one pass per group.</a:t>
+              <a:t>Collect answers out loud before moving on, one section per group.</a:t>
             </a:r>
           </a:p>
         </p:txBody>
@@ -1752,7 +1922,7 @@
             <a:spLocks noGrp="1"/>
           </p:cNvSpPr>
           <p:nvPr>
-            <p:ph type="sldNum" sz="quarter" idx="5"/>
+            <p:ph type="sldNum" idx="5" sz="quarter"/>
           </p:nvPr>
         </p:nvSpPr>
         <p:spPr/>
@@ -1766,7 +1936,7 @@
 </file>
 
 <file path=ppt/notesSlides/notesSlide24.xml><?xml version="1.0" encoding="utf-8"?>
-<p:notes xmlns:a="http://schemas.openxmlformats.org/drawingml/2006/main" xmlns:r="http://schemas.openxmlformats.org/officeDocument/2006/relationships" xmlns:p="http://schemas.openxmlformats.org/presentationml/2006/main">
+<p:notes xmlns:a="http://schemas.openxmlformats.org/drawingml/2006/main" xmlns:p="http://schemas.openxmlformats.org/presentationml/2006/main" xmlns:r="http://schemas.openxmlformats.org/officeDocument/2006/relationships">
   <p:cSld>
     <p:spTree>
       <p:nvGrpSpPr>
@@ -1786,7 +1956,7 @@
         <p:nvSpPr>
           <p:cNvPr id="2" name="Slide Image Placeholder 1"/>
           <p:cNvSpPr>
-            <a:spLocks noGrp="1" noRot="1" noChangeAspect="1"/>
+            <a:spLocks noGrp="1"/>
           </p:cNvSpPr>
           <p:nvPr>
             <p:ph type="sldImg" idx="2"/>
@@ -1801,7 +1971,7 @@
             <a:spLocks noGrp="1"/>
           </p:cNvSpPr>
           <p:nvPr>
-            <p:ph type="body" sz="quarter" idx="3"/>
+            <p:ph type="body" idx="3" sz="quarter"/>
           </p:nvPr>
         </p:nvSpPr>
         <p:spPr/>
@@ -1813,7 +1983,7 @@
               <a:rPr sz="1200">
                 <a:latin typeface="Calibri"/>
               </a:rPr>
-              <a:t>Run this straight after the six passes, as a conversation.</a:t>
+              <a:t>Run this straight after the six sections, as a conversation.</a:t>
             </a:r>
           </a:p>
           <a:p>
@@ -1873,7 +2043,7 @@
             <a:spLocks noGrp="1"/>
           </p:cNvSpPr>
           <p:nvPr>
-            <p:ph type="sldNum" sz="quarter" idx="5"/>
+            <p:ph type="sldNum" idx="5" sz="quarter"/>
           </p:nvPr>
         </p:nvSpPr>
         <p:spPr/>
@@ -1887,7 +2057,7 @@
 </file>
 
 <file path=ppt/notesSlides/notesSlide25.xml><?xml version="1.0" encoding="utf-8"?>
-<p:notes xmlns:a="http://schemas.openxmlformats.org/drawingml/2006/main" xmlns:r="http://schemas.openxmlformats.org/officeDocument/2006/relationships" xmlns:p="http://schemas.openxmlformats.org/presentationml/2006/main">
+<p:notes xmlns:a="http://schemas.openxmlformats.org/drawingml/2006/main" xmlns:p="http://schemas.openxmlformats.org/presentationml/2006/main" xmlns:r="http://schemas.openxmlformats.org/officeDocument/2006/relationships">
   <p:cSld>
     <p:spTree>
       <p:nvGrpSpPr>
@@ -1907,7 +2077,7 @@
         <p:nvSpPr>
           <p:cNvPr id="2" name="Slide Image Placeholder 1"/>
           <p:cNvSpPr>
-            <a:spLocks noGrp="1" noRot="1" noChangeAspect="1"/>
+            <a:spLocks noGrp="1"/>
           </p:cNvSpPr>
           <p:nvPr>
             <p:ph type="sldImg" idx="2"/>
@@ -1922,7 +2092,7 @@
             <a:spLocks noGrp="1"/>
           </p:cNvSpPr>
           <p:nvPr>
-            <p:ph type="body" sz="quarter" idx="3"/>
+            <p:ph type="body" idx="3" sz="quarter"/>
           </p:nvPr>
         </p:nvSpPr>
         <p:spPr/>
@@ -1970,7 +2140,7 @@
             <a:spLocks noGrp="1"/>
           </p:cNvSpPr>
           <p:nvPr>
-            <p:ph type="sldNum" sz="quarter" idx="5"/>
+            <p:ph type="sldNum" idx="5" sz="quarter"/>
           </p:nvPr>
         </p:nvSpPr>
         <p:spPr/>
@@ -1984,7 +2154,7 @@
 </file>
 
 <file path=ppt/notesSlides/notesSlide26.xml><?xml version="1.0" encoding="utf-8"?>
-<p:notes xmlns:a="http://schemas.openxmlformats.org/drawingml/2006/main" xmlns:r="http://schemas.openxmlformats.org/officeDocument/2006/relationships" xmlns:p="http://schemas.openxmlformats.org/presentationml/2006/main">
+<p:notes xmlns:a="http://schemas.openxmlformats.org/drawingml/2006/main" xmlns:p="http://schemas.openxmlformats.org/presentationml/2006/main" xmlns:r="http://schemas.openxmlformats.org/officeDocument/2006/relationships">
   <p:cSld>
     <p:spTree>
       <p:nvGrpSpPr>
@@ -2004,7 +2174,7 @@
         <p:nvSpPr>
           <p:cNvPr id="2" name="Slide Image Placeholder 1"/>
           <p:cNvSpPr>
-            <a:spLocks noGrp="1" noRot="1" noChangeAspect="1"/>
+            <a:spLocks noGrp="1"/>
           </p:cNvSpPr>
           <p:nvPr>
             <p:ph type="sldImg" idx="2"/>
@@ -2019,7 +2189,7 @@
             <a:spLocks noGrp="1"/>
           </p:cNvSpPr>
           <p:nvPr>
-            <p:ph type="body" sz="quarter" idx="3"/>
+            <p:ph type="body" idx="3" sz="quarter"/>
           </p:nvPr>
         </p:nvSpPr>
         <p:spPr/>
@@ -2075,7 +2245,7 @@
             <a:spLocks noGrp="1"/>
           </p:cNvSpPr>
           <p:nvPr>
-            <p:ph type="sldNum" sz="quarter" idx="5"/>
+            <p:ph type="sldNum" idx="5" sz="quarter"/>
           </p:nvPr>
         </p:nvSpPr>
         <p:spPr/>
@@ -2089,7 +2259,7 @@
 </file>
 
 <file path=ppt/notesSlides/notesSlide27.xml><?xml version="1.0" encoding="utf-8"?>
-<p:notes xmlns:a="http://schemas.openxmlformats.org/drawingml/2006/main" xmlns:r="http://schemas.openxmlformats.org/officeDocument/2006/relationships" xmlns:p="http://schemas.openxmlformats.org/presentationml/2006/main">
+<p:notes xmlns:a="http://schemas.openxmlformats.org/drawingml/2006/main" xmlns:p="http://schemas.openxmlformats.org/presentationml/2006/main" xmlns:r="http://schemas.openxmlformats.org/officeDocument/2006/relationships">
   <p:cSld>
     <p:spTree>
       <p:nvGrpSpPr>
@@ -2109,7 +2279,7 @@
         <p:nvSpPr>
           <p:cNvPr id="2" name="Slide Image Placeholder 1"/>
           <p:cNvSpPr>
-            <a:spLocks noGrp="1" noRot="1" noChangeAspect="1"/>
+            <a:spLocks noGrp="1"/>
           </p:cNvSpPr>
           <p:nvPr>
             <p:ph type="sldImg" idx="2"/>
@@ -2124,7 +2294,7 @@
             <a:spLocks noGrp="1"/>
           </p:cNvSpPr>
           <p:nvPr>
-            <p:ph type="body" sz="quarter" idx="3"/>
+            <p:ph type="body" idx="3" sz="quarter"/>
           </p:nvPr>
         </p:nvSpPr>
         <p:spPr/>
@@ -2164,7 +2334,7 @@
             <a:spLocks noGrp="1"/>
           </p:cNvSpPr>
           <p:nvPr>
-            <p:ph type="sldNum" sz="quarter" idx="5"/>
+            <p:ph type="sldNum" idx="5" sz="quarter"/>
           </p:nvPr>
         </p:nvSpPr>
         <p:spPr/>
@@ -2178,7 +2348,7 @@
 </file>
 
 <file path=ppt/notesSlides/notesSlide28.xml><?xml version="1.0" encoding="utf-8"?>
-<p:notes xmlns:a="http://schemas.openxmlformats.org/drawingml/2006/main" xmlns:r="http://schemas.openxmlformats.org/officeDocument/2006/relationships" xmlns:p="http://schemas.openxmlformats.org/presentationml/2006/main">
+<p:notes xmlns:a="http://schemas.openxmlformats.org/drawingml/2006/main" xmlns:p="http://schemas.openxmlformats.org/presentationml/2006/main" xmlns:r="http://schemas.openxmlformats.org/officeDocument/2006/relationships">
   <p:cSld>
     <p:spTree>
       <p:nvGrpSpPr>
@@ -2198,7 +2368,7 @@
         <p:nvSpPr>
           <p:cNvPr id="2" name="Slide Image Placeholder 1"/>
           <p:cNvSpPr>
-            <a:spLocks noGrp="1" noRot="1" noChangeAspect="1"/>
+            <a:spLocks noGrp="1"/>
           </p:cNvSpPr>
           <p:nvPr>
             <p:ph type="sldImg" idx="2"/>
@@ -2213,7 +2383,7 @@
             <a:spLocks noGrp="1"/>
           </p:cNvSpPr>
           <p:nvPr>
-            <p:ph type="body" sz="quarter" idx="3"/>
+            <p:ph type="body" idx="3" sz="quarter"/>
           </p:nvPr>
         </p:nvSpPr>
         <p:spPr/>
@@ -2261,7 +2431,7 @@
             <a:spLocks noGrp="1"/>
           </p:cNvSpPr>
           <p:nvPr>
-            <p:ph type="sldNum" sz="quarter" idx="5"/>
+            <p:ph type="sldNum" idx="5" sz="quarter"/>
           </p:nvPr>
         </p:nvSpPr>
         <p:spPr/>
@@ -2275,7 +2445,7 @@
 </file>
 
 <file path=ppt/notesSlides/notesSlide29.xml><?xml version="1.0" encoding="utf-8"?>
-<p:notes xmlns:a="http://schemas.openxmlformats.org/drawingml/2006/main" xmlns:r="http://schemas.openxmlformats.org/officeDocument/2006/relationships" xmlns:p="http://schemas.openxmlformats.org/presentationml/2006/main">
+<p:notes xmlns:a="http://schemas.openxmlformats.org/drawingml/2006/main" xmlns:p="http://schemas.openxmlformats.org/presentationml/2006/main" xmlns:r="http://schemas.openxmlformats.org/officeDocument/2006/relationships">
   <p:cSld>
     <p:spTree>
       <p:nvGrpSpPr>
@@ -2295,7 +2465,7 @@
         <p:nvSpPr>
           <p:cNvPr id="2" name="Slide Image Placeholder 1"/>
           <p:cNvSpPr>
-            <a:spLocks noGrp="1" noRot="1" noChangeAspect="1"/>
+            <a:spLocks noGrp="1"/>
           </p:cNvSpPr>
           <p:nvPr>
             <p:ph type="sldImg" idx="2"/>
@@ -2310,7 +2480,7 @@
             <a:spLocks noGrp="1"/>
           </p:cNvSpPr>
           <p:nvPr>
-            <p:ph type="body" sz="quarter" idx="3"/>
+            <p:ph type="body" idx="3" sz="quarter"/>
           </p:nvPr>
         </p:nvSpPr>
         <p:spPr/>
@@ -2342,7 +2512,7 @@
             <a:spLocks noGrp="1"/>
           </p:cNvSpPr>
           <p:nvPr>
-            <p:ph type="sldNum" sz="quarter" idx="5"/>
+            <p:ph type="sldNum" idx="5" sz="quarter"/>
           </p:nvPr>
         </p:nvSpPr>
         <p:spPr/>
@@ -2356,7 +2526,7 @@
 </file>
 
 <file path=ppt/notesSlides/notesSlide3.xml><?xml version="1.0" encoding="utf-8"?>
-<p:notes xmlns:a="http://schemas.openxmlformats.org/drawingml/2006/main" xmlns:r="http://schemas.openxmlformats.org/officeDocument/2006/relationships" xmlns:p="http://schemas.openxmlformats.org/presentationml/2006/main">
+<p:notes xmlns:a="http://schemas.openxmlformats.org/drawingml/2006/main" xmlns:p="http://schemas.openxmlformats.org/presentationml/2006/main" xmlns:r="http://schemas.openxmlformats.org/officeDocument/2006/relationships">
   <p:cSld>
     <p:spTree>
       <p:nvGrpSpPr>
@@ -2376,7 +2546,7 @@
         <p:nvSpPr>
           <p:cNvPr id="2" name="Slide Image Placeholder 1"/>
           <p:cNvSpPr>
-            <a:spLocks noGrp="1" noRot="1" noChangeAspect="1"/>
+            <a:spLocks noGrp="1"/>
           </p:cNvSpPr>
           <p:nvPr>
             <p:ph type="sldImg" idx="2"/>
@@ -2391,7 +2561,7 @@
             <a:spLocks noGrp="1"/>
           </p:cNvSpPr>
           <p:nvPr>
-            <p:ph type="body" sz="quarter" idx="3"/>
+            <p:ph type="body" idx="3" sz="quarter"/>
           </p:nvPr>
         </p:nvSpPr>
         <p:spPr/>
@@ -2423,7 +2593,7 @@
             <a:spLocks noGrp="1"/>
           </p:cNvSpPr>
           <p:nvPr>
-            <p:ph type="sldNum" sz="quarter" idx="5"/>
+            <p:ph type="sldNum" idx="5" sz="quarter"/>
           </p:nvPr>
         </p:nvSpPr>
         <p:spPr/>
@@ -2437,7 +2607,7 @@
 </file>
 
 <file path=ppt/notesSlides/notesSlide30.xml><?xml version="1.0" encoding="utf-8"?>
-<p:notes xmlns:a="http://schemas.openxmlformats.org/drawingml/2006/main" xmlns:r="http://schemas.openxmlformats.org/officeDocument/2006/relationships" xmlns:p="http://schemas.openxmlformats.org/presentationml/2006/main">
+<p:notes xmlns:a="http://schemas.openxmlformats.org/drawingml/2006/main" xmlns:p="http://schemas.openxmlformats.org/presentationml/2006/main" xmlns:r="http://schemas.openxmlformats.org/officeDocument/2006/relationships">
   <p:cSld>
     <p:spTree>
       <p:nvGrpSpPr>
@@ -2457,7 +2627,7 @@
         <p:nvSpPr>
           <p:cNvPr id="2" name="Slide Image Placeholder 1"/>
           <p:cNvSpPr>
-            <a:spLocks noGrp="1" noRot="1" noChangeAspect="1"/>
+            <a:spLocks noGrp="1"/>
           </p:cNvSpPr>
           <p:nvPr>
             <p:ph type="sldImg" idx="2"/>
@@ -2472,7 +2642,7 @@
             <a:spLocks noGrp="1"/>
           </p:cNvSpPr>
           <p:nvPr>
-            <p:ph type="body" sz="quarter" idx="3"/>
+            <p:ph type="body" idx="3" sz="quarter"/>
           </p:nvPr>
         </p:nvSpPr>
         <p:spPr/>
@@ -2512,7 +2682,7 @@
             <a:spLocks noGrp="1"/>
           </p:cNvSpPr>
           <p:nvPr>
-            <p:ph type="sldNum" sz="quarter" idx="5"/>
+            <p:ph type="sldNum" idx="5" sz="quarter"/>
           </p:nvPr>
         </p:nvSpPr>
         <p:spPr/>
@@ -2526,7 +2696,7 @@
 </file>
 
 <file path=ppt/notesSlides/notesSlide31.xml><?xml version="1.0" encoding="utf-8"?>
-<p:notes xmlns:a="http://schemas.openxmlformats.org/drawingml/2006/main" xmlns:r="http://schemas.openxmlformats.org/officeDocument/2006/relationships" xmlns:p="http://schemas.openxmlformats.org/presentationml/2006/main">
+<p:notes xmlns:a="http://schemas.openxmlformats.org/drawingml/2006/main" xmlns:p="http://schemas.openxmlformats.org/presentationml/2006/main" xmlns:r="http://schemas.openxmlformats.org/officeDocument/2006/relationships">
   <p:cSld>
     <p:spTree>
       <p:nvGrpSpPr>
@@ -2546,7 +2716,7 @@
         <p:nvSpPr>
           <p:cNvPr id="2" name="Slide Image Placeholder 1"/>
           <p:cNvSpPr>
-            <a:spLocks noGrp="1" noRot="1" noChangeAspect="1"/>
+            <a:spLocks noGrp="1"/>
           </p:cNvSpPr>
           <p:nvPr>
             <p:ph type="sldImg" idx="2"/>
@@ -2561,7 +2731,7 @@
             <a:spLocks noGrp="1"/>
           </p:cNvSpPr>
           <p:nvPr>
-            <p:ph type="body" sz="quarter" idx="3"/>
+            <p:ph type="body" idx="3" sz="quarter"/>
           </p:nvPr>
         </p:nvSpPr>
         <p:spPr/>
@@ -2625,7 +2795,7 @@
             <a:spLocks noGrp="1"/>
           </p:cNvSpPr>
           <p:nvPr>
-            <p:ph type="sldNum" sz="quarter" idx="5"/>
+            <p:ph type="sldNum" idx="5" sz="quarter"/>
           </p:nvPr>
         </p:nvSpPr>
         <p:spPr/>
@@ -2639,7 +2809,7 @@
 </file>
 
 <file path=ppt/notesSlides/notesSlide4.xml><?xml version="1.0" encoding="utf-8"?>
-<p:notes xmlns:a="http://schemas.openxmlformats.org/drawingml/2006/main" xmlns:r="http://schemas.openxmlformats.org/officeDocument/2006/relationships" xmlns:p="http://schemas.openxmlformats.org/presentationml/2006/main">
+<p:notes xmlns:a="http://schemas.openxmlformats.org/drawingml/2006/main" xmlns:p="http://schemas.openxmlformats.org/presentationml/2006/main" xmlns:r="http://schemas.openxmlformats.org/officeDocument/2006/relationships">
   <p:cSld>
     <p:spTree>
       <p:nvGrpSpPr>
@@ -2659,7 +2829,7 @@
         <p:nvSpPr>
           <p:cNvPr id="2" name="Slide Image Placeholder 1"/>
           <p:cNvSpPr>
-            <a:spLocks noGrp="1" noRot="1" noChangeAspect="1"/>
+            <a:spLocks noGrp="1"/>
           </p:cNvSpPr>
           <p:nvPr>
             <p:ph type="sldImg" idx="2"/>
@@ -2674,7 +2844,7 @@
             <a:spLocks noGrp="1"/>
           </p:cNvSpPr>
           <p:nvPr>
-            <p:ph type="body" sz="quarter" idx="3"/>
+            <p:ph type="body" idx="3" sz="quarter"/>
           </p:nvPr>
         </p:nvSpPr>
         <p:spPr/>
@@ -2698,7 +2868,7 @@
             <a:spLocks noGrp="1"/>
           </p:cNvSpPr>
           <p:nvPr>
-            <p:ph type="sldNum" sz="quarter" idx="5"/>
+            <p:ph type="sldNum" idx="5" sz="quarter"/>
           </p:nvPr>
         </p:nvSpPr>
         <p:spPr/>
@@ -2712,7 +2882,7 @@
 </file>
 
 <file path=ppt/notesSlides/notesSlide5.xml><?xml version="1.0" encoding="utf-8"?>
-<p:notes xmlns:a="http://schemas.openxmlformats.org/drawingml/2006/main" xmlns:r="http://schemas.openxmlformats.org/officeDocument/2006/relationships" xmlns:p="http://schemas.openxmlformats.org/presentationml/2006/main">
+<p:notes xmlns:a="http://schemas.openxmlformats.org/drawingml/2006/main" xmlns:p="http://schemas.openxmlformats.org/presentationml/2006/main" xmlns:r="http://schemas.openxmlformats.org/officeDocument/2006/relationships">
   <p:cSld>
     <p:spTree>
       <p:nvGrpSpPr>
@@ -2732,7 +2902,7 @@
         <p:nvSpPr>
           <p:cNvPr id="2" name="Slide Image Placeholder 1"/>
           <p:cNvSpPr>
-            <a:spLocks noGrp="1" noRot="1" noChangeAspect="1"/>
+            <a:spLocks noGrp="1"/>
           </p:cNvSpPr>
           <p:nvPr>
             <p:ph type="sldImg" idx="2"/>
@@ -2747,7 +2917,7 @@
             <a:spLocks noGrp="1"/>
           </p:cNvSpPr>
           <p:nvPr>
-            <p:ph type="body" sz="quarter" idx="3"/>
+            <p:ph type="body" idx="3" sz="quarter"/>
           </p:nvPr>
         </p:nvSpPr>
         <p:spPr/>
@@ -2795,7 +2965,7 @@
             <a:spLocks noGrp="1"/>
           </p:cNvSpPr>
           <p:nvPr>
-            <p:ph type="sldNum" sz="quarter" idx="5"/>
+            <p:ph type="sldNum" idx="5" sz="quarter"/>
           </p:nvPr>
         </p:nvSpPr>
         <p:spPr/>
@@ -2809,7 +2979,7 @@
 </file>
 
 <file path=ppt/notesSlides/notesSlide6.xml><?xml version="1.0" encoding="utf-8"?>
-<p:notes xmlns:a="http://schemas.openxmlformats.org/drawingml/2006/main" xmlns:r="http://schemas.openxmlformats.org/officeDocument/2006/relationships" xmlns:p="http://schemas.openxmlformats.org/presentationml/2006/main">
+<p:notes xmlns:a="http://schemas.openxmlformats.org/drawingml/2006/main" xmlns:p="http://schemas.openxmlformats.org/presentationml/2006/main" xmlns:r="http://schemas.openxmlformats.org/officeDocument/2006/relationships">
   <p:cSld>
     <p:spTree>
       <p:nvGrpSpPr>
@@ -2829,7 +2999,7 @@
         <p:nvSpPr>
           <p:cNvPr id="2" name="Slide Image Placeholder 1"/>
           <p:cNvSpPr>
-            <a:spLocks noGrp="1" noRot="1" noChangeAspect="1"/>
+            <a:spLocks noGrp="1"/>
           </p:cNvSpPr>
           <p:nvPr>
             <p:ph type="sldImg" idx="2"/>
@@ -2844,7 +3014,7 @@
             <a:spLocks noGrp="1"/>
           </p:cNvSpPr>
           <p:nvPr>
-            <p:ph type="body" sz="quarter" idx="3"/>
+            <p:ph type="body" idx="3" sz="quarter"/>
           </p:nvPr>
         </p:nvSpPr>
         <p:spPr/>
@@ -2892,7 +3062,7 @@
             <a:spLocks noGrp="1"/>
           </p:cNvSpPr>
           <p:nvPr>
-            <p:ph type="sldNum" sz="quarter" idx="5"/>
+            <p:ph type="sldNum" idx="5" sz="quarter"/>
           </p:nvPr>
         </p:nvSpPr>
         <p:spPr/>
@@ -2906,7 +3076,7 @@
 </file>
 
 <file path=ppt/notesSlides/notesSlide7.xml><?xml version="1.0" encoding="utf-8"?>
-<p:notes xmlns:a="http://schemas.openxmlformats.org/drawingml/2006/main" xmlns:r="http://schemas.openxmlformats.org/officeDocument/2006/relationships" xmlns:p="http://schemas.openxmlformats.org/presentationml/2006/main">
+<p:notes xmlns:a="http://schemas.openxmlformats.org/drawingml/2006/main" xmlns:p="http://schemas.openxmlformats.org/presentationml/2006/main" xmlns:r="http://schemas.openxmlformats.org/officeDocument/2006/relationships">
   <p:cSld>
     <p:spTree>
       <p:nvGrpSpPr>
@@ -2926,7 +3096,7 @@
         <p:nvSpPr>
           <p:cNvPr id="2" name="Slide Image Placeholder 1"/>
           <p:cNvSpPr>
-            <a:spLocks noGrp="1" noRot="1" noChangeAspect="1"/>
+            <a:spLocks noGrp="1"/>
           </p:cNvSpPr>
           <p:nvPr>
             <p:ph type="sldImg" idx="2"/>
@@ -2941,7 +3111,7 @@
             <a:spLocks noGrp="1"/>
           </p:cNvSpPr>
           <p:nvPr>
-            <p:ph type="body" sz="quarter" idx="3"/>
+            <p:ph type="body" idx="3" sz="quarter"/>
           </p:nvPr>
         </p:nvSpPr>
         <p:spPr/>
@@ -2989,7 +3159,7 @@
             <a:spLocks noGrp="1"/>
           </p:cNvSpPr>
           <p:nvPr>
-            <p:ph type="sldNum" sz="quarter" idx="5"/>
+            <p:ph type="sldNum" idx="5" sz="quarter"/>
           </p:nvPr>
         </p:nvSpPr>
         <p:spPr/>
@@ -3003,7 +3173,7 @@
 </file>
 
 <file path=ppt/notesSlides/notesSlide8.xml><?xml version="1.0" encoding="utf-8"?>
-<p:notes xmlns:a="http://schemas.openxmlformats.org/drawingml/2006/main" xmlns:r="http://schemas.openxmlformats.org/officeDocument/2006/relationships" xmlns:p="http://schemas.openxmlformats.org/presentationml/2006/main">
+<p:notes xmlns:a="http://schemas.openxmlformats.org/drawingml/2006/main" xmlns:p="http://schemas.openxmlformats.org/presentationml/2006/main" xmlns:r="http://schemas.openxmlformats.org/officeDocument/2006/relationships">
   <p:cSld>
     <p:spTree>
       <p:nvGrpSpPr>
@@ -3023,7 +3193,7 @@
         <p:nvSpPr>
           <p:cNvPr id="2" name="Slide Image Placeholder 1"/>
           <p:cNvSpPr>
-            <a:spLocks noGrp="1" noRot="1" noChangeAspect="1"/>
+            <a:spLocks noGrp="1"/>
           </p:cNvSpPr>
           <p:nvPr>
             <p:ph type="sldImg" idx="2"/>
@@ -3038,7 +3208,7 @@
             <a:spLocks noGrp="1"/>
           </p:cNvSpPr>
           <p:nvPr>
-            <p:ph type="body" sz="quarter" idx="3"/>
+            <p:ph type="body" idx="3" sz="quarter"/>
           </p:nvPr>
         </p:nvSpPr>
         <p:spPr/>
@@ -3062,7 +3232,7 @@
             <a:spLocks noGrp="1"/>
           </p:cNvSpPr>
           <p:nvPr>
-            <p:ph type="sldNum" sz="quarter" idx="5"/>
+            <p:ph type="sldNum" idx="5" sz="quarter"/>
           </p:nvPr>
         </p:nvSpPr>
         <p:spPr/>
@@ -3076,7 +3246,7 @@
 </file>
 
 <file path=ppt/notesSlides/notesSlide9.xml><?xml version="1.0" encoding="utf-8"?>
-<p:notes xmlns:a="http://schemas.openxmlformats.org/drawingml/2006/main" xmlns:r="http://schemas.openxmlformats.org/officeDocument/2006/relationships" xmlns:p="http://schemas.openxmlformats.org/presentationml/2006/main">
+<p:notes xmlns:a="http://schemas.openxmlformats.org/drawingml/2006/main" xmlns:p="http://schemas.openxmlformats.org/presentationml/2006/main" xmlns:r="http://schemas.openxmlformats.org/officeDocument/2006/relationships">
   <p:cSld>
     <p:spTree>
       <p:nvGrpSpPr>
@@ -3096,7 +3266,7 @@
         <p:nvSpPr>
           <p:cNvPr id="2" name="Slide Image Placeholder 1"/>
           <p:cNvSpPr>
-            <a:spLocks noGrp="1" noRot="1" noChangeAspect="1"/>
+            <a:spLocks noGrp="1"/>
           </p:cNvSpPr>
           <p:nvPr>
             <p:ph type="sldImg" idx="2"/>
@@ -3111,7 +3281,7 @@
             <a:spLocks noGrp="1"/>
           </p:cNvSpPr>
           <p:nvPr>
-            <p:ph type="body" sz="quarter" idx="3"/>
+            <p:ph type="body" idx="3" sz="quarter"/>
           </p:nvPr>
         </p:nvSpPr>
         <p:spPr/>
@@ -3159,7 +3329,7 @@
             <a:spLocks noGrp="1"/>
           </p:cNvSpPr>
           <p:nvPr>
-            <p:ph type="sldNum" sz="quarter" idx="5"/>
+            <p:ph type="sldNum" idx="5" sz="quarter"/>
           </p:nvPr>
         </p:nvSpPr>
         <p:spPr/>
@@ -3210,9 +3380,10 @@
           <a:lstStyle/>
           <a:p>
             <a:r>
-              <a:rPr lang="en-US"/>
+              <a:rPr lang="en-US" smtClean="0"/>
               <a:t>Click to edit Master title style</a:t>
             </a:r>
+            <a:endParaRPr lang="en-US"/>
           </a:p>
         </p:txBody>
       </p:sp>
@@ -3328,9 +3499,10 @@
           </a:lstStyle>
           <a:p>
             <a:r>
-              <a:rPr lang="en-US"/>
+              <a:rPr lang="en-US" smtClean="0"/>
               <a:t>Click to edit Master subtitle style</a:t>
             </a:r>
+            <a:endParaRPr lang="en-US"/>
           </a:p>
         </p:txBody>
       </p:sp>
@@ -3351,7 +3523,7 @@
           <a:p>
             <a:fld id="{5BCAD085-E8A6-8845-BD4E-CB4CCA059FC4}" type="datetimeFigureOut">
               <a:rPr lang="en-US" smtClean="0"/>
-              <a:t>9/7/2026</a:t>
+              <a:t>1/27/13</a:t>
             </a:fld>
             <a:endParaRPr lang="en-US"/>
           </a:p>
@@ -3445,9 +3617,10 @@
           <a:lstStyle/>
           <a:p>
             <a:r>
-              <a:rPr lang="en-US"/>
+              <a:rPr lang="en-US" smtClean="0"/>
               <a:t>Click to edit Master title style</a:t>
             </a:r>
+            <a:endParaRPr lang="en-US"/>
           </a:p>
         </p:txBody>
       </p:sp>
@@ -3468,37 +3641,38 @@
           <a:p>
             <a:pPr lvl="0"/>
             <a:r>
-              <a:rPr lang="en-US"/>
+              <a:rPr lang="en-US" smtClean="0"/>
               <a:t>Click to edit Master text styles</a:t>
             </a:r>
           </a:p>
           <a:p>
             <a:pPr lvl="1"/>
             <a:r>
-              <a:rPr lang="en-US"/>
+              <a:rPr lang="en-US" smtClean="0"/>
               <a:t>Second level</a:t>
             </a:r>
           </a:p>
           <a:p>
             <a:pPr lvl="2"/>
             <a:r>
-              <a:rPr lang="en-US"/>
+              <a:rPr lang="en-US" smtClean="0"/>
               <a:t>Third level</a:t>
             </a:r>
           </a:p>
           <a:p>
             <a:pPr lvl="3"/>
             <a:r>
-              <a:rPr lang="en-US"/>
+              <a:rPr lang="en-US" smtClean="0"/>
               <a:t>Fourth level</a:t>
             </a:r>
           </a:p>
           <a:p>
             <a:pPr lvl="4"/>
             <a:r>
-              <a:rPr lang="en-US"/>
+              <a:rPr lang="en-US" smtClean="0"/>
               <a:t>Fifth level</a:t>
             </a:r>
+            <a:endParaRPr lang="en-US"/>
           </a:p>
         </p:txBody>
       </p:sp>
@@ -3519,7 +3693,7 @@
           <a:p>
             <a:fld id="{5BCAD085-E8A6-8845-BD4E-CB4CCA059FC4}" type="datetimeFigureOut">
               <a:rPr lang="en-US" smtClean="0"/>
-              <a:t>9/7/2026</a:t>
+              <a:t>1/27/13</a:t>
             </a:fld>
             <a:endParaRPr lang="en-US"/>
           </a:p>
@@ -3618,9 +3792,10 @@
           <a:lstStyle/>
           <a:p>
             <a:r>
-              <a:rPr lang="en-US"/>
+              <a:rPr lang="en-US" smtClean="0"/>
               <a:t>Click to edit Master title style</a:t>
             </a:r>
+            <a:endParaRPr lang="en-US"/>
           </a:p>
         </p:txBody>
       </p:sp>
@@ -3646,37 +3821,38 @@
           <a:p>
             <a:pPr lvl="0"/>
             <a:r>
-              <a:rPr lang="en-US"/>
+              <a:rPr lang="en-US" smtClean="0"/>
               <a:t>Click to edit Master text styles</a:t>
             </a:r>
           </a:p>
           <a:p>
             <a:pPr lvl="1"/>
             <a:r>
-              <a:rPr lang="en-US"/>
+              <a:rPr lang="en-US" smtClean="0"/>
               <a:t>Second level</a:t>
             </a:r>
           </a:p>
           <a:p>
             <a:pPr lvl="2"/>
             <a:r>
-              <a:rPr lang="en-US"/>
+              <a:rPr lang="en-US" smtClean="0"/>
               <a:t>Third level</a:t>
             </a:r>
           </a:p>
           <a:p>
             <a:pPr lvl="3"/>
             <a:r>
-              <a:rPr lang="en-US"/>
+              <a:rPr lang="en-US" smtClean="0"/>
               <a:t>Fourth level</a:t>
             </a:r>
           </a:p>
           <a:p>
             <a:pPr lvl="4"/>
             <a:r>
-              <a:rPr lang="en-US"/>
+              <a:rPr lang="en-US" smtClean="0"/>
               <a:t>Fifth level</a:t>
             </a:r>
+            <a:endParaRPr lang="en-US"/>
           </a:p>
         </p:txBody>
       </p:sp>
@@ -3697,7 +3873,7 @@
           <a:p>
             <a:fld id="{5BCAD085-E8A6-8845-BD4E-CB4CCA059FC4}" type="datetimeFigureOut">
               <a:rPr lang="en-US" smtClean="0"/>
-              <a:t>9/7/2026</a:t>
+              <a:t>1/27/13</a:t>
             </a:fld>
             <a:endParaRPr lang="en-US"/>
           </a:p>
@@ -3791,9 +3967,10 @@
           <a:lstStyle/>
           <a:p>
             <a:r>
-              <a:rPr lang="en-US"/>
+              <a:rPr lang="en-US" smtClean="0"/>
               <a:t>Click to edit Master title style</a:t>
             </a:r>
+            <a:endParaRPr lang="en-US"/>
           </a:p>
         </p:txBody>
       </p:sp>
@@ -3814,37 +3991,38 @@
           <a:p>
             <a:pPr lvl="0"/>
             <a:r>
-              <a:rPr lang="en-US"/>
+              <a:rPr lang="en-US" smtClean="0"/>
               <a:t>Click to edit Master text styles</a:t>
             </a:r>
           </a:p>
           <a:p>
             <a:pPr lvl="1"/>
             <a:r>
-              <a:rPr lang="en-US"/>
+              <a:rPr lang="en-US" smtClean="0"/>
               <a:t>Second level</a:t>
             </a:r>
           </a:p>
           <a:p>
             <a:pPr lvl="2"/>
             <a:r>
-              <a:rPr lang="en-US"/>
+              <a:rPr lang="en-US" smtClean="0"/>
               <a:t>Third level</a:t>
             </a:r>
           </a:p>
           <a:p>
             <a:pPr lvl="3"/>
             <a:r>
-              <a:rPr lang="en-US"/>
+              <a:rPr lang="en-US" smtClean="0"/>
               <a:t>Fourth level</a:t>
             </a:r>
           </a:p>
           <a:p>
             <a:pPr lvl="4"/>
             <a:r>
-              <a:rPr lang="en-US"/>
+              <a:rPr lang="en-US" smtClean="0"/>
               <a:t>Fifth level</a:t>
             </a:r>
+            <a:endParaRPr lang="en-US"/>
           </a:p>
         </p:txBody>
       </p:sp>
@@ -3865,7 +4043,7 @@
           <a:p>
             <a:fld id="{5BCAD085-E8A6-8845-BD4E-CB4CCA059FC4}" type="datetimeFigureOut">
               <a:rPr lang="en-US" smtClean="0"/>
-              <a:t>9/7/2026</a:t>
+              <a:t>1/27/13</a:t>
             </a:fld>
             <a:endParaRPr lang="en-US"/>
           </a:p>
@@ -3968,9 +4146,10 @@
           </a:lstStyle>
           <a:p>
             <a:r>
-              <a:rPr lang="en-US"/>
+              <a:rPr lang="en-US" smtClean="0"/>
               <a:t>Click to edit Master title style</a:t>
             </a:r>
+            <a:endParaRPr lang="en-US"/>
           </a:p>
         </p:txBody>
       </p:sp>
@@ -4087,7 +4266,7 @@
           <a:p>
             <a:pPr lvl="0"/>
             <a:r>
-              <a:rPr lang="en-US"/>
+              <a:rPr lang="en-US" smtClean="0"/>
               <a:t>Click to edit Master text styles</a:t>
             </a:r>
           </a:p>
@@ -4110,7 +4289,7 @@
           <a:p>
             <a:fld id="{5BCAD085-E8A6-8845-BD4E-CB4CCA059FC4}" type="datetimeFigureOut">
               <a:rPr lang="en-US" smtClean="0"/>
-              <a:t>9/7/2026</a:t>
+              <a:t>1/27/13</a:t>
             </a:fld>
             <a:endParaRPr lang="en-US"/>
           </a:p>
@@ -4204,9 +4383,10 @@
           <a:lstStyle/>
           <a:p>
             <a:r>
-              <a:rPr lang="en-US"/>
+              <a:rPr lang="en-US" smtClean="0"/>
               <a:t>Click to edit Master title style</a:t>
             </a:r>
+            <a:endParaRPr lang="en-US"/>
           </a:p>
         </p:txBody>
       </p:sp>
@@ -4260,37 +4440,38 @@
           <a:p>
             <a:pPr lvl="0"/>
             <a:r>
-              <a:rPr lang="en-US"/>
+              <a:rPr lang="en-US" smtClean="0"/>
               <a:t>Click to edit Master text styles</a:t>
             </a:r>
           </a:p>
           <a:p>
             <a:pPr lvl="1"/>
             <a:r>
-              <a:rPr lang="en-US"/>
+              <a:rPr lang="en-US" smtClean="0"/>
               <a:t>Second level</a:t>
             </a:r>
           </a:p>
           <a:p>
             <a:pPr lvl="2"/>
             <a:r>
-              <a:rPr lang="en-US"/>
+              <a:rPr lang="en-US" smtClean="0"/>
               <a:t>Third level</a:t>
             </a:r>
           </a:p>
           <a:p>
             <a:pPr lvl="3"/>
             <a:r>
-              <a:rPr lang="en-US"/>
+              <a:rPr lang="en-US" smtClean="0"/>
               <a:t>Fourth level</a:t>
             </a:r>
           </a:p>
           <a:p>
             <a:pPr lvl="4"/>
             <a:r>
-              <a:rPr lang="en-US"/>
+              <a:rPr lang="en-US" smtClean="0"/>
               <a:t>Fifth level</a:t>
             </a:r>
+            <a:endParaRPr lang="en-US"/>
           </a:p>
         </p:txBody>
       </p:sp>
@@ -4344,37 +4525,38 @@
           <a:p>
             <a:pPr lvl="0"/>
             <a:r>
-              <a:rPr lang="en-US"/>
+              <a:rPr lang="en-US" smtClean="0"/>
               <a:t>Click to edit Master text styles</a:t>
             </a:r>
           </a:p>
           <a:p>
             <a:pPr lvl="1"/>
             <a:r>
-              <a:rPr lang="en-US"/>
+              <a:rPr lang="en-US" smtClean="0"/>
               <a:t>Second level</a:t>
             </a:r>
           </a:p>
           <a:p>
             <a:pPr lvl="2"/>
             <a:r>
-              <a:rPr lang="en-US"/>
+              <a:rPr lang="en-US" smtClean="0"/>
               <a:t>Third level</a:t>
             </a:r>
           </a:p>
           <a:p>
             <a:pPr lvl="3"/>
             <a:r>
-              <a:rPr lang="en-US"/>
+              <a:rPr lang="en-US" smtClean="0"/>
               <a:t>Fourth level</a:t>
             </a:r>
           </a:p>
           <a:p>
             <a:pPr lvl="4"/>
             <a:r>
-              <a:rPr lang="en-US"/>
+              <a:rPr lang="en-US" smtClean="0"/>
               <a:t>Fifth level</a:t>
             </a:r>
+            <a:endParaRPr lang="en-US"/>
           </a:p>
         </p:txBody>
       </p:sp>
@@ -4395,7 +4577,7 @@
           <a:p>
             <a:fld id="{5BCAD085-E8A6-8845-BD4E-CB4CCA059FC4}" type="datetimeFigureOut">
               <a:rPr lang="en-US" smtClean="0"/>
-              <a:t>9/7/2026</a:t>
+              <a:t>1/27/13</a:t>
             </a:fld>
             <a:endParaRPr lang="en-US"/>
           </a:p>
@@ -4493,9 +4675,10 @@
           </a:lstStyle>
           <a:p>
             <a:r>
-              <a:rPr lang="en-US"/>
+              <a:rPr lang="en-US" smtClean="0"/>
               <a:t>Click to edit Master title style</a:t>
             </a:r>
+            <a:endParaRPr lang="en-US"/>
           </a:p>
         </p:txBody>
       </p:sp>
@@ -4558,7 +4741,7 @@
           <a:p>
             <a:pPr lvl="0"/>
             <a:r>
-              <a:rPr lang="en-US"/>
+              <a:rPr lang="en-US" smtClean="0"/>
               <a:t>Click to edit Master text styles</a:t>
             </a:r>
           </a:p>
@@ -4614,37 +4797,38 @@
           <a:p>
             <a:pPr lvl="0"/>
             <a:r>
-              <a:rPr lang="en-US"/>
+              <a:rPr lang="en-US" smtClean="0"/>
               <a:t>Click to edit Master text styles</a:t>
             </a:r>
           </a:p>
           <a:p>
             <a:pPr lvl="1"/>
             <a:r>
-              <a:rPr lang="en-US"/>
+              <a:rPr lang="en-US" smtClean="0"/>
               <a:t>Second level</a:t>
             </a:r>
           </a:p>
           <a:p>
             <a:pPr lvl="2"/>
             <a:r>
-              <a:rPr lang="en-US"/>
+              <a:rPr lang="en-US" smtClean="0"/>
               <a:t>Third level</a:t>
             </a:r>
           </a:p>
           <a:p>
             <a:pPr lvl="3"/>
             <a:r>
-              <a:rPr lang="en-US"/>
+              <a:rPr lang="en-US" smtClean="0"/>
               <a:t>Fourth level</a:t>
             </a:r>
           </a:p>
           <a:p>
             <a:pPr lvl="4"/>
             <a:r>
-              <a:rPr lang="en-US"/>
+              <a:rPr lang="en-US" smtClean="0"/>
               <a:t>Fifth level</a:t>
             </a:r>
+            <a:endParaRPr lang="en-US"/>
           </a:p>
         </p:txBody>
       </p:sp>
@@ -4707,7 +4891,7 @@
           <a:p>
             <a:pPr lvl="0"/>
             <a:r>
-              <a:rPr lang="en-US"/>
+              <a:rPr lang="en-US" smtClean="0"/>
               <a:t>Click to edit Master text styles</a:t>
             </a:r>
           </a:p>
@@ -4763,37 +4947,38 @@
           <a:p>
             <a:pPr lvl="0"/>
             <a:r>
-              <a:rPr lang="en-US"/>
+              <a:rPr lang="en-US" smtClean="0"/>
               <a:t>Click to edit Master text styles</a:t>
             </a:r>
           </a:p>
           <a:p>
             <a:pPr lvl="1"/>
             <a:r>
-              <a:rPr lang="en-US"/>
+              <a:rPr lang="en-US" smtClean="0"/>
               <a:t>Second level</a:t>
             </a:r>
           </a:p>
           <a:p>
             <a:pPr lvl="2"/>
             <a:r>
-              <a:rPr lang="en-US"/>
+              <a:rPr lang="en-US" smtClean="0"/>
               <a:t>Third level</a:t>
             </a:r>
           </a:p>
           <a:p>
             <a:pPr lvl="3"/>
             <a:r>
-              <a:rPr lang="en-US"/>
+              <a:rPr lang="en-US" smtClean="0"/>
               <a:t>Fourth level</a:t>
             </a:r>
           </a:p>
           <a:p>
             <a:pPr lvl="4"/>
             <a:r>
-              <a:rPr lang="en-US"/>
+              <a:rPr lang="en-US" smtClean="0"/>
               <a:t>Fifth level</a:t>
             </a:r>
+            <a:endParaRPr lang="en-US"/>
           </a:p>
         </p:txBody>
       </p:sp>
@@ -4814,7 +4999,7 @@
           <a:p>
             <a:fld id="{5BCAD085-E8A6-8845-BD4E-CB4CCA059FC4}" type="datetimeFigureOut">
               <a:rPr lang="en-US" smtClean="0"/>
-              <a:t>9/7/2026</a:t>
+              <a:t>1/27/13</a:t>
             </a:fld>
             <a:endParaRPr lang="en-US"/>
           </a:p>
@@ -4908,9 +5093,10 @@
           <a:lstStyle/>
           <a:p>
             <a:r>
-              <a:rPr lang="en-US"/>
+              <a:rPr lang="en-US" smtClean="0"/>
               <a:t>Click to edit Master title style</a:t>
             </a:r>
+            <a:endParaRPr lang="en-US"/>
           </a:p>
         </p:txBody>
       </p:sp>
@@ -4931,7 +5117,7 @@
           <a:p>
             <a:fld id="{5BCAD085-E8A6-8845-BD4E-CB4CCA059FC4}" type="datetimeFigureOut">
               <a:rPr lang="en-US" smtClean="0"/>
-              <a:t>9/7/2026</a:t>
+              <a:t>1/27/13</a:t>
             </a:fld>
             <a:endParaRPr lang="en-US"/>
           </a:p>
@@ -5026,7 +5212,7 @@
           <a:p>
             <a:fld id="{5BCAD085-E8A6-8845-BD4E-CB4CCA059FC4}" type="datetimeFigureOut">
               <a:rPr lang="en-US" smtClean="0"/>
-              <a:t>9/7/2026</a:t>
+              <a:t>1/27/13</a:t>
             </a:fld>
             <a:endParaRPr lang="en-US"/>
           </a:p>
@@ -5129,9 +5315,10 @@
           </a:lstStyle>
           <a:p>
             <a:r>
-              <a:rPr lang="en-US"/>
+              <a:rPr lang="en-US" smtClean="0"/>
               <a:t>Click to edit Master title style</a:t>
             </a:r>
+            <a:endParaRPr lang="en-US"/>
           </a:p>
         </p:txBody>
       </p:sp>
@@ -5185,37 +5372,38 @@
           <a:p>
             <a:pPr lvl="0"/>
             <a:r>
-              <a:rPr lang="en-US"/>
+              <a:rPr lang="en-US" smtClean="0"/>
               <a:t>Click to edit Master text styles</a:t>
             </a:r>
           </a:p>
           <a:p>
             <a:pPr lvl="1"/>
             <a:r>
-              <a:rPr lang="en-US"/>
+              <a:rPr lang="en-US" smtClean="0"/>
               <a:t>Second level</a:t>
             </a:r>
           </a:p>
           <a:p>
             <a:pPr lvl="2"/>
             <a:r>
-              <a:rPr lang="en-US"/>
+              <a:rPr lang="en-US" smtClean="0"/>
               <a:t>Third level</a:t>
             </a:r>
           </a:p>
           <a:p>
             <a:pPr lvl="3"/>
             <a:r>
-              <a:rPr lang="en-US"/>
+              <a:rPr lang="en-US" smtClean="0"/>
               <a:t>Fourth level</a:t>
             </a:r>
           </a:p>
           <a:p>
             <a:pPr lvl="4"/>
             <a:r>
-              <a:rPr lang="en-US"/>
+              <a:rPr lang="en-US" smtClean="0"/>
               <a:t>Fifth level</a:t>
             </a:r>
+            <a:endParaRPr lang="en-US"/>
           </a:p>
         </p:txBody>
       </p:sp>
@@ -5278,7 +5466,7 @@
           <a:p>
             <a:pPr lvl="0"/>
             <a:r>
-              <a:rPr lang="en-US"/>
+              <a:rPr lang="en-US" smtClean="0"/>
               <a:t>Click to edit Master text styles</a:t>
             </a:r>
           </a:p>
@@ -5301,7 +5489,7 @@
           <a:p>
             <a:fld id="{5BCAD085-E8A6-8845-BD4E-CB4CCA059FC4}" type="datetimeFigureOut">
               <a:rPr lang="en-US" smtClean="0"/>
-              <a:t>9/7/2026</a:t>
+              <a:t>1/27/13</a:t>
             </a:fld>
             <a:endParaRPr lang="en-US"/>
           </a:p>
@@ -5404,9 +5592,10 @@
           </a:lstStyle>
           <a:p>
             <a:r>
-              <a:rPr lang="en-US"/>
+              <a:rPr lang="en-US" smtClean="0"/>
               <a:t>Click to edit Master title style</a:t>
             </a:r>
+            <a:endParaRPr lang="en-US"/>
           </a:p>
         </p:txBody>
       </p:sp>
@@ -5530,7 +5719,7 @@
           <a:p>
             <a:pPr lvl="0"/>
             <a:r>
-              <a:rPr lang="en-US"/>
+              <a:rPr lang="en-US" smtClean="0"/>
               <a:t>Click to edit Master text styles</a:t>
             </a:r>
           </a:p>
@@ -5553,7 +5742,7 @@
           <a:p>
             <a:fld id="{5BCAD085-E8A6-8845-BD4E-CB4CCA059FC4}" type="datetimeFigureOut">
               <a:rPr lang="en-US" smtClean="0"/>
-              <a:t>9/7/2026</a:t>
+              <a:t>1/27/13</a:t>
             </a:fld>
             <a:endParaRPr lang="en-US"/>
           </a:p>
@@ -5662,9 +5851,10 @@
           <a:lstStyle/>
           <a:p>
             <a:r>
-              <a:rPr lang="en-US"/>
+              <a:rPr lang="en-US" smtClean="0"/>
               <a:t>Click to edit Master title style</a:t>
             </a:r>
+            <a:endParaRPr lang="en-US"/>
           </a:p>
         </p:txBody>
       </p:sp>
@@ -5695,37 +5885,38 @@
           <a:p>
             <a:pPr lvl="0"/>
             <a:r>
-              <a:rPr lang="en-US"/>
+              <a:rPr lang="en-US" smtClean="0"/>
               <a:t>Click to edit Master text styles</a:t>
             </a:r>
           </a:p>
           <a:p>
             <a:pPr lvl="1"/>
             <a:r>
-              <a:rPr lang="en-US"/>
+              <a:rPr lang="en-US" smtClean="0"/>
               <a:t>Second level</a:t>
             </a:r>
           </a:p>
           <a:p>
             <a:pPr lvl="2"/>
             <a:r>
-              <a:rPr lang="en-US"/>
+              <a:rPr lang="en-US" smtClean="0"/>
               <a:t>Third level</a:t>
             </a:r>
           </a:p>
           <a:p>
             <a:pPr lvl="3"/>
             <a:r>
-              <a:rPr lang="en-US"/>
+              <a:rPr lang="en-US" smtClean="0"/>
               <a:t>Fourth level</a:t>
             </a:r>
           </a:p>
           <a:p>
             <a:pPr lvl="4"/>
             <a:r>
-              <a:rPr lang="en-US"/>
+              <a:rPr lang="en-US" smtClean="0"/>
               <a:t>Fifth level</a:t>
             </a:r>
+            <a:endParaRPr lang="en-US"/>
           </a:p>
         </p:txBody>
       </p:sp>
@@ -5764,7 +5955,7 @@
           <a:p>
             <a:fld id="{5BCAD085-E8A6-8845-BD4E-CB4CCA059FC4}" type="datetimeFigureOut">
               <a:rPr lang="en-US" smtClean="0"/>
-              <a:t>9/7/2026</a:t>
+              <a:t>1/27/13</a:t>
             </a:fld>
             <a:endParaRPr lang="en-US"/>
           </a:p>
@@ -6123,7 +6314,7 @@
 </file>
 
 <file path=ppt/slides/slide1.xml><?xml version="1.0" encoding="utf-8"?>
-<p:sld xmlns:a="http://schemas.openxmlformats.org/drawingml/2006/main" xmlns:r="http://schemas.openxmlformats.org/officeDocument/2006/relationships" xmlns:p="http://schemas.openxmlformats.org/presentationml/2006/main">
+<p:sld xmlns:a="http://schemas.openxmlformats.org/drawingml/2006/main" xmlns:p="http://schemas.openxmlformats.org/presentationml/2006/main" xmlns:r="http://schemas.openxmlformats.org/officeDocument/2006/relationships">
   <p:cSld>
     <p:spTree>
       <p:nvGrpSpPr>
@@ -6131,14 +6322,7 @@
         <p:cNvGrpSpPr/>
         <p:nvPr/>
       </p:nvGrpSpPr>
-      <p:grpSpPr>
-        <a:xfrm>
-          <a:off x="0" y="0"/>
-          <a:ext cx="0" cy="0"/>
-          <a:chOff x="0" y="0"/>
-          <a:chExt cx="0" cy="0"/>
-        </a:xfrm>
-      </p:grpSpPr>
+      <p:grpSpPr/>
       <p:sp>
         <p:nvSpPr>
           <p:cNvPr id="2" name="Rectangle 1"/>
@@ -6180,7 +6364,6 @@
           <a:lstStyle/>
           <a:p>
             <a:pPr algn="ctr"/>
-            <a:endParaRPr/>
           </a:p>
         </p:txBody>
       </p:sp>
@@ -6193,7 +6376,7 @@
           <p:nvPr/>
         </p:nvPicPr>
         <p:blipFill>
-          <a:blip r:embed="rId3"/>
+          <a:blip r:embed="rId2"/>
           <a:stretch>
             <a:fillRect/>
           </a:stretch>
@@ -6438,12 +6621,6 @@
                 <a:latin typeface="Calibri"/>
               </a:defRPr>
             </a:pPr>
-            <a:endParaRPr sz="1200" b="0">
-              <a:solidFill>
-                <a:srgbClr val="666666"/>
-              </a:solidFill>
-              <a:latin typeface="Calibri"/>
-            </a:endParaRPr>
           </a:p>
           <a:p>
             <a:pPr algn="l">
@@ -6585,12 +6762,6 @@
                 <a:latin typeface="Calibri"/>
               </a:defRPr>
             </a:pPr>
-            <a:endParaRPr sz="1200" b="0">
-              <a:solidFill>
-                <a:srgbClr val="666666"/>
-              </a:solidFill>
-              <a:latin typeface="Calibri"/>
-            </a:endParaRPr>
           </a:p>
           <a:p>
             <a:pPr algn="l">
@@ -6628,7 +6799,7 @@
           <p:nvPr/>
         </p:nvPicPr>
         <p:blipFill>
-          <a:blip r:embed="rId4"/>
+          <a:blip r:embed="rId3"/>
           <a:stretch>
             <a:fillRect/>
           </a:stretch>
@@ -6700,7 +6871,7 @@
 </file>
 
 <file path=ppt/slides/slide10.xml><?xml version="1.0" encoding="utf-8"?>
-<p:sld xmlns:a="http://schemas.openxmlformats.org/drawingml/2006/main" xmlns:r="http://schemas.openxmlformats.org/officeDocument/2006/relationships" xmlns:p="http://schemas.openxmlformats.org/presentationml/2006/main">
+<p:sld xmlns:a="http://schemas.openxmlformats.org/drawingml/2006/main" xmlns:p="http://schemas.openxmlformats.org/presentationml/2006/main" xmlns:r="http://schemas.openxmlformats.org/officeDocument/2006/relationships">
   <p:cSld>
     <p:spTree>
       <p:nvGrpSpPr>
@@ -6708,14 +6879,7 @@
         <p:cNvGrpSpPr/>
         <p:nvPr/>
       </p:nvGrpSpPr>
-      <p:grpSpPr>
-        <a:xfrm>
-          <a:off x="0" y="0"/>
-          <a:ext cx="0" cy="0"/>
-          <a:chOff x="0" y="0"/>
-          <a:chExt cx="0" cy="0"/>
-        </a:xfrm>
-      </p:grpSpPr>
+      <p:grpSpPr/>
       <p:sp>
         <p:nvSpPr>
           <p:cNvPr id="2" name="Title 1"/>
@@ -6803,7 +6967,6 @@
           <a:lstStyle/>
           <a:p>
             <a:pPr algn="ctr"/>
-            <a:endParaRPr/>
           </a:p>
         </p:txBody>
       </p:sp>
@@ -7012,12 +7175,6 @@
                 <a:latin typeface="Calibri"/>
               </a:defRPr>
             </a:pPr>
-            <a:endParaRPr sz="2100" b="0">
-              <a:solidFill>
-                <a:srgbClr val="222222"/>
-              </a:solidFill>
-              <a:latin typeface="Calibri"/>
-            </a:endParaRPr>
           </a:p>
           <a:p>
             <a:pPr algn="l">
@@ -7084,12 +7241,6 @@
                 <a:latin typeface="Calibri"/>
               </a:defRPr>
             </a:pPr>
-            <a:endParaRPr sz="2100" b="0">
-              <a:solidFill>
-                <a:srgbClr val="222222"/>
-              </a:solidFill>
-              <a:latin typeface="Calibri"/>
-            </a:endParaRPr>
           </a:p>
           <a:p>
             <a:pPr algn="l">
@@ -7229,12 +7380,6 @@
                 <a:latin typeface="Calibri"/>
               </a:defRPr>
             </a:pPr>
-            <a:endParaRPr sz="2200" b="0">
-              <a:solidFill>
-                <a:srgbClr val="222222"/>
-              </a:solidFill>
-              <a:latin typeface="Calibri"/>
-            </a:endParaRPr>
           </a:p>
           <a:p>
             <a:pPr algn="l">
@@ -7272,7 +7417,7 @@
 </file>
 
 <file path=ppt/slides/slide11.xml><?xml version="1.0" encoding="utf-8"?>
-<p:sld xmlns:a="http://schemas.openxmlformats.org/drawingml/2006/main" xmlns:r="http://schemas.openxmlformats.org/officeDocument/2006/relationships" xmlns:p="http://schemas.openxmlformats.org/presentationml/2006/main">
+<p:sld xmlns:a="http://schemas.openxmlformats.org/drawingml/2006/main" xmlns:p="http://schemas.openxmlformats.org/presentationml/2006/main" xmlns:r="http://schemas.openxmlformats.org/officeDocument/2006/relationships">
   <p:cSld>
     <p:spTree>
       <p:nvGrpSpPr>
@@ -7280,14 +7425,7 @@
         <p:cNvGrpSpPr/>
         <p:nvPr/>
       </p:nvGrpSpPr>
-      <p:grpSpPr>
-        <a:xfrm>
-          <a:off x="0" y="0"/>
-          <a:ext cx="0" cy="0"/>
-          <a:chOff x="0" y="0"/>
-          <a:chExt cx="0" cy="0"/>
-        </a:xfrm>
-      </p:grpSpPr>
+      <p:grpSpPr/>
       <p:sp>
         <p:nvSpPr>
           <p:cNvPr id="2" name="TextBox 1"/>
@@ -7425,7 +7563,6 @@
           <a:lstStyle/>
           <a:p>
             <a:pPr algn="ctr"/>
-            <a:endParaRPr/>
           </a:p>
         </p:txBody>
       </p:sp>
@@ -7566,7 +7703,7 @@
           </a:fontRef>
         </p:style>
         <p:txBody>
-          <a:bodyPr wrap="square" lIns="73152" rIns="73152" rtlCol="0" anchor="ctr"/>
+          <a:bodyPr rtlCol="0" anchor="ctr" wrap="square" lIns="73152" rIns="73152"/>
           <a:lstStyle/>
           <a:p>
             <a:pPr algn="ctr">
@@ -7684,7 +7821,7 @@
           </a:fontRef>
         </p:style>
         <p:txBody>
-          <a:bodyPr wrap="square" lIns="73152" rIns="73152" rtlCol="0" anchor="ctr"/>
+          <a:bodyPr rtlCol="0" anchor="ctr" wrap="square" lIns="73152" rIns="73152"/>
           <a:lstStyle/>
           <a:p>
             <a:pPr algn="ctr">
@@ -7802,7 +7939,7 @@
           </a:fontRef>
         </p:style>
         <p:txBody>
-          <a:bodyPr wrap="square" lIns="73152" rIns="73152" rtlCol="0" anchor="ctr"/>
+          <a:bodyPr rtlCol="0" anchor="ctr" wrap="square" lIns="73152" rIns="73152"/>
           <a:lstStyle/>
           <a:p>
             <a:pPr algn="ctr">
@@ -7920,7 +8057,7 @@
           </a:fontRef>
         </p:style>
         <p:txBody>
-          <a:bodyPr wrap="square" lIns="73152" rIns="73152" rtlCol="0" anchor="ctr"/>
+          <a:bodyPr rtlCol="0" anchor="ctr" wrap="square" lIns="73152" rIns="73152"/>
           <a:lstStyle/>
           <a:p>
             <a:pPr algn="ctr">
@@ -7990,7 +8127,7 @@
           </a:fontRef>
         </p:style>
         <p:txBody>
-          <a:bodyPr wrap="square" lIns="73152" rIns="73152" rtlCol="0" anchor="ctr"/>
+          <a:bodyPr rtlCol="0" anchor="ctr" wrap="square" lIns="73152" rIns="73152"/>
           <a:lstStyle/>
           <a:p>
             <a:pPr algn="ctr">
@@ -8028,7 +8165,7 @@
 </file>
 
 <file path=ppt/slides/slide12.xml><?xml version="1.0" encoding="utf-8"?>
-<p:sld xmlns:a="http://schemas.openxmlformats.org/drawingml/2006/main" xmlns:r="http://schemas.openxmlformats.org/officeDocument/2006/relationships" xmlns:p="http://schemas.openxmlformats.org/presentationml/2006/main">
+<p:sld xmlns:a="http://schemas.openxmlformats.org/drawingml/2006/main" xmlns:p="http://schemas.openxmlformats.org/presentationml/2006/main" xmlns:r="http://schemas.openxmlformats.org/officeDocument/2006/relationships">
   <p:cSld>
     <p:spTree>
       <p:nvGrpSpPr>
@@ -8036,14 +8173,7 @@
         <p:cNvGrpSpPr/>
         <p:nvPr/>
       </p:nvGrpSpPr>
-      <p:grpSpPr>
-        <a:xfrm>
-          <a:off x="0" y="0"/>
-          <a:ext cx="0" cy="0"/>
-          <a:chOff x="0" y="0"/>
-          <a:chExt cx="0" cy="0"/>
-        </a:xfrm>
-      </p:grpSpPr>
+      <p:grpSpPr/>
       <p:sp>
         <p:nvSpPr>
           <p:cNvPr id="2" name="Title 1"/>
@@ -8131,7 +8261,6 @@
           <a:lstStyle/>
           <a:p>
             <a:pPr algn="ctr"/>
-            <a:endParaRPr/>
           </a:p>
         </p:txBody>
       </p:sp>
@@ -8270,7 +8399,7 @@
           </a:fontRef>
         </p:style>
         <p:txBody>
-          <a:bodyPr wrap="square" lIns="182880" rtlCol="0" anchor="ctr"/>
+          <a:bodyPr rtlCol="0" anchor="ctr" wrap="square" lIns="182880"/>
           <a:lstStyle/>
           <a:p>
             <a:pPr algn="l"/>
@@ -8703,7 +8832,7 @@
 </file>
 
 <file path=ppt/slides/slide13.xml><?xml version="1.0" encoding="utf-8"?>
-<p:sld xmlns:a="http://schemas.openxmlformats.org/drawingml/2006/main" xmlns:r="http://schemas.openxmlformats.org/officeDocument/2006/relationships" xmlns:p="http://schemas.openxmlformats.org/presentationml/2006/main">
+<p:sld xmlns:a="http://schemas.openxmlformats.org/drawingml/2006/main" xmlns:p="http://schemas.openxmlformats.org/presentationml/2006/main" xmlns:r="http://schemas.openxmlformats.org/officeDocument/2006/relationships">
   <p:cSld>
     <p:spTree>
       <p:nvGrpSpPr>
@@ -8711,14 +8840,7 @@
         <p:cNvGrpSpPr/>
         <p:nvPr/>
       </p:nvGrpSpPr>
-      <p:grpSpPr>
-        <a:xfrm>
-          <a:off x="0" y="0"/>
-          <a:ext cx="0" cy="0"/>
-          <a:chOff x="0" y="0"/>
-          <a:chExt cx="0" cy="0"/>
-        </a:xfrm>
-      </p:grpSpPr>
+      <p:grpSpPr/>
       <p:sp>
         <p:nvSpPr>
           <p:cNvPr id="2" name="Title 1"/>
@@ -8806,7 +8928,6 @@
           <a:lstStyle/>
           <a:p>
             <a:pPr algn="ctr"/>
-            <a:endParaRPr/>
           </a:p>
         </p:txBody>
       </p:sp>
@@ -9015,12 +9136,6 @@
                 <a:latin typeface="Calibri"/>
               </a:defRPr>
             </a:pPr>
-            <a:endParaRPr sz="2100" b="0">
-              <a:solidFill>
-                <a:srgbClr val="222222"/>
-              </a:solidFill>
-              <a:latin typeface="Calibri"/>
-            </a:endParaRPr>
           </a:p>
           <a:p>
             <a:pPr algn="l">
@@ -9212,12 +9327,6 @@
                 <a:latin typeface="Calibri"/>
               </a:defRPr>
             </a:pPr>
-            <a:endParaRPr sz="2100" b="0">
-              <a:solidFill>
-                <a:srgbClr val="222222"/>
-              </a:solidFill>
-              <a:latin typeface="Calibri"/>
-            </a:endParaRPr>
           </a:p>
           <a:p>
             <a:pPr algn="l">
@@ -9255,7 +9364,7 @@
 </file>
 
 <file path=ppt/slides/slide14.xml><?xml version="1.0" encoding="utf-8"?>
-<p:sld xmlns:a="http://schemas.openxmlformats.org/drawingml/2006/main" xmlns:r="http://schemas.openxmlformats.org/officeDocument/2006/relationships" xmlns:p="http://schemas.openxmlformats.org/presentationml/2006/main">
+<p:sld xmlns:a="http://schemas.openxmlformats.org/drawingml/2006/main" xmlns:p="http://schemas.openxmlformats.org/presentationml/2006/main" xmlns:r="http://schemas.openxmlformats.org/officeDocument/2006/relationships">
   <p:cSld>
     <p:spTree>
       <p:nvGrpSpPr>
@@ -9263,14 +9372,7 @@
         <p:cNvGrpSpPr/>
         <p:nvPr/>
       </p:nvGrpSpPr>
-      <p:grpSpPr>
-        <a:xfrm>
-          <a:off x="0" y="0"/>
-          <a:ext cx="0" cy="0"/>
-          <a:chOff x="0" y="0"/>
-          <a:chExt cx="0" cy="0"/>
-        </a:xfrm>
-      </p:grpSpPr>
+      <p:grpSpPr/>
       <p:sp>
         <p:nvSpPr>
           <p:cNvPr id="2" name="Title 1"/>
@@ -9358,7 +9460,6 @@
           <a:lstStyle/>
           <a:p>
             <a:pPr algn="ctr"/>
-            <a:endParaRPr/>
           </a:p>
         </p:txBody>
       </p:sp>
@@ -9592,12 +9693,6 @@
                 <a:latin typeface="Calibri"/>
               </a:defRPr>
             </a:pPr>
-            <a:endParaRPr sz="1800" b="0">
-              <a:solidFill>
-                <a:srgbClr val="222222"/>
-              </a:solidFill>
-              <a:latin typeface="Calibri"/>
-            </a:endParaRPr>
           </a:p>
           <a:p>
             <a:pPr algn="l">
@@ -9689,12 +9784,6 @@
                 <a:latin typeface="Calibri"/>
               </a:defRPr>
             </a:pPr>
-            <a:endParaRPr sz="1800" b="0">
-              <a:solidFill>
-                <a:srgbClr val="222222"/>
-              </a:solidFill>
-              <a:latin typeface="Calibri"/>
-            </a:endParaRPr>
           </a:p>
           <a:p>
             <a:pPr lvl="1" algn="l">
@@ -9736,12 +9825,6 @@
                 <a:latin typeface="Calibri"/>
               </a:defRPr>
             </a:pPr>
-            <a:endParaRPr sz="1800" b="0">
-              <a:solidFill>
-                <a:srgbClr val="222222"/>
-              </a:solidFill>
-              <a:latin typeface="Calibri"/>
-            </a:endParaRPr>
           </a:p>
           <a:p>
             <a:pPr algn="l">
@@ -9779,7 +9862,7 @@
 </file>
 
 <file path=ppt/slides/slide15.xml><?xml version="1.0" encoding="utf-8"?>
-<p:sld xmlns:a="http://schemas.openxmlformats.org/drawingml/2006/main" xmlns:r="http://schemas.openxmlformats.org/officeDocument/2006/relationships" xmlns:p="http://schemas.openxmlformats.org/presentationml/2006/main">
+<p:sld xmlns:a="http://schemas.openxmlformats.org/drawingml/2006/main" xmlns:p="http://schemas.openxmlformats.org/presentationml/2006/main" xmlns:r="http://schemas.openxmlformats.org/officeDocument/2006/relationships">
   <p:cSld>
     <p:spTree>
       <p:nvGrpSpPr>
@@ -9787,14 +9870,7 @@
         <p:cNvGrpSpPr/>
         <p:nvPr/>
       </p:nvGrpSpPr>
-      <p:grpSpPr>
-        <a:xfrm>
-          <a:off x="0" y="0"/>
-          <a:ext cx="0" cy="0"/>
-          <a:chOff x="0" y="0"/>
-          <a:chExt cx="0" cy="0"/>
-        </a:xfrm>
-      </p:grpSpPr>
+      <p:grpSpPr/>
       <p:sp>
         <p:nvSpPr>
           <p:cNvPr id="2" name="Title 1"/>
@@ -9882,7 +9958,6 @@
           <a:lstStyle/>
           <a:p>
             <a:pPr algn="ctr"/>
-            <a:endParaRPr/>
           </a:p>
         </p:txBody>
       </p:sp>
@@ -10071,7 +10146,7 @@
           </a:fontRef>
         </p:style>
         <p:txBody>
-          <a:bodyPr wrap="square" lIns="146304" tIns="91440" bIns="73152" rtlCol="0" anchor="t"/>
+          <a:bodyPr rtlCol="0" anchor="t" wrap="square" lIns="146304" tIns="91440" bIns="73152"/>
           <a:lstStyle/>
           <a:p>
             <a:pPr algn="l">
@@ -10427,7 +10502,7 @@
 </file>
 
 <file path=ppt/slides/slide16.xml><?xml version="1.0" encoding="utf-8"?>
-<p:sld xmlns:a="http://schemas.openxmlformats.org/drawingml/2006/main" xmlns:r="http://schemas.openxmlformats.org/officeDocument/2006/relationships" xmlns:p="http://schemas.openxmlformats.org/presentationml/2006/main">
+<p:sld xmlns:a="http://schemas.openxmlformats.org/drawingml/2006/main" xmlns:p="http://schemas.openxmlformats.org/presentationml/2006/main" xmlns:r="http://schemas.openxmlformats.org/officeDocument/2006/relationships">
   <p:cSld>
     <p:spTree>
       <p:nvGrpSpPr>
@@ -10435,14 +10510,7 @@
         <p:cNvGrpSpPr/>
         <p:nvPr/>
       </p:nvGrpSpPr>
-      <p:grpSpPr>
-        <a:xfrm>
-          <a:off x="0" y="0"/>
-          <a:ext cx="0" cy="0"/>
-          <a:chOff x="0" y="0"/>
-          <a:chExt cx="0" cy="0"/>
-        </a:xfrm>
-      </p:grpSpPr>
+      <p:grpSpPr/>
       <p:sp>
         <p:nvSpPr>
           <p:cNvPr id="2" name="TextBox 1"/>
@@ -10580,7 +10648,6 @@
           <a:lstStyle/>
           <a:p>
             <a:pPr algn="ctr"/>
-            <a:endParaRPr/>
           </a:p>
         </p:txBody>
       </p:sp>
@@ -10721,7 +10788,7 @@
           </a:fontRef>
         </p:style>
         <p:txBody>
-          <a:bodyPr wrap="square" lIns="73152" rIns="73152" rtlCol="0" anchor="ctr"/>
+          <a:bodyPr rtlCol="0" anchor="ctr" wrap="square" lIns="73152" rIns="73152"/>
           <a:lstStyle/>
           <a:p>
             <a:pPr algn="ctr">
@@ -10839,7 +10906,7 @@
           </a:fontRef>
         </p:style>
         <p:txBody>
-          <a:bodyPr wrap="square" lIns="73152" rIns="73152" rtlCol="0" anchor="ctr"/>
+          <a:bodyPr rtlCol="0" anchor="ctr" wrap="square" lIns="73152" rIns="73152"/>
           <a:lstStyle/>
           <a:p>
             <a:pPr algn="ctr">
@@ -10957,7 +11024,7 @@
           </a:fontRef>
         </p:style>
         <p:txBody>
-          <a:bodyPr wrap="square" lIns="73152" rIns="73152" rtlCol="0" anchor="ctr"/>
+          <a:bodyPr rtlCol="0" anchor="ctr" wrap="square" lIns="73152" rIns="73152"/>
           <a:lstStyle/>
           <a:p>
             <a:pPr algn="ctr">
@@ -11075,7 +11142,7 @@
           </a:fontRef>
         </p:style>
         <p:txBody>
-          <a:bodyPr wrap="square" lIns="73152" rIns="73152" rtlCol="0" anchor="ctr"/>
+          <a:bodyPr rtlCol="0" anchor="ctr" wrap="square" lIns="73152" rIns="73152"/>
           <a:lstStyle/>
           <a:p>
             <a:pPr algn="ctr">
@@ -11193,7 +11260,7 @@
           </a:fontRef>
         </p:style>
         <p:txBody>
-          <a:bodyPr wrap="square" lIns="73152" rIns="73152" rtlCol="0" anchor="ctr"/>
+          <a:bodyPr rtlCol="0" anchor="ctr" wrap="square" lIns="73152" rIns="73152"/>
           <a:lstStyle/>
           <a:p>
             <a:pPr algn="ctr">
@@ -11231,7 +11298,7 @@
 </file>
 
 <file path=ppt/slides/slide17.xml><?xml version="1.0" encoding="utf-8"?>
-<p:sld xmlns:a="http://schemas.openxmlformats.org/drawingml/2006/main" xmlns:r="http://schemas.openxmlformats.org/officeDocument/2006/relationships" xmlns:p="http://schemas.openxmlformats.org/presentationml/2006/main">
+<p:sld xmlns:a="http://schemas.openxmlformats.org/drawingml/2006/main" xmlns:p="http://schemas.openxmlformats.org/presentationml/2006/main" xmlns:r="http://schemas.openxmlformats.org/officeDocument/2006/relationships">
   <p:cSld>
     <p:spTree>
       <p:nvGrpSpPr>
@@ -11239,14 +11306,7 @@
         <p:cNvGrpSpPr/>
         <p:nvPr/>
       </p:nvGrpSpPr>
-      <p:grpSpPr>
-        <a:xfrm>
-          <a:off x="0" y="0"/>
-          <a:ext cx="0" cy="0"/>
-          <a:chOff x="0" y="0"/>
-          <a:chExt cx="0" cy="0"/>
-        </a:xfrm>
-      </p:grpSpPr>
+      <p:grpSpPr/>
       <p:sp>
         <p:nvSpPr>
           <p:cNvPr id="2" name="Title 1"/>
@@ -11334,7 +11394,6 @@
           <a:lstStyle/>
           <a:p>
             <a:pPr algn="ctr"/>
-            <a:endParaRPr/>
           </a:p>
         </p:txBody>
       </p:sp>
@@ -11473,7 +11532,7 @@
           </a:fontRef>
         </p:style>
         <p:txBody>
-          <a:bodyPr wrap="square" lIns="182880" rtlCol="0" anchor="ctr"/>
+          <a:bodyPr rtlCol="0" anchor="ctr" wrap="square" lIns="182880"/>
           <a:lstStyle/>
           <a:p>
             <a:pPr algn="l"/>
@@ -11544,7 +11603,7 @@
               </a:defRPr>
             </a:pPr>
             <a:r>
-              <a:rPr sz="1800" b="0" dirty="0">
+              <a:rPr sz="1800" b="0">
                 <a:solidFill>
                   <a:srgbClr val="222222"/>
                 </a:solidFill>
@@ -11569,7 +11628,7 @@
               </a:defRPr>
             </a:pPr>
             <a:r>
-              <a:rPr sz="1800" b="0" dirty="0">
+              <a:rPr sz="1800" b="0">
                 <a:solidFill>
                   <a:srgbClr val="222222"/>
                 </a:solidFill>
@@ -11594,7 +11653,7 @@
               </a:defRPr>
             </a:pPr>
             <a:r>
-              <a:rPr sz="1800" b="0" dirty="0">
+              <a:rPr sz="1800" b="0">
                 <a:solidFill>
                   <a:srgbClr val="222222"/>
                 </a:solidFill>
@@ -11619,7 +11678,7 @@
               </a:defRPr>
             </a:pPr>
             <a:r>
-              <a:rPr sz="1800" b="0" dirty="0">
+              <a:rPr sz="1800" b="0">
                 <a:solidFill>
                   <a:srgbClr val="222222"/>
                 </a:solidFill>
@@ -11644,31 +11703,13 @@
               </a:defRPr>
             </a:pPr>
             <a:r>
-              <a:rPr sz="1800" b="0" dirty="0">
-                <a:solidFill>
-                  <a:srgbClr val="222222"/>
-                </a:solidFill>
-                <a:latin typeface="Calibri"/>
-              </a:rPr>
-              <a:t>5.  Make the turn signals BLINK rather than stay on. Use </a:t>
-            </a:r>
-            <a:r>
-              <a:rPr sz="1800" b="0" dirty="0" err="1">
-                <a:solidFill>
-                  <a:srgbClr val="222222"/>
-                </a:solidFill>
-                <a:latin typeface="Calibri"/>
-              </a:rPr>
-              <a:t>millis</a:t>
-            </a:r>
-            <a:r>
-              <a:rPr sz="1800" b="0" dirty="0">
-                <a:solidFill>
-                  <a:srgbClr val="222222"/>
-                </a:solidFill>
-                <a:latin typeface="Calibri"/>
-              </a:rPr>
-              <a:t>(), not delay(), or the vehicle will stutter.</a:t>
+              <a:rPr sz="1800" b="0">
+                <a:solidFill>
+                  <a:srgbClr val="222222"/>
+                </a:solidFill>
+                <a:latin typeface="Calibri"/>
+              </a:rPr>
+              <a:t>5.  Make the turn signals BLINK rather than stay on. Use millis(), not delay(), or the vehicle will stutter.</a:t>
             </a:r>
           </a:p>
         </p:txBody>
@@ -11931,7 +11972,7 @@
           </a:fontRef>
         </p:style>
         <p:txBody>
-          <a:bodyPr wrap="square" lIns="164592" tIns="73152" rIns="164592" bIns="73152" rtlCol="0" anchor="ctr"/>
+          <a:bodyPr rtlCol="0" anchor="ctr" wrap="square" lIns="164592" rIns="164592" tIns="73152" bIns="73152"/>
           <a:lstStyle/>
           <a:p>
             <a:pPr algn="l"/>
@@ -11965,7 +12006,7 @@
 </file>
 
 <file path=ppt/slides/slide18.xml><?xml version="1.0" encoding="utf-8"?>
-<p:sld xmlns:a="http://schemas.openxmlformats.org/drawingml/2006/main" xmlns:r="http://schemas.openxmlformats.org/officeDocument/2006/relationships" xmlns:p="http://schemas.openxmlformats.org/presentationml/2006/main">
+<p:sld xmlns:a="http://schemas.openxmlformats.org/drawingml/2006/main" xmlns:p="http://schemas.openxmlformats.org/presentationml/2006/main" xmlns:r="http://schemas.openxmlformats.org/officeDocument/2006/relationships">
   <p:cSld>
     <p:spTree>
       <p:nvGrpSpPr>
@@ -11973,14 +12014,7 @@
         <p:cNvGrpSpPr/>
         <p:nvPr/>
       </p:nvGrpSpPr>
-      <p:grpSpPr>
-        <a:xfrm>
-          <a:off x="0" y="0"/>
-          <a:ext cx="0" cy="0"/>
-          <a:chOff x="0" y="0"/>
-          <a:chExt cx="0" cy="0"/>
-        </a:xfrm>
-      </p:grpSpPr>
+      <p:grpSpPr/>
       <p:sp>
         <p:nvSpPr>
           <p:cNvPr id="2" name="TextBox 1"/>
@@ -12118,7 +12152,6 @@
           <a:lstStyle/>
           <a:p>
             <a:pPr algn="ctr"/>
-            <a:endParaRPr/>
           </a:p>
         </p:txBody>
       </p:sp>
@@ -12259,7 +12292,7 @@
           </a:fontRef>
         </p:style>
         <p:txBody>
-          <a:bodyPr wrap="square" lIns="73152" rIns="73152" rtlCol="0" anchor="ctr"/>
+          <a:bodyPr rtlCol="0" anchor="ctr" wrap="square" lIns="73152" rIns="73152"/>
           <a:lstStyle/>
           <a:p>
             <a:pPr algn="ctr">
@@ -12377,7 +12410,7 @@
           </a:fontRef>
         </p:style>
         <p:txBody>
-          <a:bodyPr wrap="square" lIns="73152" rIns="73152" rtlCol="0" anchor="ctr"/>
+          <a:bodyPr rtlCol="0" anchor="ctr" wrap="square" lIns="73152" rIns="73152"/>
           <a:lstStyle/>
           <a:p>
             <a:pPr algn="ctr">
@@ -12495,7 +12528,7 @@
           </a:fontRef>
         </p:style>
         <p:txBody>
-          <a:bodyPr wrap="square" lIns="73152" rIns="73152" rtlCol="0" anchor="ctr"/>
+          <a:bodyPr rtlCol="0" anchor="ctr" wrap="square" lIns="73152" rIns="73152"/>
           <a:lstStyle/>
           <a:p>
             <a:pPr algn="ctr">
@@ -12613,7 +12646,7 @@
           </a:fontRef>
         </p:style>
         <p:txBody>
-          <a:bodyPr wrap="square" lIns="73152" rIns="73152" rtlCol="0" anchor="ctr"/>
+          <a:bodyPr rtlCol="0" anchor="ctr" wrap="square" lIns="73152" rIns="73152"/>
           <a:lstStyle/>
           <a:p>
             <a:pPr algn="ctr">
@@ -12731,7 +12764,7 @@
           </a:fontRef>
         </p:style>
         <p:txBody>
-          <a:bodyPr wrap="square" lIns="73152" rIns="73152" rtlCol="0" anchor="ctr"/>
+          <a:bodyPr rtlCol="0" anchor="ctr" wrap="square" lIns="73152" rIns="73152"/>
           <a:lstStyle/>
           <a:p>
             <a:pPr algn="ctr">
@@ -12817,7 +12850,7 @@
 </file>
 
 <file path=ppt/slides/slide19.xml><?xml version="1.0" encoding="utf-8"?>
-<p:sld xmlns:a="http://schemas.openxmlformats.org/drawingml/2006/main" xmlns:r="http://schemas.openxmlformats.org/officeDocument/2006/relationships" xmlns:p="http://schemas.openxmlformats.org/presentationml/2006/main">
+<p:sld xmlns:a="http://schemas.openxmlformats.org/drawingml/2006/main" xmlns:p="http://schemas.openxmlformats.org/presentationml/2006/main" xmlns:r="http://schemas.openxmlformats.org/officeDocument/2006/relationships">
   <p:cSld>
     <p:spTree>
       <p:nvGrpSpPr>
@@ -12825,14 +12858,7 @@
         <p:cNvGrpSpPr/>
         <p:nvPr/>
       </p:nvGrpSpPr>
-      <p:grpSpPr>
-        <a:xfrm>
-          <a:off x="0" y="0"/>
-          <a:ext cx="0" cy="0"/>
-          <a:chOff x="0" y="0"/>
-          <a:chExt cx="0" cy="0"/>
-        </a:xfrm>
-      </p:grpSpPr>
+      <p:grpSpPr/>
       <p:sp>
         <p:nvSpPr>
           <p:cNvPr id="2" name="Title 1"/>
@@ -12920,7 +12946,6 @@
           <a:lstStyle/>
           <a:p>
             <a:pPr algn="ctr"/>
-            <a:endParaRPr/>
           </a:p>
         </p:txBody>
       </p:sp>
@@ -13087,20 +13112,8 @@
                 <a:tableStyleId>{5C22544A-7EE6-4342-B048-85BDC9FD1C3A}</a:tableStyleId>
               </a:tblPr>
               <a:tblGrid>
-                <a:gridCol w="5592927">
-                  <a:extLst>
-                    <a:ext uri="{9D8B030D-6E8A-4147-A177-3AD203B41FA5}">
-                      <a16:colId xmlns:a16="http://schemas.microsoft.com/office/drawing/2014/main" val="20000"/>
-                    </a:ext>
-                  </a:extLst>
-                </a:gridCol>
-                <a:gridCol w="5592927">
-                  <a:extLst>
-                    <a:ext uri="{9D8B030D-6E8A-4147-A177-3AD203B41FA5}">
-                      <a16:colId xmlns:a16="http://schemas.microsoft.com/office/drawing/2014/main" val="20001"/>
-                    </a:ext>
-                  </a:extLst>
-                </a:gridCol>
+                <a:gridCol w="5592927"/>
+                <a:gridCol w="5592927"/>
               </a:tblGrid>
               <a:tr h="401637">
                 <a:tc>
@@ -13147,11 +13160,6 @@
                     </a:solidFill>
                   </a:tcPr>
                 </a:tc>
-                <a:extLst>
-                  <a:ext uri="{0D108BD9-81ED-4DB2-BD59-A6C34878D82A}">
-                    <a16:rowId xmlns:a16="http://schemas.microsoft.com/office/drawing/2014/main" val="10000"/>
-                  </a:ext>
-                </a:extLst>
               </a:tr>
               <a:tr h="401637">
                 <a:tc>
@@ -13198,11 +13206,6 @@
                     </a:solidFill>
                   </a:tcPr>
                 </a:tc>
-                <a:extLst>
-                  <a:ext uri="{0D108BD9-81ED-4DB2-BD59-A6C34878D82A}">
-                    <a16:rowId xmlns:a16="http://schemas.microsoft.com/office/drawing/2014/main" val="10001"/>
-                  </a:ext>
-                </a:extLst>
               </a:tr>
               <a:tr h="401637">
                 <a:tc>
@@ -13249,11 +13252,6 @@
                     </a:solidFill>
                   </a:tcPr>
                 </a:tc>
-                <a:extLst>
-                  <a:ext uri="{0D108BD9-81ED-4DB2-BD59-A6C34878D82A}">
-                    <a16:rowId xmlns:a16="http://schemas.microsoft.com/office/drawing/2014/main" val="10002"/>
-                  </a:ext>
-                </a:extLst>
               </a:tr>
               <a:tr h="401637">
                 <a:tc>
@@ -13300,11 +13298,6 @@
                     </a:solidFill>
                   </a:tcPr>
                 </a:tc>
-                <a:extLst>
-                  <a:ext uri="{0D108BD9-81ED-4DB2-BD59-A6C34878D82A}">
-                    <a16:rowId xmlns:a16="http://schemas.microsoft.com/office/drawing/2014/main" val="10003"/>
-                  </a:ext>
-                </a:extLst>
               </a:tr>
               <a:tr h="401637">
                 <a:tc>
@@ -13351,11 +13344,6 @@
                     </a:solidFill>
                   </a:tcPr>
                 </a:tc>
-                <a:extLst>
-                  <a:ext uri="{0D108BD9-81ED-4DB2-BD59-A6C34878D82A}">
-                    <a16:rowId xmlns:a16="http://schemas.microsoft.com/office/drawing/2014/main" val="10004"/>
-                  </a:ext>
-                </a:extLst>
               </a:tr>
               <a:tr h="401637">
                 <a:tc>
@@ -13402,11 +13390,6 @@
                     </a:solidFill>
                   </a:tcPr>
                 </a:tc>
-                <a:extLst>
-                  <a:ext uri="{0D108BD9-81ED-4DB2-BD59-A6C34878D82A}">
-                    <a16:rowId xmlns:a16="http://schemas.microsoft.com/office/drawing/2014/main" val="10005"/>
-                  </a:ext>
-                </a:extLst>
               </a:tr>
               <a:tr h="401637">
                 <a:tc>
@@ -13453,11 +13436,6 @@
                     </a:solidFill>
                   </a:tcPr>
                 </a:tc>
-                <a:extLst>
-                  <a:ext uri="{0D108BD9-81ED-4DB2-BD59-A6C34878D82A}">
-                    <a16:rowId xmlns:a16="http://schemas.microsoft.com/office/drawing/2014/main" val="10006"/>
-                  </a:ext>
-                </a:extLst>
               </a:tr>
               <a:tr h="401637">
                 <a:tc>
@@ -13504,11 +13482,6 @@
                     </a:solidFill>
                   </a:tcPr>
                 </a:tc>
-                <a:extLst>
-                  <a:ext uri="{0D108BD9-81ED-4DB2-BD59-A6C34878D82A}">
-                    <a16:rowId xmlns:a16="http://schemas.microsoft.com/office/drawing/2014/main" val="10007"/>
-                  </a:ext>
-                </a:extLst>
               </a:tr>
               <a:tr h="401637">
                 <a:tc>
@@ -13555,11 +13528,6 @@
                     </a:solidFill>
                   </a:tcPr>
                 </a:tc>
-                <a:extLst>
-                  <a:ext uri="{0D108BD9-81ED-4DB2-BD59-A6C34878D82A}">
-                    <a16:rowId xmlns:a16="http://schemas.microsoft.com/office/drawing/2014/main" val="10008"/>
-                  </a:ext>
-                </a:extLst>
               </a:tr>
               <a:tr h="401637">
                 <a:tc>
@@ -13606,11 +13574,6 @@
                     </a:solidFill>
                   </a:tcPr>
                 </a:tc>
-                <a:extLst>
-                  <a:ext uri="{0D108BD9-81ED-4DB2-BD59-A6C34878D82A}">
-                    <a16:rowId xmlns:a16="http://schemas.microsoft.com/office/drawing/2014/main" val="10009"/>
-                  </a:ext>
-                </a:extLst>
               </a:tr>
               <a:tr h="401642">
                 <a:tc>
@@ -13657,11 +13620,6 @@
                     </a:solidFill>
                   </a:tcPr>
                 </a:tc>
-                <a:extLst>
-                  <a:ext uri="{0D108BD9-81ED-4DB2-BD59-A6C34878D82A}">
-                    <a16:rowId xmlns:a16="http://schemas.microsoft.com/office/drawing/2014/main" val="10010"/>
-                  </a:ext>
-                </a:extLst>
               </a:tr>
             </a:tbl>
           </a:graphicData>
@@ -13676,7 +13634,7 @@
 </file>
 
 <file path=ppt/slides/slide2.xml><?xml version="1.0" encoding="utf-8"?>
-<p:sld xmlns:a="http://schemas.openxmlformats.org/drawingml/2006/main" xmlns:r="http://schemas.openxmlformats.org/officeDocument/2006/relationships" xmlns:p="http://schemas.openxmlformats.org/presentationml/2006/main">
+<p:sld xmlns:a="http://schemas.openxmlformats.org/drawingml/2006/main" xmlns:p="http://schemas.openxmlformats.org/presentationml/2006/main" xmlns:r="http://schemas.openxmlformats.org/officeDocument/2006/relationships">
   <p:cSld>
     <p:spTree>
       <p:nvGrpSpPr>
@@ -13684,14 +13642,7 @@
         <p:cNvGrpSpPr/>
         <p:nvPr/>
       </p:nvGrpSpPr>
-      <p:grpSpPr>
-        <a:xfrm>
-          <a:off x="0" y="0"/>
-          <a:ext cx="0" cy="0"/>
-          <a:chOff x="0" y="0"/>
-          <a:chExt cx="0" cy="0"/>
-        </a:xfrm>
-      </p:grpSpPr>
+      <p:grpSpPr/>
       <p:sp>
         <p:nvSpPr>
           <p:cNvPr id="2" name="Title 1"/>
@@ -13779,7 +13730,6 @@
           <a:lstStyle/>
           <a:p>
             <a:pPr algn="ctr"/>
-            <a:endParaRPr/>
           </a:p>
         </p:txBody>
       </p:sp>
@@ -14109,7 +14059,7 @@
 </file>
 
 <file path=ppt/slides/slide20.xml><?xml version="1.0" encoding="utf-8"?>
-<p:sld xmlns:a="http://schemas.openxmlformats.org/drawingml/2006/main" xmlns:r="http://schemas.openxmlformats.org/officeDocument/2006/relationships" xmlns:p="http://schemas.openxmlformats.org/presentationml/2006/main">
+<p:sld xmlns:a="http://schemas.openxmlformats.org/drawingml/2006/main" xmlns:p="http://schemas.openxmlformats.org/presentationml/2006/main" xmlns:r="http://schemas.openxmlformats.org/officeDocument/2006/relationships">
   <p:cSld>
     <p:spTree>
       <p:nvGrpSpPr>
@@ -14117,14 +14067,7 @@
         <p:cNvGrpSpPr/>
         <p:nvPr/>
       </p:nvGrpSpPr>
-      <p:grpSpPr>
-        <a:xfrm>
-          <a:off x="0" y="0"/>
-          <a:ext cx="0" cy="0"/>
-          <a:chOff x="0" y="0"/>
-          <a:chExt cx="0" cy="0"/>
-        </a:xfrm>
-      </p:grpSpPr>
+      <p:grpSpPr/>
       <p:sp>
         <p:nvSpPr>
           <p:cNvPr id="2" name="Title 1"/>
@@ -14212,7 +14155,6 @@
           <a:lstStyle/>
           <a:p>
             <a:pPr algn="ctr"/>
-            <a:endParaRPr/>
           </a:p>
         </p:txBody>
       </p:sp>
@@ -15107,7 +15049,7 @@
           </a:fontRef>
         </p:style>
         <p:txBody>
-          <a:bodyPr wrap="square" lIns="45720" tIns="18288" rIns="45720" bIns="18288" rtlCol="0" anchor="ctr"/>
+          <a:bodyPr rtlCol="0" anchor="ctr" wrap="square" lIns="45720" rIns="45720" tIns="18288" bIns="18288"/>
           <a:lstStyle/>
           <a:p>
             <a:pPr algn="l">
@@ -15170,7 +15112,7 @@
 </file>
 
 <file path=ppt/slides/slide21.xml><?xml version="1.0" encoding="utf-8"?>
-<p:sld xmlns:a="http://schemas.openxmlformats.org/drawingml/2006/main" xmlns:r="http://schemas.openxmlformats.org/officeDocument/2006/relationships" xmlns:p="http://schemas.openxmlformats.org/presentationml/2006/main">
+<p:sld xmlns:a="http://schemas.openxmlformats.org/drawingml/2006/main" xmlns:p="http://schemas.openxmlformats.org/presentationml/2006/main" xmlns:r="http://schemas.openxmlformats.org/officeDocument/2006/relationships">
   <p:cSld>
     <p:spTree>
       <p:nvGrpSpPr>
@@ -15178,14 +15120,7 @@
         <p:cNvGrpSpPr/>
         <p:nvPr/>
       </p:nvGrpSpPr>
-      <p:grpSpPr>
-        <a:xfrm>
-          <a:off x="0" y="0"/>
-          <a:ext cx="0" cy="0"/>
-          <a:chOff x="0" y="0"/>
-          <a:chExt cx="0" cy="0"/>
-        </a:xfrm>
-      </p:grpSpPr>
+      <p:grpSpPr/>
       <p:sp>
         <p:nvSpPr>
           <p:cNvPr id="2" name="Title 1"/>
@@ -15273,7 +15208,6 @@
           <a:lstStyle/>
           <a:p>
             <a:pPr algn="ctr"/>
-            <a:endParaRPr/>
           </a:p>
         </p:txBody>
       </p:sp>
@@ -15285,7 +15219,7 @@
         </p:nvSpPr>
         <p:spPr>
           <a:xfrm>
-            <a:off x="502920" y="6393801"/>
+            <a:off x="502920" y="6382512"/>
             <a:ext cx="10545775" cy="274320"/>
           </a:xfrm>
           <a:prstGeom prst="rect">
@@ -15400,23 +15334,23 @@
                 <a:spcPct val="100000"/>
               </a:lnSpc>
               <a:spcAft>
-                <a:spcPts val="600"/>
-              </a:spcAft>
-              <a:defRPr sz="1900" b="0">
-                <a:solidFill>
-                  <a:srgbClr val="222222"/>
-                </a:solidFill>
-                <a:latin typeface="Calibri"/>
-              </a:defRPr>
-            </a:pPr>
-            <a:r>
-              <a:rPr sz="1900" b="0" dirty="0">
-                <a:solidFill>
-                  <a:srgbClr val="222222"/>
-                </a:solidFill>
-                <a:latin typeface="Calibri"/>
-              </a:rPr>
-              <a:t>There are four servo headers on the top plate, and the full program drives them from the RIGHT stick.</a:t>
+                <a:spcPts val="500"/>
+              </a:spcAft>
+              <a:defRPr sz="1800" b="0">
+                <a:solidFill>
+                  <a:srgbClr val="222222"/>
+                </a:solidFill>
+                <a:latin typeface="Calibri"/>
+              </a:defRPr>
+            </a:pPr>
+            <a:r>
+              <a:rPr sz="1800" b="0">
+                <a:solidFill>
+                  <a:srgbClr val="222222"/>
+                </a:solidFill>
+                <a:latin typeface="Calibri"/>
+              </a:rPr>
+              <a:t>There are four servo headers on the MAIN CONTROL BOARD, under the top plate, and the full program drives them from the RIGHT stick. What you bolt on goes on the top plate; its leads come down to the board through the cutout.</a:t>
             </a:r>
           </a:p>
           <a:p>
@@ -15425,21 +15359,15 @@
                 <a:spcPct val="100000"/>
               </a:lnSpc>
               <a:spcAft>
-                <a:spcPts val="600"/>
-              </a:spcAft>
-              <a:defRPr sz="950" b="0">
-                <a:solidFill>
-                  <a:srgbClr val="222222"/>
-                </a:solidFill>
-                <a:latin typeface="Calibri"/>
-              </a:defRPr>
-            </a:pPr>
-            <a:endParaRPr sz="1900" b="0" dirty="0">
-              <a:solidFill>
-                <a:srgbClr val="222222"/>
-              </a:solidFill>
-              <a:latin typeface="Calibri"/>
-            </a:endParaRPr>
+                <a:spcPts val="500"/>
+              </a:spcAft>
+              <a:defRPr sz="900" b="0">
+                <a:solidFill>
+                  <a:srgbClr val="222222"/>
+                </a:solidFill>
+                <a:latin typeface="Calibri"/>
+              </a:defRPr>
+            </a:pPr>
           </a:p>
           <a:p>
             <a:pPr algn="l">
@@ -15447,17 +15375,17 @@
                 <a:spcPct val="100000"/>
               </a:lnSpc>
               <a:spcAft>
-                <a:spcPts val="600"/>
-              </a:spcAft>
-              <a:defRPr sz="1900" b="0">
-                <a:solidFill>
-                  <a:srgbClr val="222222"/>
-                </a:solidFill>
-                <a:latin typeface="Calibri"/>
-              </a:defRPr>
-            </a:pPr>
-            <a:r>
-              <a:rPr sz="1900" b="0" dirty="0">
+                <a:spcPts val="500"/>
+              </a:spcAft>
+              <a:defRPr sz="1800" b="0">
+                <a:solidFill>
+                  <a:srgbClr val="222222"/>
+                </a:solidFill>
+                <a:latin typeface="Calibri"/>
+              </a:defRPr>
+            </a:pPr>
+            <a:r>
+              <a:rPr sz="1800" b="0">
                 <a:solidFill>
                   <a:srgbClr val="222222"/>
                 </a:solidFill>
@@ -15472,21 +15400,15 @@
                 <a:spcPct val="100000"/>
               </a:lnSpc>
               <a:spcAft>
-                <a:spcPts val="600"/>
-              </a:spcAft>
-              <a:defRPr sz="950" b="0">
-                <a:solidFill>
-                  <a:srgbClr val="222222"/>
-                </a:solidFill>
-                <a:latin typeface="Calibri"/>
-              </a:defRPr>
-            </a:pPr>
-            <a:endParaRPr sz="1900" b="0" dirty="0">
-              <a:solidFill>
-                <a:srgbClr val="222222"/>
-              </a:solidFill>
-              <a:latin typeface="Calibri"/>
-            </a:endParaRPr>
+                <a:spcPts val="500"/>
+              </a:spcAft>
+              <a:defRPr sz="900" b="0">
+                <a:solidFill>
+                  <a:srgbClr val="222222"/>
+                </a:solidFill>
+                <a:latin typeface="Calibri"/>
+              </a:defRPr>
+            </a:pPr>
           </a:p>
           <a:p>
             <a:pPr algn="l">
@@ -15494,17 +15416,17 @@
                 <a:spcPct val="100000"/>
               </a:lnSpc>
               <a:spcAft>
-                <a:spcPts val="600"/>
-              </a:spcAft>
-              <a:defRPr sz="1900" b="0">
-                <a:solidFill>
-                  <a:srgbClr val="222222"/>
-                </a:solidFill>
-                <a:latin typeface="Calibri"/>
-              </a:defRPr>
-            </a:pPr>
-            <a:r>
-              <a:rPr sz="1900" b="0" dirty="0">
+                <a:spcPts val="500"/>
+              </a:spcAft>
+              <a:defRPr sz="1800" b="0">
+                <a:solidFill>
+                  <a:srgbClr val="222222"/>
+                </a:solidFill>
+                <a:latin typeface="Calibri"/>
+              </a:defRPr>
+            </a:pPr>
+            <a:r>
+              <a:rPr sz="1800" b="0">
                 <a:solidFill>
                   <a:srgbClr val="222222"/>
                 </a:solidFill>
@@ -15519,21 +15441,15 @@
                 <a:spcPct val="100000"/>
               </a:lnSpc>
               <a:spcAft>
-                <a:spcPts val="600"/>
-              </a:spcAft>
-              <a:defRPr sz="950" b="0">
-                <a:solidFill>
-                  <a:srgbClr val="222222"/>
-                </a:solidFill>
-                <a:latin typeface="Calibri"/>
-              </a:defRPr>
-            </a:pPr>
-            <a:endParaRPr sz="1900" b="0" dirty="0">
-              <a:solidFill>
-                <a:srgbClr val="222222"/>
-              </a:solidFill>
-              <a:latin typeface="Calibri"/>
-            </a:endParaRPr>
+                <a:spcPts val="500"/>
+              </a:spcAft>
+              <a:defRPr sz="900" b="0">
+                <a:solidFill>
+                  <a:srgbClr val="222222"/>
+                </a:solidFill>
+                <a:latin typeface="Calibri"/>
+              </a:defRPr>
+            </a:pPr>
           </a:p>
           <a:p>
             <a:pPr algn="l">
@@ -15541,17 +15457,17 @@
                 <a:spcPct val="100000"/>
               </a:lnSpc>
               <a:spcAft>
-                <a:spcPts val="600"/>
-              </a:spcAft>
-              <a:defRPr sz="1900" b="0">
-                <a:solidFill>
-                  <a:srgbClr val="222222"/>
-                </a:solidFill>
-                <a:latin typeface="Calibri"/>
-              </a:defRPr>
-            </a:pPr>
-            <a:r>
-              <a:rPr sz="1900" b="0" dirty="0">
+                <a:spcPts val="500"/>
+              </a:spcAft>
+              <a:defRPr sz="1800" b="0">
+                <a:solidFill>
+                  <a:srgbClr val="222222"/>
+                </a:solidFill>
+                <a:latin typeface="Calibri"/>
+              </a:defRPr>
+            </a:pPr>
+            <a:r>
+              <a:rPr sz="1800" b="0">
                 <a:solidFill>
                   <a:srgbClr val="222222"/>
                 </a:solidFill>
@@ -15571,7 +15487,7 @@
           <p:nvPr/>
         </p:nvPicPr>
         <p:blipFill>
-          <a:blip r:embed="rId3"/>
+          <a:blip r:embed="rId2"/>
           <a:stretch>
             <a:fillRect/>
           </a:stretch>
@@ -15643,7 +15559,7 @@
 </file>
 
 <file path=ppt/slides/slide22.xml><?xml version="1.0" encoding="utf-8"?>
-<p:sld xmlns:a="http://schemas.openxmlformats.org/drawingml/2006/main" xmlns:r="http://schemas.openxmlformats.org/officeDocument/2006/relationships" xmlns:p="http://schemas.openxmlformats.org/presentationml/2006/main">
+<p:sld xmlns:a="http://schemas.openxmlformats.org/drawingml/2006/main" xmlns:p="http://schemas.openxmlformats.org/presentationml/2006/main" xmlns:r="http://schemas.openxmlformats.org/officeDocument/2006/relationships">
   <p:cSld>
     <p:spTree>
       <p:nvGrpSpPr>
@@ -15651,14 +15567,7 @@
         <p:cNvGrpSpPr/>
         <p:nvPr/>
       </p:nvGrpSpPr>
-      <p:grpSpPr>
-        <a:xfrm>
-          <a:off x="0" y="0"/>
-          <a:ext cx="0" cy="0"/>
-          <a:chOff x="0" y="0"/>
-          <a:chExt cx="0" cy="0"/>
-        </a:xfrm>
-      </p:grpSpPr>
+      <p:grpSpPr/>
       <p:sp>
         <p:nvSpPr>
           <p:cNvPr id="2" name="Title 1"/>
@@ -15700,7 +15609,7 @@
                 </a:solidFill>
                 <a:latin typeface="Calibri"/>
               </a:rPr>
-              <a:t>The last two additions</a:t>
+              <a:t>The last three additions</a:t>
             </a:r>
           </a:p>
         </p:txBody>
@@ -15746,7 +15655,6 @@
           <a:lstStyle/>
           <a:p>
             <a:pPr algn="ctr"/>
-            <a:endParaRPr/>
           </a:p>
         </p:txBody>
       </p:sp>
@@ -15883,7 +15791,7 @@
               </a:defRPr>
             </a:pPr>
             <a:r>
-              <a:rPr sz="1800" b="0" dirty="0">
+              <a:rPr sz="1800" b="0">
                 <a:solidFill>
                   <a:srgbClr val="222222"/>
                 </a:solidFill>
@@ -15908,49 +15816,13 @@
               </a:defRPr>
             </a:pPr>
             <a:r>
-              <a:rPr sz="1800" b="0" dirty="0">
-                <a:solidFill>
-                  <a:srgbClr val="222222"/>
-                </a:solidFill>
-                <a:latin typeface="Calibri"/>
-              </a:rPr>
-              <a:t>Lesson 4 used delay(), so the vehicle froze while it swept. The full program moves the dot every 40 </a:t>
-            </a:r>
-            <a:r>
-              <a:rPr sz="1800" b="0" dirty="0" err="1">
-                <a:solidFill>
-                  <a:srgbClr val="222222"/>
-                </a:solidFill>
-                <a:latin typeface="Calibri"/>
-              </a:rPr>
-              <a:t>ms</a:t>
-            </a:r>
-            <a:r>
-              <a:rPr sz="1800" b="0" dirty="0">
-                <a:solidFill>
-                  <a:srgbClr val="222222"/>
-                </a:solidFill>
-                <a:latin typeface="Calibri"/>
-              </a:rPr>
-              <a:t> off </a:t>
-            </a:r>
-            <a:r>
-              <a:rPr sz="1800" b="0" dirty="0" err="1">
-                <a:solidFill>
-                  <a:srgbClr val="222222"/>
-                </a:solidFill>
-                <a:latin typeface="Calibri"/>
-              </a:rPr>
-              <a:t>millis</a:t>
-            </a:r>
-            <a:r>
-              <a:rPr sz="1800" b="0" dirty="0">
-                <a:solidFill>
-                  <a:srgbClr val="222222"/>
-                </a:solidFill>
-                <a:latin typeface="Calibri"/>
-              </a:rPr>
-              <a:t>(), so you can drive with it running.</a:t>
+              <a:rPr sz="1800" b="0">
+                <a:solidFill>
+                  <a:srgbClr val="222222"/>
+                </a:solidFill>
+                <a:latin typeface="Calibri"/>
+              </a:rPr>
+              <a:t>Lesson 4 used delay(), so the vehicle froze while it swept. The full program moves the dot every 40 ms off millis(), so you can drive with it running.</a:t>
             </a:r>
           </a:p>
           <a:p>
@@ -15969,7 +15841,7 @@
               </a:defRPr>
             </a:pPr>
             <a:r>
-              <a:rPr sz="1800" b="0" dirty="0">
+              <a:rPr sz="1800" b="0">
                 <a:solidFill>
                   <a:srgbClr val="222222"/>
                 </a:solidFill>
@@ -15994,7 +15866,7 @@
               </a:defRPr>
             </a:pPr>
             <a:r>
-              <a:rPr sz="1800" b="0" dirty="0">
+              <a:rPr sz="1800" b="0">
                 <a:solidFill>
                   <a:srgbClr val="222222"/>
                 </a:solidFill>
@@ -16019,22 +15891,13 @@
               </a:defRPr>
             </a:pPr>
             <a:r>
-              <a:rPr sz="1800" b="0" dirty="0" err="1">
-                <a:solidFill>
-                  <a:srgbClr val="222222"/>
-                </a:solidFill>
-                <a:latin typeface="Calibri"/>
-              </a:rPr>
-              <a:t>turnMax</a:t>
-            </a:r>
-            <a:r>
-              <a:rPr sz="1800" b="0" dirty="0">
-                <a:solidFill>
-                  <a:srgbClr val="222222"/>
-                </a:solidFill>
-                <a:latin typeface="Calibri"/>
-              </a:rPr>
-              <a:t> is normally MOTOR_MAX / 2, which makes it easy to aim. L3 (click the left stick in) flips it to full power, for spinning on the spot.</a:t>
+              <a:rPr sz="1800" b="0">
+                <a:solidFill>
+                  <a:srgbClr val="222222"/>
+                </a:solidFill>
+                <a:latin typeface="Calibri"/>
+              </a:rPr>
+              <a:t>turnMax is normally 75% of MOTOR_MAX - 191 of 255 - which makes it easy to aim. L3 (click the left stick in) flips it to full power, for spinning on the spot.</a:t>
             </a:r>
           </a:p>
           <a:p>
@@ -16053,7 +15916,7 @@
               </a:defRPr>
             </a:pPr>
             <a:r>
-              <a:rPr sz="1800" b="0" dirty="0">
+              <a:rPr sz="1800" b="0">
                 <a:solidFill>
                   <a:srgbClr val="222222"/>
                 </a:solidFill>
@@ -16078,7 +15941,7 @@
               </a:defRPr>
             </a:pPr>
             <a:r>
-              <a:rPr sz="1800" b="0" dirty="0">
+              <a:rPr sz="1800" b="0">
                 <a:solidFill>
                   <a:srgbClr val="222222"/>
                 </a:solidFill>
@@ -16103,7 +15966,7 @@
               </a:defRPr>
             </a:pPr>
             <a:r>
-              <a:rPr sz="1800" b="0" dirty="0">
+              <a:rPr sz="1800" b="0">
                 <a:solidFill>
                   <a:srgbClr val="222222"/>
                 </a:solidFill>
@@ -16155,7 +16018,7 @@
           </a:fontRef>
         </p:style>
         <p:txBody>
-          <a:bodyPr wrap="square" lIns="164592" tIns="73152" rIns="164592" bIns="73152" rtlCol="0" anchor="ctr"/>
+          <a:bodyPr rtlCol="0" anchor="ctr" wrap="square" lIns="164592" rIns="164592" tIns="73152" bIns="73152"/>
           <a:lstStyle/>
           <a:p>
             <a:pPr algn="l"/>
@@ -16189,7 +16052,7 @@
 </file>
 
 <file path=ppt/slides/slide23.xml><?xml version="1.0" encoding="utf-8"?>
-<p:sld xmlns:a="http://schemas.openxmlformats.org/drawingml/2006/main" xmlns:r="http://schemas.openxmlformats.org/officeDocument/2006/relationships" xmlns:p="http://schemas.openxmlformats.org/presentationml/2006/main">
+<p:sld xmlns:a="http://schemas.openxmlformats.org/drawingml/2006/main" xmlns:p="http://schemas.openxmlformats.org/presentationml/2006/main" xmlns:r="http://schemas.openxmlformats.org/officeDocument/2006/relationships">
   <p:cSld>
     <p:spTree>
       <p:nvGrpSpPr>
@@ -16197,14 +16060,7 @@
         <p:cNvGrpSpPr/>
         <p:nvPr/>
       </p:nvGrpSpPr>
-      <p:grpSpPr>
-        <a:xfrm>
-          <a:off x="0" y="0"/>
-          <a:ext cx="0" cy="0"/>
-          <a:chOff x="0" y="0"/>
-          <a:chExt cx="0" cy="0"/>
-        </a:xfrm>
-      </p:grpSpPr>
+      <p:grpSpPr/>
       <p:sp>
         <p:nvSpPr>
           <p:cNvPr id="2" name="Title 1"/>
@@ -16232,7 +16088,7 @@
               <a:spcAft>
                 <a:spcPts val="0"/>
               </a:spcAft>
-              <a:defRPr sz="2800" b="1">
+              <a:defRPr sz="2700" b="1">
                 <a:solidFill>
                   <a:srgbClr val="1F3A5F"/>
                 </a:solidFill>
@@ -16240,13 +16096,13 @@
               </a:defRPr>
             </a:pPr>
             <a:r>
-              <a:rPr sz="2800" b="1">
+              <a:rPr sz="2700" b="1">
                 <a:solidFill>
                   <a:srgbClr val="1F3A5F"/>
                 </a:solidFill>
                 <a:latin typeface="Calibri"/>
               </a:rPr>
-              <a:t>Putting it all together  -  read pathfinder_ps3 in six passes</a:t>
+              <a:t>Putting it all together  -  read pathfinder_ps3 in six sections</a:t>
             </a:r>
           </a:p>
         </p:txBody>
@@ -16292,7 +16148,6 @@
           <a:lstStyle/>
           <a:p>
             <a:pPr algn="ctr"/>
-            <a:endParaRPr/>
           </a:p>
         </p:txBody>
       </p:sp>
@@ -16435,7 +16290,7 @@
                 </a:solidFill>
                 <a:latin typeface="Calibri"/>
               </a:rPr>
-              <a:t>Six passes, ten minutes, in your groups. Do not start at line one and read to the end - it is the slowest way in.</a:t>
+              <a:t>Six sections, ten minutes, in your groups. Do not start at line one and read to the end - it is the slowest way in.</a:t>
             </a:r>
           </a:p>
         </p:txBody>
@@ -16450,7 +16305,7 @@
         </p:nvGraphicFramePr>
         <p:xfrm>
           <a:off x="502920" y="1691640"/>
-          <a:ext cx="11185854" cy="3069442"/>
+          <a:ext cx="11185853" cy="2835275"/>
         </p:xfrm>
         <a:graphic>
           <a:graphicData uri="http://schemas.openxmlformats.org/drawingml/2006/table">
@@ -16459,42 +16314,24 @@
                 <a:tableStyleId>{5C22544A-7EE6-4342-B048-85BDC9FD1C3A}</a:tableStyleId>
               </a:tblPr>
               <a:tblGrid>
-                <a:gridCol w="813516">
-                  <a:extLst>
-                    <a:ext uri="{9D8B030D-6E8A-4147-A177-3AD203B41FA5}">
-                      <a16:colId xmlns:a16="http://schemas.microsoft.com/office/drawing/2014/main" val="20000"/>
-                    </a:ext>
-                  </a:extLst>
-                </a:gridCol>
-                <a:gridCol w="4677721">
-                  <a:extLst>
-                    <a:ext uri="{9D8B030D-6E8A-4147-A177-3AD203B41FA5}">
-                      <a16:colId xmlns:a16="http://schemas.microsoft.com/office/drawing/2014/main" val="20001"/>
-                    </a:ext>
-                  </a:extLst>
-                </a:gridCol>
-                <a:gridCol w="5694617">
-                  <a:extLst>
-                    <a:ext uri="{9D8B030D-6E8A-4147-A177-3AD203B41FA5}">
-                      <a16:colId xmlns:a16="http://schemas.microsoft.com/office/drawing/2014/main" val="20002"/>
-                    </a:ext>
-                  </a:extLst>
-                </a:gridCol>
+                <a:gridCol w="1118585"/>
+                <a:gridCol w="4576031"/>
+                <a:gridCol w="5491237"/>
               </a:tblGrid>
-              <a:tr h="416378">
+              <a:tr h="405039">
                 <a:tc>
                   <a:txBody>
                     <a:bodyPr/>
                     <a:lstStyle/>
                     <a:p>
                       <a:r>
-                        <a:rPr sz="1500" b="1">
+                        <a:rPr sz="1450" b="1">
                           <a:solidFill>
                             <a:srgbClr val="FFFFFF"/>
                           </a:solidFill>
                           <a:latin typeface="Calibri"/>
                         </a:rPr>
-                        <a:t>Pass</a:t>
+                        <a:t>Section</a:t>
                       </a:r>
                     </a:p>
                   </a:txBody>
@@ -16510,7 +16347,7 @@
                     <a:lstStyle/>
                     <a:p>
                       <a:r>
-                        <a:rPr sz="1500" b="1">
+                        <a:rPr sz="1450" b="1">
                           <a:solidFill>
                             <a:srgbClr val="FFFFFF"/>
                           </a:solidFill>
@@ -16532,7 +16369,7 @@
                     <a:lstStyle/>
                     <a:p>
                       <a:r>
-                        <a:rPr sz="1500" b="1">
+                        <a:rPr sz="1450" b="1">
                           <a:solidFill>
                             <a:srgbClr val="FFFFFF"/>
                           </a:solidFill>
@@ -16548,20 +16385,15 @@
                     </a:solidFill>
                   </a:tcPr>
                 </a:tc>
-                <a:extLst>
-                  <a:ext uri="{0D108BD9-81ED-4DB2-BD59-A6C34878D82A}">
-                    <a16:rowId xmlns:a16="http://schemas.microsoft.com/office/drawing/2014/main" val="10000"/>
-                  </a:ext>
-                </a:extLst>
               </a:tr>
-              <a:tr h="416378">
+              <a:tr h="405039">
                 <a:tc>
                   <a:txBody>
                     <a:bodyPr/>
                     <a:lstStyle/>
                     <a:p>
                       <a:r>
-                        <a:rPr sz="1500">
+                        <a:rPr sz="1450">
                           <a:solidFill>
                             <a:srgbClr val="222222"/>
                           </a:solidFill>
@@ -16583,7 +16415,7 @@
                     <a:lstStyle/>
                     <a:p>
                       <a:r>
-                        <a:rPr sz="1500" dirty="0">
+                        <a:rPr sz="1450">
                           <a:solidFill>
                             <a:srgbClr val="222222"/>
                           </a:solidFill>
@@ -16605,7 +16437,7 @@
                     <a:lstStyle/>
                     <a:p>
                       <a:r>
-                        <a:rPr sz="1500">
+                        <a:rPr sz="1450">
                           <a:solidFill>
                             <a:srgbClr val="222222"/>
                           </a:solidFill>
@@ -16621,20 +16453,15 @@
                     </a:solidFill>
                   </a:tcPr>
                 </a:tc>
-                <a:extLst>
-                  <a:ext uri="{0D108BD9-81ED-4DB2-BD59-A6C34878D82A}">
-                    <a16:rowId xmlns:a16="http://schemas.microsoft.com/office/drawing/2014/main" val="10001"/>
-                  </a:ext>
-                </a:extLst>
               </a:tr>
-              <a:tr h="416378">
+              <a:tr h="405039">
                 <a:tc>
                   <a:txBody>
                     <a:bodyPr/>
                     <a:lstStyle/>
                     <a:p>
                       <a:r>
-                        <a:rPr sz="1500">
+                        <a:rPr sz="1450">
                           <a:solidFill>
                             <a:srgbClr val="222222"/>
                           </a:solidFill>
@@ -16656,7 +16483,7 @@
                     <a:lstStyle/>
                     <a:p>
                       <a:r>
-                        <a:rPr sz="1500" dirty="0">
+                        <a:rPr sz="1450">
                           <a:solidFill>
                             <a:srgbClr val="222222"/>
                           </a:solidFill>
@@ -16678,7 +16505,7 @@
                     <a:lstStyle/>
                     <a:p>
                       <a:r>
-                        <a:rPr sz="1500">
+                        <a:rPr sz="1450">
                           <a:solidFill>
                             <a:srgbClr val="222222"/>
                           </a:solidFill>
@@ -16694,20 +16521,15 @@
                     </a:solidFill>
                   </a:tcPr>
                 </a:tc>
-                <a:extLst>
-                  <a:ext uri="{0D108BD9-81ED-4DB2-BD59-A6C34878D82A}">
-                    <a16:rowId xmlns:a16="http://schemas.microsoft.com/office/drawing/2014/main" val="10002"/>
-                  </a:ext>
-                </a:extLst>
               </a:tr>
-              <a:tr h="416378">
+              <a:tr h="405039">
                 <a:tc>
                   <a:txBody>
                     <a:bodyPr/>
                     <a:lstStyle/>
                     <a:p>
                       <a:r>
-                        <a:rPr sz="1500">
+                        <a:rPr sz="1450">
                           <a:solidFill>
                             <a:srgbClr val="222222"/>
                           </a:solidFill>
@@ -16729,47 +16551,14 @@
                     <a:lstStyle/>
                     <a:p>
                       <a:r>
-                        <a:rPr sz="1500" dirty="0">
+                        <a:rPr sz="1450">
                           <a:solidFill>
                             <a:srgbClr val="222222"/>
                           </a:solidFill>
                           <a:latin typeface="Calibri"/>
                         </a:rPr>
-                        <a:t>The state variables and the </a:t>
+                        <a:t>The state variables and the LightPattern enum</a:t>
                       </a:r>
-                      <a:r>
-                        <a:rPr sz="1500" dirty="0" err="1">
-                          <a:solidFill>
-                            <a:srgbClr val="222222"/>
-                          </a:solidFill>
-                          <a:latin typeface="Calibri"/>
-                        </a:rPr>
-                        <a:t>LightPattern</a:t>
-                      </a:r>
-                      <a:r>
-                        <a:rPr sz="1500" dirty="0">
-                          <a:solidFill>
-                            <a:srgbClr val="222222"/>
-                          </a:solidFill>
-                          <a:latin typeface="Calibri"/>
-                        </a:rPr>
-                        <a:t> </a:t>
-                      </a:r>
-                      <a:r>
-                        <a:rPr sz="1500" dirty="0" err="1">
-                          <a:solidFill>
-                            <a:srgbClr val="222222"/>
-                          </a:solidFill>
-                          <a:latin typeface="Calibri"/>
-                        </a:rPr>
-                        <a:t>enum</a:t>
-                      </a:r>
-                      <a:endParaRPr sz="1500" dirty="0">
-                        <a:solidFill>
-                          <a:srgbClr val="222222"/>
-                        </a:solidFill>
-                        <a:latin typeface="Calibri"/>
-                      </a:endParaRPr>
                     </a:p>
                   </a:txBody>
                   <a:tcPr marL="73152" marT="18288" marB="18288">
@@ -16784,7 +16573,7 @@
                     <a:lstStyle/>
                     <a:p>
                       <a:r>
-                        <a:rPr sz="1500">
+                        <a:rPr sz="1450">
                           <a:solidFill>
                             <a:srgbClr val="222222"/>
                           </a:solidFill>
@@ -16800,20 +16589,15 @@
                     </a:solidFill>
                   </a:tcPr>
                 </a:tc>
-                <a:extLst>
-                  <a:ext uri="{0D108BD9-81ED-4DB2-BD59-A6C34878D82A}">
-                    <a16:rowId xmlns:a16="http://schemas.microsoft.com/office/drawing/2014/main" val="10003"/>
-                  </a:ext>
-                </a:extLst>
               </a:tr>
-              <a:tr h="416378">
+              <a:tr h="405039">
                 <a:tc>
                   <a:txBody>
                     <a:bodyPr/>
                     <a:lstStyle/>
                     <a:p>
                       <a:r>
-                        <a:rPr sz="1500">
+                        <a:rPr sz="1450">
                           <a:solidFill>
                             <a:srgbClr val="222222"/>
                           </a:solidFill>
@@ -16835,40 +16619,13 @@
                     <a:lstStyle/>
                     <a:p>
                       <a:r>
-                        <a:rPr sz="1500" dirty="0" err="1">
+                        <a:rPr sz="1450">
                           <a:solidFill>
                             <a:srgbClr val="222222"/>
                           </a:solidFill>
                           <a:latin typeface="Calibri"/>
                         </a:rPr>
-                        <a:t>stickToSpeed</a:t>
-                      </a:r>
-                      <a:r>
-                        <a:rPr sz="1500" dirty="0">
-                          <a:solidFill>
-                            <a:srgbClr val="222222"/>
-                          </a:solidFill>
-                          <a:latin typeface="Calibri"/>
-                        </a:rPr>
-                        <a:t>(), drive() and </a:t>
-                      </a:r>
-                      <a:r>
-                        <a:rPr sz="1500" dirty="0" err="1">
-                          <a:solidFill>
-                            <a:srgbClr val="222222"/>
-                          </a:solidFill>
-                          <a:latin typeface="Calibri"/>
-                        </a:rPr>
-                        <a:t>setMotor</a:t>
-                      </a:r>
-                      <a:r>
-                        <a:rPr sz="1500" dirty="0">
-                          <a:solidFill>
-                            <a:srgbClr val="222222"/>
-                          </a:solidFill>
-                          <a:latin typeface="Calibri"/>
-                        </a:rPr>
-                        <a:t>()</a:t>
+                        <a:t>stickToSpeed(), drive() and setMotor()</a:t>
                       </a:r>
                     </a:p>
                   </a:txBody>
@@ -16884,7 +16641,7 @@
                     <a:lstStyle/>
                     <a:p>
                       <a:r>
-                        <a:rPr sz="1500">
+                        <a:rPr sz="1450">
                           <a:solidFill>
                             <a:srgbClr val="222222"/>
                           </a:solidFill>
@@ -16900,20 +16657,15 @@
                     </a:solidFill>
                   </a:tcPr>
                 </a:tc>
-                <a:extLst>
-                  <a:ext uri="{0D108BD9-81ED-4DB2-BD59-A6C34878D82A}">
-                    <a16:rowId xmlns:a16="http://schemas.microsoft.com/office/drawing/2014/main" val="10004"/>
-                  </a:ext>
-                </a:extLst>
               </a:tr>
-              <a:tr h="416378">
+              <a:tr h="405039">
                 <a:tc>
                   <a:txBody>
                     <a:bodyPr/>
                     <a:lstStyle/>
                     <a:p>
                       <a:r>
-                        <a:rPr sz="1500">
+                        <a:rPr sz="1450">
                           <a:solidFill>
                             <a:srgbClr val="222222"/>
                           </a:solidFill>
@@ -16935,7 +16687,7 @@
                     <a:lstStyle/>
                     <a:p>
                       <a:r>
-                        <a:rPr sz="1500" dirty="0">
+                        <a:rPr sz="1450">
                           <a:solidFill>
                             <a:srgbClr val="222222"/>
                           </a:solidFill>
@@ -16957,7 +16709,7 @@
                     <a:lstStyle/>
                     <a:p>
                       <a:r>
-                        <a:rPr sz="1500">
+                        <a:rPr sz="1450">
                           <a:solidFill>
                             <a:srgbClr val="222222"/>
                           </a:solidFill>
@@ -16973,20 +16725,15 @@
                     </a:solidFill>
                   </a:tcPr>
                 </a:tc>
-                <a:extLst>
-                  <a:ext uri="{0D108BD9-81ED-4DB2-BD59-A6C34878D82A}">
-                    <a16:rowId xmlns:a16="http://schemas.microsoft.com/office/drawing/2014/main" val="10005"/>
-                  </a:ext>
-                </a:extLst>
               </a:tr>
-              <a:tr h="416382">
+              <a:tr h="405041">
                 <a:tc>
                   <a:txBody>
                     <a:bodyPr/>
                     <a:lstStyle/>
                     <a:p>
                       <a:r>
-                        <a:rPr sz="1500">
+                        <a:rPr sz="1450">
                           <a:solidFill>
                             <a:srgbClr val="222222"/>
                           </a:solidFill>
@@ -17008,7 +16755,7 @@
                     <a:lstStyle/>
                     <a:p>
                       <a:r>
-                        <a:rPr sz="1500" dirty="0">
+                        <a:rPr sz="1450">
                           <a:solidFill>
                             <a:srgbClr val="222222"/>
                           </a:solidFill>
@@ -17030,7 +16777,7 @@
                     <a:lstStyle/>
                     <a:p>
                       <a:r>
-                        <a:rPr sz="1500" dirty="0">
+                        <a:rPr sz="1450">
                           <a:solidFill>
                             <a:srgbClr val="222222"/>
                           </a:solidFill>
@@ -17046,11 +16793,6 @@
                     </a:solidFill>
                   </a:tcPr>
                 </a:tc>
-                <a:extLst>
-                  <a:ext uri="{0D108BD9-81ED-4DB2-BD59-A6C34878D82A}">
-                    <a16:rowId xmlns:a16="http://schemas.microsoft.com/office/drawing/2014/main" val="10006"/>
-                  </a:ext>
-                </a:extLst>
               </a:tr>
             </a:tbl>
           </a:graphicData>
@@ -17097,7 +16839,7 @@
           </a:fontRef>
         </p:style>
         <p:txBody>
-          <a:bodyPr wrap="square" lIns="164592" tIns="73152" rIns="164592" bIns="73152" rtlCol="0" anchor="ctr"/>
+          <a:bodyPr rtlCol="0" anchor="ctr" wrap="square" lIns="164592" rIns="164592" tIns="73152" bIns="73152"/>
           <a:lstStyle/>
           <a:p>
             <a:pPr algn="l"/>
@@ -17131,7 +16873,7 @@
 </file>
 
 <file path=ppt/slides/slide24.xml><?xml version="1.0" encoding="utf-8"?>
-<p:sld xmlns:a="http://schemas.openxmlformats.org/drawingml/2006/main" xmlns:r="http://schemas.openxmlformats.org/officeDocument/2006/relationships" xmlns:p="http://schemas.openxmlformats.org/presentationml/2006/main">
+<p:sld xmlns:a="http://schemas.openxmlformats.org/drawingml/2006/main" xmlns:p="http://schemas.openxmlformats.org/presentationml/2006/main" xmlns:r="http://schemas.openxmlformats.org/officeDocument/2006/relationships">
   <p:cSld>
     <p:spTree>
       <p:nvGrpSpPr>
@@ -17139,14 +16881,7 @@
         <p:cNvGrpSpPr/>
         <p:nvPr/>
       </p:nvGrpSpPr>
-      <p:grpSpPr>
-        <a:xfrm>
-          <a:off x="0" y="0"/>
-          <a:ext cx="0" cy="0"/>
-          <a:chOff x="0" y="0"/>
-          <a:chExt cx="0" cy="0"/>
-        </a:xfrm>
-      </p:grpSpPr>
+      <p:grpSpPr/>
       <p:sp>
         <p:nvSpPr>
           <p:cNvPr id="2" name="Title 1"/>
@@ -17234,7 +16969,6 @@
           <a:lstStyle/>
           <a:p>
             <a:pPr algn="ctr"/>
-            <a:endParaRPr/>
           </a:p>
         </p:txBody>
       </p:sp>
@@ -17564,7 +17298,7 @@
 </file>
 
 <file path=ppt/slides/slide25.xml><?xml version="1.0" encoding="utf-8"?>
-<p:sld xmlns:a="http://schemas.openxmlformats.org/drawingml/2006/main" xmlns:r="http://schemas.openxmlformats.org/officeDocument/2006/relationships" xmlns:p="http://schemas.openxmlformats.org/presentationml/2006/main">
+<p:sld xmlns:a="http://schemas.openxmlformats.org/drawingml/2006/main" xmlns:p="http://schemas.openxmlformats.org/presentationml/2006/main" xmlns:r="http://schemas.openxmlformats.org/officeDocument/2006/relationships">
   <p:cSld>
     <p:spTree>
       <p:nvGrpSpPr>
@@ -17572,14 +17306,7 @@
         <p:cNvGrpSpPr/>
         <p:nvPr/>
       </p:nvGrpSpPr>
-      <p:grpSpPr>
-        <a:xfrm>
-          <a:off x="0" y="0"/>
-          <a:ext cx="0" cy="0"/>
-          <a:chOff x="0" y="0"/>
-          <a:chExt cx="0" cy="0"/>
-        </a:xfrm>
-      </p:grpSpPr>
+      <p:grpSpPr/>
       <p:sp>
         <p:nvSpPr>
           <p:cNvPr id="2" name="Title 1"/>
@@ -17667,7 +17394,6 @@
           <a:lstStyle/>
           <a:p>
             <a:pPr algn="ctr"/>
-            <a:endParaRPr/>
           </a:p>
         </p:txBody>
       </p:sp>
@@ -17806,7 +17532,7 @@
           </a:fontRef>
         </p:style>
         <p:txBody>
-          <a:bodyPr wrap="square" lIns="182880" rtlCol="0" anchor="ctr"/>
+          <a:bodyPr rtlCol="0" anchor="ctr" wrap="square" lIns="182880"/>
           <a:lstStyle/>
           <a:p>
             <a:pPr algn="l"/>
@@ -18271,7 +17997,7 @@
           </a:fontRef>
         </p:style>
         <p:txBody>
-          <a:bodyPr wrap="square" lIns="164592" tIns="73152" rIns="164592" bIns="73152" rtlCol="0" anchor="ctr"/>
+          <a:bodyPr rtlCol="0" anchor="ctr" wrap="square" lIns="164592" rIns="164592" tIns="73152" bIns="73152"/>
           <a:lstStyle/>
           <a:p>
             <a:pPr algn="l"/>
@@ -18305,7 +18031,7 @@
 </file>
 
 <file path=ppt/slides/slide26.xml><?xml version="1.0" encoding="utf-8"?>
-<p:sld xmlns:a="http://schemas.openxmlformats.org/drawingml/2006/main" xmlns:r="http://schemas.openxmlformats.org/officeDocument/2006/relationships" xmlns:p="http://schemas.openxmlformats.org/presentationml/2006/main">
+<p:sld xmlns:a="http://schemas.openxmlformats.org/drawingml/2006/main" xmlns:p="http://schemas.openxmlformats.org/presentationml/2006/main" xmlns:r="http://schemas.openxmlformats.org/officeDocument/2006/relationships">
   <p:cSld>
     <p:spTree>
       <p:nvGrpSpPr>
@@ -18313,14 +18039,7 @@
         <p:cNvGrpSpPr/>
         <p:nvPr/>
       </p:nvGrpSpPr>
-      <p:grpSpPr>
-        <a:xfrm>
-          <a:off x="0" y="0"/>
-          <a:ext cx="0" cy="0"/>
-          <a:chOff x="0" y="0"/>
-          <a:chExt cx="0" cy="0"/>
-        </a:xfrm>
-      </p:grpSpPr>
+      <p:grpSpPr/>
       <p:sp>
         <p:nvSpPr>
           <p:cNvPr id="2" name="Title 1"/>
@@ -18408,7 +18127,6 @@
           <a:lstStyle/>
           <a:p>
             <a:pPr algn="ctr"/>
-            <a:endParaRPr/>
           </a:p>
         </p:txBody>
       </p:sp>
@@ -18692,12 +18410,6 @@
                 <a:latin typeface="Calibri"/>
               </a:defRPr>
             </a:pPr>
-            <a:endParaRPr sz="2000" b="0">
-              <a:solidFill>
-                <a:srgbClr val="222222"/>
-              </a:solidFill>
-              <a:latin typeface="Calibri"/>
-            </a:endParaRPr>
           </a:p>
           <a:p>
             <a:pPr algn="l">
@@ -18862,12 +18574,6 @@
                 <a:latin typeface="Calibri"/>
               </a:defRPr>
             </a:pPr>
-            <a:endParaRPr sz="2000" b="0">
-              <a:solidFill>
-                <a:srgbClr val="222222"/>
-              </a:solidFill>
-              <a:latin typeface="Calibri"/>
-            </a:endParaRPr>
           </a:p>
           <a:p>
             <a:pPr algn="l">
@@ -18955,7 +18661,7 @@
 </file>
 
 <file path=ppt/slides/slide27.xml><?xml version="1.0" encoding="utf-8"?>
-<p:sld xmlns:a="http://schemas.openxmlformats.org/drawingml/2006/main" xmlns:r="http://schemas.openxmlformats.org/officeDocument/2006/relationships" xmlns:p="http://schemas.openxmlformats.org/presentationml/2006/main">
+<p:sld xmlns:a="http://schemas.openxmlformats.org/drawingml/2006/main" xmlns:p="http://schemas.openxmlformats.org/presentationml/2006/main" xmlns:r="http://schemas.openxmlformats.org/officeDocument/2006/relationships">
   <p:cSld>
     <p:spTree>
       <p:nvGrpSpPr>
@@ -18963,14 +18669,7 @@
         <p:cNvGrpSpPr/>
         <p:nvPr/>
       </p:nvGrpSpPr>
-      <p:grpSpPr>
-        <a:xfrm>
-          <a:off x="0" y="0"/>
-          <a:ext cx="0" cy="0"/>
-          <a:chOff x="0" y="0"/>
-          <a:chExt cx="0" cy="0"/>
-        </a:xfrm>
-      </p:grpSpPr>
+      <p:grpSpPr/>
       <p:sp>
         <p:nvSpPr>
           <p:cNvPr id="2" name="Title 1"/>
@@ -19058,7 +18757,6 @@
           <a:lstStyle/>
           <a:p>
             <a:pPr algn="ctr"/>
-            <a:endParaRPr/>
           </a:p>
         </p:txBody>
       </p:sp>
@@ -19372,7 +19070,7 @@
           </a:fontRef>
         </p:style>
         <p:txBody>
-          <a:bodyPr wrap="square" lIns="164592" tIns="73152" rIns="164592" bIns="73152" rtlCol="0" anchor="ctr"/>
+          <a:bodyPr rtlCol="0" anchor="ctr" wrap="square" lIns="164592" rIns="164592" tIns="73152" bIns="73152"/>
           <a:lstStyle/>
           <a:p>
             <a:pPr algn="l"/>
@@ -19406,7 +19104,7 @@
 </file>
 
 <file path=ppt/slides/slide28.xml><?xml version="1.0" encoding="utf-8"?>
-<p:sld xmlns:a="http://schemas.openxmlformats.org/drawingml/2006/main" xmlns:r="http://schemas.openxmlformats.org/officeDocument/2006/relationships" xmlns:p="http://schemas.openxmlformats.org/presentationml/2006/main">
+<p:sld xmlns:a="http://schemas.openxmlformats.org/drawingml/2006/main" xmlns:p="http://schemas.openxmlformats.org/presentationml/2006/main" xmlns:r="http://schemas.openxmlformats.org/officeDocument/2006/relationships">
   <p:cSld>
     <p:spTree>
       <p:nvGrpSpPr>
@@ -19414,14 +19112,7 @@
         <p:cNvGrpSpPr/>
         <p:nvPr/>
       </p:nvGrpSpPr>
-      <p:grpSpPr>
-        <a:xfrm>
-          <a:off x="0" y="0"/>
-          <a:ext cx="0" cy="0"/>
-          <a:chOff x="0" y="0"/>
-          <a:chExt cx="0" cy="0"/>
-        </a:xfrm>
-      </p:grpSpPr>
+      <p:grpSpPr/>
       <p:sp>
         <p:nvSpPr>
           <p:cNvPr id="2" name="Title 1"/>
@@ -19509,7 +19200,6 @@
           <a:lstStyle/>
           <a:p>
             <a:pPr algn="ctr"/>
-            <a:endParaRPr/>
           </a:p>
         </p:txBody>
       </p:sp>
@@ -19660,6 +19350,30 @@
       <p:pic>
         <p:nvPicPr>
           <p:cNvPr id="7" name="Picture 6" descr="vehicle-with-arm.jpg"/>
+          <p:cNvPicPr>
+            <a:picLocks noChangeAspect="1"/>
+          </p:cNvPicPr>
+          <p:nvPr/>
+        </p:nvPicPr>
+        <p:blipFill>
+          <a:blip r:embed="rId2"/>
+          <a:stretch>
+            <a:fillRect/>
+          </a:stretch>
+        </p:blipFill>
+        <p:spPr>
+          <a:xfrm>
+            <a:off x="757351" y="1810512"/>
+            <a:ext cx="4901184" cy="3675888"/>
+          </a:xfrm>
+          <a:prstGeom prst="rect">
+            <a:avLst/>
+          </a:prstGeom>
+        </p:spPr>
+      </p:pic>
+      <p:pic>
+        <p:nvPicPr>
+          <p:cNvPr id="8" name="Picture 7" descr="robot-arm-6dof.jpg"/>
           <p:cNvPicPr>
             <a:picLocks noChangeAspect="1"/>
           </p:cNvPicPr>
@@ -19673,30 +19387,6 @@
         </p:blipFill>
         <p:spPr>
           <a:xfrm>
-            <a:off x="757351" y="1810512"/>
-            <a:ext cx="4901184" cy="3675888"/>
-          </a:xfrm>
-          <a:prstGeom prst="rect">
-            <a:avLst/>
-          </a:prstGeom>
-        </p:spPr>
-      </p:pic>
-      <p:pic>
-        <p:nvPicPr>
-          <p:cNvPr id="8" name="Picture 7" descr="robot-arm-6dof.jpg"/>
-          <p:cNvPicPr>
-            <a:picLocks noChangeAspect="1"/>
-          </p:cNvPicPr>
-          <p:nvPr/>
-        </p:nvPicPr>
-        <p:blipFill>
-          <a:blip r:embed="rId4"/>
-          <a:stretch>
-            <a:fillRect/>
-          </a:stretch>
-        </p:blipFill>
-        <p:spPr>
-          <a:xfrm>
             <a:off x="7156650" y="1810512"/>
             <a:ext cx="3654201" cy="3675887"/>
           </a:xfrm>
@@ -19748,7 +19438,7 @@
                 </a:solidFill>
                 <a:latin typeface="Calibri"/>
               </a:rPr>
-              <a:t>A gripper arm on the top plate, driven from the servo headers</a:t>
+              <a:t>A gripper arm on the top plate, driven from the servo headers on the board below it</a:t>
             </a:r>
           </a:p>
         </p:txBody>
@@ -19810,7 +19500,7 @@
 </file>
 
 <file path=ppt/slides/slide29.xml><?xml version="1.0" encoding="utf-8"?>
-<p:sld xmlns:a="http://schemas.openxmlformats.org/drawingml/2006/main" xmlns:r="http://schemas.openxmlformats.org/officeDocument/2006/relationships" xmlns:p="http://schemas.openxmlformats.org/presentationml/2006/main">
+<p:sld xmlns:a="http://schemas.openxmlformats.org/drawingml/2006/main" xmlns:p="http://schemas.openxmlformats.org/presentationml/2006/main" xmlns:r="http://schemas.openxmlformats.org/officeDocument/2006/relationships">
   <p:cSld>
     <p:spTree>
       <p:nvGrpSpPr>
@@ -19818,14 +19508,7 @@
         <p:cNvGrpSpPr/>
         <p:nvPr/>
       </p:nvGrpSpPr>
-      <p:grpSpPr>
-        <a:xfrm>
-          <a:off x="0" y="0"/>
-          <a:ext cx="0" cy="0"/>
-          <a:chOff x="0" y="0"/>
-          <a:chExt cx="0" cy="0"/>
-        </a:xfrm>
-      </p:grpSpPr>
+      <p:grpSpPr/>
       <p:sp>
         <p:nvSpPr>
           <p:cNvPr id="2" name="Title 1"/>
@@ -19913,7 +19596,6 @@
           <a:lstStyle/>
           <a:p>
             <a:pPr algn="ctr"/>
-            <a:endParaRPr/>
           </a:p>
         </p:txBody>
       </p:sp>
@@ -20471,7 +20153,7 @@
           </a:fontRef>
         </p:style>
         <p:txBody>
-          <a:bodyPr wrap="square" lIns="164592" tIns="73152" rIns="164592" bIns="73152" rtlCol="0" anchor="ctr"/>
+          <a:bodyPr rtlCol="0" anchor="ctr" wrap="square" lIns="164592" rIns="164592" tIns="73152" bIns="73152"/>
           <a:lstStyle/>
           <a:p>
             <a:pPr algn="l"/>
@@ -20505,7 +20187,7 @@
 </file>
 
 <file path=ppt/slides/slide3.xml><?xml version="1.0" encoding="utf-8"?>
-<p:sld xmlns:a="http://schemas.openxmlformats.org/drawingml/2006/main" xmlns:r="http://schemas.openxmlformats.org/officeDocument/2006/relationships" xmlns:p="http://schemas.openxmlformats.org/presentationml/2006/main">
+<p:sld xmlns:a="http://schemas.openxmlformats.org/drawingml/2006/main" xmlns:p="http://schemas.openxmlformats.org/presentationml/2006/main" xmlns:r="http://schemas.openxmlformats.org/officeDocument/2006/relationships">
   <p:cSld>
     <p:spTree>
       <p:nvGrpSpPr>
@@ -20513,14 +20195,7 @@
         <p:cNvGrpSpPr/>
         <p:nvPr/>
       </p:nvGrpSpPr>
-      <p:grpSpPr>
-        <a:xfrm>
-          <a:off x="0" y="0"/>
-          <a:ext cx="0" cy="0"/>
-          <a:chOff x="0" y="0"/>
-          <a:chExt cx="0" cy="0"/>
-        </a:xfrm>
-      </p:grpSpPr>
+      <p:grpSpPr/>
       <p:sp>
         <p:nvSpPr>
           <p:cNvPr id="2" name="Title 1"/>
@@ -20608,7 +20283,6 @@
           <a:lstStyle/>
           <a:p>
             <a:pPr algn="ctr"/>
-            <a:endParaRPr/>
           </a:p>
         </p:txBody>
       </p:sp>
@@ -20844,12 +20518,6 @@
                 <a:latin typeface="Calibri"/>
               </a:defRPr>
             </a:pPr>
-            <a:endParaRPr sz="2300" b="0">
-              <a:solidFill>
-                <a:srgbClr val="222222"/>
-              </a:solidFill>
-              <a:latin typeface="Calibri"/>
-            </a:endParaRPr>
           </a:p>
           <a:p>
             <a:pPr algn="l">
@@ -20919,7 +20587,7 @@
           </a:fontRef>
         </p:style>
         <p:txBody>
-          <a:bodyPr wrap="square" lIns="164592" tIns="73152" rIns="164592" bIns="73152" rtlCol="0" anchor="ctr"/>
+          <a:bodyPr rtlCol="0" anchor="ctr" wrap="square" lIns="164592" rIns="164592" tIns="73152" bIns="73152"/>
           <a:lstStyle/>
           <a:p>
             <a:pPr algn="l"/>
@@ -20953,7 +20621,7 @@
 </file>
 
 <file path=ppt/slides/slide30.xml><?xml version="1.0" encoding="utf-8"?>
-<p:sld xmlns:a="http://schemas.openxmlformats.org/drawingml/2006/main" xmlns:r="http://schemas.openxmlformats.org/officeDocument/2006/relationships" xmlns:p="http://schemas.openxmlformats.org/presentationml/2006/main">
+<p:sld xmlns:a="http://schemas.openxmlformats.org/drawingml/2006/main" xmlns:p="http://schemas.openxmlformats.org/presentationml/2006/main" xmlns:r="http://schemas.openxmlformats.org/officeDocument/2006/relationships">
   <p:cSld>
     <p:spTree>
       <p:nvGrpSpPr>
@@ -20961,14 +20629,7 @@
         <p:cNvGrpSpPr/>
         <p:nvPr/>
       </p:nvGrpSpPr>
-      <p:grpSpPr>
-        <a:xfrm>
-          <a:off x="0" y="0"/>
-          <a:ext cx="0" cy="0"/>
-          <a:chOff x="0" y="0"/>
-          <a:chExt cx="0" cy="0"/>
-        </a:xfrm>
-      </p:grpSpPr>
+      <p:grpSpPr/>
       <p:sp>
         <p:nvSpPr>
           <p:cNvPr id="2" name="Title 1"/>
@@ -21056,7 +20717,6 @@
           <a:lstStyle/>
           <a:p>
             <a:pPr algn="ctr"/>
-            <a:endParaRPr/>
           </a:p>
         </p:txBody>
       </p:sp>
@@ -21265,12 +20925,6 @@
                 <a:latin typeface="Calibri"/>
               </a:defRPr>
             </a:pPr>
-            <a:endParaRPr sz="2000" b="0">
-              <a:solidFill>
-                <a:srgbClr val="222222"/>
-              </a:solidFill>
-              <a:latin typeface="Calibri"/>
-            </a:endParaRPr>
           </a:p>
           <a:p>
             <a:pPr algn="l">
@@ -21385,12 +21039,6 @@
                 <a:latin typeface="Calibri"/>
               </a:defRPr>
             </a:pPr>
-            <a:endParaRPr sz="2000" b="0">
-              <a:solidFill>
-                <a:srgbClr val="222222"/>
-              </a:solidFill>
-              <a:latin typeface="Calibri"/>
-            </a:endParaRPr>
           </a:p>
           <a:p>
             <a:pPr algn="l">
@@ -21432,12 +21080,6 @@
                 <a:latin typeface="Calibri"/>
               </a:defRPr>
             </a:pPr>
-            <a:endParaRPr sz="2000" b="0">
-              <a:solidFill>
-                <a:srgbClr val="222222"/>
-              </a:solidFill>
-              <a:latin typeface="Calibri"/>
-            </a:endParaRPr>
           </a:p>
           <a:p>
             <a:pPr algn="l">
@@ -21475,7 +21117,7 @@
 </file>
 
 <file path=ppt/slides/slide31.xml><?xml version="1.0" encoding="utf-8"?>
-<p:sld xmlns:a="http://schemas.openxmlformats.org/drawingml/2006/main" xmlns:r="http://schemas.openxmlformats.org/officeDocument/2006/relationships" xmlns:p="http://schemas.openxmlformats.org/presentationml/2006/main">
+<p:sld xmlns:a="http://schemas.openxmlformats.org/drawingml/2006/main" xmlns:p="http://schemas.openxmlformats.org/presentationml/2006/main" xmlns:r="http://schemas.openxmlformats.org/officeDocument/2006/relationships">
   <p:cSld>
     <p:spTree>
       <p:nvGrpSpPr>
@@ -21483,14 +21125,7 @@
         <p:cNvGrpSpPr/>
         <p:nvPr/>
       </p:nvGrpSpPr>
-      <p:grpSpPr>
-        <a:xfrm>
-          <a:off x="0" y="0"/>
-          <a:ext cx="0" cy="0"/>
-          <a:chOff x="0" y="0"/>
-          <a:chExt cx="0" cy="0"/>
-        </a:xfrm>
-      </p:grpSpPr>
+      <p:grpSpPr/>
       <p:sp>
         <p:nvSpPr>
           <p:cNvPr id="2" name="Title 1"/>
@@ -21578,7 +21213,6 @@
           <a:lstStyle/>
           <a:p>
             <a:pPr algn="ctr"/>
-            <a:endParaRPr/>
           </a:p>
         </p:txBody>
       </p:sp>
@@ -21958,7 +21592,7 @@
 </file>
 
 <file path=ppt/slides/slide4.xml><?xml version="1.0" encoding="utf-8"?>
-<p:sld xmlns:a="http://schemas.openxmlformats.org/drawingml/2006/main" xmlns:r="http://schemas.openxmlformats.org/officeDocument/2006/relationships" xmlns:p="http://schemas.openxmlformats.org/presentationml/2006/main">
+<p:sld xmlns:a="http://schemas.openxmlformats.org/drawingml/2006/main" xmlns:p="http://schemas.openxmlformats.org/presentationml/2006/main" xmlns:r="http://schemas.openxmlformats.org/officeDocument/2006/relationships">
   <p:cSld>
     <p:spTree>
       <p:nvGrpSpPr>
@@ -21966,14 +21600,7 @@
         <p:cNvGrpSpPr/>
         <p:nvPr/>
       </p:nvGrpSpPr>
-      <p:grpSpPr>
-        <a:xfrm>
-          <a:off x="0" y="0"/>
-          <a:ext cx="0" cy="0"/>
-          <a:chOff x="0" y="0"/>
-          <a:chExt cx="0" cy="0"/>
-        </a:xfrm>
-      </p:grpSpPr>
+      <p:grpSpPr/>
       <p:sp>
         <p:nvSpPr>
           <p:cNvPr id="2" name="Title 1"/>
@@ -22061,7 +21688,6 @@
           <a:lstStyle/>
           <a:p>
             <a:pPr algn="ctr"/>
-            <a:endParaRPr/>
           </a:p>
         </p:txBody>
       </p:sp>
@@ -22180,20 +21806,8 @@
                 <a:tableStyleId>{5C22544A-7EE6-4342-B048-85BDC9FD1C3A}</a:tableStyleId>
               </a:tblPr>
               <a:tblGrid>
-                <a:gridCol w="1118585">
-                  <a:extLst>
-                    <a:ext uri="{9D8B030D-6E8A-4147-A177-3AD203B41FA5}">
-                      <a16:colId xmlns:a16="http://schemas.microsoft.com/office/drawing/2014/main" val="20000"/>
-                    </a:ext>
-                  </a:extLst>
-                </a:gridCol>
-                <a:gridCol w="10067269">
-                  <a:extLst>
-                    <a:ext uri="{9D8B030D-6E8A-4147-A177-3AD203B41FA5}">
-                      <a16:colId xmlns:a16="http://schemas.microsoft.com/office/drawing/2014/main" val="20001"/>
-                    </a:ext>
-                  </a:extLst>
-                </a:gridCol>
+                <a:gridCol w="1118585"/>
+                <a:gridCol w="10067269"/>
               </a:tblGrid>
               <a:tr h="457200">
                 <a:tc>
@@ -22240,11 +21854,6 @@
                     </a:solidFill>
                   </a:tcPr>
                 </a:tc>
-                <a:extLst>
-                  <a:ext uri="{0D108BD9-81ED-4DB2-BD59-A6C34878D82A}">
-                    <a16:rowId xmlns:a16="http://schemas.microsoft.com/office/drawing/2014/main" val="10000"/>
-                  </a:ext>
-                </a:extLst>
               </a:tr>
               <a:tr h="457200">
                 <a:tc>
@@ -22291,11 +21900,6 @@
                     </a:solidFill>
                   </a:tcPr>
                 </a:tc>
-                <a:extLst>
-                  <a:ext uri="{0D108BD9-81ED-4DB2-BD59-A6C34878D82A}">
-                    <a16:rowId xmlns:a16="http://schemas.microsoft.com/office/drawing/2014/main" val="10001"/>
-                  </a:ext>
-                </a:extLst>
               </a:tr>
               <a:tr h="457200">
                 <a:tc>
@@ -22342,11 +21946,6 @@
                     </a:solidFill>
                   </a:tcPr>
                 </a:tc>
-                <a:extLst>
-                  <a:ext uri="{0D108BD9-81ED-4DB2-BD59-A6C34878D82A}">
-                    <a16:rowId xmlns:a16="http://schemas.microsoft.com/office/drawing/2014/main" val="10002"/>
-                  </a:ext>
-                </a:extLst>
               </a:tr>
               <a:tr h="457200">
                 <a:tc>
@@ -22393,11 +21992,6 @@
                     </a:solidFill>
                   </a:tcPr>
                 </a:tc>
-                <a:extLst>
-                  <a:ext uri="{0D108BD9-81ED-4DB2-BD59-A6C34878D82A}">
-                    <a16:rowId xmlns:a16="http://schemas.microsoft.com/office/drawing/2014/main" val="10003"/>
-                  </a:ext>
-                </a:extLst>
               </a:tr>
               <a:tr h="457200">
                 <a:tc>
@@ -22444,11 +22038,6 @@
                     </a:solidFill>
                   </a:tcPr>
                 </a:tc>
-                <a:extLst>
-                  <a:ext uri="{0D108BD9-81ED-4DB2-BD59-A6C34878D82A}">
-                    <a16:rowId xmlns:a16="http://schemas.microsoft.com/office/drawing/2014/main" val="10004"/>
-                  </a:ext>
-                </a:extLst>
               </a:tr>
               <a:tr h="457200">
                 <a:tc>
@@ -22495,11 +22084,6 @@
                     </a:solidFill>
                   </a:tcPr>
                 </a:tc>
-                <a:extLst>
-                  <a:ext uri="{0D108BD9-81ED-4DB2-BD59-A6C34878D82A}">
-                    <a16:rowId xmlns:a16="http://schemas.microsoft.com/office/drawing/2014/main" val="10005"/>
-                  </a:ext>
-                </a:extLst>
               </a:tr>
               <a:tr h="457200">
                 <a:tc>
@@ -22546,11 +22130,6 @@
                     </a:solidFill>
                   </a:tcPr>
                 </a:tc>
-                <a:extLst>
-                  <a:ext uri="{0D108BD9-81ED-4DB2-BD59-A6C34878D82A}">
-                    <a16:rowId xmlns:a16="http://schemas.microsoft.com/office/drawing/2014/main" val="10006"/>
-                  </a:ext>
-                </a:extLst>
               </a:tr>
               <a:tr h="457200">
                 <a:tc>
@@ -22597,11 +22176,6 @@
                     </a:solidFill>
                   </a:tcPr>
                 </a:tc>
-                <a:extLst>
-                  <a:ext uri="{0D108BD9-81ED-4DB2-BD59-A6C34878D82A}">
-                    <a16:rowId xmlns:a16="http://schemas.microsoft.com/office/drawing/2014/main" val="10007"/>
-                  </a:ext>
-                </a:extLst>
               </a:tr>
               <a:tr h="457200">
                 <a:tc>
@@ -22648,11 +22222,6 @@
                     </a:solidFill>
                   </a:tcPr>
                 </a:tc>
-                <a:extLst>
-                  <a:ext uri="{0D108BD9-81ED-4DB2-BD59-A6C34878D82A}">
-                    <a16:rowId xmlns:a16="http://schemas.microsoft.com/office/drawing/2014/main" val="10008"/>
-                  </a:ext>
-                </a:extLst>
               </a:tr>
               <a:tr h="457200">
                 <a:tc>
@@ -22699,11 +22268,6 @@
                     </a:solidFill>
                   </a:tcPr>
                 </a:tc>
-                <a:extLst>
-                  <a:ext uri="{0D108BD9-81ED-4DB2-BD59-A6C34878D82A}">
-                    <a16:rowId xmlns:a16="http://schemas.microsoft.com/office/drawing/2014/main" val="10009"/>
-                  </a:ext>
-                </a:extLst>
               </a:tr>
               <a:tr h="457200">
                 <a:tc>
@@ -22750,11 +22314,6 @@
                     </a:solidFill>
                   </a:tcPr>
                 </a:tc>
-                <a:extLst>
-                  <a:ext uri="{0D108BD9-81ED-4DB2-BD59-A6C34878D82A}">
-                    <a16:rowId xmlns:a16="http://schemas.microsoft.com/office/drawing/2014/main" val="10010"/>
-                  </a:ext>
-                </a:extLst>
               </a:tr>
             </a:tbl>
           </a:graphicData>
@@ -22769,7 +22328,7 @@
 </file>
 
 <file path=ppt/slides/slide5.xml><?xml version="1.0" encoding="utf-8"?>
-<p:sld xmlns:a="http://schemas.openxmlformats.org/drawingml/2006/main" xmlns:r="http://schemas.openxmlformats.org/officeDocument/2006/relationships" xmlns:p="http://schemas.openxmlformats.org/presentationml/2006/main">
+<p:sld xmlns:a="http://schemas.openxmlformats.org/drawingml/2006/main" xmlns:p="http://schemas.openxmlformats.org/presentationml/2006/main" xmlns:r="http://schemas.openxmlformats.org/officeDocument/2006/relationships">
   <p:cSld>
     <p:spTree>
       <p:nvGrpSpPr>
@@ -22777,14 +22336,7 @@
         <p:cNvGrpSpPr/>
         <p:nvPr/>
       </p:nvGrpSpPr>
-      <p:grpSpPr>
-        <a:xfrm>
-          <a:off x="0" y="0"/>
-          <a:ext cx="0" cy="0"/>
-          <a:chOff x="0" y="0"/>
-          <a:chExt cx="0" cy="0"/>
-        </a:xfrm>
-      </p:grpSpPr>
+      <p:grpSpPr/>
       <p:sp>
         <p:nvSpPr>
           <p:cNvPr id="2" name="Title 1"/>
@@ -22872,7 +22424,6 @@
           <a:lstStyle/>
           <a:p>
             <a:pPr algn="ctr"/>
-            <a:endParaRPr/>
           </a:p>
         </p:txBody>
       </p:sp>
@@ -23184,7 +22735,7 @@
           </a:fontRef>
         </p:style>
         <p:txBody>
-          <a:bodyPr wrap="square" lIns="164592" tIns="73152" rIns="164592" bIns="73152" rtlCol="0" anchor="ctr"/>
+          <a:bodyPr rtlCol="0" anchor="ctr" wrap="square" lIns="164592" rIns="164592" tIns="73152" bIns="73152"/>
           <a:lstStyle/>
           <a:p>
             <a:pPr algn="l"/>
@@ -23218,7 +22769,7 @@
 </file>
 
 <file path=ppt/slides/slide6.xml><?xml version="1.0" encoding="utf-8"?>
-<p:sld xmlns:a="http://schemas.openxmlformats.org/drawingml/2006/main" xmlns:r="http://schemas.openxmlformats.org/officeDocument/2006/relationships" xmlns:p="http://schemas.openxmlformats.org/presentationml/2006/main">
+<p:sld xmlns:a="http://schemas.openxmlformats.org/drawingml/2006/main" xmlns:p="http://schemas.openxmlformats.org/presentationml/2006/main" xmlns:r="http://schemas.openxmlformats.org/officeDocument/2006/relationships">
   <p:cSld>
     <p:spTree>
       <p:nvGrpSpPr>
@@ -23226,14 +22777,7 @@
         <p:cNvGrpSpPr/>
         <p:nvPr/>
       </p:nvGrpSpPr>
-      <p:grpSpPr>
-        <a:xfrm>
-          <a:off x="0" y="0"/>
-          <a:ext cx="0" cy="0"/>
-          <a:chOff x="0" y="0"/>
-          <a:chExt cx="0" cy="0"/>
-        </a:xfrm>
-      </p:grpSpPr>
+      <p:grpSpPr/>
       <p:sp>
         <p:nvSpPr>
           <p:cNvPr id="2" name="Title 1"/>
@@ -23321,7 +22865,6 @@
           <a:lstStyle/>
           <a:p>
             <a:pPr algn="ctr"/>
-            <a:endParaRPr/>
           </a:p>
         </p:txBody>
       </p:sp>
@@ -23508,7 +23051,7 @@
           </a:fontRef>
         </p:style>
         <p:txBody>
-          <a:bodyPr wrap="square" lIns="45720" tIns="18288" rIns="45720" bIns="18288" rtlCol="0" anchor="ctr"/>
+          <a:bodyPr rtlCol="0" anchor="ctr" wrap="square" lIns="45720" rIns="45720" tIns="18288" bIns="18288"/>
           <a:lstStyle/>
           <a:p>
             <a:pPr algn="ctr">
@@ -23576,7 +23119,7 @@
           </a:fontRef>
         </p:style>
         <p:txBody>
-          <a:bodyPr wrap="square" lIns="45720" tIns="18288" rIns="45720" bIns="18288" rtlCol="0" anchor="ctr"/>
+          <a:bodyPr rtlCol="0" anchor="ctr" wrap="square" lIns="45720" rIns="45720" tIns="18288" bIns="18288"/>
           <a:lstStyle/>
           <a:p>
             <a:pPr algn="ctr">
@@ -23644,7 +23187,7 @@
           </a:fontRef>
         </p:style>
         <p:txBody>
-          <a:bodyPr wrap="square" lIns="45720" tIns="18288" rIns="45720" bIns="18288" rtlCol="0" anchor="ctr"/>
+          <a:bodyPr rtlCol="0" anchor="ctr" wrap="square" lIns="45720" rIns="45720" tIns="18288" bIns="18288"/>
           <a:lstStyle/>
           <a:p>
             <a:pPr algn="ctr">
@@ -23712,7 +23255,7 @@
           </a:fontRef>
         </p:style>
         <p:txBody>
-          <a:bodyPr wrap="square" lIns="45720" tIns="18288" rIns="45720" bIns="18288" rtlCol="0" anchor="ctr"/>
+          <a:bodyPr rtlCol="0" anchor="ctr" wrap="square" lIns="45720" rIns="45720" tIns="18288" bIns="18288"/>
           <a:lstStyle/>
           <a:p>
             <a:pPr algn="ctr">
@@ -26846,7 +26389,7 @@
           </a:fontRef>
         </p:style>
         <p:txBody>
-          <a:bodyPr wrap="square" lIns="45720" tIns="18288" rIns="45720" bIns="18288" rtlCol="0" anchor="ctr"/>
+          <a:bodyPr rtlCol="0" anchor="ctr" wrap="square" lIns="45720" rIns="45720" tIns="18288" bIns="18288"/>
           <a:lstStyle/>
           <a:p>
             <a:pPr algn="ctr">
@@ -26884,7 +26427,7 @@
 </file>
 
 <file path=ppt/slides/slide7.xml><?xml version="1.0" encoding="utf-8"?>
-<p:sld xmlns:a="http://schemas.openxmlformats.org/drawingml/2006/main" xmlns:r="http://schemas.openxmlformats.org/officeDocument/2006/relationships" xmlns:p="http://schemas.openxmlformats.org/presentationml/2006/main">
+<p:sld xmlns:a="http://schemas.openxmlformats.org/drawingml/2006/main" xmlns:p="http://schemas.openxmlformats.org/presentationml/2006/main" xmlns:r="http://schemas.openxmlformats.org/officeDocument/2006/relationships">
   <p:cSld>
     <p:spTree>
       <p:nvGrpSpPr>
@@ -26892,14 +26435,7 @@
         <p:cNvGrpSpPr/>
         <p:nvPr/>
       </p:nvGrpSpPr>
-      <p:grpSpPr>
-        <a:xfrm>
-          <a:off x="0" y="0"/>
-          <a:ext cx="0" cy="0"/>
-          <a:chOff x="0" y="0"/>
-          <a:chExt cx="0" cy="0"/>
-        </a:xfrm>
-      </p:grpSpPr>
+      <p:grpSpPr/>
       <p:sp>
         <p:nvSpPr>
           <p:cNvPr id="2" name="Title 1"/>
@@ -26987,7 +26523,6 @@
           <a:lstStyle/>
           <a:p>
             <a:pPr algn="ctr"/>
-            <a:endParaRPr/>
           </a:p>
         </p:txBody>
       </p:sp>
@@ -27176,7 +26711,7 @@
           </a:fontRef>
         </p:style>
         <p:txBody>
-          <a:bodyPr wrap="square" lIns="146304" tIns="91440" bIns="73152" rtlCol="0" anchor="t"/>
+          <a:bodyPr rtlCol="0" anchor="t" wrap="square" lIns="146304" tIns="91440" bIns="73152"/>
           <a:lstStyle/>
           <a:p>
             <a:pPr algn="l">
@@ -27191,31 +26726,13 @@
               </a:defRPr>
             </a:pPr>
             <a:r>
-              <a:rPr sz="2000" dirty="0">
+              <a:rPr sz="2000">
                 <a:solidFill>
                   <a:srgbClr val="222222"/>
                 </a:solidFill>
                 <a:latin typeface="Consolas"/>
               </a:rPr>
-              <a:t>unsigned long </a:t>
-            </a:r>
-            <a:r>
-              <a:rPr sz="2000" dirty="0" err="1">
-                <a:solidFill>
-                  <a:srgbClr val="222222"/>
-                </a:solidFill>
-                <a:latin typeface="Consolas"/>
-              </a:rPr>
-              <a:t>lastBlink</a:t>
-            </a:r>
-            <a:r>
-              <a:rPr sz="2000" dirty="0">
-                <a:solidFill>
-                  <a:srgbClr val="222222"/>
-                </a:solidFill>
-                <a:latin typeface="Consolas"/>
-              </a:rPr>
-              <a:t> = 0;</a:t>
+              <a:t>unsigned long lastBlink = 0;</a:t>
             </a:r>
           </a:p>
           <a:p>
@@ -27230,12 +26747,15 @@
                 <a:latin typeface="Consolas"/>
               </a:defRPr>
             </a:pPr>
-            <a:endParaRPr lang="en-US" sz="2000" dirty="0">
-              <a:solidFill>
-                <a:srgbClr val="222222"/>
-              </a:solidFill>
-              <a:latin typeface="Consolas"/>
-            </a:endParaRPr>
+            <a:r>
+              <a:rPr sz="2000">
+                <a:solidFill>
+                  <a:srgbClr val="222222"/>
+                </a:solidFill>
+                <a:latin typeface="Consolas"/>
+              </a:rPr>
+              <a:t>const unsigned long INTERVAL = 1000;</a:t>
+            </a:r>
           </a:p>
           <a:p>
             <a:pPr algn="l">
@@ -27250,13 +26770,13 @@
               </a:defRPr>
             </a:pPr>
             <a:r>
-              <a:rPr lang="en-US" sz="2000" dirty="0">
+              <a:rPr sz="2000">
                 <a:solidFill>
                   <a:srgbClr val="222222"/>
                 </a:solidFill>
                 <a:latin typeface="Consolas"/>
               </a:rPr>
-              <a:t>INTERVAL = 1000;</a:t>
+              <a:t> </a:t>
             </a:r>
           </a:p>
           <a:p>
@@ -27271,12 +26791,15 @@
                 <a:latin typeface="Consolas"/>
               </a:defRPr>
             </a:pPr>
-            <a:endParaRPr sz="2000" dirty="0">
-              <a:solidFill>
-                <a:srgbClr val="222222"/>
-              </a:solidFill>
-              <a:latin typeface="Consolas"/>
-            </a:endParaRPr>
+            <a:r>
+              <a:rPr sz="2000" b="1">
+                <a:solidFill>
+                  <a:srgbClr val="0E7C86"/>
+                </a:solidFill>
+                <a:latin typeface="Consolas"/>
+              </a:rPr>
+              <a:t>void loop() {</a:t>
+            </a:r>
           </a:p>
           <a:p>
             <a:pPr algn="l">
@@ -27291,13 +26814,13 @@
               </a:defRPr>
             </a:pPr>
             <a:r>
-              <a:rPr sz="2000" dirty="0">
-                <a:solidFill>
-                  <a:srgbClr val="222222"/>
+              <a:rPr sz="2000" b="1">
+                <a:solidFill>
+                  <a:srgbClr val="0E7C86"/>
                 </a:solidFill>
                 <a:latin typeface="Consolas"/>
               </a:rPr>
-              <a:t>void loop() {</a:t>
+              <a:t>  if (millis() - lastBlink &gt;= INTERVAL) {</a:t>
             </a:r>
           </a:p>
           <a:p>
@@ -27313,49 +26836,13 @@
               </a:defRPr>
             </a:pPr>
             <a:r>
-              <a:rPr sz="2000" b="1" dirty="0">
-                <a:solidFill>
-                  <a:srgbClr val="0E7C86"/>
+              <a:rPr sz="2000">
+                <a:solidFill>
+                  <a:srgbClr val="222222"/>
                 </a:solidFill>
                 <a:latin typeface="Consolas"/>
               </a:rPr>
-              <a:t>  if (</a:t>
-            </a:r>
-            <a:r>
-              <a:rPr sz="2000" b="1" dirty="0" err="1">
-                <a:solidFill>
-                  <a:srgbClr val="0E7C86"/>
-                </a:solidFill>
-                <a:latin typeface="Consolas"/>
-              </a:rPr>
-              <a:t>millis</a:t>
-            </a:r>
-            <a:r>
-              <a:rPr sz="2000" b="1" dirty="0">
-                <a:solidFill>
-                  <a:srgbClr val="0E7C86"/>
-                </a:solidFill>
-                <a:latin typeface="Consolas"/>
-              </a:rPr>
-              <a:t>() - </a:t>
-            </a:r>
-            <a:r>
-              <a:rPr sz="2000" b="1" dirty="0" err="1">
-                <a:solidFill>
-                  <a:srgbClr val="0E7C86"/>
-                </a:solidFill>
-                <a:latin typeface="Consolas"/>
-              </a:rPr>
-              <a:t>lastBlink</a:t>
-            </a:r>
-            <a:r>
-              <a:rPr sz="2000" b="1" dirty="0">
-                <a:solidFill>
-                  <a:srgbClr val="0E7C86"/>
-                </a:solidFill>
-                <a:latin typeface="Consolas"/>
-              </a:rPr>
-              <a:t> &gt;= INTERVAL) {</a:t>
+              <a:t>    lastBlink = millis();</a:t>
             </a:r>
           </a:p>
           <a:p>
@@ -27371,49 +26858,13 @@
               </a:defRPr>
             </a:pPr>
             <a:r>
-              <a:rPr sz="2000" b="1" dirty="0">
-                <a:solidFill>
-                  <a:srgbClr val="0E7C86"/>
+              <a:rPr sz="2000">
+                <a:solidFill>
+                  <a:srgbClr val="666666"/>
                 </a:solidFill>
                 <a:latin typeface="Consolas"/>
               </a:rPr>
-              <a:t>    </a:t>
-            </a:r>
-            <a:r>
-              <a:rPr sz="2000" b="1" dirty="0" err="1">
-                <a:solidFill>
-                  <a:srgbClr val="0E7C86"/>
-                </a:solidFill>
-                <a:latin typeface="Consolas"/>
-              </a:rPr>
-              <a:t>lastBlink</a:t>
-            </a:r>
-            <a:r>
-              <a:rPr sz="2000" b="1" dirty="0">
-                <a:solidFill>
-                  <a:srgbClr val="0E7C86"/>
-                </a:solidFill>
-                <a:latin typeface="Consolas"/>
-              </a:rPr>
-              <a:t> = </a:t>
-            </a:r>
-            <a:r>
-              <a:rPr sz="2000" b="1" dirty="0" err="1">
-                <a:solidFill>
-                  <a:srgbClr val="0E7C86"/>
-                </a:solidFill>
-                <a:latin typeface="Consolas"/>
-              </a:rPr>
-              <a:t>millis</a:t>
-            </a:r>
-            <a:r>
-              <a:rPr sz="2000" b="1" dirty="0">
-                <a:solidFill>
-                  <a:srgbClr val="0E7C86"/>
-                </a:solidFill>
-                <a:latin typeface="Consolas"/>
-              </a:rPr>
-              <a:t>();</a:t>
+              <a:t>    // ...do the thing...</a:t>
             </a:r>
           </a:p>
           <a:p>
@@ -27429,13 +26880,13 @@
               </a:defRPr>
             </a:pPr>
             <a:r>
-              <a:rPr sz="2000" dirty="0">
-                <a:solidFill>
-                  <a:srgbClr val="666666"/>
+              <a:rPr sz="2000">
+                <a:solidFill>
+                  <a:srgbClr val="222222"/>
                 </a:solidFill>
                 <a:latin typeface="Consolas"/>
               </a:rPr>
-              <a:t>    // ...do the thing...</a:t>
+              <a:t>  }</a:t>
             </a:r>
           </a:p>
           <a:p>
@@ -27451,13 +26902,13 @@
               </a:defRPr>
             </a:pPr>
             <a:r>
-              <a:rPr sz="2000" dirty="0">
+              <a:rPr sz="2000">
                 <a:solidFill>
                   <a:srgbClr val="222222"/>
                 </a:solidFill>
                 <a:latin typeface="Consolas"/>
               </a:rPr>
-              <a:t>  }</a:t>
+              <a:t> </a:t>
             </a:r>
           </a:p>
           <a:p>
@@ -27473,13 +26924,13 @@
               </a:defRPr>
             </a:pPr>
             <a:r>
-              <a:rPr sz="2000" dirty="0">
-                <a:solidFill>
-                  <a:srgbClr val="222222"/>
+              <a:rPr sz="2000">
+                <a:solidFill>
+                  <a:srgbClr val="666666"/>
                 </a:solidFill>
                 <a:latin typeface="Consolas"/>
               </a:rPr>
-              <a:t> </a:t>
+              <a:t>  // ...and everything else keeps running...</a:t>
             </a:r>
           </a:p>
           <a:p>
@@ -27495,29 +26946,7 @@
               </a:defRPr>
             </a:pPr>
             <a:r>
-              <a:rPr sz="2000" dirty="0">
-                <a:solidFill>
-                  <a:srgbClr val="666666"/>
-                </a:solidFill>
-                <a:latin typeface="Consolas"/>
-              </a:rPr>
-              <a:t>  // ...and everything else keeps running...</a:t>
-            </a:r>
-          </a:p>
-          <a:p>
-            <a:pPr algn="l">
-              <a:lnSpc>
-                <a:spcPct val="100000"/>
-              </a:lnSpc>
-              <a:spcAft>
-                <a:spcPts val="0"/>
-              </a:spcAft>
-              <a:defRPr sz="2000">
-                <a:latin typeface="Consolas"/>
-              </a:defRPr>
-            </a:pPr>
-            <a:r>
-              <a:rPr sz="2000" dirty="0">
+              <a:rPr sz="2000">
                 <a:solidFill>
                   <a:srgbClr val="222222"/>
                 </a:solidFill>
@@ -27685,7 +27114,7 @@
 </file>
 
 <file path=ppt/slides/slide8.xml><?xml version="1.0" encoding="utf-8"?>
-<p:sld xmlns:a="http://schemas.openxmlformats.org/drawingml/2006/main" xmlns:r="http://schemas.openxmlformats.org/officeDocument/2006/relationships" xmlns:p="http://schemas.openxmlformats.org/presentationml/2006/main">
+<p:sld xmlns:a="http://schemas.openxmlformats.org/drawingml/2006/main" xmlns:p="http://schemas.openxmlformats.org/presentationml/2006/main" xmlns:r="http://schemas.openxmlformats.org/officeDocument/2006/relationships">
   <p:cSld>
     <p:spTree>
       <p:nvGrpSpPr>
@@ -27693,14 +27122,7 @@
         <p:cNvGrpSpPr/>
         <p:nvPr/>
       </p:nvGrpSpPr>
-      <p:grpSpPr>
-        <a:xfrm>
-          <a:off x="0" y="0"/>
-          <a:ext cx="0" cy="0"/>
-          <a:chOff x="0" y="0"/>
-          <a:chExt cx="0" cy="0"/>
-        </a:xfrm>
-      </p:grpSpPr>
+      <p:grpSpPr/>
       <p:sp>
         <p:nvSpPr>
           <p:cNvPr id="2" name="TextBox 1"/>
@@ -27838,7 +27260,6 @@
           <a:lstStyle/>
           <a:p>
             <a:pPr algn="ctr"/>
-            <a:endParaRPr/>
           </a:p>
         </p:txBody>
       </p:sp>
@@ -27979,7 +27400,7 @@
           </a:fontRef>
         </p:style>
         <p:txBody>
-          <a:bodyPr wrap="square" lIns="73152" rIns="73152" rtlCol="0" anchor="ctr"/>
+          <a:bodyPr rtlCol="0" anchor="ctr" wrap="square" lIns="73152" rIns="73152"/>
           <a:lstStyle/>
           <a:p>
             <a:pPr algn="ctr">
@@ -28097,7 +27518,7 @@
           </a:fontRef>
         </p:style>
         <p:txBody>
-          <a:bodyPr wrap="square" lIns="73152" rIns="73152" rtlCol="0" anchor="ctr"/>
+          <a:bodyPr rtlCol="0" anchor="ctr" wrap="square" lIns="73152" rIns="73152"/>
           <a:lstStyle/>
           <a:p>
             <a:pPr algn="ctr">
@@ -28215,7 +27636,7 @@
           </a:fontRef>
         </p:style>
         <p:txBody>
-          <a:bodyPr wrap="square" lIns="73152" rIns="73152" rtlCol="0" anchor="ctr"/>
+          <a:bodyPr rtlCol="0" anchor="ctr" wrap="square" lIns="73152" rIns="73152"/>
           <a:lstStyle/>
           <a:p>
             <a:pPr algn="ctr">
@@ -28285,7 +27706,7 @@
           </a:fontRef>
         </p:style>
         <p:txBody>
-          <a:bodyPr wrap="square" lIns="73152" rIns="73152" rtlCol="0" anchor="ctr"/>
+          <a:bodyPr rtlCol="0" anchor="ctr" wrap="square" lIns="73152" rIns="73152"/>
           <a:lstStyle/>
           <a:p>
             <a:pPr algn="ctr">
@@ -28355,7 +27776,7 @@
           </a:fontRef>
         </p:style>
         <p:txBody>
-          <a:bodyPr wrap="square" lIns="73152" rIns="73152" rtlCol="0" anchor="ctr"/>
+          <a:bodyPr rtlCol="0" anchor="ctr" wrap="square" lIns="73152" rIns="73152"/>
           <a:lstStyle/>
           <a:p>
             <a:pPr algn="ctr">
@@ -28393,7 +27814,7 @@
 </file>
 
 <file path=ppt/slides/slide9.xml><?xml version="1.0" encoding="utf-8"?>
-<p:sld xmlns:a="http://schemas.openxmlformats.org/drawingml/2006/main" xmlns:r="http://schemas.openxmlformats.org/officeDocument/2006/relationships" xmlns:p="http://schemas.openxmlformats.org/presentationml/2006/main">
+<p:sld xmlns:a="http://schemas.openxmlformats.org/drawingml/2006/main" xmlns:p="http://schemas.openxmlformats.org/presentationml/2006/main" xmlns:r="http://schemas.openxmlformats.org/officeDocument/2006/relationships">
   <p:cSld>
     <p:spTree>
       <p:nvGrpSpPr>
@@ -28401,14 +27822,7 @@
         <p:cNvGrpSpPr/>
         <p:nvPr/>
       </p:nvGrpSpPr>
-      <p:grpSpPr>
-        <a:xfrm>
-          <a:off x="0" y="0"/>
-          <a:ext cx="0" cy="0"/>
-          <a:chOff x="0" y="0"/>
-          <a:chExt cx="0" cy="0"/>
-        </a:xfrm>
-      </p:grpSpPr>
+      <p:grpSpPr/>
       <p:sp>
         <p:nvSpPr>
           <p:cNvPr id="2" name="Title 1"/>
@@ -28496,7 +27910,6 @@
           <a:lstStyle/>
           <a:p>
             <a:pPr algn="ctr"/>
-            <a:endParaRPr/>
           </a:p>
         </p:txBody>
       </p:sp>
@@ -28635,7 +28048,7 @@
           </a:fontRef>
         </p:style>
         <p:txBody>
-          <a:bodyPr wrap="square" lIns="182880" rtlCol="0" anchor="ctr"/>
+          <a:bodyPr rtlCol="0" anchor="ctr" wrap="square" lIns="182880"/>
           <a:lstStyle/>
           <a:p>
             <a:pPr algn="l"/>
@@ -29398,44 +28811,44 @@
         <a:sysClr val="window" lastClr="FFFFFF"/>
       </a:lt1>
       <a:dk2>
-        <a:srgbClr val="0E2841"/>
+        <a:srgbClr val="1F497D"/>
       </a:dk2>
       <a:lt2>
-        <a:srgbClr val="E8E8E8"/>
+        <a:srgbClr val="EEECE1"/>
       </a:lt2>
       <a:accent1>
-        <a:srgbClr val="156082"/>
+        <a:srgbClr val="4F81BD"/>
       </a:accent1>
       <a:accent2>
-        <a:srgbClr val="E97132"/>
+        <a:srgbClr val="C0504D"/>
       </a:accent2>
       <a:accent3>
-        <a:srgbClr val="196B24"/>
+        <a:srgbClr val="9BBB59"/>
       </a:accent3>
       <a:accent4>
-        <a:srgbClr val="0F9ED5"/>
+        <a:srgbClr val="8064A2"/>
       </a:accent4>
       <a:accent5>
-        <a:srgbClr val="A02B93"/>
+        <a:srgbClr val="4BACC6"/>
       </a:accent5>
       <a:accent6>
-        <a:srgbClr val="4EA72E"/>
+        <a:srgbClr val="F79646"/>
       </a:accent6>
       <a:hlink>
-        <a:srgbClr val="467886"/>
+        <a:srgbClr val="0000FF"/>
       </a:hlink>
       <a:folHlink>
-        <a:srgbClr val="96607D"/>
+        <a:srgbClr val="800080"/>
       </a:folHlink>
     </a:clrScheme>
     <a:fontScheme name="Office">
       <a:majorFont>
-        <a:latin typeface="Aptos Display" panose="02110004020202020204"/>
+        <a:latin typeface="Calibri"/>
         <a:ea typeface=""/>
         <a:cs typeface=""/>
-        <a:font script="Jpan" typeface="游ゴシック Light"/>
+        <a:font script="Jpan" typeface="ＭＳ Ｐゴシック"/>
         <a:font script="Hang" typeface="맑은 고딕"/>
-        <a:font script="Hans" typeface="等线 Light"/>
+        <a:font script="Hans" typeface="宋体"/>
         <a:font script="Hant" typeface="新細明體"/>
         <a:font script="Arab" typeface="Times New Roman"/>
         <a:font script="Hebr" typeface="Times New Roman"/>
@@ -29463,31 +28876,14 @@
         <a:font script="Viet" typeface="Times New Roman"/>
         <a:font script="Uigh" typeface="Microsoft Uighur"/>
         <a:font script="Geor" typeface="Sylfaen"/>
-        <a:font script="Armn" typeface="Arial"/>
-        <a:font script="Bugi" typeface="Leelawadee UI"/>
-        <a:font script="Bopo" typeface="Microsoft JhengHei"/>
-        <a:font script="Java" typeface="Javanese Text"/>
-        <a:font script="Lisu" typeface="Segoe UI"/>
-        <a:font script="Mymr" typeface="Myanmar Text"/>
-        <a:font script="Nkoo" typeface="Ebrima"/>
-        <a:font script="Olck" typeface="Nirmala UI"/>
-        <a:font script="Osma" typeface="Ebrima"/>
-        <a:font script="Phag" typeface="Phagspa"/>
-        <a:font script="Syrn" typeface="Estrangelo Edessa"/>
-        <a:font script="Syrj" typeface="Estrangelo Edessa"/>
-        <a:font script="Syre" typeface="Estrangelo Edessa"/>
-        <a:font script="Sora" typeface="Nirmala UI"/>
-        <a:font script="Tale" typeface="Microsoft Tai Le"/>
-        <a:font script="Talu" typeface="Microsoft New Tai Lue"/>
-        <a:font script="Tfng" typeface="Ebrima"/>
       </a:majorFont>
       <a:minorFont>
-        <a:latin typeface="Aptos" panose="02110004020202020204"/>
+        <a:latin typeface="Calibri"/>
         <a:ea typeface=""/>
         <a:cs typeface=""/>
-        <a:font script="Jpan" typeface="游ゴシック"/>
+        <a:font script="Jpan" typeface="ＭＳ Ｐゴシック"/>
         <a:font script="Hang" typeface="맑은 고딕"/>
-        <a:font script="Hans" typeface="等线"/>
+        <a:font script="Hans" typeface="宋体"/>
         <a:font script="Hant" typeface="新細明體"/>
         <a:font script="Arab" typeface="Arial"/>
         <a:font script="Hebr" typeface="Arial"/>
@@ -29515,23 +28911,6 @@
         <a:font script="Viet" typeface="Arial"/>
         <a:font script="Uigh" typeface="Microsoft Uighur"/>
         <a:font script="Geor" typeface="Sylfaen"/>
-        <a:font script="Armn" typeface="Arial"/>
-        <a:font script="Bugi" typeface="Leelawadee UI"/>
-        <a:font script="Bopo" typeface="Microsoft JhengHei"/>
-        <a:font script="Java" typeface="Javanese Text"/>
-        <a:font script="Lisu" typeface="Segoe UI"/>
-        <a:font script="Mymr" typeface="Myanmar Text"/>
-        <a:font script="Nkoo" typeface="Ebrima"/>
-        <a:font script="Olck" typeface="Nirmala UI"/>
-        <a:font script="Osma" typeface="Ebrima"/>
-        <a:font script="Phag" typeface="Phagspa"/>
-        <a:font script="Syrn" typeface="Estrangelo Edessa"/>
-        <a:font script="Syrj" typeface="Estrangelo Edessa"/>
-        <a:font script="Syre" typeface="Estrangelo Edessa"/>
-        <a:font script="Sora" typeface="Nirmala UI"/>
-        <a:font script="Tale" typeface="Microsoft Tai Le"/>
-        <a:font script="Talu" typeface="Microsoft New Tai Lue"/>
-        <a:font script="Tfng" typeface="Ebrima"/>
       </a:minorFont>
     </a:fontScheme>
     <a:fmtScheme name="Office">
@@ -29543,136 +28922,180 @@
           <a:gsLst>
             <a:gs pos="0">
               <a:schemeClr val="phClr">
-                <a:lumMod val="110000"/>
-                <a:satMod val="105000"/>
-                <a:tint val="67000"/>
+                <a:tint val="50000"/>
+                <a:satMod val="300000"/>
               </a:schemeClr>
             </a:gs>
-            <a:gs pos="50000">
+            <a:gs pos="35000">
               <a:schemeClr val="phClr">
-                <a:lumMod val="105000"/>
-                <a:satMod val="103000"/>
-                <a:tint val="73000"/>
+                <a:tint val="37000"/>
+                <a:satMod val="300000"/>
               </a:schemeClr>
             </a:gs>
             <a:gs pos="100000">
               <a:schemeClr val="phClr">
-                <a:lumMod val="105000"/>
-                <a:satMod val="109000"/>
-                <a:tint val="81000"/>
+                <a:tint val="15000"/>
+                <a:satMod val="350000"/>
               </a:schemeClr>
             </a:gs>
           </a:gsLst>
-          <a:lin ang="5400000" scaled="0"/>
+          <a:lin ang="16200000" scaled="1"/>
         </a:gradFill>
         <a:gradFill rotWithShape="1">
           <a:gsLst>
             <a:gs pos="0">
               <a:schemeClr val="phClr">
-                <a:satMod val="103000"/>
-                <a:lumMod val="102000"/>
-                <a:tint val="94000"/>
-              </a:schemeClr>
-            </a:gs>
-            <a:gs pos="50000">
-              <a:schemeClr val="phClr">
-                <a:satMod val="110000"/>
-                <a:lumMod val="100000"/>
+                <a:tint val="100000"/>
                 <a:shade val="100000"/>
+                <a:satMod val="130000"/>
               </a:schemeClr>
             </a:gs>
             <a:gs pos="100000">
               <a:schemeClr val="phClr">
-                <a:lumMod val="99000"/>
-                <a:satMod val="120000"/>
-                <a:shade val="78000"/>
+                <a:tint val="50000"/>
+                <a:shade val="100000"/>
+                <a:satMod val="350000"/>
               </a:schemeClr>
             </a:gs>
           </a:gsLst>
-          <a:lin ang="5400000" scaled="0"/>
+          <a:lin ang="16200000" scaled="0"/>
         </a:gradFill>
       </a:fillStyleLst>
       <a:lnStyleLst>
-        <a:ln w="12700" cap="flat" cmpd="sng" algn="ctr">
+        <a:ln w="9525" cap="flat" cmpd="sng" algn="ctr">
           <a:solidFill>
-            <a:schemeClr val="phClr"/>
+            <a:schemeClr val="phClr">
+              <a:shade val="95000"/>
+              <a:satMod val="105000"/>
+            </a:schemeClr>
           </a:solidFill>
           <a:prstDash val="solid"/>
-          <a:miter lim="800000"/>
-        </a:ln>
-        <a:ln w="19050" cap="flat" cmpd="sng" algn="ctr">
-          <a:solidFill>
-            <a:schemeClr val="phClr"/>
-          </a:solidFill>
-          <a:prstDash val="solid"/>
-          <a:miter lim="800000"/>
         </a:ln>
         <a:ln w="25400" cap="flat" cmpd="sng" algn="ctr">
           <a:solidFill>
             <a:schemeClr val="phClr"/>
           </a:solidFill>
           <a:prstDash val="solid"/>
-          <a:miter lim="800000"/>
+        </a:ln>
+        <a:ln w="38100" cap="flat" cmpd="sng" algn="ctr">
+          <a:solidFill>
+            <a:schemeClr val="phClr"/>
+          </a:solidFill>
+          <a:prstDash val="solid"/>
         </a:ln>
       </a:lnStyleLst>
       <a:effectStyleLst>
         <a:effectStyle>
-          <a:effectLst/>
-        </a:effectStyle>
-        <a:effectStyle>
-          <a:effectLst/>
+          <a:effectLst>
+            <a:outerShdw blurRad="40000" dist="20000" dir="5400000" rotWithShape="0">
+              <a:srgbClr val="000000">
+                <a:alpha val="38000"/>
+              </a:srgbClr>
+            </a:outerShdw>
+          </a:effectLst>
         </a:effectStyle>
         <a:effectStyle>
           <a:effectLst>
-            <a:outerShdw blurRad="57150" dist="19050" dir="5400000" algn="ctr" rotWithShape="0">
+            <a:outerShdw blurRad="40000" dist="23000" dir="5400000" rotWithShape="0">
               <a:srgbClr val="000000">
-                <a:alpha val="63000"/>
+                <a:alpha val="35000"/>
               </a:srgbClr>
             </a:outerShdw>
           </a:effectLst>
+        </a:effectStyle>
+        <a:effectStyle>
+          <a:effectLst>
+            <a:outerShdw blurRad="40000" dist="23000" dir="5400000" rotWithShape="0">
+              <a:srgbClr val="000000">
+                <a:alpha val="35000"/>
+              </a:srgbClr>
+            </a:outerShdw>
+          </a:effectLst>
+          <a:scene3d>
+            <a:camera prst="orthographicFront">
+              <a:rot lat="0" lon="0" rev="0"/>
+            </a:camera>
+            <a:lightRig rig="threePt" dir="t">
+              <a:rot lat="0" lon="0" rev="1200000"/>
+            </a:lightRig>
+          </a:scene3d>
+          <a:sp3d>
+            <a:bevelT w="63500" h="25400"/>
+          </a:sp3d>
         </a:effectStyle>
       </a:effectStyleLst>
       <a:bgFillStyleLst>
         <a:solidFill>
           <a:schemeClr val="phClr"/>
         </a:solidFill>
-        <a:solidFill>
-          <a:schemeClr val="phClr">
-            <a:tint val="95000"/>
-            <a:satMod val="170000"/>
-          </a:schemeClr>
-        </a:solidFill>
         <a:gradFill rotWithShape="1">
           <a:gsLst>
             <a:gs pos="0">
               <a:schemeClr val="phClr">
-                <a:tint val="93000"/>
-                <a:satMod val="150000"/>
-                <a:shade val="98000"/>
-                <a:lumMod val="102000"/>
+                <a:tint val="40000"/>
+                <a:satMod val="350000"/>
               </a:schemeClr>
             </a:gs>
-            <a:gs pos="50000">
+            <a:gs pos="40000">
               <a:schemeClr val="phClr">
-                <a:tint val="98000"/>
-                <a:satMod val="130000"/>
-                <a:shade val="90000"/>
-                <a:lumMod val="103000"/>
+                <a:tint val="45000"/>
+                <a:shade val="99000"/>
+                <a:satMod val="350000"/>
               </a:schemeClr>
             </a:gs>
             <a:gs pos="100000">
               <a:schemeClr val="phClr">
-                <a:shade val="63000"/>
-                <a:satMod val="120000"/>
+                <a:shade val="20000"/>
+                <a:satMod val="255000"/>
               </a:schemeClr>
             </a:gs>
           </a:gsLst>
-          <a:lin ang="5400000" scaled="0"/>
+          <a:path path="circle">
+            <a:fillToRect l="50000" t="-80000" r="50000" b="180000"/>
+          </a:path>
+        </a:gradFill>
+        <a:gradFill rotWithShape="1">
+          <a:gsLst>
+            <a:gs pos="0">
+              <a:schemeClr val="phClr">
+                <a:tint val="80000"/>
+                <a:satMod val="300000"/>
+              </a:schemeClr>
+            </a:gs>
+            <a:gs pos="100000">
+              <a:schemeClr val="phClr">
+                <a:shade val="30000"/>
+                <a:satMod val="200000"/>
+              </a:schemeClr>
+            </a:gs>
+          </a:gsLst>
+          <a:path path="circle">
+            <a:fillToRect l="50000" t="50000" r="50000" b="50000"/>
+          </a:path>
         </a:gradFill>
       </a:bgFillStyleLst>
     </a:fmtScheme>
   </a:themeElements>
   <a:objectDefaults>
+    <a:spDef>
+      <a:spPr/>
+      <a:bodyPr/>
+      <a:lstStyle/>
+      <a:style>
+        <a:lnRef idx="1">
+          <a:schemeClr val="accent1"/>
+        </a:lnRef>
+        <a:fillRef idx="3">
+          <a:schemeClr val="accent1"/>
+        </a:fillRef>
+        <a:effectRef idx="2">
+          <a:schemeClr val="accent1"/>
+        </a:effectRef>
+        <a:fontRef idx="minor">
+          <a:schemeClr val="lt1"/>
+        </a:fontRef>
+      </a:style>
+    </a:spDef>
     <a:lnDef>
       <a:spPr/>
       <a:bodyPr/>
@@ -29694,10 +29117,5 @@
     </a:lnDef>
   </a:objectDefaults>
   <a:extraClrSchemeLst/>
-  <a:extLst>
-    <a:ext uri="{05A4C25C-085E-4340-85A3-A5531E510DB2}">
-      <thm15:themeFamily xmlns:thm15="http://schemas.microsoft.com/office/thememl/2012/main" name="Office Theme" id="{2E142A2C-CD16-42D6-873A-C26D2A0506FA}" vid="{1BDDFF52-6CD6-40A5-AB3C-68EB2F1E4D0A}"/>
-    </a:ext>
-  </a:extLst>
 </a:theme>
 </file>
--- a/ground-vehicle/docs/courses/beginner-ps3/l5_maneuvers_with_lights.pptx
+++ b/ground-vehicle/docs/courses/beginner-ps3/l5_maneuvers_with_lights.pptx
@@ -2314,7 +2314,23 @@
               <a:rPr sz="1200">
                 <a:latin typeface="Calibri"/>
               </a:rPr>
-              <a:t>The range finder and the servos are the two the kit already has parts for. Point that out - it is the difference between an idea and a plan.</a:t>
+              <a:t>The waypoint list and the servos are the two that need nothing bought. Point that out - it is the difference between an idea and a plan.</a:t>
+            </a:r>
+          </a:p>
+          <a:p>
+            <a:r>
+              <a:rPr sz="1200">
+                <a:latin typeface="Calibri"/>
+              </a:rPr>
+              <a:t>FOR YOU, NOT FOR THEM: all five of these are written out in full in src/projects/, one folder each, for both tracks. Each one is l5c_drive_with_lights plus the one thing, so you can put the two files side by side and the difference IS the project. Kevin asked for these in the 2026-09-08 review, and the reason was blunt: an instructor who cannot help a stuck student is not acceptable.</a:t>
+            </a:r>
+          </a:p>
+          <a:p>
+            <a:r>
+              <a:rPr sz="1200">
+                <a:latin typeface="Calibri"/>
+              </a:rPr>
+              <a:t>Do not hand them out. Read the one a student has picked before the session they start it in, and the questions they get stuck on will be the ones you have already met. The header of each file has a section called THE IDEA, which is the part worth understanding rather than the feature.</a:t>
             </a:r>
           </a:p>
           <a:p>
@@ -18865,7 +18881,7 @@
         <p:spPr>
           <a:xfrm>
             <a:off x="502920" y="1188720"/>
-            <a:ext cx="11185855" cy="3986784"/>
+            <a:ext cx="11185855" cy="3881628"/>
           </a:xfrm>
           <a:prstGeom prst="rect">
             <a:avLst/>
@@ -18885,15 +18901,15 @@
               <a:spcAft>
                 <a:spcPts val="600"/>
               </a:spcAft>
-              <a:defRPr sz="2000" b="0">
-                <a:solidFill>
-                  <a:srgbClr val="222222"/>
-                </a:solidFill>
-                <a:latin typeface="Calibri"/>
-              </a:defRPr>
-            </a:pPr>
-            <a:r>
-              <a:rPr sz="2000" b="0">
+              <a:defRPr sz="1900" b="0">
+                <a:solidFill>
+                  <a:srgbClr val="222222"/>
+                </a:solidFill>
+                <a:latin typeface="Calibri"/>
+              </a:defRPr>
+            </a:pPr>
+            <a:r>
+              <a:rPr sz="1900" b="0">
                 <a:solidFill>
                   <a:srgbClr val="222222"/>
                 </a:solidFill>
@@ -18910,15 +18926,15 @@
               <a:spcAft>
                 <a:spcPts val="600"/>
               </a:spcAft>
-              <a:defRPr sz="2000" b="0">
-                <a:solidFill>
-                  <a:srgbClr val="222222"/>
-                </a:solidFill>
-                <a:latin typeface="Calibri"/>
-              </a:defRPr>
-            </a:pPr>
-            <a:r>
-              <a:rPr sz="2000" b="0">
+              <a:defRPr sz="1900" b="0">
+                <a:solidFill>
+                  <a:srgbClr val="222222"/>
+                </a:solidFill>
+                <a:latin typeface="Calibri"/>
+              </a:defRPr>
+            </a:pPr>
+            <a:r>
+              <a:rPr sz="1900" b="0">
                 <a:solidFill>
                   <a:srgbClr val="222222"/>
                 </a:solidFill>
@@ -18935,15 +18951,15 @@
               <a:spcAft>
                 <a:spcPts val="600"/>
               </a:spcAft>
-              <a:defRPr sz="2000" b="0">
-                <a:solidFill>
-                  <a:srgbClr val="222222"/>
-                </a:solidFill>
-                <a:latin typeface="Calibri"/>
-              </a:defRPr>
-            </a:pPr>
-            <a:r>
-              <a:rPr sz="2000" b="0">
+              <a:defRPr sz="1900" b="0">
+                <a:solidFill>
+                  <a:srgbClr val="222222"/>
+                </a:solidFill>
+                <a:latin typeface="Calibri"/>
+              </a:defRPr>
+            </a:pPr>
+            <a:r>
+              <a:rPr sz="1900" b="0">
                 <a:solidFill>
                   <a:srgbClr val="222222"/>
                 </a:solidFill>
@@ -18960,15 +18976,15 @@
               <a:spcAft>
                 <a:spcPts val="600"/>
               </a:spcAft>
-              <a:defRPr sz="2000" b="0">
-                <a:solidFill>
-                  <a:srgbClr val="222222"/>
-                </a:solidFill>
-                <a:latin typeface="Calibri"/>
-              </a:defRPr>
-            </a:pPr>
-            <a:r>
-              <a:rPr sz="2000" b="0">
+              <a:defRPr sz="1900" b="0">
+                <a:solidFill>
+                  <a:srgbClr val="222222"/>
+                </a:solidFill>
+                <a:latin typeface="Calibri"/>
+              </a:defRPr>
+            </a:pPr>
+            <a:r>
+              <a:rPr sz="1900" b="0">
                 <a:solidFill>
                   <a:srgbClr val="222222"/>
                 </a:solidFill>
@@ -18985,15 +19001,15 @@
               <a:spcAft>
                 <a:spcPts val="600"/>
               </a:spcAft>
-              <a:defRPr sz="2000" b="0">
-                <a:solidFill>
-                  <a:srgbClr val="222222"/>
-                </a:solidFill>
-                <a:latin typeface="Calibri"/>
-              </a:defRPr>
-            </a:pPr>
-            <a:r>
-              <a:rPr sz="2000" b="0">
+              <a:defRPr sz="1900" b="0">
+                <a:solidFill>
+                  <a:srgbClr val="222222"/>
+                </a:solidFill>
+                <a:latin typeface="Calibri"/>
+              </a:defRPr>
+            </a:pPr>
+            <a:r>
+              <a:rPr sz="1900" b="0">
                 <a:solidFill>
                   <a:srgbClr val="222222"/>
                 </a:solidFill>
@@ -19010,21 +19026,21 @@
               <a:spcAft>
                 <a:spcPts val="600"/>
               </a:spcAft>
-              <a:defRPr sz="2000" b="0">
-                <a:solidFill>
-                  <a:srgbClr val="222222"/>
-                </a:solidFill>
-                <a:latin typeface="Calibri"/>
-              </a:defRPr>
-            </a:pPr>
-            <a:r>
-              <a:rPr sz="2000" b="0">
-                <a:solidFill>
-                  <a:srgbClr val="222222"/>
-                </a:solidFill>
-                <a:latin typeface="Calibri"/>
-              </a:rPr>
-              <a:t>SERVO PAN AND TILT.  Two servos and a bracket, aimed with the right stick. The mount points are already there.</a:t>
+              <a:defRPr sz="1900" b="0">
+                <a:solidFill>
+                  <a:srgbClr val="222222"/>
+                </a:solidFill>
+                <a:latin typeface="Calibri"/>
+              </a:defRPr>
+            </a:pPr>
+            <a:r>
+              <a:rPr sz="1900" b="0">
+                <a:solidFill>
+                  <a:srgbClr val="222222"/>
+                </a:solidFill>
+                <a:latin typeface="Calibri"/>
+              </a:rPr>
+              <a:t>SERVO PAN AND TILT.  Two servos and a bracket, aimed with the right stick. The headers are already on the board.</a:t>
             </a:r>
           </a:p>
         </p:txBody>
@@ -19037,8 +19053,8 @@
         </p:nvSpPr>
         <p:spPr>
           <a:xfrm>
-            <a:off x="502920" y="5303520"/>
-            <a:ext cx="11185855" cy="960120"/>
+            <a:off x="502920" y="5198364"/>
+            <a:ext cx="11185855" cy="1065276"/>
           </a:xfrm>
           <a:prstGeom prst="roundRect">
             <a:avLst>
@@ -19090,7 +19106,7 @@
                 </a:solidFill>
                 <a:latin typeface="Calibri"/>
               </a:rPr>
-              <a:t>All five are within reach of what you learned in five lessons. The range finder and the servos are the two the kit already has parts for.</a:t>
+              <a:t>All five are within reach of what you learned in five lessons. Two of them need nothing bought at all: the list of moves needs no new parts, and the servo headers are already on the board.</a:t>
             </a:r>
           </a:p>
         </p:txBody>
